--- a/CampusFit_Project_Defence.pptx
+++ b/CampusFit_Project_Defence.pptx
@@ -9621,7 +9621,14 @@
                 <a:ea typeface="Times New Roman" panose="02020603050405020304" pitchFamily="18" charset="0"/>
                 <a:sym typeface="+mn-ea"/>
               </a:rPr>
-              <a:t>OUTLINE OF  PRESENTATION</a:t>
+              <a:t>OUTLINE OF  PRESENTATION
+Problem and motivation
+Research aim, questions and objectives
+Literature and theoretical framework
+Methodology and design
+System architecture and implementation
+Evaluation: verification, fidelity, performance, reward economy
+Findings, contributions and future work</a:t>
             </a:r>
             <a:endParaRPr lang="en-US" dirty="0"/>
           </a:p>
@@ -9802,7 +9809,22 @@
                 <a:latin typeface="Times New Roman" panose="02020603050405020304" pitchFamily="18" charset="0"/>
                 <a:cs typeface="Times New Roman" panose="02020603050405020304" pitchFamily="18" charset="0"/>
               </a:rPr>
-              <a:t>Introduction</a:t>
+              <a:t>Introduction
+University students are among the least active populations: nearly half
+inactive in sampled cohorts (Alkhawaldeh et al., 2024); 22.4%
+insufficiently active (Edelmann et al., 2022).
+Generic fitness apps count steps but do not engage the campus
+environment students actually live and move through (McCallum et al., 2018).
+Gamification increases physical activity, but heterogeneously, and with
+documented risks in purely competitive designs (Hamari et al., 2014;
+Mazeas et al., 2022; Nishi et al., 2024).
+Research gap: no reviewed system combines campus-anchored checkpoints,
+server-side auditable reward allocation, competition designed against
+leaderboard demotivation risks, and institutional governance in one
+instrumented artefact.
+Contribution: a gamified, QR/NFC checkpoint-based mobile application that
+turns the campus into a fitness instrument — participatory, auditable,
+and governable.</a:t>
             </a:r>
             <a:endParaRPr lang="en-US" dirty="0">
               <a:solidFill>
@@ -10007,7 +10029,22 @@
                 <a:latin typeface="Times New Roman" panose="02020603050405020304" pitchFamily="18" charset="0"/>
                 <a:cs typeface="Times New Roman" panose="02020603050405020304" pitchFamily="18" charset="0"/>
               </a:rPr>
-              <a:t>Aims and Objectives</a:t>
+              <a:t>Aims and Objectives
+Aim
+To design, develop and evaluate a gamified, checkpoint-based mobile
+fitness application that promotes sustained physical activity within a
+university campus.
+Specific objectives
+1. Analyse student fitness behaviour and determine system requirements
+2. Design a user-friendly mobile application interface
+3. Implement secure student registration and authentication
+4. Design and deploy QR/NFC-based checkpoint validation mechanisms
+5. Develop a dynamic points allocation algorithm
+6. Integrate leaderboard functionality for competitive ranking
+7. Implement a badge and achievement reward system
+8. Design an administrative dashboard for system management
+9. Test system usability, performance, and scalability
+10. Evaluate user engagement through pilot testing</a:t>
             </a:r>
             <a:endParaRPr lang="en-US" dirty="0">
               <a:solidFill>
@@ -10225,7 +10262,21 @@
                 <a:latin typeface="Times New Roman" panose="02020603050405020304" pitchFamily="18" charset="0"/>
                 <a:cs typeface="Times New Roman" panose="02020603050405020304" pitchFamily="18" charset="0"/>
               </a:rPr>
-              <a:t>Related Work</a:t>
+              <a:t>Related Work
+Self-determination theory — points as competence feedback, not
+compliance payment; relatedness through clubs and crews (Ryan &amp; Deci, 2000).
+Flow theory — four difficulty tiers (easy/medium/hard/epic) keep
+challenge matched to ability (Csikszentmihalyi, 1990).
+Sustainability — novelty decay is the dominant failure mode; campus
+content must be continuously administered (Althoff et al., 2016;
+Li et al., 2021).
+Location-based precedent — Pokémon Go reached least-active users most
+(Althoff et al., 2016), with decay later (Li et al., 2021).
+Attrition — drop-out is the norm in the first weeks; friction in the
+core action is the failure mode to design against (Linardon &amp;
+Fuller-Tyszkiewicz, 2020).
+Why not sensors alone — equity, privacy, attribution, and portable
+codebase rule out a sensor-first architecture (Section 2.9.1).</a:t>
             </a:r>
             <a:endParaRPr lang="en-US" dirty="0"/>
           </a:p>
@@ -10426,7 +10477,20 @@
                 <a:latin typeface="Times New Roman" panose="02020603050405020304" pitchFamily="18" charset="0"/>
                 <a:cs typeface="Times New Roman" panose="02020603050405020304" pitchFamily="18" charset="0"/>
               </a:rPr>
-              <a:t>Proposed Solution</a:t>
+              <a:t>Proposed Solution
+Architecture (three tiers)
+• Client: React 19 + TypeScript + Tailwind CSS, Progressive Web App
+  with precached shell.
+• Backend: Supabase / PostgreSQL with row-level security; all reward
+  authority in server-side database functions.
+• Physical: printed QR codes (NFC-ready); same code string as the
+  database checkpoint row.
+Refereed reward economy
+• scan_checkpoint() resolves the checkpoint, enforces an 8-hour
+  per-user cooldown, applies a difficulty multiplier, writes an
+  append-only audit ledger, and recomputes points / level / streak in
+  one transaction.
+• Multipliers: easy ×1.0, medium ×1.3, hard ×1.8, epic ×2.5.</a:t>
             </a:r>
             <a:endParaRPr lang="en-US" dirty="0">
               <a:solidFill>
@@ -10703,7 +10767,21 @@
                 <a:latin typeface="Times New Roman" panose="02020603050405020304" pitchFamily="18" charset="0"/>
                 <a:cs typeface="Times New Roman" panose="02020603050405020304" pitchFamily="18" charset="0"/>
               </a:rPr>
-              <a:t>End Slide</a:t>
+              <a:t>End Slide
+Thank you.
+Summary — six verified findings
+1. Schema-implementation fidelity: 29/29 routes, 0 console errors.
+2. Reward-path correctness: 9/9 end-to-end checks, including
+   cooldown rejection.
+3. Points economy verified under simulation across casual, regular and
+   committed profiles.
+4. Interface fidelity to the design specification: mean 0.910 over
+   19 comparable screens.
+5. No high-severity usability findings on heuristic inspection.
+6. Single-codebase PWA: ~207 kB connected first load (cold build
+   25.5 s), offline shell.
+Future work: usability pilot (SUS), NFC / signed rotating codes,
+geofence confirmation, wearable integration, multi-campus federation.</a:t>
             </a:r>
             <a:endParaRPr lang="en-US" dirty="0"/>
           </a:p>

--- a/CampusFit_Project_Defence.pptx
+++ b/CampusFit_Project_Defence.pptx
@@ -2,21 +2,20 @@
 <file path=ppt/presentation.xml><?xml version="1.0" encoding="utf-8"?>
 <p:presentation xmlns:a="http://schemas.openxmlformats.org/drawingml/2006/main" xmlns:r="http://schemas.openxmlformats.org/officeDocument/2006/relationships" xmlns:p="http://schemas.openxmlformats.org/presentationml/2006/main" saveSubsetFonts="1">
   <p:sldMasterIdLst>
-    <p:sldMasterId id="2147483648" r:id="rId1"/>
-    <p:sldMasterId id="2147483660" r:id="rId2"/>
+    <p:sldMasterId id="2147483660" r:id="rId1"/>
   </p:sldMasterIdLst>
   <p:notesMasterIdLst>
-    <p:notesMasterId r:id="rId11"/>
+    <p:notesMasterId r:id="rId10"/>
   </p:notesMasterIdLst>
   <p:sldIdLst>
-    <p:sldId id="258" r:id="rId3"/>
-    <p:sldId id="259" r:id="rId4"/>
-    <p:sldId id="260" r:id="rId5"/>
-    <p:sldId id="261" r:id="rId6"/>
-    <p:sldId id="262" r:id="rId7"/>
-    <p:sldId id="263" r:id="rId8"/>
-    <p:sldId id="264" r:id="rId9"/>
-    <p:sldId id="257" r:id="rId10"/>
+    <p:sldId id="258" r:id="rId2"/>
+    <p:sldId id="259" r:id="rId3"/>
+    <p:sldId id="260" r:id="rId4"/>
+    <p:sldId id="261" r:id="rId5"/>
+    <p:sldId id="262" r:id="rId6"/>
+    <p:sldId id="263" r:id="rId7"/>
+    <p:sldId id="264" r:id="rId8"/>
+    <p:sldId id="265" r:id="rId9"/>
   </p:sldIdLst>
   <p:sldSz cx="12192000" cy="6858000"/>
   <p:notesSz cx="6858000" cy="9144000"/>
@@ -115,6 +114,11 @@
       </a:defRPr>
     </a:lvl9pPr>
   </p:defaultTextStyle>
+  <p:extLst>
+    <p:ext uri="{EFAFB233-063F-42B5-8137-9DF3F51BA10A}">
+      <p15:sldGuideLst xmlns:p15="http://schemas.microsoft.com/office/powerpoint/2012/main"/>
+    </p:ext>
+  </p:extLst>
 </p:presentation>
 </file>
 
@@ -200,7 +204,7 @@
           <a:p>
             <a:fld id="{D77CA5DE-5554-433E-998B-5706BBA3DDB9}" type="datetimeFigureOut">
               <a:rPr lang="en-US" smtClean="0"/>
-              <a:t>9/15/2025</a:t>
+              <a:t>10/7/2026</a:t>
             </a:fld>
             <a:endParaRPr lang="en-US"/>
           </a:p>
@@ -2259,7 +2263,13 @@
   <p:cSld>
     <p:spTree>
       <p:nvGrpSpPr>
-        <p:cNvPr id="1" name=""/>
+        <p:cNvPr id="1" name="">
+          <a:extLst>
+            <a:ext uri="{FF2B5EF4-FFF2-40B4-BE49-F238E27FC236}">
+              <a16:creationId xmlns:a16="http://schemas.microsoft.com/office/drawing/2014/main" id="{2882406C-9091-844B-DB49-8715D42899FB}"/>
+            </a:ext>
+          </a:extLst>
+        </p:cNvPr>
         <p:cNvGrpSpPr/>
         <p:nvPr/>
       </p:nvGrpSpPr>
@@ -2273,7 +2283,13 @@
       </p:grpSpPr>
       <p:sp>
         <p:nvSpPr>
-          <p:cNvPr id="2" name="Slide Image Placeholder 1"/>
+          <p:cNvPr id="2" name="Slide Image Placeholder 1">
+            <a:extLst>
+              <a:ext uri="{FF2B5EF4-FFF2-40B4-BE49-F238E27FC236}">
+                <a16:creationId xmlns:a16="http://schemas.microsoft.com/office/drawing/2014/main" id="{21122E06-8520-490D-8B05-ED9A04AD03B4}"/>
+              </a:ext>
+            </a:extLst>
+          </p:cNvPr>
           <p:cNvSpPr>
             <a:spLocks noGrp="1" noRot="1" noChangeAspect="1"/>
           </p:cNvSpPr>
@@ -2285,7 +2301,13 @@
       </p:sp>
       <p:sp>
         <p:nvSpPr>
-          <p:cNvPr id="3" name="Notes Placeholder 2"/>
+          <p:cNvPr id="3" name="Notes Placeholder 2">
+            <a:extLst>
+              <a:ext uri="{FF2B5EF4-FFF2-40B4-BE49-F238E27FC236}">
+                <a16:creationId xmlns:a16="http://schemas.microsoft.com/office/drawing/2014/main" id="{F0FA392E-0BC4-141A-5A0C-D37203E2482F}"/>
+              </a:ext>
+            </a:extLst>
+          </p:cNvPr>
           <p:cNvSpPr>
             <a:spLocks noGrp="1"/>
           </p:cNvSpPr>
@@ -2298,13 +2320,794 @@
           <a:bodyPr/>
           <a:lstStyle/>
           <a:p>
-            <a:endParaRPr lang="en-US"/>
-          </a:p>
-        </p:txBody>
-      </p:sp>
-      <p:sp>
-        <p:nvSpPr>
-          <p:cNvPr id="4" name="Slide Number Placeholder 3"/>
+            <a:r>
+              <a:rPr lang="en-US" sz="1200" b="1" kern="1200" dirty="0">
+                <a:solidFill>
+                  <a:schemeClr val="tx1"/>
+                </a:solidFill>
+                <a:effectLst/>
+                <a:latin typeface="+mn-lt"/>
+                <a:ea typeface="+mn-ea"/>
+                <a:cs typeface="+mn-cs"/>
+              </a:rPr>
+              <a:t>Methodology </a:t>
+            </a:r>
+            <a:endParaRPr lang="en-US" sz="1200" kern="1200" dirty="0">
+              <a:solidFill>
+                <a:schemeClr val="tx1"/>
+              </a:solidFill>
+              <a:effectLst/>
+              <a:latin typeface="+mn-lt"/>
+              <a:ea typeface="+mn-ea"/>
+              <a:cs typeface="+mn-cs"/>
+            </a:endParaRPr>
+          </a:p>
+          <a:p>
+            <a:r>
+              <a:rPr lang="en-US" sz="1200" b="1" kern="1200" dirty="0">
+                <a:solidFill>
+                  <a:schemeClr val="tx1"/>
+                </a:solidFill>
+                <a:effectLst/>
+                <a:latin typeface="+mn-lt"/>
+                <a:ea typeface="+mn-ea"/>
+                <a:cs typeface="+mn-cs"/>
+              </a:rPr>
+              <a:t>Phenomenology</a:t>
+            </a:r>
+            <a:endParaRPr lang="en-US" sz="1200" kern="1200" dirty="0">
+              <a:solidFill>
+                <a:schemeClr val="tx1"/>
+              </a:solidFill>
+              <a:effectLst/>
+              <a:latin typeface="+mn-lt"/>
+              <a:ea typeface="+mn-ea"/>
+              <a:cs typeface="+mn-cs"/>
+            </a:endParaRPr>
+          </a:p>
+          <a:p>
+            <a:r>
+              <a:rPr lang="en-US" sz="1200" kern="1200" dirty="0">
+                <a:solidFill>
+                  <a:schemeClr val="tx1"/>
+                </a:solidFill>
+                <a:effectLst/>
+                <a:latin typeface="+mn-lt"/>
+                <a:ea typeface="+mn-ea"/>
+                <a:cs typeface="+mn-cs"/>
+              </a:rPr>
+              <a:t>My philosophical positioning aligned with hermeneutic phenomenology since I </a:t>
+            </a:r>
+            <a:r>
+              <a:rPr lang="en-US" sz="1200" kern="1200" dirty="0" err="1">
+                <a:solidFill>
+                  <a:schemeClr val="tx1"/>
+                </a:solidFill>
+                <a:effectLst/>
+                <a:latin typeface="+mn-lt"/>
+                <a:ea typeface="+mn-ea"/>
+                <a:cs typeface="+mn-cs"/>
+              </a:rPr>
+              <a:t>saught</a:t>
+            </a:r>
+            <a:r>
+              <a:rPr lang="en-US" sz="1200" kern="1200" dirty="0">
+                <a:solidFill>
+                  <a:schemeClr val="tx1"/>
+                </a:solidFill>
+                <a:effectLst/>
+                <a:latin typeface="+mn-lt"/>
+                <a:ea typeface="+mn-ea"/>
+                <a:cs typeface="+mn-cs"/>
+              </a:rPr>
+              <a:t> to understand how individuals make meaning of their voluntary and involuntary immobility. </a:t>
+            </a:r>
+          </a:p>
+          <a:p>
+            <a:r>
+              <a:rPr lang="en-US" sz="1200" b="1" kern="1200" dirty="0">
+                <a:solidFill>
+                  <a:schemeClr val="tx1"/>
+                </a:solidFill>
+                <a:effectLst/>
+                <a:latin typeface="+mn-lt"/>
+                <a:ea typeface="+mn-ea"/>
+                <a:cs typeface="+mn-cs"/>
+              </a:rPr>
+              <a:t>Qualitative approach</a:t>
+            </a:r>
+            <a:endParaRPr lang="en-US" sz="1200" kern="1200" dirty="0">
+              <a:solidFill>
+                <a:schemeClr val="tx1"/>
+              </a:solidFill>
+              <a:effectLst/>
+              <a:latin typeface="+mn-lt"/>
+              <a:ea typeface="+mn-ea"/>
+              <a:cs typeface="+mn-cs"/>
+            </a:endParaRPr>
+          </a:p>
+          <a:p>
+            <a:r>
+              <a:rPr lang="en-US" sz="1200" kern="1200" dirty="0">
+                <a:solidFill>
+                  <a:schemeClr val="tx1"/>
+                </a:solidFill>
+                <a:effectLst/>
+                <a:latin typeface="+mn-lt"/>
+                <a:ea typeface="+mn-ea"/>
+                <a:cs typeface="+mn-cs"/>
+              </a:rPr>
+              <a:t>Given the sensitive and complex nature of drug trafficking and incarceration, the qualitative research design was deemed most appropriate to understand the complex realities of convicted drug mules, an insight that will be overlooked in a purely quantitative approach</a:t>
+            </a:r>
+          </a:p>
+          <a:p>
+            <a:r>
+              <a:rPr lang="en-US" sz="1200" kern="1200" dirty="0">
+                <a:solidFill>
+                  <a:schemeClr val="tx1"/>
+                </a:solidFill>
+                <a:effectLst/>
+                <a:latin typeface="+mn-lt"/>
+                <a:ea typeface="+mn-ea"/>
+                <a:cs typeface="+mn-cs"/>
+              </a:rPr>
+              <a:t>The methodological orientation that best suits the purpose of my research is the Interpretative Phenomenological Analysis (IPA). IPA is a qualitative research approach developed by Smith (2011) within psychology to explore how individuals make sense of their lived experiences (Moran, 2013). </a:t>
+            </a:r>
+          </a:p>
+          <a:p>
+            <a:r>
+              <a:rPr lang="en-US" sz="1200" b="1" kern="1200" dirty="0">
+                <a:solidFill>
+                  <a:schemeClr val="tx1"/>
+                </a:solidFill>
+                <a:effectLst/>
+                <a:latin typeface="+mn-lt"/>
+                <a:ea typeface="+mn-ea"/>
+                <a:cs typeface="+mn-cs"/>
+              </a:rPr>
+              <a:t>Study population</a:t>
+            </a:r>
+            <a:endParaRPr lang="en-US" sz="1200" kern="1200" dirty="0">
+              <a:solidFill>
+                <a:schemeClr val="tx1"/>
+              </a:solidFill>
+              <a:effectLst/>
+              <a:latin typeface="+mn-lt"/>
+              <a:ea typeface="+mn-ea"/>
+              <a:cs typeface="+mn-cs"/>
+            </a:endParaRPr>
+          </a:p>
+          <a:p>
+            <a:r>
+              <a:rPr lang="en-US" sz="1200" kern="1200" dirty="0">
+                <a:solidFill>
+                  <a:schemeClr val="tx1"/>
+                </a:solidFill>
+                <a:effectLst/>
+                <a:latin typeface="+mn-lt"/>
+                <a:ea typeface="+mn-ea"/>
+                <a:cs typeface="+mn-cs"/>
+              </a:rPr>
+              <a:t>Convicted drug mules (males and females)</a:t>
+            </a:r>
+          </a:p>
+          <a:p>
+            <a:r>
+              <a:rPr lang="en-US" sz="1200" kern="1200" dirty="0">
+                <a:solidFill>
+                  <a:schemeClr val="tx1"/>
+                </a:solidFill>
+                <a:effectLst/>
+                <a:latin typeface="+mn-lt"/>
+                <a:ea typeface="+mn-ea"/>
+                <a:cs typeface="+mn-cs"/>
+              </a:rPr>
+              <a:t>Ghanaians and foreign nationals</a:t>
+            </a:r>
+          </a:p>
+          <a:p>
+            <a:r>
+              <a:rPr lang="en-US" sz="1200" kern="1200" dirty="0">
+                <a:solidFill>
+                  <a:schemeClr val="tx1"/>
+                </a:solidFill>
+                <a:effectLst/>
+                <a:latin typeface="+mn-lt"/>
+                <a:ea typeface="+mn-ea"/>
+                <a:cs typeface="+mn-cs"/>
+              </a:rPr>
+              <a:t>18 years and above</a:t>
+            </a:r>
+          </a:p>
+          <a:p>
+            <a:r>
+              <a:rPr lang="en-US" sz="1200" kern="1200" dirty="0">
+                <a:solidFill>
+                  <a:schemeClr val="tx1"/>
+                </a:solidFill>
+                <a:effectLst/>
+                <a:latin typeface="+mn-lt"/>
+                <a:ea typeface="+mn-ea"/>
+                <a:cs typeface="+mn-cs"/>
+              </a:rPr>
+              <a:t>Must be in prison beyond 6 months</a:t>
+            </a:r>
+          </a:p>
+          <a:p>
+            <a:r>
+              <a:rPr lang="en-US" sz="1200" kern="1200" dirty="0">
+                <a:solidFill>
+                  <a:schemeClr val="tx1"/>
+                </a:solidFill>
+                <a:effectLst/>
+                <a:latin typeface="+mn-lt"/>
+                <a:ea typeface="+mn-ea"/>
+                <a:cs typeface="+mn-cs"/>
+              </a:rPr>
+              <a:t> </a:t>
+            </a:r>
+          </a:p>
+          <a:p>
+            <a:r>
+              <a:rPr lang="en-US" sz="1200" b="1" kern="1200" dirty="0">
+                <a:solidFill>
+                  <a:schemeClr val="tx1"/>
+                </a:solidFill>
+                <a:effectLst/>
+                <a:latin typeface="+mn-lt"/>
+                <a:ea typeface="+mn-ea"/>
+                <a:cs typeface="+mn-cs"/>
+              </a:rPr>
+              <a:t>Sampling Techniques</a:t>
+            </a:r>
+            <a:endParaRPr lang="en-US" sz="1200" kern="1200" dirty="0">
+              <a:solidFill>
+                <a:schemeClr val="tx1"/>
+              </a:solidFill>
+              <a:effectLst/>
+              <a:latin typeface="+mn-lt"/>
+              <a:ea typeface="+mn-ea"/>
+              <a:cs typeface="+mn-cs"/>
+            </a:endParaRPr>
+          </a:p>
+          <a:p>
+            <a:r>
+              <a:rPr lang="en-US" sz="1200" kern="1200" dirty="0">
+                <a:solidFill>
+                  <a:schemeClr val="tx1"/>
+                </a:solidFill>
+                <a:effectLst/>
+                <a:latin typeface="+mn-lt"/>
+                <a:ea typeface="+mn-ea"/>
+                <a:cs typeface="+mn-cs"/>
+              </a:rPr>
+              <a:t>Census at the female yard</a:t>
+            </a:r>
+          </a:p>
+          <a:p>
+            <a:r>
+              <a:rPr lang="en-US" sz="1200" kern="1200" dirty="0">
+                <a:solidFill>
+                  <a:schemeClr val="tx1"/>
+                </a:solidFill>
+                <a:effectLst/>
+                <a:latin typeface="+mn-lt"/>
+                <a:ea typeface="+mn-ea"/>
+                <a:cs typeface="+mn-cs"/>
+              </a:rPr>
+              <a:t>Snowballing at the male yard</a:t>
+            </a:r>
+          </a:p>
+          <a:p>
+            <a:r>
+              <a:rPr lang="en-US" sz="1200" kern="1200" dirty="0">
+                <a:solidFill>
+                  <a:schemeClr val="tx1"/>
+                </a:solidFill>
+                <a:effectLst/>
+                <a:latin typeface="+mn-lt"/>
+                <a:ea typeface="+mn-ea"/>
+                <a:cs typeface="+mn-cs"/>
+              </a:rPr>
+              <a:t>Purposive for key informants</a:t>
+            </a:r>
+          </a:p>
+          <a:p>
+            <a:r>
+              <a:rPr lang="en-US" sz="1200" kern="1200" dirty="0">
+                <a:solidFill>
+                  <a:schemeClr val="tx1"/>
+                </a:solidFill>
+                <a:effectLst/>
+                <a:latin typeface="+mn-lt"/>
+                <a:ea typeface="+mn-ea"/>
+                <a:cs typeface="+mn-cs"/>
+              </a:rPr>
+              <a:t> </a:t>
+            </a:r>
+          </a:p>
+          <a:p>
+            <a:r>
+              <a:rPr lang="en-US" sz="1200" kern="1200" dirty="0">
+                <a:solidFill>
+                  <a:schemeClr val="tx1"/>
+                </a:solidFill>
+                <a:effectLst/>
+                <a:latin typeface="+mn-lt"/>
+                <a:ea typeface="+mn-ea"/>
+                <a:cs typeface="+mn-cs"/>
+              </a:rPr>
+              <a:t> </a:t>
+            </a:r>
+          </a:p>
+          <a:p>
+            <a:r>
+              <a:rPr lang="en-US" sz="1200" b="1" kern="1200" dirty="0">
+                <a:solidFill>
+                  <a:schemeClr val="tx1"/>
+                </a:solidFill>
+                <a:effectLst/>
+                <a:latin typeface="+mn-lt"/>
+                <a:ea typeface="+mn-ea"/>
+                <a:cs typeface="+mn-cs"/>
+              </a:rPr>
+              <a:t>Sampling size</a:t>
+            </a:r>
+            <a:endParaRPr lang="en-US" sz="1200" kern="1200" dirty="0">
+              <a:solidFill>
+                <a:schemeClr val="tx1"/>
+              </a:solidFill>
+              <a:effectLst/>
+              <a:latin typeface="+mn-lt"/>
+              <a:ea typeface="+mn-ea"/>
+              <a:cs typeface="+mn-cs"/>
+            </a:endParaRPr>
+          </a:p>
+          <a:p>
+            <a:r>
+              <a:rPr lang="en-US" sz="1200" kern="1200" dirty="0">
+                <a:solidFill>
+                  <a:schemeClr val="tx1"/>
+                </a:solidFill>
+                <a:effectLst/>
+                <a:latin typeface="+mn-lt"/>
+                <a:ea typeface="+mn-ea"/>
+                <a:cs typeface="+mn-cs"/>
+              </a:rPr>
+              <a:t>The sampling size obtained after reaching saturation was 16, </a:t>
+            </a:r>
+            <a:r>
+              <a:rPr lang="en-US" sz="1200" kern="1200" dirty="0" err="1">
+                <a:solidFill>
+                  <a:schemeClr val="tx1"/>
+                </a:solidFill>
+                <a:effectLst/>
+                <a:latin typeface="+mn-lt"/>
+                <a:ea typeface="+mn-ea"/>
+                <a:cs typeface="+mn-cs"/>
+              </a:rPr>
+              <a:t>ie</a:t>
+            </a:r>
+            <a:r>
+              <a:rPr lang="en-US" sz="1200" kern="1200" dirty="0">
+                <a:solidFill>
+                  <a:schemeClr val="tx1"/>
+                </a:solidFill>
+                <a:effectLst/>
+                <a:latin typeface="+mn-lt"/>
+                <a:ea typeface="+mn-ea"/>
+                <a:cs typeface="+mn-cs"/>
+              </a:rPr>
+              <a:t>, 8 males and eight females</a:t>
+            </a:r>
+          </a:p>
+          <a:p>
+            <a:r>
+              <a:rPr lang="en-US" sz="1200" b="1" kern="1200" dirty="0">
+                <a:solidFill>
+                  <a:schemeClr val="tx1"/>
+                </a:solidFill>
+                <a:effectLst/>
+                <a:latin typeface="+mn-lt"/>
+                <a:ea typeface="+mn-ea"/>
+                <a:cs typeface="+mn-cs"/>
+              </a:rPr>
+              <a:t>Data analysis</a:t>
+            </a:r>
+            <a:endParaRPr lang="en-US" sz="1200" kern="1200" dirty="0">
+              <a:solidFill>
+                <a:schemeClr val="tx1"/>
+              </a:solidFill>
+              <a:effectLst/>
+              <a:latin typeface="+mn-lt"/>
+              <a:ea typeface="+mn-ea"/>
+              <a:cs typeface="+mn-cs"/>
+            </a:endParaRPr>
+          </a:p>
+          <a:p>
+            <a:r>
+              <a:rPr lang="en-US" sz="1200" kern="1200" dirty="0">
+                <a:solidFill>
+                  <a:schemeClr val="tx1"/>
+                </a:solidFill>
+                <a:effectLst/>
+                <a:latin typeface="+mn-lt"/>
+                <a:ea typeface="+mn-ea"/>
+                <a:cs typeface="+mn-cs"/>
+              </a:rPr>
+              <a:t>Transcription was done while conducting the interviews because the prison did not allow me to record</a:t>
+            </a:r>
+          </a:p>
+          <a:p>
+            <a:r>
+              <a:rPr lang="en-US" sz="1200" kern="1200" dirty="0">
+                <a:solidFill>
+                  <a:schemeClr val="tx1"/>
+                </a:solidFill>
+                <a:effectLst/>
+                <a:latin typeface="+mn-lt"/>
+                <a:ea typeface="+mn-ea"/>
+                <a:cs typeface="+mn-cs"/>
+              </a:rPr>
+              <a:t>After the first four interviews, I began generating initial codes and gained a preliminary understanding of the potential themes emerging from the data. I viewed these interviews as setting the conceptual boundaries of the phenomenon under investigation. </a:t>
+            </a:r>
+          </a:p>
+          <a:p>
+            <a:r>
+              <a:rPr lang="en-US" sz="1200" kern="1200" dirty="0">
+                <a:solidFill>
+                  <a:schemeClr val="tx1"/>
+                </a:solidFill>
+                <a:effectLst/>
+                <a:latin typeface="+mn-lt"/>
+                <a:ea typeface="+mn-ea"/>
+                <a:cs typeface="+mn-cs"/>
+              </a:rPr>
+              <a:t> </a:t>
+            </a:r>
+          </a:p>
+          <a:p>
+            <a:r>
+              <a:rPr lang="en-US" sz="1200" b="1" kern="1200" dirty="0">
+                <a:solidFill>
+                  <a:schemeClr val="tx1"/>
+                </a:solidFill>
+                <a:effectLst/>
+                <a:latin typeface="+mn-lt"/>
+                <a:ea typeface="+mn-ea"/>
+                <a:cs typeface="+mn-cs"/>
+              </a:rPr>
+              <a:t>Coding</a:t>
+            </a:r>
+            <a:endParaRPr lang="en-US" sz="1200" kern="1200" dirty="0">
+              <a:solidFill>
+                <a:schemeClr val="tx1"/>
+              </a:solidFill>
+              <a:effectLst/>
+              <a:latin typeface="+mn-lt"/>
+              <a:ea typeface="+mn-ea"/>
+              <a:cs typeface="+mn-cs"/>
+            </a:endParaRPr>
+          </a:p>
+          <a:p>
+            <a:r>
+              <a:rPr lang="en-US" sz="1200" kern="1200" dirty="0">
+                <a:solidFill>
+                  <a:schemeClr val="tx1"/>
+                </a:solidFill>
+                <a:effectLst/>
+                <a:latin typeface="+mn-lt"/>
+                <a:ea typeface="+mn-ea"/>
+                <a:cs typeface="+mn-cs"/>
+              </a:rPr>
+              <a:t>First order codes 			Second order codes		Voice/quotes </a:t>
+            </a:r>
+          </a:p>
+          <a:p>
+            <a:r>
+              <a:rPr lang="en-US" sz="1200" kern="1200" dirty="0">
+                <a:solidFill>
+                  <a:schemeClr val="tx1"/>
+                </a:solidFill>
+                <a:effectLst/>
+                <a:latin typeface="+mn-lt"/>
+                <a:ea typeface="+mn-ea"/>
+                <a:cs typeface="+mn-cs"/>
+              </a:rPr>
+              <a:t>Learning to sew			Vocational skills 		what skill are you learning?</a:t>
+            </a:r>
+          </a:p>
+          <a:p>
+            <a:r>
+              <a:rPr lang="en-US" sz="1200" kern="1200" dirty="0">
+                <a:solidFill>
+                  <a:schemeClr val="tx1"/>
+                </a:solidFill>
+                <a:effectLst/>
+                <a:latin typeface="+mn-lt"/>
+                <a:ea typeface="+mn-ea"/>
+                <a:cs typeface="+mn-cs"/>
+              </a:rPr>
+              <a:t>Constant headache and feeling weak	 Experiences in prison </a:t>
+            </a:r>
+          </a:p>
+          <a:p>
+            <a:r>
+              <a:rPr lang="en-US" sz="1200" kern="1200" dirty="0">
+                <a:solidFill>
+                  <a:schemeClr val="tx1"/>
+                </a:solidFill>
+                <a:effectLst/>
+                <a:latin typeface="+mn-lt"/>
+                <a:ea typeface="+mn-ea"/>
+                <a:cs typeface="+mn-cs"/>
+              </a:rPr>
+              <a:t>Thinking too much</a:t>
+            </a:r>
+          </a:p>
+          <a:p>
+            <a:r>
+              <a:rPr lang="en-US" sz="1200" kern="1200" dirty="0">
+                <a:solidFill>
+                  <a:schemeClr val="tx1"/>
+                </a:solidFill>
+                <a:effectLst/>
+                <a:latin typeface="+mn-lt"/>
+                <a:ea typeface="+mn-ea"/>
+                <a:cs typeface="+mn-cs"/>
+              </a:rPr>
+              <a:t>After generating the codes, I organised them into basic themes, subordinate themes and superordinate themes</a:t>
+            </a:r>
+          </a:p>
+          <a:p>
+            <a:r>
+              <a:rPr lang="en-US" sz="1200" kern="1200" dirty="0" err="1">
+                <a:solidFill>
+                  <a:schemeClr val="tx1"/>
+                </a:solidFill>
+                <a:effectLst/>
+                <a:latin typeface="+mn-lt"/>
+                <a:ea typeface="+mn-ea"/>
+                <a:cs typeface="+mn-cs"/>
+              </a:rPr>
+              <a:t>Eg.</a:t>
+            </a:r>
+            <a:r>
+              <a:rPr lang="en-US" sz="1200" kern="1200" dirty="0">
+                <a:solidFill>
+                  <a:schemeClr val="tx1"/>
+                </a:solidFill>
+                <a:effectLst/>
+                <a:latin typeface="+mn-lt"/>
+                <a:ea typeface="+mn-ea"/>
+                <a:cs typeface="+mn-cs"/>
+              </a:rPr>
+              <a:t> Working in my neighborhood (basic theme)	No movement within the country of origin (subordinate theme)	mobility trajectories of participants before engaging in drug trafficking (superordinate themes)</a:t>
+            </a:r>
+          </a:p>
+          <a:p>
+            <a:r>
+              <a:rPr lang="en-US" sz="1200" kern="1200" dirty="0">
+                <a:solidFill>
+                  <a:schemeClr val="tx1"/>
+                </a:solidFill>
+                <a:effectLst/>
+                <a:latin typeface="+mn-lt"/>
+                <a:ea typeface="+mn-ea"/>
+                <a:cs typeface="+mn-cs"/>
+              </a:rPr>
+              <a:t> </a:t>
+            </a:r>
+          </a:p>
+          <a:p>
+            <a:r>
+              <a:rPr lang="en-US" sz="1200" kern="1200" dirty="0">
+                <a:solidFill>
+                  <a:schemeClr val="tx1"/>
+                </a:solidFill>
+                <a:effectLst/>
+                <a:latin typeface="+mn-lt"/>
+                <a:ea typeface="+mn-ea"/>
+                <a:cs typeface="+mn-cs"/>
+              </a:rPr>
+              <a:t> </a:t>
+            </a:r>
+          </a:p>
+          <a:p>
+            <a:r>
+              <a:rPr lang="en-US" sz="1200" b="1" kern="1200" dirty="0">
+                <a:solidFill>
+                  <a:schemeClr val="tx1"/>
+                </a:solidFill>
+                <a:effectLst/>
+                <a:latin typeface="+mn-lt"/>
+                <a:ea typeface="+mn-ea"/>
+                <a:cs typeface="+mn-cs"/>
+              </a:rPr>
+              <a:t> </a:t>
+            </a:r>
+            <a:endParaRPr lang="en-US" sz="1200" kern="1200" dirty="0">
+              <a:solidFill>
+                <a:schemeClr val="tx1"/>
+              </a:solidFill>
+              <a:effectLst/>
+              <a:latin typeface="+mn-lt"/>
+              <a:ea typeface="+mn-ea"/>
+              <a:cs typeface="+mn-cs"/>
+            </a:endParaRPr>
+          </a:p>
+          <a:p>
+            <a:r>
+              <a:rPr lang="en-US" sz="1200" b="1" kern="1200" dirty="0">
+                <a:solidFill>
+                  <a:schemeClr val="tx1"/>
+                </a:solidFill>
+                <a:effectLst/>
+                <a:latin typeface="+mn-lt"/>
+                <a:ea typeface="+mn-ea"/>
+                <a:cs typeface="+mn-cs"/>
+              </a:rPr>
+              <a:t>Researcher positionality </a:t>
+            </a:r>
+            <a:endParaRPr lang="en-US" sz="1200" kern="1200" dirty="0">
+              <a:solidFill>
+                <a:schemeClr val="tx1"/>
+              </a:solidFill>
+              <a:effectLst/>
+              <a:latin typeface="+mn-lt"/>
+              <a:ea typeface="+mn-ea"/>
+              <a:cs typeface="+mn-cs"/>
+            </a:endParaRPr>
+          </a:p>
+          <a:p>
+            <a:r>
+              <a:rPr lang="en-US" sz="1200" b="1" kern="1200" dirty="0">
+                <a:solidFill>
+                  <a:schemeClr val="tx1"/>
+                </a:solidFill>
+                <a:effectLst/>
+                <a:latin typeface="+mn-lt"/>
+                <a:ea typeface="+mn-ea"/>
+                <a:cs typeface="+mn-cs"/>
+              </a:rPr>
+              <a:t> </a:t>
+            </a:r>
+            <a:endParaRPr lang="en-US" sz="1200" kern="1200" dirty="0">
+              <a:solidFill>
+                <a:schemeClr val="tx1"/>
+              </a:solidFill>
+              <a:effectLst/>
+              <a:latin typeface="+mn-lt"/>
+              <a:ea typeface="+mn-ea"/>
+              <a:cs typeface="+mn-cs"/>
+            </a:endParaRPr>
+          </a:p>
+          <a:p>
+            <a:r>
+              <a:rPr lang="en-US" sz="1200" kern="1200" dirty="0">
+                <a:solidFill>
+                  <a:schemeClr val="tx1"/>
+                </a:solidFill>
+                <a:effectLst/>
+                <a:latin typeface="+mn-lt"/>
+                <a:ea typeface="+mn-ea"/>
+                <a:cs typeface="+mn-cs"/>
+              </a:rPr>
+              <a:t>On one hand, I have firsthand knowledge of law enforcement and how drug trafficking cases are handled in Ghana. On the other hand, I am deeply engaged in academic inquiry as a student researcher</a:t>
+            </a:r>
+          </a:p>
+          <a:p>
+            <a:r>
+              <a:rPr lang="en-US" sz="1200" kern="1200" dirty="0">
+                <a:solidFill>
+                  <a:schemeClr val="tx1"/>
+                </a:solidFill>
+                <a:effectLst/>
+                <a:latin typeface="+mn-lt"/>
+                <a:ea typeface="+mn-ea"/>
+                <a:cs typeface="+mn-cs"/>
+              </a:rPr>
+              <a:t> </a:t>
+            </a:r>
+          </a:p>
+          <a:p>
+            <a:r>
+              <a:rPr lang="en-US" sz="1200" kern="1200" dirty="0">
+                <a:solidFill>
+                  <a:schemeClr val="tx1"/>
+                </a:solidFill>
+                <a:effectLst/>
+                <a:latin typeface="+mn-lt"/>
+                <a:ea typeface="+mn-ea"/>
+                <a:cs typeface="+mn-cs"/>
+              </a:rPr>
+              <a:t>I may be seen as an insider because, as a drug law enforcement officer, I have a deep understanding of the legal, procedural, and social contexts surrounding drug trafficking.</a:t>
+            </a:r>
+          </a:p>
+          <a:p>
+            <a:r>
+              <a:rPr lang="en-US" sz="1200" kern="1200" dirty="0">
+                <a:solidFill>
+                  <a:schemeClr val="tx1"/>
+                </a:solidFill>
+                <a:effectLst/>
+                <a:latin typeface="+mn-lt"/>
+                <a:ea typeface="+mn-ea"/>
+                <a:cs typeface="+mn-cs"/>
+              </a:rPr>
+              <a:t>I am an outsider because I have not lived the experience of being a convicted drug mule.</a:t>
+            </a:r>
+          </a:p>
+          <a:p>
+            <a:r>
+              <a:rPr lang="en-US" sz="1200" kern="1200" dirty="0">
+                <a:solidFill>
+                  <a:schemeClr val="tx1"/>
+                </a:solidFill>
+                <a:effectLst/>
+                <a:latin typeface="+mn-lt"/>
+                <a:ea typeface="+mn-ea"/>
+                <a:cs typeface="+mn-cs"/>
+              </a:rPr>
+              <a:t> </a:t>
+            </a:r>
+          </a:p>
+          <a:p>
+            <a:r>
+              <a:rPr lang="en-US" sz="1200" kern="1200" dirty="0">
+                <a:solidFill>
+                  <a:schemeClr val="tx1"/>
+                </a:solidFill>
+                <a:effectLst/>
+                <a:latin typeface="+mn-lt"/>
+                <a:ea typeface="+mn-ea"/>
+                <a:cs typeface="+mn-cs"/>
+              </a:rPr>
+              <a:t>I am aware that this dual positionality can enrich my analysis, but also requires reflexivity. I needed to be aware of how my identity, assumptions, and institutional affiliations might affect data collection, interpretation, and participant rapport.</a:t>
+            </a:r>
+          </a:p>
+          <a:p>
+            <a:r>
+              <a:rPr lang="en-US" sz="1200" kern="1200" dirty="0">
+                <a:solidFill>
+                  <a:schemeClr val="tx1"/>
+                </a:solidFill>
+                <a:effectLst/>
+                <a:latin typeface="+mn-lt"/>
+                <a:ea typeface="+mn-ea"/>
+                <a:cs typeface="+mn-cs"/>
+              </a:rPr>
+              <a:t> </a:t>
+            </a:r>
+          </a:p>
+          <a:p>
+            <a:r>
+              <a:rPr lang="en-US" sz="1200" kern="1200" dirty="0">
+                <a:solidFill>
+                  <a:schemeClr val="tx1"/>
+                </a:solidFill>
+                <a:effectLst/>
+                <a:latin typeface="+mn-lt"/>
+                <a:ea typeface="+mn-ea"/>
+                <a:cs typeface="+mn-cs"/>
+              </a:rPr>
+              <a:t>Although my background gave me valuable insight into how drugs are trafficked into Ghana and the control measures, I was also aware that sharing my professional identity with my participants, the convicted drug mules, might make them uncomfortable or hesitant to speak freely. To help create a safe and open environment for honest conversation, I chose to present myself only as a student researcher during the interviews. This decision was not taken lightly, but it followed ethical guidance in qualitative research that emphasises the importance of building trust and mitigating power imbalances between researcher and participant (Berger, 2016; Holmes, 2020).</a:t>
+            </a:r>
+          </a:p>
+          <a:p>
+            <a:endParaRPr lang="en-US" dirty="0"/>
+          </a:p>
+        </p:txBody>
+      </p:sp>
+      <p:sp>
+        <p:nvSpPr>
+          <p:cNvPr id="4" name="Slide Number Placeholder 3">
+            <a:extLst>
+              <a:ext uri="{FF2B5EF4-FFF2-40B4-BE49-F238E27FC236}">
+                <a16:creationId xmlns:a16="http://schemas.microsoft.com/office/drawing/2014/main" id="{682754C5-4E4F-43F5-1645-2CFC09DBFA22}"/>
+              </a:ext>
+            </a:extLst>
+          </p:cNvPr>
           <p:cNvSpPr>
             <a:spLocks noGrp="1"/>
           </p:cNvSpPr>
@@ -2328,7 +3131,7 @@
     </p:spTree>
     <p:extLst>
       <p:ext uri="{BB962C8B-B14F-4D97-AF65-F5344CB8AC3E}">
-        <p14:creationId xmlns:p14="http://schemas.microsoft.com/office/powerpoint/2010/main" val="1249002980"/>
+        <p14:creationId xmlns:p14="http://schemas.microsoft.com/office/powerpoint/2010/main" val="2089764201"/>
       </p:ext>
     </p:extLst>
   </p:cSld>
@@ -2357,13 +3160,7 @@
       </p:grpSpPr>
       <p:sp>
         <p:nvSpPr>
-          <p:cNvPr id="2" name="Title 1">
-            <a:extLst>
-              <a:ext uri="{FF2B5EF4-FFF2-40B4-BE49-F238E27FC236}">
-                <a16:creationId xmlns:a16="http://schemas.microsoft.com/office/drawing/2014/main" id="{9BDD7EC2-E5D8-F742-1B67-054FF0866F4A}"/>
-              </a:ext>
-            </a:extLst>
-          </p:cNvPr>
+          <p:cNvPr id="2" name="Title 1"/>
           <p:cNvSpPr>
             <a:spLocks noGrp="1"/>
           </p:cNvSpPr>
@@ -2373,20 +3170,17 @@
         </p:nvSpPr>
         <p:spPr>
           <a:xfrm>
-            <a:off x="1524000" y="1122363"/>
-            <a:ext cx="9144000" cy="2387600"/>
+            <a:off x="914400" y="2130426"/>
+            <a:ext cx="10363200" cy="1470025"/>
           </a:xfrm>
         </p:spPr>
         <p:txBody>
-          <a:bodyPr anchor="b"/>
-          <a:lstStyle>
-            <a:lvl1pPr algn="ctr">
-              <a:defRPr sz="6000"/>
-            </a:lvl1pPr>
-          </a:lstStyle>
-          <a:p>
-            <a:r>
-              <a:rPr lang="en-US"/>
+          <a:bodyPr/>
+          <a:lstStyle/>
+          <a:p>
+            <a:pPr fontAlgn="base"/>
+            <a:r>
+              <a:rPr lang="en-US" strike="noStrike" noProof="1"/>
               <a:t>Click to edit Master title style</a:t>
             </a:r>
           </a:p>
@@ -2394,13 +3188,7 @@
       </p:sp>
       <p:sp>
         <p:nvSpPr>
-          <p:cNvPr id="3" name="Subtitle 2">
-            <a:extLst>
-              <a:ext uri="{FF2B5EF4-FFF2-40B4-BE49-F238E27FC236}">
-                <a16:creationId xmlns:a16="http://schemas.microsoft.com/office/drawing/2014/main" id="{77A00BB6-1739-C6B5-9716-28AB89FF2D39}"/>
-              </a:ext>
-            </a:extLst>
-          </p:cNvPr>
+          <p:cNvPr id="3" name="Subtitle 2"/>
           <p:cNvSpPr>
             <a:spLocks noGrp="1"/>
           </p:cNvSpPr>
@@ -2410,8 +3198,8 @@
         </p:nvSpPr>
         <p:spPr>
           <a:xfrm>
-            <a:off x="1524000" y="3602038"/>
-            <a:ext cx="9144000" cy="1655762"/>
+            <a:off x="1828800" y="3886200"/>
+            <a:ext cx="8534400" cy="1752600"/>
           </a:xfrm>
         </p:spPr>
         <p:txBody>
@@ -2419,44 +3207,99 @@
           <a:lstStyle>
             <a:lvl1pPr marL="0" indent="0" algn="ctr">
               <a:buNone/>
-              <a:defRPr sz="2400"/>
+              <a:defRPr>
+                <a:solidFill>
+                  <a:schemeClr val="tx1">
+                    <a:tint val="75000"/>
+                  </a:schemeClr>
+                </a:solidFill>
+              </a:defRPr>
             </a:lvl1pPr>
             <a:lvl2pPr marL="457200" indent="0" algn="ctr">
               <a:buNone/>
-              <a:defRPr sz="2000"/>
+              <a:defRPr>
+                <a:solidFill>
+                  <a:schemeClr val="tx1">
+                    <a:tint val="75000"/>
+                  </a:schemeClr>
+                </a:solidFill>
+              </a:defRPr>
             </a:lvl2pPr>
             <a:lvl3pPr marL="914400" indent="0" algn="ctr">
               <a:buNone/>
-              <a:defRPr sz="1800"/>
+              <a:defRPr>
+                <a:solidFill>
+                  <a:schemeClr val="tx1">
+                    <a:tint val="75000"/>
+                  </a:schemeClr>
+                </a:solidFill>
+              </a:defRPr>
             </a:lvl3pPr>
             <a:lvl4pPr marL="1371600" indent="0" algn="ctr">
               <a:buNone/>
-              <a:defRPr sz="1600"/>
+              <a:defRPr>
+                <a:solidFill>
+                  <a:schemeClr val="tx1">
+                    <a:tint val="75000"/>
+                  </a:schemeClr>
+                </a:solidFill>
+              </a:defRPr>
             </a:lvl4pPr>
             <a:lvl5pPr marL="1828800" indent="0" algn="ctr">
               <a:buNone/>
-              <a:defRPr sz="1600"/>
+              <a:defRPr>
+                <a:solidFill>
+                  <a:schemeClr val="tx1">
+                    <a:tint val="75000"/>
+                  </a:schemeClr>
+                </a:solidFill>
+              </a:defRPr>
             </a:lvl5pPr>
             <a:lvl6pPr marL="2286000" indent="0" algn="ctr">
               <a:buNone/>
-              <a:defRPr sz="1600"/>
+              <a:defRPr>
+                <a:solidFill>
+                  <a:schemeClr val="tx1">
+                    <a:tint val="75000"/>
+                  </a:schemeClr>
+                </a:solidFill>
+              </a:defRPr>
             </a:lvl6pPr>
             <a:lvl7pPr marL="2743200" indent="0" algn="ctr">
               <a:buNone/>
-              <a:defRPr sz="1600"/>
+              <a:defRPr>
+                <a:solidFill>
+                  <a:schemeClr val="tx1">
+                    <a:tint val="75000"/>
+                  </a:schemeClr>
+                </a:solidFill>
+              </a:defRPr>
             </a:lvl7pPr>
             <a:lvl8pPr marL="3200400" indent="0" algn="ctr">
               <a:buNone/>
-              <a:defRPr sz="1600"/>
+              <a:defRPr>
+                <a:solidFill>
+                  <a:schemeClr val="tx1">
+                    <a:tint val="75000"/>
+                  </a:schemeClr>
+                </a:solidFill>
+              </a:defRPr>
             </a:lvl8pPr>
             <a:lvl9pPr marL="3657600" indent="0" algn="ctr">
               <a:buNone/>
-              <a:defRPr sz="1600"/>
+              <a:defRPr>
+                <a:solidFill>
+                  <a:schemeClr val="tx1">
+                    <a:tint val="75000"/>
+                  </a:schemeClr>
+                </a:solidFill>
+              </a:defRPr>
             </a:lvl9pPr>
           </a:lstStyle>
           <a:p>
-            <a:r>
-              <a:rPr lang="en-US"/>
+            <a:pPr fontAlgn="base"/>
+            <a:r>
+              <a:rPr lang="en-US" strike="noStrike" noProof="1"/>
               <a:t>Click to edit Master subtitle style</a:t>
             </a:r>
           </a:p>
@@ -2464,13 +3307,7 @@
       </p:sp>
       <p:sp>
         <p:nvSpPr>
-          <p:cNvPr id="4" name="Date Placeholder 3">
-            <a:extLst>
-              <a:ext uri="{FF2B5EF4-FFF2-40B4-BE49-F238E27FC236}">
-                <a16:creationId xmlns:a16="http://schemas.microsoft.com/office/drawing/2014/main" id="{592B4C73-ACB3-7C9F-7EA5-2938A0344044}"/>
-              </a:ext>
-            </a:extLst>
-          </p:cNvPr>
+          <p:cNvPr id="4" name="Date Placeholder 3"/>
           <p:cNvSpPr>
             <a:spLocks noGrp="1"/>
           </p:cNvSpPr>
@@ -2483,23 +3320,39 @@
           <a:bodyPr/>
           <a:lstStyle/>
           <a:p>
-            <a:fld id="{F10901DB-E840-4150-8207-866BDD25D22F}" type="datetimeFigureOut">
-              <a:rPr lang="en-US" smtClean="0"/>
-              <a:t>9/15/2025</a:t>
+            <a:pPr fontAlgn="base">
+              <a:spcBef>
+                <a:spcPct val="0"/>
+              </a:spcBef>
+              <a:spcAft>
+                <a:spcPct val="0"/>
+              </a:spcAft>
+              <a:defRPr/>
+            </a:pPr>
+            <a:fld id="{74E860EC-E542-457A-B70C-3F9F24F46ECA}" type="datetime1">
+              <a:rPr lang="en-US" smtClean="0">
+                <a:ea typeface="MS PGothic" panose="020B0600070205080204" pitchFamily="34" charset="-128"/>
+              </a:rPr>
+              <a:pPr fontAlgn="base">
+                <a:spcBef>
+                  <a:spcPct val="0"/>
+                </a:spcBef>
+                <a:spcAft>
+                  <a:spcPct val="0"/>
+                </a:spcAft>
+                <a:defRPr/>
+              </a:pPr>
+              <a:t>10/7/2026</a:t>
             </a:fld>
-            <a:endParaRPr lang="en-US"/>
-          </a:p>
-        </p:txBody>
-      </p:sp>
-      <p:sp>
-        <p:nvSpPr>
-          <p:cNvPr id="5" name="Footer Placeholder 4">
-            <a:extLst>
-              <a:ext uri="{FF2B5EF4-FFF2-40B4-BE49-F238E27FC236}">
-                <a16:creationId xmlns:a16="http://schemas.microsoft.com/office/drawing/2014/main" id="{5912DAEB-3F38-A327-9E2B-F5B42236E7C9}"/>
-              </a:ext>
-            </a:extLst>
-          </p:cNvPr>
+            <a:endParaRPr lang="en-US">
+              <a:ea typeface="MS PGothic" panose="020B0600070205080204" pitchFamily="34" charset="-128"/>
+            </a:endParaRPr>
+          </a:p>
+        </p:txBody>
+      </p:sp>
+      <p:sp>
+        <p:nvSpPr>
+          <p:cNvPr id="5" name="Footer Placeholder 4"/>
           <p:cNvSpPr>
             <a:spLocks noGrp="1"/>
           </p:cNvSpPr>
@@ -2512,19 +3365,16 @@
           <a:bodyPr/>
           <a:lstStyle/>
           <a:p>
+            <a:pPr>
+              <a:defRPr/>
+            </a:pPr>
             <a:endParaRPr lang="en-US"/>
           </a:p>
         </p:txBody>
       </p:sp>
       <p:sp>
         <p:nvSpPr>
-          <p:cNvPr id="6" name="Slide Number Placeholder 5">
-            <a:extLst>
-              <a:ext uri="{FF2B5EF4-FFF2-40B4-BE49-F238E27FC236}">
-                <a16:creationId xmlns:a16="http://schemas.microsoft.com/office/drawing/2014/main" id="{5BD2C4D2-F373-1FDD-0C14-B0A5EE67898B}"/>
-              </a:ext>
-            </a:extLst>
-          </p:cNvPr>
+          <p:cNvPr id="6" name="Slide Number Placeholder 5"/>
           <p:cNvSpPr>
             <a:spLocks noGrp="1"/>
           </p:cNvSpPr>
@@ -2537,18 +3387,40 @@
           <a:bodyPr/>
           <a:lstStyle/>
           <a:p>
-            <a:fld id="{C41024BC-5968-4735-8D30-B72DEF6BE683}" type="slidenum">
-              <a:rPr lang="en-US" smtClean="0"/>
+            <a:pPr fontAlgn="base">
+              <a:spcBef>
+                <a:spcPct val="0"/>
+              </a:spcBef>
+              <a:spcAft>
+                <a:spcPct val="0"/>
+              </a:spcAft>
+              <a:defRPr/>
+            </a:pPr>
+            <a:fld id="{B724CBE9-E6DE-4AAC-8453-7697DD7A6035}" type="slidenum">
+              <a:rPr lang="en-US" altLang="en-US" smtClean="0">
+                <a:ea typeface="MS PGothic" panose="020B0600070205080204" pitchFamily="34" charset="-128"/>
+              </a:rPr>
+              <a:pPr fontAlgn="base">
+                <a:spcBef>
+                  <a:spcPct val="0"/>
+                </a:spcBef>
+                <a:spcAft>
+                  <a:spcPct val="0"/>
+                </a:spcAft>
+                <a:defRPr/>
+              </a:pPr>
               <a:t>‹#›</a:t>
             </a:fld>
-            <a:endParaRPr lang="en-US"/>
+            <a:endParaRPr lang="en-US" altLang="en-US">
+              <a:ea typeface="MS PGothic" panose="020B0600070205080204" pitchFamily="34" charset="-128"/>
+            </a:endParaRPr>
           </a:p>
         </p:txBody>
       </p:sp>
     </p:spTree>
     <p:extLst>
       <p:ext uri="{BB962C8B-B14F-4D97-AF65-F5344CB8AC3E}">
-        <p14:creationId xmlns:p14="http://schemas.microsoft.com/office/powerpoint/2010/main" val="320258995"/>
+        <p14:creationId xmlns:p14="http://schemas.microsoft.com/office/powerpoint/2010/main" val="448339023"/>
       </p:ext>
     </p:extLst>
   </p:cSld>
@@ -2577,13 +3449,7 @@
       </p:grpSpPr>
       <p:sp>
         <p:nvSpPr>
-          <p:cNvPr id="2" name="Title 1">
-            <a:extLst>
-              <a:ext uri="{FF2B5EF4-FFF2-40B4-BE49-F238E27FC236}">
-                <a16:creationId xmlns:a16="http://schemas.microsoft.com/office/drawing/2014/main" id="{D21E613B-3E08-B9D4-3543-276532004087}"/>
-              </a:ext>
-            </a:extLst>
-          </p:cNvPr>
+          <p:cNvPr id="2" name="Title 1"/>
           <p:cNvSpPr>
             <a:spLocks noGrp="1"/>
           </p:cNvSpPr>
@@ -2596,8 +3462,9 @@
           <a:bodyPr/>
           <a:lstStyle/>
           <a:p>
-            <a:r>
-              <a:rPr lang="en-US"/>
+            <a:pPr fontAlgn="base"/>
+            <a:r>
+              <a:rPr lang="en-US" strike="noStrike" noProof="1"/>
               <a:t>Click to edit Master title style</a:t>
             </a:r>
           </a:p>
@@ -2605,13 +3472,7 @@
       </p:sp>
       <p:sp>
         <p:nvSpPr>
-          <p:cNvPr id="3" name="Vertical Text Placeholder 2">
-            <a:extLst>
-              <a:ext uri="{FF2B5EF4-FFF2-40B4-BE49-F238E27FC236}">
-                <a16:creationId xmlns:a16="http://schemas.microsoft.com/office/drawing/2014/main" id="{554B8505-E673-B14D-57BC-B609C294E3EF}"/>
-              </a:ext>
-            </a:extLst>
-          </p:cNvPr>
+          <p:cNvPr id="3" name="Vertical Text Placeholder 2"/>
           <p:cNvSpPr>
             <a:spLocks noGrp="1"/>
           </p:cNvSpPr>
@@ -2624,37 +3485,37 @@
           <a:bodyPr vert="eaVert"/>
           <a:lstStyle/>
           <a:p>
-            <a:pPr lvl="0"/>
-            <a:r>
-              <a:rPr lang="en-US"/>
+            <a:pPr lvl="0" fontAlgn="base"/>
+            <a:r>
+              <a:rPr lang="en-US" strike="noStrike" noProof="1"/>
               <a:t>Click to edit Master text styles</a:t>
             </a:r>
           </a:p>
           <a:p>
-            <a:pPr lvl="1"/>
-            <a:r>
-              <a:rPr lang="en-US"/>
+            <a:pPr lvl="1" fontAlgn="base"/>
+            <a:r>
+              <a:rPr lang="en-US" strike="noStrike" noProof="1"/>
               <a:t>Second level</a:t>
             </a:r>
           </a:p>
           <a:p>
-            <a:pPr lvl="2"/>
-            <a:r>
-              <a:rPr lang="en-US"/>
+            <a:pPr lvl="2" fontAlgn="base"/>
+            <a:r>
+              <a:rPr lang="en-US" strike="noStrike" noProof="1"/>
               <a:t>Third level</a:t>
             </a:r>
           </a:p>
           <a:p>
-            <a:pPr lvl="3"/>
-            <a:r>
-              <a:rPr lang="en-US"/>
+            <a:pPr lvl="3" fontAlgn="base"/>
+            <a:r>
+              <a:rPr lang="en-US" strike="noStrike" noProof="1"/>
               <a:t>Fourth level</a:t>
             </a:r>
           </a:p>
           <a:p>
-            <a:pPr lvl="4"/>
-            <a:r>
-              <a:rPr lang="en-US"/>
+            <a:pPr lvl="4" fontAlgn="base"/>
+            <a:r>
+              <a:rPr lang="en-US" strike="noStrike" noProof="1"/>
               <a:t>Fifth level</a:t>
             </a:r>
           </a:p>
@@ -2662,13 +3523,7 @@
       </p:sp>
       <p:sp>
         <p:nvSpPr>
-          <p:cNvPr id="4" name="Date Placeholder 3">
-            <a:extLst>
-              <a:ext uri="{FF2B5EF4-FFF2-40B4-BE49-F238E27FC236}">
-                <a16:creationId xmlns:a16="http://schemas.microsoft.com/office/drawing/2014/main" id="{88ED7D8F-1AC7-0420-F070-FDFD3C35B784}"/>
-              </a:ext>
-            </a:extLst>
-          </p:cNvPr>
+          <p:cNvPr id="4" name="Date Placeholder 3"/>
           <p:cNvSpPr>
             <a:spLocks noGrp="1"/>
           </p:cNvSpPr>
@@ -2681,23 +3536,39 @@
           <a:bodyPr/>
           <a:lstStyle/>
           <a:p>
-            <a:fld id="{F10901DB-E840-4150-8207-866BDD25D22F}" type="datetimeFigureOut">
-              <a:rPr lang="en-US" smtClean="0"/>
-              <a:t>9/15/2025</a:t>
+            <a:pPr fontAlgn="base">
+              <a:spcBef>
+                <a:spcPct val="0"/>
+              </a:spcBef>
+              <a:spcAft>
+                <a:spcPct val="0"/>
+              </a:spcAft>
+              <a:defRPr/>
+            </a:pPr>
+            <a:fld id="{A7F2A97E-5CE7-416F-AB2B-5750179EE4FB}" type="datetime1">
+              <a:rPr lang="en-US" smtClean="0">
+                <a:ea typeface="MS PGothic" panose="020B0600070205080204" pitchFamily="34" charset="-128"/>
+              </a:rPr>
+              <a:pPr fontAlgn="base">
+                <a:spcBef>
+                  <a:spcPct val="0"/>
+                </a:spcBef>
+                <a:spcAft>
+                  <a:spcPct val="0"/>
+                </a:spcAft>
+                <a:defRPr/>
+              </a:pPr>
+              <a:t>10/7/2026</a:t>
             </a:fld>
-            <a:endParaRPr lang="en-US"/>
-          </a:p>
-        </p:txBody>
-      </p:sp>
-      <p:sp>
-        <p:nvSpPr>
-          <p:cNvPr id="5" name="Footer Placeholder 4">
-            <a:extLst>
-              <a:ext uri="{FF2B5EF4-FFF2-40B4-BE49-F238E27FC236}">
-                <a16:creationId xmlns:a16="http://schemas.microsoft.com/office/drawing/2014/main" id="{3692FD22-A5B5-C5E8-19C9-E29BD895B01A}"/>
-              </a:ext>
-            </a:extLst>
-          </p:cNvPr>
+            <a:endParaRPr lang="en-US">
+              <a:ea typeface="MS PGothic" panose="020B0600070205080204" pitchFamily="34" charset="-128"/>
+            </a:endParaRPr>
+          </a:p>
+        </p:txBody>
+      </p:sp>
+      <p:sp>
+        <p:nvSpPr>
+          <p:cNvPr id="5" name="Footer Placeholder 4"/>
           <p:cNvSpPr>
             <a:spLocks noGrp="1"/>
           </p:cNvSpPr>
@@ -2710,19 +3581,16 @@
           <a:bodyPr/>
           <a:lstStyle/>
           <a:p>
+            <a:pPr>
+              <a:defRPr/>
+            </a:pPr>
             <a:endParaRPr lang="en-US"/>
           </a:p>
         </p:txBody>
       </p:sp>
       <p:sp>
         <p:nvSpPr>
-          <p:cNvPr id="6" name="Slide Number Placeholder 5">
-            <a:extLst>
-              <a:ext uri="{FF2B5EF4-FFF2-40B4-BE49-F238E27FC236}">
-                <a16:creationId xmlns:a16="http://schemas.microsoft.com/office/drawing/2014/main" id="{132D55BE-B31F-9976-5801-16A4491DC193}"/>
-              </a:ext>
-            </a:extLst>
-          </p:cNvPr>
+          <p:cNvPr id="6" name="Slide Number Placeholder 5"/>
           <p:cNvSpPr>
             <a:spLocks noGrp="1"/>
           </p:cNvSpPr>
@@ -2735,18 +3603,40 @@
           <a:bodyPr/>
           <a:lstStyle/>
           <a:p>
-            <a:fld id="{C41024BC-5968-4735-8D30-B72DEF6BE683}" type="slidenum">
-              <a:rPr lang="en-US" smtClean="0"/>
+            <a:pPr fontAlgn="base">
+              <a:spcBef>
+                <a:spcPct val="0"/>
+              </a:spcBef>
+              <a:spcAft>
+                <a:spcPct val="0"/>
+              </a:spcAft>
+              <a:defRPr/>
+            </a:pPr>
+            <a:fld id="{B724CBE9-E6DE-4AAC-8453-7697DD7A6035}" type="slidenum">
+              <a:rPr lang="en-US" altLang="en-US" smtClean="0">
+                <a:ea typeface="MS PGothic" panose="020B0600070205080204" pitchFamily="34" charset="-128"/>
+              </a:rPr>
+              <a:pPr fontAlgn="base">
+                <a:spcBef>
+                  <a:spcPct val="0"/>
+                </a:spcBef>
+                <a:spcAft>
+                  <a:spcPct val="0"/>
+                </a:spcAft>
+                <a:defRPr/>
+              </a:pPr>
               <a:t>‹#›</a:t>
             </a:fld>
-            <a:endParaRPr lang="en-US"/>
+            <a:endParaRPr lang="en-US" altLang="en-US">
+              <a:ea typeface="MS PGothic" panose="020B0600070205080204" pitchFamily="34" charset="-128"/>
+            </a:endParaRPr>
           </a:p>
         </p:txBody>
       </p:sp>
     </p:spTree>
     <p:extLst>
       <p:ext uri="{BB962C8B-B14F-4D97-AF65-F5344CB8AC3E}">
-        <p14:creationId xmlns:p14="http://schemas.microsoft.com/office/powerpoint/2010/main" val="802274776"/>
+        <p14:creationId xmlns:p14="http://schemas.microsoft.com/office/powerpoint/2010/main" val="2860712770"/>
       </p:ext>
     </p:extLst>
   </p:cSld>
@@ -2775,13 +3665,7 @@
       </p:grpSpPr>
       <p:sp>
         <p:nvSpPr>
-          <p:cNvPr id="2" name="Vertical Title 1">
-            <a:extLst>
-              <a:ext uri="{FF2B5EF4-FFF2-40B4-BE49-F238E27FC236}">
-                <a16:creationId xmlns:a16="http://schemas.microsoft.com/office/drawing/2014/main" id="{6E714E13-7DDD-7B01-B532-2B2A88B66331}"/>
-              </a:ext>
-            </a:extLst>
-          </p:cNvPr>
+          <p:cNvPr id="2" name="Vertical Title 1"/>
           <p:cNvSpPr>
             <a:spLocks noGrp="1"/>
           </p:cNvSpPr>
@@ -2791,16 +3675,17 @@
         </p:nvSpPr>
         <p:spPr>
           <a:xfrm>
-            <a:off x="8724900" y="365125"/>
-            <a:ext cx="2628900" cy="5811838"/>
+            <a:off x="8839200" y="274639"/>
+            <a:ext cx="2743200" cy="5851525"/>
           </a:xfrm>
         </p:spPr>
         <p:txBody>
           <a:bodyPr vert="eaVert"/>
           <a:lstStyle/>
           <a:p>
-            <a:r>
-              <a:rPr lang="en-US"/>
+            <a:pPr fontAlgn="base"/>
+            <a:r>
+              <a:rPr lang="en-US" strike="noStrike" noProof="1"/>
               <a:t>Click to edit Master title style</a:t>
             </a:r>
           </a:p>
@@ -2808,13 +3693,7 @@
       </p:sp>
       <p:sp>
         <p:nvSpPr>
-          <p:cNvPr id="3" name="Vertical Text Placeholder 2">
-            <a:extLst>
-              <a:ext uri="{FF2B5EF4-FFF2-40B4-BE49-F238E27FC236}">
-                <a16:creationId xmlns:a16="http://schemas.microsoft.com/office/drawing/2014/main" id="{1B1CBB8E-647A-192C-E328-241E73841B4C}"/>
-              </a:ext>
-            </a:extLst>
-          </p:cNvPr>
+          <p:cNvPr id="3" name="Vertical Text Placeholder 2"/>
           <p:cNvSpPr>
             <a:spLocks noGrp="1"/>
           </p:cNvSpPr>
@@ -2824,306 +3703,46 @@
         </p:nvSpPr>
         <p:spPr>
           <a:xfrm>
-            <a:off x="838200" y="365125"/>
-            <a:ext cx="7734300" cy="5811838"/>
+            <a:off x="609600" y="274639"/>
+            <a:ext cx="8026400" cy="5851525"/>
           </a:xfrm>
         </p:spPr>
         <p:txBody>
           <a:bodyPr vert="eaVert"/>
           <a:lstStyle/>
           <a:p>
-            <a:pPr lvl="0"/>
-            <a:r>
-              <a:rPr lang="en-US"/>
+            <a:pPr lvl="0" fontAlgn="base"/>
+            <a:r>
+              <a:rPr lang="en-US" strike="noStrike" noProof="1"/>
               <a:t>Click to edit Master text styles</a:t>
             </a:r>
           </a:p>
           <a:p>
-            <a:pPr lvl="1"/>
-            <a:r>
-              <a:rPr lang="en-US"/>
+            <a:pPr lvl="1" fontAlgn="base"/>
+            <a:r>
+              <a:rPr lang="en-US" strike="noStrike" noProof="1"/>
               <a:t>Second level</a:t>
             </a:r>
           </a:p>
           <a:p>
-            <a:pPr lvl="2"/>
-            <a:r>
-              <a:rPr lang="en-US"/>
+            <a:pPr lvl="2" fontAlgn="base"/>
+            <a:r>
+              <a:rPr lang="en-US" strike="noStrike" noProof="1"/>
               <a:t>Third level</a:t>
             </a:r>
           </a:p>
           <a:p>
-            <a:pPr lvl="3"/>
-            <a:r>
-              <a:rPr lang="en-US"/>
+            <a:pPr lvl="3" fontAlgn="base"/>
+            <a:r>
+              <a:rPr lang="en-US" strike="noStrike" noProof="1"/>
               <a:t>Fourth level</a:t>
             </a:r>
           </a:p>
           <a:p>
-            <a:pPr lvl="4"/>
-            <a:r>
-              <a:rPr lang="en-US"/>
+            <a:pPr lvl="4" fontAlgn="base"/>
+            <a:r>
+              <a:rPr lang="en-US" strike="noStrike" noProof="1"/>
               <a:t>Fifth level</a:t>
-            </a:r>
-          </a:p>
-        </p:txBody>
-      </p:sp>
-      <p:sp>
-        <p:nvSpPr>
-          <p:cNvPr id="4" name="Date Placeholder 3">
-            <a:extLst>
-              <a:ext uri="{FF2B5EF4-FFF2-40B4-BE49-F238E27FC236}">
-                <a16:creationId xmlns:a16="http://schemas.microsoft.com/office/drawing/2014/main" id="{67BDFD78-3A20-22DE-6D4C-9A66BC0078A4}"/>
-              </a:ext>
-            </a:extLst>
-          </p:cNvPr>
-          <p:cNvSpPr>
-            <a:spLocks noGrp="1"/>
-          </p:cNvSpPr>
-          <p:nvPr>
-            <p:ph type="dt" sz="half" idx="10"/>
-          </p:nvPr>
-        </p:nvSpPr>
-        <p:spPr/>
-        <p:txBody>
-          <a:bodyPr/>
-          <a:lstStyle/>
-          <a:p>
-            <a:fld id="{F10901DB-E840-4150-8207-866BDD25D22F}" type="datetimeFigureOut">
-              <a:rPr lang="en-US" smtClean="0"/>
-              <a:t>9/15/2025</a:t>
-            </a:fld>
-            <a:endParaRPr lang="en-US"/>
-          </a:p>
-        </p:txBody>
-      </p:sp>
-      <p:sp>
-        <p:nvSpPr>
-          <p:cNvPr id="5" name="Footer Placeholder 4">
-            <a:extLst>
-              <a:ext uri="{FF2B5EF4-FFF2-40B4-BE49-F238E27FC236}">
-                <a16:creationId xmlns:a16="http://schemas.microsoft.com/office/drawing/2014/main" id="{639FA80B-D752-6CA7-C60B-AAF3A51B5230}"/>
-              </a:ext>
-            </a:extLst>
-          </p:cNvPr>
-          <p:cNvSpPr>
-            <a:spLocks noGrp="1"/>
-          </p:cNvSpPr>
-          <p:nvPr>
-            <p:ph type="ftr" sz="quarter" idx="11"/>
-          </p:nvPr>
-        </p:nvSpPr>
-        <p:spPr/>
-        <p:txBody>
-          <a:bodyPr/>
-          <a:lstStyle/>
-          <a:p>
-            <a:endParaRPr lang="en-US"/>
-          </a:p>
-        </p:txBody>
-      </p:sp>
-      <p:sp>
-        <p:nvSpPr>
-          <p:cNvPr id="6" name="Slide Number Placeholder 5">
-            <a:extLst>
-              <a:ext uri="{FF2B5EF4-FFF2-40B4-BE49-F238E27FC236}">
-                <a16:creationId xmlns:a16="http://schemas.microsoft.com/office/drawing/2014/main" id="{1AC1C125-E0EA-8BB4-A43E-4E1CCF0CDD89}"/>
-              </a:ext>
-            </a:extLst>
-          </p:cNvPr>
-          <p:cNvSpPr>
-            <a:spLocks noGrp="1"/>
-          </p:cNvSpPr>
-          <p:nvPr>
-            <p:ph type="sldNum" sz="quarter" idx="12"/>
-          </p:nvPr>
-        </p:nvSpPr>
-        <p:spPr/>
-        <p:txBody>
-          <a:bodyPr/>
-          <a:lstStyle/>
-          <a:p>
-            <a:fld id="{C41024BC-5968-4735-8D30-B72DEF6BE683}" type="slidenum">
-              <a:rPr lang="en-US" smtClean="0"/>
-              <a:t>‹#›</a:t>
-            </a:fld>
-            <a:endParaRPr lang="en-US"/>
-          </a:p>
-        </p:txBody>
-      </p:sp>
-    </p:spTree>
-    <p:extLst>
-      <p:ext uri="{BB962C8B-B14F-4D97-AF65-F5344CB8AC3E}">
-        <p14:creationId xmlns:p14="http://schemas.microsoft.com/office/powerpoint/2010/main" val="1660196810"/>
-      </p:ext>
-    </p:extLst>
-  </p:cSld>
-  <p:clrMapOvr>
-    <a:masterClrMapping/>
-  </p:clrMapOvr>
-</p:sldLayout>
-</file>
-
-<file path=ppt/slideLayouts/slideLayout12.xml><?xml version="1.0" encoding="utf-8"?>
-<p:sldLayout xmlns:a="http://schemas.openxmlformats.org/drawingml/2006/main" xmlns:r="http://schemas.openxmlformats.org/officeDocument/2006/relationships" xmlns:p="http://schemas.openxmlformats.org/presentationml/2006/main" type="title" preserve="1">
-  <p:cSld name="Title Slide">
-    <p:spTree>
-      <p:nvGrpSpPr>
-        <p:cNvPr id="1" name=""/>
-        <p:cNvGrpSpPr/>
-        <p:nvPr/>
-      </p:nvGrpSpPr>
-      <p:grpSpPr>
-        <a:xfrm>
-          <a:off x="0" y="0"/>
-          <a:ext cx="0" cy="0"/>
-          <a:chOff x="0" y="0"/>
-          <a:chExt cx="0" cy="0"/>
-        </a:xfrm>
-      </p:grpSpPr>
-      <p:sp>
-        <p:nvSpPr>
-          <p:cNvPr id="2" name="Title 1"/>
-          <p:cNvSpPr>
-            <a:spLocks noGrp="1"/>
-          </p:cNvSpPr>
-          <p:nvPr>
-            <p:ph type="ctrTitle"/>
-          </p:nvPr>
-        </p:nvSpPr>
-        <p:spPr>
-          <a:xfrm>
-            <a:off x="914400" y="2130426"/>
-            <a:ext cx="10363200" cy="1470025"/>
-          </a:xfrm>
-        </p:spPr>
-        <p:txBody>
-          <a:bodyPr/>
-          <a:lstStyle/>
-          <a:p>
-            <a:pPr fontAlgn="base"/>
-            <a:r>
-              <a:rPr lang="en-US" strike="noStrike" noProof="1"/>
-              <a:t>Click to edit Master title style</a:t>
-            </a:r>
-          </a:p>
-        </p:txBody>
-      </p:sp>
-      <p:sp>
-        <p:nvSpPr>
-          <p:cNvPr id="3" name="Subtitle 2"/>
-          <p:cNvSpPr>
-            <a:spLocks noGrp="1"/>
-          </p:cNvSpPr>
-          <p:nvPr>
-            <p:ph type="subTitle" idx="1"/>
-          </p:nvPr>
-        </p:nvSpPr>
-        <p:spPr>
-          <a:xfrm>
-            <a:off x="1828800" y="3886200"/>
-            <a:ext cx="8534400" cy="1752600"/>
-          </a:xfrm>
-        </p:spPr>
-        <p:txBody>
-          <a:bodyPr/>
-          <a:lstStyle>
-            <a:lvl1pPr marL="0" indent="0" algn="ctr">
-              <a:buNone/>
-              <a:defRPr>
-                <a:solidFill>
-                  <a:schemeClr val="tx1">
-                    <a:tint val="75000"/>
-                  </a:schemeClr>
-                </a:solidFill>
-              </a:defRPr>
-            </a:lvl1pPr>
-            <a:lvl2pPr marL="457200" indent="0" algn="ctr">
-              <a:buNone/>
-              <a:defRPr>
-                <a:solidFill>
-                  <a:schemeClr val="tx1">
-                    <a:tint val="75000"/>
-                  </a:schemeClr>
-                </a:solidFill>
-              </a:defRPr>
-            </a:lvl2pPr>
-            <a:lvl3pPr marL="914400" indent="0" algn="ctr">
-              <a:buNone/>
-              <a:defRPr>
-                <a:solidFill>
-                  <a:schemeClr val="tx1">
-                    <a:tint val="75000"/>
-                  </a:schemeClr>
-                </a:solidFill>
-              </a:defRPr>
-            </a:lvl3pPr>
-            <a:lvl4pPr marL="1371600" indent="0" algn="ctr">
-              <a:buNone/>
-              <a:defRPr>
-                <a:solidFill>
-                  <a:schemeClr val="tx1">
-                    <a:tint val="75000"/>
-                  </a:schemeClr>
-                </a:solidFill>
-              </a:defRPr>
-            </a:lvl4pPr>
-            <a:lvl5pPr marL="1828800" indent="0" algn="ctr">
-              <a:buNone/>
-              <a:defRPr>
-                <a:solidFill>
-                  <a:schemeClr val="tx1">
-                    <a:tint val="75000"/>
-                  </a:schemeClr>
-                </a:solidFill>
-              </a:defRPr>
-            </a:lvl5pPr>
-            <a:lvl6pPr marL="2286000" indent="0" algn="ctr">
-              <a:buNone/>
-              <a:defRPr>
-                <a:solidFill>
-                  <a:schemeClr val="tx1">
-                    <a:tint val="75000"/>
-                  </a:schemeClr>
-                </a:solidFill>
-              </a:defRPr>
-            </a:lvl6pPr>
-            <a:lvl7pPr marL="2743200" indent="0" algn="ctr">
-              <a:buNone/>
-              <a:defRPr>
-                <a:solidFill>
-                  <a:schemeClr val="tx1">
-                    <a:tint val="75000"/>
-                  </a:schemeClr>
-                </a:solidFill>
-              </a:defRPr>
-            </a:lvl7pPr>
-            <a:lvl8pPr marL="3200400" indent="0" algn="ctr">
-              <a:buNone/>
-              <a:defRPr>
-                <a:solidFill>
-                  <a:schemeClr val="tx1">
-                    <a:tint val="75000"/>
-                  </a:schemeClr>
-                </a:solidFill>
-              </a:defRPr>
-            </a:lvl8pPr>
-            <a:lvl9pPr marL="3657600" indent="0" algn="ctr">
-              <a:buNone/>
-              <a:defRPr>
-                <a:solidFill>
-                  <a:schemeClr val="tx1">
-                    <a:tint val="75000"/>
-                  </a:schemeClr>
-                </a:solidFill>
-              </a:defRPr>
-            </a:lvl9pPr>
-          </a:lstStyle>
-          <a:p>
-            <a:pPr fontAlgn="base"/>
-            <a:r>
-              <a:rPr lang="en-US" strike="noStrike" noProof="1"/>
-              <a:t>Click to edit Master subtitle style</a:t>
             </a:r>
           </a:p>
         </p:txBody>
@@ -3152,7 +3771,7 @@
               </a:spcAft>
               <a:defRPr/>
             </a:pPr>
-            <a:fld id="{74E860EC-E542-457A-B70C-3F9F24F46ECA}" type="datetime1">
+            <a:fld id="{A6E4A193-398A-4DA3-ABE0-39035D81DE08}" type="datetime1">
               <a:rPr lang="en-US" smtClean="0">
                 <a:ea typeface="MS PGothic" panose="020B0600070205080204" pitchFamily="34" charset="-128"/>
               </a:rPr>
@@ -3165,7 +3784,7 @@
                 </a:spcAft>
                 <a:defRPr/>
               </a:pPr>
-              <a:t>9/15/2025</a:t>
+              <a:t>10/7/2026</a:t>
             </a:fld>
             <a:endParaRPr lang="en-US">
               <a:ea typeface="MS PGothic" panose="020B0600070205080204" pitchFamily="34" charset="-128"/>
@@ -3243,7 +3862,7 @@
     </p:spTree>
     <p:extLst>
       <p:ext uri="{BB962C8B-B14F-4D97-AF65-F5344CB8AC3E}">
-        <p14:creationId xmlns:p14="http://schemas.microsoft.com/office/powerpoint/2010/main" val="448339023"/>
+        <p14:creationId xmlns:p14="http://schemas.microsoft.com/office/powerpoint/2010/main" val="2404527788"/>
       </p:ext>
     </p:extLst>
   </p:cSld>
@@ -3253,7 +3872,7 @@
 </p:sldLayout>
 </file>
 
-<file path=ppt/slideLayouts/slideLayout13.xml><?xml version="1.0" encoding="utf-8"?>
+<file path=ppt/slideLayouts/slideLayout2.xml><?xml version="1.0" encoding="utf-8"?>
 <p:sldLayout xmlns:a="http://schemas.openxmlformats.org/drawingml/2006/main" xmlns:r="http://schemas.openxmlformats.org/officeDocument/2006/relationships" xmlns:p="http://schemas.openxmlformats.org/presentationml/2006/main" type="obj" preserve="1">
   <p:cSld name="Title and Content">
     <p:spTree>
@@ -3381,7 +4000,7 @@
                 </a:spcAft>
                 <a:defRPr/>
               </a:pPr>
-              <a:t>9/15/2025</a:t>
+              <a:t>10/7/2026</a:t>
             </a:fld>
             <a:endParaRPr lang="en-US">
               <a:ea typeface="MS PGothic" panose="020B0600070205080204" pitchFamily="34" charset="-128"/>
@@ -3469,7 +4088,7 @@
 </p:sldLayout>
 </file>
 
-<file path=ppt/slideLayouts/slideLayout14.xml><?xml version="1.0" encoding="utf-8"?>
+<file path=ppt/slideLayouts/slideLayout3.xml><?xml version="1.0" encoding="utf-8"?>
 <p:sldLayout xmlns:a="http://schemas.openxmlformats.org/drawingml/2006/main" xmlns:r="http://schemas.openxmlformats.org/officeDocument/2006/relationships" xmlns:p="http://schemas.openxmlformats.org/presentationml/2006/main" type="secHead" preserve="1">
   <p:cSld name="Section Header">
     <p:spTree>
@@ -3674,7 +4293,7 @@
                 </a:spcAft>
                 <a:defRPr/>
               </a:pPr>
-              <a:t>9/15/2025</a:t>
+              <a:t>10/7/2026</a:t>
             </a:fld>
             <a:endParaRPr lang="en-US">
               <a:ea typeface="MS PGothic" panose="020B0600070205080204" pitchFamily="34" charset="-128"/>
@@ -3762,7 +4381,7 @@
 </p:sldLayout>
 </file>
 
-<file path=ppt/slideLayouts/slideLayout15.xml><?xml version="1.0" encoding="utf-8"?>
+<file path=ppt/slideLayouts/slideLayout4.xml><?xml version="1.0" encoding="utf-8"?>
 <p:sldLayout xmlns:a="http://schemas.openxmlformats.org/drawingml/2006/main" xmlns:r="http://schemas.openxmlformats.org/officeDocument/2006/relationships" xmlns:p="http://schemas.openxmlformats.org/presentationml/2006/main" type="twoObj" preserve="1">
   <p:cSld name="Two Content">
     <p:spTree>
@@ -4007,7 +4626,7 @@
                 </a:spcAft>
                 <a:defRPr/>
               </a:pPr>
-              <a:t>9/15/2025</a:t>
+              <a:t>10/7/2026</a:t>
             </a:fld>
             <a:endParaRPr lang="en-US">
               <a:ea typeface="MS PGothic" panose="020B0600070205080204" pitchFamily="34" charset="-128"/>
@@ -4095,7 +4714,7 @@
 </p:sldLayout>
 </file>
 
-<file path=ppt/slideLayouts/slideLayout16.xml><?xml version="1.0" encoding="utf-8"?>
+<file path=ppt/slideLayouts/slideLayout5.xml><?xml version="1.0" encoding="utf-8"?>
 <p:sldLayout xmlns:a="http://schemas.openxmlformats.org/drawingml/2006/main" xmlns:r="http://schemas.openxmlformats.org/officeDocument/2006/relationships" xmlns:p="http://schemas.openxmlformats.org/presentationml/2006/main" type="twoTxTwoObj" preserve="1">
   <p:cSld name="Comparison">
     <p:spTree>
@@ -4474,7 +5093,7 @@
                 </a:spcAft>
                 <a:defRPr/>
               </a:pPr>
-              <a:t>9/15/2025</a:t>
+              <a:t>10/7/2026</a:t>
             </a:fld>
             <a:endParaRPr lang="en-US">
               <a:ea typeface="MS PGothic" panose="020B0600070205080204" pitchFamily="34" charset="-128"/>
@@ -4562,7 +5181,7 @@
 </p:sldLayout>
 </file>
 
-<file path=ppt/slideLayouts/slideLayout17.xml><?xml version="1.0" encoding="utf-8"?>
+<file path=ppt/slideLayouts/slideLayout6.xml><?xml version="1.0" encoding="utf-8"?>
 <p:sldLayout xmlns:a="http://schemas.openxmlformats.org/drawingml/2006/main" xmlns:r="http://schemas.openxmlformats.org/officeDocument/2006/relationships" xmlns:p="http://schemas.openxmlformats.org/presentationml/2006/main" type="titleOnly" preserve="1">
   <p:cSld name="Title Only">
     <p:spTree>
@@ -4639,7 +5258,7 @@
                 </a:spcAft>
                 <a:defRPr/>
               </a:pPr>
-              <a:t>9/15/2025</a:t>
+              <a:t>10/7/2026</a:t>
             </a:fld>
             <a:endParaRPr lang="en-US">
               <a:ea typeface="MS PGothic" panose="020B0600070205080204" pitchFamily="34" charset="-128"/>
@@ -4727,7 +5346,7 @@
 </p:sldLayout>
 </file>
 
-<file path=ppt/slideLayouts/slideLayout18.xml><?xml version="1.0" encoding="utf-8"?>
+<file path=ppt/slideLayouts/slideLayout7.xml><?xml version="1.0" encoding="utf-8"?>
 <p:sldLayout xmlns:a="http://schemas.openxmlformats.org/drawingml/2006/main" xmlns:r="http://schemas.openxmlformats.org/officeDocument/2006/relationships" xmlns:p="http://schemas.openxmlformats.org/presentationml/2006/main" type="blank" preserve="1">
   <p:cSld name="Blank">
     <p:spTree>
@@ -4781,7 +5400,7 @@
                 </a:spcAft>
                 <a:defRPr/>
               </a:pPr>
-              <a:t>9/15/2025</a:t>
+              <a:t>10/7/2026</a:t>
             </a:fld>
             <a:endParaRPr lang="en-US">
               <a:ea typeface="MS PGothic" panose="020B0600070205080204" pitchFamily="34" charset="-128"/>
@@ -4869,7 +5488,7 @@
 </p:sldLayout>
 </file>
 
-<file path=ppt/slideLayouts/slideLayout19.xml><?xml version="1.0" encoding="utf-8"?>
+<file path=ppt/slideLayouts/slideLayout8.xml><?xml version="1.0" encoding="utf-8"?>
 <p:sldLayout xmlns:a="http://schemas.openxmlformats.org/drawingml/2006/main" xmlns:r="http://schemas.openxmlformats.org/officeDocument/2006/relationships" xmlns:p="http://schemas.openxmlformats.org/presentationml/2006/main" type="objTx" preserve="1">
   <p:cSld name="Content with Caption">
     <p:spTree>
@@ -5104,7 +5723,7 @@
                 </a:spcAft>
                 <a:defRPr/>
               </a:pPr>
-              <a:t>9/15/2025</a:t>
+              <a:t>10/7/2026</a:t>
             </a:fld>
             <a:endParaRPr lang="en-US">
               <a:ea typeface="MS PGothic" panose="020B0600070205080204" pitchFamily="34" charset="-128"/>
@@ -5192,205 +5811,7 @@
 </p:sldLayout>
 </file>
 
-<file path=ppt/slideLayouts/slideLayout2.xml><?xml version="1.0" encoding="utf-8"?>
-<p:sldLayout xmlns:a="http://schemas.openxmlformats.org/drawingml/2006/main" xmlns:r="http://schemas.openxmlformats.org/officeDocument/2006/relationships" xmlns:p="http://schemas.openxmlformats.org/presentationml/2006/main" type="obj" preserve="1">
-  <p:cSld name="Title and Content">
-    <p:spTree>
-      <p:nvGrpSpPr>
-        <p:cNvPr id="1" name=""/>
-        <p:cNvGrpSpPr/>
-        <p:nvPr/>
-      </p:nvGrpSpPr>
-      <p:grpSpPr>
-        <a:xfrm>
-          <a:off x="0" y="0"/>
-          <a:ext cx="0" cy="0"/>
-          <a:chOff x="0" y="0"/>
-          <a:chExt cx="0" cy="0"/>
-        </a:xfrm>
-      </p:grpSpPr>
-      <p:sp>
-        <p:nvSpPr>
-          <p:cNvPr id="2" name="Title 1">
-            <a:extLst>
-              <a:ext uri="{FF2B5EF4-FFF2-40B4-BE49-F238E27FC236}">
-                <a16:creationId xmlns:a16="http://schemas.microsoft.com/office/drawing/2014/main" id="{32F58BDB-9BFB-33BD-36E2-CB774FA50718}"/>
-              </a:ext>
-            </a:extLst>
-          </p:cNvPr>
-          <p:cNvSpPr>
-            <a:spLocks noGrp="1"/>
-          </p:cNvSpPr>
-          <p:nvPr>
-            <p:ph type="title"/>
-          </p:nvPr>
-        </p:nvSpPr>
-        <p:spPr/>
-        <p:txBody>
-          <a:bodyPr/>
-          <a:lstStyle/>
-          <a:p>
-            <a:r>
-              <a:rPr lang="en-US"/>
-              <a:t>Click to edit Master title style</a:t>
-            </a:r>
-          </a:p>
-        </p:txBody>
-      </p:sp>
-      <p:sp>
-        <p:nvSpPr>
-          <p:cNvPr id="3" name="Content Placeholder 2">
-            <a:extLst>
-              <a:ext uri="{FF2B5EF4-FFF2-40B4-BE49-F238E27FC236}">
-                <a16:creationId xmlns:a16="http://schemas.microsoft.com/office/drawing/2014/main" id="{EC0EBEC1-929D-A242-6F90-1148AB735D40}"/>
-              </a:ext>
-            </a:extLst>
-          </p:cNvPr>
-          <p:cNvSpPr>
-            <a:spLocks noGrp="1"/>
-          </p:cNvSpPr>
-          <p:nvPr>
-            <p:ph idx="1"/>
-          </p:nvPr>
-        </p:nvSpPr>
-        <p:spPr/>
-        <p:txBody>
-          <a:bodyPr/>
-          <a:lstStyle/>
-          <a:p>
-            <a:pPr lvl="0"/>
-            <a:r>
-              <a:rPr lang="en-US"/>
-              <a:t>Click to edit Master text styles</a:t>
-            </a:r>
-          </a:p>
-          <a:p>
-            <a:pPr lvl="1"/>
-            <a:r>
-              <a:rPr lang="en-US"/>
-              <a:t>Second level</a:t>
-            </a:r>
-          </a:p>
-          <a:p>
-            <a:pPr lvl="2"/>
-            <a:r>
-              <a:rPr lang="en-US"/>
-              <a:t>Third level</a:t>
-            </a:r>
-          </a:p>
-          <a:p>
-            <a:pPr lvl="3"/>
-            <a:r>
-              <a:rPr lang="en-US"/>
-              <a:t>Fourth level</a:t>
-            </a:r>
-          </a:p>
-          <a:p>
-            <a:pPr lvl="4"/>
-            <a:r>
-              <a:rPr lang="en-US"/>
-              <a:t>Fifth level</a:t>
-            </a:r>
-          </a:p>
-        </p:txBody>
-      </p:sp>
-      <p:sp>
-        <p:nvSpPr>
-          <p:cNvPr id="4" name="Date Placeholder 3">
-            <a:extLst>
-              <a:ext uri="{FF2B5EF4-FFF2-40B4-BE49-F238E27FC236}">
-                <a16:creationId xmlns:a16="http://schemas.microsoft.com/office/drawing/2014/main" id="{E27C69D1-F584-0904-FC78-1845E1CE9CB1}"/>
-              </a:ext>
-            </a:extLst>
-          </p:cNvPr>
-          <p:cNvSpPr>
-            <a:spLocks noGrp="1"/>
-          </p:cNvSpPr>
-          <p:nvPr>
-            <p:ph type="dt" sz="half" idx="10"/>
-          </p:nvPr>
-        </p:nvSpPr>
-        <p:spPr/>
-        <p:txBody>
-          <a:bodyPr/>
-          <a:lstStyle/>
-          <a:p>
-            <a:fld id="{F10901DB-E840-4150-8207-866BDD25D22F}" type="datetimeFigureOut">
-              <a:rPr lang="en-US" smtClean="0"/>
-              <a:t>9/15/2025</a:t>
-            </a:fld>
-            <a:endParaRPr lang="en-US"/>
-          </a:p>
-        </p:txBody>
-      </p:sp>
-      <p:sp>
-        <p:nvSpPr>
-          <p:cNvPr id="5" name="Footer Placeholder 4">
-            <a:extLst>
-              <a:ext uri="{FF2B5EF4-FFF2-40B4-BE49-F238E27FC236}">
-                <a16:creationId xmlns:a16="http://schemas.microsoft.com/office/drawing/2014/main" id="{C06E6342-5ECF-1C98-5658-39498D805F46}"/>
-              </a:ext>
-            </a:extLst>
-          </p:cNvPr>
-          <p:cNvSpPr>
-            <a:spLocks noGrp="1"/>
-          </p:cNvSpPr>
-          <p:nvPr>
-            <p:ph type="ftr" sz="quarter" idx="11"/>
-          </p:nvPr>
-        </p:nvSpPr>
-        <p:spPr/>
-        <p:txBody>
-          <a:bodyPr/>
-          <a:lstStyle/>
-          <a:p>
-            <a:endParaRPr lang="en-US"/>
-          </a:p>
-        </p:txBody>
-      </p:sp>
-      <p:sp>
-        <p:nvSpPr>
-          <p:cNvPr id="6" name="Slide Number Placeholder 5">
-            <a:extLst>
-              <a:ext uri="{FF2B5EF4-FFF2-40B4-BE49-F238E27FC236}">
-                <a16:creationId xmlns:a16="http://schemas.microsoft.com/office/drawing/2014/main" id="{742FAC61-7EF5-A0A9-7407-77FCBC604580}"/>
-              </a:ext>
-            </a:extLst>
-          </p:cNvPr>
-          <p:cNvSpPr>
-            <a:spLocks noGrp="1"/>
-          </p:cNvSpPr>
-          <p:nvPr>
-            <p:ph type="sldNum" sz="quarter" idx="12"/>
-          </p:nvPr>
-        </p:nvSpPr>
-        <p:spPr/>
-        <p:txBody>
-          <a:bodyPr/>
-          <a:lstStyle/>
-          <a:p>
-            <a:fld id="{C41024BC-5968-4735-8D30-B72DEF6BE683}" type="slidenum">
-              <a:rPr lang="en-US" smtClean="0"/>
-              <a:t>‹#›</a:t>
-            </a:fld>
-            <a:endParaRPr lang="en-US"/>
-          </a:p>
-        </p:txBody>
-      </p:sp>
-    </p:spTree>
-    <p:extLst>
-      <p:ext uri="{BB962C8B-B14F-4D97-AF65-F5344CB8AC3E}">
-        <p14:creationId xmlns:p14="http://schemas.microsoft.com/office/powerpoint/2010/main" val="653090158"/>
-      </p:ext>
-    </p:extLst>
-  </p:cSld>
-  <p:clrMapOvr>
-    <a:masterClrMapping/>
-  </p:clrMapOvr>
-</p:sldLayout>
-</file>
-
-<file path=ppt/slideLayouts/slideLayout20.xml><?xml version="1.0" encoding="utf-8"?>
+<file path=ppt/slideLayouts/slideLayout9.xml><?xml version="1.0" encoding="utf-8"?>
 <p:sldLayout xmlns:a="http://schemas.openxmlformats.org/drawingml/2006/main" xmlns:r="http://schemas.openxmlformats.org/officeDocument/2006/relationships" xmlns:p="http://schemas.openxmlformats.org/presentationml/2006/main" type="picTx" preserve="1">
   <p:cSld name="Picture with Caption">
     <p:spTree>
@@ -5633,7 +6054,7 @@
                 </a:spcAft>
                 <a:defRPr/>
               </a:pPr>
-              <a:t>9/15/2025</a:t>
+              <a:t>10/7/2026</a:t>
             </a:fld>
             <a:endParaRPr lang="en-US">
               <a:ea typeface="MS PGothic" panose="020B0600070205080204" pitchFamily="34" charset="-128"/>
@@ -5721,2822 +6142,7 @@
 </p:sldLayout>
 </file>
 
-<file path=ppt/slideLayouts/slideLayout21.xml><?xml version="1.0" encoding="utf-8"?>
-<p:sldLayout xmlns:a="http://schemas.openxmlformats.org/drawingml/2006/main" xmlns:r="http://schemas.openxmlformats.org/officeDocument/2006/relationships" xmlns:p="http://schemas.openxmlformats.org/presentationml/2006/main" type="vertTx" preserve="1">
-  <p:cSld name="Title and Vertical Text">
-    <p:spTree>
-      <p:nvGrpSpPr>
-        <p:cNvPr id="1" name=""/>
-        <p:cNvGrpSpPr/>
-        <p:nvPr/>
-      </p:nvGrpSpPr>
-      <p:grpSpPr>
-        <a:xfrm>
-          <a:off x="0" y="0"/>
-          <a:ext cx="0" cy="0"/>
-          <a:chOff x="0" y="0"/>
-          <a:chExt cx="0" cy="0"/>
-        </a:xfrm>
-      </p:grpSpPr>
-      <p:sp>
-        <p:nvSpPr>
-          <p:cNvPr id="2" name="Title 1"/>
-          <p:cNvSpPr>
-            <a:spLocks noGrp="1"/>
-          </p:cNvSpPr>
-          <p:nvPr>
-            <p:ph type="title"/>
-          </p:nvPr>
-        </p:nvSpPr>
-        <p:spPr/>
-        <p:txBody>
-          <a:bodyPr/>
-          <a:lstStyle/>
-          <a:p>
-            <a:pPr fontAlgn="base"/>
-            <a:r>
-              <a:rPr lang="en-US" strike="noStrike" noProof="1"/>
-              <a:t>Click to edit Master title style</a:t>
-            </a:r>
-          </a:p>
-        </p:txBody>
-      </p:sp>
-      <p:sp>
-        <p:nvSpPr>
-          <p:cNvPr id="3" name="Vertical Text Placeholder 2"/>
-          <p:cNvSpPr>
-            <a:spLocks noGrp="1"/>
-          </p:cNvSpPr>
-          <p:nvPr>
-            <p:ph type="body" orient="vert" idx="1"/>
-          </p:nvPr>
-        </p:nvSpPr>
-        <p:spPr/>
-        <p:txBody>
-          <a:bodyPr vert="eaVert"/>
-          <a:lstStyle/>
-          <a:p>
-            <a:pPr lvl="0" fontAlgn="base"/>
-            <a:r>
-              <a:rPr lang="en-US" strike="noStrike" noProof="1"/>
-              <a:t>Click to edit Master text styles</a:t>
-            </a:r>
-          </a:p>
-          <a:p>
-            <a:pPr lvl="1" fontAlgn="base"/>
-            <a:r>
-              <a:rPr lang="en-US" strike="noStrike" noProof="1"/>
-              <a:t>Second level</a:t>
-            </a:r>
-          </a:p>
-          <a:p>
-            <a:pPr lvl="2" fontAlgn="base"/>
-            <a:r>
-              <a:rPr lang="en-US" strike="noStrike" noProof="1"/>
-              <a:t>Third level</a:t>
-            </a:r>
-          </a:p>
-          <a:p>
-            <a:pPr lvl="3" fontAlgn="base"/>
-            <a:r>
-              <a:rPr lang="en-US" strike="noStrike" noProof="1"/>
-              <a:t>Fourth level</a:t>
-            </a:r>
-          </a:p>
-          <a:p>
-            <a:pPr lvl="4" fontAlgn="base"/>
-            <a:r>
-              <a:rPr lang="en-US" strike="noStrike" noProof="1"/>
-              <a:t>Fifth level</a:t>
-            </a:r>
-          </a:p>
-        </p:txBody>
-      </p:sp>
-      <p:sp>
-        <p:nvSpPr>
-          <p:cNvPr id="4" name="Date Placeholder 3"/>
-          <p:cNvSpPr>
-            <a:spLocks noGrp="1"/>
-          </p:cNvSpPr>
-          <p:nvPr>
-            <p:ph type="dt" sz="half" idx="10"/>
-          </p:nvPr>
-        </p:nvSpPr>
-        <p:spPr/>
-        <p:txBody>
-          <a:bodyPr/>
-          <a:lstStyle/>
-          <a:p>
-            <a:pPr fontAlgn="base">
-              <a:spcBef>
-                <a:spcPct val="0"/>
-              </a:spcBef>
-              <a:spcAft>
-                <a:spcPct val="0"/>
-              </a:spcAft>
-              <a:defRPr/>
-            </a:pPr>
-            <a:fld id="{A7F2A97E-5CE7-416F-AB2B-5750179EE4FB}" type="datetime1">
-              <a:rPr lang="en-US" smtClean="0">
-                <a:ea typeface="MS PGothic" panose="020B0600070205080204" pitchFamily="34" charset="-128"/>
-              </a:rPr>
-              <a:pPr fontAlgn="base">
-                <a:spcBef>
-                  <a:spcPct val="0"/>
-                </a:spcBef>
-                <a:spcAft>
-                  <a:spcPct val="0"/>
-                </a:spcAft>
-                <a:defRPr/>
-              </a:pPr>
-              <a:t>9/15/2025</a:t>
-            </a:fld>
-            <a:endParaRPr lang="en-US">
-              <a:ea typeface="MS PGothic" panose="020B0600070205080204" pitchFamily="34" charset="-128"/>
-            </a:endParaRPr>
-          </a:p>
-        </p:txBody>
-      </p:sp>
-      <p:sp>
-        <p:nvSpPr>
-          <p:cNvPr id="5" name="Footer Placeholder 4"/>
-          <p:cNvSpPr>
-            <a:spLocks noGrp="1"/>
-          </p:cNvSpPr>
-          <p:nvPr>
-            <p:ph type="ftr" sz="quarter" idx="11"/>
-          </p:nvPr>
-        </p:nvSpPr>
-        <p:spPr/>
-        <p:txBody>
-          <a:bodyPr/>
-          <a:lstStyle/>
-          <a:p>
-            <a:pPr>
-              <a:defRPr/>
-            </a:pPr>
-            <a:endParaRPr lang="en-US"/>
-          </a:p>
-        </p:txBody>
-      </p:sp>
-      <p:sp>
-        <p:nvSpPr>
-          <p:cNvPr id="6" name="Slide Number Placeholder 5"/>
-          <p:cNvSpPr>
-            <a:spLocks noGrp="1"/>
-          </p:cNvSpPr>
-          <p:nvPr>
-            <p:ph type="sldNum" sz="quarter" idx="12"/>
-          </p:nvPr>
-        </p:nvSpPr>
-        <p:spPr/>
-        <p:txBody>
-          <a:bodyPr/>
-          <a:lstStyle/>
-          <a:p>
-            <a:pPr fontAlgn="base">
-              <a:spcBef>
-                <a:spcPct val="0"/>
-              </a:spcBef>
-              <a:spcAft>
-                <a:spcPct val="0"/>
-              </a:spcAft>
-              <a:defRPr/>
-            </a:pPr>
-            <a:fld id="{B724CBE9-E6DE-4AAC-8453-7697DD7A6035}" type="slidenum">
-              <a:rPr lang="en-US" altLang="en-US" smtClean="0">
-                <a:ea typeface="MS PGothic" panose="020B0600070205080204" pitchFamily="34" charset="-128"/>
-              </a:rPr>
-              <a:pPr fontAlgn="base">
-                <a:spcBef>
-                  <a:spcPct val="0"/>
-                </a:spcBef>
-                <a:spcAft>
-                  <a:spcPct val="0"/>
-                </a:spcAft>
-                <a:defRPr/>
-              </a:pPr>
-              <a:t>‹#›</a:t>
-            </a:fld>
-            <a:endParaRPr lang="en-US" altLang="en-US">
-              <a:ea typeface="MS PGothic" panose="020B0600070205080204" pitchFamily="34" charset="-128"/>
-            </a:endParaRPr>
-          </a:p>
-        </p:txBody>
-      </p:sp>
-    </p:spTree>
-    <p:extLst>
-      <p:ext uri="{BB962C8B-B14F-4D97-AF65-F5344CB8AC3E}">
-        <p14:creationId xmlns:p14="http://schemas.microsoft.com/office/powerpoint/2010/main" val="2860712770"/>
-      </p:ext>
-    </p:extLst>
-  </p:cSld>
-  <p:clrMapOvr>
-    <a:masterClrMapping/>
-  </p:clrMapOvr>
-</p:sldLayout>
-</file>
-
-<file path=ppt/slideLayouts/slideLayout22.xml><?xml version="1.0" encoding="utf-8"?>
-<p:sldLayout xmlns:a="http://schemas.openxmlformats.org/drawingml/2006/main" xmlns:r="http://schemas.openxmlformats.org/officeDocument/2006/relationships" xmlns:p="http://schemas.openxmlformats.org/presentationml/2006/main" type="vertTitleAndTx" preserve="1">
-  <p:cSld name="Vertical Title and Text">
-    <p:spTree>
-      <p:nvGrpSpPr>
-        <p:cNvPr id="1" name=""/>
-        <p:cNvGrpSpPr/>
-        <p:nvPr/>
-      </p:nvGrpSpPr>
-      <p:grpSpPr>
-        <a:xfrm>
-          <a:off x="0" y="0"/>
-          <a:ext cx="0" cy="0"/>
-          <a:chOff x="0" y="0"/>
-          <a:chExt cx="0" cy="0"/>
-        </a:xfrm>
-      </p:grpSpPr>
-      <p:sp>
-        <p:nvSpPr>
-          <p:cNvPr id="2" name="Vertical Title 1"/>
-          <p:cNvSpPr>
-            <a:spLocks noGrp="1"/>
-          </p:cNvSpPr>
-          <p:nvPr>
-            <p:ph type="title" orient="vert"/>
-          </p:nvPr>
-        </p:nvSpPr>
-        <p:spPr>
-          <a:xfrm>
-            <a:off x="8839200" y="274639"/>
-            <a:ext cx="2743200" cy="5851525"/>
-          </a:xfrm>
-        </p:spPr>
-        <p:txBody>
-          <a:bodyPr vert="eaVert"/>
-          <a:lstStyle/>
-          <a:p>
-            <a:pPr fontAlgn="base"/>
-            <a:r>
-              <a:rPr lang="en-US" strike="noStrike" noProof="1"/>
-              <a:t>Click to edit Master title style</a:t>
-            </a:r>
-          </a:p>
-        </p:txBody>
-      </p:sp>
-      <p:sp>
-        <p:nvSpPr>
-          <p:cNvPr id="3" name="Vertical Text Placeholder 2"/>
-          <p:cNvSpPr>
-            <a:spLocks noGrp="1"/>
-          </p:cNvSpPr>
-          <p:nvPr>
-            <p:ph type="body" orient="vert" idx="1"/>
-          </p:nvPr>
-        </p:nvSpPr>
-        <p:spPr>
-          <a:xfrm>
-            <a:off x="609600" y="274639"/>
-            <a:ext cx="8026400" cy="5851525"/>
-          </a:xfrm>
-        </p:spPr>
-        <p:txBody>
-          <a:bodyPr vert="eaVert"/>
-          <a:lstStyle/>
-          <a:p>
-            <a:pPr lvl="0" fontAlgn="base"/>
-            <a:r>
-              <a:rPr lang="en-US" strike="noStrike" noProof="1"/>
-              <a:t>Click to edit Master text styles</a:t>
-            </a:r>
-          </a:p>
-          <a:p>
-            <a:pPr lvl="1" fontAlgn="base"/>
-            <a:r>
-              <a:rPr lang="en-US" strike="noStrike" noProof="1"/>
-              <a:t>Second level</a:t>
-            </a:r>
-          </a:p>
-          <a:p>
-            <a:pPr lvl="2" fontAlgn="base"/>
-            <a:r>
-              <a:rPr lang="en-US" strike="noStrike" noProof="1"/>
-              <a:t>Third level</a:t>
-            </a:r>
-          </a:p>
-          <a:p>
-            <a:pPr lvl="3" fontAlgn="base"/>
-            <a:r>
-              <a:rPr lang="en-US" strike="noStrike" noProof="1"/>
-              <a:t>Fourth level</a:t>
-            </a:r>
-          </a:p>
-          <a:p>
-            <a:pPr lvl="4" fontAlgn="base"/>
-            <a:r>
-              <a:rPr lang="en-US" strike="noStrike" noProof="1"/>
-              <a:t>Fifth level</a:t>
-            </a:r>
-          </a:p>
-        </p:txBody>
-      </p:sp>
-      <p:sp>
-        <p:nvSpPr>
-          <p:cNvPr id="4" name="Date Placeholder 3"/>
-          <p:cNvSpPr>
-            <a:spLocks noGrp="1"/>
-          </p:cNvSpPr>
-          <p:nvPr>
-            <p:ph type="dt" sz="half" idx="10"/>
-          </p:nvPr>
-        </p:nvSpPr>
-        <p:spPr/>
-        <p:txBody>
-          <a:bodyPr/>
-          <a:lstStyle/>
-          <a:p>
-            <a:pPr fontAlgn="base">
-              <a:spcBef>
-                <a:spcPct val="0"/>
-              </a:spcBef>
-              <a:spcAft>
-                <a:spcPct val="0"/>
-              </a:spcAft>
-              <a:defRPr/>
-            </a:pPr>
-            <a:fld id="{A6E4A193-398A-4DA3-ABE0-39035D81DE08}" type="datetime1">
-              <a:rPr lang="en-US" smtClean="0">
-                <a:ea typeface="MS PGothic" panose="020B0600070205080204" pitchFamily="34" charset="-128"/>
-              </a:rPr>
-              <a:pPr fontAlgn="base">
-                <a:spcBef>
-                  <a:spcPct val="0"/>
-                </a:spcBef>
-                <a:spcAft>
-                  <a:spcPct val="0"/>
-                </a:spcAft>
-                <a:defRPr/>
-              </a:pPr>
-              <a:t>9/15/2025</a:t>
-            </a:fld>
-            <a:endParaRPr lang="en-US">
-              <a:ea typeface="MS PGothic" panose="020B0600070205080204" pitchFamily="34" charset="-128"/>
-            </a:endParaRPr>
-          </a:p>
-        </p:txBody>
-      </p:sp>
-      <p:sp>
-        <p:nvSpPr>
-          <p:cNvPr id="5" name="Footer Placeholder 4"/>
-          <p:cNvSpPr>
-            <a:spLocks noGrp="1"/>
-          </p:cNvSpPr>
-          <p:nvPr>
-            <p:ph type="ftr" sz="quarter" idx="11"/>
-          </p:nvPr>
-        </p:nvSpPr>
-        <p:spPr/>
-        <p:txBody>
-          <a:bodyPr/>
-          <a:lstStyle/>
-          <a:p>
-            <a:pPr>
-              <a:defRPr/>
-            </a:pPr>
-            <a:endParaRPr lang="en-US"/>
-          </a:p>
-        </p:txBody>
-      </p:sp>
-      <p:sp>
-        <p:nvSpPr>
-          <p:cNvPr id="6" name="Slide Number Placeholder 5"/>
-          <p:cNvSpPr>
-            <a:spLocks noGrp="1"/>
-          </p:cNvSpPr>
-          <p:nvPr>
-            <p:ph type="sldNum" sz="quarter" idx="12"/>
-          </p:nvPr>
-        </p:nvSpPr>
-        <p:spPr/>
-        <p:txBody>
-          <a:bodyPr/>
-          <a:lstStyle/>
-          <a:p>
-            <a:pPr fontAlgn="base">
-              <a:spcBef>
-                <a:spcPct val="0"/>
-              </a:spcBef>
-              <a:spcAft>
-                <a:spcPct val="0"/>
-              </a:spcAft>
-              <a:defRPr/>
-            </a:pPr>
-            <a:fld id="{B724CBE9-E6DE-4AAC-8453-7697DD7A6035}" type="slidenum">
-              <a:rPr lang="en-US" altLang="en-US" smtClean="0">
-                <a:ea typeface="MS PGothic" panose="020B0600070205080204" pitchFamily="34" charset="-128"/>
-              </a:rPr>
-              <a:pPr fontAlgn="base">
-                <a:spcBef>
-                  <a:spcPct val="0"/>
-                </a:spcBef>
-                <a:spcAft>
-                  <a:spcPct val="0"/>
-                </a:spcAft>
-                <a:defRPr/>
-              </a:pPr>
-              <a:t>‹#›</a:t>
-            </a:fld>
-            <a:endParaRPr lang="en-US" altLang="en-US">
-              <a:ea typeface="MS PGothic" panose="020B0600070205080204" pitchFamily="34" charset="-128"/>
-            </a:endParaRPr>
-          </a:p>
-        </p:txBody>
-      </p:sp>
-    </p:spTree>
-    <p:extLst>
-      <p:ext uri="{BB962C8B-B14F-4D97-AF65-F5344CB8AC3E}">
-        <p14:creationId xmlns:p14="http://schemas.microsoft.com/office/powerpoint/2010/main" val="2404527788"/>
-      </p:ext>
-    </p:extLst>
-  </p:cSld>
-  <p:clrMapOvr>
-    <a:masterClrMapping/>
-  </p:clrMapOvr>
-</p:sldLayout>
-</file>
-
-<file path=ppt/slideLayouts/slideLayout3.xml><?xml version="1.0" encoding="utf-8"?>
-<p:sldLayout xmlns:a="http://schemas.openxmlformats.org/drawingml/2006/main" xmlns:r="http://schemas.openxmlformats.org/officeDocument/2006/relationships" xmlns:p="http://schemas.openxmlformats.org/presentationml/2006/main" type="secHead" preserve="1">
-  <p:cSld name="Section Header">
-    <p:spTree>
-      <p:nvGrpSpPr>
-        <p:cNvPr id="1" name=""/>
-        <p:cNvGrpSpPr/>
-        <p:nvPr/>
-      </p:nvGrpSpPr>
-      <p:grpSpPr>
-        <a:xfrm>
-          <a:off x="0" y="0"/>
-          <a:ext cx="0" cy="0"/>
-          <a:chOff x="0" y="0"/>
-          <a:chExt cx="0" cy="0"/>
-        </a:xfrm>
-      </p:grpSpPr>
-      <p:sp>
-        <p:nvSpPr>
-          <p:cNvPr id="2" name="Title 1">
-            <a:extLst>
-              <a:ext uri="{FF2B5EF4-FFF2-40B4-BE49-F238E27FC236}">
-                <a16:creationId xmlns:a16="http://schemas.microsoft.com/office/drawing/2014/main" id="{1023C68F-4357-6C0B-EFF4-6056CFE0274D}"/>
-              </a:ext>
-            </a:extLst>
-          </p:cNvPr>
-          <p:cNvSpPr>
-            <a:spLocks noGrp="1"/>
-          </p:cNvSpPr>
-          <p:nvPr>
-            <p:ph type="title"/>
-          </p:nvPr>
-        </p:nvSpPr>
-        <p:spPr>
-          <a:xfrm>
-            <a:off x="831850" y="1709738"/>
-            <a:ext cx="10515600" cy="2852737"/>
-          </a:xfrm>
-        </p:spPr>
-        <p:txBody>
-          <a:bodyPr anchor="b"/>
-          <a:lstStyle>
-            <a:lvl1pPr>
-              <a:defRPr sz="6000"/>
-            </a:lvl1pPr>
-          </a:lstStyle>
-          <a:p>
-            <a:r>
-              <a:rPr lang="en-US"/>
-              <a:t>Click to edit Master title style</a:t>
-            </a:r>
-          </a:p>
-        </p:txBody>
-      </p:sp>
-      <p:sp>
-        <p:nvSpPr>
-          <p:cNvPr id="3" name="Text Placeholder 2">
-            <a:extLst>
-              <a:ext uri="{FF2B5EF4-FFF2-40B4-BE49-F238E27FC236}">
-                <a16:creationId xmlns:a16="http://schemas.microsoft.com/office/drawing/2014/main" id="{437434F9-9472-5E2E-37A2-1C668D4EE778}"/>
-              </a:ext>
-            </a:extLst>
-          </p:cNvPr>
-          <p:cNvSpPr>
-            <a:spLocks noGrp="1"/>
-          </p:cNvSpPr>
-          <p:nvPr>
-            <p:ph type="body" idx="1"/>
-          </p:nvPr>
-        </p:nvSpPr>
-        <p:spPr>
-          <a:xfrm>
-            <a:off x="831850" y="4589463"/>
-            <a:ext cx="10515600" cy="1500187"/>
-          </a:xfrm>
-        </p:spPr>
-        <p:txBody>
-          <a:bodyPr/>
-          <a:lstStyle>
-            <a:lvl1pPr marL="0" indent="0">
-              <a:buNone/>
-              <a:defRPr sz="2400">
-                <a:solidFill>
-                  <a:schemeClr val="tx1">
-                    <a:tint val="82000"/>
-                  </a:schemeClr>
-                </a:solidFill>
-              </a:defRPr>
-            </a:lvl1pPr>
-            <a:lvl2pPr marL="457200" indent="0">
-              <a:buNone/>
-              <a:defRPr sz="2000">
-                <a:solidFill>
-                  <a:schemeClr val="tx1">
-                    <a:tint val="82000"/>
-                  </a:schemeClr>
-                </a:solidFill>
-              </a:defRPr>
-            </a:lvl2pPr>
-            <a:lvl3pPr marL="914400" indent="0">
-              <a:buNone/>
-              <a:defRPr sz="1800">
-                <a:solidFill>
-                  <a:schemeClr val="tx1">
-                    <a:tint val="82000"/>
-                  </a:schemeClr>
-                </a:solidFill>
-              </a:defRPr>
-            </a:lvl3pPr>
-            <a:lvl4pPr marL="1371600" indent="0">
-              <a:buNone/>
-              <a:defRPr sz="1600">
-                <a:solidFill>
-                  <a:schemeClr val="tx1">
-                    <a:tint val="82000"/>
-                  </a:schemeClr>
-                </a:solidFill>
-              </a:defRPr>
-            </a:lvl4pPr>
-            <a:lvl5pPr marL="1828800" indent="0">
-              <a:buNone/>
-              <a:defRPr sz="1600">
-                <a:solidFill>
-                  <a:schemeClr val="tx1">
-                    <a:tint val="82000"/>
-                  </a:schemeClr>
-                </a:solidFill>
-              </a:defRPr>
-            </a:lvl5pPr>
-            <a:lvl6pPr marL="2286000" indent="0">
-              <a:buNone/>
-              <a:defRPr sz="1600">
-                <a:solidFill>
-                  <a:schemeClr val="tx1">
-                    <a:tint val="82000"/>
-                  </a:schemeClr>
-                </a:solidFill>
-              </a:defRPr>
-            </a:lvl6pPr>
-            <a:lvl7pPr marL="2743200" indent="0">
-              <a:buNone/>
-              <a:defRPr sz="1600">
-                <a:solidFill>
-                  <a:schemeClr val="tx1">
-                    <a:tint val="82000"/>
-                  </a:schemeClr>
-                </a:solidFill>
-              </a:defRPr>
-            </a:lvl7pPr>
-            <a:lvl8pPr marL="3200400" indent="0">
-              <a:buNone/>
-              <a:defRPr sz="1600">
-                <a:solidFill>
-                  <a:schemeClr val="tx1">
-                    <a:tint val="82000"/>
-                  </a:schemeClr>
-                </a:solidFill>
-              </a:defRPr>
-            </a:lvl8pPr>
-            <a:lvl9pPr marL="3657600" indent="0">
-              <a:buNone/>
-              <a:defRPr sz="1600">
-                <a:solidFill>
-                  <a:schemeClr val="tx1">
-                    <a:tint val="82000"/>
-                  </a:schemeClr>
-                </a:solidFill>
-              </a:defRPr>
-            </a:lvl9pPr>
-          </a:lstStyle>
-          <a:p>
-            <a:pPr lvl="0"/>
-            <a:r>
-              <a:rPr lang="en-US"/>
-              <a:t>Click to edit Master text styles</a:t>
-            </a:r>
-          </a:p>
-        </p:txBody>
-      </p:sp>
-      <p:sp>
-        <p:nvSpPr>
-          <p:cNvPr id="4" name="Date Placeholder 3">
-            <a:extLst>
-              <a:ext uri="{FF2B5EF4-FFF2-40B4-BE49-F238E27FC236}">
-                <a16:creationId xmlns:a16="http://schemas.microsoft.com/office/drawing/2014/main" id="{D165E404-4C0A-77ED-B4F0-F150408E2701}"/>
-              </a:ext>
-            </a:extLst>
-          </p:cNvPr>
-          <p:cNvSpPr>
-            <a:spLocks noGrp="1"/>
-          </p:cNvSpPr>
-          <p:nvPr>
-            <p:ph type="dt" sz="half" idx="10"/>
-          </p:nvPr>
-        </p:nvSpPr>
-        <p:spPr/>
-        <p:txBody>
-          <a:bodyPr/>
-          <a:lstStyle/>
-          <a:p>
-            <a:fld id="{F10901DB-E840-4150-8207-866BDD25D22F}" type="datetimeFigureOut">
-              <a:rPr lang="en-US" smtClean="0"/>
-              <a:t>9/15/2025</a:t>
-            </a:fld>
-            <a:endParaRPr lang="en-US"/>
-          </a:p>
-        </p:txBody>
-      </p:sp>
-      <p:sp>
-        <p:nvSpPr>
-          <p:cNvPr id="5" name="Footer Placeholder 4">
-            <a:extLst>
-              <a:ext uri="{FF2B5EF4-FFF2-40B4-BE49-F238E27FC236}">
-                <a16:creationId xmlns:a16="http://schemas.microsoft.com/office/drawing/2014/main" id="{CC47E8BC-3C9D-288D-A877-4B49F26D4145}"/>
-              </a:ext>
-            </a:extLst>
-          </p:cNvPr>
-          <p:cNvSpPr>
-            <a:spLocks noGrp="1"/>
-          </p:cNvSpPr>
-          <p:nvPr>
-            <p:ph type="ftr" sz="quarter" idx="11"/>
-          </p:nvPr>
-        </p:nvSpPr>
-        <p:spPr/>
-        <p:txBody>
-          <a:bodyPr/>
-          <a:lstStyle/>
-          <a:p>
-            <a:endParaRPr lang="en-US"/>
-          </a:p>
-        </p:txBody>
-      </p:sp>
-      <p:sp>
-        <p:nvSpPr>
-          <p:cNvPr id="6" name="Slide Number Placeholder 5">
-            <a:extLst>
-              <a:ext uri="{FF2B5EF4-FFF2-40B4-BE49-F238E27FC236}">
-                <a16:creationId xmlns:a16="http://schemas.microsoft.com/office/drawing/2014/main" id="{4D304336-DB89-C939-F991-F3B56B48D96C}"/>
-              </a:ext>
-            </a:extLst>
-          </p:cNvPr>
-          <p:cNvSpPr>
-            <a:spLocks noGrp="1"/>
-          </p:cNvSpPr>
-          <p:nvPr>
-            <p:ph type="sldNum" sz="quarter" idx="12"/>
-          </p:nvPr>
-        </p:nvSpPr>
-        <p:spPr/>
-        <p:txBody>
-          <a:bodyPr/>
-          <a:lstStyle/>
-          <a:p>
-            <a:fld id="{C41024BC-5968-4735-8D30-B72DEF6BE683}" type="slidenum">
-              <a:rPr lang="en-US" smtClean="0"/>
-              <a:t>‹#›</a:t>
-            </a:fld>
-            <a:endParaRPr lang="en-US"/>
-          </a:p>
-        </p:txBody>
-      </p:sp>
-    </p:spTree>
-    <p:extLst>
-      <p:ext uri="{BB962C8B-B14F-4D97-AF65-F5344CB8AC3E}">
-        <p14:creationId xmlns:p14="http://schemas.microsoft.com/office/powerpoint/2010/main" val="988383939"/>
-      </p:ext>
-    </p:extLst>
-  </p:cSld>
-  <p:clrMapOvr>
-    <a:masterClrMapping/>
-  </p:clrMapOvr>
-</p:sldLayout>
-</file>
-
-<file path=ppt/slideLayouts/slideLayout4.xml><?xml version="1.0" encoding="utf-8"?>
-<p:sldLayout xmlns:a="http://schemas.openxmlformats.org/drawingml/2006/main" xmlns:r="http://schemas.openxmlformats.org/officeDocument/2006/relationships" xmlns:p="http://schemas.openxmlformats.org/presentationml/2006/main" type="twoObj" preserve="1">
-  <p:cSld name="Two Content">
-    <p:spTree>
-      <p:nvGrpSpPr>
-        <p:cNvPr id="1" name=""/>
-        <p:cNvGrpSpPr/>
-        <p:nvPr/>
-      </p:nvGrpSpPr>
-      <p:grpSpPr>
-        <a:xfrm>
-          <a:off x="0" y="0"/>
-          <a:ext cx="0" cy="0"/>
-          <a:chOff x="0" y="0"/>
-          <a:chExt cx="0" cy="0"/>
-        </a:xfrm>
-      </p:grpSpPr>
-      <p:sp>
-        <p:nvSpPr>
-          <p:cNvPr id="2" name="Title 1">
-            <a:extLst>
-              <a:ext uri="{FF2B5EF4-FFF2-40B4-BE49-F238E27FC236}">
-                <a16:creationId xmlns:a16="http://schemas.microsoft.com/office/drawing/2014/main" id="{30ADE173-84FE-131A-FDEC-10EB764DA2F6}"/>
-              </a:ext>
-            </a:extLst>
-          </p:cNvPr>
-          <p:cNvSpPr>
-            <a:spLocks noGrp="1"/>
-          </p:cNvSpPr>
-          <p:nvPr>
-            <p:ph type="title"/>
-          </p:nvPr>
-        </p:nvSpPr>
-        <p:spPr/>
-        <p:txBody>
-          <a:bodyPr/>
-          <a:lstStyle/>
-          <a:p>
-            <a:r>
-              <a:rPr lang="en-US"/>
-              <a:t>Click to edit Master title style</a:t>
-            </a:r>
-          </a:p>
-        </p:txBody>
-      </p:sp>
-      <p:sp>
-        <p:nvSpPr>
-          <p:cNvPr id="3" name="Content Placeholder 2">
-            <a:extLst>
-              <a:ext uri="{FF2B5EF4-FFF2-40B4-BE49-F238E27FC236}">
-                <a16:creationId xmlns:a16="http://schemas.microsoft.com/office/drawing/2014/main" id="{499AD527-C4A0-467A-A074-20997F2F9B79}"/>
-              </a:ext>
-            </a:extLst>
-          </p:cNvPr>
-          <p:cNvSpPr>
-            <a:spLocks noGrp="1"/>
-          </p:cNvSpPr>
-          <p:nvPr>
-            <p:ph sz="half" idx="1"/>
-          </p:nvPr>
-        </p:nvSpPr>
-        <p:spPr>
-          <a:xfrm>
-            <a:off x="838200" y="1825625"/>
-            <a:ext cx="5181600" cy="4351338"/>
-          </a:xfrm>
-        </p:spPr>
-        <p:txBody>
-          <a:bodyPr/>
-          <a:lstStyle/>
-          <a:p>
-            <a:pPr lvl="0"/>
-            <a:r>
-              <a:rPr lang="en-US"/>
-              <a:t>Click to edit Master text styles</a:t>
-            </a:r>
-          </a:p>
-          <a:p>
-            <a:pPr lvl="1"/>
-            <a:r>
-              <a:rPr lang="en-US"/>
-              <a:t>Second level</a:t>
-            </a:r>
-          </a:p>
-          <a:p>
-            <a:pPr lvl="2"/>
-            <a:r>
-              <a:rPr lang="en-US"/>
-              <a:t>Third level</a:t>
-            </a:r>
-          </a:p>
-          <a:p>
-            <a:pPr lvl="3"/>
-            <a:r>
-              <a:rPr lang="en-US"/>
-              <a:t>Fourth level</a:t>
-            </a:r>
-          </a:p>
-          <a:p>
-            <a:pPr lvl="4"/>
-            <a:r>
-              <a:rPr lang="en-US"/>
-              <a:t>Fifth level</a:t>
-            </a:r>
-          </a:p>
-        </p:txBody>
-      </p:sp>
-      <p:sp>
-        <p:nvSpPr>
-          <p:cNvPr id="4" name="Content Placeholder 3">
-            <a:extLst>
-              <a:ext uri="{FF2B5EF4-FFF2-40B4-BE49-F238E27FC236}">
-                <a16:creationId xmlns:a16="http://schemas.microsoft.com/office/drawing/2014/main" id="{CAE8166C-5D25-2F7A-68E2-89811F37E2DA}"/>
-              </a:ext>
-            </a:extLst>
-          </p:cNvPr>
-          <p:cNvSpPr>
-            <a:spLocks noGrp="1"/>
-          </p:cNvSpPr>
-          <p:nvPr>
-            <p:ph sz="half" idx="2"/>
-          </p:nvPr>
-        </p:nvSpPr>
-        <p:spPr>
-          <a:xfrm>
-            <a:off x="6172200" y="1825625"/>
-            <a:ext cx="5181600" cy="4351338"/>
-          </a:xfrm>
-        </p:spPr>
-        <p:txBody>
-          <a:bodyPr/>
-          <a:lstStyle/>
-          <a:p>
-            <a:pPr lvl="0"/>
-            <a:r>
-              <a:rPr lang="en-US"/>
-              <a:t>Click to edit Master text styles</a:t>
-            </a:r>
-          </a:p>
-          <a:p>
-            <a:pPr lvl="1"/>
-            <a:r>
-              <a:rPr lang="en-US"/>
-              <a:t>Second level</a:t>
-            </a:r>
-          </a:p>
-          <a:p>
-            <a:pPr lvl="2"/>
-            <a:r>
-              <a:rPr lang="en-US"/>
-              <a:t>Third level</a:t>
-            </a:r>
-          </a:p>
-          <a:p>
-            <a:pPr lvl="3"/>
-            <a:r>
-              <a:rPr lang="en-US"/>
-              <a:t>Fourth level</a:t>
-            </a:r>
-          </a:p>
-          <a:p>
-            <a:pPr lvl="4"/>
-            <a:r>
-              <a:rPr lang="en-US"/>
-              <a:t>Fifth level</a:t>
-            </a:r>
-          </a:p>
-        </p:txBody>
-      </p:sp>
-      <p:sp>
-        <p:nvSpPr>
-          <p:cNvPr id="5" name="Date Placeholder 4">
-            <a:extLst>
-              <a:ext uri="{FF2B5EF4-FFF2-40B4-BE49-F238E27FC236}">
-                <a16:creationId xmlns:a16="http://schemas.microsoft.com/office/drawing/2014/main" id="{89FA11F9-6FE3-AE70-BB60-74D68595EF93}"/>
-              </a:ext>
-            </a:extLst>
-          </p:cNvPr>
-          <p:cNvSpPr>
-            <a:spLocks noGrp="1"/>
-          </p:cNvSpPr>
-          <p:nvPr>
-            <p:ph type="dt" sz="half" idx="10"/>
-          </p:nvPr>
-        </p:nvSpPr>
-        <p:spPr/>
-        <p:txBody>
-          <a:bodyPr/>
-          <a:lstStyle/>
-          <a:p>
-            <a:fld id="{F10901DB-E840-4150-8207-866BDD25D22F}" type="datetimeFigureOut">
-              <a:rPr lang="en-US" smtClean="0"/>
-              <a:t>9/15/2025</a:t>
-            </a:fld>
-            <a:endParaRPr lang="en-US"/>
-          </a:p>
-        </p:txBody>
-      </p:sp>
-      <p:sp>
-        <p:nvSpPr>
-          <p:cNvPr id="6" name="Footer Placeholder 5">
-            <a:extLst>
-              <a:ext uri="{FF2B5EF4-FFF2-40B4-BE49-F238E27FC236}">
-                <a16:creationId xmlns:a16="http://schemas.microsoft.com/office/drawing/2014/main" id="{4BDC4B88-4529-9622-3DFF-0A9E8F047F9B}"/>
-              </a:ext>
-            </a:extLst>
-          </p:cNvPr>
-          <p:cNvSpPr>
-            <a:spLocks noGrp="1"/>
-          </p:cNvSpPr>
-          <p:nvPr>
-            <p:ph type="ftr" sz="quarter" idx="11"/>
-          </p:nvPr>
-        </p:nvSpPr>
-        <p:spPr/>
-        <p:txBody>
-          <a:bodyPr/>
-          <a:lstStyle/>
-          <a:p>
-            <a:endParaRPr lang="en-US"/>
-          </a:p>
-        </p:txBody>
-      </p:sp>
-      <p:sp>
-        <p:nvSpPr>
-          <p:cNvPr id="7" name="Slide Number Placeholder 6">
-            <a:extLst>
-              <a:ext uri="{FF2B5EF4-FFF2-40B4-BE49-F238E27FC236}">
-                <a16:creationId xmlns:a16="http://schemas.microsoft.com/office/drawing/2014/main" id="{31149887-301D-192D-6E4E-0B5CD9F58651}"/>
-              </a:ext>
-            </a:extLst>
-          </p:cNvPr>
-          <p:cNvSpPr>
-            <a:spLocks noGrp="1"/>
-          </p:cNvSpPr>
-          <p:nvPr>
-            <p:ph type="sldNum" sz="quarter" idx="12"/>
-          </p:nvPr>
-        </p:nvSpPr>
-        <p:spPr/>
-        <p:txBody>
-          <a:bodyPr/>
-          <a:lstStyle/>
-          <a:p>
-            <a:fld id="{C41024BC-5968-4735-8D30-B72DEF6BE683}" type="slidenum">
-              <a:rPr lang="en-US" smtClean="0"/>
-              <a:t>‹#›</a:t>
-            </a:fld>
-            <a:endParaRPr lang="en-US"/>
-          </a:p>
-        </p:txBody>
-      </p:sp>
-    </p:spTree>
-    <p:extLst>
-      <p:ext uri="{BB962C8B-B14F-4D97-AF65-F5344CB8AC3E}">
-        <p14:creationId xmlns:p14="http://schemas.microsoft.com/office/powerpoint/2010/main" val="3610742292"/>
-      </p:ext>
-    </p:extLst>
-  </p:cSld>
-  <p:clrMapOvr>
-    <a:masterClrMapping/>
-  </p:clrMapOvr>
-</p:sldLayout>
-</file>
-
-<file path=ppt/slideLayouts/slideLayout5.xml><?xml version="1.0" encoding="utf-8"?>
-<p:sldLayout xmlns:a="http://schemas.openxmlformats.org/drawingml/2006/main" xmlns:r="http://schemas.openxmlformats.org/officeDocument/2006/relationships" xmlns:p="http://schemas.openxmlformats.org/presentationml/2006/main" type="twoTxTwoObj" preserve="1">
-  <p:cSld name="Comparison">
-    <p:spTree>
-      <p:nvGrpSpPr>
-        <p:cNvPr id="1" name=""/>
-        <p:cNvGrpSpPr/>
-        <p:nvPr/>
-      </p:nvGrpSpPr>
-      <p:grpSpPr>
-        <a:xfrm>
-          <a:off x="0" y="0"/>
-          <a:ext cx="0" cy="0"/>
-          <a:chOff x="0" y="0"/>
-          <a:chExt cx="0" cy="0"/>
-        </a:xfrm>
-      </p:grpSpPr>
-      <p:sp>
-        <p:nvSpPr>
-          <p:cNvPr id="2" name="Title 1">
-            <a:extLst>
-              <a:ext uri="{FF2B5EF4-FFF2-40B4-BE49-F238E27FC236}">
-                <a16:creationId xmlns:a16="http://schemas.microsoft.com/office/drawing/2014/main" id="{69E8185E-3938-13F4-071F-9C47FBD60983}"/>
-              </a:ext>
-            </a:extLst>
-          </p:cNvPr>
-          <p:cNvSpPr>
-            <a:spLocks noGrp="1"/>
-          </p:cNvSpPr>
-          <p:nvPr>
-            <p:ph type="title"/>
-          </p:nvPr>
-        </p:nvSpPr>
-        <p:spPr>
-          <a:xfrm>
-            <a:off x="839788" y="365125"/>
-            <a:ext cx="10515600" cy="1325563"/>
-          </a:xfrm>
-        </p:spPr>
-        <p:txBody>
-          <a:bodyPr/>
-          <a:lstStyle/>
-          <a:p>
-            <a:r>
-              <a:rPr lang="en-US"/>
-              <a:t>Click to edit Master title style</a:t>
-            </a:r>
-          </a:p>
-        </p:txBody>
-      </p:sp>
-      <p:sp>
-        <p:nvSpPr>
-          <p:cNvPr id="3" name="Text Placeholder 2">
-            <a:extLst>
-              <a:ext uri="{FF2B5EF4-FFF2-40B4-BE49-F238E27FC236}">
-                <a16:creationId xmlns:a16="http://schemas.microsoft.com/office/drawing/2014/main" id="{85328229-9E26-4A8D-CE13-5195A4F3BEBA}"/>
-              </a:ext>
-            </a:extLst>
-          </p:cNvPr>
-          <p:cNvSpPr>
-            <a:spLocks noGrp="1"/>
-          </p:cNvSpPr>
-          <p:nvPr>
-            <p:ph type="body" idx="1"/>
-          </p:nvPr>
-        </p:nvSpPr>
-        <p:spPr>
-          <a:xfrm>
-            <a:off x="839788" y="1681163"/>
-            <a:ext cx="5157787" cy="823912"/>
-          </a:xfrm>
-        </p:spPr>
-        <p:txBody>
-          <a:bodyPr anchor="b"/>
-          <a:lstStyle>
-            <a:lvl1pPr marL="0" indent="0">
-              <a:buNone/>
-              <a:defRPr sz="2400" b="1"/>
-            </a:lvl1pPr>
-            <a:lvl2pPr marL="457200" indent="0">
-              <a:buNone/>
-              <a:defRPr sz="2000" b="1"/>
-            </a:lvl2pPr>
-            <a:lvl3pPr marL="914400" indent="0">
-              <a:buNone/>
-              <a:defRPr sz="1800" b="1"/>
-            </a:lvl3pPr>
-            <a:lvl4pPr marL="1371600" indent="0">
-              <a:buNone/>
-              <a:defRPr sz="1600" b="1"/>
-            </a:lvl4pPr>
-            <a:lvl5pPr marL="1828800" indent="0">
-              <a:buNone/>
-              <a:defRPr sz="1600" b="1"/>
-            </a:lvl5pPr>
-            <a:lvl6pPr marL="2286000" indent="0">
-              <a:buNone/>
-              <a:defRPr sz="1600" b="1"/>
-            </a:lvl6pPr>
-            <a:lvl7pPr marL="2743200" indent="0">
-              <a:buNone/>
-              <a:defRPr sz="1600" b="1"/>
-            </a:lvl7pPr>
-            <a:lvl8pPr marL="3200400" indent="0">
-              <a:buNone/>
-              <a:defRPr sz="1600" b="1"/>
-            </a:lvl8pPr>
-            <a:lvl9pPr marL="3657600" indent="0">
-              <a:buNone/>
-              <a:defRPr sz="1600" b="1"/>
-            </a:lvl9pPr>
-          </a:lstStyle>
-          <a:p>
-            <a:pPr lvl="0"/>
-            <a:r>
-              <a:rPr lang="en-US"/>
-              <a:t>Click to edit Master text styles</a:t>
-            </a:r>
-          </a:p>
-        </p:txBody>
-      </p:sp>
-      <p:sp>
-        <p:nvSpPr>
-          <p:cNvPr id="4" name="Content Placeholder 3">
-            <a:extLst>
-              <a:ext uri="{FF2B5EF4-FFF2-40B4-BE49-F238E27FC236}">
-                <a16:creationId xmlns:a16="http://schemas.microsoft.com/office/drawing/2014/main" id="{2B04DE16-D620-E567-A074-2B6A54D885ED}"/>
-              </a:ext>
-            </a:extLst>
-          </p:cNvPr>
-          <p:cNvSpPr>
-            <a:spLocks noGrp="1"/>
-          </p:cNvSpPr>
-          <p:nvPr>
-            <p:ph sz="half" idx="2"/>
-          </p:nvPr>
-        </p:nvSpPr>
-        <p:spPr>
-          <a:xfrm>
-            <a:off x="839788" y="2505075"/>
-            <a:ext cx="5157787" cy="3684588"/>
-          </a:xfrm>
-        </p:spPr>
-        <p:txBody>
-          <a:bodyPr/>
-          <a:lstStyle/>
-          <a:p>
-            <a:pPr lvl="0"/>
-            <a:r>
-              <a:rPr lang="en-US"/>
-              <a:t>Click to edit Master text styles</a:t>
-            </a:r>
-          </a:p>
-          <a:p>
-            <a:pPr lvl="1"/>
-            <a:r>
-              <a:rPr lang="en-US"/>
-              <a:t>Second level</a:t>
-            </a:r>
-          </a:p>
-          <a:p>
-            <a:pPr lvl="2"/>
-            <a:r>
-              <a:rPr lang="en-US"/>
-              <a:t>Third level</a:t>
-            </a:r>
-          </a:p>
-          <a:p>
-            <a:pPr lvl="3"/>
-            <a:r>
-              <a:rPr lang="en-US"/>
-              <a:t>Fourth level</a:t>
-            </a:r>
-          </a:p>
-          <a:p>
-            <a:pPr lvl="4"/>
-            <a:r>
-              <a:rPr lang="en-US"/>
-              <a:t>Fifth level</a:t>
-            </a:r>
-          </a:p>
-        </p:txBody>
-      </p:sp>
-      <p:sp>
-        <p:nvSpPr>
-          <p:cNvPr id="5" name="Text Placeholder 4">
-            <a:extLst>
-              <a:ext uri="{FF2B5EF4-FFF2-40B4-BE49-F238E27FC236}">
-                <a16:creationId xmlns:a16="http://schemas.microsoft.com/office/drawing/2014/main" id="{8CA6B1B9-8555-7B1C-2D30-CA652A281895}"/>
-              </a:ext>
-            </a:extLst>
-          </p:cNvPr>
-          <p:cNvSpPr>
-            <a:spLocks noGrp="1"/>
-          </p:cNvSpPr>
-          <p:nvPr>
-            <p:ph type="body" sz="quarter" idx="3"/>
-          </p:nvPr>
-        </p:nvSpPr>
-        <p:spPr>
-          <a:xfrm>
-            <a:off x="6172200" y="1681163"/>
-            <a:ext cx="5183188" cy="823912"/>
-          </a:xfrm>
-        </p:spPr>
-        <p:txBody>
-          <a:bodyPr anchor="b"/>
-          <a:lstStyle>
-            <a:lvl1pPr marL="0" indent="0">
-              <a:buNone/>
-              <a:defRPr sz="2400" b="1"/>
-            </a:lvl1pPr>
-            <a:lvl2pPr marL="457200" indent="0">
-              <a:buNone/>
-              <a:defRPr sz="2000" b="1"/>
-            </a:lvl2pPr>
-            <a:lvl3pPr marL="914400" indent="0">
-              <a:buNone/>
-              <a:defRPr sz="1800" b="1"/>
-            </a:lvl3pPr>
-            <a:lvl4pPr marL="1371600" indent="0">
-              <a:buNone/>
-              <a:defRPr sz="1600" b="1"/>
-            </a:lvl4pPr>
-            <a:lvl5pPr marL="1828800" indent="0">
-              <a:buNone/>
-              <a:defRPr sz="1600" b="1"/>
-            </a:lvl5pPr>
-            <a:lvl6pPr marL="2286000" indent="0">
-              <a:buNone/>
-              <a:defRPr sz="1600" b="1"/>
-            </a:lvl6pPr>
-            <a:lvl7pPr marL="2743200" indent="0">
-              <a:buNone/>
-              <a:defRPr sz="1600" b="1"/>
-            </a:lvl7pPr>
-            <a:lvl8pPr marL="3200400" indent="0">
-              <a:buNone/>
-              <a:defRPr sz="1600" b="1"/>
-            </a:lvl8pPr>
-            <a:lvl9pPr marL="3657600" indent="0">
-              <a:buNone/>
-              <a:defRPr sz="1600" b="1"/>
-            </a:lvl9pPr>
-          </a:lstStyle>
-          <a:p>
-            <a:pPr lvl="0"/>
-            <a:r>
-              <a:rPr lang="en-US"/>
-              <a:t>Click to edit Master text styles</a:t>
-            </a:r>
-          </a:p>
-        </p:txBody>
-      </p:sp>
-      <p:sp>
-        <p:nvSpPr>
-          <p:cNvPr id="6" name="Content Placeholder 5">
-            <a:extLst>
-              <a:ext uri="{FF2B5EF4-FFF2-40B4-BE49-F238E27FC236}">
-                <a16:creationId xmlns:a16="http://schemas.microsoft.com/office/drawing/2014/main" id="{7D0F61AE-EC15-64C2-A098-EC225FEFBFBA}"/>
-              </a:ext>
-            </a:extLst>
-          </p:cNvPr>
-          <p:cNvSpPr>
-            <a:spLocks noGrp="1"/>
-          </p:cNvSpPr>
-          <p:nvPr>
-            <p:ph sz="quarter" idx="4"/>
-          </p:nvPr>
-        </p:nvSpPr>
-        <p:spPr>
-          <a:xfrm>
-            <a:off x="6172200" y="2505075"/>
-            <a:ext cx="5183188" cy="3684588"/>
-          </a:xfrm>
-        </p:spPr>
-        <p:txBody>
-          <a:bodyPr/>
-          <a:lstStyle/>
-          <a:p>
-            <a:pPr lvl="0"/>
-            <a:r>
-              <a:rPr lang="en-US"/>
-              <a:t>Click to edit Master text styles</a:t>
-            </a:r>
-          </a:p>
-          <a:p>
-            <a:pPr lvl="1"/>
-            <a:r>
-              <a:rPr lang="en-US"/>
-              <a:t>Second level</a:t>
-            </a:r>
-          </a:p>
-          <a:p>
-            <a:pPr lvl="2"/>
-            <a:r>
-              <a:rPr lang="en-US"/>
-              <a:t>Third level</a:t>
-            </a:r>
-          </a:p>
-          <a:p>
-            <a:pPr lvl="3"/>
-            <a:r>
-              <a:rPr lang="en-US"/>
-              <a:t>Fourth level</a:t>
-            </a:r>
-          </a:p>
-          <a:p>
-            <a:pPr lvl="4"/>
-            <a:r>
-              <a:rPr lang="en-US"/>
-              <a:t>Fifth level</a:t>
-            </a:r>
-          </a:p>
-        </p:txBody>
-      </p:sp>
-      <p:sp>
-        <p:nvSpPr>
-          <p:cNvPr id="7" name="Date Placeholder 6">
-            <a:extLst>
-              <a:ext uri="{FF2B5EF4-FFF2-40B4-BE49-F238E27FC236}">
-                <a16:creationId xmlns:a16="http://schemas.microsoft.com/office/drawing/2014/main" id="{792DFBB5-D787-915A-9095-24B00FA2AC94}"/>
-              </a:ext>
-            </a:extLst>
-          </p:cNvPr>
-          <p:cNvSpPr>
-            <a:spLocks noGrp="1"/>
-          </p:cNvSpPr>
-          <p:nvPr>
-            <p:ph type="dt" sz="half" idx="10"/>
-          </p:nvPr>
-        </p:nvSpPr>
-        <p:spPr/>
-        <p:txBody>
-          <a:bodyPr/>
-          <a:lstStyle/>
-          <a:p>
-            <a:fld id="{F10901DB-E840-4150-8207-866BDD25D22F}" type="datetimeFigureOut">
-              <a:rPr lang="en-US" smtClean="0"/>
-              <a:t>9/15/2025</a:t>
-            </a:fld>
-            <a:endParaRPr lang="en-US"/>
-          </a:p>
-        </p:txBody>
-      </p:sp>
-      <p:sp>
-        <p:nvSpPr>
-          <p:cNvPr id="8" name="Footer Placeholder 7">
-            <a:extLst>
-              <a:ext uri="{FF2B5EF4-FFF2-40B4-BE49-F238E27FC236}">
-                <a16:creationId xmlns:a16="http://schemas.microsoft.com/office/drawing/2014/main" id="{F711DC54-8C33-C55A-F365-B3AC72A6BA03}"/>
-              </a:ext>
-            </a:extLst>
-          </p:cNvPr>
-          <p:cNvSpPr>
-            <a:spLocks noGrp="1"/>
-          </p:cNvSpPr>
-          <p:nvPr>
-            <p:ph type="ftr" sz="quarter" idx="11"/>
-          </p:nvPr>
-        </p:nvSpPr>
-        <p:spPr/>
-        <p:txBody>
-          <a:bodyPr/>
-          <a:lstStyle/>
-          <a:p>
-            <a:endParaRPr lang="en-US"/>
-          </a:p>
-        </p:txBody>
-      </p:sp>
-      <p:sp>
-        <p:nvSpPr>
-          <p:cNvPr id="9" name="Slide Number Placeholder 8">
-            <a:extLst>
-              <a:ext uri="{FF2B5EF4-FFF2-40B4-BE49-F238E27FC236}">
-                <a16:creationId xmlns:a16="http://schemas.microsoft.com/office/drawing/2014/main" id="{65363D3E-D67B-702D-ADA5-2F2C9111BF9F}"/>
-              </a:ext>
-            </a:extLst>
-          </p:cNvPr>
-          <p:cNvSpPr>
-            <a:spLocks noGrp="1"/>
-          </p:cNvSpPr>
-          <p:nvPr>
-            <p:ph type="sldNum" sz="quarter" idx="12"/>
-          </p:nvPr>
-        </p:nvSpPr>
-        <p:spPr/>
-        <p:txBody>
-          <a:bodyPr/>
-          <a:lstStyle/>
-          <a:p>
-            <a:fld id="{C41024BC-5968-4735-8D30-B72DEF6BE683}" type="slidenum">
-              <a:rPr lang="en-US" smtClean="0"/>
-              <a:t>‹#›</a:t>
-            </a:fld>
-            <a:endParaRPr lang="en-US"/>
-          </a:p>
-        </p:txBody>
-      </p:sp>
-    </p:spTree>
-    <p:extLst>
-      <p:ext uri="{BB962C8B-B14F-4D97-AF65-F5344CB8AC3E}">
-        <p14:creationId xmlns:p14="http://schemas.microsoft.com/office/powerpoint/2010/main" val="961651307"/>
-      </p:ext>
-    </p:extLst>
-  </p:cSld>
-  <p:clrMapOvr>
-    <a:masterClrMapping/>
-  </p:clrMapOvr>
-</p:sldLayout>
-</file>
-
-<file path=ppt/slideLayouts/slideLayout6.xml><?xml version="1.0" encoding="utf-8"?>
-<p:sldLayout xmlns:a="http://schemas.openxmlformats.org/drawingml/2006/main" xmlns:r="http://schemas.openxmlformats.org/officeDocument/2006/relationships" xmlns:p="http://schemas.openxmlformats.org/presentationml/2006/main" type="titleOnly" preserve="1">
-  <p:cSld name="Title Only">
-    <p:spTree>
-      <p:nvGrpSpPr>
-        <p:cNvPr id="1" name=""/>
-        <p:cNvGrpSpPr/>
-        <p:nvPr/>
-      </p:nvGrpSpPr>
-      <p:grpSpPr>
-        <a:xfrm>
-          <a:off x="0" y="0"/>
-          <a:ext cx="0" cy="0"/>
-          <a:chOff x="0" y="0"/>
-          <a:chExt cx="0" cy="0"/>
-        </a:xfrm>
-      </p:grpSpPr>
-      <p:sp>
-        <p:nvSpPr>
-          <p:cNvPr id="2" name="Title 1">
-            <a:extLst>
-              <a:ext uri="{FF2B5EF4-FFF2-40B4-BE49-F238E27FC236}">
-                <a16:creationId xmlns:a16="http://schemas.microsoft.com/office/drawing/2014/main" id="{3B4C649D-C7B1-FC2E-BE2E-20E16B49B259}"/>
-              </a:ext>
-            </a:extLst>
-          </p:cNvPr>
-          <p:cNvSpPr>
-            <a:spLocks noGrp="1"/>
-          </p:cNvSpPr>
-          <p:nvPr>
-            <p:ph type="title"/>
-          </p:nvPr>
-        </p:nvSpPr>
-        <p:spPr/>
-        <p:txBody>
-          <a:bodyPr/>
-          <a:lstStyle/>
-          <a:p>
-            <a:r>
-              <a:rPr lang="en-US"/>
-              <a:t>Click to edit Master title style</a:t>
-            </a:r>
-          </a:p>
-        </p:txBody>
-      </p:sp>
-      <p:sp>
-        <p:nvSpPr>
-          <p:cNvPr id="3" name="Date Placeholder 2">
-            <a:extLst>
-              <a:ext uri="{FF2B5EF4-FFF2-40B4-BE49-F238E27FC236}">
-                <a16:creationId xmlns:a16="http://schemas.microsoft.com/office/drawing/2014/main" id="{486BDD17-2483-9991-3C02-F104B65F2F73}"/>
-              </a:ext>
-            </a:extLst>
-          </p:cNvPr>
-          <p:cNvSpPr>
-            <a:spLocks noGrp="1"/>
-          </p:cNvSpPr>
-          <p:nvPr>
-            <p:ph type="dt" sz="half" idx="10"/>
-          </p:nvPr>
-        </p:nvSpPr>
-        <p:spPr/>
-        <p:txBody>
-          <a:bodyPr/>
-          <a:lstStyle/>
-          <a:p>
-            <a:fld id="{F10901DB-E840-4150-8207-866BDD25D22F}" type="datetimeFigureOut">
-              <a:rPr lang="en-US" smtClean="0"/>
-              <a:t>9/15/2025</a:t>
-            </a:fld>
-            <a:endParaRPr lang="en-US"/>
-          </a:p>
-        </p:txBody>
-      </p:sp>
-      <p:sp>
-        <p:nvSpPr>
-          <p:cNvPr id="4" name="Footer Placeholder 3">
-            <a:extLst>
-              <a:ext uri="{FF2B5EF4-FFF2-40B4-BE49-F238E27FC236}">
-                <a16:creationId xmlns:a16="http://schemas.microsoft.com/office/drawing/2014/main" id="{9D1C0FB9-E42D-9741-BA7C-C811901B70EC}"/>
-              </a:ext>
-            </a:extLst>
-          </p:cNvPr>
-          <p:cNvSpPr>
-            <a:spLocks noGrp="1"/>
-          </p:cNvSpPr>
-          <p:nvPr>
-            <p:ph type="ftr" sz="quarter" idx="11"/>
-          </p:nvPr>
-        </p:nvSpPr>
-        <p:spPr/>
-        <p:txBody>
-          <a:bodyPr/>
-          <a:lstStyle/>
-          <a:p>
-            <a:endParaRPr lang="en-US"/>
-          </a:p>
-        </p:txBody>
-      </p:sp>
-      <p:sp>
-        <p:nvSpPr>
-          <p:cNvPr id="5" name="Slide Number Placeholder 4">
-            <a:extLst>
-              <a:ext uri="{FF2B5EF4-FFF2-40B4-BE49-F238E27FC236}">
-                <a16:creationId xmlns:a16="http://schemas.microsoft.com/office/drawing/2014/main" id="{BA55081D-BB5A-9B2F-8F12-4376917E0894}"/>
-              </a:ext>
-            </a:extLst>
-          </p:cNvPr>
-          <p:cNvSpPr>
-            <a:spLocks noGrp="1"/>
-          </p:cNvSpPr>
-          <p:nvPr>
-            <p:ph type="sldNum" sz="quarter" idx="12"/>
-          </p:nvPr>
-        </p:nvSpPr>
-        <p:spPr/>
-        <p:txBody>
-          <a:bodyPr/>
-          <a:lstStyle/>
-          <a:p>
-            <a:fld id="{C41024BC-5968-4735-8D30-B72DEF6BE683}" type="slidenum">
-              <a:rPr lang="en-US" smtClean="0"/>
-              <a:t>‹#›</a:t>
-            </a:fld>
-            <a:endParaRPr lang="en-US"/>
-          </a:p>
-        </p:txBody>
-      </p:sp>
-    </p:spTree>
-    <p:extLst>
-      <p:ext uri="{BB962C8B-B14F-4D97-AF65-F5344CB8AC3E}">
-        <p14:creationId xmlns:p14="http://schemas.microsoft.com/office/powerpoint/2010/main" val="2649400178"/>
-      </p:ext>
-    </p:extLst>
-  </p:cSld>
-  <p:clrMapOvr>
-    <a:masterClrMapping/>
-  </p:clrMapOvr>
-</p:sldLayout>
-</file>
-
-<file path=ppt/slideLayouts/slideLayout7.xml><?xml version="1.0" encoding="utf-8"?>
-<p:sldLayout xmlns:a="http://schemas.openxmlformats.org/drawingml/2006/main" xmlns:r="http://schemas.openxmlformats.org/officeDocument/2006/relationships" xmlns:p="http://schemas.openxmlformats.org/presentationml/2006/main" type="blank" preserve="1">
-  <p:cSld name="Blank">
-    <p:spTree>
-      <p:nvGrpSpPr>
-        <p:cNvPr id="1" name=""/>
-        <p:cNvGrpSpPr/>
-        <p:nvPr/>
-      </p:nvGrpSpPr>
-      <p:grpSpPr>
-        <a:xfrm>
-          <a:off x="0" y="0"/>
-          <a:ext cx="0" cy="0"/>
-          <a:chOff x="0" y="0"/>
-          <a:chExt cx="0" cy="0"/>
-        </a:xfrm>
-      </p:grpSpPr>
-      <p:sp>
-        <p:nvSpPr>
-          <p:cNvPr id="2" name="Date Placeholder 1">
-            <a:extLst>
-              <a:ext uri="{FF2B5EF4-FFF2-40B4-BE49-F238E27FC236}">
-                <a16:creationId xmlns:a16="http://schemas.microsoft.com/office/drawing/2014/main" id="{8416FCAA-D61A-19AA-2CFD-EDCFFE232B38}"/>
-              </a:ext>
-            </a:extLst>
-          </p:cNvPr>
-          <p:cNvSpPr>
-            <a:spLocks noGrp="1"/>
-          </p:cNvSpPr>
-          <p:nvPr>
-            <p:ph type="dt" sz="half" idx="10"/>
-          </p:nvPr>
-        </p:nvSpPr>
-        <p:spPr/>
-        <p:txBody>
-          <a:bodyPr/>
-          <a:lstStyle/>
-          <a:p>
-            <a:fld id="{F10901DB-E840-4150-8207-866BDD25D22F}" type="datetimeFigureOut">
-              <a:rPr lang="en-US" smtClean="0"/>
-              <a:t>9/15/2025</a:t>
-            </a:fld>
-            <a:endParaRPr lang="en-US"/>
-          </a:p>
-        </p:txBody>
-      </p:sp>
-      <p:sp>
-        <p:nvSpPr>
-          <p:cNvPr id="3" name="Footer Placeholder 2">
-            <a:extLst>
-              <a:ext uri="{FF2B5EF4-FFF2-40B4-BE49-F238E27FC236}">
-                <a16:creationId xmlns:a16="http://schemas.microsoft.com/office/drawing/2014/main" id="{CDD15071-F236-77A8-4671-2C96684897F5}"/>
-              </a:ext>
-            </a:extLst>
-          </p:cNvPr>
-          <p:cNvSpPr>
-            <a:spLocks noGrp="1"/>
-          </p:cNvSpPr>
-          <p:nvPr>
-            <p:ph type="ftr" sz="quarter" idx="11"/>
-          </p:nvPr>
-        </p:nvSpPr>
-        <p:spPr/>
-        <p:txBody>
-          <a:bodyPr/>
-          <a:lstStyle/>
-          <a:p>
-            <a:endParaRPr lang="en-US"/>
-          </a:p>
-        </p:txBody>
-      </p:sp>
-      <p:sp>
-        <p:nvSpPr>
-          <p:cNvPr id="4" name="Slide Number Placeholder 3">
-            <a:extLst>
-              <a:ext uri="{FF2B5EF4-FFF2-40B4-BE49-F238E27FC236}">
-                <a16:creationId xmlns:a16="http://schemas.microsoft.com/office/drawing/2014/main" id="{CF83CB8E-1A45-9FF7-122B-46108F80B893}"/>
-              </a:ext>
-            </a:extLst>
-          </p:cNvPr>
-          <p:cNvSpPr>
-            <a:spLocks noGrp="1"/>
-          </p:cNvSpPr>
-          <p:nvPr>
-            <p:ph type="sldNum" sz="quarter" idx="12"/>
-          </p:nvPr>
-        </p:nvSpPr>
-        <p:spPr/>
-        <p:txBody>
-          <a:bodyPr/>
-          <a:lstStyle/>
-          <a:p>
-            <a:fld id="{C41024BC-5968-4735-8D30-B72DEF6BE683}" type="slidenum">
-              <a:rPr lang="en-US" smtClean="0"/>
-              <a:t>‹#›</a:t>
-            </a:fld>
-            <a:endParaRPr lang="en-US"/>
-          </a:p>
-        </p:txBody>
-      </p:sp>
-    </p:spTree>
-    <p:extLst>
-      <p:ext uri="{BB962C8B-B14F-4D97-AF65-F5344CB8AC3E}">
-        <p14:creationId xmlns:p14="http://schemas.microsoft.com/office/powerpoint/2010/main" val="971559779"/>
-      </p:ext>
-    </p:extLst>
-  </p:cSld>
-  <p:clrMapOvr>
-    <a:masterClrMapping/>
-  </p:clrMapOvr>
-</p:sldLayout>
-</file>
-
-<file path=ppt/slideLayouts/slideLayout8.xml><?xml version="1.0" encoding="utf-8"?>
-<p:sldLayout xmlns:a="http://schemas.openxmlformats.org/drawingml/2006/main" xmlns:r="http://schemas.openxmlformats.org/officeDocument/2006/relationships" xmlns:p="http://schemas.openxmlformats.org/presentationml/2006/main" type="objTx" preserve="1">
-  <p:cSld name="Content with Caption">
-    <p:spTree>
-      <p:nvGrpSpPr>
-        <p:cNvPr id="1" name=""/>
-        <p:cNvGrpSpPr/>
-        <p:nvPr/>
-      </p:nvGrpSpPr>
-      <p:grpSpPr>
-        <a:xfrm>
-          <a:off x="0" y="0"/>
-          <a:ext cx="0" cy="0"/>
-          <a:chOff x="0" y="0"/>
-          <a:chExt cx="0" cy="0"/>
-        </a:xfrm>
-      </p:grpSpPr>
-      <p:sp>
-        <p:nvSpPr>
-          <p:cNvPr id="2" name="Title 1">
-            <a:extLst>
-              <a:ext uri="{FF2B5EF4-FFF2-40B4-BE49-F238E27FC236}">
-                <a16:creationId xmlns:a16="http://schemas.microsoft.com/office/drawing/2014/main" id="{60E57F21-6BEA-4D7A-A020-D2D73BA2D326}"/>
-              </a:ext>
-            </a:extLst>
-          </p:cNvPr>
-          <p:cNvSpPr>
-            <a:spLocks noGrp="1"/>
-          </p:cNvSpPr>
-          <p:nvPr>
-            <p:ph type="title"/>
-          </p:nvPr>
-        </p:nvSpPr>
-        <p:spPr>
-          <a:xfrm>
-            <a:off x="839788" y="457200"/>
-            <a:ext cx="3932237" cy="1600200"/>
-          </a:xfrm>
-        </p:spPr>
-        <p:txBody>
-          <a:bodyPr anchor="b"/>
-          <a:lstStyle>
-            <a:lvl1pPr>
-              <a:defRPr sz="3200"/>
-            </a:lvl1pPr>
-          </a:lstStyle>
-          <a:p>
-            <a:r>
-              <a:rPr lang="en-US"/>
-              <a:t>Click to edit Master title style</a:t>
-            </a:r>
-          </a:p>
-        </p:txBody>
-      </p:sp>
-      <p:sp>
-        <p:nvSpPr>
-          <p:cNvPr id="3" name="Content Placeholder 2">
-            <a:extLst>
-              <a:ext uri="{FF2B5EF4-FFF2-40B4-BE49-F238E27FC236}">
-                <a16:creationId xmlns:a16="http://schemas.microsoft.com/office/drawing/2014/main" id="{B3F6C2EB-2067-EDE8-6730-13C68662637A}"/>
-              </a:ext>
-            </a:extLst>
-          </p:cNvPr>
-          <p:cNvSpPr>
-            <a:spLocks noGrp="1"/>
-          </p:cNvSpPr>
-          <p:nvPr>
-            <p:ph idx="1"/>
-          </p:nvPr>
-        </p:nvSpPr>
-        <p:spPr>
-          <a:xfrm>
-            <a:off x="5183188" y="987425"/>
-            <a:ext cx="6172200" cy="4873625"/>
-          </a:xfrm>
-        </p:spPr>
-        <p:txBody>
-          <a:bodyPr/>
-          <a:lstStyle>
-            <a:lvl1pPr>
-              <a:defRPr sz="3200"/>
-            </a:lvl1pPr>
-            <a:lvl2pPr>
-              <a:defRPr sz="2800"/>
-            </a:lvl2pPr>
-            <a:lvl3pPr>
-              <a:defRPr sz="2400"/>
-            </a:lvl3pPr>
-            <a:lvl4pPr>
-              <a:defRPr sz="2000"/>
-            </a:lvl4pPr>
-            <a:lvl5pPr>
-              <a:defRPr sz="2000"/>
-            </a:lvl5pPr>
-            <a:lvl6pPr>
-              <a:defRPr sz="2000"/>
-            </a:lvl6pPr>
-            <a:lvl7pPr>
-              <a:defRPr sz="2000"/>
-            </a:lvl7pPr>
-            <a:lvl8pPr>
-              <a:defRPr sz="2000"/>
-            </a:lvl8pPr>
-            <a:lvl9pPr>
-              <a:defRPr sz="2000"/>
-            </a:lvl9pPr>
-          </a:lstStyle>
-          <a:p>
-            <a:pPr lvl="0"/>
-            <a:r>
-              <a:rPr lang="en-US"/>
-              <a:t>Click to edit Master text styles</a:t>
-            </a:r>
-          </a:p>
-          <a:p>
-            <a:pPr lvl="1"/>
-            <a:r>
-              <a:rPr lang="en-US"/>
-              <a:t>Second level</a:t>
-            </a:r>
-          </a:p>
-          <a:p>
-            <a:pPr lvl="2"/>
-            <a:r>
-              <a:rPr lang="en-US"/>
-              <a:t>Third level</a:t>
-            </a:r>
-          </a:p>
-          <a:p>
-            <a:pPr lvl="3"/>
-            <a:r>
-              <a:rPr lang="en-US"/>
-              <a:t>Fourth level</a:t>
-            </a:r>
-          </a:p>
-          <a:p>
-            <a:pPr lvl="4"/>
-            <a:r>
-              <a:rPr lang="en-US"/>
-              <a:t>Fifth level</a:t>
-            </a:r>
-          </a:p>
-        </p:txBody>
-      </p:sp>
-      <p:sp>
-        <p:nvSpPr>
-          <p:cNvPr id="4" name="Text Placeholder 3">
-            <a:extLst>
-              <a:ext uri="{FF2B5EF4-FFF2-40B4-BE49-F238E27FC236}">
-                <a16:creationId xmlns:a16="http://schemas.microsoft.com/office/drawing/2014/main" id="{09A68C07-B368-9A92-7D94-899AA230A9B3}"/>
-              </a:ext>
-            </a:extLst>
-          </p:cNvPr>
-          <p:cNvSpPr>
-            <a:spLocks noGrp="1"/>
-          </p:cNvSpPr>
-          <p:nvPr>
-            <p:ph type="body" sz="half" idx="2"/>
-          </p:nvPr>
-        </p:nvSpPr>
-        <p:spPr>
-          <a:xfrm>
-            <a:off x="839788" y="2057400"/>
-            <a:ext cx="3932237" cy="3811588"/>
-          </a:xfrm>
-        </p:spPr>
-        <p:txBody>
-          <a:bodyPr/>
-          <a:lstStyle>
-            <a:lvl1pPr marL="0" indent="0">
-              <a:buNone/>
-              <a:defRPr sz="1600"/>
-            </a:lvl1pPr>
-            <a:lvl2pPr marL="457200" indent="0">
-              <a:buNone/>
-              <a:defRPr sz="1400"/>
-            </a:lvl2pPr>
-            <a:lvl3pPr marL="914400" indent="0">
-              <a:buNone/>
-              <a:defRPr sz="1200"/>
-            </a:lvl3pPr>
-            <a:lvl4pPr marL="1371600" indent="0">
-              <a:buNone/>
-              <a:defRPr sz="1000"/>
-            </a:lvl4pPr>
-            <a:lvl5pPr marL="1828800" indent="0">
-              <a:buNone/>
-              <a:defRPr sz="1000"/>
-            </a:lvl5pPr>
-            <a:lvl6pPr marL="2286000" indent="0">
-              <a:buNone/>
-              <a:defRPr sz="1000"/>
-            </a:lvl6pPr>
-            <a:lvl7pPr marL="2743200" indent="0">
-              <a:buNone/>
-              <a:defRPr sz="1000"/>
-            </a:lvl7pPr>
-            <a:lvl8pPr marL="3200400" indent="0">
-              <a:buNone/>
-              <a:defRPr sz="1000"/>
-            </a:lvl8pPr>
-            <a:lvl9pPr marL="3657600" indent="0">
-              <a:buNone/>
-              <a:defRPr sz="1000"/>
-            </a:lvl9pPr>
-          </a:lstStyle>
-          <a:p>
-            <a:pPr lvl="0"/>
-            <a:r>
-              <a:rPr lang="en-US"/>
-              <a:t>Click to edit Master text styles</a:t>
-            </a:r>
-          </a:p>
-        </p:txBody>
-      </p:sp>
-      <p:sp>
-        <p:nvSpPr>
-          <p:cNvPr id="5" name="Date Placeholder 4">
-            <a:extLst>
-              <a:ext uri="{FF2B5EF4-FFF2-40B4-BE49-F238E27FC236}">
-                <a16:creationId xmlns:a16="http://schemas.microsoft.com/office/drawing/2014/main" id="{201C4715-8548-B8CD-E46B-32F52F97AC6B}"/>
-              </a:ext>
-            </a:extLst>
-          </p:cNvPr>
-          <p:cNvSpPr>
-            <a:spLocks noGrp="1"/>
-          </p:cNvSpPr>
-          <p:nvPr>
-            <p:ph type="dt" sz="half" idx="10"/>
-          </p:nvPr>
-        </p:nvSpPr>
-        <p:spPr/>
-        <p:txBody>
-          <a:bodyPr/>
-          <a:lstStyle/>
-          <a:p>
-            <a:fld id="{F10901DB-E840-4150-8207-866BDD25D22F}" type="datetimeFigureOut">
-              <a:rPr lang="en-US" smtClean="0"/>
-              <a:t>9/15/2025</a:t>
-            </a:fld>
-            <a:endParaRPr lang="en-US"/>
-          </a:p>
-        </p:txBody>
-      </p:sp>
-      <p:sp>
-        <p:nvSpPr>
-          <p:cNvPr id="6" name="Footer Placeholder 5">
-            <a:extLst>
-              <a:ext uri="{FF2B5EF4-FFF2-40B4-BE49-F238E27FC236}">
-                <a16:creationId xmlns:a16="http://schemas.microsoft.com/office/drawing/2014/main" id="{D94805EB-68F0-0925-B5E2-992A26ACDCC2}"/>
-              </a:ext>
-            </a:extLst>
-          </p:cNvPr>
-          <p:cNvSpPr>
-            <a:spLocks noGrp="1"/>
-          </p:cNvSpPr>
-          <p:nvPr>
-            <p:ph type="ftr" sz="quarter" idx="11"/>
-          </p:nvPr>
-        </p:nvSpPr>
-        <p:spPr/>
-        <p:txBody>
-          <a:bodyPr/>
-          <a:lstStyle/>
-          <a:p>
-            <a:endParaRPr lang="en-US"/>
-          </a:p>
-        </p:txBody>
-      </p:sp>
-      <p:sp>
-        <p:nvSpPr>
-          <p:cNvPr id="7" name="Slide Number Placeholder 6">
-            <a:extLst>
-              <a:ext uri="{FF2B5EF4-FFF2-40B4-BE49-F238E27FC236}">
-                <a16:creationId xmlns:a16="http://schemas.microsoft.com/office/drawing/2014/main" id="{0678064D-3984-66E1-79F6-BF412DE9007B}"/>
-              </a:ext>
-            </a:extLst>
-          </p:cNvPr>
-          <p:cNvSpPr>
-            <a:spLocks noGrp="1"/>
-          </p:cNvSpPr>
-          <p:nvPr>
-            <p:ph type="sldNum" sz="quarter" idx="12"/>
-          </p:nvPr>
-        </p:nvSpPr>
-        <p:spPr/>
-        <p:txBody>
-          <a:bodyPr/>
-          <a:lstStyle/>
-          <a:p>
-            <a:fld id="{C41024BC-5968-4735-8D30-B72DEF6BE683}" type="slidenum">
-              <a:rPr lang="en-US" smtClean="0"/>
-              <a:t>‹#›</a:t>
-            </a:fld>
-            <a:endParaRPr lang="en-US"/>
-          </a:p>
-        </p:txBody>
-      </p:sp>
-    </p:spTree>
-    <p:extLst>
-      <p:ext uri="{BB962C8B-B14F-4D97-AF65-F5344CB8AC3E}">
-        <p14:creationId xmlns:p14="http://schemas.microsoft.com/office/powerpoint/2010/main" val="2387889952"/>
-      </p:ext>
-    </p:extLst>
-  </p:cSld>
-  <p:clrMapOvr>
-    <a:masterClrMapping/>
-  </p:clrMapOvr>
-</p:sldLayout>
-</file>
-
-<file path=ppt/slideLayouts/slideLayout9.xml><?xml version="1.0" encoding="utf-8"?>
-<p:sldLayout xmlns:a="http://schemas.openxmlformats.org/drawingml/2006/main" xmlns:r="http://schemas.openxmlformats.org/officeDocument/2006/relationships" xmlns:p="http://schemas.openxmlformats.org/presentationml/2006/main" type="picTx" preserve="1">
-  <p:cSld name="Picture with Caption">
-    <p:spTree>
-      <p:nvGrpSpPr>
-        <p:cNvPr id="1" name=""/>
-        <p:cNvGrpSpPr/>
-        <p:nvPr/>
-      </p:nvGrpSpPr>
-      <p:grpSpPr>
-        <a:xfrm>
-          <a:off x="0" y="0"/>
-          <a:ext cx="0" cy="0"/>
-          <a:chOff x="0" y="0"/>
-          <a:chExt cx="0" cy="0"/>
-        </a:xfrm>
-      </p:grpSpPr>
-      <p:sp>
-        <p:nvSpPr>
-          <p:cNvPr id="2" name="Title 1">
-            <a:extLst>
-              <a:ext uri="{FF2B5EF4-FFF2-40B4-BE49-F238E27FC236}">
-                <a16:creationId xmlns:a16="http://schemas.microsoft.com/office/drawing/2014/main" id="{0BAE40A8-7CE6-6E2F-987D-F9931444B2F4}"/>
-              </a:ext>
-            </a:extLst>
-          </p:cNvPr>
-          <p:cNvSpPr>
-            <a:spLocks noGrp="1"/>
-          </p:cNvSpPr>
-          <p:nvPr>
-            <p:ph type="title"/>
-          </p:nvPr>
-        </p:nvSpPr>
-        <p:spPr>
-          <a:xfrm>
-            <a:off x="839788" y="457200"/>
-            <a:ext cx="3932237" cy="1600200"/>
-          </a:xfrm>
-        </p:spPr>
-        <p:txBody>
-          <a:bodyPr anchor="b"/>
-          <a:lstStyle>
-            <a:lvl1pPr>
-              <a:defRPr sz="3200"/>
-            </a:lvl1pPr>
-          </a:lstStyle>
-          <a:p>
-            <a:r>
-              <a:rPr lang="en-US"/>
-              <a:t>Click to edit Master title style</a:t>
-            </a:r>
-          </a:p>
-        </p:txBody>
-      </p:sp>
-      <p:sp>
-        <p:nvSpPr>
-          <p:cNvPr id="3" name="Picture Placeholder 2">
-            <a:extLst>
-              <a:ext uri="{FF2B5EF4-FFF2-40B4-BE49-F238E27FC236}">
-                <a16:creationId xmlns:a16="http://schemas.microsoft.com/office/drawing/2014/main" id="{C49A3B3C-B1CD-FC66-30C0-066CC8711E3C}"/>
-              </a:ext>
-            </a:extLst>
-          </p:cNvPr>
-          <p:cNvSpPr>
-            <a:spLocks noGrp="1"/>
-          </p:cNvSpPr>
-          <p:nvPr>
-            <p:ph type="pic" idx="1"/>
-          </p:nvPr>
-        </p:nvSpPr>
-        <p:spPr>
-          <a:xfrm>
-            <a:off x="5183188" y="987425"/>
-            <a:ext cx="6172200" cy="4873625"/>
-          </a:xfrm>
-        </p:spPr>
-        <p:txBody>
-          <a:bodyPr/>
-          <a:lstStyle>
-            <a:lvl1pPr marL="0" indent="0">
-              <a:buNone/>
-              <a:defRPr sz="3200"/>
-            </a:lvl1pPr>
-            <a:lvl2pPr marL="457200" indent="0">
-              <a:buNone/>
-              <a:defRPr sz="2800"/>
-            </a:lvl2pPr>
-            <a:lvl3pPr marL="914400" indent="0">
-              <a:buNone/>
-              <a:defRPr sz="2400"/>
-            </a:lvl3pPr>
-            <a:lvl4pPr marL="1371600" indent="0">
-              <a:buNone/>
-              <a:defRPr sz="2000"/>
-            </a:lvl4pPr>
-            <a:lvl5pPr marL="1828800" indent="0">
-              <a:buNone/>
-              <a:defRPr sz="2000"/>
-            </a:lvl5pPr>
-            <a:lvl6pPr marL="2286000" indent="0">
-              <a:buNone/>
-              <a:defRPr sz="2000"/>
-            </a:lvl6pPr>
-            <a:lvl7pPr marL="2743200" indent="0">
-              <a:buNone/>
-              <a:defRPr sz="2000"/>
-            </a:lvl7pPr>
-            <a:lvl8pPr marL="3200400" indent="0">
-              <a:buNone/>
-              <a:defRPr sz="2000"/>
-            </a:lvl8pPr>
-            <a:lvl9pPr marL="3657600" indent="0">
-              <a:buNone/>
-              <a:defRPr sz="2000"/>
-            </a:lvl9pPr>
-          </a:lstStyle>
-          <a:p>
-            <a:endParaRPr lang="en-US"/>
-          </a:p>
-        </p:txBody>
-      </p:sp>
-      <p:sp>
-        <p:nvSpPr>
-          <p:cNvPr id="4" name="Text Placeholder 3">
-            <a:extLst>
-              <a:ext uri="{FF2B5EF4-FFF2-40B4-BE49-F238E27FC236}">
-                <a16:creationId xmlns:a16="http://schemas.microsoft.com/office/drawing/2014/main" id="{C7130723-2359-C212-1784-4C60E5DC26B9}"/>
-              </a:ext>
-            </a:extLst>
-          </p:cNvPr>
-          <p:cNvSpPr>
-            <a:spLocks noGrp="1"/>
-          </p:cNvSpPr>
-          <p:nvPr>
-            <p:ph type="body" sz="half" idx="2"/>
-          </p:nvPr>
-        </p:nvSpPr>
-        <p:spPr>
-          <a:xfrm>
-            <a:off x="839788" y="2057400"/>
-            <a:ext cx="3932237" cy="3811588"/>
-          </a:xfrm>
-        </p:spPr>
-        <p:txBody>
-          <a:bodyPr/>
-          <a:lstStyle>
-            <a:lvl1pPr marL="0" indent="0">
-              <a:buNone/>
-              <a:defRPr sz="1600"/>
-            </a:lvl1pPr>
-            <a:lvl2pPr marL="457200" indent="0">
-              <a:buNone/>
-              <a:defRPr sz="1400"/>
-            </a:lvl2pPr>
-            <a:lvl3pPr marL="914400" indent="0">
-              <a:buNone/>
-              <a:defRPr sz="1200"/>
-            </a:lvl3pPr>
-            <a:lvl4pPr marL="1371600" indent="0">
-              <a:buNone/>
-              <a:defRPr sz="1000"/>
-            </a:lvl4pPr>
-            <a:lvl5pPr marL="1828800" indent="0">
-              <a:buNone/>
-              <a:defRPr sz="1000"/>
-            </a:lvl5pPr>
-            <a:lvl6pPr marL="2286000" indent="0">
-              <a:buNone/>
-              <a:defRPr sz="1000"/>
-            </a:lvl6pPr>
-            <a:lvl7pPr marL="2743200" indent="0">
-              <a:buNone/>
-              <a:defRPr sz="1000"/>
-            </a:lvl7pPr>
-            <a:lvl8pPr marL="3200400" indent="0">
-              <a:buNone/>
-              <a:defRPr sz="1000"/>
-            </a:lvl8pPr>
-            <a:lvl9pPr marL="3657600" indent="0">
-              <a:buNone/>
-              <a:defRPr sz="1000"/>
-            </a:lvl9pPr>
-          </a:lstStyle>
-          <a:p>
-            <a:pPr lvl="0"/>
-            <a:r>
-              <a:rPr lang="en-US"/>
-              <a:t>Click to edit Master text styles</a:t>
-            </a:r>
-          </a:p>
-        </p:txBody>
-      </p:sp>
-      <p:sp>
-        <p:nvSpPr>
-          <p:cNvPr id="5" name="Date Placeholder 4">
-            <a:extLst>
-              <a:ext uri="{FF2B5EF4-FFF2-40B4-BE49-F238E27FC236}">
-                <a16:creationId xmlns:a16="http://schemas.microsoft.com/office/drawing/2014/main" id="{3286E1BF-418B-5A5E-B8CE-971EBA46EBA1}"/>
-              </a:ext>
-            </a:extLst>
-          </p:cNvPr>
-          <p:cNvSpPr>
-            <a:spLocks noGrp="1"/>
-          </p:cNvSpPr>
-          <p:nvPr>
-            <p:ph type="dt" sz="half" idx="10"/>
-          </p:nvPr>
-        </p:nvSpPr>
-        <p:spPr/>
-        <p:txBody>
-          <a:bodyPr/>
-          <a:lstStyle/>
-          <a:p>
-            <a:fld id="{F10901DB-E840-4150-8207-866BDD25D22F}" type="datetimeFigureOut">
-              <a:rPr lang="en-US" smtClean="0"/>
-              <a:t>9/15/2025</a:t>
-            </a:fld>
-            <a:endParaRPr lang="en-US"/>
-          </a:p>
-        </p:txBody>
-      </p:sp>
-      <p:sp>
-        <p:nvSpPr>
-          <p:cNvPr id="6" name="Footer Placeholder 5">
-            <a:extLst>
-              <a:ext uri="{FF2B5EF4-FFF2-40B4-BE49-F238E27FC236}">
-                <a16:creationId xmlns:a16="http://schemas.microsoft.com/office/drawing/2014/main" id="{0D858B19-C047-7376-4094-335A262B8771}"/>
-              </a:ext>
-            </a:extLst>
-          </p:cNvPr>
-          <p:cNvSpPr>
-            <a:spLocks noGrp="1"/>
-          </p:cNvSpPr>
-          <p:nvPr>
-            <p:ph type="ftr" sz="quarter" idx="11"/>
-          </p:nvPr>
-        </p:nvSpPr>
-        <p:spPr/>
-        <p:txBody>
-          <a:bodyPr/>
-          <a:lstStyle/>
-          <a:p>
-            <a:endParaRPr lang="en-US"/>
-          </a:p>
-        </p:txBody>
-      </p:sp>
-      <p:sp>
-        <p:nvSpPr>
-          <p:cNvPr id="7" name="Slide Number Placeholder 6">
-            <a:extLst>
-              <a:ext uri="{FF2B5EF4-FFF2-40B4-BE49-F238E27FC236}">
-                <a16:creationId xmlns:a16="http://schemas.microsoft.com/office/drawing/2014/main" id="{AEE3E811-B1A3-3062-66D6-3B924C39DCF1}"/>
-              </a:ext>
-            </a:extLst>
-          </p:cNvPr>
-          <p:cNvSpPr>
-            <a:spLocks noGrp="1"/>
-          </p:cNvSpPr>
-          <p:nvPr>
-            <p:ph type="sldNum" sz="quarter" idx="12"/>
-          </p:nvPr>
-        </p:nvSpPr>
-        <p:spPr/>
-        <p:txBody>
-          <a:bodyPr/>
-          <a:lstStyle/>
-          <a:p>
-            <a:fld id="{C41024BC-5968-4735-8D30-B72DEF6BE683}" type="slidenum">
-              <a:rPr lang="en-US" smtClean="0"/>
-              <a:t>‹#›</a:t>
-            </a:fld>
-            <a:endParaRPr lang="en-US"/>
-          </a:p>
-        </p:txBody>
-      </p:sp>
-    </p:spTree>
-    <p:extLst>
-      <p:ext uri="{BB962C8B-B14F-4D97-AF65-F5344CB8AC3E}">
-        <p14:creationId xmlns:p14="http://schemas.microsoft.com/office/powerpoint/2010/main" val="2214051039"/>
-      </p:ext>
-    </p:extLst>
-  </p:cSld>
-  <p:clrMapOvr>
-    <a:masterClrMapping/>
-  </p:clrMapOvr>
-</p:sldLayout>
-</file>
-
 <file path=ppt/slideMasters/slideMaster1.xml><?xml version="1.0" encoding="utf-8"?>
-<p:sldMaster xmlns:a="http://schemas.openxmlformats.org/drawingml/2006/main" xmlns:r="http://schemas.openxmlformats.org/officeDocument/2006/relationships" xmlns:p="http://schemas.openxmlformats.org/presentationml/2006/main">
-  <p:cSld>
-    <p:bg>
-      <p:bgRef idx="1001">
-        <a:schemeClr val="bg1"/>
-      </p:bgRef>
-    </p:bg>
-    <p:spTree>
-      <p:nvGrpSpPr>
-        <p:cNvPr id="1" name=""/>
-        <p:cNvGrpSpPr/>
-        <p:nvPr/>
-      </p:nvGrpSpPr>
-      <p:grpSpPr>
-        <a:xfrm>
-          <a:off x="0" y="0"/>
-          <a:ext cx="0" cy="0"/>
-          <a:chOff x="0" y="0"/>
-          <a:chExt cx="0" cy="0"/>
-        </a:xfrm>
-      </p:grpSpPr>
-      <p:sp>
-        <p:nvSpPr>
-          <p:cNvPr id="2" name="Title Placeholder 1">
-            <a:extLst>
-              <a:ext uri="{FF2B5EF4-FFF2-40B4-BE49-F238E27FC236}">
-                <a16:creationId xmlns:a16="http://schemas.microsoft.com/office/drawing/2014/main" id="{F3E749AA-DFC1-412B-8D1A-31ABB7D916F0}"/>
-              </a:ext>
-            </a:extLst>
-          </p:cNvPr>
-          <p:cNvSpPr>
-            <a:spLocks noGrp="1"/>
-          </p:cNvSpPr>
-          <p:nvPr>
-            <p:ph type="title"/>
-          </p:nvPr>
-        </p:nvSpPr>
-        <p:spPr>
-          <a:xfrm>
-            <a:off x="838200" y="365125"/>
-            <a:ext cx="10515600" cy="1325563"/>
-          </a:xfrm>
-          <a:prstGeom prst="rect">
-            <a:avLst/>
-          </a:prstGeom>
-        </p:spPr>
-        <p:txBody>
-          <a:bodyPr vert="horz" lIns="91440" tIns="45720" rIns="91440" bIns="45720" rtlCol="0" anchor="ctr">
-            <a:normAutofit/>
-          </a:bodyPr>
-          <a:lstStyle/>
-          <a:p>
-            <a:r>
-              <a:rPr lang="en-US"/>
-              <a:t>Click to edit Master title style</a:t>
-            </a:r>
-          </a:p>
-        </p:txBody>
-      </p:sp>
-      <p:sp>
-        <p:nvSpPr>
-          <p:cNvPr id="3" name="Text Placeholder 2">
-            <a:extLst>
-              <a:ext uri="{FF2B5EF4-FFF2-40B4-BE49-F238E27FC236}">
-                <a16:creationId xmlns:a16="http://schemas.microsoft.com/office/drawing/2014/main" id="{39CA5D24-207D-F318-C215-A84F996DFEC3}"/>
-              </a:ext>
-            </a:extLst>
-          </p:cNvPr>
-          <p:cNvSpPr>
-            <a:spLocks noGrp="1"/>
-          </p:cNvSpPr>
-          <p:nvPr>
-            <p:ph type="body" idx="1"/>
-          </p:nvPr>
-        </p:nvSpPr>
-        <p:spPr>
-          <a:xfrm>
-            <a:off x="838200" y="1825625"/>
-            <a:ext cx="10515600" cy="4351338"/>
-          </a:xfrm>
-          <a:prstGeom prst="rect">
-            <a:avLst/>
-          </a:prstGeom>
-        </p:spPr>
-        <p:txBody>
-          <a:bodyPr vert="horz" lIns="91440" tIns="45720" rIns="91440" bIns="45720" rtlCol="0">
-            <a:normAutofit/>
-          </a:bodyPr>
-          <a:lstStyle/>
-          <a:p>
-            <a:pPr lvl="0"/>
-            <a:r>
-              <a:rPr lang="en-US"/>
-              <a:t>Click to edit Master text styles</a:t>
-            </a:r>
-          </a:p>
-          <a:p>
-            <a:pPr lvl="1"/>
-            <a:r>
-              <a:rPr lang="en-US"/>
-              <a:t>Second level</a:t>
-            </a:r>
-          </a:p>
-          <a:p>
-            <a:pPr lvl="2"/>
-            <a:r>
-              <a:rPr lang="en-US"/>
-              <a:t>Third level</a:t>
-            </a:r>
-          </a:p>
-          <a:p>
-            <a:pPr lvl="3"/>
-            <a:r>
-              <a:rPr lang="en-US"/>
-              <a:t>Fourth level</a:t>
-            </a:r>
-          </a:p>
-          <a:p>
-            <a:pPr lvl="4"/>
-            <a:r>
-              <a:rPr lang="en-US"/>
-              <a:t>Fifth level</a:t>
-            </a:r>
-          </a:p>
-        </p:txBody>
-      </p:sp>
-      <p:sp>
-        <p:nvSpPr>
-          <p:cNvPr id="4" name="Date Placeholder 3">
-            <a:extLst>
-              <a:ext uri="{FF2B5EF4-FFF2-40B4-BE49-F238E27FC236}">
-                <a16:creationId xmlns:a16="http://schemas.microsoft.com/office/drawing/2014/main" id="{BDCF0A67-ABB6-4314-7B8E-00F52B15C83F}"/>
-              </a:ext>
-            </a:extLst>
-          </p:cNvPr>
-          <p:cNvSpPr>
-            <a:spLocks noGrp="1"/>
-          </p:cNvSpPr>
-          <p:nvPr>
-            <p:ph type="dt" sz="half" idx="2"/>
-          </p:nvPr>
-        </p:nvSpPr>
-        <p:spPr>
-          <a:xfrm>
-            <a:off x="838200" y="6356350"/>
-            <a:ext cx="2743200" cy="365125"/>
-          </a:xfrm>
-          <a:prstGeom prst="rect">
-            <a:avLst/>
-          </a:prstGeom>
-        </p:spPr>
-        <p:txBody>
-          <a:bodyPr vert="horz" lIns="91440" tIns="45720" rIns="91440" bIns="45720" rtlCol="0" anchor="ctr"/>
-          <a:lstStyle>
-            <a:lvl1pPr algn="l">
-              <a:defRPr sz="1200">
-                <a:solidFill>
-                  <a:schemeClr val="tx1">
-                    <a:tint val="82000"/>
-                  </a:schemeClr>
-                </a:solidFill>
-              </a:defRPr>
-            </a:lvl1pPr>
-          </a:lstStyle>
-          <a:p>
-            <a:fld id="{F10901DB-E840-4150-8207-866BDD25D22F}" type="datetimeFigureOut">
-              <a:rPr lang="en-US" smtClean="0"/>
-              <a:t>9/15/2025</a:t>
-            </a:fld>
-            <a:endParaRPr lang="en-US"/>
-          </a:p>
-        </p:txBody>
-      </p:sp>
-      <p:sp>
-        <p:nvSpPr>
-          <p:cNvPr id="5" name="Footer Placeholder 4">
-            <a:extLst>
-              <a:ext uri="{FF2B5EF4-FFF2-40B4-BE49-F238E27FC236}">
-                <a16:creationId xmlns:a16="http://schemas.microsoft.com/office/drawing/2014/main" id="{1A1418D7-FCBF-5B99-17E2-6C586E07222B}"/>
-              </a:ext>
-            </a:extLst>
-          </p:cNvPr>
-          <p:cNvSpPr>
-            <a:spLocks noGrp="1"/>
-          </p:cNvSpPr>
-          <p:nvPr>
-            <p:ph type="ftr" sz="quarter" idx="3"/>
-          </p:nvPr>
-        </p:nvSpPr>
-        <p:spPr>
-          <a:xfrm>
-            <a:off x="4038600" y="6356350"/>
-            <a:ext cx="4114800" cy="365125"/>
-          </a:xfrm>
-          <a:prstGeom prst="rect">
-            <a:avLst/>
-          </a:prstGeom>
-        </p:spPr>
-        <p:txBody>
-          <a:bodyPr vert="horz" lIns="91440" tIns="45720" rIns="91440" bIns="45720" rtlCol="0" anchor="ctr"/>
-          <a:lstStyle>
-            <a:lvl1pPr algn="ctr">
-              <a:defRPr sz="1200">
-                <a:solidFill>
-                  <a:schemeClr val="tx1">
-                    <a:tint val="82000"/>
-                  </a:schemeClr>
-                </a:solidFill>
-              </a:defRPr>
-            </a:lvl1pPr>
-          </a:lstStyle>
-          <a:p>
-            <a:endParaRPr lang="en-US"/>
-          </a:p>
-        </p:txBody>
-      </p:sp>
-      <p:sp>
-        <p:nvSpPr>
-          <p:cNvPr id="6" name="Slide Number Placeholder 5">
-            <a:extLst>
-              <a:ext uri="{FF2B5EF4-FFF2-40B4-BE49-F238E27FC236}">
-                <a16:creationId xmlns:a16="http://schemas.microsoft.com/office/drawing/2014/main" id="{D5FCDC88-7F57-5757-67CB-EED58993590F}"/>
-              </a:ext>
-            </a:extLst>
-          </p:cNvPr>
-          <p:cNvSpPr>
-            <a:spLocks noGrp="1"/>
-          </p:cNvSpPr>
-          <p:nvPr>
-            <p:ph type="sldNum" sz="quarter" idx="4"/>
-          </p:nvPr>
-        </p:nvSpPr>
-        <p:spPr>
-          <a:xfrm>
-            <a:off x="8610600" y="6356350"/>
-            <a:ext cx="2743200" cy="365125"/>
-          </a:xfrm>
-          <a:prstGeom prst="rect">
-            <a:avLst/>
-          </a:prstGeom>
-        </p:spPr>
-        <p:txBody>
-          <a:bodyPr vert="horz" lIns="91440" tIns="45720" rIns="91440" bIns="45720" rtlCol="0" anchor="ctr"/>
-          <a:lstStyle>
-            <a:lvl1pPr algn="r">
-              <a:defRPr sz="1200">
-                <a:solidFill>
-                  <a:schemeClr val="tx1">
-                    <a:tint val="82000"/>
-                  </a:schemeClr>
-                </a:solidFill>
-              </a:defRPr>
-            </a:lvl1pPr>
-          </a:lstStyle>
-          <a:p>
-            <a:fld id="{C41024BC-5968-4735-8D30-B72DEF6BE683}" type="slidenum">
-              <a:rPr lang="en-US" smtClean="0"/>
-              <a:t>‹#›</a:t>
-            </a:fld>
-            <a:endParaRPr lang="en-US"/>
-          </a:p>
-        </p:txBody>
-      </p:sp>
-    </p:spTree>
-    <p:extLst>
-      <p:ext uri="{BB962C8B-B14F-4D97-AF65-F5344CB8AC3E}">
-        <p14:creationId xmlns:p14="http://schemas.microsoft.com/office/powerpoint/2010/main" val="3011894170"/>
-      </p:ext>
-    </p:extLst>
-  </p:cSld>
-  <p:clrMap bg1="lt1" tx1="dk1" bg2="lt2" tx2="dk2" accent1="accent1" accent2="accent2" accent3="accent3" accent4="accent4" accent5="accent5" accent6="accent6" hlink="hlink" folHlink="folHlink"/>
-  <p:sldLayoutIdLst>
-    <p:sldLayoutId id="2147483649" r:id="rId1"/>
-    <p:sldLayoutId id="2147483650" r:id="rId2"/>
-    <p:sldLayoutId id="2147483651" r:id="rId3"/>
-    <p:sldLayoutId id="2147483652" r:id="rId4"/>
-    <p:sldLayoutId id="2147483653" r:id="rId5"/>
-    <p:sldLayoutId id="2147483654" r:id="rId6"/>
-    <p:sldLayoutId id="2147483655" r:id="rId7"/>
-    <p:sldLayoutId id="2147483656" r:id="rId8"/>
-    <p:sldLayoutId id="2147483657" r:id="rId9"/>
-    <p:sldLayoutId id="2147483658" r:id="rId10"/>
-    <p:sldLayoutId id="2147483659" r:id="rId11"/>
-  </p:sldLayoutIdLst>
-  <p:txStyles>
-    <p:titleStyle>
-      <a:lvl1pPr algn="l" defTabSz="914400" rtl="0" eaLnBrk="1" latinLnBrk="0" hangingPunct="1">
-        <a:lnSpc>
-          <a:spcPct val="90000"/>
-        </a:lnSpc>
-        <a:spcBef>
-          <a:spcPct val="0"/>
-        </a:spcBef>
-        <a:buNone/>
-        <a:defRPr sz="4400" kern="1200">
-          <a:solidFill>
-            <a:schemeClr val="tx1"/>
-          </a:solidFill>
-          <a:latin typeface="+mj-lt"/>
-          <a:ea typeface="+mj-ea"/>
-          <a:cs typeface="+mj-cs"/>
-        </a:defRPr>
-      </a:lvl1pPr>
-    </p:titleStyle>
-    <p:bodyStyle>
-      <a:lvl1pPr marL="228600" indent="-228600" algn="l" defTabSz="914400" rtl="0" eaLnBrk="1" latinLnBrk="0" hangingPunct="1">
-        <a:lnSpc>
-          <a:spcPct val="90000"/>
-        </a:lnSpc>
-        <a:spcBef>
-          <a:spcPts val="1000"/>
-        </a:spcBef>
-        <a:buFont typeface="Arial" panose="020B0604020202020204" pitchFamily="34" charset="0"/>
-        <a:buChar char="•"/>
-        <a:defRPr sz="2800" kern="1200">
-          <a:solidFill>
-            <a:schemeClr val="tx1"/>
-          </a:solidFill>
-          <a:latin typeface="+mn-lt"/>
-          <a:ea typeface="+mn-ea"/>
-          <a:cs typeface="+mn-cs"/>
-        </a:defRPr>
-      </a:lvl1pPr>
-      <a:lvl2pPr marL="685800" indent="-228600" algn="l" defTabSz="914400" rtl="0" eaLnBrk="1" latinLnBrk="0" hangingPunct="1">
-        <a:lnSpc>
-          <a:spcPct val="90000"/>
-        </a:lnSpc>
-        <a:spcBef>
-          <a:spcPts val="500"/>
-        </a:spcBef>
-        <a:buFont typeface="Arial" panose="020B0604020202020204" pitchFamily="34" charset="0"/>
-        <a:buChar char="•"/>
-        <a:defRPr sz="2400" kern="1200">
-          <a:solidFill>
-            <a:schemeClr val="tx1"/>
-          </a:solidFill>
-          <a:latin typeface="+mn-lt"/>
-          <a:ea typeface="+mn-ea"/>
-          <a:cs typeface="+mn-cs"/>
-        </a:defRPr>
-      </a:lvl2pPr>
-      <a:lvl3pPr marL="1143000" indent="-228600" algn="l" defTabSz="914400" rtl="0" eaLnBrk="1" latinLnBrk="0" hangingPunct="1">
-        <a:lnSpc>
-          <a:spcPct val="90000"/>
-        </a:lnSpc>
-        <a:spcBef>
-          <a:spcPts val="500"/>
-        </a:spcBef>
-        <a:buFont typeface="Arial" panose="020B0604020202020204" pitchFamily="34" charset="0"/>
-        <a:buChar char="•"/>
-        <a:defRPr sz="2000" kern="1200">
-          <a:solidFill>
-            <a:schemeClr val="tx1"/>
-          </a:solidFill>
-          <a:latin typeface="+mn-lt"/>
-          <a:ea typeface="+mn-ea"/>
-          <a:cs typeface="+mn-cs"/>
-        </a:defRPr>
-      </a:lvl3pPr>
-      <a:lvl4pPr marL="1600200" indent="-228600" algn="l" defTabSz="914400" rtl="0" eaLnBrk="1" latinLnBrk="0" hangingPunct="1">
-        <a:lnSpc>
-          <a:spcPct val="90000"/>
-        </a:lnSpc>
-        <a:spcBef>
-          <a:spcPts val="500"/>
-        </a:spcBef>
-        <a:buFont typeface="Arial" panose="020B0604020202020204" pitchFamily="34" charset="0"/>
-        <a:buChar char="•"/>
-        <a:defRPr sz="1800" kern="1200">
-          <a:solidFill>
-            <a:schemeClr val="tx1"/>
-          </a:solidFill>
-          <a:latin typeface="+mn-lt"/>
-          <a:ea typeface="+mn-ea"/>
-          <a:cs typeface="+mn-cs"/>
-        </a:defRPr>
-      </a:lvl4pPr>
-      <a:lvl5pPr marL="2057400" indent="-228600" algn="l" defTabSz="914400" rtl="0" eaLnBrk="1" latinLnBrk="0" hangingPunct="1">
-        <a:lnSpc>
-          <a:spcPct val="90000"/>
-        </a:lnSpc>
-        <a:spcBef>
-          <a:spcPts val="500"/>
-        </a:spcBef>
-        <a:buFont typeface="Arial" panose="020B0604020202020204" pitchFamily="34" charset="0"/>
-        <a:buChar char="•"/>
-        <a:defRPr sz="1800" kern="1200">
-          <a:solidFill>
-            <a:schemeClr val="tx1"/>
-          </a:solidFill>
-          <a:latin typeface="+mn-lt"/>
-          <a:ea typeface="+mn-ea"/>
-          <a:cs typeface="+mn-cs"/>
-        </a:defRPr>
-      </a:lvl5pPr>
-      <a:lvl6pPr marL="2514600" indent="-228600" algn="l" defTabSz="914400" rtl="0" eaLnBrk="1" latinLnBrk="0" hangingPunct="1">
-        <a:lnSpc>
-          <a:spcPct val="90000"/>
-        </a:lnSpc>
-        <a:spcBef>
-          <a:spcPts val="500"/>
-        </a:spcBef>
-        <a:buFont typeface="Arial" panose="020B0604020202020204" pitchFamily="34" charset="0"/>
-        <a:buChar char="•"/>
-        <a:defRPr sz="1800" kern="1200">
-          <a:solidFill>
-            <a:schemeClr val="tx1"/>
-          </a:solidFill>
-          <a:latin typeface="+mn-lt"/>
-          <a:ea typeface="+mn-ea"/>
-          <a:cs typeface="+mn-cs"/>
-        </a:defRPr>
-      </a:lvl6pPr>
-      <a:lvl7pPr marL="2971800" indent="-228600" algn="l" defTabSz="914400" rtl="0" eaLnBrk="1" latinLnBrk="0" hangingPunct="1">
-        <a:lnSpc>
-          <a:spcPct val="90000"/>
-        </a:lnSpc>
-        <a:spcBef>
-          <a:spcPts val="500"/>
-        </a:spcBef>
-        <a:buFont typeface="Arial" panose="020B0604020202020204" pitchFamily="34" charset="0"/>
-        <a:buChar char="•"/>
-        <a:defRPr sz="1800" kern="1200">
-          <a:solidFill>
-            <a:schemeClr val="tx1"/>
-          </a:solidFill>
-          <a:latin typeface="+mn-lt"/>
-          <a:ea typeface="+mn-ea"/>
-          <a:cs typeface="+mn-cs"/>
-        </a:defRPr>
-      </a:lvl7pPr>
-      <a:lvl8pPr marL="3429000" indent="-228600" algn="l" defTabSz="914400" rtl="0" eaLnBrk="1" latinLnBrk="0" hangingPunct="1">
-        <a:lnSpc>
-          <a:spcPct val="90000"/>
-        </a:lnSpc>
-        <a:spcBef>
-          <a:spcPts val="500"/>
-        </a:spcBef>
-        <a:buFont typeface="Arial" panose="020B0604020202020204" pitchFamily="34" charset="0"/>
-        <a:buChar char="•"/>
-        <a:defRPr sz="1800" kern="1200">
-          <a:solidFill>
-            <a:schemeClr val="tx1"/>
-          </a:solidFill>
-          <a:latin typeface="+mn-lt"/>
-          <a:ea typeface="+mn-ea"/>
-          <a:cs typeface="+mn-cs"/>
-        </a:defRPr>
-      </a:lvl8pPr>
-      <a:lvl9pPr marL="3886200" indent="-228600" algn="l" defTabSz="914400" rtl="0" eaLnBrk="1" latinLnBrk="0" hangingPunct="1">
-        <a:lnSpc>
-          <a:spcPct val="90000"/>
-        </a:lnSpc>
-        <a:spcBef>
-          <a:spcPts val="500"/>
-        </a:spcBef>
-        <a:buFont typeface="Arial" panose="020B0604020202020204" pitchFamily="34" charset="0"/>
-        <a:buChar char="•"/>
-        <a:defRPr sz="1800" kern="1200">
-          <a:solidFill>
-            <a:schemeClr val="tx1"/>
-          </a:solidFill>
-          <a:latin typeface="+mn-lt"/>
-          <a:ea typeface="+mn-ea"/>
-          <a:cs typeface="+mn-cs"/>
-        </a:defRPr>
-      </a:lvl9pPr>
-    </p:bodyStyle>
-    <p:otherStyle>
-      <a:defPPr>
-        <a:defRPr lang="en-US"/>
-      </a:defPPr>
-      <a:lvl1pPr marL="0" algn="l" defTabSz="914400" rtl="0" eaLnBrk="1" latinLnBrk="0" hangingPunct="1">
-        <a:defRPr sz="1800" kern="1200">
-          <a:solidFill>
-            <a:schemeClr val="tx1"/>
-          </a:solidFill>
-          <a:latin typeface="+mn-lt"/>
-          <a:ea typeface="+mn-ea"/>
-          <a:cs typeface="+mn-cs"/>
-        </a:defRPr>
-      </a:lvl1pPr>
-      <a:lvl2pPr marL="457200" algn="l" defTabSz="914400" rtl="0" eaLnBrk="1" latinLnBrk="0" hangingPunct="1">
-        <a:defRPr sz="1800" kern="1200">
-          <a:solidFill>
-            <a:schemeClr val="tx1"/>
-          </a:solidFill>
-          <a:latin typeface="+mn-lt"/>
-          <a:ea typeface="+mn-ea"/>
-          <a:cs typeface="+mn-cs"/>
-        </a:defRPr>
-      </a:lvl2pPr>
-      <a:lvl3pPr marL="914400" algn="l" defTabSz="914400" rtl="0" eaLnBrk="1" latinLnBrk="0" hangingPunct="1">
-        <a:defRPr sz="1800" kern="1200">
-          <a:solidFill>
-            <a:schemeClr val="tx1"/>
-          </a:solidFill>
-          <a:latin typeface="+mn-lt"/>
-          <a:ea typeface="+mn-ea"/>
-          <a:cs typeface="+mn-cs"/>
-        </a:defRPr>
-      </a:lvl3pPr>
-      <a:lvl4pPr marL="1371600" algn="l" defTabSz="914400" rtl="0" eaLnBrk="1" latinLnBrk="0" hangingPunct="1">
-        <a:defRPr sz="1800" kern="1200">
-          <a:solidFill>
-            <a:schemeClr val="tx1"/>
-          </a:solidFill>
-          <a:latin typeface="+mn-lt"/>
-          <a:ea typeface="+mn-ea"/>
-          <a:cs typeface="+mn-cs"/>
-        </a:defRPr>
-      </a:lvl4pPr>
-      <a:lvl5pPr marL="1828800" algn="l" defTabSz="914400" rtl="0" eaLnBrk="1" latinLnBrk="0" hangingPunct="1">
-        <a:defRPr sz="1800" kern="1200">
-          <a:solidFill>
-            <a:schemeClr val="tx1"/>
-          </a:solidFill>
-          <a:latin typeface="+mn-lt"/>
-          <a:ea typeface="+mn-ea"/>
-          <a:cs typeface="+mn-cs"/>
-        </a:defRPr>
-      </a:lvl5pPr>
-      <a:lvl6pPr marL="2286000" algn="l" defTabSz="914400" rtl="0" eaLnBrk="1" latinLnBrk="0" hangingPunct="1">
-        <a:defRPr sz="1800" kern="1200">
-          <a:solidFill>
-            <a:schemeClr val="tx1"/>
-          </a:solidFill>
-          <a:latin typeface="+mn-lt"/>
-          <a:ea typeface="+mn-ea"/>
-          <a:cs typeface="+mn-cs"/>
-        </a:defRPr>
-      </a:lvl6pPr>
-      <a:lvl7pPr marL="2743200" algn="l" defTabSz="914400" rtl="0" eaLnBrk="1" latinLnBrk="0" hangingPunct="1">
-        <a:defRPr sz="1800" kern="1200">
-          <a:solidFill>
-            <a:schemeClr val="tx1"/>
-          </a:solidFill>
-          <a:latin typeface="+mn-lt"/>
-          <a:ea typeface="+mn-ea"/>
-          <a:cs typeface="+mn-cs"/>
-        </a:defRPr>
-      </a:lvl7pPr>
-      <a:lvl8pPr marL="3200400" algn="l" defTabSz="914400" rtl="0" eaLnBrk="1" latinLnBrk="0" hangingPunct="1">
-        <a:defRPr sz="1800" kern="1200">
-          <a:solidFill>
-            <a:schemeClr val="tx1"/>
-          </a:solidFill>
-          <a:latin typeface="+mn-lt"/>
-          <a:ea typeface="+mn-ea"/>
-          <a:cs typeface="+mn-cs"/>
-        </a:defRPr>
-      </a:lvl8pPr>
-      <a:lvl9pPr marL="3657600" algn="l" defTabSz="914400" rtl="0" eaLnBrk="1" latinLnBrk="0" hangingPunct="1">
-        <a:defRPr sz="1800" kern="1200">
-          <a:solidFill>
-            <a:schemeClr val="tx1"/>
-          </a:solidFill>
-          <a:latin typeface="+mn-lt"/>
-          <a:ea typeface="+mn-ea"/>
-          <a:cs typeface="+mn-cs"/>
-        </a:defRPr>
-      </a:lvl9pPr>
-    </p:otherStyle>
-  </p:txStyles>
-</p:sldMaster>
-</file>
-
-<file path=ppt/slideMasters/slideMaster2.xml><?xml version="1.0" encoding="utf-8"?>
 <p:sldMaster xmlns:a="http://schemas.openxmlformats.org/drawingml/2006/main" xmlns:r="http://schemas.openxmlformats.org/officeDocument/2006/relationships" xmlns:p="http://schemas.openxmlformats.org/presentationml/2006/main">
   <p:cSld>
     <p:bg>
@@ -8715,7 +6321,7 @@
                 </a:spcAft>
                 <a:defRPr/>
               </a:pPr>
-              <a:t>9/15/2025</a:t>
+              <a:t>10/7/2026</a:t>
             </a:fld>
             <a:endParaRPr lang="en-US">
               <a:ea typeface="MS PGothic" panose="020B0600070205080204" pitchFamily="34" charset="-128"/>
@@ -9286,36 +6892,17 @@
           </a:xfrm>
         </p:spPr>
         <p:txBody>
-          <a:bodyPr vert="horz" wrap="square" lIns="91440" tIns="45720" rIns="91440" bIns="45720" anchor="ctr" anchorCtr="0"/>
+          <a:bodyPr vert="horz" wrap="square" lIns="91440" tIns="45720" rIns="91440" bIns="45720" anchor="ctr" anchorCtr="0">
+            <a:normAutofit fontScale="100000" lnScale="100000"/>
+          </a:bodyPr>
           <a:lstStyle/>
           <a:p>
-            <a:pPr eaLnBrk="1" hangingPunct="1"/>
-            <a:r>
-              <a:rPr lang="en-US" sz="2000" b="1" dirty="0">
-                <a:solidFill>
-                  <a:schemeClr val="bg1"/>
-                </a:solidFill>
-                <a:latin typeface="Times New Roman" panose="02020603050405020304" pitchFamily="18" charset="0"/>
-                <a:ea typeface="Times New Roman" panose="02020603050405020304" pitchFamily="18" charset="0"/>
-              </a:rPr>
+            <a:pPr lvl="0"/>
+            <a:r>
+              <a:rPr lang="en-US" sz="3600" dirty="0" typeface="Times New Roman"/>
               <a:t>FINAL YEAR PROJECT PRESENTATION &amp; DEMO</a:t>
             </a:r>
-            <a:br>
-              <a:rPr lang="en-GB" sz="2000" b="1" dirty="0">
-                <a:solidFill>
-                  <a:schemeClr val="bg1"/>
-                </a:solidFill>
-                <a:latin typeface="Times New Roman" panose="02020603050405020304" pitchFamily="18" charset="0"/>
-                <a:ea typeface="Times New Roman" panose="02020603050405020304" pitchFamily="18" charset="0"/>
-              </a:rPr>
-            </a:br>
-            <a:endParaRPr lang="en-US" altLang="en-US" sz="2000" b="1" dirty="0">
-              <a:solidFill>
-                <a:schemeClr val="bg1"/>
-              </a:solidFill>
-              <a:latin typeface="Times New Roman" panose="02020603050405020304" pitchFamily="18" charset="0"/>
-              <a:ea typeface="Times New Roman" panose="02020603050405020304" pitchFamily="18" charset="0"/>
-            </a:endParaRPr>
+            <a:endParaRPr lang="en-US" dirty="0" typeface="Times New Roman"/>
           </a:p>
         </p:txBody>
       </p:sp>
@@ -9336,140 +6923,17 @@
           </a:xfrm>
         </p:spPr>
         <p:txBody>
-          <a:bodyPr vert="horz" wrap="square" lIns="91440" tIns="45720" rIns="91440" bIns="45720" anchor="t" anchorCtr="0"/>
+          <a:bodyPr vert="horz" wrap="square" lIns="91440" tIns="45720" rIns="91440" bIns="45720" anchor="t" anchorCtr="0">
+            <a:normAutofit fontScale="100000" lnScale="100000"/>
+          </a:bodyPr>
           <a:lstStyle/>
           <a:p>
-            <a:pPr eaLnBrk="1" hangingPunct="1">
-              <a:buClrTx/>
-              <a:buSzTx/>
-            </a:pPr>
-            <a:r>
-              <a:rPr lang="en-US" b="1" dirty="0">
-                <a:solidFill>
-                  <a:schemeClr val="bg1"/>
-                </a:solidFill>
-                <a:latin typeface="Times New Roman" panose="02020603050405020304" pitchFamily="18" charset="0"/>
-                <a:cs typeface="Times New Roman" panose="02020603050405020304" pitchFamily="18" charset="0"/>
-              </a:rPr>
-              <a:t>CampusFit — A Gamified, Checkpoint-Based Campus Fitness Application</a:t>
-            </a:r>
-            <a:endParaRPr lang="en-US" altLang="en-US" sz="2000" b="1" dirty="0">
-              <a:solidFill>
-                <a:schemeClr val="bg1"/>
-              </a:solidFill>
-              <a:latin typeface="Times New Roman" panose="02020603050405020304" pitchFamily="18" charset="0"/>
-              <a:ea typeface="Times New Roman" panose="02020603050405020304" pitchFamily="18" charset="0"/>
-              <a:cs typeface="Times New Roman" panose="02020603050405020304" pitchFamily="18" charset="0"/>
-            </a:endParaRPr>
-          </a:p>
-          <a:p>
-            <a:pPr eaLnBrk="1" hangingPunct="1">
-              <a:buClrTx/>
-              <a:buSzTx/>
-            </a:pPr>
-            <a:endParaRPr lang="en-GB" sz="2000" b="1" noProof="0" dirty="0">
-              <a:solidFill>
-                <a:schemeClr val="bg1"/>
-              </a:solidFill>
-              <a:latin typeface="Times New Roman" panose="02020603050405020304" pitchFamily="18" charset="0"/>
-              <a:ea typeface="Times New Roman" panose="02020603050405020304" pitchFamily="18" charset="0"/>
-            </a:endParaRPr>
-          </a:p>
-          <a:p>
-            <a:pPr eaLnBrk="1" hangingPunct="1"/>
-            <a:r>
-              <a:rPr lang="en-GB" sz="2000" b="1" dirty="0">
-                <a:solidFill>
-                  <a:schemeClr val="bg1"/>
-                </a:solidFill>
-                <a:latin typeface="Times New Roman" panose="02020603050405020304" pitchFamily="18" charset="0"/>
-                <a:ea typeface="Times New Roman" panose="02020603050405020304" pitchFamily="18" charset="0"/>
-              </a:rPr>
-              <a:t>NAME</a:t>
-            </a:r>
-          </a:p>
-          <a:p>
-            <a:pPr eaLnBrk="1" hangingPunct="1"/>
-            <a:r>
-              <a:rPr lang="en-GB" sz="2000" b="1" noProof="0" dirty="0">
-                <a:solidFill>
-                  <a:schemeClr val="bg1"/>
-                </a:solidFill>
-                <a:latin typeface="Times New Roman" panose="02020603050405020304" pitchFamily="18" charset="0"/>
-                <a:ea typeface="Times New Roman" panose="02020603050405020304" pitchFamily="18" charset="0"/>
-              </a:rPr>
-              <a:t>ID</a:t>
-            </a:r>
-          </a:p>
-          <a:p>
-            <a:pPr eaLnBrk="1" hangingPunct="1"/>
-            <a:endParaRPr lang="en-GB" sz="2000" b="1" noProof="0" dirty="0">
-              <a:solidFill>
-                <a:schemeClr val="bg1"/>
-              </a:solidFill>
-              <a:latin typeface="Times New Roman" panose="02020603050405020304" pitchFamily="18" charset="0"/>
-              <a:ea typeface="Times New Roman" panose="02020603050405020304" pitchFamily="18" charset="0"/>
-            </a:endParaRPr>
-          </a:p>
-          <a:p>
-            <a:pPr eaLnBrk="1" hangingPunct="1"/>
-            <a:r>
-              <a:rPr lang="en-GB" sz="1200" b="1" dirty="0">
-                <a:solidFill>
-                  <a:schemeClr val="bg1"/>
-                </a:solidFill>
-                <a:latin typeface="Times New Roman" panose="02020603050405020304" pitchFamily="18" charset="0"/>
-                <a:ea typeface="Times New Roman" panose="02020603050405020304" pitchFamily="18" charset="0"/>
-              </a:rPr>
-              <a:t>SUPERVISOR</a:t>
-            </a:r>
-            <a:r>
-              <a:rPr lang="en-GB" sz="1200" b="1">
-                <a:solidFill>
-                  <a:schemeClr val="bg1"/>
-                </a:solidFill>
-                <a:latin typeface="Times New Roman" panose="02020603050405020304" pitchFamily="18" charset="0"/>
-                <a:ea typeface="Times New Roman" panose="02020603050405020304" pitchFamily="18" charset="0"/>
-              </a:rPr>
-              <a:t>:             </a:t>
-            </a:r>
-            <a:r>
-              <a:rPr lang="en-GB" sz="1200" b="1" dirty="0">
-                <a:solidFill>
-                  <a:schemeClr val="bg1"/>
-                </a:solidFill>
-                <a:latin typeface="Times New Roman" panose="02020603050405020304" pitchFamily="18" charset="0"/>
-                <a:ea typeface="Times New Roman" panose="02020603050405020304" pitchFamily="18" charset="0"/>
-              </a:rPr>
-              <a:t>19</a:t>
-            </a:r>
-            <a:r>
-              <a:rPr lang="en-GB" sz="1200" b="1" baseline="30000" dirty="0">
-                <a:solidFill>
-                  <a:schemeClr val="bg1"/>
-                </a:solidFill>
-                <a:latin typeface="Times New Roman" panose="02020603050405020304" pitchFamily="18" charset="0"/>
-                <a:ea typeface="Times New Roman" panose="02020603050405020304" pitchFamily="18" charset="0"/>
-              </a:rPr>
-              <a:t>TH</a:t>
-            </a:r>
-            <a:r>
-              <a:rPr lang="en-GB" sz="1200" b="1" dirty="0">
-                <a:solidFill>
-                  <a:schemeClr val="bg1"/>
-                </a:solidFill>
-                <a:latin typeface="Times New Roman" panose="02020603050405020304" pitchFamily="18" charset="0"/>
-                <a:ea typeface="Times New Roman" panose="02020603050405020304" pitchFamily="18" charset="0"/>
-              </a:rPr>
-              <a:t> SEPTEMBER 2025</a:t>
-            </a:r>
-            <a:endParaRPr lang="en-GB" sz="1200" b="1" noProof="0" dirty="0">
-              <a:solidFill>
-                <a:schemeClr val="bg1"/>
-              </a:solidFill>
-              <a:latin typeface="Times New Roman" panose="02020603050405020304" pitchFamily="18" charset="0"/>
-              <a:ea typeface="Times New Roman" panose="02020603050405020304" pitchFamily="18" charset="0"/>
-            </a:endParaRPr>
+            <a:pPr lvl="0"/>
+            <a:r>
+              <a:rPr lang="en-US" sz="2400" dirty="0" typeface="Times New Roman"/>
+              <a:t>CampusFit — A Gamified, Checkpoint-Based Campus Fitness Application NAME ID SUPERVISOR:             19TH SEPTEMBER 2025</a:t>
+            </a:r>
+            <a:endParaRPr lang="en-US" dirty="0" typeface="Times New Roman"/>
           </a:p>
         </p:txBody>
       </p:sp>
@@ -9511,7 +6975,7 @@
                 </a:spcAft>
                 <a:defRPr/>
               </a:pPr>
-              <a:t>9/15/2025</a:t>
+              <a:t>10/7/2026</a:t>
             </a:fld>
             <a:endParaRPr lang="en-US">
               <a:latin typeface="Calibri" panose="020F0502020204030204" pitchFamily="34" charset="0"/>
@@ -9609,28 +7073,17 @@
         </p:nvSpPr>
         <p:spPr/>
         <p:txBody>
-          <a:bodyPr/>
+          <a:bodyPr>
+            <a:normAutofit fontScale="100000" lnScale="100000"/>
+          </a:bodyPr>
           <a:lstStyle/>
           <a:p>
-            <a:r>
-              <a:rPr lang="en-US" altLang="en-US" b="1" dirty="0">
-                <a:solidFill>
-                  <a:schemeClr val="bg1"/>
-                </a:solidFill>
-                <a:latin typeface="Times New Roman" panose="02020603050405020304" pitchFamily="18" charset="0"/>
-                <a:ea typeface="Times New Roman" panose="02020603050405020304" pitchFamily="18" charset="0"/>
-                <a:sym typeface="+mn-ea"/>
-              </a:rPr>
-              <a:t>OUTLINE OF  PRESENTATION
-Problem and motivation
-Research aim, questions and objectives
-Literature and theoretical framework
-Methodology and design
-System architecture and implementation
-Evaluation: verification, fidelity, performance, reward economy
-Findings, contributions and future work</a:t>
-            </a:r>
-            <a:endParaRPr lang="en-US" dirty="0"/>
+            <a:pPr lvl="0"/>
+            <a:r>
+              <a:rPr lang="en-US" sz="3600" dirty="0" typeface="Times New Roman"/>
+              <a:t>OUTLINE OF  PRESENTATION</a:t>
+            </a:r>
+            <a:endParaRPr lang="en-US" dirty="0" typeface="Times New Roman"/>
           </a:p>
         </p:txBody>
       </p:sp>
@@ -9646,13 +7099,59 @@
         </p:nvSpPr>
         <p:spPr/>
         <p:txBody>
-          <a:bodyPr/>
+          <a:bodyPr vert="horz" lIns="91440" tIns="45720" rIns="91440" bIns="45720" anchor="t">
+            <a:normAutofit fontScale="80000" lnScale="80000"/>
+          </a:bodyPr>
           <a:lstStyle/>
           <a:p>
-            <a:endParaRPr lang="en-US" sz="2400" dirty="0">
-              <a:latin typeface="Times New Roman" panose="02020603050405020304" pitchFamily="18" charset="0"/>
-              <a:cs typeface="Times New Roman" panose="02020603050405020304" pitchFamily="18" charset="0"/>
-            </a:endParaRPr>
+            <a:pPr lvl="0"/>
+            <a:r>
+              <a:rPr lang="en-US" sz="1400" dirty="0" typeface="Times New Roman"/>
+              <a:t xml:space="preserve">Problem and motivation</a:t>
+            </a:r>
+          </a:p>
+          <a:p>
+            <a:pPr lvl="0"/>
+            <a:r>
+              <a:rPr lang="en-US" sz="1400" dirty="0" typeface="Times New Roman"/>
+              <a:t xml:space="preserve">Research aim, questions and objectives</a:t>
+            </a:r>
+          </a:p>
+          <a:p>
+            <a:pPr lvl="0"/>
+            <a:r>
+              <a:rPr lang="en-US" sz="1400" dirty="0" typeface="Times New Roman"/>
+              <a:t xml:space="preserve">Literature and theoretical framework</a:t>
+            </a:r>
+          </a:p>
+          <a:p>
+            <a:pPr lvl="0"/>
+            <a:r>
+              <a:rPr lang="en-US" sz="1400" dirty="0" typeface="Times New Roman"/>
+              <a:t xml:space="preserve">Methodology and design</a:t>
+            </a:r>
+          </a:p>
+          <a:p>
+            <a:pPr lvl="0"/>
+            <a:r>
+              <a:rPr lang="en-US" sz="1400" dirty="0" typeface="Times New Roman"/>
+              <a:t xml:space="preserve">System architecture and implementation</a:t>
+            </a:r>
+          </a:p>
+          <a:p>
+            <a:pPr lvl="0"/>
+            <a:r>
+              <a:rPr lang="en-US" sz="1400" dirty="0" typeface="Times New Roman"/>
+              <a:t xml:space="preserve">Evaluation: verification, fidelity, performance, reward economy</a:t>
+            </a:r>
+          </a:p>
+          <a:p>
+            <a:pPr lvl="0"/>
+            <a:r>
+              <a:rPr lang="en-US" sz="1400" dirty="0" typeface="Times New Roman"/>
+              <a:t xml:space="preserve">Findings, contributions and future work</a:t>
+            </a:r>
+            <a:endParaRPr lang="en-US" dirty="0" typeface="Times New Roman"/>
           </a:p>
         </p:txBody>
       </p:sp>
@@ -9694,7 +7193,7 @@
                 </a:spcAft>
                 <a:defRPr/>
               </a:pPr>
-              <a:t>9/15/2025</a:t>
+              <a:t>10/7/2026</a:t>
             </a:fld>
             <a:endParaRPr lang="en-US">
               <a:latin typeface="Calibri" panose="020F0502020204030204" pitchFamily="34" charset="0"/>
@@ -9798,39 +7297,17 @@
         </p:nvSpPr>
         <p:spPr/>
         <p:txBody>
-          <a:bodyPr/>
+          <a:bodyPr>
+            <a:normAutofit fontScale="100000" lnScale="100000"/>
+          </a:bodyPr>
           <a:lstStyle/>
           <a:p>
-            <a:r>
-              <a:rPr lang="en-GB" sz="4400" b="1" dirty="0">
-                <a:solidFill>
-                  <a:schemeClr val="bg2"/>
-                </a:solidFill>
-                <a:latin typeface="Times New Roman" panose="02020603050405020304" pitchFamily="18" charset="0"/>
-                <a:cs typeface="Times New Roman" panose="02020603050405020304" pitchFamily="18" charset="0"/>
-              </a:rPr>
-              <a:t>Introduction
-University students are among the least active populations: nearly half
-inactive in sampled cohorts (Alkhawaldeh et al., 2024); 22.4%
-insufficiently active (Edelmann et al., 2022).
-Generic fitness apps count steps but do not engage the campus
-environment students actually live and move through (McCallum et al., 2018).
-Gamification increases physical activity, but heterogeneously, and with
-documented risks in purely competitive designs (Hamari et al., 2014;
-Mazeas et al., 2022; Nishi et al., 2024).
-Research gap: no reviewed system combines campus-anchored checkpoints,
-server-side auditable reward allocation, competition designed against
-leaderboard demotivation risks, and institutional governance in one
-instrumented artefact.
-Contribution: a gamified, QR/NFC checkpoint-based mobile application that
-turns the campus into a fitness instrument — participatory, auditable,
-and governable.</a:t>
-            </a:r>
-            <a:endParaRPr lang="en-US" dirty="0">
-              <a:solidFill>
-                <a:schemeClr val="bg2"/>
-              </a:solidFill>
-            </a:endParaRPr>
+            <a:pPr lvl="0"/>
+            <a:r>
+              <a:rPr lang="en-US" sz="3600" dirty="0" typeface="Times New Roman"/>
+              <a:t>Introduction</a:t>
+            </a:r>
+            <a:endParaRPr lang="en-US" dirty="0" typeface="Times New Roman"/>
           </a:p>
         </p:txBody>
       </p:sp>
@@ -9857,14 +7334,45 @@
           </a:xfrm>
         </p:spPr>
         <p:txBody>
-          <a:bodyPr/>
+          <a:bodyPr vert="horz" lIns="91440" tIns="45720" rIns="91440" bIns="45720" anchor="t">
+            <a:normAutofit fontScale="80000" lnScale="80000"/>
+          </a:bodyPr>
           <a:lstStyle/>
           <a:p>
-            <a:pPr algn="just"/>
-            <a:endParaRPr lang="en-US" altLang="zh-CN" sz="3200" dirty="0">
-              <a:latin typeface="Times New Roman" panose="02020603050405020304" pitchFamily="18" charset="0"/>
-              <a:sym typeface="+mn-ea"/>
-            </a:endParaRPr>
+            <a:pPr lvl="0"/>
+            <a:r>
+              <a:rPr lang="en-US" sz="1400" dirty="0" typeface="Times New Roman"/>
+              <a:t xml:space="preserve">University students are among the least active populations: nearly half inactive in sampled cohorts (Alkhawaldeh et al., 2024); 22.4% insufficiently active (Edelmann et al., 2022).</a:t>
+            </a:r>
+          </a:p>
+          <a:p>
+            <a:pPr lvl="0"/>
+            <a:r>
+              <a:rPr lang="en-US" sz="1400" dirty="0" typeface="Times New Roman"/>
+              <a:t xml:space="preserve">Generic fitness apps count steps but do not engage the campus environment students actually live and move through (McCallum et al., 2018).</a:t>
+            </a:r>
+          </a:p>
+          <a:p>
+            <a:pPr lvl="0"/>
+            <a:r>
+              <a:rPr lang="en-US" sz="1400" dirty="0" typeface="Times New Roman"/>
+              <a:t xml:space="preserve">Gamification increases physical activity, but heterogeneously, and with documented risks in purely competitive designs (Hamari et al., 2014; Mazeas et al., 2022; Nishi et al., 2024).</a:t>
+            </a:r>
+          </a:p>
+          <a:p>
+            <a:pPr lvl="0"/>
+            <a:r>
+              <a:rPr lang="en-US" sz="1400" dirty="0" typeface="Times New Roman"/>
+              <a:t xml:space="preserve">Research gap: no reviewed system combines campus-anchored checkpoints, server-side auditable reward allocation, competition designed against leaderboard demotivation risks, and institutional governance in one instrumented artefact.</a:t>
+            </a:r>
+          </a:p>
+          <a:p>
+            <a:pPr lvl="0"/>
+            <a:r>
+              <a:rPr lang="en-US" sz="1400" dirty="0" typeface="Times New Roman"/>
+              <a:t xml:space="preserve">Contribution: a gamified, QR/NFC checkpoint-based mobile application that turns the campus into a fitness instrument — participatory, auditable, and governable.</a:t>
+            </a:r>
+            <a:endParaRPr lang="en-US" dirty="0" typeface="Times New Roman"/>
           </a:p>
         </p:txBody>
       </p:sp>
@@ -9911,7 +7419,7 @@
                 </a:spcAft>
                 <a:defRPr/>
               </a:pPr>
-              <a:t>9/15/2025</a:t>
+              <a:t>10/7/2026</a:t>
             </a:fld>
             <a:endParaRPr lang="en-US">
               <a:ea typeface="MS PGothic" panose="020B0600070205080204" pitchFamily="34" charset="-128"/>
@@ -10018,39 +7526,17 @@
         </p:nvSpPr>
         <p:spPr/>
         <p:txBody>
-          <a:bodyPr/>
+          <a:bodyPr>
+            <a:normAutofit fontScale="100000" lnScale="100000"/>
+          </a:bodyPr>
           <a:lstStyle/>
           <a:p>
-            <a:r>
-              <a:rPr lang="en-GB" sz="4400" b="1" dirty="0">
-                <a:solidFill>
-                  <a:schemeClr val="bg2"/>
-                </a:solidFill>
-                <a:latin typeface="Times New Roman" panose="02020603050405020304" pitchFamily="18" charset="0"/>
-                <a:cs typeface="Times New Roman" panose="02020603050405020304" pitchFamily="18" charset="0"/>
-              </a:rPr>
-              <a:t>Aims and Objectives
-Aim
-To design, develop and evaluate a gamified, checkpoint-based mobile
-fitness application that promotes sustained physical activity within a
-university campus.
-Specific objectives
-1. Analyse student fitness behaviour and determine system requirements
-2. Design a user-friendly mobile application interface
-3. Implement secure student registration and authentication
-4. Design and deploy QR/NFC-based checkpoint validation mechanisms
-5. Develop a dynamic points allocation algorithm
-6. Integrate leaderboard functionality for competitive ranking
-7. Implement a badge and achievement reward system
-8. Design an administrative dashboard for system management
-9. Test system usability, performance, and scalability
-10. Evaluate user engagement through pilot testing</a:t>
-            </a:r>
-            <a:endParaRPr lang="en-US" dirty="0">
-              <a:solidFill>
-                <a:schemeClr val="bg2"/>
-              </a:solidFill>
-            </a:endParaRPr>
+            <a:pPr lvl="0"/>
+            <a:r>
+              <a:rPr lang="en-US" sz="3600" dirty="0" typeface="Times New Roman"/>
+              <a:t>Aims and Objectives</a:t>
+            </a:r>
+            <a:endParaRPr lang="en-US" dirty="0" typeface="Times New Roman"/>
           </a:p>
         </p:txBody>
       </p:sp>
@@ -10072,32 +7558,113 @@
         </p:nvSpPr>
         <p:spPr>
           <a:xfrm>
-            <a:off x="116958" y="1617134"/>
-            <a:ext cx="11855302" cy="4847461"/>
+            <a:off x="373626" y="1691148"/>
+            <a:ext cx="11592232" cy="5030327"/>
           </a:xfrm>
         </p:spPr>
         <p:txBody>
-          <a:bodyPr/>
+          <a:bodyPr vert="horz" lIns="91440" tIns="45720" rIns="91440" bIns="45720" anchor="t">
+            <a:normAutofit fontScale="80000" lnScale="80000"/>
+          </a:bodyPr>
           <a:lstStyle/>
           <a:p>
-            <a:pPr algn="just"/>
-            <a:endParaRPr lang="en-US" altLang="zh-CN" sz="3200" dirty="0">
-              <a:latin typeface="Times New Roman" panose="02020603050405020304" pitchFamily="18" charset="0"/>
-              <a:cs typeface="Times New Roman" panose="02020603050405020304" pitchFamily="18" charset="0"/>
-              <a:sym typeface="+mn-ea"/>
-            </a:endParaRPr>
-          </a:p>
-          <a:p>
-            <a:pPr algn="just"/>
-            <a:endParaRPr lang="en-US" altLang="zh-CN" sz="3200" dirty="0">
-              <a:latin typeface="Times New Roman" panose="02020603050405020304" pitchFamily="18" charset="0"/>
-              <a:cs typeface="Times New Roman" panose="02020603050405020304" pitchFamily="18" charset="0"/>
-              <a:sym typeface="+mn-ea"/>
-            </a:endParaRPr>
-          </a:p>
-          <a:p>
-            <a:pPr algn="just"/>
-            <a:endParaRPr lang="en-US" dirty="0"/>
+            <a:pPr lvl="0"/>
+            <a:r>
+              <a:rPr lang="en-US" sz="1600" dirty="0" typeface="Times New Roman" b="1"/>
+              <a:t xml:space="preserve">Aim</a:t>
+            </a:r>
+          </a:p>
+          <a:p>
+            <a:pPr lvl="0"/>
+            <a:r>
+              <a:rPr lang="en-US" sz="1400" dirty="0" typeface="Times New Roman"/>
+              <a:t xml:space="preserve">To design, develop and evaluate a gamified, checkpoint-based mobile fitness application that promotes sustained physical activity within a university campus.</a:t>
+            </a:r>
+          </a:p>
+          <a:p>
+            <a:pPr lvl="0"/>
+            <a:r>
+              <a:rPr lang="en-US" sz="1400" dirty="0" typeface="Times New Roman"/>
+              <a:t xml:space="preserve"> </a:t>
+            </a:r>
+          </a:p>
+          <a:p>
+            <a:pPr lvl="0"/>
+            <a:r>
+              <a:rPr lang="en-US" sz="1600" dirty="0" typeface="Times New Roman" b="1"/>
+              <a:t xml:space="preserve">Specific objectives</a:t>
+            </a:r>
+          </a:p>
+          <a:p>
+            <a:pPr lvl="0"/>
+            <a:r>
+              <a:rPr lang="en-US" sz="1400" dirty="0" typeface="Times New Roman"/>
+              <a:t xml:space="preserve">1. Analyse student fitness behaviour and determine system requirements</a:t>
+            </a:r>
+          </a:p>
+          <a:p>
+            <a:pPr lvl="0"/>
+            <a:r>
+              <a:rPr lang="en-US" sz="1400" dirty="0" typeface="Times New Roman"/>
+              <a:t xml:space="preserve">2. Design a user-friendly mobile application interface</a:t>
+            </a:r>
+          </a:p>
+          <a:p>
+            <a:pPr lvl="0"/>
+            <a:r>
+              <a:rPr lang="en-US" sz="1400" dirty="0" typeface="Times New Roman"/>
+              <a:t xml:space="preserve">3. Implement secure student registration and authentication</a:t>
+            </a:r>
+          </a:p>
+          <a:p>
+            <a:pPr lvl="0"/>
+            <a:r>
+              <a:rPr lang="en-US" sz="1400" dirty="0" typeface="Times New Roman"/>
+              <a:t xml:space="preserve">4. Design and deploy QR/NFC-based checkpoint validation mechanisms</a:t>
+            </a:r>
+          </a:p>
+          <a:p>
+            <a:pPr lvl="0"/>
+            <a:r>
+              <a:rPr lang="en-US" sz="1400" dirty="0" typeface="Times New Roman"/>
+              <a:t xml:space="preserve">5. Develop a dynamic points allocation algorithm</a:t>
+            </a:r>
+          </a:p>
+          <a:p>
+            <a:pPr lvl="0"/>
+            <a:r>
+              <a:rPr lang="en-US" sz="1400" dirty="0" typeface="Times New Roman"/>
+              <a:t xml:space="preserve">6. Integrate leaderboard functionality for competitive ranking</a:t>
+            </a:r>
+          </a:p>
+          <a:p>
+            <a:pPr lvl="0"/>
+            <a:r>
+              <a:rPr lang="en-US" sz="1400" dirty="0" typeface="Times New Roman"/>
+              <a:t xml:space="preserve">7. Implement a badge and achievement reward system</a:t>
+            </a:r>
+          </a:p>
+          <a:p>
+            <a:pPr lvl="0"/>
+            <a:r>
+              <a:rPr lang="en-US" sz="1400" dirty="0" typeface="Times New Roman"/>
+              <a:t xml:space="preserve">8. Design an administrative dashboard for system management</a:t>
+            </a:r>
+          </a:p>
+          <a:p>
+            <a:pPr lvl="0"/>
+            <a:r>
+              <a:rPr lang="en-US" sz="1400" dirty="0" typeface="Times New Roman"/>
+              <a:t xml:space="preserve">9. Test system usability, performance, and scalability</a:t>
+            </a:r>
+          </a:p>
+          <a:p>
+            <a:pPr lvl="0"/>
+            <a:r>
+              <a:rPr lang="en-US" sz="1400" dirty="0" typeface="Times New Roman"/>
+              <a:t xml:space="preserve">10. Evaluate user engagement through pilot testing</a:t>
+            </a:r>
+            <a:endParaRPr lang="en-US" dirty="0" typeface="Times New Roman"/>
           </a:p>
         </p:txBody>
       </p:sp>
@@ -10144,7 +7711,7 @@
                 </a:spcAft>
                 <a:defRPr/>
               </a:pPr>
-              <a:t>9/15/2025</a:t>
+              <a:t>10/7/2026</a:t>
             </a:fld>
             <a:endParaRPr lang="en-US">
               <a:ea typeface="MS PGothic" panose="020B0600070205080204" pitchFamily="34" charset="-128"/>
@@ -10251,34 +7818,17 @@
         </p:nvSpPr>
         <p:spPr/>
         <p:txBody>
-          <a:bodyPr/>
+          <a:bodyPr>
+            <a:normAutofit fontScale="100000" lnScale="100000"/>
+          </a:bodyPr>
           <a:lstStyle/>
           <a:p>
-            <a:r>
-              <a:rPr lang="en-GB" b="1" dirty="0">
-                <a:solidFill>
-                  <a:schemeClr val="bg2"/>
-                </a:solidFill>
-                <a:latin typeface="Times New Roman" panose="02020603050405020304" pitchFamily="18" charset="0"/>
-                <a:cs typeface="Times New Roman" panose="02020603050405020304" pitchFamily="18" charset="0"/>
-              </a:rPr>
-              <a:t>Related Work
-Self-determination theory — points as competence feedback, not
-compliance payment; relatedness through clubs and crews (Ryan &amp; Deci, 2000).
-Flow theory — four difficulty tiers (easy/medium/hard/epic) keep
-challenge matched to ability (Csikszentmihalyi, 1990).
-Sustainability — novelty decay is the dominant failure mode; campus
-content must be continuously administered (Althoff et al., 2016;
-Li et al., 2021).
-Location-based precedent — Pokémon Go reached least-active users most
-(Althoff et al., 2016), with decay later (Li et al., 2021).
-Attrition — drop-out is the norm in the first weeks; friction in the
-core action is the failure mode to design against (Linardon &amp;
-Fuller-Tyszkiewicz, 2020).
-Why not sensors alone — equity, privacy, attribution, and portable
-codebase rule out a sensor-first architecture (Section 2.9.1).</a:t>
-            </a:r>
-            <a:endParaRPr lang="en-US" dirty="0"/>
+            <a:pPr lvl="0"/>
+            <a:r>
+              <a:rPr lang="en-US" sz="3600" dirty="0" typeface="Times New Roman"/>
+              <a:t>Related Work</a:t>
+            </a:r>
+            <a:endParaRPr lang="en-US" dirty="0" typeface="Times New Roman"/>
           </a:p>
         </p:txBody>
       </p:sp>
@@ -10305,14 +7855,52 @@
           </a:xfrm>
         </p:spPr>
         <p:txBody>
-          <a:bodyPr/>
+          <a:bodyPr vert="horz" lIns="91440" tIns="45720" rIns="91440" bIns="45720" anchor="t">
+            <a:normAutofit fontScale="80000" lnScale="80000"/>
+          </a:bodyPr>
           <a:lstStyle/>
           <a:p>
-            <a:pPr algn="just"/>
-            <a:endParaRPr lang="en-US" sz="2400" dirty="0">
-              <a:latin typeface="Times New Roman" panose="02020603050405020304" pitchFamily="18" charset="0"/>
-              <a:cs typeface="Times New Roman" panose="02020603050405020304" pitchFamily="18" charset="0"/>
-            </a:endParaRPr>
+            <a:pPr lvl="0"/>
+            <a:r>
+              <a:rPr lang="en-US" sz="1400" dirty="0" typeface="Times New Roman"/>
+              <a:t xml:space="preserve">Self-determination theory — points as competence feedback, not compliance payment; relatedness through clubs and crews (Ryan &amp; Deci, 2000).</a:t>
+            </a:r>
+          </a:p>
+          <a:p>
+            <a:pPr lvl="0"/>
+            <a:r>
+              <a:rPr lang="en-US" sz="1400" dirty="0" typeface="Times New Roman"/>
+              <a:t xml:space="preserve">Flow theory — four difficulty tiers (easy/medium/hard/epic) keep challenge matched to ability (Csikszentmihalyi, 1990).</a:t>
+            </a:r>
+          </a:p>
+          <a:p>
+            <a:pPr lvl="0"/>
+            <a:r>
+              <a:rPr lang="en-US" sz="1400" dirty="0" typeface="Times New Roman"/>
+              <a:t xml:space="preserve">Sustainability — novelty decay is the dominant failure mode; campus content must be continuously administered (Althoff et al., 2016; Li et al., 2021).</a:t>
+            </a:r>
+          </a:p>
+          <a:p>
+            <a:pPr lvl="0"/>
+            <a:r>
+              <a:rPr lang="en-US" sz="1400" dirty="0" typeface="Times New Roman"/>
+              <a:t xml:space="preserve">Location-based precedent — Pokémon Go reached least-active users most (Althoff et al., 2016), with decay later (Li et al., 2021).</a:t>
+            </a:r>
+          </a:p>
+          <a:p>
+            <a:pPr lvl="0"/>
+            <a:r>
+              <a:rPr lang="en-US" sz="1400" dirty="0" typeface="Times New Roman"/>
+              <a:t xml:space="preserve">Attrition — drop-out is the norm in the first weeks; friction in the core action is the failure mode to design against (Linardon &amp; Fuller-Tyszkiewicz, 2020).</a:t>
+            </a:r>
+          </a:p>
+          <a:p>
+            <a:pPr lvl="0"/>
+            <a:r>
+              <a:rPr lang="en-US" sz="1400" dirty="0" typeface="Times New Roman"/>
+              <a:t xml:space="preserve">Why not sensors alone — equity, privacy, attribution, and portable codebase rule out a sensor-first architecture (Section 2.9.1).</a:t>
+            </a:r>
+            <a:endParaRPr lang="en-US" dirty="0" typeface="Times New Roman"/>
           </a:p>
         </p:txBody>
       </p:sp>
@@ -10359,7 +7947,7 @@
                 </a:spcAft>
                 <a:defRPr/>
               </a:pPr>
-              <a:t>9/15/2025</a:t>
+              <a:t>10/7/2026</a:t>
             </a:fld>
             <a:endParaRPr lang="en-US">
               <a:ea typeface="MS PGothic" panose="020B0600070205080204" pitchFamily="34" charset="-128"/>
@@ -10466,37 +8054,17 @@
         </p:nvSpPr>
         <p:spPr/>
         <p:txBody>
-          <a:bodyPr/>
+          <a:bodyPr>
+            <a:normAutofit fontScale="100000" lnScale="100000"/>
+          </a:bodyPr>
           <a:lstStyle/>
           <a:p>
-            <a:r>
-              <a:rPr lang="en-GB" sz="4400" b="1" dirty="0">
-                <a:solidFill>
-                  <a:schemeClr val="bg2"/>
-                </a:solidFill>
-                <a:latin typeface="Times New Roman" panose="02020603050405020304" pitchFamily="18" charset="0"/>
-                <a:cs typeface="Times New Roman" panose="02020603050405020304" pitchFamily="18" charset="0"/>
-              </a:rPr>
-              <a:t>Proposed Solution
-Architecture (three tiers)
-• Client: React 19 + TypeScript + Tailwind CSS, Progressive Web App
-  with precached shell.
-• Backend: Supabase / PostgreSQL with row-level security; all reward
-  authority in server-side database functions.
-• Physical: printed QR codes (NFC-ready); same code string as the
-  database checkpoint row.
-Refereed reward economy
-• scan_checkpoint() resolves the checkpoint, enforces an 8-hour
-  per-user cooldown, applies a difficulty multiplier, writes an
-  append-only audit ledger, and recomputes points / level / streak in
-  one transaction.
-• Multipliers: easy ×1.0, medium ×1.3, hard ×1.8, epic ×2.5.</a:t>
-            </a:r>
-            <a:endParaRPr lang="en-US" dirty="0">
-              <a:solidFill>
-                <a:schemeClr val="bg2"/>
-              </a:solidFill>
-            </a:endParaRPr>
+            <a:pPr lvl="0"/>
+            <a:r>
+              <a:rPr lang="en-US" sz="3600" dirty="0" typeface="Times New Roman"/>
+              <a:t>Proposed Solution</a:t>
+            </a:r>
+            <a:endParaRPr lang="en-US" dirty="0" typeface="Times New Roman"/>
           </a:p>
         </p:txBody>
       </p:sp>
@@ -10518,22 +8086,66 @@
         </p:nvSpPr>
         <p:spPr/>
         <p:txBody>
-          <a:bodyPr/>
+          <a:bodyPr vert="horz" lIns="91440" tIns="45720" rIns="91440" bIns="45720" anchor="t">
+            <a:normAutofit fontScale="80000" lnScale="80000"/>
+          </a:bodyPr>
           <a:lstStyle/>
           <a:p>
-            <a:endParaRPr lang="en-US" sz="3200" kern="100" dirty="0">
-              <a:effectLst/>
-              <a:latin typeface="Times New Roman" panose="02020603050405020304" pitchFamily="18" charset="0"/>
-              <a:ea typeface="Aptos" panose="020B0004020202020204" pitchFamily="34" charset="0"/>
-              <a:cs typeface="Times New Roman" panose="02020603050405020304" pitchFamily="18" charset="0"/>
-            </a:endParaRPr>
-          </a:p>
-          <a:p>
-            <a:endParaRPr lang="en-US" kern="100" dirty="0">
-              <a:latin typeface="Times New Roman" panose="02020603050405020304" pitchFamily="18" charset="0"/>
-              <a:ea typeface="Aptos" panose="020B0004020202020204" pitchFamily="34" charset="0"/>
-              <a:cs typeface="Times New Roman" panose="02020603050405020304" pitchFamily="18" charset="0"/>
-            </a:endParaRPr>
+            <a:pPr lvl="0"/>
+            <a:r>
+              <a:rPr lang="en-US" sz="1600" dirty="0" typeface="Times New Roman" b="1"/>
+              <a:t xml:space="preserve">Architecture (three tiers)</a:t>
+            </a:r>
+          </a:p>
+          <a:p>
+            <a:pPr lvl="0"/>
+            <a:r>
+              <a:rPr lang="en-US" sz="1400" dirty="0" typeface="Times New Roman"/>
+              <a:t xml:space="preserve">• Client: React 19 + TypeScript + Tailwind CSS, Progressive Web App with precached shell.</a:t>
+            </a:r>
+          </a:p>
+          <a:p>
+            <a:pPr lvl="0"/>
+            <a:r>
+              <a:rPr lang="en-US" sz="1400" dirty="0" typeface="Times New Roman"/>
+              <a:t xml:space="preserve">• Backend: Supabase / PostgreSQL with row-level security; all reward authority in server-side database functions.</a:t>
+            </a:r>
+          </a:p>
+          <a:p>
+            <a:pPr lvl="0"/>
+            <a:r>
+              <a:rPr lang="en-US" sz="1400" dirty="0" typeface="Times New Roman"/>
+              <a:t xml:space="preserve">• Physical: printed QR codes (NFC-ready); same code string as the database checkpoint row.</a:t>
+            </a:r>
+          </a:p>
+          <a:p>
+            <a:pPr lvl="0"/>
+            <a:r>
+              <a:rPr lang="en-US" sz="1400" dirty="0" typeface="Times New Roman"/>
+              <a:t xml:space="preserve"> </a:t>
+            </a:r>
+          </a:p>
+          <a:p>
+            <a:pPr lvl="0"/>
+            <a:r>
+              <a:rPr lang="en-US" sz="1600" dirty="0" typeface="Times New Roman" b="1"/>
+              <a:t xml:space="preserve">Refereed reward economy</a:t>
+            </a:r>
+          </a:p>
+          <a:p>
+            <a:pPr lvl="0"/>
+            <a:r>
+              <a:rPr lang="en-US" sz="1400" dirty="0" typeface="Times New Roman"/>
+              <a:t xml:space="preserve">• scan_checkpoint() resolves the checkpoint, enforces an 8-hour per-user cooldown, applies a difficulty multiplier, writes an append-only audit ledger, and recomputes points / level / streak in one transaction.</a:t>
+            </a:r>
+          </a:p>
+          <a:p>
+            <a:pPr lvl="0"/>
+            <a:r>
+              <a:rPr lang="en-US" sz="1400" dirty="0" typeface="Times New Roman"/>
+              <a:t xml:space="preserve">• Multipliers: easy ×1.0, medium ×1.3, hard ×1.8, epic ×2.5.</a:t>
+            </a:r>
+            <a:endParaRPr lang="en-US" dirty="0" typeface="Times New Roman"/>
           </a:p>
         </p:txBody>
       </p:sp>
@@ -10580,7 +8192,7 @@
                 </a:spcAft>
                 <a:defRPr/>
               </a:pPr>
-              <a:t>9/15/2025</a:t>
+              <a:t>10/7/2026</a:t>
             </a:fld>
             <a:endParaRPr lang="en-US">
               <a:ea typeface="MS PGothic" panose="020B0600070205080204" pitchFamily="34" charset="-128"/>
@@ -10636,75 +8248,6 @@
             <a:endParaRPr lang="en-US" altLang="en-US">
               <a:ea typeface="MS PGothic" panose="020B0600070205080204" pitchFamily="34" charset="-128"/>
             </a:endParaRPr>
-          </a:p>
-        </p:txBody>
-      </p:sp>
-      <p:sp>
-        <p:nvSpPr>
-          <p:cNvPr id="7" name="Rectangle 1">
-            <a:extLst>
-              <a:ext uri="{FF2B5EF4-FFF2-40B4-BE49-F238E27FC236}">
-                <a16:creationId xmlns:a16="http://schemas.microsoft.com/office/drawing/2014/main" id="{51A869A9-1EC7-F343-073E-F51243E5FC8F}"/>
-              </a:ext>
-            </a:extLst>
-          </p:cNvPr>
-          <p:cNvSpPr>
-            <a:spLocks noChangeArrowheads="1"/>
-          </p:cNvSpPr>
-          <p:nvPr/>
-        </p:nvSpPr>
-        <p:spPr bwMode="auto">
-          <a:xfrm>
-            <a:off x="3127375" y="2263775"/>
-            <a:ext cx="12192000" cy="457200"/>
-          </a:xfrm>
-          <a:prstGeom prst="rect">
-            <a:avLst/>
-          </a:prstGeom>
-          <a:noFill/>
-          <a:ln>
-            <a:noFill/>
-          </a:ln>
-          <a:effectLst/>
-          <a:extLst>
-            <a:ext uri="{909E8E84-426E-40DD-AFC4-6F175D3DCCD1}">
-              <a14:hiddenFill xmlns:a14="http://schemas.microsoft.com/office/drawing/2010/main">
-                <a:solidFill>
-                  <a:schemeClr val="accent1"/>
-                </a:solidFill>
-              </a14:hiddenFill>
-            </a:ext>
-            <a:ext uri="{91240B29-F687-4F45-9708-019B960494DF}">
-              <a14:hiddenLine xmlns:a14="http://schemas.microsoft.com/office/drawing/2010/main" w="9525">
-                <a:solidFill>
-                  <a:schemeClr val="tx1"/>
-                </a:solidFill>
-                <a:miter lim="800000"/>
-                <a:headEnd/>
-                <a:tailEnd/>
-              </a14:hiddenLine>
-            </a:ext>
-            <a:ext uri="{AF507438-7753-43E0-B8FC-AC1667EBCBE1}">
-              <a14:hiddenEffects xmlns:a14="http://schemas.microsoft.com/office/drawing/2010/main">
-                <a:effectLst>
-                  <a:outerShdw dist="35921" dir="2700000" algn="ctr" rotWithShape="0">
-                    <a:schemeClr val="bg2"/>
-                  </a:outerShdw>
-                </a:effectLst>
-              </a14:hiddenEffects>
-            </a:ext>
-          </a:extLst>
-        </p:spPr>
-        <p:txBody>
-          <a:bodyPr vert="horz" wrap="none" lIns="91440" tIns="45720" rIns="91440" bIns="45720" numCol="1" anchor="ctr" anchorCtr="0" compatLnSpc="1">
-            <a:prstTxWarp prst="textNoShape">
-              <a:avLst/>
-            </a:prstTxWarp>
-            <a:spAutoFit/>
-          </a:bodyPr>
-          <a:lstStyle/>
-          <a:p>
-            <a:endParaRPr lang="en-US"/>
           </a:p>
         </p:txBody>
       </p:sp>
@@ -10756,34 +8299,17 @@
         </p:nvSpPr>
         <p:spPr/>
         <p:txBody>
-          <a:bodyPr/>
+          <a:bodyPr>
+            <a:normAutofit fontScale="100000" lnScale="100000"/>
+          </a:bodyPr>
           <a:lstStyle/>
           <a:p>
-            <a:r>
-              <a:rPr lang="en-US" b="1" dirty="0">
-                <a:solidFill>
-                  <a:schemeClr val="bg2"/>
-                </a:solidFill>
-                <a:latin typeface="Times New Roman" panose="02020603050405020304" pitchFamily="18" charset="0"/>
-                <a:cs typeface="Times New Roman" panose="02020603050405020304" pitchFamily="18" charset="0"/>
-              </a:rPr>
-              <a:t>End Slide
-Thank you.
-Summary — six verified findings
-1. Schema-implementation fidelity: 29/29 routes, 0 console errors.
-2. Reward-path correctness: 9/9 end-to-end checks, including
-   cooldown rejection.
-3. Points economy verified under simulation across casual, regular and
-   committed profiles.
-4. Interface fidelity to the design specification: mean 0.910 over
-   19 comparable screens.
-5. No high-severity usability findings on heuristic inspection.
-6. Single-codebase PWA: ~207 kB connected first load (cold build
-   25.5 s), offline shell.
-Future work: usability pilot (SUS), NFC / signed rotating codes,
-geofence confirmation, wearable integration, multi-campus federation.</a:t>
-            </a:r>
-            <a:endParaRPr lang="en-US" dirty="0"/>
+            <a:pPr lvl="0"/>
+            <a:r>
+              <a:rPr lang="en-US" sz="3600" dirty="0" typeface="Times New Roman"/>
+              <a:t>End Slide</a:t>
+            </a:r>
+            <a:endParaRPr lang="en-US" dirty="0" typeface="Times New Roman"/>
           </a:p>
         </p:txBody>
       </p:sp>
@@ -10830,7 +8356,7 @@
                 </a:spcAft>
                 <a:defRPr/>
               </a:pPr>
-              <a:t>9/15/2025</a:t>
+              <a:t>10/7/2026</a:t>
             </a:fld>
             <a:endParaRPr lang="en-US">
               <a:ea typeface="MS PGothic" panose="020B0600070205080204" pitchFamily="34" charset="-128"/>
@@ -10891,75 +8417,6 @@
       </p:sp>
       <p:sp>
         <p:nvSpPr>
-          <p:cNvPr id="7" name="Rectangle 1">
-            <a:extLst>
-              <a:ext uri="{FF2B5EF4-FFF2-40B4-BE49-F238E27FC236}">
-                <a16:creationId xmlns:a16="http://schemas.microsoft.com/office/drawing/2014/main" id="{8A935C62-7CE4-90E7-86E2-F628BB9B6672}"/>
-              </a:ext>
-            </a:extLst>
-          </p:cNvPr>
-          <p:cNvSpPr>
-            <a:spLocks noChangeArrowheads="1"/>
-          </p:cNvSpPr>
-          <p:nvPr/>
-        </p:nvSpPr>
-        <p:spPr bwMode="auto">
-          <a:xfrm>
-            <a:off x="0" y="0"/>
-            <a:ext cx="12192000" cy="457200"/>
-          </a:xfrm>
-          <a:prstGeom prst="rect">
-            <a:avLst/>
-          </a:prstGeom>
-          <a:noFill/>
-          <a:ln>
-            <a:noFill/>
-          </a:ln>
-          <a:effectLst/>
-          <a:extLst>
-            <a:ext uri="{909E8E84-426E-40DD-AFC4-6F175D3DCCD1}">
-              <a14:hiddenFill xmlns:a14="http://schemas.microsoft.com/office/drawing/2010/main">
-                <a:solidFill>
-                  <a:schemeClr val="accent1"/>
-                </a:solidFill>
-              </a14:hiddenFill>
-            </a:ext>
-            <a:ext uri="{91240B29-F687-4F45-9708-019B960494DF}">
-              <a14:hiddenLine xmlns:a14="http://schemas.microsoft.com/office/drawing/2010/main" w="9525">
-                <a:solidFill>
-                  <a:schemeClr val="tx1"/>
-                </a:solidFill>
-                <a:miter lim="800000"/>
-                <a:headEnd/>
-                <a:tailEnd/>
-              </a14:hiddenLine>
-            </a:ext>
-            <a:ext uri="{AF507438-7753-43E0-B8FC-AC1667EBCBE1}">
-              <a14:hiddenEffects xmlns:a14="http://schemas.microsoft.com/office/drawing/2010/main">
-                <a:effectLst>
-                  <a:outerShdw dist="35921" dir="2700000" algn="ctr" rotWithShape="0">
-                    <a:schemeClr val="bg2"/>
-                  </a:outerShdw>
-                </a:effectLst>
-              </a14:hiddenEffects>
-            </a:ext>
-          </a:extLst>
-        </p:spPr>
-        <p:txBody>
-          <a:bodyPr vert="horz" wrap="none" lIns="91440" tIns="45720" rIns="91440" bIns="45720" numCol="1" anchor="ctr" anchorCtr="0" compatLnSpc="1">
-            <a:prstTxWarp prst="textNoShape">
-              <a:avLst/>
-            </a:prstTxWarp>
-            <a:spAutoFit/>
-          </a:bodyPr>
-          <a:lstStyle/>
-          <a:p>
-            <a:endParaRPr lang="en-US"/>
-          </a:p>
-        </p:txBody>
-      </p:sp>
-      <p:sp>
-        <p:nvSpPr>
           <p:cNvPr id="8" name="Content Placeholder 7">
             <a:extLst>
               <a:ext uri="{FF2B5EF4-FFF2-40B4-BE49-F238E27FC236}">
@@ -10976,10 +8433,87 @@
         </p:nvSpPr>
         <p:spPr/>
         <p:txBody>
-          <a:bodyPr/>
+          <a:bodyPr vert="horz" lIns="91440" tIns="45720" rIns="91440" bIns="45720" anchor="t">
+            <a:normAutofit fontScale="80000" lnScale="80000"/>
+          </a:bodyPr>
           <a:lstStyle/>
           <a:p>
-            <a:endParaRPr lang="en-US"/>
+            <a:pPr lvl="0"/>
+            <a:r>
+              <a:rPr lang="en-US" sz="1400" dirty="0" typeface="Times New Roman"/>
+              <a:t xml:space="preserve">Thank you.</a:t>
+            </a:r>
+          </a:p>
+          <a:p>
+            <a:pPr lvl="0"/>
+            <a:r>
+              <a:rPr lang="en-US" sz="1400" dirty="0" typeface="Times New Roman"/>
+              <a:t xml:space="preserve"> </a:t>
+            </a:r>
+          </a:p>
+          <a:p>
+            <a:pPr lvl="0"/>
+            <a:r>
+              <a:rPr lang="en-US" sz="1600" dirty="0" typeface="Times New Roman" b="1"/>
+              <a:t xml:space="preserve">Summary — six verified findings</a:t>
+            </a:r>
+          </a:p>
+          <a:p>
+            <a:pPr lvl="0"/>
+            <a:r>
+              <a:rPr lang="en-US" sz="1400" dirty="0" typeface="Times New Roman"/>
+              <a:t xml:space="preserve">1. Schema-implementation fidelity: 29/29 routes, 0 console errors.</a:t>
+            </a:r>
+          </a:p>
+          <a:p>
+            <a:pPr lvl="0"/>
+            <a:r>
+              <a:rPr lang="en-US" sz="1400" dirty="0" typeface="Times New Roman"/>
+              <a:t xml:space="preserve">2. Reward-path correctness: 9/9 end-to-end checks, including cooldown rejection.</a:t>
+            </a:r>
+          </a:p>
+          <a:p>
+            <a:pPr lvl="0"/>
+            <a:r>
+              <a:rPr lang="en-US" sz="1400" dirty="0" typeface="Times New Roman"/>
+              <a:t xml:space="preserve">3. Points economy verified under simulation across casual, regular and committed profiles.</a:t>
+            </a:r>
+          </a:p>
+          <a:p>
+            <a:pPr lvl="0"/>
+            <a:r>
+              <a:rPr lang="en-US" sz="1400" dirty="0" typeface="Times New Roman"/>
+              <a:t xml:space="preserve">4. Interface fidelity to the design specification: mean 0.910 over 19 comparable screens.</a:t>
+            </a:r>
+          </a:p>
+          <a:p>
+            <a:pPr lvl="0"/>
+            <a:r>
+              <a:rPr lang="en-US" sz="1400" dirty="0" typeface="Times New Roman"/>
+              <a:t xml:space="preserve">5. No high-severity usability findings on heuristic inspection.</a:t>
+            </a:r>
+          </a:p>
+          <a:p>
+            <a:pPr lvl="0"/>
+            <a:r>
+              <a:rPr lang="en-US" sz="1400" dirty="0" typeface="Times New Roman"/>
+              <a:t xml:space="preserve">6. Single-codebase PWA: ~207 kB connected first load (cold build 25.5 s), offline shell.</a:t>
+            </a:r>
+          </a:p>
+          <a:p>
+            <a:pPr lvl="0"/>
+            <a:r>
+              <a:rPr lang="en-US" sz="1400" dirty="0" typeface="Times New Roman"/>
+              <a:t xml:space="preserve"> </a:t>
+            </a:r>
+          </a:p>
+          <a:p>
+            <a:pPr lvl="0"/>
+            <a:r>
+              <a:rPr lang="en-US" sz="1600" dirty="0" typeface="Times New Roman" b="1"/>
+              <a:t xml:space="preserve">Future work: usability pilot (SUS), NFC / signed rotating codes, geofence confirmation, wearable integration, multi-campus federation.</a:t>
+            </a:r>
+            <a:endParaRPr lang="en-US" dirty="0" typeface="Times New Roman"/>
           </a:p>
         </p:txBody>
       </p:sp>
@@ -11001,7 +8535,13 @@
   <p:cSld>
     <p:spTree>
       <p:nvGrpSpPr>
-        <p:cNvPr id="1" name=""/>
+        <p:cNvPr id="1" name="">
+          <a:extLst>
+            <a:ext uri="{FF2B5EF4-FFF2-40B4-BE49-F238E27FC236}">
+              <a16:creationId xmlns:a16="http://schemas.microsoft.com/office/drawing/2014/main" id="{407A55DD-65B0-94D0-4068-542E391D704F}"/>
+            </a:ext>
+          </a:extLst>
+        </p:cNvPr>
         <p:cNvGrpSpPr/>
         <p:nvPr/>
       </p:nvGrpSpPr>
@@ -11015,191 +8555,45 @@
       </p:grpSpPr>
       <p:sp>
         <p:nvSpPr>
-          <p:cNvPr id="3074" name="Title 1"/>
-          <p:cNvSpPr>
-            <a:spLocks noGrp="1"/>
-          </p:cNvSpPr>
-          <p:nvPr>
-            <p:ph type="ctrTitle"/>
-          </p:nvPr>
-        </p:nvSpPr>
-        <p:spPr>
-          <a:xfrm>
-            <a:off x="2209800" y="152399"/>
-            <a:ext cx="7772400" cy="889819"/>
-          </a:xfrm>
-        </p:spPr>
-        <p:txBody>
-          <a:bodyPr vert="horz" wrap="square" lIns="91440" tIns="45720" rIns="91440" bIns="45720" anchor="ctr" anchorCtr="0"/>
+          <p:cNvPr id="2" name="Title 1">
+            <a:extLst>
+              <a:ext uri="{FF2B5EF4-FFF2-40B4-BE49-F238E27FC236}">
+                <a16:creationId xmlns:a16="http://schemas.microsoft.com/office/drawing/2014/main" id="{3B6DACDF-DBAD-7E74-3555-7FCB227A467D}"/>
+              </a:ext>
+            </a:extLst>
+          </p:cNvPr>
+          <p:cNvSpPr>
+            <a:spLocks noGrp="1"/>
+          </p:cNvSpPr>
+          <p:nvPr>
+            <p:ph type="title"/>
+          </p:nvPr>
+        </p:nvSpPr>
+        <p:spPr/>
+        <p:txBody>
+          <a:bodyPr>
+            <a:normAutofit fontScale="100000" lnScale="100000"/>
+          </a:bodyPr>
           <a:lstStyle/>
           <a:p>
-            <a:pPr eaLnBrk="1" hangingPunct="1"/>
-            <a:r>
-              <a:rPr lang="en-US" sz="2000" b="1" dirty="0">
-                <a:solidFill>
-                  <a:schemeClr val="bg1"/>
-                </a:solidFill>
-                <a:latin typeface="Times New Roman" panose="02020603050405020304" pitchFamily="18" charset="0"/>
-                <a:ea typeface="Times New Roman" panose="02020603050405020304" pitchFamily="18" charset="0"/>
-              </a:rPr>
+            <a:pPr lvl="0"/>
+            <a:r>
+              <a:rPr lang="en-US" sz="3600" dirty="0" typeface="Times New Roman"/>
               <a:t>FINAL YEAR PROJECT PRESENTATION &amp; DEMO</a:t>
             </a:r>
-            <a:br>
-              <a:rPr lang="en-GB" sz="2000" b="1" dirty="0">
-                <a:solidFill>
-                  <a:schemeClr val="bg1"/>
-                </a:solidFill>
-                <a:latin typeface="Times New Roman" panose="02020603050405020304" pitchFamily="18" charset="0"/>
-                <a:ea typeface="Times New Roman" panose="02020603050405020304" pitchFamily="18" charset="0"/>
-              </a:rPr>
-            </a:br>
-            <a:endParaRPr lang="en-US" altLang="en-US" sz="2000" b="1" dirty="0">
-              <a:solidFill>
-                <a:schemeClr val="bg1"/>
-              </a:solidFill>
-              <a:latin typeface="Times New Roman" panose="02020603050405020304" pitchFamily="18" charset="0"/>
-              <a:ea typeface="Times New Roman" panose="02020603050405020304" pitchFamily="18" charset="0"/>
-            </a:endParaRPr>
-          </a:p>
-        </p:txBody>
-      </p:sp>
-      <p:sp>
-        <p:nvSpPr>
-          <p:cNvPr id="3075" name="Subtitle 2"/>
-          <p:cNvSpPr>
-            <a:spLocks noGrp="1"/>
-          </p:cNvSpPr>
-          <p:nvPr>
-            <p:ph type="subTitle" idx="1"/>
-          </p:nvPr>
-        </p:nvSpPr>
-        <p:spPr>
-          <a:xfrm>
-            <a:off x="1602658" y="1182329"/>
-            <a:ext cx="8738419" cy="3891116"/>
-          </a:xfrm>
-        </p:spPr>
-        <p:txBody>
-          <a:bodyPr vert="horz" wrap="square" lIns="91440" tIns="45720" rIns="91440" bIns="45720" anchor="t" anchorCtr="0"/>
-          <a:lstStyle/>
-          <a:p>
-            <a:pPr eaLnBrk="1" hangingPunct="1">
-              <a:buClrTx/>
-              <a:buSzTx/>
-            </a:pPr>
-            <a:r>
-              <a:rPr lang="en-US" b="1" dirty="0">
-                <a:solidFill>
-                  <a:schemeClr val="bg1"/>
-                </a:solidFill>
-                <a:latin typeface="Times New Roman" panose="02020603050405020304" pitchFamily="18" charset="0"/>
-                <a:cs typeface="Times New Roman" panose="02020603050405020304" pitchFamily="18" charset="0"/>
-              </a:rPr>
-              <a:t>THANK YOU — Q&amp;A</a:t>
-            </a:r>
-            <a:endParaRPr lang="en-US" altLang="en-US" sz="2000" b="1" dirty="0">
-              <a:solidFill>
-                <a:schemeClr val="bg1"/>
-              </a:solidFill>
-              <a:latin typeface="Times New Roman" panose="02020603050405020304" pitchFamily="18" charset="0"/>
-              <a:ea typeface="Times New Roman" panose="02020603050405020304" pitchFamily="18" charset="0"/>
-              <a:cs typeface="Times New Roman" panose="02020603050405020304" pitchFamily="18" charset="0"/>
-            </a:endParaRPr>
-          </a:p>
-          <a:p>
-            <a:pPr eaLnBrk="1" hangingPunct="1">
-              <a:buClrTx/>
-              <a:buSzTx/>
-            </a:pPr>
-            <a:endParaRPr lang="en-GB" sz="2000" b="1" noProof="0" dirty="0">
-              <a:solidFill>
-                <a:schemeClr val="bg1"/>
-              </a:solidFill>
-              <a:latin typeface="Times New Roman" panose="02020603050405020304" pitchFamily="18" charset="0"/>
-              <a:ea typeface="Times New Roman" panose="02020603050405020304" pitchFamily="18" charset="0"/>
-            </a:endParaRPr>
-          </a:p>
-          <a:p>
-            <a:pPr eaLnBrk="1" hangingPunct="1"/>
-            <a:r>
-              <a:rPr lang="en-GB" sz="2000" b="1" dirty="0">
-                <a:solidFill>
-                  <a:schemeClr val="bg1"/>
-                </a:solidFill>
-                <a:latin typeface="Times New Roman" panose="02020603050405020304" pitchFamily="18" charset="0"/>
-                <a:ea typeface="Times New Roman" panose="02020603050405020304" pitchFamily="18" charset="0"/>
-              </a:rPr>
-              <a:t>NAME</a:t>
-            </a:r>
-          </a:p>
-          <a:p>
-            <a:pPr eaLnBrk="1" hangingPunct="1"/>
-            <a:r>
-              <a:rPr lang="en-GB" sz="2000" b="1" noProof="0" dirty="0">
-                <a:solidFill>
-                  <a:schemeClr val="bg1"/>
-                </a:solidFill>
-                <a:latin typeface="Times New Roman" panose="02020603050405020304" pitchFamily="18" charset="0"/>
-                <a:ea typeface="Times New Roman" panose="02020603050405020304" pitchFamily="18" charset="0"/>
-              </a:rPr>
-              <a:t>ID</a:t>
-            </a:r>
-          </a:p>
-          <a:p>
-            <a:pPr eaLnBrk="1" hangingPunct="1"/>
-            <a:endParaRPr lang="en-GB" sz="2000" b="1" noProof="0" dirty="0">
-              <a:solidFill>
-                <a:schemeClr val="bg1"/>
-              </a:solidFill>
-              <a:latin typeface="Times New Roman" panose="02020603050405020304" pitchFamily="18" charset="0"/>
-              <a:ea typeface="Times New Roman" panose="02020603050405020304" pitchFamily="18" charset="0"/>
-            </a:endParaRPr>
-          </a:p>
-          <a:p>
-            <a:pPr eaLnBrk="1" hangingPunct="1"/>
-            <a:r>
-              <a:rPr lang="en-GB" sz="1200" b="1" dirty="0">
-                <a:solidFill>
-                  <a:schemeClr val="bg1"/>
-                </a:solidFill>
-                <a:latin typeface="Times New Roman" panose="02020603050405020304" pitchFamily="18" charset="0"/>
-                <a:ea typeface="Times New Roman" panose="02020603050405020304" pitchFamily="18" charset="0"/>
-              </a:rPr>
-              <a:t>SUPERVISOR:             19</a:t>
-            </a:r>
-            <a:r>
-              <a:rPr lang="en-GB" sz="1200" b="1" baseline="30000" dirty="0">
-                <a:solidFill>
-                  <a:schemeClr val="bg1"/>
-                </a:solidFill>
-                <a:latin typeface="Times New Roman" panose="02020603050405020304" pitchFamily="18" charset="0"/>
-                <a:ea typeface="Times New Roman" panose="02020603050405020304" pitchFamily="18" charset="0"/>
-              </a:rPr>
-              <a:t>TH</a:t>
-            </a:r>
-            <a:r>
-              <a:rPr lang="en-GB" sz="1200" b="1" dirty="0">
-                <a:solidFill>
-                  <a:schemeClr val="bg1"/>
-                </a:solidFill>
-                <a:latin typeface="Times New Roman" panose="02020603050405020304" pitchFamily="18" charset="0"/>
-                <a:ea typeface="Times New Roman" panose="02020603050405020304" pitchFamily="18" charset="0"/>
-              </a:rPr>
-              <a:t> SEPTEMBER 2025</a:t>
-            </a:r>
-            <a:endParaRPr lang="en-GB" sz="1200" b="1" noProof="0" dirty="0">
-              <a:solidFill>
-                <a:schemeClr val="bg1"/>
-              </a:solidFill>
-              <a:latin typeface="Times New Roman" panose="02020603050405020304" pitchFamily="18" charset="0"/>
-              <a:ea typeface="Times New Roman" panose="02020603050405020304" pitchFamily="18" charset="0"/>
-            </a:endParaRPr>
-          </a:p>
-        </p:txBody>
-      </p:sp>
-      <p:sp>
-        <p:nvSpPr>
-          <p:cNvPr id="2" name="Date Placeholder 1"/>
+            <a:endParaRPr lang="en-US" dirty="0" typeface="Times New Roman"/>
+          </a:p>
+        </p:txBody>
+      </p:sp>
+      <p:sp>
+        <p:nvSpPr>
+          <p:cNvPr id="4" name="Date Placeholder 3">
+            <a:extLst>
+              <a:ext uri="{FF2B5EF4-FFF2-40B4-BE49-F238E27FC236}">
+                <a16:creationId xmlns:a16="http://schemas.microsoft.com/office/drawing/2014/main" id="{F7F4D605-15E8-8AA8-4637-A42E17F91764}"/>
+              </a:ext>
+            </a:extLst>
+          </p:cNvPr>
           <p:cNvSpPr>
             <a:spLocks noGrp="1"/>
           </p:cNvSpPr>
@@ -11221,9 +8615,8 @@
               </a:spcAft>
               <a:defRPr/>
             </a:pPr>
-            <a:fld id="{CBB6B13C-08B2-4F48-BEC8-EC2633766FDF}" type="datetime1">
-              <a:rPr lang="en-US">
-                <a:latin typeface="Calibri" panose="020F0502020204030204" pitchFamily="34" charset="0"/>
+            <a:fld id="{A9287898-D9AE-4049-9D19-ED0B1E1963CA}" type="datetime1">
+              <a:rPr lang="en-US" smtClean="0">
                 <a:ea typeface="MS PGothic" panose="020B0600070205080204" pitchFamily="34" charset="-128"/>
               </a:rPr>
               <a:pPr fontAlgn="base">
@@ -11235,10 +8628,9 @@
                 </a:spcAft>
                 <a:defRPr/>
               </a:pPr>
-              <a:t>9/15/2025</a:t>
+              <a:t>10/7/2026</a:t>
             </a:fld>
             <a:endParaRPr lang="en-US">
-              <a:latin typeface="Calibri" panose="020F0502020204030204" pitchFamily="34" charset="0"/>
               <a:ea typeface="MS PGothic" panose="020B0600070205080204" pitchFamily="34" charset="-128"/>
             </a:endParaRPr>
           </a:p>
@@ -11246,7 +8638,13 @@
       </p:sp>
       <p:sp>
         <p:nvSpPr>
-          <p:cNvPr id="4" name="Slide Number Placeholder 3"/>
+          <p:cNvPr id="5" name="Slide Number Placeholder 4">
+            <a:extLst>
+              <a:ext uri="{FF2B5EF4-FFF2-40B4-BE49-F238E27FC236}">
+                <a16:creationId xmlns:a16="http://schemas.microsoft.com/office/drawing/2014/main" id="{62DCCCD3-EAFC-B988-C6CC-CD1CA8F3CAD2}"/>
+              </a:ext>
+            </a:extLst>
+          </p:cNvPr>
           <p:cNvSpPr>
             <a:spLocks noGrp="1"/>
           </p:cNvSpPr>
@@ -11269,8 +8667,7 @@
               <a:defRPr/>
             </a:pPr>
             <a:fld id="{B724CBE9-E6DE-4AAC-8453-7697DD7A6035}" type="slidenum">
-              <a:rPr lang="en-US" altLang="en-US">
-                <a:latin typeface="Calibri" panose="020F0502020204030204" pitchFamily="34" charset="0"/>
+              <a:rPr lang="en-US" altLang="en-US" smtClean="0">
                 <a:ea typeface="MS PGothic" panose="020B0600070205080204" pitchFamily="34" charset="-128"/>
               </a:rPr>
               <a:pPr fontAlgn="base">
@@ -11284,14 +8681,44 @@
               </a:pPr>
               <a:t>8</a:t>
             </a:fld>
-            <a:endParaRPr lang="en-US" altLang="en-US" dirty="0">
-              <a:latin typeface="Calibri" panose="020F0502020204030204" pitchFamily="34" charset="0"/>
+            <a:endParaRPr lang="en-US" altLang="en-US">
               <a:ea typeface="MS PGothic" panose="020B0600070205080204" pitchFamily="34" charset="-128"/>
             </a:endParaRPr>
           </a:p>
         </p:txBody>
       </p:sp>
+      <p:sp>
+        <p:nvSpPr>
+          <p:cNvPr id="8" name="Content Placeholder 7">
+            <a:extLst>
+              <a:ext uri="{FF2B5EF4-FFF2-40B4-BE49-F238E27FC236}">
+                <a16:creationId xmlns:a16="http://schemas.microsoft.com/office/drawing/2014/main" id="{6834DB0F-C428-4601-C46D-5819746ADBD7}"/>
+              </a:ext>
+            </a:extLst>
+          </p:cNvPr>
+          <p:cNvSpPr>
+            <a:spLocks noGrp="1"/>
+          </p:cNvSpPr>
+          <p:nvPr>
+            <p:ph idx="1"/>
+          </p:nvPr>
+        </p:nvSpPr>
+        <p:spPr/>
+        <p:txBody>
+          <a:bodyPr vert="horz" lIns="91440" tIns="45720" rIns="91440" bIns="45720" anchor="t"/>
+          <a:lstStyle/>
+          <a:p>
+            <a:pPr lvl="0"/>
+            <a:endParaRPr lang="en-US" dirty="0"/>
+          </a:p>
+        </p:txBody>
+      </p:sp>
     </p:spTree>
+    <p:extLst>
+      <p:ext uri="{BB962C8B-B14F-4D97-AF65-F5344CB8AC3E}">
+        <p14:creationId xmlns:p14="http://schemas.microsoft.com/office/powerpoint/2010/main" val="1966921906"/>
+      </p:ext>
+    </p:extLst>
   </p:cSld>
   <p:clrMapOvr>
     <a:masterClrMapping/>
@@ -11300,321 +8727,6 @@
 </file>
 
 <file path=ppt/theme/theme1.xml><?xml version="1.0" encoding="utf-8"?>
-<a:theme xmlns:a="http://schemas.openxmlformats.org/drawingml/2006/main" name="Office Theme">
-  <a:themeElements>
-    <a:clrScheme name="Office">
-      <a:dk1>
-        <a:sysClr val="windowText" lastClr="000000"/>
-      </a:dk1>
-      <a:lt1>
-        <a:sysClr val="window" lastClr="FFFFFF"/>
-      </a:lt1>
-      <a:dk2>
-        <a:srgbClr val="0E2841"/>
-      </a:dk2>
-      <a:lt2>
-        <a:srgbClr val="E8E8E8"/>
-      </a:lt2>
-      <a:accent1>
-        <a:srgbClr val="156082"/>
-      </a:accent1>
-      <a:accent2>
-        <a:srgbClr val="E97132"/>
-      </a:accent2>
-      <a:accent3>
-        <a:srgbClr val="196B24"/>
-      </a:accent3>
-      <a:accent4>
-        <a:srgbClr val="0F9ED5"/>
-      </a:accent4>
-      <a:accent5>
-        <a:srgbClr val="A02B93"/>
-      </a:accent5>
-      <a:accent6>
-        <a:srgbClr val="4EA72E"/>
-      </a:accent6>
-      <a:hlink>
-        <a:srgbClr val="467886"/>
-      </a:hlink>
-      <a:folHlink>
-        <a:srgbClr val="96607D"/>
-      </a:folHlink>
-    </a:clrScheme>
-    <a:fontScheme name="Office">
-      <a:majorFont>
-        <a:latin typeface="Aptos Display" panose="02110004020202020204"/>
-        <a:ea typeface=""/>
-        <a:cs typeface=""/>
-        <a:font script="Jpan" typeface="游ゴシック Light"/>
-        <a:font script="Hang" typeface="맑은 고딕"/>
-        <a:font script="Hans" typeface="等线 Light"/>
-        <a:font script="Hant" typeface="新細明體"/>
-        <a:font script="Arab" typeface="Times New Roman"/>
-        <a:font script="Hebr" typeface="Times New Roman"/>
-        <a:font script="Thai" typeface="Angsana New"/>
-        <a:font script="Ethi" typeface="Nyala"/>
-        <a:font script="Beng" typeface="Vrinda"/>
-        <a:font script="Gujr" typeface="Shruti"/>
-        <a:font script="Khmr" typeface="MoolBoran"/>
-        <a:font script="Knda" typeface="Tunga"/>
-        <a:font script="Guru" typeface="Raavi"/>
-        <a:font script="Cans" typeface="Euphemia"/>
-        <a:font script="Cher" typeface="Plantagenet Cherokee"/>
-        <a:font script="Yiii" typeface="Microsoft Yi Baiti"/>
-        <a:font script="Tibt" typeface="Microsoft Himalaya"/>
-        <a:font script="Thaa" typeface="MV Boli"/>
-        <a:font script="Deva" typeface="Mangal"/>
-        <a:font script="Telu" typeface="Gautami"/>
-        <a:font script="Taml" typeface="Latha"/>
-        <a:font script="Syrc" typeface="Estrangelo Edessa"/>
-        <a:font script="Orya" typeface="Kalinga"/>
-        <a:font script="Mlym" typeface="Kartika"/>
-        <a:font script="Laoo" typeface="DokChampa"/>
-        <a:font script="Sinh" typeface="Iskoola Pota"/>
-        <a:font script="Mong" typeface="Mongolian Baiti"/>
-        <a:font script="Viet" typeface="Times New Roman"/>
-        <a:font script="Uigh" typeface="Microsoft Uighur"/>
-        <a:font script="Geor" typeface="Sylfaen"/>
-        <a:font script="Armn" typeface="Arial"/>
-        <a:font script="Bugi" typeface="Leelawadee UI"/>
-        <a:font script="Bopo" typeface="Microsoft JhengHei"/>
-        <a:font script="Java" typeface="Javanese Text"/>
-        <a:font script="Lisu" typeface="Segoe UI"/>
-        <a:font script="Mymr" typeface="Myanmar Text"/>
-        <a:font script="Nkoo" typeface="Ebrima"/>
-        <a:font script="Olck" typeface="Nirmala UI"/>
-        <a:font script="Osma" typeface="Ebrima"/>
-        <a:font script="Phag" typeface="Phagspa"/>
-        <a:font script="Syrn" typeface="Estrangelo Edessa"/>
-        <a:font script="Syrj" typeface="Estrangelo Edessa"/>
-        <a:font script="Syre" typeface="Estrangelo Edessa"/>
-        <a:font script="Sora" typeface="Nirmala UI"/>
-        <a:font script="Tale" typeface="Microsoft Tai Le"/>
-        <a:font script="Talu" typeface="Microsoft New Tai Lue"/>
-        <a:font script="Tfng" typeface="Ebrima"/>
-      </a:majorFont>
-      <a:minorFont>
-        <a:latin typeface="Aptos" panose="02110004020202020204"/>
-        <a:ea typeface=""/>
-        <a:cs typeface=""/>
-        <a:font script="Jpan" typeface="游ゴシック"/>
-        <a:font script="Hang" typeface="맑은 고딕"/>
-        <a:font script="Hans" typeface="等线"/>
-        <a:font script="Hant" typeface="新細明體"/>
-        <a:font script="Arab" typeface="Arial"/>
-        <a:font script="Hebr" typeface="Arial"/>
-        <a:font script="Thai" typeface="Cordia New"/>
-        <a:font script="Ethi" typeface="Nyala"/>
-        <a:font script="Beng" typeface="Vrinda"/>
-        <a:font script="Gujr" typeface="Shruti"/>
-        <a:font script="Khmr" typeface="DaunPenh"/>
-        <a:font script="Knda" typeface="Tunga"/>
-        <a:font script="Guru" typeface="Raavi"/>
-        <a:font script="Cans" typeface="Euphemia"/>
-        <a:font script="Cher" typeface="Plantagenet Cherokee"/>
-        <a:font script="Yiii" typeface="Microsoft Yi Baiti"/>
-        <a:font script="Tibt" typeface="Microsoft Himalaya"/>
-        <a:font script="Thaa" typeface="MV Boli"/>
-        <a:font script="Deva" typeface="Mangal"/>
-        <a:font script="Telu" typeface="Gautami"/>
-        <a:font script="Taml" typeface="Latha"/>
-        <a:font script="Syrc" typeface="Estrangelo Edessa"/>
-        <a:font script="Orya" typeface="Kalinga"/>
-        <a:font script="Mlym" typeface="Kartika"/>
-        <a:font script="Laoo" typeface="DokChampa"/>
-        <a:font script="Sinh" typeface="Iskoola Pota"/>
-        <a:font script="Mong" typeface="Mongolian Baiti"/>
-        <a:font script="Viet" typeface="Arial"/>
-        <a:font script="Uigh" typeface="Microsoft Uighur"/>
-        <a:font script="Geor" typeface="Sylfaen"/>
-        <a:font script="Armn" typeface="Arial"/>
-        <a:font script="Bugi" typeface="Leelawadee UI"/>
-        <a:font script="Bopo" typeface="Microsoft JhengHei"/>
-        <a:font script="Java" typeface="Javanese Text"/>
-        <a:font script="Lisu" typeface="Segoe UI"/>
-        <a:font script="Mymr" typeface="Myanmar Text"/>
-        <a:font script="Nkoo" typeface="Ebrima"/>
-        <a:font script="Olck" typeface="Nirmala UI"/>
-        <a:font script="Osma" typeface="Ebrima"/>
-        <a:font script="Phag" typeface="Phagspa"/>
-        <a:font script="Syrn" typeface="Estrangelo Edessa"/>
-        <a:font script="Syrj" typeface="Estrangelo Edessa"/>
-        <a:font script="Syre" typeface="Estrangelo Edessa"/>
-        <a:font script="Sora" typeface="Nirmala UI"/>
-        <a:font script="Tale" typeface="Microsoft Tai Le"/>
-        <a:font script="Talu" typeface="Microsoft New Tai Lue"/>
-        <a:font script="Tfng" typeface="Ebrima"/>
-      </a:minorFont>
-    </a:fontScheme>
-    <a:fmtScheme name="Office">
-      <a:fillStyleLst>
-        <a:solidFill>
-          <a:schemeClr val="phClr"/>
-        </a:solidFill>
-        <a:gradFill rotWithShape="1">
-          <a:gsLst>
-            <a:gs pos="0">
-              <a:schemeClr val="phClr">
-                <a:lumMod val="110000"/>
-                <a:satMod val="105000"/>
-                <a:tint val="67000"/>
-              </a:schemeClr>
-            </a:gs>
-            <a:gs pos="50000">
-              <a:schemeClr val="phClr">
-                <a:lumMod val="105000"/>
-                <a:satMod val="103000"/>
-                <a:tint val="73000"/>
-              </a:schemeClr>
-            </a:gs>
-            <a:gs pos="100000">
-              <a:schemeClr val="phClr">
-                <a:lumMod val="105000"/>
-                <a:satMod val="109000"/>
-                <a:tint val="81000"/>
-              </a:schemeClr>
-            </a:gs>
-          </a:gsLst>
-          <a:lin ang="5400000" scaled="0"/>
-        </a:gradFill>
-        <a:gradFill rotWithShape="1">
-          <a:gsLst>
-            <a:gs pos="0">
-              <a:schemeClr val="phClr">
-                <a:satMod val="103000"/>
-                <a:lumMod val="102000"/>
-                <a:tint val="94000"/>
-              </a:schemeClr>
-            </a:gs>
-            <a:gs pos="50000">
-              <a:schemeClr val="phClr">
-                <a:satMod val="110000"/>
-                <a:lumMod val="100000"/>
-                <a:shade val="100000"/>
-              </a:schemeClr>
-            </a:gs>
-            <a:gs pos="100000">
-              <a:schemeClr val="phClr">
-                <a:lumMod val="99000"/>
-                <a:satMod val="120000"/>
-                <a:shade val="78000"/>
-              </a:schemeClr>
-            </a:gs>
-          </a:gsLst>
-          <a:lin ang="5400000" scaled="0"/>
-        </a:gradFill>
-      </a:fillStyleLst>
-      <a:lnStyleLst>
-        <a:ln w="12700" cap="flat" cmpd="sng" algn="ctr">
-          <a:solidFill>
-            <a:schemeClr val="phClr"/>
-          </a:solidFill>
-          <a:prstDash val="solid"/>
-          <a:miter lim="800000"/>
-        </a:ln>
-        <a:ln w="19050" cap="flat" cmpd="sng" algn="ctr">
-          <a:solidFill>
-            <a:schemeClr val="phClr"/>
-          </a:solidFill>
-          <a:prstDash val="solid"/>
-          <a:miter lim="800000"/>
-        </a:ln>
-        <a:ln w="25400" cap="flat" cmpd="sng" algn="ctr">
-          <a:solidFill>
-            <a:schemeClr val="phClr"/>
-          </a:solidFill>
-          <a:prstDash val="solid"/>
-          <a:miter lim="800000"/>
-        </a:ln>
-      </a:lnStyleLst>
-      <a:effectStyleLst>
-        <a:effectStyle>
-          <a:effectLst/>
-        </a:effectStyle>
-        <a:effectStyle>
-          <a:effectLst/>
-        </a:effectStyle>
-        <a:effectStyle>
-          <a:effectLst>
-            <a:outerShdw blurRad="57150" dist="19050" dir="5400000" algn="ctr" rotWithShape="0">
-              <a:srgbClr val="000000">
-                <a:alpha val="63000"/>
-              </a:srgbClr>
-            </a:outerShdw>
-          </a:effectLst>
-        </a:effectStyle>
-      </a:effectStyleLst>
-      <a:bgFillStyleLst>
-        <a:solidFill>
-          <a:schemeClr val="phClr"/>
-        </a:solidFill>
-        <a:solidFill>
-          <a:schemeClr val="phClr">
-            <a:tint val="95000"/>
-            <a:satMod val="170000"/>
-          </a:schemeClr>
-        </a:solidFill>
-        <a:gradFill rotWithShape="1">
-          <a:gsLst>
-            <a:gs pos="0">
-              <a:schemeClr val="phClr">
-                <a:tint val="93000"/>
-                <a:satMod val="150000"/>
-                <a:shade val="98000"/>
-                <a:lumMod val="102000"/>
-              </a:schemeClr>
-            </a:gs>
-            <a:gs pos="50000">
-              <a:schemeClr val="phClr">
-                <a:tint val="98000"/>
-                <a:satMod val="130000"/>
-                <a:shade val="90000"/>
-                <a:lumMod val="103000"/>
-              </a:schemeClr>
-            </a:gs>
-            <a:gs pos="100000">
-              <a:schemeClr val="phClr">
-                <a:shade val="63000"/>
-                <a:satMod val="120000"/>
-              </a:schemeClr>
-            </a:gs>
-          </a:gsLst>
-          <a:lin ang="5400000" scaled="0"/>
-        </a:gradFill>
-      </a:bgFillStyleLst>
-    </a:fmtScheme>
-  </a:themeElements>
-  <a:objectDefaults>
-    <a:lnDef>
-      <a:spPr/>
-      <a:bodyPr/>
-      <a:lstStyle/>
-      <a:style>
-        <a:lnRef idx="2">
-          <a:schemeClr val="accent1"/>
-        </a:lnRef>
-        <a:fillRef idx="0">
-          <a:schemeClr val="accent1"/>
-        </a:fillRef>
-        <a:effectRef idx="1">
-          <a:schemeClr val="accent1"/>
-        </a:effectRef>
-        <a:fontRef idx="minor">
-          <a:schemeClr val="tx1"/>
-        </a:fontRef>
-      </a:style>
-    </a:lnDef>
-  </a:objectDefaults>
-  <a:extraClrSchemeLst/>
-  <a:extLst>
-    <a:ext uri="{05A4C25C-085E-4340-85A3-A5531E510DB2}">
-      <thm15:themeFamily xmlns:thm15="http://schemas.microsoft.com/office/thememl/2012/main" name="Office Theme" id="{2E142A2C-CD16-42D6-873A-C26D2A0506FA}" vid="{1BDDFF52-6CD6-40A5-AB3C-68EB2F1E4D0A}"/>
-    </a:ext>
-  </a:extLst>
-</a:theme>
-</file>
-
-<file path=ppt/theme/theme2.xml><?xml version="1.0" encoding="utf-8"?>
 <a:theme xmlns:a="http://schemas.openxmlformats.org/drawingml/2006/main" name="1_Office Theme">
   <a:themeElements>
     <a:clrScheme name="Office">
@@ -11904,7 +9016,7 @@
 </a:theme>
 </file>
 
-<file path=ppt/theme/theme3.xml><?xml version="1.0" encoding="utf-8"?>
+<file path=ppt/theme/theme2.xml><?xml version="1.0" encoding="utf-8"?>
 <a:theme xmlns:a="http://schemas.openxmlformats.org/drawingml/2006/main" name="Office Theme">
   <a:themeElements>
     <a:clrScheme name="Office">

--- a/CampusFit_Project_Defence.pptx
+++ b/CampusFit_Project_Defence.pptx
@@ -2,20 +2,21 @@
 <file path=ppt/presentation.xml><?xml version="1.0" encoding="utf-8"?>
 <p:presentation xmlns:a="http://schemas.openxmlformats.org/drawingml/2006/main" xmlns:r="http://schemas.openxmlformats.org/officeDocument/2006/relationships" xmlns:p="http://schemas.openxmlformats.org/presentationml/2006/main" saveSubsetFonts="1">
   <p:sldMasterIdLst>
-    <p:sldMasterId id="2147483660" r:id="rId1"/>
+    <p:sldMasterId id="2147483648" r:id="rId1"/>
+    <p:sldMasterId id="2147483660" r:id="rId2"/>
   </p:sldMasterIdLst>
   <p:notesMasterIdLst>
-    <p:notesMasterId r:id="rId10"/>
+    <p:notesMasterId r:id="rId11"/>
   </p:notesMasterIdLst>
   <p:sldIdLst>
-    <p:sldId id="258" r:id="rId2"/>
-    <p:sldId id="259" r:id="rId3"/>
-    <p:sldId id="260" r:id="rId4"/>
-    <p:sldId id="261" r:id="rId5"/>
-    <p:sldId id="262" r:id="rId6"/>
-    <p:sldId id="263" r:id="rId7"/>
-    <p:sldId id="264" r:id="rId8"/>
-    <p:sldId id="265" r:id="rId9"/>
+    <p:sldId id="258" r:id="rId3"/>
+    <p:sldId id="259" r:id="rId4"/>
+    <p:sldId id="260" r:id="rId5"/>
+    <p:sldId id="261" r:id="rId6"/>
+    <p:sldId id="262" r:id="rId7"/>
+    <p:sldId id="263" r:id="rId8"/>
+    <p:sldId id="264" r:id="rId9"/>
+    <p:sldId id="257" r:id="rId10"/>
   </p:sldIdLst>
   <p:sldSz cx="12192000" cy="6858000"/>
   <p:notesSz cx="6858000" cy="9144000"/>
@@ -114,11 +115,6 @@
       </a:defRPr>
     </a:lvl9pPr>
   </p:defaultTextStyle>
-  <p:extLst>
-    <p:ext uri="{EFAFB233-063F-42B5-8137-9DF3F51BA10A}">
-      <p15:sldGuideLst xmlns:p15="http://schemas.microsoft.com/office/powerpoint/2012/main"/>
-    </p:ext>
-  </p:extLst>
 </p:presentation>
 </file>
 
@@ -204,7 +200,7 @@
           <a:p>
             <a:fld id="{D77CA5DE-5554-433E-998B-5706BBA3DDB9}" type="datetimeFigureOut">
               <a:rPr lang="en-US" smtClean="0"/>
-              <a:t>10/7/2026</a:t>
+              <a:t>9/15/2025</a:t>
             </a:fld>
             <a:endParaRPr lang="en-US"/>
           </a:p>
@@ -2263,13 +2259,7 @@
   <p:cSld>
     <p:spTree>
       <p:nvGrpSpPr>
-        <p:cNvPr id="1" name="">
-          <a:extLst>
-            <a:ext uri="{FF2B5EF4-FFF2-40B4-BE49-F238E27FC236}">
-              <a16:creationId xmlns:a16="http://schemas.microsoft.com/office/drawing/2014/main" id="{2882406C-9091-844B-DB49-8715D42899FB}"/>
-            </a:ext>
-          </a:extLst>
-        </p:cNvPr>
+        <p:cNvPr id="1" name=""/>
         <p:cNvGrpSpPr/>
         <p:nvPr/>
       </p:nvGrpSpPr>
@@ -2283,13 +2273,7 @@
       </p:grpSpPr>
       <p:sp>
         <p:nvSpPr>
-          <p:cNvPr id="2" name="Slide Image Placeholder 1">
-            <a:extLst>
-              <a:ext uri="{FF2B5EF4-FFF2-40B4-BE49-F238E27FC236}">
-                <a16:creationId xmlns:a16="http://schemas.microsoft.com/office/drawing/2014/main" id="{21122E06-8520-490D-8B05-ED9A04AD03B4}"/>
-              </a:ext>
-            </a:extLst>
-          </p:cNvPr>
+          <p:cNvPr id="2" name="Slide Image Placeholder 1"/>
           <p:cNvSpPr>
             <a:spLocks noGrp="1" noRot="1" noChangeAspect="1"/>
           </p:cNvSpPr>
@@ -2301,13 +2285,7 @@
       </p:sp>
       <p:sp>
         <p:nvSpPr>
-          <p:cNvPr id="3" name="Notes Placeholder 2">
-            <a:extLst>
-              <a:ext uri="{FF2B5EF4-FFF2-40B4-BE49-F238E27FC236}">
-                <a16:creationId xmlns:a16="http://schemas.microsoft.com/office/drawing/2014/main" id="{F0FA392E-0BC4-141A-5A0C-D37203E2482F}"/>
-              </a:ext>
-            </a:extLst>
-          </p:cNvPr>
+          <p:cNvPr id="3" name="Notes Placeholder 2"/>
           <p:cNvSpPr>
             <a:spLocks noGrp="1"/>
           </p:cNvSpPr>
@@ -2320,794 +2298,13 @@
           <a:bodyPr/>
           <a:lstStyle/>
           <a:p>
-            <a:r>
-              <a:rPr lang="en-US" sz="1200" b="1" kern="1200" dirty="0">
-                <a:solidFill>
-                  <a:schemeClr val="tx1"/>
-                </a:solidFill>
-                <a:effectLst/>
-                <a:latin typeface="+mn-lt"/>
-                <a:ea typeface="+mn-ea"/>
-                <a:cs typeface="+mn-cs"/>
-              </a:rPr>
-              <a:t>Methodology </a:t>
-            </a:r>
-            <a:endParaRPr lang="en-US" sz="1200" kern="1200" dirty="0">
-              <a:solidFill>
-                <a:schemeClr val="tx1"/>
-              </a:solidFill>
-              <a:effectLst/>
-              <a:latin typeface="+mn-lt"/>
-              <a:ea typeface="+mn-ea"/>
-              <a:cs typeface="+mn-cs"/>
-            </a:endParaRPr>
-          </a:p>
-          <a:p>
-            <a:r>
-              <a:rPr lang="en-US" sz="1200" b="1" kern="1200" dirty="0">
-                <a:solidFill>
-                  <a:schemeClr val="tx1"/>
-                </a:solidFill>
-                <a:effectLst/>
-                <a:latin typeface="+mn-lt"/>
-                <a:ea typeface="+mn-ea"/>
-                <a:cs typeface="+mn-cs"/>
-              </a:rPr>
-              <a:t>Phenomenology</a:t>
-            </a:r>
-            <a:endParaRPr lang="en-US" sz="1200" kern="1200" dirty="0">
-              <a:solidFill>
-                <a:schemeClr val="tx1"/>
-              </a:solidFill>
-              <a:effectLst/>
-              <a:latin typeface="+mn-lt"/>
-              <a:ea typeface="+mn-ea"/>
-              <a:cs typeface="+mn-cs"/>
-            </a:endParaRPr>
-          </a:p>
-          <a:p>
-            <a:r>
-              <a:rPr lang="en-US" sz="1200" kern="1200" dirty="0">
-                <a:solidFill>
-                  <a:schemeClr val="tx1"/>
-                </a:solidFill>
-                <a:effectLst/>
-                <a:latin typeface="+mn-lt"/>
-                <a:ea typeface="+mn-ea"/>
-                <a:cs typeface="+mn-cs"/>
-              </a:rPr>
-              <a:t>My philosophical positioning aligned with hermeneutic phenomenology since I </a:t>
-            </a:r>
-            <a:r>
-              <a:rPr lang="en-US" sz="1200" kern="1200" dirty="0" err="1">
-                <a:solidFill>
-                  <a:schemeClr val="tx1"/>
-                </a:solidFill>
-                <a:effectLst/>
-                <a:latin typeface="+mn-lt"/>
-                <a:ea typeface="+mn-ea"/>
-                <a:cs typeface="+mn-cs"/>
-              </a:rPr>
-              <a:t>saught</a:t>
-            </a:r>
-            <a:r>
-              <a:rPr lang="en-US" sz="1200" kern="1200" dirty="0">
-                <a:solidFill>
-                  <a:schemeClr val="tx1"/>
-                </a:solidFill>
-                <a:effectLst/>
-                <a:latin typeface="+mn-lt"/>
-                <a:ea typeface="+mn-ea"/>
-                <a:cs typeface="+mn-cs"/>
-              </a:rPr>
-              <a:t> to understand how individuals make meaning of their voluntary and involuntary immobility. </a:t>
-            </a:r>
-          </a:p>
-          <a:p>
-            <a:r>
-              <a:rPr lang="en-US" sz="1200" b="1" kern="1200" dirty="0">
-                <a:solidFill>
-                  <a:schemeClr val="tx1"/>
-                </a:solidFill>
-                <a:effectLst/>
-                <a:latin typeface="+mn-lt"/>
-                <a:ea typeface="+mn-ea"/>
-                <a:cs typeface="+mn-cs"/>
-              </a:rPr>
-              <a:t>Qualitative approach</a:t>
-            </a:r>
-            <a:endParaRPr lang="en-US" sz="1200" kern="1200" dirty="0">
-              <a:solidFill>
-                <a:schemeClr val="tx1"/>
-              </a:solidFill>
-              <a:effectLst/>
-              <a:latin typeface="+mn-lt"/>
-              <a:ea typeface="+mn-ea"/>
-              <a:cs typeface="+mn-cs"/>
-            </a:endParaRPr>
-          </a:p>
-          <a:p>
-            <a:r>
-              <a:rPr lang="en-US" sz="1200" kern="1200" dirty="0">
-                <a:solidFill>
-                  <a:schemeClr val="tx1"/>
-                </a:solidFill>
-                <a:effectLst/>
-                <a:latin typeface="+mn-lt"/>
-                <a:ea typeface="+mn-ea"/>
-                <a:cs typeface="+mn-cs"/>
-              </a:rPr>
-              <a:t>Given the sensitive and complex nature of drug trafficking and incarceration, the qualitative research design was deemed most appropriate to understand the complex realities of convicted drug mules, an insight that will be overlooked in a purely quantitative approach</a:t>
-            </a:r>
-          </a:p>
-          <a:p>
-            <a:r>
-              <a:rPr lang="en-US" sz="1200" kern="1200" dirty="0">
-                <a:solidFill>
-                  <a:schemeClr val="tx1"/>
-                </a:solidFill>
-                <a:effectLst/>
-                <a:latin typeface="+mn-lt"/>
-                <a:ea typeface="+mn-ea"/>
-                <a:cs typeface="+mn-cs"/>
-              </a:rPr>
-              <a:t>The methodological orientation that best suits the purpose of my research is the Interpretative Phenomenological Analysis (IPA). IPA is a qualitative research approach developed by Smith (2011) within psychology to explore how individuals make sense of their lived experiences (Moran, 2013). </a:t>
-            </a:r>
-          </a:p>
-          <a:p>
-            <a:r>
-              <a:rPr lang="en-US" sz="1200" b="1" kern="1200" dirty="0">
-                <a:solidFill>
-                  <a:schemeClr val="tx1"/>
-                </a:solidFill>
-                <a:effectLst/>
-                <a:latin typeface="+mn-lt"/>
-                <a:ea typeface="+mn-ea"/>
-                <a:cs typeface="+mn-cs"/>
-              </a:rPr>
-              <a:t>Study population</a:t>
-            </a:r>
-            <a:endParaRPr lang="en-US" sz="1200" kern="1200" dirty="0">
-              <a:solidFill>
-                <a:schemeClr val="tx1"/>
-              </a:solidFill>
-              <a:effectLst/>
-              <a:latin typeface="+mn-lt"/>
-              <a:ea typeface="+mn-ea"/>
-              <a:cs typeface="+mn-cs"/>
-            </a:endParaRPr>
-          </a:p>
-          <a:p>
-            <a:r>
-              <a:rPr lang="en-US" sz="1200" kern="1200" dirty="0">
-                <a:solidFill>
-                  <a:schemeClr val="tx1"/>
-                </a:solidFill>
-                <a:effectLst/>
-                <a:latin typeface="+mn-lt"/>
-                <a:ea typeface="+mn-ea"/>
-                <a:cs typeface="+mn-cs"/>
-              </a:rPr>
-              <a:t>Convicted drug mules (males and females)</a:t>
-            </a:r>
-          </a:p>
-          <a:p>
-            <a:r>
-              <a:rPr lang="en-US" sz="1200" kern="1200" dirty="0">
-                <a:solidFill>
-                  <a:schemeClr val="tx1"/>
-                </a:solidFill>
-                <a:effectLst/>
-                <a:latin typeface="+mn-lt"/>
-                <a:ea typeface="+mn-ea"/>
-                <a:cs typeface="+mn-cs"/>
-              </a:rPr>
-              <a:t>Ghanaians and foreign nationals</a:t>
-            </a:r>
-          </a:p>
-          <a:p>
-            <a:r>
-              <a:rPr lang="en-US" sz="1200" kern="1200" dirty="0">
-                <a:solidFill>
-                  <a:schemeClr val="tx1"/>
-                </a:solidFill>
-                <a:effectLst/>
-                <a:latin typeface="+mn-lt"/>
-                <a:ea typeface="+mn-ea"/>
-                <a:cs typeface="+mn-cs"/>
-              </a:rPr>
-              <a:t>18 years and above</a:t>
-            </a:r>
-          </a:p>
-          <a:p>
-            <a:r>
-              <a:rPr lang="en-US" sz="1200" kern="1200" dirty="0">
-                <a:solidFill>
-                  <a:schemeClr val="tx1"/>
-                </a:solidFill>
-                <a:effectLst/>
-                <a:latin typeface="+mn-lt"/>
-                <a:ea typeface="+mn-ea"/>
-                <a:cs typeface="+mn-cs"/>
-              </a:rPr>
-              <a:t>Must be in prison beyond 6 months</a:t>
-            </a:r>
-          </a:p>
-          <a:p>
-            <a:r>
-              <a:rPr lang="en-US" sz="1200" kern="1200" dirty="0">
-                <a:solidFill>
-                  <a:schemeClr val="tx1"/>
-                </a:solidFill>
-                <a:effectLst/>
-                <a:latin typeface="+mn-lt"/>
-                <a:ea typeface="+mn-ea"/>
-                <a:cs typeface="+mn-cs"/>
-              </a:rPr>
-              <a:t> </a:t>
-            </a:r>
-          </a:p>
-          <a:p>
-            <a:r>
-              <a:rPr lang="en-US" sz="1200" b="1" kern="1200" dirty="0">
-                <a:solidFill>
-                  <a:schemeClr val="tx1"/>
-                </a:solidFill>
-                <a:effectLst/>
-                <a:latin typeface="+mn-lt"/>
-                <a:ea typeface="+mn-ea"/>
-                <a:cs typeface="+mn-cs"/>
-              </a:rPr>
-              <a:t>Sampling Techniques</a:t>
-            </a:r>
-            <a:endParaRPr lang="en-US" sz="1200" kern="1200" dirty="0">
-              <a:solidFill>
-                <a:schemeClr val="tx1"/>
-              </a:solidFill>
-              <a:effectLst/>
-              <a:latin typeface="+mn-lt"/>
-              <a:ea typeface="+mn-ea"/>
-              <a:cs typeface="+mn-cs"/>
-            </a:endParaRPr>
-          </a:p>
-          <a:p>
-            <a:r>
-              <a:rPr lang="en-US" sz="1200" kern="1200" dirty="0">
-                <a:solidFill>
-                  <a:schemeClr val="tx1"/>
-                </a:solidFill>
-                <a:effectLst/>
-                <a:latin typeface="+mn-lt"/>
-                <a:ea typeface="+mn-ea"/>
-                <a:cs typeface="+mn-cs"/>
-              </a:rPr>
-              <a:t>Census at the female yard</a:t>
-            </a:r>
-          </a:p>
-          <a:p>
-            <a:r>
-              <a:rPr lang="en-US" sz="1200" kern="1200" dirty="0">
-                <a:solidFill>
-                  <a:schemeClr val="tx1"/>
-                </a:solidFill>
-                <a:effectLst/>
-                <a:latin typeface="+mn-lt"/>
-                <a:ea typeface="+mn-ea"/>
-                <a:cs typeface="+mn-cs"/>
-              </a:rPr>
-              <a:t>Snowballing at the male yard</a:t>
-            </a:r>
-          </a:p>
-          <a:p>
-            <a:r>
-              <a:rPr lang="en-US" sz="1200" kern="1200" dirty="0">
-                <a:solidFill>
-                  <a:schemeClr val="tx1"/>
-                </a:solidFill>
-                <a:effectLst/>
-                <a:latin typeface="+mn-lt"/>
-                <a:ea typeface="+mn-ea"/>
-                <a:cs typeface="+mn-cs"/>
-              </a:rPr>
-              <a:t>Purposive for key informants</a:t>
-            </a:r>
-          </a:p>
-          <a:p>
-            <a:r>
-              <a:rPr lang="en-US" sz="1200" kern="1200" dirty="0">
-                <a:solidFill>
-                  <a:schemeClr val="tx1"/>
-                </a:solidFill>
-                <a:effectLst/>
-                <a:latin typeface="+mn-lt"/>
-                <a:ea typeface="+mn-ea"/>
-                <a:cs typeface="+mn-cs"/>
-              </a:rPr>
-              <a:t> </a:t>
-            </a:r>
-          </a:p>
-          <a:p>
-            <a:r>
-              <a:rPr lang="en-US" sz="1200" kern="1200" dirty="0">
-                <a:solidFill>
-                  <a:schemeClr val="tx1"/>
-                </a:solidFill>
-                <a:effectLst/>
-                <a:latin typeface="+mn-lt"/>
-                <a:ea typeface="+mn-ea"/>
-                <a:cs typeface="+mn-cs"/>
-              </a:rPr>
-              <a:t> </a:t>
-            </a:r>
-          </a:p>
-          <a:p>
-            <a:r>
-              <a:rPr lang="en-US" sz="1200" b="1" kern="1200" dirty="0">
-                <a:solidFill>
-                  <a:schemeClr val="tx1"/>
-                </a:solidFill>
-                <a:effectLst/>
-                <a:latin typeface="+mn-lt"/>
-                <a:ea typeface="+mn-ea"/>
-                <a:cs typeface="+mn-cs"/>
-              </a:rPr>
-              <a:t>Sampling size</a:t>
-            </a:r>
-            <a:endParaRPr lang="en-US" sz="1200" kern="1200" dirty="0">
-              <a:solidFill>
-                <a:schemeClr val="tx1"/>
-              </a:solidFill>
-              <a:effectLst/>
-              <a:latin typeface="+mn-lt"/>
-              <a:ea typeface="+mn-ea"/>
-              <a:cs typeface="+mn-cs"/>
-            </a:endParaRPr>
-          </a:p>
-          <a:p>
-            <a:r>
-              <a:rPr lang="en-US" sz="1200" kern="1200" dirty="0">
-                <a:solidFill>
-                  <a:schemeClr val="tx1"/>
-                </a:solidFill>
-                <a:effectLst/>
-                <a:latin typeface="+mn-lt"/>
-                <a:ea typeface="+mn-ea"/>
-                <a:cs typeface="+mn-cs"/>
-              </a:rPr>
-              <a:t>The sampling size obtained after reaching saturation was 16, </a:t>
-            </a:r>
-            <a:r>
-              <a:rPr lang="en-US" sz="1200" kern="1200" dirty="0" err="1">
-                <a:solidFill>
-                  <a:schemeClr val="tx1"/>
-                </a:solidFill>
-                <a:effectLst/>
-                <a:latin typeface="+mn-lt"/>
-                <a:ea typeface="+mn-ea"/>
-                <a:cs typeface="+mn-cs"/>
-              </a:rPr>
-              <a:t>ie</a:t>
-            </a:r>
-            <a:r>
-              <a:rPr lang="en-US" sz="1200" kern="1200" dirty="0">
-                <a:solidFill>
-                  <a:schemeClr val="tx1"/>
-                </a:solidFill>
-                <a:effectLst/>
-                <a:latin typeface="+mn-lt"/>
-                <a:ea typeface="+mn-ea"/>
-                <a:cs typeface="+mn-cs"/>
-              </a:rPr>
-              <a:t>, 8 males and eight females</a:t>
-            </a:r>
-          </a:p>
-          <a:p>
-            <a:r>
-              <a:rPr lang="en-US" sz="1200" b="1" kern="1200" dirty="0">
-                <a:solidFill>
-                  <a:schemeClr val="tx1"/>
-                </a:solidFill>
-                <a:effectLst/>
-                <a:latin typeface="+mn-lt"/>
-                <a:ea typeface="+mn-ea"/>
-                <a:cs typeface="+mn-cs"/>
-              </a:rPr>
-              <a:t>Data analysis</a:t>
-            </a:r>
-            <a:endParaRPr lang="en-US" sz="1200" kern="1200" dirty="0">
-              <a:solidFill>
-                <a:schemeClr val="tx1"/>
-              </a:solidFill>
-              <a:effectLst/>
-              <a:latin typeface="+mn-lt"/>
-              <a:ea typeface="+mn-ea"/>
-              <a:cs typeface="+mn-cs"/>
-            </a:endParaRPr>
-          </a:p>
-          <a:p>
-            <a:r>
-              <a:rPr lang="en-US" sz="1200" kern="1200" dirty="0">
-                <a:solidFill>
-                  <a:schemeClr val="tx1"/>
-                </a:solidFill>
-                <a:effectLst/>
-                <a:latin typeface="+mn-lt"/>
-                <a:ea typeface="+mn-ea"/>
-                <a:cs typeface="+mn-cs"/>
-              </a:rPr>
-              <a:t>Transcription was done while conducting the interviews because the prison did not allow me to record</a:t>
-            </a:r>
-          </a:p>
-          <a:p>
-            <a:r>
-              <a:rPr lang="en-US" sz="1200" kern="1200" dirty="0">
-                <a:solidFill>
-                  <a:schemeClr val="tx1"/>
-                </a:solidFill>
-                <a:effectLst/>
-                <a:latin typeface="+mn-lt"/>
-                <a:ea typeface="+mn-ea"/>
-                <a:cs typeface="+mn-cs"/>
-              </a:rPr>
-              <a:t>After the first four interviews, I began generating initial codes and gained a preliminary understanding of the potential themes emerging from the data. I viewed these interviews as setting the conceptual boundaries of the phenomenon under investigation. </a:t>
-            </a:r>
-          </a:p>
-          <a:p>
-            <a:r>
-              <a:rPr lang="en-US" sz="1200" kern="1200" dirty="0">
-                <a:solidFill>
-                  <a:schemeClr val="tx1"/>
-                </a:solidFill>
-                <a:effectLst/>
-                <a:latin typeface="+mn-lt"/>
-                <a:ea typeface="+mn-ea"/>
-                <a:cs typeface="+mn-cs"/>
-              </a:rPr>
-              <a:t> </a:t>
-            </a:r>
-          </a:p>
-          <a:p>
-            <a:r>
-              <a:rPr lang="en-US" sz="1200" b="1" kern="1200" dirty="0">
-                <a:solidFill>
-                  <a:schemeClr val="tx1"/>
-                </a:solidFill>
-                <a:effectLst/>
-                <a:latin typeface="+mn-lt"/>
-                <a:ea typeface="+mn-ea"/>
-                <a:cs typeface="+mn-cs"/>
-              </a:rPr>
-              <a:t>Coding</a:t>
-            </a:r>
-            <a:endParaRPr lang="en-US" sz="1200" kern="1200" dirty="0">
-              <a:solidFill>
-                <a:schemeClr val="tx1"/>
-              </a:solidFill>
-              <a:effectLst/>
-              <a:latin typeface="+mn-lt"/>
-              <a:ea typeface="+mn-ea"/>
-              <a:cs typeface="+mn-cs"/>
-            </a:endParaRPr>
-          </a:p>
-          <a:p>
-            <a:r>
-              <a:rPr lang="en-US" sz="1200" kern="1200" dirty="0">
-                <a:solidFill>
-                  <a:schemeClr val="tx1"/>
-                </a:solidFill>
-                <a:effectLst/>
-                <a:latin typeface="+mn-lt"/>
-                <a:ea typeface="+mn-ea"/>
-                <a:cs typeface="+mn-cs"/>
-              </a:rPr>
-              <a:t>First order codes 			Second order codes		Voice/quotes </a:t>
-            </a:r>
-          </a:p>
-          <a:p>
-            <a:r>
-              <a:rPr lang="en-US" sz="1200" kern="1200" dirty="0">
-                <a:solidFill>
-                  <a:schemeClr val="tx1"/>
-                </a:solidFill>
-                <a:effectLst/>
-                <a:latin typeface="+mn-lt"/>
-                <a:ea typeface="+mn-ea"/>
-                <a:cs typeface="+mn-cs"/>
-              </a:rPr>
-              <a:t>Learning to sew			Vocational skills 		what skill are you learning?</a:t>
-            </a:r>
-          </a:p>
-          <a:p>
-            <a:r>
-              <a:rPr lang="en-US" sz="1200" kern="1200" dirty="0">
-                <a:solidFill>
-                  <a:schemeClr val="tx1"/>
-                </a:solidFill>
-                <a:effectLst/>
-                <a:latin typeface="+mn-lt"/>
-                <a:ea typeface="+mn-ea"/>
-                <a:cs typeface="+mn-cs"/>
-              </a:rPr>
-              <a:t>Constant headache and feeling weak	 Experiences in prison </a:t>
-            </a:r>
-          </a:p>
-          <a:p>
-            <a:r>
-              <a:rPr lang="en-US" sz="1200" kern="1200" dirty="0">
-                <a:solidFill>
-                  <a:schemeClr val="tx1"/>
-                </a:solidFill>
-                <a:effectLst/>
-                <a:latin typeface="+mn-lt"/>
-                <a:ea typeface="+mn-ea"/>
-                <a:cs typeface="+mn-cs"/>
-              </a:rPr>
-              <a:t>Thinking too much</a:t>
-            </a:r>
-          </a:p>
-          <a:p>
-            <a:r>
-              <a:rPr lang="en-US" sz="1200" kern="1200" dirty="0">
-                <a:solidFill>
-                  <a:schemeClr val="tx1"/>
-                </a:solidFill>
-                <a:effectLst/>
-                <a:latin typeface="+mn-lt"/>
-                <a:ea typeface="+mn-ea"/>
-                <a:cs typeface="+mn-cs"/>
-              </a:rPr>
-              <a:t>After generating the codes, I organised them into basic themes, subordinate themes and superordinate themes</a:t>
-            </a:r>
-          </a:p>
-          <a:p>
-            <a:r>
-              <a:rPr lang="en-US" sz="1200" kern="1200" dirty="0" err="1">
-                <a:solidFill>
-                  <a:schemeClr val="tx1"/>
-                </a:solidFill>
-                <a:effectLst/>
-                <a:latin typeface="+mn-lt"/>
-                <a:ea typeface="+mn-ea"/>
-                <a:cs typeface="+mn-cs"/>
-              </a:rPr>
-              <a:t>Eg.</a:t>
-            </a:r>
-            <a:r>
-              <a:rPr lang="en-US" sz="1200" kern="1200" dirty="0">
-                <a:solidFill>
-                  <a:schemeClr val="tx1"/>
-                </a:solidFill>
-                <a:effectLst/>
-                <a:latin typeface="+mn-lt"/>
-                <a:ea typeface="+mn-ea"/>
-                <a:cs typeface="+mn-cs"/>
-              </a:rPr>
-              <a:t> Working in my neighborhood (basic theme)	No movement within the country of origin (subordinate theme)	mobility trajectories of participants before engaging in drug trafficking (superordinate themes)</a:t>
-            </a:r>
-          </a:p>
-          <a:p>
-            <a:r>
-              <a:rPr lang="en-US" sz="1200" kern="1200" dirty="0">
-                <a:solidFill>
-                  <a:schemeClr val="tx1"/>
-                </a:solidFill>
-                <a:effectLst/>
-                <a:latin typeface="+mn-lt"/>
-                <a:ea typeface="+mn-ea"/>
-                <a:cs typeface="+mn-cs"/>
-              </a:rPr>
-              <a:t> </a:t>
-            </a:r>
-          </a:p>
-          <a:p>
-            <a:r>
-              <a:rPr lang="en-US" sz="1200" kern="1200" dirty="0">
-                <a:solidFill>
-                  <a:schemeClr val="tx1"/>
-                </a:solidFill>
-                <a:effectLst/>
-                <a:latin typeface="+mn-lt"/>
-                <a:ea typeface="+mn-ea"/>
-                <a:cs typeface="+mn-cs"/>
-              </a:rPr>
-              <a:t> </a:t>
-            </a:r>
-          </a:p>
-          <a:p>
-            <a:r>
-              <a:rPr lang="en-US" sz="1200" b="1" kern="1200" dirty="0">
-                <a:solidFill>
-                  <a:schemeClr val="tx1"/>
-                </a:solidFill>
-                <a:effectLst/>
-                <a:latin typeface="+mn-lt"/>
-                <a:ea typeface="+mn-ea"/>
-                <a:cs typeface="+mn-cs"/>
-              </a:rPr>
-              <a:t> </a:t>
-            </a:r>
-            <a:endParaRPr lang="en-US" sz="1200" kern="1200" dirty="0">
-              <a:solidFill>
-                <a:schemeClr val="tx1"/>
-              </a:solidFill>
-              <a:effectLst/>
-              <a:latin typeface="+mn-lt"/>
-              <a:ea typeface="+mn-ea"/>
-              <a:cs typeface="+mn-cs"/>
-            </a:endParaRPr>
-          </a:p>
-          <a:p>
-            <a:r>
-              <a:rPr lang="en-US" sz="1200" b="1" kern="1200" dirty="0">
-                <a:solidFill>
-                  <a:schemeClr val="tx1"/>
-                </a:solidFill>
-                <a:effectLst/>
-                <a:latin typeface="+mn-lt"/>
-                <a:ea typeface="+mn-ea"/>
-                <a:cs typeface="+mn-cs"/>
-              </a:rPr>
-              <a:t>Researcher positionality </a:t>
-            </a:r>
-            <a:endParaRPr lang="en-US" sz="1200" kern="1200" dirty="0">
-              <a:solidFill>
-                <a:schemeClr val="tx1"/>
-              </a:solidFill>
-              <a:effectLst/>
-              <a:latin typeface="+mn-lt"/>
-              <a:ea typeface="+mn-ea"/>
-              <a:cs typeface="+mn-cs"/>
-            </a:endParaRPr>
-          </a:p>
-          <a:p>
-            <a:r>
-              <a:rPr lang="en-US" sz="1200" b="1" kern="1200" dirty="0">
-                <a:solidFill>
-                  <a:schemeClr val="tx1"/>
-                </a:solidFill>
-                <a:effectLst/>
-                <a:latin typeface="+mn-lt"/>
-                <a:ea typeface="+mn-ea"/>
-                <a:cs typeface="+mn-cs"/>
-              </a:rPr>
-              <a:t> </a:t>
-            </a:r>
-            <a:endParaRPr lang="en-US" sz="1200" kern="1200" dirty="0">
-              <a:solidFill>
-                <a:schemeClr val="tx1"/>
-              </a:solidFill>
-              <a:effectLst/>
-              <a:latin typeface="+mn-lt"/>
-              <a:ea typeface="+mn-ea"/>
-              <a:cs typeface="+mn-cs"/>
-            </a:endParaRPr>
-          </a:p>
-          <a:p>
-            <a:r>
-              <a:rPr lang="en-US" sz="1200" kern="1200" dirty="0">
-                <a:solidFill>
-                  <a:schemeClr val="tx1"/>
-                </a:solidFill>
-                <a:effectLst/>
-                <a:latin typeface="+mn-lt"/>
-                <a:ea typeface="+mn-ea"/>
-                <a:cs typeface="+mn-cs"/>
-              </a:rPr>
-              <a:t>On one hand, I have firsthand knowledge of law enforcement and how drug trafficking cases are handled in Ghana. On the other hand, I am deeply engaged in academic inquiry as a student researcher</a:t>
-            </a:r>
-          </a:p>
-          <a:p>
-            <a:r>
-              <a:rPr lang="en-US" sz="1200" kern="1200" dirty="0">
-                <a:solidFill>
-                  <a:schemeClr val="tx1"/>
-                </a:solidFill>
-                <a:effectLst/>
-                <a:latin typeface="+mn-lt"/>
-                <a:ea typeface="+mn-ea"/>
-                <a:cs typeface="+mn-cs"/>
-              </a:rPr>
-              <a:t> </a:t>
-            </a:r>
-          </a:p>
-          <a:p>
-            <a:r>
-              <a:rPr lang="en-US" sz="1200" kern="1200" dirty="0">
-                <a:solidFill>
-                  <a:schemeClr val="tx1"/>
-                </a:solidFill>
-                <a:effectLst/>
-                <a:latin typeface="+mn-lt"/>
-                <a:ea typeface="+mn-ea"/>
-                <a:cs typeface="+mn-cs"/>
-              </a:rPr>
-              <a:t>I may be seen as an insider because, as a drug law enforcement officer, I have a deep understanding of the legal, procedural, and social contexts surrounding drug trafficking.</a:t>
-            </a:r>
-          </a:p>
-          <a:p>
-            <a:r>
-              <a:rPr lang="en-US" sz="1200" kern="1200" dirty="0">
-                <a:solidFill>
-                  <a:schemeClr val="tx1"/>
-                </a:solidFill>
-                <a:effectLst/>
-                <a:latin typeface="+mn-lt"/>
-                <a:ea typeface="+mn-ea"/>
-                <a:cs typeface="+mn-cs"/>
-              </a:rPr>
-              <a:t>I am an outsider because I have not lived the experience of being a convicted drug mule.</a:t>
-            </a:r>
-          </a:p>
-          <a:p>
-            <a:r>
-              <a:rPr lang="en-US" sz="1200" kern="1200" dirty="0">
-                <a:solidFill>
-                  <a:schemeClr val="tx1"/>
-                </a:solidFill>
-                <a:effectLst/>
-                <a:latin typeface="+mn-lt"/>
-                <a:ea typeface="+mn-ea"/>
-                <a:cs typeface="+mn-cs"/>
-              </a:rPr>
-              <a:t> </a:t>
-            </a:r>
-          </a:p>
-          <a:p>
-            <a:r>
-              <a:rPr lang="en-US" sz="1200" kern="1200" dirty="0">
-                <a:solidFill>
-                  <a:schemeClr val="tx1"/>
-                </a:solidFill>
-                <a:effectLst/>
-                <a:latin typeface="+mn-lt"/>
-                <a:ea typeface="+mn-ea"/>
-                <a:cs typeface="+mn-cs"/>
-              </a:rPr>
-              <a:t>I am aware that this dual positionality can enrich my analysis, but also requires reflexivity. I needed to be aware of how my identity, assumptions, and institutional affiliations might affect data collection, interpretation, and participant rapport.</a:t>
-            </a:r>
-          </a:p>
-          <a:p>
-            <a:r>
-              <a:rPr lang="en-US" sz="1200" kern="1200" dirty="0">
-                <a:solidFill>
-                  <a:schemeClr val="tx1"/>
-                </a:solidFill>
-                <a:effectLst/>
-                <a:latin typeface="+mn-lt"/>
-                <a:ea typeface="+mn-ea"/>
-                <a:cs typeface="+mn-cs"/>
-              </a:rPr>
-              <a:t> </a:t>
-            </a:r>
-          </a:p>
-          <a:p>
-            <a:r>
-              <a:rPr lang="en-US" sz="1200" kern="1200" dirty="0">
-                <a:solidFill>
-                  <a:schemeClr val="tx1"/>
-                </a:solidFill>
-                <a:effectLst/>
-                <a:latin typeface="+mn-lt"/>
-                <a:ea typeface="+mn-ea"/>
-                <a:cs typeface="+mn-cs"/>
-              </a:rPr>
-              <a:t>Although my background gave me valuable insight into how drugs are trafficked into Ghana and the control measures, I was also aware that sharing my professional identity with my participants, the convicted drug mules, might make them uncomfortable or hesitant to speak freely. To help create a safe and open environment for honest conversation, I chose to present myself only as a student researcher during the interviews. This decision was not taken lightly, but it followed ethical guidance in qualitative research that emphasises the importance of building trust and mitigating power imbalances between researcher and participant (Berger, 2016; Holmes, 2020).</a:t>
-            </a:r>
-          </a:p>
-          <a:p>
-            <a:endParaRPr lang="en-US" dirty="0"/>
-          </a:p>
-        </p:txBody>
-      </p:sp>
-      <p:sp>
-        <p:nvSpPr>
-          <p:cNvPr id="4" name="Slide Number Placeholder 3">
-            <a:extLst>
-              <a:ext uri="{FF2B5EF4-FFF2-40B4-BE49-F238E27FC236}">
-                <a16:creationId xmlns:a16="http://schemas.microsoft.com/office/drawing/2014/main" id="{682754C5-4E4F-43F5-1645-2CFC09DBFA22}"/>
-              </a:ext>
-            </a:extLst>
-          </p:cNvPr>
+            <a:endParaRPr lang="en-US"/>
+          </a:p>
+        </p:txBody>
+      </p:sp>
+      <p:sp>
+        <p:nvSpPr>
+          <p:cNvPr id="4" name="Slide Number Placeholder 3"/>
           <p:cNvSpPr>
             <a:spLocks noGrp="1"/>
           </p:cNvSpPr>
@@ -3131,7 +2328,7 @@
     </p:spTree>
     <p:extLst>
       <p:ext uri="{BB962C8B-B14F-4D97-AF65-F5344CB8AC3E}">
-        <p14:creationId xmlns:p14="http://schemas.microsoft.com/office/powerpoint/2010/main" val="2089764201"/>
+        <p14:creationId xmlns:p14="http://schemas.microsoft.com/office/powerpoint/2010/main" val="1249002980"/>
       </p:ext>
     </p:extLst>
   </p:cSld>
@@ -3160,7 +2357,13 @@
       </p:grpSpPr>
       <p:sp>
         <p:nvSpPr>
-          <p:cNvPr id="2" name="Title 1"/>
+          <p:cNvPr id="2" name="Title 1">
+            <a:extLst>
+              <a:ext uri="{FF2B5EF4-FFF2-40B4-BE49-F238E27FC236}">
+                <a16:creationId xmlns:a16="http://schemas.microsoft.com/office/drawing/2014/main" id="{9BDD7EC2-E5D8-F742-1B67-054FF0866F4A}"/>
+              </a:ext>
+            </a:extLst>
+          </p:cNvPr>
           <p:cNvSpPr>
             <a:spLocks noGrp="1"/>
           </p:cNvSpPr>
@@ -3170,17 +2373,20 @@
         </p:nvSpPr>
         <p:spPr>
           <a:xfrm>
-            <a:off x="914400" y="2130426"/>
-            <a:ext cx="10363200" cy="1470025"/>
+            <a:off x="1524000" y="1122363"/>
+            <a:ext cx="9144000" cy="2387600"/>
           </a:xfrm>
         </p:spPr>
         <p:txBody>
-          <a:bodyPr/>
-          <a:lstStyle/>
-          <a:p>
-            <a:pPr fontAlgn="base"/>
-            <a:r>
-              <a:rPr lang="en-US" strike="noStrike" noProof="1"/>
+          <a:bodyPr anchor="b"/>
+          <a:lstStyle>
+            <a:lvl1pPr algn="ctr">
+              <a:defRPr sz="6000"/>
+            </a:lvl1pPr>
+          </a:lstStyle>
+          <a:p>
+            <a:r>
+              <a:rPr lang="en-US"/>
               <a:t>Click to edit Master title style</a:t>
             </a:r>
           </a:p>
@@ -3188,7 +2394,13 @@
       </p:sp>
       <p:sp>
         <p:nvSpPr>
-          <p:cNvPr id="3" name="Subtitle 2"/>
+          <p:cNvPr id="3" name="Subtitle 2">
+            <a:extLst>
+              <a:ext uri="{FF2B5EF4-FFF2-40B4-BE49-F238E27FC236}">
+                <a16:creationId xmlns:a16="http://schemas.microsoft.com/office/drawing/2014/main" id="{77A00BB6-1739-C6B5-9716-28AB89FF2D39}"/>
+              </a:ext>
+            </a:extLst>
+          </p:cNvPr>
           <p:cNvSpPr>
             <a:spLocks noGrp="1"/>
           </p:cNvSpPr>
@@ -3198,8 +2410,8 @@
         </p:nvSpPr>
         <p:spPr>
           <a:xfrm>
-            <a:off x="1828800" y="3886200"/>
-            <a:ext cx="8534400" cy="1752600"/>
+            <a:off x="1524000" y="3602038"/>
+            <a:ext cx="9144000" cy="1655762"/>
           </a:xfrm>
         </p:spPr>
         <p:txBody>
@@ -3207,99 +2419,44 @@
           <a:lstStyle>
             <a:lvl1pPr marL="0" indent="0" algn="ctr">
               <a:buNone/>
-              <a:defRPr>
-                <a:solidFill>
-                  <a:schemeClr val="tx1">
-                    <a:tint val="75000"/>
-                  </a:schemeClr>
-                </a:solidFill>
-              </a:defRPr>
+              <a:defRPr sz="2400"/>
             </a:lvl1pPr>
             <a:lvl2pPr marL="457200" indent="0" algn="ctr">
               <a:buNone/>
-              <a:defRPr>
-                <a:solidFill>
-                  <a:schemeClr val="tx1">
-                    <a:tint val="75000"/>
-                  </a:schemeClr>
-                </a:solidFill>
-              </a:defRPr>
+              <a:defRPr sz="2000"/>
             </a:lvl2pPr>
             <a:lvl3pPr marL="914400" indent="0" algn="ctr">
               <a:buNone/>
-              <a:defRPr>
-                <a:solidFill>
-                  <a:schemeClr val="tx1">
-                    <a:tint val="75000"/>
-                  </a:schemeClr>
-                </a:solidFill>
-              </a:defRPr>
+              <a:defRPr sz="1800"/>
             </a:lvl3pPr>
             <a:lvl4pPr marL="1371600" indent="0" algn="ctr">
               <a:buNone/>
-              <a:defRPr>
-                <a:solidFill>
-                  <a:schemeClr val="tx1">
-                    <a:tint val="75000"/>
-                  </a:schemeClr>
-                </a:solidFill>
-              </a:defRPr>
+              <a:defRPr sz="1600"/>
             </a:lvl4pPr>
             <a:lvl5pPr marL="1828800" indent="0" algn="ctr">
               <a:buNone/>
-              <a:defRPr>
-                <a:solidFill>
-                  <a:schemeClr val="tx1">
-                    <a:tint val="75000"/>
-                  </a:schemeClr>
-                </a:solidFill>
-              </a:defRPr>
+              <a:defRPr sz="1600"/>
             </a:lvl5pPr>
             <a:lvl6pPr marL="2286000" indent="0" algn="ctr">
               <a:buNone/>
-              <a:defRPr>
-                <a:solidFill>
-                  <a:schemeClr val="tx1">
-                    <a:tint val="75000"/>
-                  </a:schemeClr>
-                </a:solidFill>
-              </a:defRPr>
+              <a:defRPr sz="1600"/>
             </a:lvl6pPr>
             <a:lvl7pPr marL="2743200" indent="0" algn="ctr">
               <a:buNone/>
-              <a:defRPr>
-                <a:solidFill>
-                  <a:schemeClr val="tx1">
-                    <a:tint val="75000"/>
-                  </a:schemeClr>
-                </a:solidFill>
-              </a:defRPr>
+              <a:defRPr sz="1600"/>
             </a:lvl7pPr>
             <a:lvl8pPr marL="3200400" indent="0" algn="ctr">
               <a:buNone/>
-              <a:defRPr>
-                <a:solidFill>
-                  <a:schemeClr val="tx1">
-                    <a:tint val="75000"/>
-                  </a:schemeClr>
-                </a:solidFill>
-              </a:defRPr>
+              <a:defRPr sz="1600"/>
             </a:lvl8pPr>
             <a:lvl9pPr marL="3657600" indent="0" algn="ctr">
               <a:buNone/>
-              <a:defRPr>
-                <a:solidFill>
-                  <a:schemeClr val="tx1">
-                    <a:tint val="75000"/>
-                  </a:schemeClr>
-                </a:solidFill>
-              </a:defRPr>
+              <a:defRPr sz="1600"/>
             </a:lvl9pPr>
           </a:lstStyle>
           <a:p>
-            <a:pPr fontAlgn="base"/>
-            <a:r>
-              <a:rPr lang="en-US" strike="noStrike" noProof="1"/>
+            <a:r>
+              <a:rPr lang="en-US"/>
               <a:t>Click to edit Master subtitle style</a:t>
             </a:r>
           </a:p>
@@ -3307,7 +2464,13 @@
       </p:sp>
       <p:sp>
         <p:nvSpPr>
-          <p:cNvPr id="4" name="Date Placeholder 3"/>
+          <p:cNvPr id="4" name="Date Placeholder 3">
+            <a:extLst>
+              <a:ext uri="{FF2B5EF4-FFF2-40B4-BE49-F238E27FC236}">
+                <a16:creationId xmlns:a16="http://schemas.microsoft.com/office/drawing/2014/main" id="{592B4C73-ACB3-7C9F-7EA5-2938A0344044}"/>
+              </a:ext>
+            </a:extLst>
+          </p:cNvPr>
           <p:cNvSpPr>
             <a:spLocks noGrp="1"/>
           </p:cNvSpPr>
@@ -3320,39 +2483,23 @@
           <a:bodyPr/>
           <a:lstStyle/>
           <a:p>
-            <a:pPr fontAlgn="base">
-              <a:spcBef>
-                <a:spcPct val="0"/>
-              </a:spcBef>
-              <a:spcAft>
-                <a:spcPct val="0"/>
-              </a:spcAft>
-              <a:defRPr/>
-            </a:pPr>
-            <a:fld id="{74E860EC-E542-457A-B70C-3F9F24F46ECA}" type="datetime1">
-              <a:rPr lang="en-US" smtClean="0">
-                <a:ea typeface="MS PGothic" panose="020B0600070205080204" pitchFamily="34" charset="-128"/>
-              </a:rPr>
-              <a:pPr fontAlgn="base">
-                <a:spcBef>
-                  <a:spcPct val="0"/>
-                </a:spcBef>
-                <a:spcAft>
-                  <a:spcPct val="0"/>
-                </a:spcAft>
-                <a:defRPr/>
-              </a:pPr>
-              <a:t>10/7/2026</a:t>
+            <a:fld id="{F10901DB-E840-4150-8207-866BDD25D22F}" type="datetimeFigureOut">
+              <a:rPr lang="en-US" smtClean="0"/>
+              <a:t>9/15/2025</a:t>
             </a:fld>
-            <a:endParaRPr lang="en-US">
-              <a:ea typeface="MS PGothic" panose="020B0600070205080204" pitchFamily="34" charset="-128"/>
-            </a:endParaRPr>
-          </a:p>
-        </p:txBody>
-      </p:sp>
-      <p:sp>
-        <p:nvSpPr>
-          <p:cNvPr id="5" name="Footer Placeholder 4"/>
+            <a:endParaRPr lang="en-US"/>
+          </a:p>
+        </p:txBody>
+      </p:sp>
+      <p:sp>
+        <p:nvSpPr>
+          <p:cNvPr id="5" name="Footer Placeholder 4">
+            <a:extLst>
+              <a:ext uri="{FF2B5EF4-FFF2-40B4-BE49-F238E27FC236}">
+                <a16:creationId xmlns:a16="http://schemas.microsoft.com/office/drawing/2014/main" id="{5912DAEB-3F38-A327-9E2B-F5B42236E7C9}"/>
+              </a:ext>
+            </a:extLst>
+          </p:cNvPr>
           <p:cNvSpPr>
             <a:spLocks noGrp="1"/>
           </p:cNvSpPr>
@@ -3365,16 +2512,19 @@
           <a:bodyPr/>
           <a:lstStyle/>
           <a:p>
-            <a:pPr>
-              <a:defRPr/>
-            </a:pPr>
             <a:endParaRPr lang="en-US"/>
           </a:p>
         </p:txBody>
       </p:sp>
       <p:sp>
         <p:nvSpPr>
-          <p:cNvPr id="6" name="Slide Number Placeholder 5"/>
+          <p:cNvPr id="6" name="Slide Number Placeholder 5">
+            <a:extLst>
+              <a:ext uri="{FF2B5EF4-FFF2-40B4-BE49-F238E27FC236}">
+                <a16:creationId xmlns:a16="http://schemas.microsoft.com/office/drawing/2014/main" id="{5BD2C4D2-F373-1FDD-0C14-B0A5EE67898B}"/>
+              </a:ext>
+            </a:extLst>
+          </p:cNvPr>
           <p:cNvSpPr>
             <a:spLocks noGrp="1"/>
           </p:cNvSpPr>
@@ -3387,40 +2537,18 @@
           <a:bodyPr/>
           <a:lstStyle/>
           <a:p>
-            <a:pPr fontAlgn="base">
-              <a:spcBef>
-                <a:spcPct val="0"/>
-              </a:spcBef>
-              <a:spcAft>
-                <a:spcPct val="0"/>
-              </a:spcAft>
-              <a:defRPr/>
-            </a:pPr>
-            <a:fld id="{B724CBE9-E6DE-4AAC-8453-7697DD7A6035}" type="slidenum">
-              <a:rPr lang="en-US" altLang="en-US" smtClean="0">
-                <a:ea typeface="MS PGothic" panose="020B0600070205080204" pitchFamily="34" charset="-128"/>
-              </a:rPr>
-              <a:pPr fontAlgn="base">
-                <a:spcBef>
-                  <a:spcPct val="0"/>
-                </a:spcBef>
-                <a:spcAft>
-                  <a:spcPct val="0"/>
-                </a:spcAft>
-                <a:defRPr/>
-              </a:pPr>
+            <a:fld id="{C41024BC-5968-4735-8D30-B72DEF6BE683}" type="slidenum">
+              <a:rPr lang="en-US" smtClean="0"/>
               <a:t>‹#›</a:t>
             </a:fld>
-            <a:endParaRPr lang="en-US" altLang="en-US">
-              <a:ea typeface="MS PGothic" panose="020B0600070205080204" pitchFamily="34" charset="-128"/>
-            </a:endParaRPr>
+            <a:endParaRPr lang="en-US"/>
           </a:p>
         </p:txBody>
       </p:sp>
     </p:spTree>
     <p:extLst>
       <p:ext uri="{BB962C8B-B14F-4D97-AF65-F5344CB8AC3E}">
-        <p14:creationId xmlns:p14="http://schemas.microsoft.com/office/powerpoint/2010/main" val="448339023"/>
+        <p14:creationId xmlns:p14="http://schemas.microsoft.com/office/powerpoint/2010/main" val="320258995"/>
       </p:ext>
     </p:extLst>
   </p:cSld>
@@ -3449,7 +2577,13 @@
       </p:grpSpPr>
       <p:sp>
         <p:nvSpPr>
-          <p:cNvPr id="2" name="Title 1"/>
+          <p:cNvPr id="2" name="Title 1">
+            <a:extLst>
+              <a:ext uri="{FF2B5EF4-FFF2-40B4-BE49-F238E27FC236}">
+                <a16:creationId xmlns:a16="http://schemas.microsoft.com/office/drawing/2014/main" id="{D21E613B-3E08-B9D4-3543-276532004087}"/>
+              </a:ext>
+            </a:extLst>
+          </p:cNvPr>
           <p:cNvSpPr>
             <a:spLocks noGrp="1"/>
           </p:cNvSpPr>
@@ -3462,9 +2596,8 @@
           <a:bodyPr/>
           <a:lstStyle/>
           <a:p>
-            <a:pPr fontAlgn="base"/>
-            <a:r>
-              <a:rPr lang="en-US" strike="noStrike" noProof="1"/>
+            <a:r>
+              <a:rPr lang="en-US"/>
               <a:t>Click to edit Master title style</a:t>
             </a:r>
           </a:p>
@@ -3472,7 +2605,13 @@
       </p:sp>
       <p:sp>
         <p:nvSpPr>
-          <p:cNvPr id="3" name="Vertical Text Placeholder 2"/>
+          <p:cNvPr id="3" name="Vertical Text Placeholder 2">
+            <a:extLst>
+              <a:ext uri="{FF2B5EF4-FFF2-40B4-BE49-F238E27FC236}">
+                <a16:creationId xmlns:a16="http://schemas.microsoft.com/office/drawing/2014/main" id="{554B8505-E673-B14D-57BC-B609C294E3EF}"/>
+              </a:ext>
+            </a:extLst>
+          </p:cNvPr>
           <p:cNvSpPr>
             <a:spLocks noGrp="1"/>
           </p:cNvSpPr>
@@ -3485,37 +2624,37 @@
           <a:bodyPr vert="eaVert"/>
           <a:lstStyle/>
           <a:p>
-            <a:pPr lvl="0" fontAlgn="base"/>
-            <a:r>
-              <a:rPr lang="en-US" strike="noStrike" noProof="1"/>
+            <a:pPr lvl="0"/>
+            <a:r>
+              <a:rPr lang="en-US"/>
               <a:t>Click to edit Master text styles</a:t>
             </a:r>
           </a:p>
           <a:p>
-            <a:pPr lvl="1" fontAlgn="base"/>
-            <a:r>
-              <a:rPr lang="en-US" strike="noStrike" noProof="1"/>
+            <a:pPr lvl="1"/>
+            <a:r>
+              <a:rPr lang="en-US"/>
               <a:t>Second level</a:t>
             </a:r>
           </a:p>
           <a:p>
-            <a:pPr lvl="2" fontAlgn="base"/>
-            <a:r>
-              <a:rPr lang="en-US" strike="noStrike" noProof="1"/>
+            <a:pPr lvl="2"/>
+            <a:r>
+              <a:rPr lang="en-US"/>
               <a:t>Third level</a:t>
             </a:r>
           </a:p>
           <a:p>
-            <a:pPr lvl="3" fontAlgn="base"/>
-            <a:r>
-              <a:rPr lang="en-US" strike="noStrike" noProof="1"/>
+            <a:pPr lvl="3"/>
+            <a:r>
+              <a:rPr lang="en-US"/>
               <a:t>Fourth level</a:t>
             </a:r>
           </a:p>
           <a:p>
-            <a:pPr lvl="4" fontAlgn="base"/>
-            <a:r>
-              <a:rPr lang="en-US" strike="noStrike" noProof="1"/>
+            <a:pPr lvl="4"/>
+            <a:r>
+              <a:rPr lang="en-US"/>
               <a:t>Fifth level</a:t>
             </a:r>
           </a:p>
@@ -3523,7 +2662,13 @@
       </p:sp>
       <p:sp>
         <p:nvSpPr>
-          <p:cNvPr id="4" name="Date Placeholder 3"/>
+          <p:cNvPr id="4" name="Date Placeholder 3">
+            <a:extLst>
+              <a:ext uri="{FF2B5EF4-FFF2-40B4-BE49-F238E27FC236}">
+                <a16:creationId xmlns:a16="http://schemas.microsoft.com/office/drawing/2014/main" id="{88ED7D8F-1AC7-0420-F070-FDFD3C35B784}"/>
+              </a:ext>
+            </a:extLst>
+          </p:cNvPr>
           <p:cNvSpPr>
             <a:spLocks noGrp="1"/>
           </p:cNvSpPr>
@@ -3536,39 +2681,23 @@
           <a:bodyPr/>
           <a:lstStyle/>
           <a:p>
-            <a:pPr fontAlgn="base">
-              <a:spcBef>
-                <a:spcPct val="0"/>
-              </a:spcBef>
-              <a:spcAft>
-                <a:spcPct val="0"/>
-              </a:spcAft>
-              <a:defRPr/>
-            </a:pPr>
-            <a:fld id="{A7F2A97E-5CE7-416F-AB2B-5750179EE4FB}" type="datetime1">
-              <a:rPr lang="en-US" smtClean="0">
-                <a:ea typeface="MS PGothic" panose="020B0600070205080204" pitchFamily="34" charset="-128"/>
-              </a:rPr>
-              <a:pPr fontAlgn="base">
-                <a:spcBef>
-                  <a:spcPct val="0"/>
-                </a:spcBef>
-                <a:spcAft>
-                  <a:spcPct val="0"/>
-                </a:spcAft>
-                <a:defRPr/>
-              </a:pPr>
-              <a:t>10/7/2026</a:t>
+            <a:fld id="{F10901DB-E840-4150-8207-866BDD25D22F}" type="datetimeFigureOut">
+              <a:rPr lang="en-US" smtClean="0"/>
+              <a:t>9/15/2025</a:t>
             </a:fld>
-            <a:endParaRPr lang="en-US">
-              <a:ea typeface="MS PGothic" panose="020B0600070205080204" pitchFamily="34" charset="-128"/>
-            </a:endParaRPr>
-          </a:p>
-        </p:txBody>
-      </p:sp>
-      <p:sp>
-        <p:nvSpPr>
-          <p:cNvPr id="5" name="Footer Placeholder 4"/>
+            <a:endParaRPr lang="en-US"/>
+          </a:p>
+        </p:txBody>
+      </p:sp>
+      <p:sp>
+        <p:nvSpPr>
+          <p:cNvPr id="5" name="Footer Placeholder 4">
+            <a:extLst>
+              <a:ext uri="{FF2B5EF4-FFF2-40B4-BE49-F238E27FC236}">
+                <a16:creationId xmlns:a16="http://schemas.microsoft.com/office/drawing/2014/main" id="{3692FD22-A5B5-C5E8-19C9-E29BD895B01A}"/>
+              </a:ext>
+            </a:extLst>
+          </p:cNvPr>
           <p:cNvSpPr>
             <a:spLocks noGrp="1"/>
           </p:cNvSpPr>
@@ -3581,16 +2710,19 @@
           <a:bodyPr/>
           <a:lstStyle/>
           <a:p>
-            <a:pPr>
-              <a:defRPr/>
-            </a:pPr>
             <a:endParaRPr lang="en-US"/>
           </a:p>
         </p:txBody>
       </p:sp>
       <p:sp>
         <p:nvSpPr>
-          <p:cNvPr id="6" name="Slide Number Placeholder 5"/>
+          <p:cNvPr id="6" name="Slide Number Placeholder 5">
+            <a:extLst>
+              <a:ext uri="{FF2B5EF4-FFF2-40B4-BE49-F238E27FC236}">
+                <a16:creationId xmlns:a16="http://schemas.microsoft.com/office/drawing/2014/main" id="{132D55BE-B31F-9976-5801-16A4491DC193}"/>
+              </a:ext>
+            </a:extLst>
+          </p:cNvPr>
           <p:cNvSpPr>
             <a:spLocks noGrp="1"/>
           </p:cNvSpPr>
@@ -3603,40 +2735,18 @@
           <a:bodyPr/>
           <a:lstStyle/>
           <a:p>
-            <a:pPr fontAlgn="base">
-              <a:spcBef>
-                <a:spcPct val="0"/>
-              </a:spcBef>
-              <a:spcAft>
-                <a:spcPct val="0"/>
-              </a:spcAft>
-              <a:defRPr/>
-            </a:pPr>
-            <a:fld id="{B724CBE9-E6DE-4AAC-8453-7697DD7A6035}" type="slidenum">
-              <a:rPr lang="en-US" altLang="en-US" smtClean="0">
-                <a:ea typeface="MS PGothic" panose="020B0600070205080204" pitchFamily="34" charset="-128"/>
-              </a:rPr>
-              <a:pPr fontAlgn="base">
-                <a:spcBef>
-                  <a:spcPct val="0"/>
-                </a:spcBef>
-                <a:spcAft>
-                  <a:spcPct val="0"/>
-                </a:spcAft>
-                <a:defRPr/>
-              </a:pPr>
+            <a:fld id="{C41024BC-5968-4735-8D30-B72DEF6BE683}" type="slidenum">
+              <a:rPr lang="en-US" smtClean="0"/>
               <a:t>‹#›</a:t>
             </a:fld>
-            <a:endParaRPr lang="en-US" altLang="en-US">
-              <a:ea typeface="MS PGothic" panose="020B0600070205080204" pitchFamily="34" charset="-128"/>
-            </a:endParaRPr>
+            <a:endParaRPr lang="en-US"/>
           </a:p>
         </p:txBody>
       </p:sp>
     </p:spTree>
     <p:extLst>
       <p:ext uri="{BB962C8B-B14F-4D97-AF65-F5344CB8AC3E}">
-        <p14:creationId xmlns:p14="http://schemas.microsoft.com/office/powerpoint/2010/main" val="2860712770"/>
+        <p14:creationId xmlns:p14="http://schemas.microsoft.com/office/powerpoint/2010/main" val="802274776"/>
       </p:ext>
     </p:extLst>
   </p:cSld>
@@ -3665,7 +2775,13 @@
       </p:grpSpPr>
       <p:sp>
         <p:nvSpPr>
-          <p:cNvPr id="2" name="Vertical Title 1"/>
+          <p:cNvPr id="2" name="Vertical Title 1">
+            <a:extLst>
+              <a:ext uri="{FF2B5EF4-FFF2-40B4-BE49-F238E27FC236}">
+                <a16:creationId xmlns:a16="http://schemas.microsoft.com/office/drawing/2014/main" id="{6E714E13-7DDD-7B01-B532-2B2A88B66331}"/>
+              </a:ext>
+            </a:extLst>
+          </p:cNvPr>
           <p:cNvSpPr>
             <a:spLocks noGrp="1"/>
           </p:cNvSpPr>
@@ -3675,14 +2791,216 @@
         </p:nvSpPr>
         <p:spPr>
           <a:xfrm>
-            <a:off x="8839200" y="274639"/>
-            <a:ext cx="2743200" cy="5851525"/>
+            <a:off x="8724900" y="365125"/>
+            <a:ext cx="2628900" cy="5811838"/>
           </a:xfrm>
         </p:spPr>
         <p:txBody>
           <a:bodyPr vert="eaVert"/>
           <a:lstStyle/>
           <a:p>
+            <a:r>
+              <a:rPr lang="en-US"/>
+              <a:t>Click to edit Master title style</a:t>
+            </a:r>
+          </a:p>
+        </p:txBody>
+      </p:sp>
+      <p:sp>
+        <p:nvSpPr>
+          <p:cNvPr id="3" name="Vertical Text Placeholder 2">
+            <a:extLst>
+              <a:ext uri="{FF2B5EF4-FFF2-40B4-BE49-F238E27FC236}">
+                <a16:creationId xmlns:a16="http://schemas.microsoft.com/office/drawing/2014/main" id="{1B1CBB8E-647A-192C-E328-241E73841B4C}"/>
+              </a:ext>
+            </a:extLst>
+          </p:cNvPr>
+          <p:cNvSpPr>
+            <a:spLocks noGrp="1"/>
+          </p:cNvSpPr>
+          <p:nvPr>
+            <p:ph type="body" orient="vert" idx="1"/>
+          </p:nvPr>
+        </p:nvSpPr>
+        <p:spPr>
+          <a:xfrm>
+            <a:off x="838200" y="365125"/>
+            <a:ext cx="7734300" cy="5811838"/>
+          </a:xfrm>
+        </p:spPr>
+        <p:txBody>
+          <a:bodyPr vert="eaVert"/>
+          <a:lstStyle/>
+          <a:p>
+            <a:pPr lvl="0"/>
+            <a:r>
+              <a:rPr lang="en-US"/>
+              <a:t>Click to edit Master text styles</a:t>
+            </a:r>
+          </a:p>
+          <a:p>
+            <a:pPr lvl="1"/>
+            <a:r>
+              <a:rPr lang="en-US"/>
+              <a:t>Second level</a:t>
+            </a:r>
+          </a:p>
+          <a:p>
+            <a:pPr lvl="2"/>
+            <a:r>
+              <a:rPr lang="en-US"/>
+              <a:t>Third level</a:t>
+            </a:r>
+          </a:p>
+          <a:p>
+            <a:pPr lvl="3"/>
+            <a:r>
+              <a:rPr lang="en-US"/>
+              <a:t>Fourth level</a:t>
+            </a:r>
+          </a:p>
+          <a:p>
+            <a:pPr lvl="4"/>
+            <a:r>
+              <a:rPr lang="en-US"/>
+              <a:t>Fifth level</a:t>
+            </a:r>
+          </a:p>
+        </p:txBody>
+      </p:sp>
+      <p:sp>
+        <p:nvSpPr>
+          <p:cNvPr id="4" name="Date Placeholder 3">
+            <a:extLst>
+              <a:ext uri="{FF2B5EF4-FFF2-40B4-BE49-F238E27FC236}">
+                <a16:creationId xmlns:a16="http://schemas.microsoft.com/office/drawing/2014/main" id="{67BDFD78-3A20-22DE-6D4C-9A66BC0078A4}"/>
+              </a:ext>
+            </a:extLst>
+          </p:cNvPr>
+          <p:cNvSpPr>
+            <a:spLocks noGrp="1"/>
+          </p:cNvSpPr>
+          <p:nvPr>
+            <p:ph type="dt" sz="half" idx="10"/>
+          </p:nvPr>
+        </p:nvSpPr>
+        <p:spPr/>
+        <p:txBody>
+          <a:bodyPr/>
+          <a:lstStyle/>
+          <a:p>
+            <a:fld id="{F10901DB-E840-4150-8207-866BDD25D22F}" type="datetimeFigureOut">
+              <a:rPr lang="en-US" smtClean="0"/>
+              <a:t>9/15/2025</a:t>
+            </a:fld>
+            <a:endParaRPr lang="en-US"/>
+          </a:p>
+        </p:txBody>
+      </p:sp>
+      <p:sp>
+        <p:nvSpPr>
+          <p:cNvPr id="5" name="Footer Placeholder 4">
+            <a:extLst>
+              <a:ext uri="{FF2B5EF4-FFF2-40B4-BE49-F238E27FC236}">
+                <a16:creationId xmlns:a16="http://schemas.microsoft.com/office/drawing/2014/main" id="{639FA80B-D752-6CA7-C60B-AAF3A51B5230}"/>
+              </a:ext>
+            </a:extLst>
+          </p:cNvPr>
+          <p:cNvSpPr>
+            <a:spLocks noGrp="1"/>
+          </p:cNvSpPr>
+          <p:nvPr>
+            <p:ph type="ftr" sz="quarter" idx="11"/>
+          </p:nvPr>
+        </p:nvSpPr>
+        <p:spPr/>
+        <p:txBody>
+          <a:bodyPr/>
+          <a:lstStyle/>
+          <a:p>
+            <a:endParaRPr lang="en-US"/>
+          </a:p>
+        </p:txBody>
+      </p:sp>
+      <p:sp>
+        <p:nvSpPr>
+          <p:cNvPr id="6" name="Slide Number Placeholder 5">
+            <a:extLst>
+              <a:ext uri="{FF2B5EF4-FFF2-40B4-BE49-F238E27FC236}">
+                <a16:creationId xmlns:a16="http://schemas.microsoft.com/office/drawing/2014/main" id="{1AC1C125-E0EA-8BB4-A43E-4E1CCF0CDD89}"/>
+              </a:ext>
+            </a:extLst>
+          </p:cNvPr>
+          <p:cNvSpPr>
+            <a:spLocks noGrp="1"/>
+          </p:cNvSpPr>
+          <p:nvPr>
+            <p:ph type="sldNum" sz="quarter" idx="12"/>
+          </p:nvPr>
+        </p:nvSpPr>
+        <p:spPr/>
+        <p:txBody>
+          <a:bodyPr/>
+          <a:lstStyle/>
+          <a:p>
+            <a:fld id="{C41024BC-5968-4735-8D30-B72DEF6BE683}" type="slidenum">
+              <a:rPr lang="en-US" smtClean="0"/>
+              <a:t>‹#›</a:t>
+            </a:fld>
+            <a:endParaRPr lang="en-US"/>
+          </a:p>
+        </p:txBody>
+      </p:sp>
+    </p:spTree>
+    <p:extLst>
+      <p:ext uri="{BB962C8B-B14F-4D97-AF65-F5344CB8AC3E}">
+        <p14:creationId xmlns:p14="http://schemas.microsoft.com/office/powerpoint/2010/main" val="1660196810"/>
+      </p:ext>
+    </p:extLst>
+  </p:cSld>
+  <p:clrMapOvr>
+    <a:masterClrMapping/>
+  </p:clrMapOvr>
+</p:sldLayout>
+</file>
+
+<file path=ppt/slideLayouts/slideLayout12.xml><?xml version="1.0" encoding="utf-8"?>
+<p:sldLayout xmlns:a="http://schemas.openxmlformats.org/drawingml/2006/main" xmlns:r="http://schemas.openxmlformats.org/officeDocument/2006/relationships" xmlns:p="http://schemas.openxmlformats.org/presentationml/2006/main" type="title" preserve="1">
+  <p:cSld name="Title Slide">
+    <p:spTree>
+      <p:nvGrpSpPr>
+        <p:cNvPr id="1" name=""/>
+        <p:cNvGrpSpPr/>
+        <p:nvPr/>
+      </p:nvGrpSpPr>
+      <p:grpSpPr>
+        <a:xfrm>
+          <a:off x="0" y="0"/>
+          <a:ext cx="0" cy="0"/>
+          <a:chOff x="0" y="0"/>
+          <a:chExt cx="0" cy="0"/>
+        </a:xfrm>
+      </p:grpSpPr>
+      <p:sp>
+        <p:nvSpPr>
+          <p:cNvPr id="2" name="Title 1"/>
+          <p:cNvSpPr>
+            <a:spLocks noGrp="1"/>
+          </p:cNvSpPr>
+          <p:nvPr>
+            <p:ph type="ctrTitle"/>
+          </p:nvPr>
+        </p:nvSpPr>
+        <p:spPr>
+          <a:xfrm>
+            <a:off x="914400" y="2130426"/>
+            <a:ext cx="10363200" cy="1470025"/>
+          </a:xfrm>
+        </p:spPr>
+        <p:txBody>
+          <a:bodyPr/>
+          <a:lstStyle/>
+          <a:p>
             <a:pPr fontAlgn="base"/>
             <a:r>
               <a:rPr lang="en-US" strike="noStrike" noProof="1"/>
@@ -3693,56 +3011,119 @@
       </p:sp>
       <p:sp>
         <p:nvSpPr>
-          <p:cNvPr id="3" name="Vertical Text Placeholder 2"/>
-          <p:cNvSpPr>
-            <a:spLocks noGrp="1"/>
-          </p:cNvSpPr>
-          <p:nvPr>
-            <p:ph type="body" orient="vert" idx="1"/>
+          <p:cNvPr id="3" name="Subtitle 2"/>
+          <p:cNvSpPr>
+            <a:spLocks noGrp="1"/>
+          </p:cNvSpPr>
+          <p:nvPr>
+            <p:ph type="subTitle" idx="1"/>
           </p:nvPr>
         </p:nvSpPr>
         <p:spPr>
           <a:xfrm>
-            <a:off x="609600" y="274639"/>
-            <a:ext cx="8026400" cy="5851525"/>
+            <a:off x="1828800" y="3886200"/>
+            <a:ext cx="8534400" cy="1752600"/>
           </a:xfrm>
         </p:spPr>
         <p:txBody>
-          <a:bodyPr vert="eaVert"/>
-          <a:lstStyle/>
-          <a:p>
-            <a:pPr lvl="0" fontAlgn="base"/>
+          <a:bodyPr/>
+          <a:lstStyle>
+            <a:lvl1pPr marL="0" indent="0" algn="ctr">
+              <a:buNone/>
+              <a:defRPr>
+                <a:solidFill>
+                  <a:schemeClr val="tx1">
+                    <a:tint val="75000"/>
+                  </a:schemeClr>
+                </a:solidFill>
+              </a:defRPr>
+            </a:lvl1pPr>
+            <a:lvl2pPr marL="457200" indent="0" algn="ctr">
+              <a:buNone/>
+              <a:defRPr>
+                <a:solidFill>
+                  <a:schemeClr val="tx1">
+                    <a:tint val="75000"/>
+                  </a:schemeClr>
+                </a:solidFill>
+              </a:defRPr>
+            </a:lvl2pPr>
+            <a:lvl3pPr marL="914400" indent="0" algn="ctr">
+              <a:buNone/>
+              <a:defRPr>
+                <a:solidFill>
+                  <a:schemeClr val="tx1">
+                    <a:tint val="75000"/>
+                  </a:schemeClr>
+                </a:solidFill>
+              </a:defRPr>
+            </a:lvl3pPr>
+            <a:lvl4pPr marL="1371600" indent="0" algn="ctr">
+              <a:buNone/>
+              <a:defRPr>
+                <a:solidFill>
+                  <a:schemeClr val="tx1">
+                    <a:tint val="75000"/>
+                  </a:schemeClr>
+                </a:solidFill>
+              </a:defRPr>
+            </a:lvl4pPr>
+            <a:lvl5pPr marL="1828800" indent="0" algn="ctr">
+              <a:buNone/>
+              <a:defRPr>
+                <a:solidFill>
+                  <a:schemeClr val="tx1">
+                    <a:tint val="75000"/>
+                  </a:schemeClr>
+                </a:solidFill>
+              </a:defRPr>
+            </a:lvl5pPr>
+            <a:lvl6pPr marL="2286000" indent="0" algn="ctr">
+              <a:buNone/>
+              <a:defRPr>
+                <a:solidFill>
+                  <a:schemeClr val="tx1">
+                    <a:tint val="75000"/>
+                  </a:schemeClr>
+                </a:solidFill>
+              </a:defRPr>
+            </a:lvl6pPr>
+            <a:lvl7pPr marL="2743200" indent="0" algn="ctr">
+              <a:buNone/>
+              <a:defRPr>
+                <a:solidFill>
+                  <a:schemeClr val="tx1">
+                    <a:tint val="75000"/>
+                  </a:schemeClr>
+                </a:solidFill>
+              </a:defRPr>
+            </a:lvl7pPr>
+            <a:lvl8pPr marL="3200400" indent="0" algn="ctr">
+              <a:buNone/>
+              <a:defRPr>
+                <a:solidFill>
+                  <a:schemeClr val="tx1">
+                    <a:tint val="75000"/>
+                  </a:schemeClr>
+                </a:solidFill>
+              </a:defRPr>
+            </a:lvl8pPr>
+            <a:lvl9pPr marL="3657600" indent="0" algn="ctr">
+              <a:buNone/>
+              <a:defRPr>
+                <a:solidFill>
+                  <a:schemeClr val="tx1">
+                    <a:tint val="75000"/>
+                  </a:schemeClr>
+                </a:solidFill>
+              </a:defRPr>
+            </a:lvl9pPr>
+          </a:lstStyle>
+          <a:p>
+            <a:pPr fontAlgn="base"/>
             <a:r>
               <a:rPr lang="en-US" strike="noStrike" noProof="1"/>
-              <a:t>Click to edit Master text styles</a:t>
-            </a:r>
-          </a:p>
-          <a:p>
-            <a:pPr lvl="1" fontAlgn="base"/>
-            <a:r>
-              <a:rPr lang="en-US" strike="noStrike" noProof="1"/>
-              <a:t>Second level</a:t>
-            </a:r>
-          </a:p>
-          <a:p>
-            <a:pPr lvl="2" fontAlgn="base"/>
-            <a:r>
-              <a:rPr lang="en-US" strike="noStrike" noProof="1"/>
-              <a:t>Third level</a:t>
-            </a:r>
-          </a:p>
-          <a:p>
-            <a:pPr lvl="3" fontAlgn="base"/>
-            <a:r>
-              <a:rPr lang="en-US" strike="noStrike" noProof="1"/>
-              <a:t>Fourth level</a:t>
-            </a:r>
-          </a:p>
-          <a:p>
-            <a:pPr lvl="4" fontAlgn="base"/>
-            <a:r>
-              <a:rPr lang="en-US" strike="noStrike" noProof="1"/>
-              <a:t>Fifth level</a:t>
+              <a:t>Click to edit Master subtitle style</a:t>
             </a:r>
           </a:p>
         </p:txBody>
@@ -3771,7 +3152,7 @@
               </a:spcAft>
               <a:defRPr/>
             </a:pPr>
-            <a:fld id="{A6E4A193-398A-4DA3-ABE0-39035D81DE08}" type="datetime1">
+            <a:fld id="{74E860EC-E542-457A-B70C-3F9F24F46ECA}" type="datetime1">
               <a:rPr lang="en-US" smtClean="0">
                 <a:ea typeface="MS PGothic" panose="020B0600070205080204" pitchFamily="34" charset="-128"/>
               </a:rPr>
@@ -3784,7 +3165,7 @@
                 </a:spcAft>
                 <a:defRPr/>
               </a:pPr>
-              <a:t>10/7/2026</a:t>
+              <a:t>9/15/2025</a:t>
             </a:fld>
             <a:endParaRPr lang="en-US">
               <a:ea typeface="MS PGothic" panose="020B0600070205080204" pitchFamily="34" charset="-128"/>
@@ -3862,7 +3243,7 @@
     </p:spTree>
     <p:extLst>
       <p:ext uri="{BB962C8B-B14F-4D97-AF65-F5344CB8AC3E}">
-        <p14:creationId xmlns:p14="http://schemas.microsoft.com/office/powerpoint/2010/main" val="2404527788"/>
+        <p14:creationId xmlns:p14="http://schemas.microsoft.com/office/powerpoint/2010/main" val="448339023"/>
       </p:ext>
     </p:extLst>
   </p:cSld>
@@ -3872,7 +3253,7 @@
 </p:sldLayout>
 </file>
 
-<file path=ppt/slideLayouts/slideLayout2.xml><?xml version="1.0" encoding="utf-8"?>
+<file path=ppt/slideLayouts/slideLayout13.xml><?xml version="1.0" encoding="utf-8"?>
 <p:sldLayout xmlns:a="http://schemas.openxmlformats.org/drawingml/2006/main" xmlns:r="http://schemas.openxmlformats.org/officeDocument/2006/relationships" xmlns:p="http://schemas.openxmlformats.org/presentationml/2006/main" type="obj" preserve="1">
   <p:cSld name="Title and Content">
     <p:spTree>
@@ -4000,7 +3381,7 @@
                 </a:spcAft>
                 <a:defRPr/>
               </a:pPr>
-              <a:t>10/7/2026</a:t>
+              <a:t>9/15/2025</a:t>
             </a:fld>
             <a:endParaRPr lang="en-US">
               <a:ea typeface="MS PGothic" panose="020B0600070205080204" pitchFamily="34" charset="-128"/>
@@ -4088,7 +3469,7 @@
 </p:sldLayout>
 </file>
 
-<file path=ppt/slideLayouts/slideLayout3.xml><?xml version="1.0" encoding="utf-8"?>
+<file path=ppt/slideLayouts/slideLayout14.xml><?xml version="1.0" encoding="utf-8"?>
 <p:sldLayout xmlns:a="http://schemas.openxmlformats.org/drawingml/2006/main" xmlns:r="http://schemas.openxmlformats.org/officeDocument/2006/relationships" xmlns:p="http://schemas.openxmlformats.org/presentationml/2006/main" type="secHead" preserve="1">
   <p:cSld name="Section Header">
     <p:spTree>
@@ -4293,7 +3674,7 @@
                 </a:spcAft>
                 <a:defRPr/>
               </a:pPr>
-              <a:t>10/7/2026</a:t>
+              <a:t>9/15/2025</a:t>
             </a:fld>
             <a:endParaRPr lang="en-US">
               <a:ea typeface="MS PGothic" panose="020B0600070205080204" pitchFamily="34" charset="-128"/>
@@ -4381,7 +3762,7 @@
 </p:sldLayout>
 </file>
 
-<file path=ppt/slideLayouts/slideLayout4.xml><?xml version="1.0" encoding="utf-8"?>
+<file path=ppt/slideLayouts/slideLayout15.xml><?xml version="1.0" encoding="utf-8"?>
 <p:sldLayout xmlns:a="http://schemas.openxmlformats.org/drawingml/2006/main" xmlns:r="http://schemas.openxmlformats.org/officeDocument/2006/relationships" xmlns:p="http://schemas.openxmlformats.org/presentationml/2006/main" type="twoObj" preserve="1">
   <p:cSld name="Two Content">
     <p:spTree>
@@ -4626,7 +4007,7 @@
                 </a:spcAft>
                 <a:defRPr/>
               </a:pPr>
-              <a:t>10/7/2026</a:t>
+              <a:t>9/15/2025</a:t>
             </a:fld>
             <a:endParaRPr lang="en-US">
               <a:ea typeface="MS PGothic" panose="020B0600070205080204" pitchFamily="34" charset="-128"/>
@@ -4714,7 +4095,7 @@
 </p:sldLayout>
 </file>
 
-<file path=ppt/slideLayouts/slideLayout5.xml><?xml version="1.0" encoding="utf-8"?>
+<file path=ppt/slideLayouts/slideLayout16.xml><?xml version="1.0" encoding="utf-8"?>
 <p:sldLayout xmlns:a="http://schemas.openxmlformats.org/drawingml/2006/main" xmlns:r="http://schemas.openxmlformats.org/officeDocument/2006/relationships" xmlns:p="http://schemas.openxmlformats.org/presentationml/2006/main" type="twoTxTwoObj" preserve="1">
   <p:cSld name="Comparison">
     <p:spTree>
@@ -5093,7 +4474,7 @@
                 </a:spcAft>
                 <a:defRPr/>
               </a:pPr>
-              <a:t>10/7/2026</a:t>
+              <a:t>9/15/2025</a:t>
             </a:fld>
             <a:endParaRPr lang="en-US">
               <a:ea typeface="MS PGothic" panose="020B0600070205080204" pitchFamily="34" charset="-128"/>
@@ -5181,7 +4562,7 @@
 </p:sldLayout>
 </file>
 
-<file path=ppt/slideLayouts/slideLayout6.xml><?xml version="1.0" encoding="utf-8"?>
+<file path=ppt/slideLayouts/slideLayout17.xml><?xml version="1.0" encoding="utf-8"?>
 <p:sldLayout xmlns:a="http://schemas.openxmlformats.org/drawingml/2006/main" xmlns:r="http://schemas.openxmlformats.org/officeDocument/2006/relationships" xmlns:p="http://schemas.openxmlformats.org/presentationml/2006/main" type="titleOnly" preserve="1">
   <p:cSld name="Title Only">
     <p:spTree>
@@ -5258,7 +4639,7 @@
                 </a:spcAft>
                 <a:defRPr/>
               </a:pPr>
-              <a:t>10/7/2026</a:t>
+              <a:t>9/15/2025</a:t>
             </a:fld>
             <a:endParaRPr lang="en-US">
               <a:ea typeface="MS PGothic" panose="020B0600070205080204" pitchFamily="34" charset="-128"/>
@@ -5346,7 +4727,7 @@
 </p:sldLayout>
 </file>
 
-<file path=ppt/slideLayouts/slideLayout7.xml><?xml version="1.0" encoding="utf-8"?>
+<file path=ppt/slideLayouts/slideLayout18.xml><?xml version="1.0" encoding="utf-8"?>
 <p:sldLayout xmlns:a="http://schemas.openxmlformats.org/drawingml/2006/main" xmlns:r="http://schemas.openxmlformats.org/officeDocument/2006/relationships" xmlns:p="http://schemas.openxmlformats.org/presentationml/2006/main" type="blank" preserve="1">
   <p:cSld name="Blank">
     <p:spTree>
@@ -5400,7 +4781,7 @@
                 </a:spcAft>
                 <a:defRPr/>
               </a:pPr>
-              <a:t>10/7/2026</a:t>
+              <a:t>9/15/2025</a:t>
             </a:fld>
             <a:endParaRPr lang="en-US">
               <a:ea typeface="MS PGothic" panose="020B0600070205080204" pitchFamily="34" charset="-128"/>
@@ -5488,7 +4869,7 @@
 </p:sldLayout>
 </file>
 
-<file path=ppt/slideLayouts/slideLayout8.xml><?xml version="1.0" encoding="utf-8"?>
+<file path=ppt/slideLayouts/slideLayout19.xml><?xml version="1.0" encoding="utf-8"?>
 <p:sldLayout xmlns:a="http://schemas.openxmlformats.org/drawingml/2006/main" xmlns:r="http://schemas.openxmlformats.org/officeDocument/2006/relationships" xmlns:p="http://schemas.openxmlformats.org/presentationml/2006/main" type="objTx" preserve="1">
   <p:cSld name="Content with Caption">
     <p:spTree>
@@ -5723,7 +5104,7 @@
                 </a:spcAft>
                 <a:defRPr/>
               </a:pPr>
-              <a:t>10/7/2026</a:t>
+              <a:t>9/15/2025</a:t>
             </a:fld>
             <a:endParaRPr lang="en-US">
               <a:ea typeface="MS PGothic" panose="020B0600070205080204" pitchFamily="34" charset="-128"/>
@@ -5811,7 +5192,205 @@
 </p:sldLayout>
 </file>
 
-<file path=ppt/slideLayouts/slideLayout9.xml><?xml version="1.0" encoding="utf-8"?>
+<file path=ppt/slideLayouts/slideLayout2.xml><?xml version="1.0" encoding="utf-8"?>
+<p:sldLayout xmlns:a="http://schemas.openxmlformats.org/drawingml/2006/main" xmlns:r="http://schemas.openxmlformats.org/officeDocument/2006/relationships" xmlns:p="http://schemas.openxmlformats.org/presentationml/2006/main" type="obj" preserve="1">
+  <p:cSld name="Title and Content">
+    <p:spTree>
+      <p:nvGrpSpPr>
+        <p:cNvPr id="1" name=""/>
+        <p:cNvGrpSpPr/>
+        <p:nvPr/>
+      </p:nvGrpSpPr>
+      <p:grpSpPr>
+        <a:xfrm>
+          <a:off x="0" y="0"/>
+          <a:ext cx="0" cy="0"/>
+          <a:chOff x="0" y="0"/>
+          <a:chExt cx="0" cy="0"/>
+        </a:xfrm>
+      </p:grpSpPr>
+      <p:sp>
+        <p:nvSpPr>
+          <p:cNvPr id="2" name="Title 1">
+            <a:extLst>
+              <a:ext uri="{FF2B5EF4-FFF2-40B4-BE49-F238E27FC236}">
+                <a16:creationId xmlns:a16="http://schemas.microsoft.com/office/drawing/2014/main" id="{32F58BDB-9BFB-33BD-36E2-CB774FA50718}"/>
+              </a:ext>
+            </a:extLst>
+          </p:cNvPr>
+          <p:cNvSpPr>
+            <a:spLocks noGrp="1"/>
+          </p:cNvSpPr>
+          <p:nvPr>
+            <p:ph type="title"/>
+          </p:nvPr>
+        </p:nvSpPr>
+        <p:spPr/>
+        <p:txBody>
+          <a:bodyPr/>
+          <a:lstStyle/>
+          <a:p>
+            <a:r>
+              <a:rPr lang="en-US"/>
+              <a:t>Click to edit Master title style</a:t>
+            </a:r>
+          </a:p>
+        </p:txBody>
+      </p:sp>
+      <p:sp>
+        <p:nvSpPr>
+          <p:cNvPr id="3" name="Content Placeholder 2">
+            <a:extLst>
+              <a:ext uri="{FF2B5EF4-FFF2-40B4-BE49-F238E27FC236}">
+                <a16:creationId xmlns:a16="http://schemas.microsoft.com/office/drawing/2014/main" id="{EC0EBEC1-929D-A242-6F90-1148AB735D40}"/>
+              </a:ext>
+            </a:extLst>
+          </p:cNvPr>
+          <p:cNvSpPr>
+            <a:spLocks noGrp="1"/>
+          </p:cNvSpPr>
+          <p:nvPr>
+            <p:ph idx="1"/>
+          </p:nvPr>
+        </p:nvSpPr>
+        <p:spPr/>
+        <p:txBody>
+          <a:bodyPr/>
+          <a:lstStyle/>
+          <a:p>
+            <a:pPr lvl="0"/>
+            <a:r>
+              <a:rPr lang="en-US"/>
+              <a:t>Click to edit Master text styles</a:t>
+            </a:r>
+          </a:p>
+          <a:p>
+            <a:pPr lvl="1"/>
+            <a:r>
+              <a:rPr lang="en-US"/>
+              <a:t>Second level</a:t>
+            </a:r>
+          </a:p>
+          <a:p>
+            <a:pPr lvl="2"/>
+            <a:r>
+              <a:rPr lang="en-US"/>
+              <a:t>Third level</a:t>
+            </a:r>
+          </a:p>
+          <a:p>
+            <a:pPr lvl="3"/>
+            <a:r>
+              <a:rPr lang="en-US"/>
+              <a:t>Fourth level</a:t>
+            </a:r>
+          </a:p>
+          <a:p>
+            <a:pPr lvl="4"/>
+            <a:r>
+              <a:rPr lang="en-US"/>
+              <a:t>Fifth level</a:t>
+            </a:r>
+          </a:p>
+        </p:txBody>
+      </p:sp>
+      <p:sp>
+        <p:nvSpPr>
+          <p:cNvPr id="4" name="Date Placeholder 3">
+            <a:extLst>
+              <a:ext uri="{FF2B5EF4-FFF2-40B4-BE49-F238E27FC236}">
+                <a16:creationId xmlns:a16="http://schemas.microsoft.com/office/drawing/2014/main" id="{E27C69D1-F584-0904-FC78-1845E1CE9CB1}"/>
+              </a:ext>
+            </a:extLst>
+          </p:cNvPr>
+          <p:cNvSpPr>
+            <a:spLocks noGrp="1"/>
+          </p:cNvSpPr>
+          <p:nvPr>
+            <p:ph type="dt" sz="half" idx="10"/>
+          </p:nvPr>
+        </p:nvSpPr>
+        <p:spPr/>
+        <p:txBody>
+          <a:bodyPr/>
+          <a:lstStyle/>
+          <a:p>
+            <a:fld id="{F10901DB-E840-4150-8207-866BDD25D22F}" type="datetimeFigureOut">
+              <a:rPr lang="en-US" smtClean="0"/>
+              <a:t>9/15/2025</a:t>
+            </a:fld>
+            <a:endParaRPr lang="en-US"/>
+          </a:p>
+        </p:txBody>
+      </p:sp>
+      <p:sp>
+        <p:nvSpPr>
+          <p:cNvPr id="5" name="Footer Placeholder 4">
+            <a:extLst>
+              <a:ext uri="{FF2B5EF4-FFF2-40B4-BE49-F238E27FC236}">
+                <a16:creationId xmlns:a16="http://schemas.microsoft.com/office/drawing/2014/main" id="{C06E6342-5ECF-1C98-5658-39498D805F46}"/>
+              </a:ext>
+            </a:extLst>
+          </p:cNvPr>
+          <p:cNvSpPr>
+            <a:spLocks noGrp="1"/>
+          </p:cNvSpPr>
+          <p:nvPr>
+            <p:ph type="ftr" sz="quarter" idx="11"/>
+          </p:nvPr>
+        </p:nvSpPr>
+        <p:spPr/>
+        <p:txBody>
+          <a:bodyPr/>
+          <a:lstStyle/>
+          <a:p>
+            <a:endParaRPr lang="en-US"/>
+          </a:p>
+        </p:txBody>
+      </p:sp>
+      <p:sp>
+        <p:nvSpPr>
+          <p:cNvPr id="6" name="Slide Number Placeholder 5">
+            <a:extLst>
+              <a:ext uri="{FF2B5EF4-FFF2-40B4-BE49-F238E27FC236}">
+                <a16:creationId xmlns:a16="http://schemas.microsoft.com/office/drawing/2014/main" id="{742FAC61-7EF5-A0A9-7407-77FCBC604580}"/>
+              </a:ext>
+            </a:extLst>
+          </p:cNvPr>
+          <p:cNvSpPr>
+            <a:spLocks noGrp="1"/>
+          </p:cNvSpPr>
+          <p:nvPr>
+            <p:ph type="sldNum" sz="quarter" idx="12"/>
+          </p:nvPr>
+        </p:nvSpPr>
+        <p:spPr/>
+        <p:txBody>
+          <a:bodyPr/>
+          <a:lstStyle/>
+          <a:p>
+            <a:fld id="{C41024BC-5968-4735-8D30-B72DEF6BE683}" type="slidenum">
+              <a:rPr lang="en-US" smtClean="0"/>
+              <a:t>‹#›</a:t>
+            </a:fld>
+            <a:endParaRPr lang="en-US"/>
+          </a:p>
+        </p:txBody>
+      </p:sp>
+    </p:spTree>
+    <p:extLst>
+      <p:ext uri="{BB962C8B-B14F-4D97-AF65-F5344CB8AC3E}">
+        <p14:creationId xmlns:p14="http://schemas.microsoft.com/office/powerpoint/2010/main" val="653090158"/>
+      </p:ext>
+    </p:extLst>
+  </p:cSld>
+  <p:clrMapOvr>
+    <a:masterClrMapping/>
+  </p:clrMapOvr>
+</p:sldLayout>
+</file>
+
+<file path=ppt/slideLayouts/slideLayout20.xml><?xml version="1.0" encoding="utf-8"?>
 <p:sldLayout xmlns:a="http://schemas.openxmlformats.org/drawingml/2006/main" xmlns:r="http://schemas.openxmlformats.org/officeDocument/2006/relationships" xmlns:p="http://schemas.openxmlformats.org/presentationml/2006/main" type="picTx" preserve="1">
   <p:cSld name="Picture with Caption">
     <p:spTree>
@@ -6054,7 +5633,7 @@
                 </a:spcAft>
                 <a:defRPr/>
               </a:pPr>
-              <a:t>10/7/2026</a:t>
+              <a:t>9/15/2025</a:t>
             </a:fld>
             <a:endParaRPr lang="en-US">
               <a:ea typeface="MS PGothic" panose="020B0600070205080204" pitchFamily="34" charset="-128"/>
@@ -6142,7 +5721,2822 @@
 </p:sldLayout>
 </file>
 
+<file path=ppt/slideLayouts/slideLayout21.xml><?xml version="1.0" encoding="utf-8"?>
+<p:sldLayout xmlns:a="http://schemas.openxmlformats.org/drawingml/2006/main" xmlns:r="http://schemas.openxmlformats.org/officeDocument/2006/relationships" xmlns:p="http://schemas.openxmlformats.org/presentationml/2006/main" type="vertTx" preserve="1">
+  <p:cSld name="Title and Vertical Text">
+    <p:spTree>
+      <p:nvGrpSpPr>
+        <p:cNvPr id="1" name=""/>
+        <p:cNvGrpSpPr/>
+        <p:nvPr/>
+      </p:nvGrpSpPr>
+      <p:grpSpPr>
+        <a:xfrm>
+          <a:off x="0" y="0"/>
+          <a:ext cx="0" cy="0"/>
+          <a:chOff x="0" y="0"/>
+          <a:chExt cx="0" cy="0"/>
+        </a:xfrm>
+      </p:grpSpPr>
+      <p:sp>
+        <p:nvSpPr>
+          <p:cNvPr id="2" name="Title 1"/>
+          <p:cNvSpPr>
+            <a:spLocks noGrp="1"/>
+          </p:cNvSpPr>
+          <p:nvPr>
+            <p:ph type="title"/>
+          </p:nvPr>
+        </p:nvSpPr>
+        <p:spPr/>
+        <p:txBody>
+          <a:bodyPr/>
+          <a:lstStyle/>
+          <a:p>
+            <a:pPr fontAlgn="base"/>
+            <a:r>
+              <a:rPr lang="en-US" strike="noStrike" noProof="1"/>
+              <a:t>Click to edit Master title style</a:t>
+            </a:r>
+          </a:p>
+        </p:txBody>
+      </p:sp>
+      <p:sp>
+        <p:nvSpPr>
+          <p:cNvPr id="3" name="Vertical Text Placeholder 2"/>
+          <p:cNvSpPr>
+            <a:spLocks noGrp="1"/>
+          </p:cNvSpPr>
+          <p:nvPr>
+            <p:ph type="body" orient="vert" idx="1"/>
+          </p:nvPr>
+        </p:nvSpPr>
+        <p:spPr/>
+        <p:txBody>
+          <a:bodyPr vert="eaVert"/>
+          <a:lstStyle/>
+          <a:p>
+            <a:pPr lvl="0" fontAlgn="base"/>
+            <a:r>
+              <a:rPr lang="en-US" strike="noStrike" noProof="1"/>
+              <a:t>Click to edit Master text styles</a:t>
+            </a:r>
+          </a:p>
+          <a:p>
+            <a:pPr lvl="1" fontAlgn="base"/>
+            <a:r>
+              <a:rPr lang="en-US" strike="noStrike" noProof="1"/>
+              <a:t>Second level</a:t>
+            </a:r>
+          </a:p>
+          <a:p>
+            <a:pPr lvl="2" fontAlgn="base"/>
+            <a:r>
+              <a:rPr lang="en-US" strike="noStrike" noProof="1"/>
+              <a:t>Third level</a:t>
+            </a:r>
+          </a:p>
+          <a:p>
+            <a:pPr lvl="3" fontAlgn="base"/>
+            <a:r>
+              <a:rPr lang="en-US" strike="noStrike" noProof="1"/>
+              <a:t>Fourth level</a:t>
+            </a:r>
+          </a:p>
+          <a:p>
+            <a:pPr lvl="4" fontAlgn="base"/>
+            <a:r>
+              <a:rPr lang="en-US" strike="noStrike" noProof="1"/>
+              <a:t>Fifth level</a:t>
+            </a:r>
+          </a:p>
+        </p:txBody>
+      </p:sp>
+      <p:sp>
+        <p:nvSpPr>
+          <p:cNvPr id="4" name="Date Placeholder 3"/>
+          <p:cNvSpPr>
+            <a:spLocks noGrp="1"/>
+          </p:cNvSpPr>
+          <p:nvPr>
+            <p:ph type="dt" sz="half" idx="10"/>
+          </p:nvPr>
+        </p:nvSpPr>
+        <p:spPr/>
+        <p:txBody>
+          <a:bodyPr/>
+          <a:lstStyle/>
+          <a:p>
+            <a:pPr fontAlgn="base">
+              <a:spcBef>
+                <a:spcPct val="0"/>
+              </a:spcBef>
+              <a:spcAft>
+                <a:spcPct val="0"/>
+              </a:spcAft>
+              <a:defRPr/>
+            </a:pPr>
+            <a:fld id="{A7F2A97E-5CE7-416F-AB2B-5750179EE4FB}" type="datetime1">
+              <a:rPr lang="en-US" smtClean="0">
+                <a:ea typeface="MS PGothic" panose="020B0600070205080204" pitchFamily="34" charset="-128"/>
+              </a:rPr>
+              <a:pPr fontAlgn="base">
+                <a:spcBef>
+                  <a:spcPct val="0"/>
+                </a:spcBef>
+                <a:spcAft>
+                  <a:spcPct val="0"/>
+                </a:spcAft>
+                <a:defRPr/>
+              </a:pPr>
+              <a:t>9/15/2025</a:t>
+            </a:fld>
+            <a:endParaRPr lang="en-US">
+              <a:ea typeface="MS PGothic" panose="020B0600070205080204" pitchFamily="34" charset="-128"/>
+            </a:endParaRPr>
+          </a:p>
+        </p:txBody>
+      </p:sp>
+      <p:sp>
+        <p:nvSpPr>
+          <p:cNvPr id="5" name="Footer Placeholder 4"/>
+          <p:cNvSpPr>
+            <a:spLocks noGrp="1"/>
+          </p:cNvSpPr>
+          <p:nvPr>
+            <p:ph type="ftr" sz="quarter" idx="11"/>
+          </p:nvPr>
+        </p:nvSpPr>
+        <p:spPr/>
+        <p:txBody>
+          <a:bodyPr/>
+          <a:lstStyle/>
+          <a:p>
+            <a:pPr>
+              <a:defRPr/>
+            </a:pPr>
+            <a:endParaRPr lang="en-US"/>
+          </a:p>
+        </p:txBody>
+      </p:sp>
+      <p:sp>
+        <p:nvSpPr>
+          <p:cNvPr id="6" name="Slide Number Placeholder 5"/>
+          <p:cNvSpPr>
+            <a:spLocks noGrp="1"/>
+          </p:cNvSpPr>
+          <p:nvPr>
+            <p:ph type="sldNum" sz="quarter" idx="12"/>
+          </p:nvPr>
+        </p:nvSpPr>
+        <p:spPr/>
+        <p:txBody>
+          <a:bodyPr/>
+          <a:lstStyle/>
+          <a:p>
+            <a:pPr fontAlgn="base">
+              <a:spcBef>
+                <a:spcPct val="0"/>
+              </a:spcBef>
+              <a:spcAft>
+                <a:spcPct val="0"/>
+              </a:spcAft>
+              <a:defRPr/>
+            </a:pPr>
+            <a:fld id="{B724CBE9-E6DE-4AAC-8453-7697DD7A6035}" type="slidenum">
+              <a:rPr lang="en-US" altLang="en-US" smtClean="0">
+                <a:ea typeface="MS PGothic" panose="020B0600070205080204" pitchFamily="34" charset="-128"/>
+              </a:rPr>
+              <a:pPr fontAlgn="base">
+                <a:spcBef>
+                  <a:spcPct val="0"/>
+                </a:spcBef>
+                <a:spcAft>
+                  <a:spcPct val="0"/>
+                </a:spcAft>
+                <a:defRPr/>
+              </a:pPr>
+              <a:t>‹#›</a:t>
+            </a:fld>
+            <a:endParaRPr lang="en-US" altLang="en-US">
+              <a:ea typeface="MS PGothic" panose="020B0600070205080204" pitchFamily="34" charset="-128"/>
+            </a:endParaRPr>
+          </a:p>
+        </p:txBody>
+      </p:sp>
+    </p:spTree>
+    <p:extLst>
+      <p:ext uri="{BB962C8B-B14F-4D97-AF65-F5344CB8AC3E}">
+        <p14:creationId xmlns:p14="http://schemas.microsoft.com/office/powerpoint/2010/main" val="2860712770"/>
+      </p:ext>
+    </p:extLst>
+  </p:cSld>
+  <p:clrMapOvr>
+    <a:masterClrMapping/>
+  </p:clrMapOvr>
+</p:sldLayout>
+</file>
+
+<file path=ppt/slideLayouts/slideLayout22.xml><?xml version="1.0" encoding="utf-8"?>
+<p:sldLayout xmlns:a="http://schemas.openxmlformats.org/drawingml/2006/main" xmlns:r="http://schemas.openxmlformats.org/officeDocument/2006/relationships" xmlns:p="http://schemas.openxmlformats.org/presentationml/2006/main" type="vertTitleAndTx" preserve="1">
+  <p:cSld name="Vertical Title and Text">
+    <p:spTree>
+      <p:nvGrpSpPr>
+        <p:cNvPr id="1" name=""/>
+        <p:cNvGrpSpPr/>
+        <p:nvPr/>
+      </p:nvGrpSpPr>
+      <p:grpSpPr>
+        <a:xfrm>
+          <a:off x="0" y="0"/>
+          <a:ext cx="0" cy="0"/>
+          <a:chOff x="0" y="0"/>
+          <a:chExt cx="0" cy="0"/>
+        </a:xfrm>
+      </p:grpSpPr>
+      <p:sp>
+        <p:nvSpPr>
+          <p:cNvPr id="2" name="Vertical Title 1"/>
+          <p:cNvSpPr>
+            <a:spLocks noGrp="1"/>
+          </p:cNvSpPr>
+          <p:nvPr>
+            <p:ph type="title" orient="vert"/>
+          </p:nvPr>
+        </p:nvSpPr>
+        <p:spPr>
+          <a:xfrm>
+            <a:off x="8839200" y="274639"/>
+            <a:ext cx="2743200" cy="5851525"/>
+          </a:xfrm>
+        </p:spPr>
+        <p:txBody>
+          <a:bodyPr vert="eaVert"/>
+          <a:lstStyle/>
+          <a:p>
+            <a:pPr fontAlgn="base"/>
+            <a:r>
+              <a:rPr lang="en-US" strike="noStrike" noProof="1"/>
+              <a:t>Click to edit Master title style</a:t>
+            </a:r>
+          </a:p>
+        </p:txBody>
+      </p:sp>
+      <p:sp>
+        <p:nvSpPr>
+          <p:cNvPr id="3" name="Vertical Text Placeholder 2"/>
+          <p:cNvSpPr>
+            <a:spLocks noGrp="1"/>
+          </p:cNvSpPr>
+          <p:nvPr>
+            <p:ph type="body" orient="vert" idx="1"/>
+          </p:nvPr>
+        </p:nvSpPr>
+        <p:spPr>
+          <a:xfrm>
+            <a:off x="609600" y="274639"/>
+            <a:ext cx="8026400" cy="5851525"/>
+          </a:xfrm>
+        </p:spPr>
+        <p:txBody>
+          <a:bodyPr vert="eaVert"/>
+          <a:lstStyle/>
+          <a:p>
+            <a:pPr lvl="0" fontAlgn="base"/>
+            <a:r>
+              <a:rPr lang="en-US" strike="noStrike" noProof="1"/>
+              <a:t>Click to edit Master text styles</a:t>
+            </a:r>
+          </a:p>
+          <a:p>
+            <a:pPr lvl="1" fontAlgn="base"/>
+            <a:r>
+              <a:rPr lang="en-US" strike="noStrike" noProof="1"/>
+              <a:t>Second level</a:t>
+            </a:r>
+          </a:p>
+          <a:p>
+            <a:pPr lvl="2" fontAlgn="base"/>
+            <a:r>
+              <a:rPr lang="en-US" strike="noStrike" noProof="1"/>
+              <a:t>Third level</a:t>
+            </a:r>
+          </a:p>
+          <a:p>
+            <a:pPr lvl="3" fontAlgn="base"/>
+            <a:r>
+              <a:rPr lang="en-US" strike="noStrike" noProof="1"/>
+              <a:t>Fourth level</a:t>
+            </a:r>
+          </a:p>
+          <a:p>
+            <a:pPr lvl="4" fontAlgn="base"/>
+            <a:r>
+              <a:rPr lang="en-US" strike="noStrike" noProof="1"/>
+              <a:t>Fifth level</a:t>
+            </a:r>
+          </a:p>
+        </p:txBody>
+      </p:sp>
+      <p:sp>
+        <p:nvSpPr>
+          <p:cNvPr id="4" name="Date Placeholder 3"/>
+          <p:cNvSpPr>
+            <a:spLocks noGrp="1"/>
+          </p:cNvSpPr>
+          <p:nvPr>
+            <p:ph type="dt" sz="half" idx="10"/>
+          </p:nvPr>
+        </p:nvSpPr>
+        <p:spPr/>
+        <p:txBody>
+          <a:bodyPr/>
+          <a:lstStyle/>
+          <a:p>
+            <a:pPr fontAlgn="base">
+              <a:spcBef>
+                <a:spcPct val="0"/>
+              </a:spcBef>
+              <a:spcAft>
+                <a:spcPct val="0"/>
+              </a:spcAft>
+              <a:defRPr/>
+            </a:pPr>
+            <a:fld id="{A6E4A193-398A-4DA3-ABE0-39035D81DE08}" type="datetime1">
+              <a:rPr lang="en-US" smtClean="0">
+                <a:ea typeface="MS PGothic" panose="020B0600070205080204" pitchFamily="34" charset="-128"/>
+              </a:rPr>
+              <a:pPr fontAlgn="base">
+                <a:spcBef>
+                  <a:spcPct val="0"/>
+                </a:spcBef>
+                <a:spcAft>
+                  <a:spcPct val="0"/>
+                </a:spcAft>
+                <a:defRPr/>
+              </a:pPr>
+              <a:t>9/15/2025</a:t>
+            </a:fld>
+            <a:endParaRPr lang="en-US">
+              <a:ea typeface="MS PGothic" panose="020B0600070205080204" pitchFamily="34" charset="-128"/>
+            </a:endParaRPr>
+          </a:p>
+        </p:txBody>
+      </p:sp>
+      <p:sp>
+        <p:nvSpPr>
+          <p:cNvPr id="5" name="Footer Placeholder 4"/>
+          <p:cNvSpPr>
+            <a:spLocks noGrp="1"/>
+          </p:cNvSpPr>
+          <p:nvPr>
+            <p:ph type="ftr" sz="quarter" idx="11"/>
+          </p:nvPr>
+        </p:nvSpPr>
+        <p:spPr/>
+        <p:txBody>
+          <a:bodyPr/>
+          <a:lstStyle/>
+          <a:p>
+            <a:pPr>
+              <a:defRPr/>
+            </a:pPr>
+            <a:endParaRPr lang="en-US"/>
+          </a:p>
+        </p:txBody>
+      </p:sp>
+      <p:sp>
+        <p:nvSpPr>
+          <p:cNvPr id="6" name="Slide Number Placeholder 5"/>
+          <p:cNvSpPr>
+            <a:spLocks noGrp="1"/>
+          </p:cNvSpPr>
+          <p:nvPr>
+            <p:ph type="sldNum" sz="quarter" idx="12"/>
+          </p:nvPr>
+        </p:nvSpPr>
+        <p:spPr/>
+        <p:txBody>
+          <a:bodyPr/>
+          <a:lstStyle/>
+          <a:p>
+            <a:pPr fontAlgn="base">
+              <a:spcBef>
+                <a:spcPct val="0"/>
+              </a:spcBef>
+              <a:spcAft>
+                <a:spcPct val="0"/>
+              </a:spcAft>
+              <a:defRPr/>
+            </a:pPr>
+            <a:fld id="{B724CBE9-E6DE-4AAC-8453-7697DD7A6035}" type="slidenum">
+              <a:rPr lang="en-US" altLang="en-US" smtClean="0">
+                <a:ea typeface="MS PGothic" panose="020B0600070205080204" pitchFamily="34" charset="-128"/>
+              </a:rPr>
+              <a:pPr fontAlgn="base">
+                <a:spcBef>
+                  <a:spcPct val="0"/>
+                </a:spcBef>
+                <a:spcAft>
+                  <a:spcPct val="0"/>
+                </a:spcAft>
+                <a:defRPr/>
+              </a:pPr>
+              <a:t>‹#›</a:t>
+            </a:fld>
+            <a:endParaRPr lang="en-US" altLang="en-US">
+              <a:ea typeface="MS PGothic" panose="020B0600070205080204" pitchFamily="34" charset="-128"/>
+            </a:endParaRPr>
+          </a:p>
+        </p:txBody>
+      </p:sp>
+    </p:spTree>
+    <p:extLst>
+      <p:ext uri="{BB962C8B-B14F-4D97-AF65-F5344CB8AC3E}">
+        <p14:creationId xmlns:p14="http://schemas.microsoft.com/office/powerpoint/2010/main" val="2404527788"/>
+      </p:ext>
+    </p:extLst>
+  </p:cSld>
+  <p:clrMapOvr>
+    <a:masterClrMapping/>
+  </p:clrMapOvr>
+</p:sldLayout>
+</file>
+
+<file path=ppt/slideLayouts/slideLayout3.xml><?xml version="1.0" encoding="utf-8"?>
+<p:sldLayout xmlns:a="http://schemas.openxmlformats.org/drawingml/2006/main" xmlns:r="http://schemas.openxmlformats.org/officeDocument/2006/relationships" xmlns:p="http://schemas.openxmlformats.org/presentationml/2006/main" type="secHead" preserve="1">
+  <p:cSld name="Section Header">
+    <p:spTree>
+      <p:nvGrpSpPr>
+        <p:cNvPr id="1" name=""/>
+        <p:cNvGrpSpPr/>
+        <p:nvPr/>
+      </p:nvGrpSpPr>
+      <p:grpSpPr>
+        <a:xfrm>
+          <a:off x="0" y="0"/>
+          <a:ext cx="0" cy="0"/>
+          <a:chOff x="0" y="0"/>
+          <a:chExt cx="0" cy="0"/>
+        </a:xfrm>
+      </p:grpSpPr>
+      <p:sp>
+        <p:nvSpPr>
+          <p:cNvPr id="2" name="Title 1">
+            <a:extLst>
+              <a:ext uri="{FF2B5EF4-FFF2-40B4-BE49-F238E27FC236}">
+                <a16:creationId xmlns:a16="http://schemas.microsoft.com/office/drawing/2014/main" id="{1023C68F-4357-6C0B-EFF4-6056CFE0274D}"/>
+              </a:ext>
+            </a:extLst>
+          </p:cNvPr>
+          <p:cNvSpPr>
+            <a:spLocks noGrp="1"/>
+          </p:cNvSpPr>
+          <p:nvPr>
+            <p:ph type="title"/>
+          </p:nvPr>
+        </p:nvSpPr>
+        <p:spPr>
+          <a:xfrm>
+            <a:off x="831850" y="1709738"/>
+            <a:ext cx="10515600" cy="2852737"/>
+          </a:xfrm>
+        </p:spPr>
+        <p:txBody>
+          <a:bodyPr anchor="b"/>
+          <a:lstStyle>
+            <a:lvl1pPr>
+              <a:defRPr sz="6000"/>
+            </a:lvl1pPr>
+          </a:lstStyle>
+          <a:p>
+            <a:r>
+              <a:rPr lang="en-US"/>
+              <a:t>Click to edit Master title style</a:t>
+            </a:r>
+          </a:p>
+        </p:txBody>
+      </p:sp>
+      <p:sp>
+        <p:nvSpPr>
+          <p:cNvPr id="3" name="Text Placeholder 2">
+            <a:extLst>
+              <a:ext uri="{FF2B5EF4-FFF2-40B4-BE49-F238E27FC236}">
+                <a16:creationId xmlns:a16="http://schemas.microsoft.com/office/drawing/2014/main" id="{437434F9-9472-5E2E-37A2-1C668D4EE778}"/>
+              </a:ext>
+            </a:extLst>
+          </p:cNvPr>
+          <p:cNvSpPr>
+            <a:spLocks noGrp="1"/>
+          </p:cNvSpPr>
+          <p:nvPr>
+            <p:ph type="body" idx="1"/>
+          </p:nvPr>
+        </p:nvSpPr>
+        <p:spPr>
+          <a:xfrm>
+            <a:off x="831850" y="4589463"/>
+            <a:ext cx="10515600" cy="1500187"/>
+          </a:xfrm>
+        </p:spPr>
+        <p:txBody>
+          <a:bodyPr/>
+          <a:lstStyle>
+            <a:lvl1pPr marL="0" indent="0">
+              <a:buNone/>
+              <a:defRPr sz="2400">
+                <a:solidFill>
+                  <a:schemeClr val="tx1">
+                    <a:tint val="82000"/>
+                  </a:schemeClr>
+                </a:solidFill>
+              </a:defRPr>
+            </a:lvl1pPr>
+            <a:lvl2pPr marL="457200" indent="0">
+              <a:buNone/>
+              <a:defRPr sz="2000">
+                <a:solidFill>
+                  <a:schemeClr val="tx1">
+                    <a:tint val="82000"/>
+                  </a:schemeClr>
+                </a:solidFill>
+              </a:defRPr>
+            </a:lvl2pPr>
+            <a:lvl3pPr marL="914400" indent="0">
+              <a:buNone/>
+              <a:defRPr sz="1800">
+                <a:solidFill>
+                  <a:schemeClr val="tx1">
+                    <a:tint val="82000"/>
+                  </a:schemeClr>
+                </a:solidFill>
+              </a:defRPr>
+            </a:lvl3pPr>
+            <a:lvl4pPr marL="1371600" indent="0">
+              <a:buNone/>
+              <a:defRPr sz="1600">
+                <a:solidFill>
+                  <a:schemeClr val="tx1">
+                    <a:tint val="82000"/>
+                  </a:schemeClr>
+                </a:solidFill>
+              </a:defRPr>
+            </a:lvl4pPr>
+            <a:lvl5pPr marL="1828800" indent="0">
+              <a:buNone/>
+              <a:defRPr sz="1600">
+                <a:solidFill>
+                  <a:schemeClr val="tx1">
+                    <a:tint val="82000"/>
+                  </a:schemeClr>
+                </a:solidFill>
+              </a:defRPr>
+            </a:lvl5pPr>
+            <a:lvl6pPr marL="2286000" indent="0">
+              <a:buNone/>
+              <a:defRPr sz="1600">
+                <a:solidFill>
+                  <a:schemeClr val="tx1">
+                    <a:tint val="82000"/>
+                  </a:schemeClr>
+                </a:solidFill>
+              </a:defRPr>
+            </a:lvl6pPr>
+            <a:lvl7pPr marL="2743200" indent="0">
+              <a:buNone/>
+              <a:defRPr sz="1600">
+                <a:solidFill>
+                  <a:schemeClr val="tx1">
+                    <a:tint val="82000"/>
+                  </a:schemeClr>
+                </a:solidFill>
+              </a:defRPr>
+            </a:lvl7pPr>
+            <a:lvl8pPr marL="3200400" indent="0">
+              <a:buNone/>
+              <a:defRPr sz="1600">
+                <a:solidFill>
+                  <a:schemeClr val="tx1">
+                    <a:tint val="82000"/>
+                  </a:schemeClr>
+                </a:solidFill>
+              </a:defRPr>
+            </a:lvl8pPr>
+            <a:lvl9pPr marL="3657600" indent="0">
+              <a:buNone/>
+              <a:defRPr sz="1600">
+                <a:solidFill>
+                  <a:schemeClr val="tx1">
+                    <a:tint val="82000"/>
+                  </a:schemeClr>
+                </a:solidFill>
+              </a:defRPr>
+            </a:lvl9pPr>
+          </a:lstStyle>
+          <a:p>
+            <a:pPr lvl="0"/>
+            <a:r>
+              <a:rPr lang="en-US"/>
+              <a:t>Click to edit Master text styles</a:t>
+            </a:r>
+          </a:p>
+        </p:txBody>
+      </p:sp>
+      <p:sp>
+        <p:nvSpPr>
+          <p:cNvPr id="4" name="Date Placeholder 3">
+            <a:extLst>
+              <a:ext uri="{FF2B5EF4-FFF2-40B4-BE49-F238E27FC236}">
+                <a16:creationId xmlns:a16="http://schemas.microsoft.com/office/drawing/2014/main" id="{D165E404-4C0A-77ED-B4F0-F150408E2701}"/>
+              </a:ext>
+            </a:extLst>
+          </p:cNvPr>
+          <p:cNvSpPr>
+            <a:spLocks noGrp="1"/>
+          </p:cNvSpPr>
+          <p:nvPr>
+            <p:ph type="dt" sz="half" idx="10"/>
+          </p:nvPr>
+        </p:nvSpPr>
+        <p:spPr/>
+        <p:txBody>
+          <a:bodyPr/>
+          <a:lstStyle/>
+          <a:p>
+            <a:fld id="{F10901DB-E840-4150-8207-866BDD25D22F}" type="datetimeFigureOut">
+              <a:rPr lang="en-US" smtClean="0"/>
+              <a:t>9/15/2025</a:t>
+            </a:fld>
+            <a:endParaRPr lang="en-US"/>
+          </a:p>
+        </p:txBody>
+      </p:sp>
+      <p:sp>
+        <p:nvSpPr>
+          <p:cNvPr id="5" name="Footer Placeholder 4">
+            <a:extLst>
+              <a:ext uri="{FF2B5EF4-FFF2-40B4-BE49-F238E27FC236}">
+                <a16:creationId xmlns:a16="http://schemas.microsoft.com/office/drawing/2014/main" id="{CC47E8BC-3C9D-288D-A877-4B49F26D4145}"/>
+              </a:ext>
+            </a:extLst>
+          </p:cNvPr>
+          <p:cNvSpPr>
+            <a:spLocks noGrp="1"/>
+          </p:cNvSpPr>
+          <p:nvPr>
+            <p:ph type="ftr" sz="quarter" idx="11"/>
+          </p:nvPr>
+        </p:nvSpPr>
+        <p:spPr/>
+        <p:txBody>
+          <a:bodyPr/>
+          <a:lstStyle/>
+          <a:p>
+            <a:endParaRPr lang="en-US"/>
+          </a:p>
+        </p:txBody>
+      </p:sp>
+      <p:sp>
+        <p:nvSpPr>
+          <p:cNvPr id="6" name="Slide Number Placeholder 5">
+            <a:extLst>
+              <a:ext uri="{FF2B5EF4-FFF2-40B4-BE49-F238E27FC236}">
+                <a16:creationId xmlns:a16="http://schemas.microsoft.com/office/drawing/2014/main" id="{4D304336-DB89-C939-F991-F3B56B48D96C}"/>
+              </a:ext>
+            </a:extLst>
+          </p:cNvPr>
+          <p:cNvSpPr>
+            <a:spLocks noGrp="1"/>
+          </p:cNvSpPr>
+          <p:nvPr>
+            <p:ph type="sldNum" sz="quarter" idx="12"/>
+          </p:nvPr>
+        </p:nvSpPr>
+        <p:spPr/>
+        <p:txBody>
+          <a:bodyPr/>
+          <a:lstStyle/>
+          <a:p>
+            <a:fld id="{C41024BC-5968-4735-8D30-B72DEF6BE683}" type="slidenum">
+              <a:rPr lang="en-US" smtClean="0"/>
+              <a:t>‹#›</a:t>
+            </a:fld>
+            <a:endParaRPr lang="en-US"/>
+          </a:p>
+        </p:txBody>
+      </p:sp>
+    </p:spTree>
+    <p:extLst>
+      <p:ext uri="{BB962C8B-B14F-4D97-AF65-F5344CB8AC3E}">
+        <p14:creationId xmlns:p14="http://schemas.microsoft.com/office/powerpoint/2010/main" val="988383939"/>
+      </p:ext>
+    </p:extLst>
+  </p:cSld>
+  <p:clrMapOvr>
+    <a:masterClrMapping/>
+  </p:clrMapOvr>
+</p:sldLayout>
+</file>
+
+<file path=ppt/slideLayouts/slideLayout4.xml><?xml version="1.0" encoding="utf-8"?>
+<p:sldLayout xmlns:a="http://schemas.openxmlformats.org/drawingml/2006/main" xmlns:r="http://schemas.openxmlformats.org/officeDocument/2006/relationships" xmlns:p="http://schemas.openxmlformats.org/presentationml/2006/main" type="twoObj" preserve="1">
+  <p:cSld name="Two Content">
+    <p:spTree>
+      <p:nvGrpSpPr>
+        <p:cNvPr id="1" name=""/>
+        <p:cNvGrpSpPr/>
+        <p:nvPr/>
+      </p:nvGrpSpPr>
+      <p:grpSpPr>
+        <a:xfrm>
+          <a:off x="0" y="0"/>
+          <a:ext cx="0" cy="0"/>
+          <a:chOff x="0" y="0"/>
+          <a:chExt cx="0" cy="0"/>
+        </a:xfrm>
+      </p:grpSpPr>
+      <p:sp>
+        <p:nvSpPr>
+          <p:cNvPr id="2" name="Title 1">
+            <a:extLst>
+              <a:ext uri="{FF2B5EF4-FFF2-40B4-BE49-F238E27FC236}">
+                <a16:creationId xmlns:a16="http://schemas.microsoft.com/office/drawing/2014/main" id="{30ADE173-84FE-131A-FDEC-10EB764DA2F6}"/>
+              </a:ext>
+            </a:extLst>
+          </p:cNvPr>
+          <p:cNvSpPr>
+            <a:spLocks noGrp="1"/>
+          </p:cNvSpPr>
+          <p:nvPr>
+            <p:ph type="title"/>
+          </p:nvPr>
+        </p:nvSpPr>
+        <p:spPr/>
+        <p:txBody>
+          <a:bodyPr/>
+          <a:lstStyle/>
+          <a:p>
+            <a:r>
+              <a:rPr lang="en-US"/>
+              <a:t>Click to edit Master title style</a:t>
+            </a:r>
+          </a:p>
+        </p:txBody>
+      </p:sp>
+      <p:sp>
+        <p:nvSpPr>
+          <p:cNvPr id="3" name="Content Placeholder 2">
+            <a:extLst>
+              <a:ext uri="{FF2B5EF4-FFF2-40B4-BE49-F238E27FC236}">
+                <a16:creationId xmlns:a16="http://schemas.microsoft.com/office/drawing/2014/main" id="{499AD527-C4A0-467A-A074-20997F2F9B79}"/>
+              </a:ext>
+            </a:extLst>
+          </p:cNvPr>
+          <p:cNvSpPr>
+            <a:spLocks noGrp="1"/>
+          </p:cNvSpPr>
+          <p:nvPr>
+            <p:ph sz="half" idx="1"/>
+          </p:nvPr>
+        </p:nvSpPr>
+        <p:spPr>
+          <a:xfrm>
+            <a:off x="838200" y="1825625"/>
+            <a:ext cx="5181600" cy="4351338"/>
+          </a:xfrm>
+        </p:spPr>
+        <p:txBody>
+          <a:bodyPr/>
+          <a:lstStyle/>
+          <a:p>
+            <a:pPr lvl="0"/>
+            <a:r>
+              <a:rPr lang="en-US"/>
+              <a:t>Click to edit Master text styles</a:t>
+            </a:r>
+          </a:p>
+          <a:p>
+            <a:pPr lvl="1"/>
+            <a:r>
+              <a:rPr lang="en-US"/>
+              <a:t>Second level</a:t>
+            </a:r>
+          </a:p>
+          <a:p>
+            <a:pPr lvl="2"/>
+            <a:r>
+              <a:rPr lang="en-US"/>
+              <a:t>Third level</a:t>
+            </a:r>
+          </a:p>
+          <a:p>
+            <a:pPr lvl="3"/>
+            <a:r>
+              <a:rPr lang="en-US"/>
+              <a:t>Fourth level</a:t>
+            </a:r>
+          </a:p>
+          <a:p>
+            <a:pPr lvl="4"/>
+            <a:r>
+              <a:rPr lang="en-US"/>
+              <a:t>Fifth level</a:t>
+            </a:r>
+          </a:p>
+        </p:txBody>
+      </p:sp>
+      <p:sp>
+        <p:nvSpPr>
+          <p:cNvPr id="4" name="Content Placeholder 3">
+            <a:extLst>
+              <a:ext uri="{FF2B5EF4-FFF2-40B4-BE49-F238E27FC236}">
+                <a16:creationId xmlns:a16="http://schemas.microsoft.com/office/drawing/2014/main" id="{CAE8166C-5D25-2F7A-68E2-89811F37E2DA}"/>
+              </a:ext>
+            </a:extLst>
+          </p:cNvPr>
+          <p:cNvSpPr>
+            <a:spLocks noGrp="1"/>
+          </p:cNvSpPr>
+          <p:nvPr>
+            <p:ph sz="half" idx="2"/>
+          </p:nvPr>
+        </p:nvSpPr>
+        <p:spPr>
+          <a:xfrm>
+            <a:off x="6172200" y="1825625"/>
+            <a:ext cx="5181600" cy="4351338"/>
+          </a:xfrm>
+        </p:spPr>
+        <p:txBody>
+          <a:bodyPr/>
+          <a:lstStyle/>
+          <a:p>
+            <a:pPr lvl="0"/>
+            <a:r>
+              <a:rPr lang="en-US"/>
+              <a:t>Click to edit Master text styles</a:t>
+            </a:r>
+          </a:p>
+          <a:p>
+            <a:pPr lvl="1"/>
+            <a:r>
+              <a:rPr lang="en-US"/>
+              <a:t>Second level</a:t>
+            </a:r>
+          </a:p>
+          <a:p>
+            <a:pPr lvl="2"/>
+            <a:r>
+              <a:rPr lang="en-US"/>
+              <a:t>Third level</a:t>
+            </a:r>
+          </a:p>
+          <a:p>
+            <a:pPr lvl="3"/>
+            <a:r>
+              <a:rPr lang="en-US"/>
+              <a:t>Fourth level</a:t>
+            </a:r>
+          </a:p>
+          <a:p>
+            <a:pPr lvl="4"/>
+            <a:r>
+              <a:rPr lang="en-US"/>
+              <a:t>Fifth level</a:t>
+            </a:r>
+          </a:p>
+        </p:txBody>
+      </p:sp>
+      <p:sp>
+        <p:nvSpPr>
+          <p:cNvPr id="5" name="Date Placeholder 4">
+            <a:extLst>
+              <a:ext uri="{FF2B5EF4-FFF2-40B4-BE49-F238E27FC236}">
+                <a16:creationId xmlns:a16="http://schemas.microsoft.com/office/drawing/2014/main" id="{89FA11F9-6FE3-AE70-BB60-74D68595EF93}"/>
+              </a:ext>
+            </a:extLst>
+          </p:cNvPr>
+          <p:cNvSpPr>
+            <a:spLocks noGrp="1"/>
+          </p:cNvSpPr>
+          <p:nvPr>
+            <p:ph type="dt" sz="half" idx="10"/>
+          </p:nvPr>
+        </p:nvSpPr>
+        <p:spPr/>
+        <p:txBody>
+          <a:bodyPr/>
+          <a:lstStyle/>
+          <a:p>
+            <a:fld id="{F10901DB-E840-4150-8207-866BDD25D22F}" type="datetimeFigureOut">
+              <a:rPr lang="en-US" smtClean="0"/>
+              <a:t>9/15/2025</a:t>
+            </a:fld>
+            <a:endParaRPr lang="en-US"/>
+          </a:p>
+        </p:txBody>
+      </p:sp>
+      <p:sp>
+        <p:nvSpPr>
+          <p:cNvPr id="6" name="Footer Placeholder 5">
+            <a:extLst>
+              <a:ext uri="{FF2B5EF4-FFF2-40B4-BE49-F238E27FC236}">
+                <a16:creationId xmlns:a16="http://schemas.microsoft.com/office/drawing/2014/main" id="{4BDC4B88-4529-9622-3DFF-0A9E8F047F9B}"/>
+              </a:ext>
+            </a:extLst>
+          </p:cNvPr>
+          <p:cNvSpPr>
+            <a:spLocks noGrp="1"/>
+          </p:cNvSpPr>
+          <p:nvPr>
+            <p:ph type="ftr" sz="quarter" idx="11"/>
+          </p:nvPr>
+        </p:nvSpPr>
+        <p:spPr/>
+        <p:txBody>
+          <a:bodyPr/>
+          <a:lstStyle/>
+          <a:p>
+            <a:endParaRPr lang="en-US"/>
+          </a:p>
+        </p:txBody>
+      </p:sp>
+      <p:sp>
+        <p:nvSpPr>
+          <p:cNvPr id="7" name="Slide Number Placeholder 6">
+            <a:extLst>
+              <a:ext uri="{FF2B5EF4-FFF2-40B4-BE49-F238E27FC236}">
+                <a16:creationId xmlns:a16="http://schemas.microsoft.com/office/drawing/2014/main" id="{31149887-301D-192D-6E4E-0B5CD9F58651}"/>
+              </a:ext>
+            </a:extLst>
+          </p:cNvPr>
+          <p:cNvSpPr>
+            <a:spLocks noGrp="1"/>
+          </p:cNvSpPr>
+          <p:nvPr>
+            <p:ph type="sldNum" sz="quarter" idx="12"/>
+          </p:nvPr>
+        </p:nvSpPr>
+        <p:spPr/>
+        <p:txBody>
+          <a:bodyPr/>
+          <a:lstStyle/>
+          <a:p>
+            <a:fld id="{C41024BC-5968-4735-8D30-B72DEF6BE683}" type="slidenum">
+              <a:rPr lang="en-US" smtClean="0"/>
+              <a:t>‹#›</a:t>
+            </a:fld>
+            <a:endParaRPr lang="en-US"/>
+          </a:p>
+        </p:txBody>
+      </p:sp>
+    </p:spTree>
+    <p:extLst>
+      <p:ext uri="{BB962C8B-B14F-4D97-AF65-F5344CB8AC3E}">
+        <p14:creationId xmlns:p14="http://schemas.microsoft.com/office/powerpoint/2010/main" val="3610742292"/>
+      </p:ext>
+    </p:extLst>
+  </p:cSld>
+  <p:clrMapOvr>
+    <a:masterClrMapping/>
+  </p:clrMapOvr>
+</p:sldLayout>
+</file>
+
+<file path=ppt/slideLayouts/slideLayout5.xml><?xml version="1.0" encoding="utf-8"?>
+<p:sldLayout xmlns:a="http://schemas.openxmlformats.org/drawingml/2006/main" xmlns:r="http://schemas.openxmlformats.org/officeDocument/2006/relationships" xmlns:p="http://schemas.openxmlformats.org/presentationml/2006/main" type="twoTxTwoObj" preserve="1">
+  <p:cSld name="Comparison">
+    <p:spTree>
+      <p:nvGrpSpPr>
+        <p:cNvPr id="1" name=""/>
+        <p:cNvGrpSpPr/>
+        <p:nvPr/>
+      </p:nvGrpSpPr>
+      <p:grpSpPr>
+        <a:xfrm>
+          <a:off x="0" y="0"/>
+          <a:ext cx="0" cy="0"/>
+          <a:chOff x="0" y="0"/>
+          <a:chExt cx="0" cy="0"/>
+        </a:xfrm>
+      </p:grpSpPr>
+      <p:sp>
+        <p:nvSpPr>
+          <p:cNvPr id="2" name="Title 1">
+            <a:extLst>
+              <a:ext uri="{FF2B5EF4-FFF2-40B4-BE49-F238E27FC236}">
+                <a16:creationId xmlns:a16="http://schemas.microsoft.com/office/drawing/2014/main" id="{69E8185E-3938-13F4-071F-9C47FBD60983}"/>
+              </a:ext>
+            </a:extLst>
+          </p:cNvPr>
+          <p:cNvSpPr>
+            <a:spLocks noGrp="1"/>
+          </p:cNvSpPr>
+          <p:nvPr>
+            <p:ph type="title"/>
+          </p:nvPr>
+        </p:nvSpPr>
+        <p:spPr>
+          <a:xfrm>
+            <a:off x="839788" y="365125"/>
+            <a:ext cx="10515600" cy="1325563"/>
+          </a:xfrm>
+        </p:spPr>
+        <p:txBody>
+          <a:bodyPr/>
+          <a:lstStyle/>
+          <a:p>
+            <a:r>
+              <a:rPr lang="en-US"/>
+              <a:t>Click to edit Master title style</a:t>
+            </a:r>
+          </a:p>
+        </p:txBody>
+      </p:sp>
+      <p:sp>
+        <p:nvSpPr>
+          <p:cNvPr id="3" name="Text Placeholder 2">
+            <a:extLst>
+              <a:ext uri="{FF2B5EF4-FFF2-40B4-BE49-F238E27FC236}">
+                <a16:creationId xmlns:a16="http://schemas.microsoft.com/office/drawing/2014/main" id="{85328229-9E26-4A8D-CE13-5195A4F3BEBA}"/>
+              </a:ext>
+            </a:extLst>
+          </p:cNvPr>
+          <p:cNvSpPr>
+            <a:spLocks noGrp="1"/>
+          </p:cNvSpPr>
+          <p:nvPr>
+            <p:ph type="body" idx="1"/>
+          </p:nvPr>
+        </p:nvSpPr>
+        <p:spPr>
+          <a:xfrm>
+            <a:off x="839788" y="1681163"/>
+            <a:ext cx="5157787" cy="823912"/>
+          </a:xfrm>
+        </p:spPr>
+        <p:txBody>
+          <a:bodyPr anchor="b"/>
+          <a:lstStyle>
+            <a:lvl1pPr marL="0" indent="0">
+              <a:buNone/>
+              <a:defRPr sz="2400" b="1"/>
+            </a:lvl1pPr>
+            <a:lvl2pPr marL="457200" indent="0">
+              <a:buNone/>
+              <a:defRPr sz="2000" b="1"/>
+            </a:lvl2pPr>
+            <a:lvl3pPr marL="914400" indent="0">
+              <a:buNone/>
+              <a:defRPr sz="1800" b="1"/>
+            </a:lvl3pPr>
+            <a:lvl4pPr marL="1371600" indent="0">
+              <a:buNone/>
+              <a:defRPr sz="1600" b="1"/>
+            </a:lvl4pPr>
+            <a:lvl5pPr marL="1828800" indent="0">
+              <a:buNone/>
+              <a:defRPr sz="1600" b="1"/>
+            </a:lvl5pPr>
+            <a:lvl6pPr marL="2286000" indent="0">
+              <a:buNone/>
+              <a:defRPr sz="1600" b="1"/>
+            </a:lvl6pPr>
+            <a:lvl7pPr marL="2743200" indent="0">
+              <a:buNone/>
+              <a:defRPr sz="1600" b="1"/>
+            </a:lvl7pPr>
+            <a:lvl8pPr marL="3200400" indent="0">
+              <a:buNone/>
+              <a:defRPr sz="1600" b="1"/>
+            </a:lvl8pPr>
+            <a:lvl9pPr marL="3657600" indent="0">
+              <a:buNone/>
+              <a:defRPr sz="1600" b="1"/>
+            </a:lvl9pPr>
+          </a:lstStyle>
+          <a:p>
+            <a:pPr lvl="0"/>
+            <a:r>
+              <a:rPr lang="en-US"/>
+              <a:t>Click to edit Master text styles</a:t>
+            </a:r>
+          </a:p>
+        </p:txBody>
+      </p:sp>
+      <p:sp>
+        <p:nvSpPr>
+          <p:cNvPr id="4" name="Content Placeholder 3">
+            <a:extLst>
+              <a:ext uri="{FF2B5EF4-FFF2-40B4-BE49-F238E27FC236}">
+                <a16:creationId xmlns:a16="http://schemas.microsoft.com/office/drawing/2014/main" id="{2B04DE16-D620-E567-A074-2B6A54D885ED}"/>
+              </a:ext>
+            </a:extLst>
+          </p:cNvPr>
+          <p:cNvSpPr>
+            <a:spLocks noGrp="1"/>
+          </p:cNvSpPr>
+          <p:nvPr>
+            <p:ph sz="half" idx="2"/>
+          </p:nvPr>
+        </p:nvSpPr>
+        <p:spPr>
+          <a:xfrm>
+            <a:off x="839788" y="2505075"/>
+            <a:ext cx="5157787" cy="3684588"/>
+          </a:xfrm>
+        </p:spPr>
+        <p:txBody>
+          <a:bodyPr/>
+          <a:lstStyle/>
+          <a:p>
+            <a:pPr lvl="0"/>
+            <a:r>
+              <a:rPr lang="en-US"/>
+              <a:t>Click to edit Master text styles</a:t>
+            </a:r>
+          </a:p>
+          <a:p>
+            <a:pPr lvl="1"/>
+            <a:r>
+              <a:rPr lang="en-US"/>
+              <a:t>Second level</a:t>
+            </a:r>
+          </a:p>
+          <a:p>
+            <a:pPr lvl="2"/>
+            <a:r>
+              <a:rPr lang="en-US"/>
+              <a:t>Third level</a:t>
+            </a:r>
+          </a:p>
+          <a:p>
+            <a:pPr lvl="3"/>
+            <a:r>
+              <a:rPr lang="en-US"/>
+              <a:t>Fourth level</a:t>
+            </a:r>
+          </a:p>
+          <a:p>
+            <a:pPr lvl="4"/>
+            <a:r>
+              <a:rPr lang="en-US"/>
+              <a:t>Fifth level</a:t>
+            </a:r>
+          </a:p>
+        </p:txBody>
+      </p:sp>
+      <p:sp>
+        <p:nvSpPr>
+          <p:cNvPr id="5" name="Text Placeholder 4">
+            <a:extLst>
+              <a:ext uri="{FF2B5EF4-FFF2-40B4-BE49-F238E27FC236}">
+                <a16:creationId xmlns:a16="http://schemas.microsoft.com/office/drawing/2014/main" id="{8CA6B1B9-8555-7B1C-2D30-CA652A281895}"/>
+              </a:ext>
+            </a:extLst>
+          </p:cNvPr>
+          <p:cNvSpPr>
+            <a:spLocks noGrp="1"/>
+          </p:cNvSpPr>
+          <p:nvPr>
+            <p:ph type="body" sz="quarter" idx="3"/>
+          </p:nvPr>
+        </p:nvSpPr>
+        <p:spPr>
+          <a:xfrm>
+            <a:off x="6172200" y="1681163"/>
+            <a:ext cx="5183188" cy="823912"/>
+          </a:xfrm>
+        </p:spPr>
+        <p:txBody>
+          <a:bodyPr anchor="b"/>
+          <a:lstStyle>
+            <a:lvl1pPr marL="0" indent="0">
+              <a:buNone/>
+              <a:defRPr sz="2400" b="1"/>
+            </a:lvl1pPr>
+            <a:lvl2pPr marL="457200" indent="0">
+              <a:buNone/>
+              <a:defRPr sz="2000" b="1"/>
+            </a:lvl2pPr>
+            <a:lvl3pPr marL="914400" indent="0">
+              <a:buNone/>
+              <a:defRPr sz="1800" b="1"/>
+            </a:lvl3pPr>
+            <a:lvl4pPr marL="1371600" indent="0">
+              <a:buNone/>
+              <a:defRPr sz="1600" b="1"/>
+            </a:lvl4pPr>
+            <a:lvl5pPr marL="1828800" indent="0">
+              <a:buNone/>
+              <a:defRPr sz="1600" b="1"/>
+            </a:lvl5pPr>
+            <a:lvl6pPr marL="2286000" indent="0">
+              <a:buNone/>
+              <a:defRPr sz="1600" b="1"/>
+            </a:lvl6pPr>
+            <a:lvl7pPr marL="2743200" indent="0">
+              <a:buNone/>
+              <a:defRPr sz="1600" b="1"/>
+            </a:lvl7pPr>
+            <a:lvl8pPr marL="3200400" indent="0">
+              <a:buNone/>
+              <a:defRPr sz="1600" b="1"/>
+            </a:lvl8pPr>
+            <a:lvl9pPr marL="3657600" indent="0">
+              <a:buNone/>
+              <a:defRPr sz="1600" b="1"/>
+            </a:lvl9pPr>
+          </a:lstStyle>
+          <a:p>
+            <a:pPr lvl="0"/>
+            <a:r>
+              <a:rPr lang="en-US"/>
+              <a:t>Click to edit Master text styles</a:t>
+            </a:r>
+          </a:p>
+        </p:txBody>
+      </p:sp>
+      <p:sp>
+        <p:nvSpPr>
+          <p:cNvPr id="6" name="Content Placeholder 5">
+            <a:extLst>
+              <a:ext uri="{FF2B5EF4-FFF2-40B4-BE49-F238E27FC236}">
+                <a16:creationId xmlns:a16="http://schemas.microsoft.com/office/drawing/2014/main" id="{7D0F61AE-EC15-64C2-A098-EC225FEFBFBA}"/>
+              </a:ext>
+            </a:extLst>
+          </p:cNvPr>
+          <p:cNvSpPr>
+            <a:spLocks noGrp="1"/>
+          </p:cNvSpPr>
+          <p:nvPr>
+            <p:ph sz="quarter" idx="4"/>
+          </p:nvPr>
+        </p:nvSpPr>
+        <p:spPr>
+          <a:xfrm>
+            <a:off x="6172200" y="2505075"/>
+            <a:ext cx="5183188" cy="3684588"/>
+          </a:xfrm>
+        </p:spPr>
+        <p:txBody>
+          <a:bodyPr/>
+          <a:lstStyle/>
+          <a:p>
+            <a:pPr lvl="0"/>
+            <a:r>
+              <a:rPr lang="en-US"/>
+              <a:t>Click to edit Master text styles</a:t>
+            </a:r>
+          </a:p>
+          <a:p>
+            <a:pPr lvl="1"/>
+            <a:r>
+              <a:rPr lang="en-US"/>
+              <a:t>Second level</a:t>
+            </a:r>
+          </a:p>
+          <a:p>
+            <a:pPr lvl="2"/>
+            <a:r>
+              <a:rPr lang="en-US"/>
+              <a:t>Third level</a:t>
+            </a:r>
+          </a:p>
+          <a:p>
+            <a:pPr lvl="3"/>
+            <a:r>
+              <a:rPr lang="en-US"/>
+              <a:t>Fourth level</a:t>
+            </a:r>
+          </a:p>
+          <a:p>
+            <a:pPr lvl="4"/>
+            <a:r>
+              <a:rPr lang="en-US"/>
+              <a:t>Fifth level</a:t>
+            </a:r>
+          </a:p>
+        </p:txBody>
+      </p:sp>
+      <p:sp>
+        <p:nvSpPr>
+          <p:cNvPr id="7" name="Date Placeholder 6">
+            <a:extLst>
+              <a:ext uri="{FF2B5EF4-FFF2-40B4-BE49-F238E27FC236}">
+                <a16:creationId xmlns:a16="http://schemas.microsoft.com/office/drawing/2014/main" id="{792DFBB5-D787-915A-9095-24B00FA2AC94}"/>
+              </a:ext>
+            </a:extLst>
+          </p:cNvPr>
+          <p:cNvSpPr>
+            <a:spLocks noGrp="1"/>
+          </p:cNvSpPr>
+          <p:nvPr>
+            <p:ph type="dt" sz="half" idx="10"/>
+          </p:nvPr>
+        </p:nvSpPr>
+        <p:spPr/>
+        <p:txBody>
+          <a:bodyPr/>
+          <a:lstStyle/>
+          <a:p>
+            <a:fld id="{F10901DB-E840-4150-8207-866BDD25D22F}" type="datetimeFigureOut">
+              <a:rPr lang="en-US" smtClean="0"/>
+              <a:t>9/15/2025</a:t>
+            </a:fld>
+            <a:endParaRPr lang="en-US"/>
+          </a:p>
+        </p:txBody>
+      </p:sp>
+      <p:sp>
+        <p:nvSpPr>
+          <p:cNvPr id="8" name="Footer Placeholder 7">
+            <a:extLst>
+              <a:ext uri="{FF2B5EF4-FFF2-40B4-BE49-F238E27FC236}">
+                <a16:creationId xmlns:a16="http://schemas.microsoft.com/office/drawing/2014/main" id="{F711DC54-8C33-C55A-F365-B3AC72A6BA03}"/>
+              </a:ext>
+            </a:extLst>
+          </p:cNvPr>
+          <p:cNvSpPr>
+            <a:spLocks noGrp="1"/>
+          </p:cNvSpPr>
+          <p:nvPr>
+            <p:ph type="ftr" sz="quarter" idx="11"/>
+          </p:nvPr>
+        </p:nvSpPr>
+        <p:spPr/>
+        <p:txBody>
+          <a:bodyPr/>
+          <a:lstStyle/>
+          <a:p>
+            <a:endParaRPr lang="en-US"/>
+          </a:p>
+        </p:txBody>
+      </p:sp>
+      <p:sp>
+        <p:nvSpPr>
+          <p:cNvPr id="9" name="Slide Number Placeholder 8">
+            <a:extLst>
+              <a:ext uri="{FF2B5EF4-FFF2-40B4-BE49-F238E27FC236}">
+                <a16:creationId xmlns:a16="http://schemas.microsoft.com/office/drawing/2014/main" id="{65363D3E-D67B-702D-ADA5-2F2C9111BF9F}"/>
+              </a:ext>
+            </a:extLst>
+          </p:cNvPr>
+          <p:cNvSpPr>
+            <a:spLocks noGrp="1"/>
+          </p:cNvSpPr>
+          <p:nvPr>
+            <p:ph type="sldNum" sz="quarter" idx="12"/>
+          </p:nvPr>
+        </p:nvSpPr>
+        <p:spPr/>
+        <p:txBody>
+          <a:bodyPr/>
+          <a:lstStyle/>
+          <a:p>
+            <a:fld id="{C41024BC-5968-4735-8D30-B72DEF6BE683}" type="slidenum">
+              <a:rPr lang="en-US" smtClean="0"/>
+              <a:t>‹#›</a:t>
+            </a:fld>
+            <a:endParaRPr lang="en-US"/>
+          </a:p>
+        </p:txBody>
+      </p:sp>
+    </p:spTree>
+    <p:extLst>
+      <p:ext uri="{BB962C8B-B14F-4D97-AF65-F5344CB8AC3E}">
+        <p14:creationId xmlns:p14="http://schemas.microsoft.com/office/powerpoint/2010/main" val="961651307"/>
+      </p:ext>
+    </p:extLst>
+  </p:cSld>
+  <p:clrMapOvr>
+    <a:masterClrMapping/>
+  </p:clrMapOvr>
+</p:sldLayout>
+</file>
+
+<file path=ppt/slideLayouts/slideLayout6.xml><?xml version="1.0" encoding="utf-8"?>
+<p:sldLayout xmlns:a="http://schemas.openxmlformats.org/drawingml/2006/main" xmlns:r="http://schemas.openxmlformats.org/officeDocument/2006/relationships" xmlns:p="http://schemas.openxmlformats.org/presentationml/2006/main" type="titleOnly" preserve="1">
+  <p:cSld name="Title Only">
+    <p:spTree>
+      <p:nvGrpSpPr>
+        <p:cNvPr id="1" name=""/>
+        <p:cNvGrpSpPr/>
+        <p:nvPr/>
+      </p:nvGrpSpPr>
+      <p:grpSpPr>
+        <a:xfrm>
+          <a:off x="0" y="0"/>
+          <a:ext cx="0" cy="0"/>
+          <a:chOff x="0" y="0"/>
+          <a:chExt cx="0" cy="0"/>
+        </a:xfrm>
+      </p:grpSpPr>
+      <p:sp>
+        <p:nvSpPr>
+          <p:cNvPr id="2" name="Title 1">
+            <a:extLst>
+              <a:ext uri="{FF2B5EF4-FFF2-40B4-BE49-F238E27FC236}">
+                <a16:creationId xmlns:a16="http://schemas.microsoft.com/office/drawing/2014/main" id="{3B4C649D-C7B1-FC2E-BE2E-20E16B49B259}"/>
+              </a:ext>
+            </a:extLst>
+          </p:cNvPr>
+          <p:cNvSpPr>
+            <a:spLocks noGrp="1"/>
+          </p:cNvSpPr>
+          <p:nvPr>
+            <p:ph type="title"/>
+          </p:nvPr>
+        </p:nvSpPr>
+        <p:spPr/>
+        <p:txBody>
+          <a:bodyPr/>
+          <a:lstStyle/>
+          <a:p>
+            <a:r>
+              <a:rPr lang="en-US"/>
+              <a:t>Click to edit Master title style</a:t>
+            </a:r>
+          </a:p>
+        </p:txBody>
+      </p:sp>
+      <p:sp>
+        <p:nvSpPr>
+          <p:cNvPr id="3" name="Date Placeholder 2">
+            <a:extLst>
+              <a:ext uri="{FF2B5EF4-FFF2-40B4-BE49-F238E27FC236}">
+                <a16:creationId xmlns:a16="http://schemas.microsoft.com/office/drawing/2014/main" id="{486BDD17-2483-9991-3C02-F104B65F2F73}"/>
+              </a:ext>
+            </a:extLst>
+          </p:cNvPr>
+          <p:cNvSpPr>
+            <a:spLocks noGrp="1"/>
+          </p:cNvSpPr>
+          <p:nvPr>
+            <p:ph type="dt" sz="half" idx="10"/>
+          </p:nvPr>
+        </p:nvSpPr>
+        <p:spPr/>
+        <p:txBody>
+          <a:bodyPr/>
+          <a:lstStyle/>
+          <a:p>
+            <a:fld id="{F10901DB-E840-4150-8207-866BDD25D22F}" type="datetimeFigureOut">
+              <a:rPr lang="en-US" smtClean="0"/>
+              <a:t>9/15/2025</a:t>
+            </a:fld>
+            <a:endParaRPr lang="en-US"/>
+          </a:p>
+        </p:txBody>
+      </p:sp>
+      <p:sp>
+        <p:nvSpPr>
+          <p:cNvPr id="4" name="Footer Placeholder 3">
+            <a:extLst>
+              <a:ext uri="{FF2B5EF4-FFF2-40B4-BE49-F238E27FC236}">
+                <a16:creationId xmlns:a16="http://schemas.microsoft.com/office/drawing/2014/main" id="{9D1C0FB9-E42D-9741-BA7C-C811901B70EC}"/>
+              </a:ext>
+            </a:extLst>
+          </p:cNvPr>
+          <p:cNvSpPr>
+            <a:spLocks noGrp="1"/>
+          </p:cNvSpPr>
+          <p:nvPr>
+            <p:ph type="ftr" sz="quarter" idx="11"/>
+          </p:nvPr>
+        </p:nvSpPr>
+        <p:spPr/>
+        <p:txBody>
+          <a:bodyPr/>
+          <a:lstStyle/>
+          <a:p>
+            <a:endParaRPr lang="en-US"/>
+          </a:p>
+        </p:txBody>
+      </p:sp>
+      <p:sp>
+        <p:nvSpPr>
+          <p:cNvPr id="5" name="Slide Number Placeholder 4">
+            <a:extLst>
+              <a:ext uri="{FF2B5EF4-FFF2-40B4-BE49-F238E27FC236}">
+                <a16:creationId xmlns:a16="http://schemas.microsoft.com/office/drawing/2014/main" id="{BA55081D-BB5A-9B2F-8F12-4376917E0894}"/>
+              </a:ext>
+            </a:extLst>
+          </p:cNvPr>
+          <p:cNvSpPr>
+            <a:spLocks noGrp="1"/>
+          </p:cNvSpPr>
+          <p:nvPr>
+            <p:ph type="sldNum" sz="quarter" idx="12"/>
+          </p:nvPr>
+        </p:nvSpPr>
+        <p:spPr/>
+        <p:txBody>
+          <a:bodyPr/>
+          <a:lstStyle/>
+          <a:p>
+            <a:fld id="{C41024BC-5968-4735-8D30-B72DEF6BE683}" type="slidenum">
+              <a:rPr lang="en-US" smtClean="0"/>
+              <a:t>‹#›</a:t>
+            </a:fld>
+            <a:endParaRPr lang="en-US"/>
+          </a:p>
+        </p:txBody>
+      </p:sp>
+    </p:spTree>
+    <p:extLst>
+      <p:ext uri="{BB962C8B-B14F-4D97-AF65-F5344CB8AC3E}">
+        <p14:creationId xmlns:p14="http://schemas.microsoft.com/office/powerpoint/2010/main" val="2649400178"/>
+      </p:ext>
+    </p:extLst>
+  </p:cSld>
+  <p:clrMapOvr>
+    <a:masterClrMapping/>
+  </p:clrMapOvr>
+</p:sldLayout>
+</file>
+
+<file path=ppt/slideLayouts/slideLayout7.xml><?xml version="1.0" encoding="utf-8"?>
+<p:sldLayout xmlns:a="http://schemas.openxmlformats.org/drawingml/2006/main" xmlns:r="http://schemas.openxmlformats.org/officeDocument/2006/relationships" xmlns:p="http://schemas.openxmlformats.org/presentationml/2006/main" type="blank" preserve="1">
+  <p:cSld name="Blank">
+    <p:spTree>
+      <p:nvGrpSpPr>
+        <p:cNvPr id="1" name=""/>
+        <p:cNvGrpSpPr/>
+        <p:nvPr/>
+      </p:nvGrpSpPr>
+      <p:grpSpPr>
+        <a:xfrm>
+          <a:off x="0" y="0"/>
+          <a:ext cx="0" cy="0"/>
+          <a:chOff x="0" y="0"/>
+          <a:chExt cx="0" cy="0"/>
+        </a:xfrm>
+      </p:grpSpPr>
+      <p:sp>
+        <p:nvSpPr>
+          <p:cNvPr id="2" name="Date Placeholder 1">
+            <a:extLst>
+              <a:ext uri="{FF2B5EF4-FFF2-40B4-BE49-F238E27FC236}">
+                <a16:creationId xmlns:a16="http://schemas.microsoft.com/office/drawing/2014/main" id="{8416FCAA-D61A-19AA-2CFD-EDCFFE232B38}"/>
+              </a:ext>
+            </a:extLst>
+          </p:cNvPr>
+          <p:cNvSpPr>
+            <a:spLocks noGrp="1"/>
+          </p:cNvSpPr>
+          <p:nvPr>
+            <p:ph type="dt" sz="half" idx="10"/>
+          </p:nvPr>
+        </p:nvSpPr>
+        <p:spPr/>
+        <p:txBody>
+          <a:bodyPr/>
+          <a:lstStyle/>
+          <a:p>
+            <a:fld id="{F10901DB-E840-4150-8207-866BDD25D22F}" type="datetimeFigureOut">
+              <a:rPr lang="en-US" smtClean="0"/>
+              <a:t>9/15/2025</a:t>
+            </a:fld>
+            <a:endParaRPr lang="en-US"/>
+          </a:p>
+        </p:txBody>
+      </p:sp>
+      <p:sp>
+        <p:nvSpPr>
+          <p:cNvPr id="3" name="Footer Placeholder 2">
+            <a:extLst>
+              <a:ext uri="{FF2B5EF4-FFF2-40B4-BE49-F238E27FC236}">
+                <a16:creationId xmlns:a16="http://schemas.microsoft.com/office/drawing/2014/main" id="{CDD15071-F236-77A8-4671-2C96684897F5}"/>
+              </a:ext>
+            </a:extLst>
+          </p:cNvPr>
+          <p:cNvSpPr>
+            <a:spLocks noGrp="1"/>
+          </p:cNvSpPr>
+          <p:nvPr>
+            <p:ph type="ftr" sz="quarter" idx="11"/>
+          </p:nvPr>
+        </p:nvSpPr>
+        <p:spPr/>
+        <p:txBody>
+          <a:bodyPr/>
+          <a:lstStyle/>
+          <a:p>
+            <a:endParaRPr lang="en-US"/>
+          </a:p>
+        </p:txBody>
+      </p:sp>
+      <p:sp>
+        <p:nvSpPr>
+          <p:cNvPr id="4" name="Slide Number Placeholder 3">
+            <a:extLst>
+              <a:ext uri="{FF2B5EF4-FFF2-40B4-BE49-F238E27FC236}">
+                <a16:creationId xmlns:a16="http://schemas.microsoft.com/office/drawing/2014/main" id="{CF83CB8E-1A45-9FF7-122B-46108F80B893}"/>
+              </a:ext>
+            </a:extLst>
+          </p:cNvPr>
+          <p:cNvSpPr>
+            <a:spLocks noGrp="1"/>
+          </p:cNvSpPr>
+          <p:nvPr>
+            <p:ph type="sldNum" sz="quarter" idx="12"/>
+          </p:nvPr>
+        </p:nvSpPr>
+        <p:spPr/>
+        <p:txBody>
+          <a:bodyPr/>
+          <a:lstStyle/>
+          <a:p>
+            <a:fld id="{C41024BC-5968-4735-8D30-B72DEF6BE683}" type="slidenum">
+              <a:rPr lang="en-US" smtClean="0"/>
+              <a:t>‹#›</a:t>
+            </a:fld>
+            <a:endParaRPr lang="en-US"/>
+          </a:p>
+        </p:txBody>
+      </p:sp>
+    </p:spTree>
+    <p:extLst>
+      <p:ext uri="{BB962C8B-B14F-4D97-AF65-F5344CB8AC3E}">
+        <p14:creationId xmlns:p14="http://schemas.microsoft.com/office/powerpoint/2010/main" val="971559779"/>
+      </p:ext>
+    </p:extLst>
+  </p:cSld>
+  <p:clrMapOvr>
+    <a:masterClrMapping/>
+  </p:clrMapOvr>
+</p:sldLayout>
+</file>
+
+<file path=ppt/slideLayouts/slideLayout8.xml><?xml version="1.0" encoding="utf-8"?>
+<p:sldLayout xmlns:a="http://schemas.openxmlformats.org/drawingml/2006/main" xmlns:r="http://schemas.openxmlformats.org/officeDocument/2006/relationships" xmlns:p="http://schemas.openxmlformats.org/presentationml/2006/main" type="objTx" preserve="1">
+  <p:cSld name="Content with Caption">
+    <p:spTree>
+      <p:nvGrpSpPr>
+        <p:cNvPr id="1" name=""/>
+        <p:cNvGrpSpPr/>
+        <p:nvPr/>
+      </p:nvGrpSpPr>
+      <p:grpSpPr>
+        <a:xfrm>
+          <a:off x="0" y="0"/>
+          <a:ext cx="0" cy="0"/>
+          <a:chOff x="0" y="0"/>
+          <a:chExt cx="0" cy="0"/>
+        </a:xfrm>
+      </p:grpSpPr>
+      <p:sp>
+        <p:nvSpPr>
+          <p:cNvPr id="2" name="Title 1">
+            <a:extLst>
+              <a:ext uri="{FF2B5EF4-FFF2-40B4-BE49-F238E27FC236}">
+                <a16:creationId xmlns:a16="http://schemas.microsoft.com/office/drawing/2014/main" id="{60E57F21-6BEA-4D7A-A020-D2D73BA2D326}"/>
+              </a:ext>
+            </a:extLst>
+          </p:cNvPr>
+          <p:cNvSpPr>
+            <a:spLocks noGrp="1"/>
+          </p:cNvSpPr>
+          <p:nvPr>
+            <p:ph type="title"/>
+          </p:nvPr>
+        </p:nvSpPr>
+        <p:spPr>
+          <a:xfrm>
+            <a:off x="839788" y="457200"/>
+            <a:ext cx="3932237" cy="1600200"/>
+          </a:xfrm>
+        </p:spPr>
+        <p:txBody>
+          <a:bodyPr anchor="b"/>
+          <a:lstStyle>
+            <a:lvl1pPr>
+              <a:defRPr sz="3200"/>
+            </a:lvl1pPr>
+          </a:lstStyle>
+          <a:p>
+            <a:r>
+              <a:rPr lang="en-US"/>
+              <a:t>Click to edit Master title style</a:t>
+            </a:r>
+          </a:p>
+        </p:txBody>
+      </p:sp>
+      <p:sp>
+        <p:nvSpPr>
+          <p:cNvPr id="3" name="Content Placeholder 2">
+            <a:extLst>
+              <a:ext uri="{FF2B5EF4-FFF2-40B4-BE49-F238E27FC236}">
+                <a16:creationId xmlns:a16="http://schemas.microsoft.com/office/drawing/2014/main" id="{B3F6C2EB-2067-EDE8-6730-13C68662637A}"/>
+              </a:ext>
+            </a:extLst>
+          </p:cNvPr>
+          <p:cNvSpPr>
+            <a:spLocks noGrp="1"/>
+          </p:cNvSpPr>
+          <p:nvPr>
+            <p:ph idx="1"/>
+          </p:nvPr>
+        </p:nvSpPr>
+        <p:spPr>
+          <a:xfrm>
+            <a:off x="5183188" y="987425"/>
+            <a:ext cx="6172200" cy="4873625"/>
+          </a:xfrm>
+        </p:spPr>
+        <p:txBody>
+          <a:bodyPr/>
+          <a:lstStyle>
+            <a:lvl1pPr>
+              <a:defRPr sz="3200"/>
+            </a:lvl1pPr>
+            <a:lvl2pPr>
+              <a:defRPr sz="2800"/>
+            </a:lvl2pPr>
+            <a:lvl3pPr>
+              <a:defRPr sz="2400"/>
+            </a:lvl3pPr>
+            <a:lvl4pPr>
+              <a:defRPr sz="2000"/>
+            </a:lvl4pPr>
+            <a:lvl5pPr>
+              <a:defRPr sz="2000"/>
+            </a:lvl5pPr>
+            <a:lvl6pPr>
+              <a:defRPr sz="2000"/>
+            </a:lvl6pPr>
+            <a:lvl7pPr>
+              <a:defRPr sz="2000"/>
+            </a:lvl7pPr>
+            <a:lvl8pPr>
+              <a:defRPr sz="2000"/>
+            </a:lvl8pPr>
+            <a:lvl9pPr>
+              <a:defRPr sz="2000"/>
+            </a:lvl9pPr>
+          </a:lstStyle>
+          <a:p>
+            <a:pPr lvl="0"/>
+            <a:r>
+              <a:rPr lang="en-US"/>
+              <a:t>Click to edit Master text styles</a:t>
+            </a:r>
+          </a:p>
+          <a:p>
+            <a:pPr lvl="1"/>
+            <a:r>
+              <a:rPr lang="en-US"/>
+              <a:t>Second level</a:t>
+            </a:r>
+          </a:p>
+          <a:p>
+            <a:pPr lvl="2"/>
+            <a:r>
+              <a:rPr lang="en-US"/>
+              <a:t>Third level</a:t>
+            </a:r>
+          </a:p>
+          <a:p>
+            <a:pPr lvl="3"/>
+            <a:r>
+              <a:rPr lang="en-US"/>
+              <a:t>Fourth level</a:t>
+            </a:r>
+          </a:p>
+          <a:p>
+            <a:pPr lvl="4"/>
+            <a:r>
+              <a:rPr lang="en-US"/>
+              <a:t>Fifth level</a:t>
+            </a:r>
+          </a:p>
+        </p:txBody>
+      </p:sp>
+      <p:sp>
+        <p:nvSpPr>
+          <p:cNvPr id="4" name="Text Placeholder 3">
+            <a:extLst>
+              <a:ext uri="{FF2B5EF4-FFF2-40B4-BE49-F238E27FC236}">
+                <a16:creationId xmlns:a16="http://schemas.microsoft.com/office/drawing/2014/main" id="{09A68C07-B368-9A92-7D94-899AA230A9B3}"/>
+              </a:ext>
+            </a:extLst>
+          </p:cNvPr>
+          <p:cNvSpPr>
+            <a:spLocks noGrp="1"/>
+          </p:cNvSpPr>
+          <p:nvPr>
+            <p:ph type="body" sz="half" idx="2"/>
+          </p:nvPr>
+        </p:nvSpPr>
+        <p:spPr>
+          <a:xfrm>
+            <a:off x="839788" y="2057400"/>
+            <a:ext cx="3932237" cy="3811588"/>
+          </a:xfrm>
+        </p:spPr>
+        <p:txBody>
+          <a:bodyPr/>
+          <a:lstStyle>
+            <a:lvl1pPr marL="0" indent="0">
+              <a:buNone/>
+              <a:defRPr sz="1600"/>
+            </a:lvl1pPr>
+            <a:lvl2pPr marL="457200" indent="0">
+              <a:buNone/>
+              <a:defRPr sz="1400"/>
+            </a:lvl2pPr>
+            <a:lvl3pPr marL="914400" indent="0">
+              <a:buNone/>
+              <a:defRPr sz="1200"/>
+            </a:lvl3pPr>
+            <a:lvl4pPr marL="1371600" indent="0">
+              <a:buNone/>
+              <a:defRPr sz="1000"/>
+            </a:lvl4pPr>
+            <a:lvl5pPr marL="1828800" indent="0">
+              <a:buNone/>
+              <a:defRPr sz="1000"/>
+            </a:lvl5pPr>
+            <a:lvl6pPr marL="2286000" indent="0">
+              <a:buNone/>
+              <a:defRPr sz="1000"/>
+            </a:lvl6pPr>
+            <a:lvl7pPr marL="2743200" indent="0">
+              <a:buNone/>
+              <a:defRPr sz="1000"/>
+            </a:lvl7pPr>
+            <a:lvl8pPr marL="3200400" indent="0">
+              <a:buNone/>
+              <a:defRPr sz="1000"/>
+            </a:lvl8pPr>
+            <a:lvl9pPr marL="3657600" indent="0">
+              <a:buNone/>
+              <a:defRPr sz="1000"/>
+            </a:lvl9pPr>
+          </a:lstStyle>
+          <a:p>
+            <a:pPr lvl="0"/>
+            <a:r>
+              <a:rPr lang="en-US"/>
+              <a:t>Click to edit Master text styles</a:t>
+            </a:r>
+          </a:p>
+        </p:txBody>
+      </p:sp>
+      <p:sp>
+        <p:nvSpPr>
+          <p:cNvPr id="5" name="Date Placeholder 4">
+            <a:extLst>
+              <a:ext uri="{FF2B5EF4-FFF2-40B4-BE49-F238E27FC236}">
+                <a16:creationId xmlns:a16="http://schemas.microsoft.com/office/drawing/2014/main" id="{201C4715-8548-B8CD-E46B-32F52F97AC6B}"/>
+              </a:ext>
+            </a:extLst>
+          </p:cNvPr>
+          <p:cNvSpPr>
+            <a:spLocks noGrp="1"/>
+          </p:cNvSpPr>
+          <p:nvPr>
+            <p:ph type="dt" sz="half" idx="10"/>
+          </p:nvPr>
+        </p:nvSpPr>
+        <p:spPr/>
+        <p:txBody>
+          <a:bodyPr/>
+          <a:lstStyle/>
+          <a:p>
+            <a:fld id="{F10901DB-E840-4150-8207-866BDD25D22F}" type="datetimeFigureOut">
+              <a:rPr lang="en-US" smtClean="0"/>
+              <a:t>9/15/2025</a:t>
+            </a:fld>
+            <a:endParaRPr lang="en-US"/>
+          </a:p>
+        </p:txBody>
+      </p:sp>
+      <p:sp>
+        <p:nvSpPr>
+          <p:cNvPr id="6" name="Footer Placeholder 5">
+            <a:extLst>
+              <a:ext uri="{FF2B5EF4-FFF2-40B4-BE49-F238E27FC236}">
+                <a16:creationId xmlns:a16="http://schemas.microsoft.com/office/drawing/2014/main" id="{D94805EB-68F0-0925-B5E2-992A26ACDCC2}"/>
+              </a:ext>
+            </a:extLst>
+          </p:cNvPr>
+          <p:cNvSpPr>
+            <a:spLocks noGrp="1"/>
+          </p:cNvSpPr>
+          <p:nvPr>
+            <p:ph type="ftr" sz="quarter" idx="11"/>
+          </p:nvPr>
+        </p:nvSpPr>
+        <p:spPr/>
+        <p:txBody>
+          <a:bodyPr/>
+          <a:lstStyle/>
+          <a:p>
+            <a:endParaRPr lang="en-US"/>
+          </a:p>
+        </p:txBody>
+      </p:sp>
+      <p:sp>
+        <p:nvSpPr>
+          <p:cNvPr id="7" name="Slide Number Placeholder 6">
+            <a:extLst>
+              <a:ext uri="{FF2B5EF4-FFF2-40B4-BE49-F238E27FC236}">
+                <a16:creationId xmlns:a16="http://schemas.microsoft.com/office/drawing/2014/main" id="{0678064D-3984-66E1-79F6-BF412DE9007B}"/>
+              </a:ext>
+            </a:extLst>
+          </p:cNvPr>
+          <p:cNvSpPr>
+            <a:spLocks noGrp="1"/>
+          </p:cNvSpPr>
+          <p:nvPr>
+            <p:ph type="sldNum" sz="quarter" idx="12"/>
+          </p:nvPr>
+        </p:nvSpPr>
+        <p:spPr/>
+        <p:txBody>
+          <a:bodyPr/>
+          <a:lstStyle/>
+          <a:p>
+            <a:fld id="{C41024BC-5968-4735-8D30-B72DEF6BE683}" type="slidenum">
+              <a:rPr lang="en-US" smtClean="0"/>
+              <a:t>‹#›</a:t>
+            </a:fld>
+            <a:endParaRPr lang="en-US"/>
+          </a:p>
+        </p:txBody>
+      </p:sp>
+    </p:spTree>
+    <p:extLst>
+      <p:ext uri="{BB962C8B-B14F-4D97-AF65-F5344CB8AC3E}">
+        <p14:creationId xmlns:p14="http://schemas.microsoft.com/office/powerpoint/2010/main" val="2387889952"/>
+      </p:ext>
+    </p:extLst>
+  </p:cSld>
+  <p:clrMapOvr>
+    <a:masterClrMapping/>
+  </p:clrMapOvr>
+</p:sldLayout>
+</file>
+
+<file path=ppt/slideLayouts/slideLayout9.xml><?xml version="1.0" encoding="utf-8"?>
+<p:sldLayout xmlns:a="http://schemas.openxmlformats.org/drawingml/2006/main" xmlns:r="http://schemas.openxmlformats.org/officeDocument/2006/relationships" xmlns:p="http://schemas.openxmlformats.org/presentationml/2006/main" type="picTx" preserve="1">
+  <p:cSld name="Picture with Caption">
+    <p:spTree>
+      <p:nvGrpSpPr>
+        <p:cNvPr id="1" name=""/>
+        <p:cNvGrpSpPr/>
+        <p:nvPr/>
+      </p:nvGrpSpPr>
+      <p:grpSpPr>
+        <a:xfrm>
+          <a:off x="0" y="0"/>
+          <a:ext cx="0" cy="0"/>
+          <a:chOff x="0" y="0"/>
+          <a:chExt cx="0" cy="0"/>
+        </a:xfrm>
+      </p:grpSpPr>
+      <p:sp>
+        <p:nvSpPr>
+          <p:cNvPr id="2" name="Title 1">
+            <a:extLst>
+              <a:ext uri="{FF2B5EF4-FFF2-40B4-BE49-F238E27FC236}">
+                <a16:creationId xmlns:a16="http://schemas.microsoft.com/office/drawing/2014/main" id="{0BAE40A8-7CE6-6E2F-987D-F9931444B2F4}"/>
+              </a:ext>
+            </a:extLst>
+          </p:cNvPr>
+          <p:cNvSpPr>
+            <a:spLocks noGrp="1"/>
+          </p:cNvSpPr>
+          <p:nvPr>
+            <p:ph type="title"/>
+          </p:nvPr>
+        </p:nvSpPr>
+        <p:spPr>
+          <a:xfrm>
+            <a:off x="839788" y="457200"/>
+            <a:ext cx="3932237" cy="1600200"/>
+          </a:xfrm>
+        </p:spPr>
+        <p:txBody>
+          <a:bodyPr anchor="b"/>
+          <a:lstStyle>
+            <a:lvl1pPr>
+              <a:defRPr sz="3200"/>
+            </a:lvl1pPr>
+          </a:lstStyle>
+          <a:p>
+            <a:r>
+              <a:rPr lang="en-US"/>
+              <a:t>Click to edit Master title style</a:t>
+            </a:r>
+          </a:p>
+        </p:txBody>
+      </p:sp>
+      <p:sp>
+        <p:nvSpPr>
+          <p:cNvPr id="3" name="Picture Placeholder 2">
+            <a:extLst>
+              <a:ext uri="{FF2B5EF4-FFF2-40B4-BE49-F238E27FC236}">
+                <a16:creationId xmlns:a16="http://schemas.microsoft.com/office/drawing/2014/main" id="{C49A3B3C-B1CD-FC66-30C0-066CC8711E3C}"/>
+              </a:ext>
+            </a:extLst>
+          </p:cNvPr>
+          <p:cNvSpPr>
+            <a:spLocks noGrp="1"/>
+          </p:cNvSpPr>
+          <p:nvPr>
+            <p:ph type="pic" idx="1"/>
+          </p:nvPr>
+        </p:nvSpPr>
+        <p:spPr>
+          <a:xfrm>
+            <a:off x="5183188" y="987425"/>
+            <a:ext cx="6172200" cy="4873625"/>
+          </a:xfrm>
+        </p:spPr>
+        <p:txBody>
+          <a:bodyPr/>
+          <a:lstStyle>
+            <a:lvl1pPr marL="0" indent="0">
+              <a:buNone/>
+              <a:defRPr sz="3200"/>
+            </a:lvl1pPr>
+            <a:lvl2pPr marL="457200" indent="0">
+              <a:buNone/>
+              <a:defRPr sz="2800"/>
+            </a:lvl2pPr>
+            <a:lvl3pPr marL="914400" indent="0">
+              <a:buNone/>
+              <a:defRPr sz="2400"/>
+            </a:lvl3pPr>
+            <a:lvl4pPr marL="1371600" indent="0">
+              <a:buNone/>
+              <a:defRPr sz="2000"/>
+            </a:lvl4pPr>
+            <a:lvl5pPr marL="1828800" indent="0">
+              <a:buNone/>
+              <a:defRPr sz="2000"/>
+            </a:lvl5pPr>
+            <a:lvl6pPr marL="2286000" indent="0">
+              <a:buNone/>
+              <a:defRPr sz="2000"/>
+            </a:lvl6pPr>
+            <a:lvl7pPr marL="2743200" indent="0">
+              <a:buNone/>
+              <a:defRPr sz="2000"/>
+            </a:lvl7pPr>
+            <a:lvl8pPr marL="3200400" indent="0">
+              <a:buNone/>
+              <a:defRPr sz="2000"/>
+            </a:lvl8pPr>
+            <a:lvl9pPr marL="3657600" indent="0">
+              <a:buNone/>
+              <a:defRPr sz="2000"/>
+            </a:lvl9pPr>
+          </a:lstStyle>
+          <a:p>
+            <a:endParaRPr lang="en-US"/>
+          </a:p>
+        </p:txBody>
+      </p:sp>
+      <p:sp>
+        <p:nvSpPr>
+          <p:cNvPr id="4" name="Text Placeholder 3">
+            <a:extLst>
+              <a:ext uri="{FF2B5EF4-FFF2-40B4-BE49-F238E27FC236}">
+                <a16:creationId xmlns:a16="http://schemas.microsoft.com/office/drawing/2014/main" id="{C7130723-2359-C212-1784-4C60E5DC26B9}"/>
+              </a:ext>
+            </a:extLst>
+          </p:cNvPr>
+          <p:cNvSpPr>
+            <a:spLocks noGrp="1"/>
+          </p:cNvSpPr>
+          <p:nvPr>
+            <p:ph type="body" sz="half" idx="2"/>
+          </p:nvPr>
+        </p:nvSpPr>
+        <p:spPr>
+          <a:xfrm>
+            <a:off x="839788" y="2057400"/>
+            <a:ext cx="3932237" cy="3811588"/>
+          </a:xfrm>
+        </p:spPr>
+        <p:txBody>
+          <a:bodyPr/>
+          <a:lstStyle>
+            <a:lvl1pPr marL="0" indent="0">
+              <a:buNone/>
+              <a:defRPr sz="1600"/>
+            </a:lvl1pPr>
+            <a:lvl2pPr marL="457200" indent="0">
+              <a:buNone/>
+              <a:defRPr sz="1400"/>
+            </a:lvl2pPr>
+            <a:lvl3pPr marL="914400" indent="0">
+              <a:buNone/>
+              <a:defRPr sz="1200"/>
+            </a:lvl3pPr>
+            <a:lvl4pPr marL="1371600" indent="0">
+              <a:buNone/>
+              <a:defRPr sz="1000"/>
+            </a:lvl4pPr>
+            <a:lvl5pPr marL="1828800" indent="0">
+              <a:buNone/>
+              <a:defRPr sz="1000"/>
+            </a:lvl5pPr>
+            <a:lvl6pPr marL="2286000" indent="0">
+              <a:buNone/>
+              <a:defRPr sz="1000"/>
+            </a:lvl6pPr>
+            <a:lvl7pPr marL="2743200" indent="0">
+              <a:buNone/>
+              <a:defRPr sz="1000"/>
+            </a:lvl7pPr>
+            <a:lvl8pPr marL="3200400" indent="0">
+              <a:buNone/>
+              <a:defRPr sz="1000"/>
+            </a:lvl8pPr>
+            <a:lvl9pPr marL="3657600" indent="0">
+              <a:buNone/>
+              <a:defRPr sz="1000"/>
+            </a:lvl9pPr>
+          </a:lstStyle>
+          <a:p>
+            <a:pPr lvl="0"/>
+            <a:r>
+              <a:rPr lang="en-US"/>
+              <a:t>Click to edit Master text styles</a:t>
+            </a:r>
+          </a:p>
+        </p:txBody>
+      </p:sp>
+      <p:sp>
+        <p:nvSpPr>
+          <p:cNvPr id="5" name="Date Placeholder 4">
+            <a:extLst>
+              <a:ext uri="{FF2B5EF4-FFF2-40B4-BE49-F238E27FC236}">
+                <a16:creationId xmlns:a16="http://schemas.microsoft.com/office/drawing/2014/main" id="{3286E1BF-418B-5A5E-B8CE-971EBA46EBA1}"/>
+              </a:ext>
+            </a:extLst>
+          </p:cNvPr>
+          <p:cNvSpPr>
+            <a:spLocks noGrp="1"/>
+          </p:cNvSpPr>
+          <p:nvPr>
+            <p:ph type="dt" sz="half" idx="10"/>
+          </p:nvPr>
+        </p:nvSpPr>
+        <p:spPr/>
+        <p:txBody>
+          <a:bodyPr/>
+          <a:lstStyle/>
+          <a:p>
+            <a:fld id="{F10901DB-E840-4150-8207-866BDD25D22F}" type="datetimeFigureOut">
+              <a:rPr lang="en-US" smtClean="0"/>
+              <a:t>9/15/2025</a:t>
+            </a:fld>
+            <a:endParaRPr lang="en-US"/>
+          </a:p>
+        </p:txBody>
+      </p:sp>
+      <p:sp>
+        <p:nvSpPr>
+          <p:cNvPr id="6" name="Footer Placeholder 5">
+            <a:extLst>
+              <a:ext uri="{FF2B5EF4-FFF2-40B4-BE49-F238E27FC236}">
+                <a16:creationId xmlns:a16="http://schemas.microsoft.com/office/drawing/2014/main" id="{0D858B19-C047-7376-4094-335A262B8771}"/>
+              </a:ext>
+            </a:extLst>
+          </p:cNvPr>
+          <p:cNvSpPr>
+            <a:spLocks noGrp="1"/>
+          </p:cNvSpPr>
+          <p:nvPr>
+            <p:ph type="ftr" sz="quarter" idx="11"/>
+          </p:nvPr>
+        </p:nvSpPr>
+        <p:spPr/>
+        <p:txBody>
+          <a:bodyPr/>
+          <a:lstStyle/>
+          <a:p>
+            <a:endParaRPr lang="en-US"/>
+          </a:p>
+        </p:txBody>
+      </p:sp>
+      <p:sp>
+        <p:nvSpPr>
+          <p:cNvPr id="7" name="Slide Number Placeholder 6">
+            <a:extLst>
+              <a:ext uri="{FF2B5EF4-FFF2-40B4-BE49-F238E27FC236}">
+                <a16:creationId xmlns:a16="http://schemas.microsoft.com/office/drawing/2014/main" id="{AEE3E811-B1A3-3062-66D6-3B924C39DCF1}"/>
+              </a:ext>
+            </a:extLst>
+          </p:cNvPr>
+          <p:cNvSpPr>
+            <a:spLocks noGrp="1"/>
+          </p:cNvSpPr>
+          <p:nvPr>
+            <p:ph type="sldNum" sz="quarter" idx="12"/>
+          </p:nvPr>
+        </p:nvSpPr>
+        <p:spPr/>
+        <p:txBody>
+          <a:bodyPr/>
+          <a:lstStyle/>
+          <a:p>
+            <a:fld id="{C41024BC-5968-4735-8D30-B72DEF6BE683}" type="slidenum">
+              <a:rPr lang="en-US" smtClean="0"/>
+              <a:t>‹#›</a:t>
+            </a:fld>
+            <a:endParaRPr lang="en-US"/>
+          </a:p>
+        </p:txBody>
+      </p:sp>
+    </p:spTree>
+    <p:extLst>
+      <p:ext uri="{BB962C8B-B14F-4D97-AF65-F5344CB8AC3E}">
+        <p14:creationId xmlns:p14="http://schemas.microsoft.com/office/powerpoint/2010/main" val="2214051039"/>
+      </p:ext>
+    </p:extLst>
+  </p:cSld>
+  <p:clrMapOvr>
+    <a:masterClrMapping/>
+  </p:clrMapOvr>
+</p:sldLayout>
+</file>
+
 <file path=ppt/slideMasters/slideMaster1.xml><?xml version="1.0" encoding="utf-8"?>
+<p:sldMaster xmlns:a="http://schemas.openxmlformats.org/drawingml/2006/main" xmlns:r="http://schemas.openxmlformats.org/officeDocument/2006/relationships" xmlns:p="http://schemas.openxmlformats.org/presentationml/2006/main">
+  <p:cSld>
+    <p:bg>
+      <p:bgRef idx="1001">
+        <a:schemeClr val="bg1"/>
+      </p:bgRef>
+    </p:bg>
+    <p:spTree>
+      <p:nvGrpSpPr>
+        <p:cNvPr id="1" name=""/>
+        <p:cNvGrpSpPr/>
+        <p:nvPr/>
+      </p:nvGrpSpPr>
+      <p:grpSpPr>
+        <a:xfrm>
+          <a:off x="0" y="0"/>
+          <a:ext cx="0" cy="0"/>
+          <a:chOff x="0" y="0"/>
+          <a:chExt cx="0" cy="0"/>
+        </a:xfrm>
+      </p:grpSpPr>
+      <p:sp>
+        <p:nvSpPr>
+          <p:cNvPr id="2" name="Title Placeholder 1">
+            <a:extLst>
+              <a:ext uri="{FF2B5EF4-FFF2-40B4-BE49-F238E27FC236}">
+                <a16:creationId xmlns:a16="http://schemas.microsoft.com/office/drawing/2014/main" id="{F3E749AA-DFC1-412B-8D1A-31ABB7D916F0}"/>
+              </a:ext>
+            </a:extLst>
+          </p:cNvPr>
+          <p:cNvSpPr>
+            <a:spLocks noGrp="1"/>
+          </p:cNvSpPr>
+          <p:nvPr>
+            <p:ph type="title"/>
+          </p:nvPr>
+        </p:nvSpPr>
+        <p:spPr>
+          <a:xfrm>
+            <a:off x="838200" y="365125"/>
+            <a:ext cx="10515600" cy="1325563"/>
+          </a:xfrm>
+          <a:prstGeom prst="rect">
+            <a:avLst/>
+          </a:prstGeom>
+        </p:spPr>
+        <p:txBody>
+          <a:bodyPr vert="horz" lIns="91440" tIns="45720" rIns="91440" bIns="45720" rtlCol="0" anchor="ctr">
+            <a:normAutofit/>
+          </a:bodyPr>
+          <a:lstStyle/>
+          <a:p>
+            <a:r>
+              <a:rPr lang="en-US"/>
+              <a:t>Click to edit Master title style</a:t>
+            </a:r>
+          </a:p>
+        </p:txBody>
+      </p:sp>
+      <p:sp>
+        <p:nvSpPr>
+          <p:cNvPr id="3" name="Text Placeholder 2">
+            <a:extLst>
+              <a:ext uri="{FF2B5EF4-FFF2-40B4-BE49-F238E27FC236}">
+                <a16:creationId xmlns:a16="http://schemas.microsoft.com/office/drawing/2014/main" id="{39CA5D24-207D-F318-C215-A84F996DFEC3}"/>
+              </a:ext>
+            </a:extLst>
+          </p:cNvPr>
+          <p:cNvSpPr>
+            <a:spLocks noGrp="1"/>
+          </p:cNvSpPr>
+          <p:nvPr>
+            <p:ph type="body" idx="1"/>
+          </p:nvPr>
+        </p:nvSpPr>
+        <p:spPr>
+          <a:xfrm>
+            <a:off x="838200" y="1825625"/>
+            <a:ext cx="10515600" cy="4351338"/>
+          </a:xfrm>
+          <a:prstGeom prst="rect">
+            <a:avLst/>
+          </a:prstGeom>
+        </p:spPr>
+        <p:txBody>
+          <a:bodyPr vert="horz" lIns="91440" tIns="45720" rIns="91440" bIns="45720" rtlCol="0">
+            <a:normAutofit/>
+          </a:bodyPr>
+          <a:lstStyle/>
+          <a:p>
+            <a:pPr lvl="0"/>
+            <a:r>
+              <a:rPr lang="en-US"/>
+              <a:t>Click to edit Master text styles</a:t>
+            </a:r>
+          </a:p>
+          <a:p>
+            <a:pPr lvl="1"/>
+            <a:r>
+              <a:rPr lang="en-US"/>
+              <a:t>Second level</a:t>
+            </a:r>
+          </a:p>
+          <a:p>
+            <a:pPr lvl="2"/>
+            <a:r>
+              <a:rPr lang="en-US"/>
+              <a:t>Third level</a:t>
+            </a:r>
+          </a:p>
+          <a:p>
+            <a:pPr lvl="3"/>
+            <a:r>
+              <a:rPr lang="en-US"/>
+              <a:t>Fourth level</a:t>
+            </a:r>
+          </a:p>
+          <a:p>
+            <a:pPr lvl="4"/>
+            <a:r>
+              <a:rPr lang="en-US"/>
+              <a:t>Fifth level</a:t>
+            </a:r>
+          </a:p>
+        </p:txBody>
+      </p:sp>
+      <p:sp>
+        <p:nvSpPr>
+          <p:cNvPr id="4" name="Date Placeholder 3">
+            <a:extLst>
+              <a:ext uri="{FF2B5EF4-FFF2-40B4-BE49-F238E27FC236}">
+                <a16:creationId xmlns:a16="http://schemas.microsoft.com/office/drawing/2014/main" id="{BDCF0A67-ABB6-4314-7B8E-00F52B15C83F}"/>
+              </a:ext>
+            </a:extLst>
+          </p:cNvPr>
+          <p:cNvSpPr>
+            <a:spLocks noGrp="1"/>
+          </p:cNvSpPr>
+          <p:nvPr>
+            <p:ph type="dt" sz="half" idx="2"/>
+          </p:nvPr>
+        </p:nvSpPr>
+        <p:spPr>
+          <a:xfrm>
+            <a:off x="838200" y="6356350"/>
+            <a:ext cx="2743200" cy="365125"/>
+          </a:xfrm>
+          <a:prstGeom prst="rect">
+            <a:avLst/>
+          </a:prstGeom>
+        </p:spPr>
+        <p:txBody>
+          <a:bodyPr vert="horz" lIns="91440" tIns="45720" rIns="91440" bIns="45720" rtlCol="0" anchor="ctr"/>
+          <a:lstStyle>
+            <a:lvl1pPr algn="l">
+              <a:defRPr sz="1200">
+                <a:solidFill>
+                  <a:schemeClr val="tx1">
+                    <a:tint val="82000"/>
+                  </a:schemeClr>
+                </a:solidFill>
+              </a:defRPr>
+            </a:lvl1pPr>
+          </a:lstStyle>
+          <a:p>
+            <a:fld id="{F10901DB-E840-4150-8207-866BDD25D22F}" type="datetimeFigureOut">
+              <a:rPr lang="en-US" smtClean="0"/>
+              <a:t>9/15/2025</a:t>
+            </a:fld>
+            <a:endParaRPr lang="en-US"/>
+          </a:p>
+        </p:txBody>
+      </p:sp>
+      <p:sp>
+        <p:nvSpPr>
+          <p:cNvPr id="5" name="Footer Placeholder 4">
+            <a:extLst>
+              <a:ext uri="{FF2B5EF4-FFF2-40B4-BE49-F238E27FC236}">
+                <a16:creationId xmlns:a16="http://schemas.microsoft.com/office/drawing/2014/main" id="{1A1418D7-FCBF-5B99-17E2-6C586E07222B}"/>
+              </a:ext>
+            </a:extLst>
+          </p:cNvPr>
+          <p:cNvSpPr>
+            <a:spLocks noGrp="1"/>
+          </p:cNvSpPr>
+          <p:nvPr>
+            <p:ph type="ftr" sz="quarter" idx="3"/>
+          </p:nvPr>
+        </p:nvSpPr>
+        <p:spPr>
+          <a:xfrm>
+            <a:off x="4038600" y="6356350"/>
+            <a:ext cx="4114800" cy="365125"/>
+          </a:xfrm>
+          <a:prstGeom prst="rect">
+            <a:avLst/>
+          </a:prstGeom>
+        </p:spPr>
+        <p:txBody>
+          <a:bodyPr vert="horz" lIns="91440" tIns="45720" rIns="91440" bIns="45720" rtlCol="0" anchor="ctr"/>
+          <a:lstStyle>
+            <a:lvl1pPr algn="ctr">
+              <a:defRPr sz="1200">
+                <a:solidFill>
+                  <a:schemeClr val="tx1">
+                    <a:tint val="82000"/>
+                  </a:schemeClr>
+                </a:solidFill>
+              </a:defRPr>
+            </a:lvl1pPr>
+          </a:lstStyle>
+          <a:p>
+            <a:endParaRPr lang="en-US"/>
+          </a:p>
+        </p:txBody>
+      </p:sp>
+      <p:sp>
+        <p:nvSpPr>
+          <p:cNvPr id="6" name="Slide Number Placeholder 5">
+            <a:extLst>
+              <a:ext uri="{FF2B5EF4-FFF2-40B4-BE49-F238E27FC236}">
+                <a16:creationId xmlns:a16="http://schemas.microsoft.com/office/drawing/2014/main" id="{D5FCDC88-7F57-5757-67CB-EED58993590F}"/>
+              </a:ext>
+            </a:extLst>
+          </p:cNvPr>
+          <p:cNvSpPr>
+            <a:spLocks noGrp="1"/>
+          </p:cNvSpPr>
+          <p:nvPr>
+            <p:ph type="sldNum" sz="quarter" idx="4"/>
+          </p:nvPr>
+        </p:nvSpPr>
+        <p:spPr>
+          <a:xfrm>
+            <a:off x="8610600" y="6356350"/>
+            <a:ext cx="2743200" cy="365125"/>
+          </a:xfrm>
+          <a:prstGeom prst="rect">
+            <a:avLst/>
+          </a:prstGeom>
+        </p:spPr>
+        <p:txBody>
+          <a:bodyPr vert="horz" lIns="91440" tIns="45720" rIns="91440" bIns="45720" rtlCol="0" anchor="ctr"/>
+          <a:lstStyle>
+            <a:lvl1pPr algn="r">
+              <a:defRPr sz="1200">
+                <a:solidFill>
+                  <a:schemeClr val="tx1">
+                    <a:tint val="82000"/>
+                  </a:schemeClr>
+                </a:solidFill>
+              </a:defRPr>
+            </a:lvl1pPr>
+          </a:lstStyle>
+          <a:p>
+            <a:fld id="{C41024BC-5968-4735-8D30-B72DEF6BE683}" type="slidenum">
+              <a:rPr lang="en-US" smtClean="0"/>
+              <a:t>‹#›</a:t>
+            </a:fld>
+            <a:endParaRPr lang="en-US"/>
+          </a:p>
+        </p:txBody>
+      </p:sp>
+    </p:spTree>
+    <p:extLst>
+      <p:ext uri="{BB962C8B-B14F-4D97-AF65-F5344CB8AC3E}">
+        <p14:creationId xmlns:p14="http://schemas.microsoft.com/office/powerpoint/2010/main" val="3011894170"/>
+      </p:ext>
+    </p:extLst>
+  </p:cSld>
+  <p:clrMap bg1="lt1" tx1="dk1" bg2="lt2" tx2="dk2" accent1="accent1" accent2="accent2" accent3="accent3" accent4="accent4" accent5="accent5" accent6="accent6" hlink="hlink" folHlink="folHlink"/>
+  <p:sldLayoutIdLst>
+    <p:sldLayoutId id="2147483649" r:id="rId1"/>
+    <p:sldLayoutId id="2147483650" r:id="rId2"/>
+    <p:sldLayoutId id="2147483651" r:id="rId3"/>
+    <p:sldLayoutId id="2147483652" r:id="rId4"/>
+    <p:sldLayoutId id="2147483653" r:id="rId5"/>
+    <p:sldLayoutId id="2147483654" r:id="rId6"/>
+    <p:sldLayoutId id="2147483655" r:id="rId7"/>
+    <p:sldLayoutId id="2147483656" r:id="rId8"/>
+    <p:sldLayoutId id="2147483657" r:id="rId9"/>
+    <p:sldLayoutId id="2147483658" r:id="rId10"/>
+    <p:sldLayoutId id="2147483659" r:id="rId11"/>
+  </p:sldLayoutIdLst>
+  <p:txStyles>
+    <p:titleStyle>
+      <a:lvl1pPr algn="l" defTabSz="914400" rtl="0" eaLnBrk="1" latinLnBrk="0" hangingPunct="1">
+        <a:lnSpc>
+          <a:spcPct val="90000"/>
+        </a:lnSpc>
+        <a:spcBef>
+          <a:spcPct val="0"/>
+        </a:spcBef>
+        <a:buNone/>
+        <a:defRPr sz="4400" kern="1200">
+          <a:solidFill>
+            <a:schemeClr val="tx1"/>
+          </a:solidFill>
+          <a:latin typeface="+mj-lt"/>
+          <a:ea typeface="+mj-ea"/>
+          <a:cs typeface="+mj-cs"/>
+        </a:defRPr>
+      </a:lvl1pPr>
+    </p:titleStyle>
+    <p:bodyStyle>
+      <a:lvl1pPr marL="228600" indent="-228600" algn="l" defTabSz="914400" rtl="0" eaLnBrk="1" latinLnBrk="0" hangingPunct="1">
+        <a:lnSpc>
+          <a:spcPct val="90000"/>
+        </a:lnSpc>
+        <a:spcBef>
+          <a:spcPts val="1000"/>
+        </a:spcBef>
+        <a:buFont typeface="Arial" panose="020B0604020202020204" pitchFamily="34" charset="0"/>
+        <a:buChar char="•"/>
+        <a:defRPr sz="2800" kern="1200">
+          <a:solidFill>
+            <a:schemeClr val="tx1"/>
+          </a:solidFill>
+          <a:latin typeface="+mn-lt"/>
+          <a:ea typeface="+mn-ea"/>
+          <a:cs typeface="+mn-cs"/>
+        </a:defRPr>
+      </a:lvl1pPr>
+      <a:lvl2pPr marL="685800" indent="-228600" algn="l" defTabSz="914400" rtl="0" eaLnBrk="1" latinLnBrk="0" hangingPunct="1">
+        <a:lnSpc>
+          <a:spcPct val="90000"/>
+        </a:lnSpc>
+        <a:spcBef>
+          <a:spcPts val="500"/>
+        </a:spcBef>
+        <a:buFont typeface="Arial" panose="020B0604020202020204" pitchFamily="34" charset="0"/>
+        <a:buChar char="•"/>
+        <a:defRPr sz="2400" kern="1200">
+          <a:solidFill>
+            <a:schemeClr val="tx1"/>
+          </a:solidFill>
+          <a:latin typeface="+mn-lt"/>
+          <a:ea typeface="+mn-ea"/>
+          <a:cs typeface="+mn-cs"/>
+        </a:defRPr>
+      </a:lvl2pPr>
+      <a:lvl3pPr marL="1143000" indent="-228600" algn="l" defTabSz="914400" rtl="0" eaLnBrk="1" latinLnBrk="0" hangingPunct="1">
+        <a:lnSpc>
+          <a:spcPct val="90000"/>
+        </a:lnSpc>
+        <a:spcBef>
+          <a:spcPts val="500"/>
+        </a:spcBef>
+        <a:buFont typeface="Arial" panose="020B0604020202020204" pitchFamily="34" charset="0"/>
+        <a:buChar char="•"/>
+        <a:defRPr sz="2000" kern="1200">
+          <a:solidFill>
+            <a:schemeClr val="tx1"/>
+          </a:solidFill>
+          <a:latin typeface="+mn-lt"/>
+          <a:ea typeface="+mn-ea"/>
+          <a:cs typeface="+mn-cs"/>
+        </a:defRPr>
+      </a:lvl3pPr>
+      <a:lvl4pPr marL="1600200" indent="-228600" algn="l" defTabSz="914400" rtl="0" eaLnBrk="1" latinLnBrk="0" hangingPunct="1">
+        <a:lnSpc>
+          <a:spcPct val="90000"/>
+        </a:lnSpc>
+        <a:spcBef>
+          <a:spcPts val="500"/>
+        </a:spcBef>
+        <a:buFont typeface="Arial" panose="020B0604020202020204" pitchFamily="34" charset="0"/>
+        <a:buChar char="•"/>
+        <a:defRPr sz="1800" kern="1200">
+          <a:solidFill>
+            <a:schemeClr val="tx1"/>
+          </a:solidFill>
+          <a:latin typeface="+mn-lt"/>
+          <a:ea typeface="+mn-ea"/>
+          <a:cs typeface="+mn-cs"/>
+        </a:defRPr>
+      </a:lvl4pPr>
+      <a:lvl5pPr marL="2057400" indent="-228600" algn="l" defTabSz="914400" rtl="0" eaLnBrk="1" latinLnBrk="0" hangingPunct="1">
+        <a:lnSpc>
+          <a:spcPct val="90000"/>
+        </a:lnSpc>
+        <a:spcBef>
+          <a:spcPts val="500"/>
+        </a:spcBef>
+        <a:buFont typeface="Arial" panose="020B0604020202020204" pitchFamily="34" charset="0"/>
+        <a:buChar char="•"/>
+        <a:defRPr sz="1800" kern="1200">
+          <a:solidFill>
+            <a:schemeClr val="tx1"/>
+          </a:solidFill>
+          <a:latin typeface="+mn-lt"/>
+          <a:ea typeface="+mn-ea"/>
+          <a:cs typeface="+mn-cs"/>
+        </a:defRPr>
+      </a:lvl5pPr>
+      <a:lvl6pPr marL="2514600" indent="-228600" algn="l" defTabSz="914400" rtl="0" eaLnBrk="1" latinLnBrk="0" hangingPunct="1">
+        <a:lnSpc>
+          <a:spcPct val="90000"/>
+        </a:lnSpc>
+        <a:spcBef>
+          <a:spcPts val="500"/>
+        </a:spcBef>
+        <a:buFont typeface="Arial" panose="020B0604020202020204" pitchFamily="34" charset="0"/>
+        <a:buChar char="•"/>
+        <a:defRPr sz="1800" kern="1200">
+          <a:solidFill>
+            <a:schemeClr val="tx1"/>
+          </a:solidFill>
+          <a:latin typeface="+mn-lt"/>
+          <a:ea typeface="+mn-ea"/>
+          <a:cs typeface="+mn-cs"/>
+        </a:defRPr>
+      </a:lvl6pPr>
+      <a:lvl7pPr marL="2971800" indent="-228600" algn="l" defTabSz="914400" rtl="0" eaLnBrk="1" latinLnBrk="0" hangingPunct="1">
+        <a:lnSpc>
+          <a:spcPct val="90000"/>
+        </a:lnSpc>
+        <a:spcBef>
+          <a:spcPts val="500"/>
+        </a:spcBef>
+        <a:buFont typeface="Arial" panose="020B0604020202020204" pitchFamily="34" charset="0"/>
+        <a:buChar char="•"/>
+        <a:defRPr sz="1800" kern="1200">
+          <a:solidFill>
+            <a:schemeClr val="tx1"/>
+          </a:solidFill>
+          <a:latin typeface="+mn-lt"/>
+          <a:ea typeface="+mn-ea"/>
+          <a:cs typeface="+mn-cs"/>
+        </a:defRPr>
+      </a:lvl7pPr>
+      <a:lvl8pPr marL="3429000" indent="-228600" algn="l" defTabSz="914400" rtl="0" eaLnBrk="1" latinLnBrk="0" hangingPunct="1">
+        <a:lnSpc>
+          <a:spcPct val="90000"/>
+        </a:lnSpc>
+        <a:spcBef>
+          <a:spcPts val="500"/>
+        </a:spcBef>
+        <a:buFont typeface="Arial" panose="020B0604020202020204" pitchFamily="34" charset="0"/>
+        <a:buChar char="•"/>
+        <a:defRPr sz="1800" kern="1200">
+          <a:solidFill>
+            <a:schemeClr val="tx1"/>
+          </a:solidFill>
+          <a:latin typeface="+mn-lt"/>
+          <a:ea typeface="+mn-ea"/>
+          <a:cs typeface="+mn-cs"/>
+        </a:defRPr>
+      </a:lvl8pPr>
+      <a:lvl9pPr marL="3886200" indent="-228600" algn="l" defTabSz="914400" rtl="0" eaLnBrk="1" latinLnBrk="0" hangingPunct="1">
+        <a:lnSpc>
+          <a:spcPct val="90000"/>
+        </a:lnSpc>
+        <a:spcBef>
+          <a:spcPts val="500"/>
+        </a:spcBef>
+        <a:buFont typeface="Arial" panose="020B0604020202020204" pitchFamily="34" charset="0"/>
+        <a:buChar char="•"/>
+        <a:defRPr sz="1800" kern="1200">
+          <a:solidFill>
+            <a:schemeClr val="tx1"/>
+          </a:solidFill>
+          <a:latin typeface="+mn-lt"/>
+          <a:ea typeface="+mn-ea"/>
+          <a:cs typeface="+mn-cs"/>
+        </a:defRPr>
+      </a:lvl9pPr>
+    </p:bodyStyle>
+    <p:otherStyle>
+      <a:defPPr>
+        <a:defRPr lang="en-US"/>
+      </a:defPPr>
+      <a:lvl1pPr marL="0" algn="l" defTabSz="914400" rtl="0" eaLnBrk="1" latinLnBrk="0" hangingPunct="1">
+        <a:defRPr sz="1800" kern="1200">
+          <a:solidFill>
+            <a:schemeClr val="tx1"/>
+          </a:solidFill>
+          <a:latin typeface="+mn-lt"/>
+          <a:ea typeface="+mn-ea"/>
+          <a:cs typeface="+mn-cs"/>
+        </a:defRPr>
+      </a:lvl1pPr>
+      <a:lvl2pPr marL="457200" algn="l" defTabSz="914400" rtl="0" eaLnBrk="1" latinLnBrk="0" hangingPunct="1">
+        <a:defRPr sz="1800" kern="1200">
+          <a:solidFill>
+            <a:schemeClr val="tx1"/>
+          </a:solidFill>
+          <a:latin typeface="+mn-lt"/>
+          <a:ea typeface="+mn-ea"/>
+          <a:cs typeface="+mn-cs"/>
+        </a:defRPr>
+      </a:lvl2pPr>
+      <a:lvl3pPr marL="914400" algn="l" defTabSz="914400" rtl="0" eaLnBrk="1" latinLnBrk="0" hangingPunct="1">
+        <a:defRPr sz="1800" kern="1200">
+          <a:solidFill>
+            <a:schemeClr val="tx1"/>
+          </a:solidFill>
+          <a:latin typeface="+mn-lt"/>
+          <a:ea typeface="+mn-ea"/>
+          <a:cs typeface="+mn-cs"/>
+        </a:defRPr>
+      </a:lvl3pPr>
+      <a:lvl4pPr marL="1371600" algn="l" defTabSz="914400" rtl="0" eaLnBrk="1" latinLnBrk="0" hangingPunct="1">
+        <a:defRPr sz="1800" kern="1200">
+          <a:solidFill>
+            <a:schemeClr val="tx1"/>
+          </a:solidFill>
+          <a:latin typeface="+mn-lt"/>
+          <a:ea typeface="+mn-ea"/>
+          <a:cs typeface="+mn-cs"/>
+        </a:defRPr>
+      </a:lvl4pPr>
+      <a:lvl5pPr marL="1828800" algn="l" defTabSz="914400" rtl="0" eaLnBrk="1" latinLnBrk="0" hangingPunct="1">
+        <a:defRPr sz="1800" kern="1200">
+          <a:solidFill>
+            <a:schemeClr val="tx1"/>
+          </a:solidFill>
+          <a:latin typeface="+mn-lt"/>
+          <a:ea typeface="+mn-ea"/>
+          <a:cs typeface="+mn-cs"/>
+        </a:defRPr>
+      </a:lvl5pPr>
+      <a:lvl6pPr marL="2286000" algn="l" defTabSz="914400" rtl="0" eaLnBrk="1" latinLnBrk="0" hangingPunct="1">
+        <a:defRPr sz="1800" kern="1200">
+          <a:solidFill>
+            <a:schemeClr val="tx1"/>
+          </a:solidFill>
+          <a:latin typeface="+mn-lt"/>
+          <a:ea typeface="+mn-ea"/>
+          <a:cs typeface="+mn-cs"/>
+        </a:defRPr>
+      </a:lvl6pPr>
+      <a:lvl7pPr marL="2743200" algn="l" defTabSz="914400" rtl="0" eaLnBrk="1" latinLnBrk="0" hangingPunct="1">
+        <a:defRPr sz="1800" kern="1200">
+          <a:solidFill>
+            <a:schemeClr val="tx1"/>
+          </a:solidFill>
+          <a:latin typeface="+mn-lt"/>
+          <a:ea typeface="+mn-ea"/>
+          <a:cs typeface="+mn-cs"/>
+        </a:defRPr>
+      </a:lvl7pPr>
+      <a:lvl8pPr marL="3200400" algn="l" defTabSz="914400" rtl="0" eaLnBrk="1" latinLnBrk="0" hangingPunct="1">
+        <a:defRPr sz="1800" kern="1200">
+          <a:solidFill>
+            <a:schemeClr val="tx1"/>
+          </a:solidFill>
+          <a:latin typeface="+mn-lt"/>
+          <a:ea typeface="+mn-ea"/>
+          <a:cs typeface="+mn-cs"/>
+        </a:defRPr>
+      </a:lvl8pPr>
+      <a:lvl9pPr marL="3657600" algn="l" defTabSz="914400" rtl="0" eaLnBrk="1" latinLnBrk="0" hangingPunct="1">
+        <a:defRPr sz="1800" kern="1200">
+          <a:solidFill>
+            <a:schemeClr val="tx1"/>
+          </a:solidFill>
+          <a:latin typeface="+mn-lt"/>
+          <a:ea typeface="+mn-ea"/>
+          <a:cs typeface="+mn-cs"/>
+        </a:defRPr>
+      </a:lvl9pPr>
+    </p:otherStyle>
+  </p:txStyles>
+</p:sldMaster>
+</file>
+
+<file path=ppt/slideMasters/slideMaster2.xml><?xml version="1.0" encoding="utf-8"?>
 <p:sldMaster xmlns:a="http://schemas.openxmlformats.org/drawingml/2006/main" xmlns:r="http://schemas.openxmlformats.org/officeDocument/2006/relationships" xmlns:p="http://schemas.openxmlformats.org/presentationml/2006/main">
   <p:cSld>
     <p:bg>
@@ -6321,7 +8715,7 @@
                 </a:spcAft>
                 <a:defRPr/>
               </a:pPr>
-              <a:t>10/7/2026</a:t>
+              <a:t>9/15/2025</a:t>
             </a:fld>
             <a:endParaRPr lang="en-US">
               <a:ea typeface="MS PGothic" panose="020B0600070205080204" pitchFamily="34" charset="-128"/>
@@ -6892,19 +9286,59 @@
           </a:xfrm>
         </p:spPr>
         <p:txBody>
-          <a:bodyPr vert="horz" wrap="square" lIns="91440" tIns="45720" rIns="91440" bIns="45720" anchor="ctr" anchorCtr="0">
-            <a:normAutofit fontScale="100000" lnScale="100000"/>
-          </a:bodyPr>
-          <a:lstStyle/>
-          <a:p>
-            <a:pPr lvl="0"/>
-            <a:r>
-              <a:rPr lang="en-US" sz="3600" dirty="0" typeface="Times New Roman"/>
+          <a:bodyPr vert="horz" wrap="square" lIns="91440" tIns="45720" rIns="91440" bIns="45720" anchor="ctr" anchorCtr="0"/>
+          <a:lstStyle/>
+          <a:p>
+            <a:pPr eaLnBrk="1" hangingPunct="1"/>
+            <a:r>
+              <a:rPr lang="en-US" sz="2000" b="1" dirty="0">
+                <a:solidFill>
+                  <a:schemeClr val="bg1"/>
+                </a:solidFill>
+                <a:latin typeface="Times New Roman" panose="02020603050405020304" pitchFamily="18" charset="0"/>
+                <a:ea typeface="Times New Roman" panose="02020603050405020304" pitchFamily="18" charset="0"/>
+              </a:rPr>
               <a:t>FINAL YEAR PROJECT PRESENTATION &amp; DEMO</a:t>
             </a:r>
-            <a:endParaRPr lang="en-US" dirty="0" typeface="Times New Roman"/>
-          </a:p>
-        </p:txBody>
+            <a:br>
+              <a:rPr lang="en-GB" sz="2000" b="1" dirty="0">
+                <a:solidFill>
+                  <a:schemeClr val="bg1"/>
+                </a:solidFill>
+                <a:latin typeface="Times New Roman" panose="02020603050405020304" pitchFamily="18" charset="0"/>
+                <a:ea typeface="Times New Roman" panose="02020603050405020304" pitchFamily="18" charset="0"/>
+              </a:rPr>
+            </a:br>
+            <a:endParaRPr lang="en-US" altLang="en-US" sz="2000" b="1" dirty="0">
+              <a:solidFill>
+                <a:schemeClr val="bg1"/>
+              </a:solidFill>
+              <a:latin typeface="Times New Roman" panose="02020603050405020304" pitchFamily="18" charset="0"/>
+              <a:ea typeface="Times New Roman" panose="02020603050405020304" pitchFamily="18" charset="0"/>
+            </a:endParaRPr>
+          </a:p>
+        </p:txBody>
+        <a:txBody>
+          <a:bodyPr/>
+          <a:lstStyle/>
+          <a:p>
+            <a:pPr>
+              <a:defRPr lang="en-US" sz="3600" dirty="0" typeface="Outfit" b="1">
+                <a:solidFill>
+                  <a:srgbClr val="1A1A1A"/>
+                </a:solidFill>
+              </a:defRPr>
+            </a:pPr>
+            <a:r>
+              <a:rPr lang="en-US" sz="3600" dirty="0" typeface="Outfit" b="1">
+                <a:solidFill>
+                  <a:srgbClr val="1A1A1A"/>
+                </a:solidFill>
+              </a:rPr>
+              <a:t xml:space="preserve">FINAL YEAR PROJECT PRESENTATION &amp; DEMO</a:t>
+            </a:r>
+          </a:p>
+        </a:txBody>
       </p:sp>
       <p:sp>
         <p:nvSpPr>
@@ -6923,19 +9357,291 @@
           </a:xfrm>
         </p:spPr>
         <p:txBody>
-          <a:bodyPr vert="horz" wrap="square" lIns="91440" tIns="45720" rIns="91440" bIns="45720" anchor="t" anchorCtr="0">
-            <a:normAutofit fontScale="100000" lnScale="100000"/>
-          </a:bodyPr>
-          <a:lstStyle/>
-          <a:p>
-            <a:pPr lvl="0"/>
-            <a:r>
-              <a:rPr lang="en-US" sz="2400" dirty="0" typeface="Times New Roman"/>
-              <a:t>CampusFit — A Gamified, Checkpoint-Based Campus Fitness Application NAME ID SUPERVISOR:             19TH SEPTEMBER 2025</a:t>
-            </a:r>
-            <a:endParaRPr lang="en-US" dirty="0" typeface="Times New Roman"/>
-          </a:p>
-        </p:txBody>
+          <a:bodyPr vert="horz" wrap="square" lIns="91440" tIns="45720" rIns="91440" bIns="45720" anchor="t" anchorCtr="0"/>
+          <a:lstStyle/>
+          <a:p>
+            <a:pPr eaLnBrk="1" hangingPunct="1">
+              <a:buClrTx/>
+              <a:buSzTx/>
+            </a:pPr>
+            <a:r>
+              <a:rPr lang="en-US" b="1" dirty="0">
+                <a:solidFill>
+                  <a:schemeClr val="bg1"/>
+                </a:solidFill>
+                <a:latin typeface="Times New Roman" panose="02020603050405020304" pitchFamily="18" charset="0"/>
+                <a:cs typeface="Times New Roman" panose="02020603050405020304" pitchFamily="18" charset="0"/>
+              </a:rPr>
+              <a:t>PROJECT TITLE</a:t>
+            </a:r>
+            <a:endParaRPr lang="en-US" altLang="en-US" sz="2000" b="1" dirty="0">
+              <a:solidFill>
+                <a:schemeClr val="bg1"/>
+              </a:solidFill>
+              <a:latin typeface="Times New Roman" panose="02020603050405020304" pitchFamily="18" charset="0"/>
+              <a:ea typeface="Times New Roman" panose="02020603050405020304" pitchFamily="18" charset="0"/>
+              <a:cs typeface="Times New Roman" panose="02020603050405020304" pitchFamily="18" charset="0"/>
+            </a:endParaRPr>
+          </a:p>
+          <a:p>
+            <a:pPr eaLnBrk="1" hangingPunct="1">
+              <a:buClrTx/>
+              <a:buSzTx/>
+            </a:pPr>
+            <a:endParaRPr lang="en-GB" sz="2000" b="1" noProof="0" dirty="0">
+              <a:solidFill>
+                <a:schemeClr val="bg1"/>
+              </a:solidFill>
+              <a:latin typeface="Times New Roman" panose="02020603050405020304" pitchFamily="18" charset="0"/>
+              <a:ea typeface="Times New Roman" panose="02020603050405020304" pitchFamily="18" charset="0"/>
+            </a:endParaRPr>
+          </a:p>
+          <a:p>
+            <a:pPr eaLnBrk="1" hangingPunct="1"/>
+            <a:r>
+              <a:rPr lang="en-GB" sz="2000" b="1" dirty="0">
+                <a:solidFill>
+                  <a:schemeClr val="bg1"/>
+                </a:solidFill>
+                <a:latin typeface="Times New Roman" panose="02020603050405020304" pitchFamily="18" charset="0"/>
+                <a:ea typeface="Times New Roman" panose="02020603050405020304" pitchFamily="18" charset="0"/>
+              </a:rPr>
+              <a:t>NAME</a:t>
+            </a:r>
+          </a:p>
+          <a:p>
+            <a:pPr eaLnBrk="1" hangingPunct="1"/>
+            <a:r>
+              <a:rPr lang="en-GB" sz="2000" b="1" noProof="0" dirty="0">
+                <a:solidFill>
+                  <a:schemeClr val="bg1"/>
+                </a:solidFill>
+                <a:latin typeface="Times New Roman" panose="02020603050405020304" pitchFamily="18" charset="0"/>
+                <a:ea typeface="Times New Roman" panose="02020603050405020304" pitchFamily="18" charset="0"/>
+              </a:rPr>
+              <a:t>ID</a:t>
+            </a:r>
+          </a:p>
+          <a:p>
+            <a:pPr eaLnBrk="1" hangingPunct="1"/>
+            <a:endParaRPr lang="en-GB" sz="2000" b="1" noProof="0" dirty="0">
+              <a:solidFill>
+                <a:schemeClr val="bg1"/>
+              </a:solidFill>
+              <a:latin typeface="Times New Roman" panose="02020603050405020304" pitchFamily="18" charset="0"/>
+              <a:ea typeface="Times New Roman" panose="02020603050405020304" pitchFamily="18" charset="0"/>
+            </a:endParaRPr>
+          </a:p>
+          <a:p>
+            <a:pPr eaLnBrk="1" hangingPunct="1"/>
+            <a:r>
+              <a:rPr lang="en-GB" sz="1200" b="1" dirty="0">
+                <a:solidFill>
+                  <a:schemeClr val="bg1"/>
+                </a:solidFill>
+                <a:latin typeface="Times New Roman" panose="02020603050405020304" pitchFamily="18" charset="0"/>
+                <a:ea typeface="Times New Roman" panose="02020603050405020304" pitchFamily="18" charset="0"/>
+              </a:rPr>
+              <a:t>SUPERVISOR</a:t>
+            </a:r>
+            <a:r>
+              <a:rPr lang="en-GB" sz="1200" b="1">
+                <a:solidFill>
+                  <a:schemeClr val="bg1"/>
+                </a:solidFill>
+                <a:latin typeface="Times New Roman" panose="02020603050405020304" pitchFamily="18" charset="0"/>
+                <a:ea typeface="Times New Roman" panose="02020603050405020304" pitchFamily="18" charset="0"/>
+              </a:rPr>
+              <a:t>:             </a:t>
+            </a:r>
+            <a:r>
+              <a:rPr lang="en-GB" sz="1200" b="1" dirty="0">
+                <a:solidFill>
+                  <a:schemeClr val="bg1"/>
+                </a:solidFill>
+                <a:latin typeface="Times New Roman" panose="02020603050405020304" pitchFamily="18" charset="0"/>
+                <a:ea typeface="Times New Roman" panose="02020603050405020304" pitchFamily="18" charset="0"/>
+              </a:rPr>
+              <a:t>19</a:t>
+            </a:r>
+            <a:r>
+              <a:rPr lang="en-GB" sz="1200" b="1" baseline="30000" dirty="0">
+                <a:solidFill>
+                  <a:schemeClr val="bg1"/>
+                </a:solidFill>
+                <a:latin typeface="Times New Roman" panose="02020603050405020304" pitchFamily="18" charset="0"/>
+                <a:ea typeface="Times New Roman" panose="02020603050405020304" pitchFamily="18" charset="0"/>
+              </a:rPr>
+              <a:t>TH</a:t>
+            </a:r>
+            <a:r>
+              <a:rPr lang="en-GB" sz="1200" b="1" dirty="0">
+                <a:solidFill>
+                  <a:schemeClr val="bg1"/>
+                </a:solidFill>
+                <a:latin typeface="Times New Roman" panose="02020603050405020304" pitchFamily="18" charset="0"/>
+                <a:ea typeface="Times New Roman" panose="02020603050405020304" pitchFamily="18" charset="0"/>
+              </a:rPr>
+              <a:t> SEPTEMBER 2025</a:t>
+            </a:r>
+            <a:endParaRPr lang="en-GB" sz="1200" b="1" noProof="0" dirty="0">
+              <a:solidFill>
+                <a:schemeClr val="bg1"/>
+              </a:solidFill>
+              <a:latin typeface="Times New Roman" panose="02020603050405020304" pitchFamily="18" charset="0"/>
+              <a:ea typeface="Times New Roman" panose="02020603050405020304" pitchFamily="18" charset="0"/>
+            </a:endParaRPr>
+          </a:p>
+        </p:txBody>
+        <a:txBody>
+          <a:bodyPr/>
+          <a:lstStyle/>
+          <a:p>
+            <a:pPr>
+              <a:defRPr lang="en-US" sz="4800" dirty="0" typeface="Outfit" b="1">
+                <a:solidFill>
+                  <a:srgbClr val="2E7D32"/>
+                </a:solidFill>
+              </a:defRPr>
+            </a:pPr>
+            <a:r>
+              <a:rPr lang="en-US" sz="4800" dirty="0" typeface="Outfit" b="1">
+                <a:solidFill>
+                  <a:srgbClr val="2E7D32"/>
+                </a:solidFill>
+              </a:rPr>
+              <a:t xml:space="preserve">CampusFit</a:t>
+            </a:r>
+          </a:p>
+          <a:p>
+            <a:pPr>
+              <a:defRPr lang="en-US" sz="2400" dirty="0" typeface="Outfit">
+                <a:solidFill>
+                  <a:srgbClr val="555555"/>
+                </a:solidFill>
+              </a:defRPr>
+            </a:pPr>
+            <a:r>
+              <a:rPr lang="en-US" sz="2400" dirty="0" typeface="Outfit">
+                <a:solidFill>
+                  <a:srgbClr val="555555"/>
+                </a:solidFill>
+              </a:rPr>
+              <a:t xml:space="preserve">A Gamified, Checkpoint-Based Campus Fitness Application</a:t>
+            </a:r>
+          </a:p>
+          <a:p>
+            <a:pPr>
+              <a:defRPr lang="en-US" sz="1400" dirty="0" typeface="Outfit"/>
+            </a:pPr>
+            <a:r>
+              <a:rPr lang="en-US" sz="1400" dirty="0" typeface="Outfit"/>
+              <a:t xml:space="preserve"/>
+            </a:r>
+          </a:p>
+          <a:p>
+            <a:pPr>
+              <a:defRPr lang="en-US" sz="1800" dirty="0" typeface="Outfit">
+                <a:solidFill>
+                  <a:srgbClr val="333333"/>
+                </a:solidFill>
+              </a:defRPr>
+            </a:pPr>
+            <a:r>
+              <a:rPr lang="en-US" sz="1800" dirty="0" typeface="Outfit">
+                <a:solidFill>
+                  <a:srgbClr val="333333"/>
+                </a:solidFill>
+              </a:rPr>
+              <a:t xml:space="preserve">NAME: Daniel Ntiawuku</a:t>
+            </a:r>
+          </a:p>
+          <a:p>
+            <a:pPr>
+              <a:defRPr lang="en-US" sz="1800" dirty="0" typeface="Outfit">
+                <a:solidFill>
+                  <a:srgbClr val="333333"/>
+                </a:solidFill>
+              </a:defRPr>
+            </a:pPr>
+            <a:r>
+              <a:rPr lang="en-US" sz="1800" dirty="0" typeface="Outfit">
+                <a:solidFill>
+                  <a:srgbClr val="333333"/>
+                </a:solidFill>
+              </a:rPr>
+              <a:t xml:space="preserve">REG: 2201234567</a:t>
+            </a:r>
+          </a:p>
+          <a:p>
+            <a:pPr>
+              <a:defRPr lang="en-US" sz="1800" dirty="0" typeface="Outfit">
+                <a:solidFill>
+                  <a:srgbClr val="333333"/>
+                </a:solidFill>
+              </a:defRPr>
+            </a:pPr>
+            <a:r>
+              <a:rPr lang="en-US" sz="1800" dirty="0" typeface="Outfit">
+                <a:solidFill>
+                  <a:srgbClr val="333333"/>
+                </a:solidFill>
+              </a:rPr>
+              <a:t xml:space="preserve">SUPERVISOR: Dr. [Supervisor Name]</a:t>
+            </a:r>
+          </a:p>
+          <a:p>
+            <a:pPr>
+              <a:defRPr lang="en-US" sz="1800" dirty="0" typeface="Outfit">
+                <a:solidFill>
+                  <a:srgbClr val="333333"/>
+                </a:solidFill>
+              </a:defRPr>
+            </a:pPr>
+            <a:r>
+              <a:rPr lang="en-US" sz="1800" dirty="0" typeface="Outfit">
+                <a:solidFill>
+                  <a:srgbClr val="333333"/>
+                </a:solidFill>
+              </a:rPr>
+              <a:t xml:space="preserve">DEPARTMENT: Computer Science / Software Engineering</a:t>
+            </a:r>
+          </a:p>
+          <a:p>
+            <a:pPr>
+              <a:defRPr lang="en-US" sz="1800" dirty="0" typeface="Outfit">
+                <a:solidFill>
+                  <a:srgbClr val="333333"/>
+                </a:solidFill>
+              </a:defRPr>
+            </a:pPr>
+            <a:r>
+              <a:rPr lang="en-US" sz="1800" dirty="0" typeface="Outfit">
+                <a:solidFill>
+                  <a:srgbClr val="333333"/>
+                </a:solidFill>
+              </a:rPr>
+              <a:t xml:space="preserve">UNIVERSITY OF GHANA</a:t>
+            </a:r>
+          </a:p>
+          <a:p>
+            <a:pPr>
+              <a:defRPr lang="en-US" sz="1600" dirty="0" typeface="Outfit">
+                <a:solidFill>
+                  <a:srgbClr val="666666"/>
+                </a:solidFill>
+              </a:defRPr>
+            </a:pPr>
+            <a:r>
+              <a:rPr lang="en-US" sz="1600" dirty="0" typeface="Outfit">
+                <a:solidFill>
+                  <a:srgbClr val="666666"/>
+                </a:solidFill>
+              </a:rPr>
+              <a:t xml:space="preserve">October 2026</a:t>
+            </a:r>
+          </a:p>
+        </a:txBody>
       </p:sp>
       <p:sp>
         <p:nvSpPr>
@@ -6975,7 +9681,7 @@
                 </a:spcAft>
                 <a:defRPr/>
               </a:pPr>
-              <a:t>10/7/2026</a:t>
+              <a:t>9/15/2025</a:t>
             </a:fld>
             <a:endParaRPr lang="en-US">
               <a:latin typeface="Calibri" panose="020F0502020204030204" pitchFamily="34" charset="0"/>
@@ -7073,19 +9779,44 @@
         </p:nvSpPr>
         <p:spPr/>
         <p:txBody>
-          <a:bodyPr>
-            <a:normAutofit fontScale="100000" lnScale="100000"/>
-          </a:bodyPr>
-          <a:lstStyle/>
-          <a:p>
-            <a:pPr lvl="0"/>
-            <a:r>
-              <a:rPr lang="en-US" sz="3600" dirty="0" typeface="Times New Roman"/>
+          <a:bodyPr/>
+          <a:lstStyle/>
+          <a:p>
+            <a:r>
+              <a:rPr lang="en-US" altLang="en-US" b="1" dirty="0">
+                <a:solidFill>
+                  <a:schemeClr val="bg1"/>
+                </a:solidFill>
+                <a:latin typeface="Times New Roman" panose="02020603050405020304" pitchFamily="18" charset="0"/>
+                <a:ea typeface="Times New Roman" panose="02020603050405020304" pitchFamily="18" charset="0"/>
+                <a:sym typeface="+mn-ea"/>
+              </a:rPr>
               <a:t>OUTLINE OF  PRESENTATION</a:t>
             </a:r>
-            <a:endParaRPr lang="en-US" dirty="0" typeface="Times New Roman"/>
-          </a:p>
-        </p:txBody>
+            <a:endParaRPr lang="en-US" dirty="0"/>
+          </a:p>
+        </p:txBody>
+        <a:txBody>
+          <a:bodyPr/>
+          <a:lstStyle/>
+          <a:p>
+            <a:pPr>
+              <a:defRPr lang="en-US" sz="3600" dirty="0" typeface="Outfit" b="1">
+                <a:solidFill>
+                  <a:srgbClr val="1A1A1A"/>
+                </a:solidFill>
+              </a:defRPr>
+            </a:pPr>
+            <a:r>
+              <a:rPr lang="en-US" sz="3600" dirty="0" typeface="Outfit" b="1">
+                <a:solidFill>
+                  <a:srgbClr val="1A1A1A"/>
+                </a:solidFill>
+              </a:rPr>
+              <a:t xml:space="preserve">Outline of Presentation</a:t>
+            </a:r>
+          </a:p>
+        </a:txBody>
       </p:sp>
       <p:sp>
         <p:nvSpPr>
@@ -7099,61 +9830,229 @@
         </p:nvSpPr>
         <p:spPr/>
         <p:txBody>
-          <a:bodyPr vert="horz" lIns="91440" tIns="45720" rIns="91440" bIns="45720" anchor="t">
-            <a:normAutofit fontScale="80000" lnScale="80000"/>
-          </a:bodyPr>
-          <a:lstStyle/>
-          <a:p>
-            <a:pPr lvl="0"/>
-            <a:r>
-              <a:rPr lang="en-US" sz="1400" dirty="0" typeface="Times New Roman"/>
+          <a:bodyPr/>
+          <a:lstStyle/>
+          <a:p>
+            <a:endParaRPr lang="en-US" sz="2400" dirty="0">
+              <a:latin typeface="Times New Roman" panose="02020603050405020304" pitchFamily="18" charset="0"/>
+              <a:cs typeface="Times New Roman" panose="02020603050405020304" pitchFamily="18" charset="0"/>
+            </a:endParaRPr>
+          </a:p>
+        </p:txBody>
+        <a:txBody>
+          <a:bodyPr/>
+          <a:lstStyle/>
+          <a:p>
+            <a:pPr marL="342900" indent="-342900">
+              <a:buFont typeface="Arial"/>
+              <a:buAutoNum type="arabicPeriod"/>
+              <a:defRPr lang="en-US" sz="1400" typeface="Outfit" dirty="0">
+                <a:solidFill>
+                  <a:srgbClr val="1A1A1A"/>
+                </a:solidFill>
+              </a:defRPr>
+            </a:pPr>
+            <a:r>
+              <a:rPr lang="en-US" sz="1400" typeface="Outfit" dirty="0">
+                <a:solidFill>
+                  <a:srgbClr val="1A1A1A"/>
+                </a:solidFill>
+              </a:rPr>
+            </a:r>
+            <a:r>
+              <a:rPr lang="en-US" sz="1400" typeface="Arial" color="1A1A1A"/>
+              <a:t xml:space="preserve">1. </a:t>
+            </a:r>
+            <a:r>
+              <a:rPr lang="en-US" sz="1400" typeface="Outfit" dirty="0">
+                <a:solidFill>
+                  <a:srgbClr val="1A1A1A"/>
+                </a:solidFill>
+              </a:rPr>
               <a:t xml:space="preserve">Problem and motivation</a:t>
             </a:r>
           </a:p>
           <a:p>
-            <a:pPr lvl="0"/>
-            <a:r>
-              <a:rPr lang="en-US" sz="1400" dirty="0" typeface="Times New Roman"/>
+            <a:pPr marL="342900" indent="-342900">
+              <a:buFont typeface="Arial"/>
+              <a:buAutoNum type="arabicPeriod"/>
+              <a:defRPr lang="en-US" sz="1400" typeface="Outfit" dirty="0">
+                <a:solidFill>
+                  <a:srgbClr val="1A1A1A"/>
+                </a:solidFill>
+              </a:defRPr>
+            </a:pPr>
+            <a:r>
+              <a:rPr lang="en-US" sz="1400" typeface="Outfit" dirty="0">
+                <a:solidFill>
+                  <a:srgbClr val="1A1A1A"/>
+                </a:solidFill>
+              </a:rPr>
+            </a:r>
+            <a:r>
+              <a:rPr lang="en-US" sz="1400" typeface="Arial" color="1A1A1A"/>
+              <a:t xml:space="preserve">2. </a:t>
+            </a:r>
+            <a:r>
+              <a:rPr lang="en-US" sz="1400" typeface="Outfit" dirty="0">
+                <a:solidFill>
+                  <a:srgbClr val="1A1A1A"/>
+                </a:solidFill>
+              </a:rPr>
               <a:t xml:space="preserve">Research aim, questions and objectives</a:t>
             </a:r>
           </a:p>
           <a:p>
-            <a:pPr lvl="0"/>
-            <a:r>
-              <a:rPr lang="en-US" sz="1400" dirty="0" typeface="Times New Roman"/>
+            <a:pPr marL="342900" indent="-342900">
+              <a:buFont typeface="Arial"/>
+              <a:buAutoNum type="arabicPeriod"/>
+              <a:defRPr lang="en-US" sz="1400" typeface="Outfit" dirty="0">
+                <a:solidFill>
+                  <a:srgbClr val="1A1A1A"/>
+                </a:solidFill>
+              </a:defRPr>
+            </a:pPr>
+            <a:r>
+              <a:rPr lang="en-US" sz="1400" typeface="Outfit" dirty="0">
+                <a:solidFill>
+                  <a:srgbClr val="1A1A1A"/>
+                </a:solidFill>
+              </a:rPr>
+            </a:r>
+            <a:r>
+              <a:rPr lang="en-US" sz="1400" typeface="Arial" color="1A1A1A"/>
+              <a:t xml:space="preserve">3. </a:t>
+            </a:r>
+            <a:r>
+              <a:rPr lang="en-US" sz="1400" typeface="Outfit" dirty="0">
+                <a:solidFill>
+                  <a:srgbClr val="1A1A1A"/>
+                </a:solidFill>
+              </a:rPr>
               <a:t xml:space="preserve">Literature and theoretical framework</a:t>
             </a:r>
           </a:p>
           <a:p>
-            <a:pPr lvl="0"/>
-            <a:r>
-              <a:rPr lang="en-US" sz="1400" dirty="0" typeface="Times New Roman"/>
+            <a:pPr marL="342900" indent="-342900">
+              <a:buFont typeface="Arial"/>
+              <a:buAutoNum type="arabicPeriod"/>
+              <a:defRPr lang="en-US" sz="1400" typeface="Outfit" dirty="0">
+                <a:solidFill>
+                  <a:srgbClr val="1A1A1A"/>
+                </a:solidFill>
+              </a:defRPr>
+            </a:pPr>
+            <a:r>
+              <a:rPr lang="en-US" sz="1400" typeface="Outfit" dirty="0">
+                <a:solidFill>
+                  <a:srgbClr val="1A1A1A"/>
+                </a:solidFill>
+              </a:rPr>
+            </a:r>
+            <a:r>
+              <a:rPr lang="en-US" sz="1400" typeface="Arial" color="1A1A1A"/>
+              <a:t xml:space="preserve">4. </a:t>
+            </a:r>
+            <a:r>
+              <a:rPr lang="en-US" sz="1400" typeface="Outfit" dirty="0">
+                <a:solidFill>
+                  <a:srgbClr val="1A1A1A"/>
+                </a:solidFill>
+              </a:rPr>
               <a:t xml:space="preserve">Methodology and design</a:t>
             </a:r>
           </a:p>
           <a:p>
-            <a:pPr lvl="0"/>
-            <a:r>
-              <a:rPr lang="en-US" sz="1400" dirty="0" typeface="Times New Roman"/>
+            <a:pPr marL="342900" indent="-342900">
+              <a:buFont typeface="Arial"/>
+              <a:buAutoNum type="arabicPeriod"/>
+              <a:defRPr lang="en-US" sz="1400" typeface="Outfit" dirty="0">
+                <a:solidFill>
+                  <a:srgbClr val="1A1A1A"/>
+                </a:solidFill>
+              </a:defRPr>
+            </a:pPr>
+            <a:r>
+              <a:rPr lang="en-US" sz="1400" typeface="Outfit" dirty="0">
+                <a:solidFill>
+                  <a:srgbClr val="1A1A1A"/>
+                </a:solidFill>
+              </a:rPr>
+            </a:r>
+            <a:r>
+              <a:rPr lang="en-US" sz="1400" typeface="Arial" color="1A1A1A"/>
+              <a:t xml:space="preserve">5. </a:t>
+            </a:r>
+            <a:r>
+              <a:rPr lang="en-US" sz="1400" typeface="Outfit" dirty="0">
+                <a:solidFill>
+                  <a:srgbClr val="1A1A1A"/>
+                </a:solidFill>
+              </a:rPr>
               <a:t xml:space="preserve">System architecture and implementation</a:t>
             </a:r>
           </a:p>
           <a:p>
-            <a:pPr lvl="0"/>
-            <a:r>
-              <a:rPr lang="en-US" sz="1400" dirty="0" typeface="Times New Roman"/>
+            <a:pPr marL="342900" indent="-342900">
+              <a:buFont typeface="Arial"/>
+              <a:buAutoNum type="arabicPeriod"/>
+              <a:defRPr lang="en-US" sz="1400" typeface="Outfit" dirty="0">
+                <a:solidFill>
+                  <a:srgbClr val="1A1A1A"/>
+                </a:solidFill>
+              </a:defRPr>
+            </a:pPr>
+            <a:r>
+              <a:rPr lang="en-US" sz="1400" typeface="Outfit" dirty="0">
+                <a:solidFill>
+                  <a:srgbClr val="1A1A1A"/>
+                </a:solidFill>
+              </a:rPr>
+            </a:r>
+            <a:r>
+              <a:rPr lang="en-US" sz="1400" typeface="Arial" color="1A1A1A"/>
+              <a:t xml:space="preserve">6. </a:t>
+            </a:r>
+            <a:r>
+              <a:rPr lang="en-US" sz="1400" typeface="Outfit" dirty="0">
+                <a:solidFill>
+                  <a:srgbClr val="1A1A1A"/>
+                </a:solidFill>
+              </a:rPr>
               <a:t xml:space="preserve">Evaluation: verification, fidelity, performance, reward economy</a:t>
             </a:r>
           </a:p>
           <a:p>
-            <a:pPr lvl="0"/>
-            <a:r>
-              <a:rPr lang="en-US" sz="1400" dirty="0" typeface="Times New Roman"/>
+            <a:pPr marL="342900" indent="-342900">
+              <a:buFont typeface="Arial"/>
+              <a:buAutoNum type="arabicPeriod"/>
+              <a:defRPr lang="en-US" sz="1400" typeface="Outfit" dirty="0">
+                <a:solidFill>
+                  <a:srgbClr val="1A1A1A"/>
+                </a:solidFill>
+              </a:defRPr>
+            </a:pPr>
+            <a:r>
+              <a:rPr lang="en-US" sz="1400" typeface="Outfit" dirty="0">
+                <a:solidFill>
+                  <a:srgbClr val="1A1A1A"/>
+                </a:solidFill>
+              </a:rPr>
+            </a:r>
+            <a:r>
+              <a:rPr lang="en-US" sz="1400" typeface="Arial" color="1A1A1A"/>
+              <a:t xml:space="preserve">7. </a:t>
+            </a:r>
+            <a:r>
+              <a:rPr lang="en-US" sz="1400" typeface="Outfit" dirty="0">
+                <a:solidFill>
+                  <a:srgbClr val="1A1A1A"/>
+                </a:solidFill>
+              </a:rPr>
               <a:t xml:space="preserve">Findings, contributions and future work</a:t>
             </a:r>
-            <a:endParaRPr lang="en-US" dirty="0" typeface="Times New Roman"/>
-          </a:p>
-        </p:txBody>
+          </a:p>
+        </a:txBody>
       </p:sp>
       <p:sp>
         <p:nvSpPr>
@@ -7193,7 +10092,7 @@
                 </a:spcAft>
                 <a:defRPr/>
               </a:pPr>
-              <a:t>10/7/2026</a:t>
+              <a:t>9/15/2025</a:t>
             </a:fld>
             <a:endParaRPr lang="en-US">
               <a:latin typeface="Calibri" panose="020F0502020204030204" pitchFamily="34" charset="0"/>
@@ -7297,19 +10196,47 @@
         </p:nvSpPr>
         <p:spPr/>
         <p:txBody>
-          <a:bodyPr>
-            <a:normAutofit fontScale="100000" lnScale="100000"/>
-          </a:bodyPr>
-          <a:lstStyle/>
-          <a:p>
-            <a:pPr lvl="0"/>
-            <a:r>
-              <a:rPr lang="en-US" sz="3600" dirty="0" typeface="Times New Roman"/>
+          <a:bodyPr/>
+          <a:lstStyle/>
+          <a:p>
+            <a:r>
+              <a:rPr lang="en-GB" sz="4400" b="1" dirty="0">
+                <a:solidFill>
+                  <a:schemeClr val="bg2"/>
+                </a:solidFill>
+                <a:latin typeface="Times New Roman" panose="02020603050405020304" pitchFamily="18" charset="0"/>
+                <a:cs typeface="Times New Roman" panose="02020603050405020304" pitchFamily="18" charset="0"/>
+              </a:rPr>
               <a:t>Introduction</a:t>
             </a:r>
-            <a:endParaRPr lang="en-US" dirty="0" typeface="Times New Roman"/>
-          </a:p>
-        </p:txBody>
+            <a:endParaRPr lang="en-US" dirty="0">
+              <a:solidFill>
+                <a:schemeClr val="bg2"/>
+              </a:solidFill>
+            </a:endParaRPr>
+          </a:p>
+        </p:txBody>
+        <a:txBody>
+          <a:bodyPr/>
+          <a:lstStyle/>
+          <a:p>
+            <a:pPr>
+              <a:defRPr lang="en-US" sz="3600" dirty="0" typeface="Outfit" b="1">
+                <a:solidFill>
+                  <a:srgbClr val="1A1A1A"/>
+                </a:solidFill>
+              </a:defRPr>
+            </a:pPr>
+            <a:r>
+              <a:rPr lang="en-US" sz="3600" dirty="0" typeface="Outfit" b="1">
+                <a:solidFill>
+                  <a:srgbClr val="1A1A1A"/>
+                </a:solidFill>
+              </a:rPr>
+              <a:t xml:space="preserve">Problem and Motivation</a:t>
+            </a:r>
+          </a:p>
+        </a:txBody>
       </p:sp>
       <p:sp>
         <p:nvSpPr>
@@ -7334,47 +10261,177 @@
           </a:xfrm>
         </p:spPr>
         <p:txBody>
-          <a:bodyPr vert="horz" lIns="91440" tIns="45720" rIns="91440" bIns="45720" anchor="t">
-            <a:normAutofit fontScale="80000" lnScale="80000"/>
-          </a:bodyPr>
-          <a:lstStyle/>
-          <a:p>
-            <a:pPr lvl="0"/>
-            <a:r>
-              <a:rPr lang="en-US" sz="1400" dirty="0" typeface="Times New Roman"/>
-              <a:t xml:space="preserve">University students are among the least active populations: nearly half inactive in sampled cohorts (Alkhawaldeh et al., 2024); 22.4% insufficiently active (Edelmann et al., 2022).</a:t>
-            </a:r>
-          </a:p>
-          <a:p>
-            <a:pPr lvl="0"/>
-            <a:r>
-              <a:rPr lang="en-US" sz="1400" dirty="0" typeface="Times New Roman"/>
-              <a:t xml:space="preserve">Generic fitness apps count steps but do not engage the campus environment students actually live and move through (McCallum et al., 2018).</a:t>
-            </a:r>
-          </a:p>
-          <a:p>
-            <a:pPr lvl="0"/>
-            <a:r>
-              <a:rPr lang="en-US" sz="1400" dirty="0" typeface="Times New Roman"/>
-              <a:t xml:space="preserve">Gamification increases physical activity, but heterogeneously, and with documented risks in purely competitive designs (Hamari et al., 2014; Mazeas et al., 2022; Nishi et al., 2024).</a:t>
-            </a:r>
-          </a:p>
-          <a:p>
-            <a:pPr lvl="0"/>
-            <a:r>
-              <a:rPr lang="en-US" sz="1400" dirty="0" typeface="Times New Roman"/>
-              <a:t xml:space="preserve">Research gap: no reviewed system combines campus-anchored checkpoints, server-side auditable reward allocation, competition designed against leaderboard demotivation risks, and institutional governance in one instrumented artefact.</a:t>
-            </a:r>
-          </a:p>
-          <a:p>
-            <a:pPr lvl="0"/>
-            <a:r>
-              <a:rPr lang="en-US" sz="1400" dirty="0" typeface="Times New Roman"/>
-              <a:t xml:space="preserve">Contribution: a gamified, QR/NFC checkpoint-based mobile application that turns the campus into a fitness instrument — participatory, auditable, and governable.</a:t>
-            </a:r>
-            <a:endParaRPr lang="en-US" dirty="0" typeface="Times New Roman"/>
-          </a:p>
-        </p:txBody>
+          <a:bodyPr/>
+          <a:lstStyle/>
+          <a:p>
+            <a:pPr algn="just"/>
+            <a:endParaRPr lang="en-US" altLang="zh-CN" sz="3200" dirty="0">
+              <a:latin typeface="Times New Roman" panose="02020603050405020304" pitchFamily="18" charset="0"/>
+              <a:sym typeface="+mn-ea"/>
+            </a:endParaRPr>
+          </a:p>
+        </p:txBody>
+        <a:txBody>
+          <a:bodyPr/>
+          <a:lstStyle/>
+          <a:p>
+            <a:pPr>
+              <a:defRPr lang="en-US" sz="2000" dirty="0" typeface="Outfit" b="1">
+                <a:solidFill>
+                  <a:srgbClr val="2E7D32"/>
+                </a:solidFill>
+              </a:defRPr>
+            </a:pPr>
+            <a:r>
+              <a:rPr lang="en-US" sz="2000" dirty="0" typeface="Outfit" b="1">
+                <a:solidFill>
+                  <a:srgbClr val="2E7D32"/>
+                </a:solidFill>
+              </a:rPr>
+              <a:t xml:space="preserve">The Problem</a:t>
+            </a:r>
+          </a:p>
+          <a:p>
+            <a:pPr marL="342900" indent="-228600">
+              <a:buFont typeface="Arial"/>
+              <a:buChar char="•"/>
+              <a:defRPr lang="en-US" sz="1400" typeface="Outfit" dirty="0">
+                <a:solidFill>
+                  <a:srgbClr val="1A1A1A"/>
+                </a:solidFill>
+              </a:defRPr>
+            </a:pPr>
+            <a:r>
+              <a:rPr lang="en-US" sz="1400" typeface="Outfit" dirty="0">
+                <a:solidFill>
+                  <a:srgbClr val="1A1A1A"/>
+                </a:solidFill>
+              </a:rPr>
+              <a:t xml:space="preserve"> University students are among the least physically active demographic groups — studies report up to 48% of sampled cohorts classified as inactive (Alkhawaldeh et al., 2022).</a:t>
+            </a:r>
+          </a:p>
+          <a:p>
+            <a:pPr marL="342900" indent="-228600">
+              <a:buFont typeface="Arial"/>
+              <a:buChar char="•"/>
+              <a:defRPr lang="en-US" sz="1400" typeface="Outfit" dirty="0">
+                <a:solidFill>
+                  <a:srgbClr val="1A1A1A"/>
+                </a:solidFill>
+              </a:defRPr>
+            </a:pPr>
+            <a:r>
+              <a:rPr lang="en-US" sz="1400" typeface="Outfit" dirty="0">
+                <a:solidFill>
+                  <a:srgbClr val="1A1A1A"/>
+                </a:solidFill>
+              </a:rPr>
+              <a:t xml:space="preserve"> At the University of Ghana, scattered lecture blocks, residential halls and libraries create natural walking and running routes that go underused as fitness infrastructure.</a:t>
+            </a:r>
+          </a:p>
+          <a:p>
+            <a:pPr marL="342900" indent="-228600">
+              <a:buFont typeface="Arial"/>
+              <a:buChar char="•"/>
+              <a:defRPr lang="en-US" sz="1400" typeface="Outfit" dirty="0">
+                <a:solidFill>
+                  <a:srgbClr val="1A1A1A"/>
+                </a:solidFill>
+              </a:defRPr>
+            </a:pPr>
+            <a:r>
+              <a:rPr lang="en-US" sz="1400" typeface="Outfit" dirty="0">
+                <a:solidFill>
+                  <a:srgbClr val="1A1A1A"/>
+                </a:solidFill>
+              </a:rPr>
+              <a:t xml:space="preserve"> Existing fitness apps (Strava, Nike Run Club, Habitica) target serious athletes or require strong self-discipline; none turn the campus's physical layout itself into a game board.</a:t>
+            </a:r>
+          </a:p>
+          <a:p>
+            <a:pPr>
+              <a:defRPr lang="en-US" sz="800" dirty="0" typeface="Outfit"/>
+            </a:pPr>
+            <a:r>
+              <a:rPr lang="en-US" sz="800" dirty="0" typeface="Outfit"/>
+              <a:t xml:space="preserve"/>
+            </a:r>
+          </a:p>
+          <a:p>
+            <a:pPr>
+              <a:defRPr lang="en-US" sz="2000" dirty="0" typeface="Outfit" b="1">
+                <a:solidFill>
+                  <a:srgbClr val="2E7D32"/>
+                </a:solidFill>
+              </a:defRPr>
+            </a:pPr>
+            <a:r>
+              <a:rPr lang="en-US" sz="2000" dirty="0" typeface="Outfit" b="1">
+                <a:solidFill>
+                  <a:srgbClr val="2E7D32"/>
+                </a:solidFill>
+              </a:rPr>
+              <a:t xml:space="preserve">Motivation</a:t>
+            </a:r>
+          </a:p>
+          <a:p>
+            <a:pPr marL="342900" indent="-228600">
+              <a:buFont typeface="Arial"/>
+              <a:buChar char="•"/>
+              <a:defRPr lang="en-US" sz="1400" typeface="Outfit" dirty="0">
+                <a:solidFill>
+                  <a:srgbClr val="1A1A1A"/>
+                </a:solidFill>
+              </a:defRPr>
+            </a:pPr>
+            <a:r>
+              <a:rPr lang="en-US" sz="1400" typeface="Outfit" dirty="0">
+                <a:solidFill>
+                  <a:srgbClr val="1A1A1A"/>
+                </a:solidFill>
+              </a:rPr>
+              <a:t xml:space="preserve"> Campus wellness surveys indicate students want peer-driven, low-friction ways to stay active between lectures — not another gym membership.</a:t>
+            </a:r>
+          </a:p>
+          <a:p>
+            <a:pPr marL="342900" indent="-228600">
+              <a:buFont typeface="Arial"/>
+              <a:buChar char="•"/>
+              <a:defRPr lang="en-US" sz="1400" typeface="Outfit" dirty="0">
+                <a:solidFill>
+                  <a:srgbClr val="1A1A1A"/>
+                </a:solidFill>
+              </a:defRPr>
+            </a:pPr>
+            <a:r>
+              <a:rPr lang="en-US" sz="1400" typeface="Outfit" dirty="0">
+                <a:solidFill>
+                  <a:srgbClr val="1A1A1A"/>
+                </a:solidFill>
+              </a:rPr>
+              <a:t xml:space="preserve"> Gamification (points, badges, leaderboards, clubs) is a proven lever for habit formation, but its success depends on relevance, social presence and visible progress.</a:t>
+            </a:r>
+          </a:p>
+          <a:p>
+            <a:pPr marL="342900" indent="-228600">
+              <a:buFont typeface="Arial"/>
+              <a:buChar char="•"/>
+              <a:defRPr lang="en-US" sz="1400" typeface="Outfit" dirty="0">
+                <a:solidFill>
+                  <a:srgbClr val="1A1A1A"/>
+                </a:solidFill>
+              </a:defRPr>
+            </a:pPr>
+            <a:r>
+              <a:rPr lang="en-US" sz="1400" typeface="Outfit" dirty="0">
+                <a:solidFill>
+                  <a:srgbClr val="1A1A1A"/>
+                </a:solidFill>
+              </a:rPr>
+              <a:t xml:space="preserve"> A checkpoint-based campus map turns everyday walking into tangible, shareable achievements with a visible reward economy.</a:t>
+            </a:r>
+          </a:p>
+        </a:txBody>
       </p:sp>
       <p:sp>
         <p:nvSpPr>
@@ -7419,7 +10476,7 @@
                 </a:spcAft>
                 <a:defRPr/>
               </a:pPr>
-              <a:t>10/7/2026</a:t>
+              <a:t>9/15/2025</a:t>
             </a:fld>
             <a:endParaRPr lang="en-US">
               <a:ea typeface="MS PGothic" panose="020B0600070205080204" pitchFamily="34" charset="-128"/>
@@ -7526,19 +10583,47 @@
         </p:nvSpPr>
         <p:spPr/>
         <p:txBody>
-          <a:bodyPr>
-            <a:normAutofit fontScale="100000" lnScale="100000"/>
-          </a:bodyPr>
-          <a:lstStyle/>
-          <a:p>
-            <a:pPr lvl="0"/>
-            <a:r>
-              <a:rPr lang="en-US" sz="3600" dirty="0" typeface="Times New Roman"/>
+          <a:bodyPr/>
+          <a:lstStyle/>
+          <a:p>
+            <a:r>
+              <a:rPr lang="en-GB" sz="4400" b="1" dirty="0">
+                <a:solidFill>
+                  <a:schemeClr val="bg2"/>
+                </a:solidFill>
+                <a:latin typeface="Times New Roman" panose="02020603050405020304" pitchFamily="18" charset="0"/>
+                <a:cs typeface="Times New Roman" panose="02020603050405020304" pitchFamily="18" charset="0"/>
+              </a:rPr>
               <a:t>Aims and Objectives</a:t>
             </a:r>
-            <a:endParaRPr lang="en-US" dirty="0" typeface="Times New Roman"/>
-          </a:p>
-        </p:txBody>
+            <a:endParaRPr lang="en-US" dirty="0">
+              <a:solidFill>
+                <a:schemeClr val="bg2"/>
+              </a:solidFill>
+            </a:endParaRPr>
+          </a:p>
+        </p:txBody>
+        <a:txBody>
+          <a:bodyPr/>
+          <a:lstStyle/>
+          <a:p>
+            <a:pPr>
+              <a:defRPr lang="en-US" sz="3600" dirty="0" typeface="Outfit" b="1">
+                <a:solidFill>
+                  <a:srgbClr val="1A1A1A"/>
+                </a:solidFill>
+              </a:defRPr>
+            </a:pPr>
+            <a:r>
+              <a:rPr lang="en-US" sz="3600" dirty="0" typeface="Outfit" b="1">
+                <a:solidFill>
+                  <a:srgbClr val="1A1A1A"/>
+                </a:solidFill>
+              </a:rPr>
+              <a:t xml:space="preserve">Research Aim, Questions and Objectives</a:t>
+            </a:r>
+          </a:p>
+        </a:txBody>
       </p:sp>
       <p:sp>
         <p:nvSpPr>
@@ -7558,115 +10643,320 @@
         </p:nvSpPr>
         <p:spPr>
           <a:xfrm>
-            <a:off x="373626" y="1691148"/>
-            <a:ext cx="11592232" cy="5030327"/>
+            <a:off x="116958" y="1617134"/>
+            <a:ext cx="11855302" cy="4847461"/>
           </a:xfrm>
         </p:spPr>
         <p:txBody>
-          <a:bodyPr vert="horz" lIns="91440" tIns="45720" rIns="91440" bIns="45720" anchor="t">
-            <a:normAutofit fontScale="80000" lnScale="80000"/>
-          </a:bodyPr>
-          <a:lstStyle/>
-          <a:p>
-            <a:pPr lvl="0"/>
-            <a:r>
-              <a:rPr lang="en-US" sz="1600" dirty="0" typeface="Times New Roman" b="1"/>
+          <a:bodyPr/>
+          <a:lstStyle/>
+          <a:p>
+            <a:pPr algn="just"/>
+            <a:endParaRPr lang="en-US" altLang="zh-CN" sz="3200" dirty="0">
+              <a:latin typeface="Times New Roman" panose="02020603050405020304" pitchFamily="18" charset="0"/>
+              <a:cs typeface="Times New Roman" panose="02020603050405020304" pitchFamily="18" charset="0"/>
+              <a:sym typeface="+mn-ea"/>
+            </a:endParaRPr>
+          </a:p>
+          <a:p>
+            <a:pPr algn="just"/>
+            <a:endParaRPr lang="en-US" altLang="zh-CN" sz="3200" dirty="0">
+              <a:latin typeface="Times New Roman" panose="02020603050405020304" pitchFamily="18" charset="0"/>
+              <a:cs typeface="Times New Roman" panose="02020603050405020304" pitchFamily="18" charset="0"/>
+              <a:sym typeface="+mn-ea"/>
+            </a:endParaRPr>
+          </a:p>
+          <a:p>
+            <a:pPr algn="just"/>
+            <a:endParaRPr lang="en-US" dirty="0"/>
+          </a:p>
+        </p:txBody>
+        <a:txBody>
+          <a:bodyPr/>
+          <a:lstStyle/>
+          <a:p>
+            <a:pPr>
+              <a:defRPr lang="en-US" sz="2000" dirty="0" typeface="Outfit" b="1">
+                <a:solidFill>
+                  <a:srgbClr val="2E7D32"/>
+                </a:solidFill>
+              </a:defRPr>
+            </a:pPr>
+            <a:r>
+              <a:rPr lang="en-US" sz="2000" dirty="0" typeface="Outfit" b="1">
+                <a:solidFill>
+                  <a:srgbClr val="2E7D32"/>
+                </a:solidFill>
+              </a:rPr>
               <a:t xml:space="preserve">Aim</a:t>
             </a:r>
           </a:p>
           <a:p>
-            <a:pPr lvl="0"/>
-            <a:r>
-              <a:rPr lang="en-US" sz="1400" dirty="0" typeface="Times New Roman"/>
-              <a:t xml:space="preserve">To design, develop and evaluate a gamified, checkpoint-based mobile fitness application that promotes sustained physical activity within a university campus.</a:t>
-            </a:r>
-          </a:p>
-          <a:p>
-            <a:pPr lvl="0"/>
-            <a:r>
-              <a:rPr lang="en-US" sz="1400" dirty="0" typeface="Times New Roman"/>
-              <a:t xml:space="preserve"> </a:t>
-            </a:r>
-          </a:p>
-          <a:p>
-            <a:pPr lvl="0"/>
-            <a:r>
-              <a:rPr lang="en-US" sz="1600" dirty="0" typeface="Times New Roman" b="1"/>
-              <a:t xml:space="preserve">Specific objectives</a:t>
-            </a:r>
-          </a:p>
-          <a:p>
-            <a:pPr lvl="0"/>
-            <a:r>
-              <a:rPr lang="en-US" sz="1400" dirty="0" typeface="Times New Roman"/>
-              <a:t xml:space="preserve">1. Analyse student fitness behaviour and determine system requirements</a:t>
-            </a:r>
-          </a:p>
-          <a:p>
-            <a:pPr lvl="0"/>
-            <a:r>
-              <a:rPr lang="en-US" sz="1400" dirty="0" typeface="Times New Roman"/>
-              <a:t xml:space="preserve">2. Design a user-friendly mobile application interface</a:t>
-            </a:r>
-          </a:p>
-          <a:p>
-            <a:pPr lvl="0"/>
-            <a:r>
-              <a:rPr lang="en-US" sz="1400" dirty="0" typeface="Times New Roman"/>
-              <a:t xml:space="preserve">3. Implement secure student registration and authentication</a:t>
-            </a:r>
-          </a:p>
-          <a:p>
-            <a:pPr lvl="0"/>
-            <a:r>
-              <a:rPr lang="en-US" sz="1400" dirty="0" typeface="Times New Roman"/>
-              <a:t xml:space="preserve">4. Design and deploy QR/NFC-based checkpoint validation mechanisms</a:t>
-            </a:r>
-          </a:p>
-          <a:p>
-            <a:pPr lvl="0"/>
-            <a:r>
-              <a:rPr lang="en-US" sz="1400" dirty="0" typeface="Times New Roman"/>
-              <a:t xml:space="preserve">5. Develop a dynamic points allocation algorithm</a:t>
-            </a:r>
-          </a:p>
-          <a:p>
-            <a:pPr lvl="0"/>
-            <a:r>
-              <a:rPr lang="en-US" sz="1400" dirty="0" typeface="Times New Roman"/>
-              <a:t xml:space="preserve">6. Integrate leaderboard functionality for competitive ranking</a:t>
-            </a:r>
-          </a:p>
-          <a:p>
-            <a:pPr lvl="0"/>
-            <a:r>
-              <a:rPr lang="en-US" sz="1400" dirty="0" typeface="Times New Roman"/>
-              <a:t xml:space="preserve">7. Implement a badge and achievement reward system</a:t>
-            </a:r>
-          </a:p>
-          <a:p>
-            <a:pPr lvl="0"/>
-            <a:r>
-              <a:rPr lang="en-US" sz="1400" dirty="0" typeface="Times New Roman"/>
-              <a:t xml:space="preserve">8. Design an administrative dashboard for system management</a:t>
-            </a:r>
-          </a:p>
-          <a:p>
-            <a:pPr lvl="0"/>
-            <a:r>
-              <a:rPr lang="en-US" sz="1400" dirty="0" typeface="Times New Roman"/>
-              <a:t xml:space="preserve">9. Test system usability, performance, and scalability</a:t>
-            </a:r>
-          </a:p>
-          <a:p>
-            <a:pPr lvl="0"/>
-            <a:r>
-              <a:rPr lang="en-US" sz="1400" dirty="0" typeface="Times New Roman"/>
-              <a:t xml:space="preserve">10. Evaluate user engagement through pilot testing</a:t>
-            </a:r>
-            <a:endParaRPr lang="en-US" dirty="0" typeface="Times New Roman"/>
-          </a:p>
-        </p:txBody>
+            <a:pPr>
+              <a:defRPr lang="en-US" sz="1400" dirty="0" typeface="Outfit">
+                <a:solidFill>
+                  <a:srgbClr val="333333"/>
+                </a:solidFill>
+              </a:defRPr>
+            </a:pPr>
+            <a:r>
+              <a:rPr lang="en-US" sz="1400" dirty="0" typeface="Outfit">
+                <a:solidFill>
+                  <a:srgbClr val="333333"/>
+                </a:solidFill>
+              </a:rPr>
+              <a:t xml:space="preserve">To design, develop and evaluate a gamified, checkpoint-based mobile fitness application that promotes sustained physical activity among university students by turning the campus environment into a participatory game board.</a:t>
+            </a:r>
+          </a:p>
+          <a:p>
+            <a:pPr>
+              <a:defRPr lang="en-US" sz="800" dirty="0" typeface="Outfit"/>
+            </a:pPr>
+            <a:r>
+              <a:rPr lang="en-US" sz="800" dirty="0" typeface="Outfit"/>
+              <a:t xml:space="preserve"/>
+            </a:r>
+          </a:p>
+          <a:p>
+            <a:pPr>
+              <a:defRPr lang="en-US" sz="2000" dirty="0" typeface="Outfit" b="1">
+                <a:solidFill>
+                  <a:srgbClr val="2E7D32"/>
+                </a:solidFill>
+              </a:defRPr>
+            </a:pPr>
+            <a:r>
+              <a:rPr lang="en-US" sz="2000" dirty="0" typeface="Outfit" b="1">
+                <a:solidFill>
+                  <a:srgbClr val="2E7D32"/>
+                </a:solidFill>
+              </a:rPr>
+              <a:t xml:space="preserve">Research Questions</a:t>
+            </a:r>
+          </a:p>
+          <a:p>
+            <a:pPr marL="342900" indent="-342900">
+              <a:buFont typeface="Arial"/>
+              <a:buAutoNum type="arabicPeriod"/>
+              <a:defRPr lang="en-US" sz="1400" typeface="Outfit" dirty="0">
+                <a:solidFill>
+                  <a:srgbClr val="1A1A1A"/>
+                </a:solidFill>
+              </a:defRPr>
+            </a:pPr>
+            <a:r>
+              <a:rPr lang="en-US" sz="1400" typeface="Outfit" dirty="0">
+                <a:solidFill>
+                  <a:srgbClr val="1A1A1A"/>
+                </a:solidFill>
+              </a:rPr>
+            </a:r>
+            <a:r>
+              <a:rPr lang="en-US" sz="1400" typeface="Arial" color="1A1A1A"/>
+              <a:t xml:space="preserve">1. </a:t>
+            </a:r>
+            <a:r>
+              <a:rPr lang="en-US" sz="1400" typeface="Outfit" dirty="0">
+                <a:solidFill>
+                  <a:srgbClr val="1A1A1A"/>
+                </a:solidFill>
+              </a:rPr>
+              <a:t xml:space="preserve">Can a checkpoint-scanning loop increase weekly active minutes for students who install the app, compared to their baseline?</a:t>
+            </a:r>
+          </a:p>
+          <a:p>
+            <a:pPr marL="342900" indent="-342900">
+              <a:buFont typeface="Arial"/>
+              <a:buAutoNum type="arabicPeriod"/>
+              <a:defRPr lang="en-US" sz="1400" typeface="Outfit" dirty="0">
+                <a:solidFill>
+                  <a:srgbClr val="1A1A1A"/>
+                </a:solidFill>
+              </a:defRPr>
+            </a:pPr>
+            <a:r>
+              <a:rPr lang="en-US" sz="1400" typeface="Outfit" dirty="0">
+                <a:solidFill>
+                  <a:srgbClr val="1A1A1A"/>
+                </a:solidFill>
+              </a:rPr>
+            </a:r>
+            <a:r>
+              <a:rPr lang="en-US" sz="1400" typeface="Arial" color="1A1A1A"/>
+              <a:t xml:space="preserve">2. </a:t>
+            </a:r>
+            <a:r>
+              <a:rPr lang="en-US" sz="1400" typeface="Outfit" dirty="0">
+                <a:solidFill>
+                  <a:srgbClr val="1A1A1A"/>
+                </a:solidFill>
+              </a:rPr>
+              <a:t xml:space="preserve">Which gamification elements — badges, points, club competition, streaks — drive the strongest sustained engagement (retention beyond 14 days)?</a:t>
+            </a:r>
+          </a:p>
+          <a:p>
+            <a:pPr marL="342900" indent="-342900">
+              <a:buFont typeface="Arial"/>
+              <a:buAutoNum type="arabicPeriod"/>
+              <a:defRPr lang="en-US" sz="1400" typeface="Outfit" dirty="0">
+                <a:solidFill>
+                  <a:srgbClr val="1A1A1A"/>
+                </a:solidFill>
+              </a:defRPr>
+            </a:pPr>
+            <a:r>
+              <a:rPr lang="en-US" sz="1400" typeface="Outfit" dirty="0">
+                <a:solidFill>
+                  <a:srgbClr val="1A1A1A"/>
+                </a:solidFill>
+              </a:rPr>
+            </a:r>
+            <a:r>
+              <a:rPr lang="en-US" sz="1400" typeface="Arial" color="1A1A1A"/>
+              <a:t xml:space="preserve">3. </a:t>
+            </a:r>
+            <a:r>
+              <a:rPr lang="en-US" sz="1400" typeface="Outfit" dirty="0">
+                <a:solidFill>
+                  <a:srgbClr val="1A1A1A"/>
+                </a:solidFill>
+              </a:rPr>
+              <a:t xml:space="preserve">Does the reward economy (points × difficulty multiplier × streak bonus) produce a balanced distribution of activity, or concentrate participation among early adopters?</a:t>
+            </a:r>
+          </a:p>
+          <a:p>
+            <a:pPr marL="342900" indent="-342900">
+              <a:buFont typeface="Arial"/>
+              <a:buAutoNum type="arabicPeriod"/>
+              <a:defRPr lang="en-US" sz="1400" typeface="Outfit" dirty="0">
+                <a:solidFill>
+                  <a:srgbClr val="1A1A1A"/>
+                </a:solidFill>
+              </a:defRPr>
+            </a:pPr>
+            <a:r>
+              <a:rPr lang="en-US" sz="1400" typeface="Outfit" dirty="0">
+                <a:solidFill>
+                  <a:srgbClr val="1A1A1A"/>
+                </a:solidFill>
+              </a:rPr>
+            </a:r>
+            <a:r>
+              <a:rPr lang="en-US" sz="1400" typeface="Arial" color="1A1A1A"/>
+              <a:t xml:space="preserve">4. </a:t>
+            </a:r>
+            <a:r>
+              <a:rPr lang="en-US" sz="1400" typeface="Outfit" dirty="0">
+                <a:solidFill>
+                  <a:srgbClr val="1A1A1A"/>
+                </a:solidFill>
+              </a:rPr>
+              <a:t xml:space="preserve">How does the Progressive Web App (PWA) approach compare to a native app in install friction, offline resilience and device coverage in a low-connectivity campus environment?</a:t>
+            </a:r>
+          </a:p>
+          <a:p>
+            <a:pPr>
+              <a:defRPr lang="en-US" sz="800" dirty="0" typeface="Outfit"/>
+            </a:pPr>
+            <a:r>
+              <a:rPr lang="en-US" sz="800" dirty="0" typeface="Outfit"/>
+              <a:t xml:space="preserve"/>
+            </a:r>
+          </a:p>
+          <a:p>
+            <a:pPr>
+              <a:defRPr lang="en-US" sz="2000" dirty="0" typeface="Outfit" b="1">
+                <a:solidFill>
+                  <a:srgbClr val="2E7D32"/>
+                </a:solidFill>
+              </a:defRPr>
+            </a:pPr>
+            <a:r>
+              <a:rPr lang="en-US" sz="2000" dirty="0" typeface="Outfit" b="1">
+                <a:solidFill>
+                  <a:srgbClr val="2E7D32"/>
+                </a:solidFill>
+              </a:rPr>
+              <a:t xml:space="preserve">Objectives</a:t>
+            </a:r>
+          </a:p>
+          <a:p>
+            <a:pPr marL="342900" indent="-228600">
+              <a:buFont typeface="Arial"/>
+              <a:buChar char="•"/>
+              <a:defRPr lang="en-US" sz="1400" typeface="Outfit" dirty="0">
+                <a:solidFill>
+                  <a:srgbClr val="1A1A1A"/>
+                </a:solidFill>
+              </a:defRPr>
+            </a:pPr>
+            <a:r>
+              <a:rPr lang="en-US" sz="1400" typeface="Outfit" dirty="0">
+                <a:solidFill>
+                  <a:srgbClr val="1A1A1A"/>
+                </a:solidFill>
+              </a:rPr>
+              <a:t xml:space="preserve"> Design the game mechanics and reward economy grounded in Self-Determination Theory.</a:t>
+            </a:r>
+          </a:p>
+          <a:p>
+            <a:pPr marL="342900" indent="-228600">
+              <a:buFont typeface="Arial"/>
+              <a:buChar char="•"/>
+              <a:defRPr lang="en-US" sz="1400" typeface="Outfit" dirty="0">
+                <a:solidFill>
+                  <a:srgbClr val="1A1A1A"/>
+                </a:solidFill>
+              </a:defRPr>
+            </a:pPr>
+            <a:r>
+              <a:rPr lang="en-US" sz="1400" typeface="Outfit" dirty="0">
+                <a:solidFill>
+                  <a:srgbClr val="1A1A1A"/>
+                </a:solidFill>
+              </a:rPr>
+              <a:t xml:space="preserve"> Build a cross-platform PWA with QR-code checkpoint scanning, clubs, leaderboards and a badge shelf.</a:t>
+            </a:r>
+          </a:p>
+          <a:p>
+            <a:pPr marL="342900" indent="-228600">
+              <a:buFont typeface="Arial"/>
+              <a:buChar char="•"/>
+              <a:defRPr lang="en-US" sz="1400" typeface="Outfit" dirty="0">
+                <a:solidFill>
+                  <a:srgbClr val="1A1A1A"/>
+                </a:solidFill>
+              </a:defRPr>
+            </a:pPr>
+            <a:r>
+              <a:rPr lang="en-US" sz="1400" typeface="Outfit" dirty="0">
+                <a:solidFill>
+                  <a:srgbClr val="1A1A1A"/>
+                </a:solidFill>
+              </a:rPr>
+              <a:t xml:space="preserve"> Implement a Supabase backend with row-level security, real-time leaderboards and a demo mode for offline evaluation.</a:t>
+            </a:r>
+          </a:p>
+          <a:p>
+            <a:pPr marL="342900" indent="-228600">
+              <a:buFont typeface="Arial"/>
+              <a:buChar char="•"/>
+              <a:defRPr lang="en-US" sz="1400" typeface="Outfit" dirty="0">
+                <a:solidFill>
+                  <a:srgbClr val="1A1A1A"/>
+                </a:solidFill>
+              </a:defRPr>
+            </a:pPr>
+            <a:r>
+              <a:rPr lang="en-US" sz="1400" typeface="Outfit" dirty="0">
+                <a:solidFill>
+                  <a:srgbClr val="1A1A1A"/>
+                </a:solidFill>
+              </a:rPr>
+              <a:t xml:space="preserve"> Evaluate the system with a usability study and a reward-economy analysis using demo data and early user feedback.</a:t>
+            </a:r>
+          </a:p>
+        </a:txBody>
       </p:sp>
       <p:sp>
         <p:nvSpPr>
@@ -7711,7 +11001,7 @@
                 </a:spcAft>
                 <a:defRPr/>
               </a:pPr>
-              <a:t>10/7/2026</a:t>
+              <a:t>9/15/2025</a:t>
             </a:fld>
             <a:endParaRPr lang="en-US">
               <a:ea typeface="MS PGothic" panose="020B0600070205080204" pitchFamily="34" charset="-128"/>
@@ -7818,19 +11108,43 @@
         </p:nvSpPr>
         <p:spPr/>
         <p:txBody>
-          <a:bodyPr>
-            <a:normAutofit fontScale="100000" lnScale="100000"/>
-          </a:bodyPr>
-          <a:lstStyle/>
-          <a:p>
-            <a:pPr lvl="0"/>
-            <a:r>
-              <a:rPr lang="en-US" sz="3600" dirty="0" typeface="Times New Roman"/>
+          <a:bodyPr/>
+          <a:lstStyle/>
+          <a:p>
+            <a:r>
+              <a:rPr lang="en-GB" b="1" dirty="0">
+                <a:solidFill>
+                  <a:schemeClr val="bg2"/>
+                </a:solidFill>
+                <a:latin typeface="Times New Roman" panose="02020603050405020304" pitchFamily="18" charset="0"/>
+                <a:cs typeface="Times New Roman" panose="02020603050405020304" pitchFamily="18" charset="0"/>
+              </a:rPr>
               <a:t>Related Work</a:t>
             </a:r>
-            <a:endParaRPr lang="en-US" dirty="0" typeface="Times New Roman"/>
-          </a:p>
-        </p:txBody>
+            <a:endParaRPr lang="en-US" dirty="0"/>
+          </a:p>
+        </p:txBody>
+        <a:txBody>
+          <a:bodyPr/>
+          <a:lstStyle/>
+          <a:p>
+            <a:pPr>
+              <a:defRPr lang="en-US" sz="3600" dirty="0" typeface="Outfit" b="1">
+                <a:solidFill>
+                  <a:srgbClr val="1A1A1A"/>
+                </a:solidFill>
+              </a:defRPr>
+            </a:pPr>
+            <a:r>
+              <a:rPr lang="en-US" sz="3600" dirty="0" typeface="Outfit" b="1">
+                <a:solidFill>
+                  <a:srgbClr val="1A1A1A"/>
+                </a:solidFill>
+              </a:rPr>
+              <a:t xml:space="preserve">Literature and Theoretical Framework</a:t>
+            </a:r>
+          </a:p>
+        </a:txBody>
       </p:sp>
       <p:sp>
         <p:nvSpPr>
@@ -7855,54 +11169,277 @@
           </a:xfrm>
         </p:spPr>
         <p:txBody>
-          <a:bodyPr vert="horz" lIns="91440" tIns="45720" rIns="91440" bIns="45720" anchor="t">
-            <a:normAutofit fontScale="80000" lnScale="80000"/>
-          </a:bodyPr>
-          <a:lstStyle/>
-          <a:p>
-            <a:pPr lvl="0"/>
-            <a:r>
-              <a:rPr lang="en-US" sz="1400" dirty="0" typeface="Times New Roman"/>
-              <a:t xml:space="preserve">Self-determination theory — points as competence feedback, not compliance payment; relatedness through clubs and crews (Ryan &amp; Deci, 2000).</a:t>
-            </a:r>
-          </a:p>
-          <a:p>
-            <a:pPr lvl="0"/>
-            <a:r>
-              <a:rPr lang="en-US" sz="1400" dirty="0" typeface="Times New Roman"/>
-              <a:t xml:space="preserve">Flow theory — four difficulty tiers (easy/medium/hard/epic) keep challenge matched to ability (Csikszentmihalyi, 1990).</a:t>
-            </a:r>
-          </a:p>
-          <a:p>
-            <a:pPr lvl="0"/>
-            <a:r>
-              <a:rPr lang="en-US" sz="1400" dirty="0" typeface="Times New Roman"/>
-              <a:t xml:space="preserve">Sustainability — novelty decay is the dominant failure mode; campus content must be continuously administered (Althoff et al., 2016; Li et al., 2021).</a:t>
-            </a:r>
-          </a:p>
-          <a:p>
-            <a:pPr lvl="0"/>
-            <a:r>
-              <a:rPr lang="en-US" sz="1400" dirty="0" typeface="Times New Roman"/>
-              <a:t xml:space="preserve">Location-based precedent — Pokémon Go reached least-active users most (Althoff et al., 2016), with decay later (Li et al., 2021).</a:t>
-            </a:r>
-          </a:p>
-          <a:p>
-            <a:pPr lvl="0"/>
-            <a:r>
-              <a:rPr lang="en-US" sz="1400" dirty="0" typeface="Times New Roman"/>
-              <a:t xml:space="preserve">Attrition — drop-out is the norm in the first weeks; friction in the core action is the failure mode to design against (Linardon &amp; Fuller-Tyszkiewicz, 2020).</a:t>
-            </a:r>
-          </a:p>
-          <a:p>
-            <a:pPr lvl="0"/>
-            <a:r>
-              <a:rPr lang="en-US" sz="1400" dirty="0" typeface="Times New Roman"/>
-              <a:t xml:space="preserve">Why not sensors alone — equity, privacy, attribution, and portable codebase rule out a sensor-first architecture (Section 2.9.1).</a:t>
-            </a:r>
-            <a:endParaRPr lang="en-US" dirty="0" typeface="Times New Roman"/>
-          </a:p>
-        </p:txBody>
+          <a:bodyPr/>
+          <a:lstStyle/>
+          <a:p>
+            <a:pPr algn="just"/>
+            <a:endParaRPr lang="en-US" sz="2400" dirty="0">
+              <a:latin typeface="Times New Roman" panose="02020603050405020304" pitchFamily="18" charset="0"/>
+              <a:cs typeface="Times New Roman" panose="02020603050405020304" pitchFamily="18" charset="0"/>
+            </a:endParaRPr>
+          </a:p>
+        </p:txBody>
+        <a:txBody>
+          <a:bodyPr/>
+          <a:lstStyle/>
+          <a:p>
+            <a:pPr>
+              <a:defRPr lang="en-US" sz="1800" dirty="0" typeface="Outfit" b="1">
+                <a:solidFill>
+                  <a:srgbClr val="2E7D32"/>
+                </a:solidFill>
+              </a:defRPr>
+            </a:pPr>
+            <a:r>
+              <a:rPr lang="en-US" sz="1800" dirty="0" typeface="Outfit" b="1">
+                <a:solidFill>
+                  <a:srgbClr val="2E7D32"/>
+                </a:solidFill>
+              </a:rPr>
+              <a:t xml:space="preserve">Theoretical Framework — Self-Determination Theory (SDT)</a:t>
+            </a:r>
+          </a:p>
+          <a:p>
+            <a:pPr marL="342900" indent="-228600">
+              <a:buFont typeface="Arial"/>
+              <a:buChar char="•"/>
+              <a:defRPr lang="en-US" sz="1400" typeface="Outfit" dirty="0">
+                <a:solidFill>
+                  <a:srgbClr val="1A1A1A"/>
+                </a:solidFill>
+              </a:defRPr>
+            </a:pPr>
+            <a:r>
+              <a:rPr lang="en-US" sz="1400" typeface="Outfit" dirty="0">
+                <a:solidFill>
+                  <a:srgbClr val="1A1A1A"/>
+                </a:solidFill>
+              </a:rPr>
+              <a:t xml:space="preserve"> SDT (Deci &amp; Ryan, 2000) identifies three intrinsic motivators — autonomy, competence and relatedness — the lens through which CampusFit's mechanics are designed.</a:t>
+            </a:r>
+          </a:p>
+          <a:p>
+            <a:pPr marL="342900" indent="-228600">
+              <a:buFont typeface="Arial"/>
+              <a:buChar char="•"/>
+              <a:defRPr lang="en-US" sz="1400" typeface="Outfit" dirty="0">
+                <a:solidFill>
+                  <a:srgbClr val="1A1A1A"/>
+                </a:solidFill>
+              </a:defRPr>
+            </a:pPr>
+            <a:r>
+              <a:rPr lang="en-US" sz="1400" typeface="Outfit" dirty="0">
+                <a:solidFill>
+                  <a:srgbClr val="1A1A1A"/>
+                </a:solidFill>
+              </a:rPr>
+              <a:t xml:space="preserve"> Autonomy: users choose which routes to walk, which clubs to join, which challenges to start — no forced compliance paths.</a:t>
+            </a:r>
+          </a:p>
+          <a:p>
+            <a:pPr marL="342900" indent="-228600">
+              <a:buFont typeface="Arial"/>
+              <a:buChar char="•"/>
+              <a:defRPr lang="en-US" sz="1400" typeface="Outfit" dirty="0">
+                <a:solidFill>
+                  <a:srgbClr val="1A1A1A"/>
+                </a:solidFill>
+              </a:defRPr>
+            </a:pPr>
+            <a:r>
+              <a:rPr lang="en-US" sz="1400" typeface="Outfit" dirty="0">
+                <a:solidFill>
+                  <a:srgbClr val="1A1A1A"/>
+                </a:solidFill>
+              </a:rPr>
+              <a:t xml:space="preserve"> Competence: checkpoint base points × difficulty multiplier gives visible, escalating progress; badges mark milestones (first scan, 7-day streak, 2500 points).</a:t>
+            </a:r>
+          </a:p>
+          <a:p>
+            <a:pPr marL="342900" indent="-228600">
+              <a:buFont typeface="Arial"/>
+              <a:buChar char="•"/>
+              <a:defRPr lang="en-US" sz="1400" typeface="Outfit" dirty="0">
+                <a:solidFill>
+                  <a:srgbClr val="1A1A1A"/>
+                </a:solidFill>
+              </a:defRPr>
+            </a:pPr>
+            <a:r>
+              <a:rPr lang="en-US" sz="1400" typeface="Outfit" dirty="0">
+                <a:solidFill>
+                  <a:srgbClr val="1A1A1A"/>
+                </a:solidFill>
+              </a:rPr>
+              <a:t xml:space="preserve"> Relatedness: clubs, crew leaderboards and a vertical FitClips feed provide social presence without live-chat pressure.</a:t>
+            </a:r>
+          </a:p>
+          <a:p>
+            <a:pPr>
+              <a:defRPr lang="en-US" sz="800" dirty="0" typeface="Outfit"/>
+            </a:pPr>
+            <a:r>
+              <a:rPr lang="en-US" sz="800" dirty="0" typeface="Outfit"/>
+              <a:t xml:space="preserve"/>
+            </a:r>
+          </a:p>
+          <a:p>
+            <a:pPr>
+              <a:defRPr lang="en-US" sz="1800" dirty="0" typeface="Outfit" b="1">
+                <a:solidFill>
+                  <a:srgbClr val="2E7D32"/>
+                </a:solidFill>
+              </a:defRPr>
+            </a:pPr>
+            <a:r>
+              <a:rPr lang="en-US" sz="1800" dirty="0" typeface="Outfit" b="1">
+                <a:solidFill>
+                  <a:srgbClr val="2E7D32"/>
+                </a:solidFill>
+              </a:rPr>
+              <a:t xml:space="preserve">Related Work</a:t>
+            </a:r>
+          </a:p>
+          <a:p>
+            <a:pPr marL="342900" indent="-228600">
+              <a:buFont typeface="Arial"/>
+              <a:buChar char="•"/>
+              <a:defRPr lang="en-US" sz="1400" typeface="Outfit" dirty="0">
+                <a:solidFill>
+                  <a:srgbClr val="1A1A1A"/>
+                </a:solidFill>
+              </a:defRPr>
+            </a:pPr>
+            <a:r>
+              <a:rPr lang="en-US" sz="1400" typeface="Outfit" dirty="0">
+                <a:solidFill>
+                  <a:srgbClr val="1A1A1A"/>
+                </a:solidFill>
+              </a:rPr>
+              <a:t xml:space="preserve"> Habitica (2013): gamified task manager with RPG avatars and party quests — strong social accountability, but not location-aware. CampusFit borrows the party/club model but grounds it in physical campus space.</a:t>
+            </a:r>
+          </a:p>
+          <a:p>
+            <a:pPr marL="342900" indent="-228600">
+              <a:buFont typeface="Arial"/>
+              <a:buChar char="•"/>
+              <a:defRPr lang="en-US" sz="1400" typeface="Outfit" dirty="0">
+                <a:solidFill>
+                  <a:srgbClr val="1A1A1A"/>
+                </a:solidFill>
+              </a:defRPr>
+            </a:pPr>
+            <a:r>
+              <a:rPr lang="en-US" sz="1400" typeface="Outfit" dirty="0">
+                <a:solidFill>
+                  <a:srgbClr val="1A1A1A"/>
+                </a:solidFill>
+              </a:rPr>
+              <a:t xml:space="preserve"> Strava (2009): segment-based competition for cyclists and runners — excellent at making routes social, but designed for serious athletes and GPS-tracked workouts, not casual campus walking.</a:t>
+            </a:r>
+          </a:p>
+          <a:p>
+            <a:pPr marL="342900" indent="-228600">
+              <a:buFont typeface="Arial"/>
+              <a:buChar char="•"/>
+              <a:defRPr lang="en-US" sz="1400" typeface="Outfit" dirty="0">
+                <a:solidFill>
+                  <a:srgbClr val="1A1A1A"/>
+                </a:solidFill>
+              </a:defRPr>
+            </a:pPr>
+            <a:r>
+              <a:rPr lang="en-US" sz="1400" typeface="Outfit" dirty="0">
+                <a:solidFill>
+                  <a:srgbClr val="1A1A1A"/>
+                </a:solidFill>
+              </a:rPr>
+              <a:t xml:space="preserve"> Nike Run Club / Adidas Running: guided runs and coaching — good for motivation, but focused on running performance rather than habitual low-intensity activity.</a:t>
+            </a:r>
+          </a:p>
+          <a:p>
+            <a:pPr marL="342900" indent="-228600">
+              <a:buFont typeface="Arial"/>
+              <a:buChar char="•"/>
+              <a:defRPr lang="en-US" sz="1400" typeface="Outfit" dirty="0">
+                <a:solidFill>
+                  <a:srgbClr val="1A1A1A"/>
+                </a:solidFill>
+              </a:defRPr>
+            </a:pPr>
+            <a:r>
+              <a:rPr lang="en-US" sz="1400" typeface="Outfit" dirty="0">
+                <a:solidFill>
+                  <a:srgbClr val="1A1A1A"/>
+                </a:solidFill>
+              </a:rPr>
+              <a:t xml:space="preserve"> Pokémon GO (2016): location-based AR gamification that demonstrably increased walking — the most direct precedent for turning a real map into a game board, but built as a native app with heavy location/privacy requirements. CampusFit explores a lighter, scan-based analogue that works offline as a PWA.</a:t>
+            </a:r>
+          </a:p>
+          <a:p>
+            <a:pPr marL="342900" indent="-228600">
+              <a:buFont typeface="Arial"/>
+              <a:buChar char="•"/>
+              <a:defRPr lang="en-US" sz="1400" typeface="Outfit" dirty="0">
+                <a:solidFill>
+                  <a:srgbClr val="1A1A1A"/>
+                </a:solidFill>
+              </a:defRPr>
+            </a:pPr>
+            <a:r>
+              <a:rPr lang="en-US" sz="1400" typeface="Outfit" dirty="0">
+                <a:solidFill>
+                  <a:srgbClr val="1A1A1A"/>
+                </a:solidFill>
+              </a:rPr>
+              <a:t xml:space="preserve"> Zamzee / Sweatcoin: movement-to-reward conversion — relevant to the reward-economy design; CampusFit's checkpoint model differs by being verifiable (QR scan at a known location) rather than accelerometer-based, reducing fraud.</a:t>
+            </a:r>
+          </a:p>
+          <a:p>
+            <a:pPr>
+              <a:defRPr lang="en-US" sz="800" dirty="0" typeface="Outfit"/>
+            </a:pPr>
+            <a:r>
+              <a:rPr lang="en-US" sz="800" dirty="0" typeface="Outfit"/>
+              <a:t xml:space="preserve"/>
+            </a:r>
+          </a:p>
+          <a:p>
+            <a:pPr>
+              <a:defRPr lang="en-US" sz="1400" dirty="0" typeface="Outfit" b="1">
+                <a:solidFill>
+                  <a:srgbClr val="555555"/>
+                </a:solidFill>
+              </a:defRPr>
+            </a:pPr>
+            <a:r>
+              <a:rPr lang="en-US" sz="1400" dirty="0" typeface="Outfit" b="1">
+                <a:solidFill>
+                  <a:srgbClr val="555555"/>
+                </a:solidFill>
+              </a:rPr>
+              <a:t xml:space="preserve">Gap CampusFit addresses</a:t>
+            </a:r>
+          </a:p>
+          <a:p>
+            <a:pPr>
+              <a:defRPr lang="en-US" sz="1400" dirty="0" typeface="Outfit" i="1">
+                <a:solidFill>
+                  <a:srgbClr val="555555"/>
+                </a:solidFill>
+              </a:defRPr>
+            </a:pPr>
+            <a:r>
+              <a:rPr lang="en-US" sz="1400" dirty="0" typeface="Outfit" i="1">
+                <a:solidFill>
+                  <a:srgbClr val="555555"/>
+                </a:solidFill>
+              </a:rPr>
+              <a:t xml:space="preserve">No existing campus-friendly PWA combines verifiable checkpoint scanning, clubs and crews, a visible reward economy and offline-first installability into a single lightweight app.</a:t>
+            </a:r>
+          </a:p>
+        </a:txBody>
       </p:sp>
       <p:sp>
         <p:nvSpPr>
@@ -7947,7 +11484,7 @@
                 </a:spcAft>
                 <a:defRPr/>
               </a:pPr>
-              <a:t>10/7/2026</a:t>
+              <a:t>9/15/2025</a:t>
             </a:fld>
             <a:endParaRPr lang="en-US">
               <a:ea typeface="MS PGothic" panose="020B0600070205080204" pitchFamily="34" charset="-128"/>
@@ -8054,19 +11591,47 @@
         </p:nvSpPr>
         <p:spPr/>
         <p:txBody>
-          <a:bodyPr>
-            <a:normAutofit fontScale="100000" lnScale="100000"/>
-          </a:bodyPr>
-          <a:lstStyle/>
-          <a:p>
-            <a:pPr lvl="0"/>
-            <a:r>
-              <a:rPr lang="en-US" sz="3600" dirty="0" typeface="Times New Roman"/>
+          <a:bodyPr/>
+          <a:lstStyle/>
+          <a:p>
+            <a:r>
+              <a:rPr lang="en-GB" sz="4400" b="1" dirty="0">
+                <a:solidFill>
+                  <a:schemeClr val="bg2"/>
+                </a:solidFill>
+                <a:latin typeface="Times New Roman" panose="02020603050405020304" pitchFamily="18" charset="0"/>
+                <a:cs typeface="Times New Roman" panose="02020603050405020304" pitchFamily="18" charset="0"/>
+              </a:rPr>
               <a:t>Proposed Solution</a:t>
             </a:r>
-            <a:endParaRPr lang="en-US" dirty="0" typeface="Times New Roman"/>
-          </a:p>
-        </p:txBody>
+            <a:endParaRPr lang="en-US" dirty="0">
+              <a:solidFill>
+                <a:schemeClr val="bg2"/>
+              </a:solidFill>
+            </a:endParaRPr>
+          </a:p>
+        </p:txBody>
+        <a:txBody>
+          <a:bodyPr/>
+          <a:lstStyle/>
+          <a:p>
+            <a:pPr>
+              <a:defRPr lang="en-US" sz="3600" dirty="0" typeface="Outfit" b="1">
+                <a:solidFill>
+                  <a:srgbClr val="1A1A1A"/>
+                </a:solidFill>
+              </a:defRPr>
+            </a:pPr>
+            <a:r>
+              <a:rPr lang="en-US" sz="3600" dirty="0" typeface="Outfit" b="1">
+                <a:solidFill>
+                  <a:srgbClr val="1A1A1A"/>
+                </a:solidFill>
+              </a:rPr>
+              <a:t xml:space="preserve">Methodology and Design</a:t>
+            </a:r>
+          </a:p>
+        </a:txBody>
       </p:sp>
       <p:sp>
         <p:nvSpPr>
@@ -8086,68 +11651,287 @@
         </p:nvSpPr>
         <p:spPr/>
         <p:txBody>
-          <a:bodyPr vert="horz" lIns="91440" tIns="45720" rIns="91440" bIns="45720" anchor="t">
-            <a:normAutofit fontScale="80000" lnScale="80000"/>
-          </a:bodyPr>
-          <a:lstStyle/>
-          <a:p>
-            <a:pPr lvl="0"/>
-            <a:r>
-              <a:rPr lang="en-US" sz="1600" dirty="0" typeface="Times New Roman" b="1"/>
-              <a:t xml:space="preserve">Architecture (three tiers)</a:t>
-            </a:r>
-          </a:p>
-          <a:p>
-            <a:pPr lvl="0"/>
-            <a:r>
-              <a:rPr lang="en-US" sz="1400" dirty="0" typeface="Times New Roman"/>
-              <a:t xml:space="preserve">• Client: React 19 + TypeScript + Tailwind CSS, Progressive Web App with precached shell.</a:t>
-            </a:r>
-          </a:p>
-          <a:p>
-            <a:pPr lvl="0"/>
-            <a:r>
-              <a:rPr lang="en-US" sz="1400" dirty="0" typeface="Times New Roman"/>
-              <a:t xml:space="preserve">• Backend: Supabase / PostgreSQL with row-level security; all reward authority in server-side database functions.</a:t>
-            </a:r>
-          </a:p>
-          <a:p>
-            <a:pPr lvl="0"/>
-            <a:r>
-              <a:rPr lang="en-US" sz="1400" dirty="0" typeface="Times New Roman"/>
-              <a:t xml:space="preserve">• Physical: printed QR codes (NFC-ready); same code string as the database checkpoint row.</a:t>
-            </a:r>
-          </a:p>
-          <a:p>
-            <a:pPr lvl="0"/>
-            <a:r>
-              <a:rPr lang="en-US" sz="1400" dirty="0" typeface="Times New Roman"/>
-              <a:t xml:space="preserve"> </a:t>
-            </a:r>
-          </a:p>
-          <a:p>
-            <a:pPr lvl="0"/>
-            <a:r>
-              <a:rPr lang="en-US" sz="1600" dirty="0" typeface="Times New Roman" b="1"/>
-              <a:t xml:space="preserve">Refereed reward economy</a:t>
-            </a:r>
-          </a:p>
-          <a:p>
-            <a:pPr lvl="0"/>
-            <a:r>
-              <a:rPr lang="en-US" sz="1400" dirty="0" typeface="Times New Roman"/>
-              <a:t xml:space="preserve">• scan_checkpoint() resolves the checkpoint, enforces an 8-hour per-user cooldown, applies a difficulty multiplier, writes an append-only audit ledger, and recomputes points / level / streak in one transaction.</a:t>
-            </a:r>
-          </a:p>
-          <a:p>
-            <a:pPr lvl="0"/>
-            <a:r>
-              <a:rPr lang="en-US" sz="1400" dirty="0" typeface="Times New Roman"/>
-              <a:t xml:space="preserve">• Multipliers: easy ×1.0, medium ×1.3, hard ×1.8, epic ×2.5.</a:t>
-            </a:r>
-            <a:endParaRPr lang="en-US" dirty="0" typeface="Times New Roman"/>
-          </a:p>
-        </p:txBody>
+          <a:bodyPr/>
+          <a:lstStyle/>
+          <a:p>
+            <a:endParaRPr lang="en-US" sz="3200" kern="100" dirty="0">
+              <a:effectLst/>
+              <a:latin typeface="Times New Roman" panose="02020603050405020304" pitchFamily="18" charset="0"/>
+              <a:ea typeface="Aptos" panose="020B0004020202020204" pitchFamily="34" charset="0"/>
+              <a:cs typeface="Times New Roman" panose="02020603050405020304" pitchFamily="18" charset="0"/>
+            </a:endParaRPr>
+          </a:p>
+          <a:p>
+            <a:endParaRPr lang="en-US" kern="100" dirty="0">
+              <a:latin typeface="Times New Roman" panose="02020603050405020304" pitchFamily="18" charset="0"/>
+              <a:ea typeface="Aptos" panose="020B0004020202020204" pitchFamily="34" charset="0"/>
+              <a:cs typeface="Times New Roman" panose="02020603050405020304" pitchFamily="18" charset="0"/>
+            </a:endParaRPr>
+          </a:p>
+        </p:txBody>
+        <a:txBody>
+          <a:bodyPr/>
+          <a:lstStyle/>
+          <a:p>
+            <a:pPr>
+              <a:defRPr lang="en-US" sz="1800" dirty="0" typeface="Outfit" b="1">
+                <a:solidFill>
+                  <a:srgbClr val="2E7D32"/>
+                </a:solidFill>
+              </a:defRPr>
+            </a:pPr>
+            <a:r>
+              <a:rPr lang="en-US" sz="1800" dirty="0" typeface="Outfit" b="1">
+                <a:solidFill>
+                  <a:srgbClr val="2E7D32"/>
+                </a:solidFill>
+              </a:rPr>
+              <a:t xml:space="preserve">Research Methodology</a:t>
+            </a:r>
+          </a:p>
+          <a:p>
+            <a:pPr marL="342900" indent="-228600">
+              <a:buFont typeface="Arial"/>
+              <a:buChar char="•"/>
+              <a:defRPr lang="en-US" sz="1400" typeface="Outfit" dirty="0">
+                <a:solidFill>
+                  <a:srgbClr val="1A1A1A"/>
+                </a:solidFill>
+              </a:defRPr>
+            </a:pPr>
+            <a:r>
+              <a:rPr lang="en-US" sz="1400" typeface="Outfit" dirty="0">
+                <a:solidFill>
+                  <a:srgbClr val="1A1A1A"/>
+                </a:solidFill>
+              </a:rPr>
+              <a:t xml:space="preserve"> Design science research (Hevner et al., 2004): build a functional artefact (the PWA) and evaluate it against defined metrics — not merely a literature review.</a:t>
+            </a:r>
+          </a:p>
+          <a:p>
+            <a:pPr marL="342900" indent="-228600">
+              <a:buFont typeface="Arial"/>
+              <a:buChar char="•"/>
+              <a:defRPr lang="en-US" sz="1400" typeface="Outfit" dirty="0">
+                <a:solidFill>
+                  <a:srgbClr val="1A1A1A"/>
+                </a:solidFill>
+              </a:defRPr>
+            </a:pPr>
+            <a:r>
+              <a:rPr lang="en-US" sz="1400" typeface="Outfit" dirty="0">
+                <a:solidFill>
+                  <a:srgbClr val="1A1A1A"/>
+                </a:solidFill>
+              </a:rPr>
+              <a:t xml:space="preserve"> Agile development with two-week iteration cycles; the artefact was built in TypeScript + React, using Tailwind CSS for the design system and Vite for bundling.</a:t>
+            </a:r>
+          </a:p>
+          <a:p>
+            <a:pPr marL="342900" indent="-228600">
+              <a:buFont typeface="Arial"/>
+              <a:buChar char="•"/>
+              <a:defRPr lang="en-US" sz="1400" typeface="Outfit" dirty="0">
+                <a:solidFill>
+                  <a:srgbClr val="1A1A1A"/>
+                </a:solidFill>
+              </a:defRPr>
+            </a:pPr>
+            <a:r>
+              <a:rPr lang="en-US" sz="1400" typeface="Outfit" dirty="0">
+                <a:solidFill>
+                  <a:srgbClr val="1A1A1A"/>
+                </a:solidFill>
+              </a:rPr>
+              <a:t xml:space="preserve"> Evaluation approach: (a) functional verification of all routes, scan loop and reward calculations; (b) usability walkthrough with a small student panel; (c) reward-economy analysis from demo data and seeded user profiles.</a:t>
+            </a:r>
+          </a:p>
+          <a:p>
+            <a:pPr>
+              <a:defRPr lang="en-US" sz="800" dirty="0" typeface="Outfit"/>
+            </a:pPr>
+            <a:r>
+              <a:rPr lang="en-US" sz="800" dirty="0" typeface="Outfit"/>
+              <a:t xml:space="preserve"/>
+            </a:r>
+          </a:p>
+          <a:p>
+            <a:pPr>
+              <a:defRPr lang="en-US" sz="1800" dirty="0" typeface="Outfit" b="1">
+                <a:solidFill>
+                  <a:srgbClr val="2E7D32"/>
+                </a:solidFill>
+              </a:defRPr>
+            </a:pPr>
+            <a:r>
+              <a:rPr lang="en-US" sz="1800" dirty="0" typeface="Outfit" b="1">
+                <a:solidFill>
+                  <a:srgbClr val="2E7D32"/>
+                </a:solidFill>
+              </a:rPr>
+              <a:t xml:space="preserve">Design System</a:t>
+            </a:r>
+          </a:p>
+          <a:p>
+            <a:pPr marL="342900" indent="-228600">
+              <a:buFont typeface="Arial"/>
+              <a:buChar char="•"/>
+              <a:defRPr lang="en-US" sz="1400" typeface="Outfit" dirty="0">
+                <a:solidFill>
+                  <a:srgbClr val="1A1A1A"/>
+                </a:solidFill>
+              </a:defRPr>
+            </a:pPr>
+            <a:r>
+              <a:rPr lang="en-US" sz="1400" typeface="Outfit" dirty="0">
+                <a:solidFill>
+                  <a:srgbClr val="1A1A1A"/>
+                </a:solidFill>
+              </a:rPr>
+              <a:t xml:space="preserve"> Warm cream surface (#FFF8EC family) with mint green primary (#2E7D32 family) — approachable, campus-natural tones chosen to avoid the aggressive neon of many fitness apps.</a:t>
+            </a:r>
+          </a:p>
+          <a:p>
+            <a:pPr marL="342900" indent="-228600">
+              <a:buFont typeface="Arial"/>
+              <a:buChar char="•"/>
+              <a:defRPr lang="en-US" sz="1400" typeface="Outfit" dirty="0">
+                <a:solidFill>
+                  <a:srgbClr val="1A1A1A"/>
+                </a:solidFill>
+              </a:defRPr>
+            </a:pPr>
+            <a:r>
+              <a:rPr lang="en-US" sz="1400" typeface="Outfit" dirty="0">
+                <a:solidFill>
+                  <a:srgbClr val="1A1A1A"/>
+                </a:solidFill>
+              </a:rPr>
+              <a:t xml:space="preserve"> Outfit type family for display/headlines; readable label/body scale for stats and captions — 20px cards, consistent spacing tokens (xs / sm / md / lg / xl).</a:t>
+            </a:r>
+          </a:p>
+          <a:p>
+            <a:pPr marL="342900" indent="-228600">
+              <a:buFont typeface="Arial"/>
+              <a:buChar char="•"/>
+              <a:defRPr lang="en-US" sz="1400" typeface="Outfit" dirty="0">
+                <a:solidFill>
+                  <a:srgbClr val="1A1A1A"/>
+                </a:solidFill>
+              </a:defRPr>
+            </a:pPr>
+            <a:r>
+              <a:rPr lang="en-US" sz="1400" typeface="Outfit" dirty="0">
+                <a:solidFill>
+                  <a:srgbClr val="1A1A1A"/>
+                </a:solidFill>
+              </a:rPr>
+              <a:t xml:space="preserve"> Component tokens: rounded-xl / rounded-2xl cards, soft borders, elevation via shadow-card / shadow-card-lg, tactile active:scale feedback on every interactive element.</a:t>
+            </a:r>
+          </a:p>
+          <a:p>
+            <a:pPr>
+              <a:defRPr lang="en-US" sz="800" dirty="0" typeface="Outfit"/>
+            </a:pPr>
+            <a:r>
+              <a:rPr lang="en-US" sz="800" dirty="0" typeface="Outfit"/>
+              <a:t xml:space="preserve"/>
+            </a:r>
+          </a:p>
+          <a:p>
+            <a:pPr>
+              <a:defRPr lang="en-US" sz="1800" dirty="0" typeface="Outfit" b="1">
+                <a:solidFill>
+                  <a:srgbClr val="2E7D32"/>
+                </a:solidFill>
+              </a:defRPr>
+            </a:pPr>
+            <a:r>
+              <a:rPr lang="en-US" sz="1800" dirty="0" typeface="Outfit" b="1">
+                <a:solidFill>
+                  <a:srgbClr val="2E7D32"/>
+                </a:solidFill>
+              </a:rPr>
+              <a:t xml:space="preserve">Core Design Decisions</a:t>
+            </a:r>
+          </a:p>
+          <a:p>
+            <a:pPr marL="342900" indent="-228600">
+              <a:buFont typeface="Arial"/>
+              <a:buChar char="•"/>
+              <a:defRPr lang="en-US" sz="1400" typeface="Outfit" dirty="0">
+                <a:solidFill>
+                  <a:srgbClr val="1A1A1A"/>
+                </a:solidFill>
+              </a:defRPr>
+            </a:pPr>
+            <a:r>
+              <a:rPr lang="en-US" sz="1400" typeface="Outfit" dirty="0">
+                <a:solidFill>
+                  <a:srgbClr val="1A1A1A"/>
+                </a:solidFill>
+              </a:rPr>
+              <a:t xml:space="preserve"> Progressive Web App (not native): one link to install, works offline once cached, no app-store review gate — chosen specifically for low-friction campus adoption.</a:t>
+            </a:r>
+          </a:p>
+          <a:p>
+            <a:pPr marL="342900" indent="-228600">
+              <a:buFont typeface="Arial"/>
+              <a:buChar char="•"/>
+              <a:defRPr lang="en-US" sz="1400" typeface="Outfit" dirty="0">
+                <a:solidFill>
+                  <a:srgbClr val="1A1A1A"/>
+                </a:solidFill>
+              </a:defRPr>
+            </a:pPr>
+            <a:r>
+              <a:rPr lang="en-US" sz="1400" typeface="Outfit" dirty="0">
+                <a:solidFill>
+                  <a:srgbClr val="1A1A1A"/>
+                </a:solidFill>
+              </a:rPr>
+              <a:t xml:space="preserve"> QR-code checkpoint scanning (not GPS): verifiable, low battery cost, works indoors and under tree cover — a scan at a physical sign is the proof of presence.</a:t>
+            </a:r>
+          </a:p>
+          <a:p>
+            <a:pPr marL="342900" indent="-228600">
+              <a:buFont typeface="Arial"/>
+              <a:buChar char="•"/>
+              <a:defRPr lang="en-US" sz="1400" typeface="Outfit" dirty="0">
+                <a:solidFill>
+                  <a:srgbClr val="1A1A1A"/>
+                </a:solidFill>
+              </a:defRPr>
+            </a:pPr>
+            <a:r>
+              <a:rPr lang="en-US" sz="1400" typeface="Outfit" dirty="0">
+                <a:solidFill>
+                  <a:srgbClr val="1A1A1A"/>
+                </a:solidFill>
+              </a:rPr>
+              <a:t xml:space="preserve"> Clubs and crews over open global leaderboard: keeps competition socially bounded and relevant to the campus community.</a:t>
+            </a:r>
+          </a:p>
+          <a:p>
+            <a:pPr marL="342900" indent="-228600">
+              <a:buFont typeface="Arial"/>
+              <a:buChar char="•"/>
+              <a:defRPr lang="en-US" sz="1400" typeface="Outfit" dirty="0">
+                <a:solidFill>
+                  <a:srgbClr val="1A1A1A"/>
+                </a:solidFill>
+              </a:defRPr>
+            </a:pPr>
+            <a:r>
+              <a:rPr lang="en-US" sz="1400" typeface="Outfit" dirty="0">
+                <a:solidFill>
+                  <a:srgbClr val="1A1A1A"/>
+                </a:solidFill>
+              </a:rPr>
+              <a:t xml:space="preserve"> Demo mode: the app runs entirely from bundled demo data when Supabase is not configured, so the artefact is presentable and testable before the database exists.</a:t>
+            </a:r>
+          </a:p>
+        </a:txBody>
       </p:sp>
       <p:sp>
         <p:nvSpPr>
@@ -8192,7 +11976,7 @@
                 </a:spcAft>
                 <a:defRPr/>
               </a:pPr>
-              <a:t>10/7/2026</a:t>
+              <a:t>9/15/2025</a:t>
             </a:fld>
             <a:endParaRPr lang="en-US">
               <a:ea typeface="MS PGothic" panose="020B0600070205080204" pitchFamily="34" charset="-128"/>
@@ -8248,6 +12032,75 @@
             <a:endParaRPr lang="en-US" altLang="en-US">
               <a:ea typeface="MS PGothic" panose="020B0600070205080204" pitchFamily="34" charset="-128"/>
             </a:endParaRPr>
+          </a:p>
+        </p:txBody>
+      </p:sp>
+      <p:sp>
+        <p:nvSpPr>
+          <p:cNvPr id="7" name="Rectangle 1">
+            <a:extLst>
+              <a:ext uri="{FF2B5EF4-FFF2-40B4-BE49-F238E27FC236}">
+                <a16:creationId xmlns:a16="http://schemas.microsoft.com/office/drawing/2014/main" id="{51A869A9-1EC7-F343-073E-F51243E5FC8F}"/>
+              </a:ext>
+            </a:extLst>
+          </p:cNvPr>
+          <p:cNvSpPr>
+            <a:spLocks noChangeArrowheads="1"/>
+          </p:cNvSpPr>
+          <p:nvPr/>
+        </p:nvSpPr>
+        <p:spPr bwMode="auto">
+          <a:xfrm>
+            <a:off x="3127375" y="2263775"/>
+            <a:ext cx="12192000" cy="457200"/>
+          </a:xfrm>
+          <a:prstGeom prst="rect">
+            <a:avLst/>
+          </a:prstGeom>
+          <a:noFill/>
+          <a:ln>
+            <a:noFill/>
+          </a:ln>
+          <a:effectLst/>
+          <a:extLst>
+            <a:ext uri="{909E8E84-426E-40DD-AFC4-6F175D3DCCD1}">
+              <a14:hiddenFill xmlns:a14="http://schemas.microsoft.com/office/drawing/2010/main">
+                <a:solidFill>
+                  <a:schemeClr val="accent1"/>
+                </a:solidFill>
+              </a14:hiddenFill>
+            </a:ext>
+            <a:ext uri="{91240B29-F687-4F45-9708-019B960494DF}">
+              <a14:hiddenLine xmlns:a14="http://schemas.microsoft.com/office/drawing/2010/main" w="9525">
+                <a:solidFill>
+                  <a:schemeClr val="tx1"/>
+                </a:solidFill>
+                <a:miter lim="800000"/>
+                <a:headEnd/>
+                <a:tailEnd/>
+              </a14:hiddenLine>
+            </a:ext>
+            <a:ext uri="{AF507438-7753-43E0-B8FC-AC1667EBCBE1}">
+              <a14:hiddenEffects xmlns:a14="http://schemas.microsoft.com/office/drawing/2010/main">
+                <a:effectLst>
+                  <a:outerShdw dist="35921" dir="2700000" algn="ctr" rotWithShape="0">
+                    <a:schemeClr val="bg2"/>
+                  </a:outerShdw>
+                </a:effectLst>
+              </a14:hiddenEffects>
+            </a:ext>
+          </a:extLst>
+        </p:spPr>
+        <p:txBody>
+          <a:bodyPr vert="horz" wrap="none" lIns="91440" tIns="45720" rIns="91440" bIns="45720" numCol="1" anchor="ctr" anchorCtr="0" compatLnSpc="1">
+            <a:prstTxWarp prst="textNoShape">
+              <a:avLst/>
+            </a:prstTxWarp>
+            <a:spAutoFit/>
+          </a:bodyPr>
+          <a:lstStyle/>
+          <a:p>
+            <a:endParaRPr lang="en-US"/>
           </a:p>
         </p:txBody>
       </p:sp>
@@ -8299,19 +12152,43 @@
         </p:nvSpPr>
         <p:spPr/>
         <p:txBody>
-          <a:bodyPr>
-            <a:normAutofit fontScale="100000" lnScale="100000"/>
-          </a:bodyPr>
-          <a:lstStyle/>
-          <a:p>
-            <a:pPr lvl="0"/>
-            <a:r>
-              <a:rPr lang="en-US" sz="3600" dirty="0" typeface="Times New Roman"/>
+          <a:bodyPr/>
+          <a:lstStyle/>
+          <a:p>
+            <a:r>
+              <a:rPr lang="en-US" b="1" dirty="0">
+                <a:solidFill>
+                  <a:schemeClr val="bg2"/>
+                </a:solidFill>
+                <a:latin typeface="Times New Roman" panose="02020603050405020304" pitchFamily="18" charset="0"/>
+                <a:cs typeface="Times New Roman" panose="02020603050405020304" pitchFamily="18" charset="0"/>
+              </a:rPr>
               <a:t>End Slide</a:t>
             </a:r>
-            <a:endParaRPr lang="en-US" dirty="0" typeface="Times New Roman"/>
-          </a:p>
-        </p:txBody>
+            <a:endParaRPr lang="en-US" dirty="0"/>
+          </a:p>
+        </p:txBody>
+        <a:txBody>
+          <a:bodyPr/>
+          <a:lstStyle/>
+          <a:p>
+            <a:pPr>
+              <a:defRPr lang="en-US" sz="3600" dirty="0" typeface="Outfit" b="1">
+                <a:solidFill>
+                  <a:srgbClr val="1A1A1A"/>
+                </a:solidFill>
+              </a:defRPr>
+            </a:pPr>
+            <a:r>
+              <a:rPr lang="en-US" sz="3600" dirty="0" typeface="Outfit" b="1">
+                <a:solidFill>
+                  <a:srgbClr val="1A1A1A"/>
+                </a:solidFill>
+              </a:rPr>
+              <a:t xml:space="preserve">System Architecture and Implementation</a:t>
+            </a:r>
+          </a:p>
+        </a:txBody>
       </p:sp>
       <p:sp>
         <p:nvSpPr>
@@ -8356,7 +12233,7 @@
                 </a:spcAft>
                 <a:defRPr/>
               </a:pPr>
-              <a:t>10/7/2026</a:t>
+              <a:t>9/15/2025</a:t>
             </a:fld>
             <a:endParaRPr lang="en-US">
               <a:ea typeface="MS PGothic" panose="020B0600070205080204" pitchFamily="34" charset="-128"/>
@@ -8417,6 +12294,75 @@
       </p:sp>
       <p:sp>
         <p:nvSpPr>
+          <p:cNvPr id="7" name="Rectangle 1">
+            <a:extLst>
+              <a:ext uri="{FF2B5EF4-FFF2-40B4-BE49-F238E27FC236}">
+                <a16:creationId xmlns:a16="http://schemas.microsoft.com/office/drawing/2014/main" id="{8A935C62-7CE4-90E7-86E2-F628BB9B6672}"/>
+              </a:ext>
+            </a:extLst>
+          </p:cNvPr>
+          <p:cNvSpPr>
+            <a:spLocks noChangeArrowheads="1"/>
+          </p:cNvSpPr>
+          <p:nvPr/>
+        </p:nvSpPr>
+        <p:spPr bwMode="auto">
+          <a:xfrm>
+            <a:off x="0" y="0"/>
+            <a:ext cx="12192000" cy="457200"/>
+          </a:xfrm>
+          <a:prstGeom prst="rect">
+            <a:avLst/>
+          </a:prstGeom>
+          <a:noFill/>
+          <a:ln>
+            <a:noFill/>
+          </a:ln>
+          <a:effectLst/>
+          <a:extLst>
+            <a:ext uri="{909E8E84-426E-40DD-AFC4-6F175D3DCCD1}">
+              <a14:hiddenFill xmlns:a14="http://schemas.microsoft.com/office/drawing/2010/main">
+                <a:solidFill>
+                  <a:schemeClr val="accent1"/>
+                </a:solidFill>
+              </a14:hiddenFill>
+            </a:ext>
+            <a:ext uri="{91240B29-F687-4F45-9708-019B960494DF}">
+              <a14:hiddenLine xmlns:a14="http://schemas.microsoft.com/office/drawing/2010/main" w="9525">
+                <a:solidFill>
+                  <a:schemeClr val="tx1"/>
+                </a:solidFill>
+                <a:miter lim="800000"/>
+                <a:headEnd/>
+                <a:tailEnd/>
+              </a14:hiddenLine>
+            </a:ext>
+            <a:ext uri="{AF507438-7753-43E0-B8FC-AC1667EBCBE1}">
+              <a14:hiddenEffects xmlns:a14="http://schemas.microsoft.com/office/drawing/2010/main">
+                <a:effectLst>
+                  <a:outerShdw dist="35921" dir="2700000" algn="ctr" rotWithShape="0">
+                    <a:schemeClr val="bg2"/>
+                  </a:outerShdw>
+                </a:effectLst>
+              </a14:hiddenEffects>
+            </a:ext>
+          </a:extLst>
+        </p:spPr>
+        <p:txBody>
+          <a:bodyPr vert="horz" wrap="none" lIns="91440" tIns="45720" rIns="91440" bIns="45720" numCol="1" anchor="ctr" anchorCtr="0" compatLnSpc="1">
+            <a:prstTxWarp prst="textNoShape">
+              <a:avLst/>
+            </a:prstTxWarp>
+            <a:spAutoFit/>
+          </a:bodyPr>
+          <a:lstStyle/>
+          <a:p>
+            <a:endParaRPr lang="en-US"/>
+          </a:p>
+        </p:txBody>
+      </p:sp>
+      <p:sp>
+        <p:nvSpPr>
           <p:cNvPr id="8" name="Content Placeholder 7">
             <a:extLst>
               <a:ext uri="{FF2B5EF4-FFF2-40B4-BE49-F238E27FC236}">
@@ -8433,89 +12379,230 @@
         </p:nvSpPr>
         <p:spPr/>
         <p:txBody>
-          <a:bodyPr vert="horz" lIns="91440" tIns="45720" rIns="91440" bIns="45720" anchor="t">
-            <a:normAutofit fontScale="80000" lnScale="80000"/>
-          </a:bodyPr>
-          <a:lstStyle/>
-          <a:p>
-            <a:pPr lvl="0"/>
-            <a:r>
-              <a:rPr lang="en-US" sz="1400" dirty="0" typeface="Times New Roman"/>
-              <a:t xml:space="preserve">Thank you.</a:t>
-            </a:r>
-          </a:p>
-          <a:p>
-            <a:pPr lvl="0"/>
-            <a:r>
-              <a:rPr lang="en-US" sz="1400" dirty="0" typeface="Times New Roman"/>
-              <a:t xml:space="preserve"> </a:t>
-            </a:r>
-          </a:p>
-          <a:p>
-            <a:pPr lvl="0"/>
-            <a:r>
-              <a:rPr lang="en-US" sz="1600" dirty="0" typeface="Times New Roman" b="1"/>
-              <a:t xml:space="preserve">Summary — six verified findings</a:t>
-            </a:r>
-          </a:p>
-          <a:p>
-            <a:pPr lvl="0"/>
-            <a:r>
-              <a:rPr lang="en-US" sz="1400" dirty="0" typeface="Times New Roman"/>
-              <a:t xml:space="preserve">1. Schema-implementation fidelity: 29/29 routes, 0 console errors.</a:t>
-            </a:r>
-          </a:p>
-          <a:p>
-            <a:pPr lvl="0"/>
-            <a:r>
-              <a:rPr lang="en-US" sz="1400" dirty="0" typeface="Times New Roman"/>
-              <a:t xml:space="preserve">2. Reward-path correctness: 9/9 end-to-end checks, including cooldown rejection.</a:t>
-            </a:r>
-          </a:p>
-          <a:p>
-            <a:pPr lvl="0"/>
-            <a:r>
-              <a:rPr lang="en-US" sz="1400" dirty="0" typeface="Times New Roman"/>
-              <a:t xml:space="preserve">3. Points economy verified under simulation across casual, regular and committed profiles.</a:t>
-            </a:r>
-          </a:p>
-          <a:p>
-            <a:pPr lvl="0"/>
-            <a:r>
-              <a:rPr lang="en-US" sz="1400" dirty="0" typeface="Times New Roman"/>
-              <a:t xml:space="preserve">4. Interface fidelity to the design specification: mean 0.910 over 19 comparable screens.</a:t>
-            </a:r>
-          </a:p>
-          <a:p>
-            <a:pPr lvl="0"/>
-            <a:r>
-              <a:rPr lang="en-US" sz="1400" dirty="0" typeface="Times New Roman"/>
-              <a:t xml:space="preserve">5. No high-severity usability findings on heuristic inspection.</a:t>
-            </a:r>
-          </a:p>
-          <a:p>
-            <a:pPr lvl="0"/>
-            <a:r>
-              <a:rPr lang="en-US" sz="1400" dirty="0" typeface="Times New Roman"/>
-              <a:t xml:space="preserve">6. Single-codebase PWA: ~207 kB connected first load (cold build 25.5 s), offline shell.</a:t>
-            </a:r>
-          </a:p>
-          <a:p>
-            <a:pPr lvl="0"/>
-            <a:r>
-              <a:rPr lang="en-US" sz="1400" dirty="0" typeface="Times New Roman"/>
-              <a:t xml:space="preserve"> </a:t>
-            </a:r>
-          </a:p>
-          <a:p>
-            <a:pPr lvl="0"/>
-            <a:r>
-              <a:rPr lang="en-US" sz="1600" dirty="0" typeface="Times New Roman" b="1"/>
-              <a:t xml:space="preserve">Future work: usability pilot (SUS), NFC / signed rotating codes, geofence confirmation, wearable integration, multi-campus federation.</a:t>
-            </a:r>
-            <a:endParaRPr lang="en-US" dirty="0" typeface="Times New Roman"/>
-          </a:p>
-        </p:txBody>
+          <a:bodyPr/>
+          <a:lstStyle/>
+          <a:p>
+            <a:endParaRPr lang="en-US"/>
+          </a:p>
+        </p:txBody>
+        <a:txBody>
+          <a:bodyPr/>
+          <a:lstStyle/>
+          <a:p>
+            <a:pPr>
+              <a:defRPr lang="en-US" sz="1800" dirty="0" typeface="Outfit" b="1">
+                <a:solidFill>
+                  <a:srgbClr val="2E7D32"/>
+                </a:solidFill>
+              </a:defRPr>
+            </a:pPr>
+            <a:r>
+              <a:rPr lang="en-US" sz="1800" dirty="0" typeface="Outfit" b="1">
+                <a:solidFill>
+                  <a:srgbClr val="2E7D32"/>
+                </a:solidFill>
+              </a:rPr>
+              <a:t xml:space="preserve">Architecture — Three Tiers</a:t>
+            </a:r>
+          </a:p>
+          <a:p>
+            <a:pPr marL="342900" indent="-228600">
+              <a:buFont typeface="Arial"/>
+              <a:buChar char="•"/>
+              <a:defRPr lang="en-US" sz="1400" typeface="Outfit" dirty="0">
+                <a:solidFill>
+                  <a:srgbClr val="1A1A1A"/>
+                </a:solidFill>
+              </a:defRPr>
+            </a:pPr>
+            <a:r>
+              <a:rPr lang="en-US" sz="1400" typeface="Outfit" dirty="0">
+                <a:solidFill>
+                  <a:srgbClr val="1A1A1A"/>
+                </a:solidFill>
+              </a:rPr>
+              <a:t xml:space="preserve"> Client (PWA): React 19 + TypeScript + Tailwind CSS, bundled by Vite; service worker precaches the app shell and routes for offline use; 29 screens covering onboarding, dashboard, FitClips, FitTrip explorer, clubs, gamification and admin.</a:t>
+            </a:r>
+          </a:p>
+          <a:p>
+            <a:pPr marL="342900" indent="-228600">
+              <a:buFont typeface="Arial"/>
+              <a:buChar char="•"/>
+              <a:defRPr lang="en-US" sz="1400" typeface="Outfit" dirty="0">
+                <a:solidFill>
+                  <a:srgbClr val="1A1A1A"/>
+                </a:solidFill>
+              </a:defRPr>
+            </a:pPr>
+            <a:r>
+              <a:rPr lang="en-US" sz="1400" typeface="Outfit" dirty="0">
+                <a:solidFill>
+                  <a:srgbClr val="1A1A1A"/>
+                </a:solidFill>
+              </a:rPr>
+              <a:t xml:space="preserve"> API layer: a thin client-side service (src/lib/api.ts) abstracts Supabase calls and falls back to bundled demo data; this keeps the UI identical whether or not the database is live — critical for demos and offline evaluation.</a:t>
+            </a:r>
+          </a:p>
+          <a:p>
+            <a:pPr marL="342900" indent="-228600">
+              <a:buFont typeface="Arial"/>
+              <a:buChar char="•"/>
+              <a:defRPr lang="en-US" sz="1400" typeface="Outfit" dirty="0">
+                <a:solidFill>
+                  <a:srgbClr val="1A1A1A"/>
+                </a:solidFill>
+              </a:defRPr>
+            </a:pPr>
+            <a:r>
+              <a:rPr lang="en-US" sz="1400" typeface="Outfit" dirty="0">
+                <a:solidFill>
+                  <a:srgbClr val="1A1A1A"/>
+                </a:solidFill>
+              </a:rPr>
+              <a:t xml:space="preserve"> Backend (Supabase): PostgreSQL with row-level security, real-time subscriptions for leaderboard updates, auth (email + password, OTPs, forgotten-password flow), and storage for club/clip images. Service-role key used only for seeding.</a:t>
+            </a:r>
+          </a:p>
+          <a:p>
+            <a:pPr>
+              <a:defRPr lang="en-US" sz="800" dirty="0" typeface="Outfit"/>
+            </a:pPr>
+            <a:r>
+              <a:rPr lang="en-US" sz="800" dirty="0" typeface="Outfit"/>
+              <a:t xml:space="preserve"/>
+            </a:r>
+          </a:p>
+          <a:p>
+            <a:pPr>
+              <a:defRPr lang="en-US" sz="1800" dirty="0" typeface="Outfit" b="1">
+                <a:solidFill>
+                  <a:srgbClr val="2E7D32"/>
+                </a:solidFill>
+              </a:defRPr>
+            </a:pPr>
+            <a:r>
+              <a:rPr lang="en-US" sz="1800" dirty="0" typeface="Outfit" b="1">
+                <a:solidFill>
+                  <a:srgbClr val="2E7D32"/>
+                </a:solidFill>
+              </a:rPr>
+              <a:t xml:space="preserve">Key Implementation Modules</a:t>
+            </a:r>
+          </a:p>
+          <a:p>
+            <a:pPr marL="342900" indent="-228600">
+              <a:buFont typeface="Arial"/>
+              <a:buChar char="•"/>
+              <a:defRPr lang="en-US" sz="1400" typeface="Outfit" dirty="0">
+                <a:solidFill>
+                  <a:srgbClr val="1A1A1A"/>
+                </a:solidFill>
+              </a:defRPr>
+            </a:pPr>
+            <a:r>
+              <a:rPr lang="en-US" sz="1400" typeface="Outfit" dirty="0">
+                <a:solidFill>
+                  <a:srgbClr val="1A1A1A"/>
+                </a:solidFill>
+              </a:rPr>
+              <a:t xml:space="preserve"> Checkpoint scan loop (ScanCheckpoint / CheckpointDetail): user enters a code → code is normalised and matched → points = base_points × difficulty_multiplier → reward panel shows awarded points and total. Epic difficulty gives the highest multiplier.</a:t>
+            </a:r>
+          </a:p>
+          <a:p>
+            <a:pPr marL="342900" indent="-228600">
+              <a:buFont typeface="Arial"/>
+              <a:buChar char="•"/>
+              <a:defRPr lang="en-US" sz="1400" typeface="Outfit" dirty="0">
+                <a:solidFill>
+                  <a:srgbClr val="1A1A1A"/>
+                </a:solidFill>
+              </a:defRPr>
+            </a:pPr>
+            <a:r>
+              <a:rPr lang="en-US" sz="1400" typeface="Outfit" dirty="0">
+                <a:solidFill>
+                  <a:srgbClr val="1A1A1A"/>
+                </a:solidFill>
+              </a:rPr>
+              <a:t xml:space="preserve"> Reward economy: points feed the profile, the leaderboard and badge criteria (e.g. points_2500, streak_7). Streaks and club challenges add secondary incentives.</a:t>
+            </a:r>
+          </a:p>
+          <a:p>
+            <a:pPr marL="342900" indent="-228600">
+              <a:buFont typeface="Arial"/>
+              <a:buChar char="•"/>
+              <a:defRPr lang="en-US" sz="1400" typeface="Outfit" dirty="0">
+                <a:solidFill>
+                  <a:srgbClr val="1A1A1A"/>
+                </a:solidFill>
+              </a:defRPr>
+            </a:pPr>
+            <a:r>
+              <a:rPr lang="en-US" sz="1400" typeface="Outfit" dirty="0">
+                <a:solidFill>
+                  <a:srgbClr val="1A1A1A"/>
+                </a:solidFill>
+              </a:rPr>
+              <a:t xml:space="preserve"> Clubs (ClubDashboard / ClubDetail): each club has a name, colour, member count, description, challenges and a member list drawn from the same demo dataset used everywhere else.</a:t>
+            </a:r>
+          </a:p>
+          <a:p>
+            <a:pPr marL="342900" indent="-228600">
+              <a:buFont typeface="Arial"/>
+              <a:buChar char="•"/>
+              <a:defRPr lang="en-US" sz="1400" typeface="Outfit" dirty="0">
+                <a:solidFill>
+                  <a:srgbClr val="1A1A1A"/>
+                </a:solidFill>
+              </a:defRPr>
+            </a:pPr>
+            <a:r>
+              <a:rPr lang="en-US" sz="1400" typeface="Outfit" dirty="0">
+                <a:solidFill>
+                  <a:srgbClr val="1A1A1A"/>
+                </a:solidFill>
+              </a:rPr>
+              <a:t xml:space="preserve"> FitClips vertical feed (FitClipsFeed / FitClipDetail): social posts with author, caption, likes, comments — same design tokens as the rest of the app.</a:t>
+            </a:r>
+          </a:p>
+          <a:p>
+            <a:pPr marL="342900" indent="-228600">
+              <a:buFont typeface="Arial"/>
+              <a:buChar char="•"/>
+              <a:defRPr lang="en-US" sz="1400" typeface="Outfit" dirty="0">
+                <a:solidFill>
+                  <a:srgbClr val="1A1A1A"/>
+                </a:solidFill>
+              </a:defRPr>
+            </a:pPr>
+            <a:r>
+              <a:rPr lang="en-US" sz="1400" typeface="Outfit" dirty="0">
+                <a:solidFill>
+                  <a:srgbClr val="1A1A1A"/>
+                </a:solidFill>
+              </a:rPr>
+              <a:t xml:space="preserve"> Auth flow: Splash → LogIn / CreateAccount → StudentVerification → OTP → OnboardingInterests → Dashboard. Lost-password and edit-profile round out the account lifecycle.</a:t>
+            </a:r>
+          </a:p>
+          <a:p>
+            <a:pPr marL="342900" indent="-228600">
+              <a:buFont typeface="Arial"/>
+              <a:buChar char="•"/>
+              <a:defRPr lang="en-US" sz="1400" typeface="Outfit" dirty="0">
+                <a:solidFill>
+                  <a:srgbClr val="1A1A1A"/>
+                </a:solidFill>
+              </a:defRPr>
+            </a:pPr>
+            <a:r>
+              <a:rPr lang="en-US" sz="1400" typeface="Outfit" dirty="0">
+                <a:solidFill>
+                  <a:srgbClr val="1A1A1A"/>
+                </a:solidFill>
+              </a:rPr>
+              <a:t xml:space="preserve"> Admin dashboard (AdminDashboard): visible only to the admin role; surfaces checkpoint list, leaderboard, badge definitions and problem reports for moderation.</a:t>
+            </a:r>
+          </a:p>
+        </a:txBody>
       </p:sp>
     </p:spTree>
     <p:extLst>
@@ -8535,13 +12622,7 @@
   <p:cSld>
     <p:spTree>
       <p:nvGrpSpPr>
-        <p:cNvPr id="1" name="">
-          <a:extLst>
-            <a:ext uri="{FF2B5EF4-FFF2-40B4-BE49-F238E27FC236}">
-              <a16:creationId xmlns:a16="http://schemas.microsoft.com/office/drawing/2014/main" id="{407A55DD-65B0-94D0-4068-542E391D704F}"/>
-            </a:ext>
-          </a:extLst>
-        </p:cNvPr>
+        <p:cNvPr id="1" name=""/>
         <p:cNvGrpSpPr/>
         <p:nvPr/>
       </p:nvGrpSpPr>
@@ -8555,45 +12636,539 @@
       </p:grpSpPr>
       <p:sp>
         <p:nvSpPr>
-          <p:cNvPr id="2" name="Title 1">
-            <a:extLst>
-              <a:ext uri="{FF2B5EF4-FFF2-40B4-BE49-F238E27FC236}">
-                <a16:creationId xmlns:a16="http://schemas.microsoft.com/office/drawing/2014/main" id="{3B6DACDF-DBAD-7E74-3555-7FCB227A467D}"/>
-              </a:ext>
-            </a:extLst>
-          </p:cNvPr>
-          <p:cNvSpPr>
-            <a:spLocks noGrp="1"/>
-          </p:cNvSpPr>
-          <p:nvPr>
-            <p:ph type="title"/>
-          </p:nvPr>
-        </p:nvSpPr>
-        <p:spPr/>
-        <p:txBody>
-          <a:bodyPr>
-            <a:normAutofit fontScale="100000" lnScale="100000"/>
-          </a:bodyPr>
-          <a:lstStyle/>
-          <a:p>
-            <a:pPr lvl="0"/>
-            <a:r>
-              <a:rPr lang="en-US" sz="3600" dirty="0" typeface="Times New Roman"/>
+          <p:cNvPr id="3074" name="Title 1"/>
+          <p:cNvSpPr>
+            <a:spLocks noGrp="1"/>
+          </p:cNvSpPr>
+          <p:nvPr>
+            <p:ph type="ctrTitle"/>
+          </p:nvPr>
+        </p:nvSpPr>
+        <p:spPr>
+          <a:xfrm>
+            <a:off x="2209800" y="152399"/>
+            <a:ext cx="7772400" cy="889819"/>
+          </a:xfrm>
+        </p:spPr>
+        <p:txBody>
+          <a:bodyPr vert="horz" wrap="square" lIns="91440" tIns="45720" rIns="91440" bIns="45720" anchor="ctr" anchorCtr="0"/>
+          <a:lstStyle/>
+          <a:p>
+            <a:pPr eaLnBrk="1" hangingPunct="1"/>
+            <a:r>
+              <a:rPr lang="en-US" sz="2000" b="1" dirty="0">
+                <a:solidFill>
+                  <a:schemeClr val="bg1"/>
+                </a:solidFill>
+                <a:latin typeface="Times New Roman" panose="02020603050405020304" pitchFamily="18" charset="0"/>
+                <a:ea typeface="Times New Roman" panose="02020603050405020304" pitchFamily="18" charset="0"/>
+              </a:rPr>
               <a:t>FINAL YEAR PROJECT PRESENTATION &amp; DEMO</a:t>
             </a:r>
-            <a:endParaRPr lang="en-US" dirty="0" typeface="Times New Roman"/>
-          </a:p>
-        </p:txBody>
-      </p:sp>
-      <p:sp>
-        <p:nvSpPr>
-          <p:cNvPr id="4" name="Date Placeholder 3">
-            <a:extLst>
-              <a:ext uri="{FF2B5EF4-FFF2-40B4-BE49-F238E27FC236}">
-                <a16:creationId xmlns:a16="http://schemas.microsoft.com/office/drawing/2014/main" id="{F7F4D605-15E8-8AA8-4637-A42E17F91764}"/>
-              </a:ext>
-            </a:extLst>
-          </p:cNvPr>
+            <a:br>
+              <a:rPr lang="en-GB" sz="2000" b="1" dirty="0">
+                <a:solidFill>
+                  <a:schemeClr val="bg1"/>
+                </a:solidFill>
+                <a:latin typeface="Times New Roman" panose="02020603050405020304" pitchFamily="18" charset="0"/>
+                <a:ea typeface="Times New Roman" panose="02020603050405020304" pitchFamily="18" charset="0"/>
+              </a:rPr>
+            </a:br>
+            <a:endParaRPr lang="en-US" altLang="en-US" sz="2000" b="1" dirty="0">
+              <a:solidFill>
+                <a:schemeClr val="bg1"/>
+              </a:solidFill>
+              <a:latin typeface="Times New Roman" panose="02020603050405020304" pitchFamily="18" charset="0"/>
+              <a:ea typeface="Times New Roman" panose="02020603050405020304" pitchFamily="18" charset="0"/>
+            </a:endParaRPr>
+          </a:p>
+        </p:txBody>
+        <a:txBody>
+          <a:bodyPr/>
+          <a:lstStyle/>
+          <a:p>
+            <a:pPr>
+              <a:defRPr lang="en-US" sz="3600" dirty="0" typeface="Outfit" b="1">
+                <a:solidFill>
+                  <a:srgbClr val="1A1A1A"/>
+                </a:solidFill>
+              </a:defRPr>
+            </a:pPr>
+            <a:r>
+              <a:rPr lang="en-US" sz="3600" dirty="0" typeface="Outfit" b="1">
+                <a:solidFill>
+                  <a:srgbClr val="1A1A1A"/>
+                </a:solidFill>
+              </a:rPr>
+              <a:t xml:space="preserve">Evaluation: Verification, Fidelity, Performance, Reward Economy</a:t>
+            </a:r>
+          </a:p>
+        </a:txBody>
+      </p:sp>
+      <p:sp>
+        <p:nvSpPr>
+          <p:cNvPr id="3075" name="Subtitle 2"/>
+          <p:cNvSpPr>
+            <a:spLocks noGrp="1"/>
+          </p:cNvSpPr>
+          <p:nvPr>
+            <p:ph type="subTitle" idx="1"/>
+          </p:nvPr>
+        </p:nvSpPr>
+        <p:spPr>
+          <a:xfrm>
+            <a:off x="1602658" y="1182329"/>
+            <a:ext cx="8738419" cy="3891116"/>
+          </a:xfrm>
+        </p:spPr>
+        <p:txBody>
+          <a:bodyPr vert="horz" wrap="square" lIns="91440" tIns="45720" rIns="91440" bIns="45720" anchor="t" anchorCtr="0"/>
+          <a:lstStyle/>
+          <a:p>
+            <a:pPr eaLnBrk="1" hangingPunct="1">
+              <a:buClrTx/>
+              <a:buSzTx/>
+            </a:pPr>
+            <a:r>
+              <a:rPr lang="en-US" b="1" dirty="0">
+                <a:solidFill>
+                  <a:schemeClr val="bg1"/>
+                </a:solidFill>
+                <a:latin typeface="Times New Roman" panose="02020603050405020304" pitchFamily="18" charset="0"/>
+                <a:cs typeface="Times New Roman" panose="02020603050405020304" pitchFamily="18" charset="0"/>
+              </a:rPr>
+              <a:t>PROJECT TITLE</a:t>
+            </a:r>
+            <a:endParaRPr lang="en-US" altLang="en-US" sz="2000" b="1" dirty="0">
+              <a:solidFill>
+                <a:schemeClr val="bg1"/>
+              </a:solidFill>
+              <a:latin typeface="Times New Roman" panose="02020603050405020304" pitchFamily="18" charset="0"/>
+              <a:ea typeface="Times New Roman" panose="02020603050405020304" pitchFamily="18" charset="0"/>
+              <a:cs typeface="Times New Roman" panose="02020603050405020304" pitchFamily="18" charset="0"/>
+            </a:endParaRPr>
+          </a:p>
+          <a:p>
+            <a:pPr eaLnBrk="1" hangingPunct="1">
+              <a:buClrTx/>
+              <a:buSzTx/>
+            </a:pPr>
+            <a:endParaRPr lang="en-GB" sz="2000" b="1" noProof="0" dirty="0">
+              <a:solidFill>
+                <a:schemeClr val="bg1"/>
+              </a:solidFill>
+              <a:latin typeface="Times New Roman" panose="02020603050405020304" pitchFamily="18" charset="0"/>
+              <a:ea typeface="Times New Roman" panose="02020603050405020304" pitchFamily="18" charset="0"/>
+            </a:endParaRPr>
+          </a:p>
+          <a:p>
+            <a:pPr eaLnBrk="1" hangingPunct="1"/>
+            <a:r>
+              <a:rPr lang="en-GB" sz="2000" b="1" dirty="0">
+                <a:solidFill>
+                  <a:schemeClr val="bg1"/>
+                </a:solidFill>
+                <a:latin typeface="Times New Roman" panose="02020603050405020304" pitchFamily="18" charset="0"/>
+                <a:ea typeface="Times New Roman" panose="02020603050405020304" pitchFamily="18" charset="0"/>
+              </a:rPr>
+              <a:t>NAME</a:t>
+            </a:r>
+          </a:p>
+          <a:p>
+            <a:pPr eaLnBrk="1" hangingPunct="1"/>
+            <a:r>
+              <a:rPr lang="en-GB" sz="2000" b="1" noProof="0" dirty="0">
+                <a:solidFill>
+                  <a:schemeClr val="bg1"/>
+                </a:solidFill>
+                <a:latin typeface="Times New Roman" panose="02020603050405020304" pitchFamily="18" charset="0"/>
+                <a:ea typeface="Times New Roman" panose="02020603050405020304" pitchFamily="18" charset="0"/>
+              </a:rPr>
+              <a:t>ID</a:t>
+            </a:r>
+          </a:p>
+          <a:p>
+            <a:pPr eaLnBrk="1" hangingPunct="1"/>
+            <a:endParaRPr lang="en-GB" sz="2000" b="1" noProof="0" dirty="0">
+              <a:solidFill>
+                <a:schemeClr val="bg1"/>
+              </a:solidFill>
+              <a:latin typeface="Times New Roman" panose="02020603050405020304" pitchFamily="18" charset="0"/>
+              <a:ea typeface="Times New Roman" panose="02020603050405020304" pitchFamily="18" charset="0"/>
+            </a:endParaRPr>
+          </a:p>
+          <a:p>
+            <a:pPr eaLnBrk="1" hangingPunct="1"/>
+            <a:r>
+              <a:rPr lang="en-GB" sz="1200" b="1" dirty="0">
+                <a:solidFill>
+                  <a:schemeClr val="bg1"/>
+                </a:solidFill>
+                <a:latin typeface="Times New Roman" panose="02020603050405020304" pitchFamily="18" charset="0"/>
+                <a:ea typeface="Times New Roman" panose="02020603050405020304" pitchFamily="18" charset="0"/>
+              </a:rPr>
+              <a:t>SUPERVISOR:             19</a:t>
+            </a:r>
+            <a:r>
+              <a:rPr lang="en-GB" sz="1200" b="1" baseline="30000" dirty="0">
+                <a:solidFill>
+                  <a:schemeClr val="bg1"/>
+                </a:solidFill>
+                <a:latin typeface="Times New Roman" panose="02020603050405020304" pitchFamily="18" charset="0"/>
+                <a:ea typeface="Times New Roman" panose="02020603050405020304" pitchFamily="18" charset="0"/>
+              </a:rPr>
+              <a:t>TH</a:t>
+            </a:r>
+            <a:r>
+              <a:rPr lang="en-GB" sz="1200" b="1" dirty="0">
+                <a:solidFill>
+                  <a:schemeClr val="bg1"/>
+                </a:solidFill>
+                <a:latin typeface="Times New Roman" panose="02020603050405020304" pitchFamily="18" charset="0"/>
+                <a:ea typeface="Times New Roman" panose="02020603050405020304" pitchFamily="18" charset="0"/>
+              </a:rPr>
+              <a:t> SEPTEMBER 2025</a:t>
+            </a:r>
+            <a:endParaRPr lang="en-GB" sz="1200" b="1" noProof="0" dirty="0">
+              <a:solidFill>
+                <a:schemeClr val="bg1"/>
+              </a:solidFill>
+              <a:latin typeface="Times New Roman" panose="02020603050405020304" pitchFamily="18" charset="0"/>
+              <a:ea typeface="Times New Roman" panose="02020603050405020304" pitchFamily="18" charset="0"/>
+            </a:endParaRPr>
+          </a:p>
+        </p:txBody>
+        <a:txBody>
+          <a:bodyPr/>
+          <a:lstStyle/>
+          <a:p>
+            <a:pPr>
+              <a:defRPr lang="en-US" sz="1600" dirty="0" typeface="Outfit" b="1">
+                <a:solidFill>
+                  <a:srgbClr val="2E7D32"/>
+                </a:solidFill>
+              </a:defRPr>
+            </a:pPr>
+            <a:r>
+              <a:rPr lang="en-US" sz="1600" dirty="0" typeface="Outfit" b="1">
+                <a:solidFill>
+                  <a:srgbClr val="2E7D32"/>
+                </a:solidFill>
+              </a:rPr>
+              <a:t xml:space="preserve">Verification (functional correctness)</a:t>
+            </a:r>
+          </a:p>
+          <a:p>
+            <a:pPr marL="342900" indent="-228600">
+              <a:buFont typeface="Arial"/>
+              <a:buChar char="•"/>
+              <a:defRPr lang="en-US" sz="1400" typeface="Outfit" dirty="0">
+                <a:solidFill>
+                  <a:srgbClr val="1A1A1A"/>
+                </a:solidFill>
+              </a:defRPr>
+            </a:pPr>
+            <a:r>
+              <a:rPr lang="en-US" sz="1400" typeface="Outfit" dirty="0">
+                <a:solidFill>
+                  <a:srgbClr val="1A1A1A"/>
+                </a:solidFill>
+              </a:rPr>
+              <a:t xml:space="preserve"> All 29 screens compile and route correctly; TypeScript strict check passes with zero errors (tsc --noEmit).</a:t>
+            </a:r>
+          </a:p>
+          <a:p>
+            <a:pPr marL="342900" indent="-228600">
+              <a:buFont typeface="Arial"/>
+              <a:buChar char="•"/>
+              <a:defRPr lang="en-US" sz="1400" typeface="Outfit" dirty="0">
+                <a:solidFill>
+                  <a:srgbClr val="1A1A1A"/>
+                </a:solidFill>
+              </a:defRPr>
+            </a:pPr>
+            <a:r>
+              <a:rPr lang="en-US" sz="1400" typeface="Outfit" dirty="0">
+                <a:solidFill>
+                  <a:srgbClr val="1A1A1A"/>
+                </a:solidFill>
+              </a:rPr>
+              <a:t xml:space="preserve"> Every button wired to a screen was traced: dashboard → notifications, feed, explore, clubs; scan → checkpoint detail; clubs → club detail + leaderboard; leaderboard → back; admin → club/challenge management UI.</a:t>
+            </a:r>
+          </a:p>
+          <a:p>
+            <a:pPr marL="342900" indent="-228600">
+              <a:buFont typeface="Arial"/>
+              <a:buChar char="•"/>
+              <a:defRPr lang="en-US" sz="1400" typeface="Outfit" dirty="0">
+                <a:solidFill>
+                  <a:srgbClr val="1A1A1A"/>
+                </a:solidFill>
+              </a:defRPr>
+            </a:pPr>
+            <a:r>
+              <a:rPr lang="en-US" sz="1400" typeface="Outfit" dirty="0">
+                <a:solidFill>
+                  <a:srgbClr val="1A1A1A"/>
+                </a:solidFill>
+              </a:rPr>
+              <a:t xml:space="preserve"> Scan result computation verified against the formula points = base_points × DIFFICULTY_MULTIPLIER[difficulty]; demo mode returns the same values a live Supabase RPC would.</a:t>
+            </a:r>
+          </a:p>
+          <a:p>
+            <a:pPr>
+              <a:defRPr lang="en-US" sz="600" dirty="0" typeface="Outfit"/>
+            </a:pPr>
+            <a:r>
+              <a:rPr lang="en-US" sz="600" dirty="0" typeface="Outfit"/>
+              <a:t xml:space="preserve"/>
+            </a:r>
+          </a:p>
+          <a:p>
+            <a:pPr>
+              <a:defRPr lang="en-US" sz="1600" dirty="0" typeface="Outfit" b="1">
+                <a:solidFill>
+                  <a:srgbClr val="2E7D32"/>
+                </a:solidFill>
+              </a:defRPr>
+            </a:pPr>
+            <a:r>
+              <a:rPr lang="en-US" sz="1600" dirty="0" typeface="Outfit" b="1">
+                <a:solidFill>
+                  <a:srgbClr val="2E7D32"/>
+                </a:solidFill>
+              </a:rPr>
+              <a:t xml:space="preserve">Fidelity to design (visual &amp; interaction)</a:t>
+            </a:r>
+          </a:p>
+          <a:p>
+            <a:pPr marL="342900" indent="-228600">
+              <a:buFont typeface="Arial"/>
+              <a:buChar char="•"/>
+              <a:defRPr lang="en-US" sz="1400" typeface="Outfit" dirty="0">
+                <a:solidFill>
+                  <a:srgbClr val="1A1A1A"/>
+                </a:solidFill>
+              </a:defRPr>
+            </a:pPr>
+            <a:r>
+              <a:rPr lang="en-US" sz="1400" typeface="Outfit" dirty="0">
+                <a:solidFill>
+                  <a:srgbClr val="1A1A1A"/>
+                </a:solidFill>
+              </a:rPr>
+              <a:t xml:space="preserve"> Matches the Stitch-ported screens (01–20) and the thesis gamification screens (Scan, Leaderboard, Badges, Admin) under one consistent design system — same tokens, same type scale, same card language.</a:t>
+            </a:r>
+          </a:p>
+          <a:p>
+            <a:pPr marL="342900" indent="-228600">
+              <a:buFont typeface="Arial"/>
+              <a:buChar char="•"/>
+              <a:defRPr lang="en-US" sz="1400" typeface="Outfit" dirty="0">
+                <a:solidFill>
+                  <a:srgbClr val="1A1A1A"/>
+                </a:solidFill>
+              </a:defRPr>
+            </a:pPr>
+            <a:r>
+              <a:rPr lang="en-US" sz="1400" typeface="Outfit" dirty="0">
+                <a:solidFill>
+                  <a:srgbClr val="1A1A1A"/>
+                </a:solidFill>
+              </a:rPr>
+              <a:t xml:space="preserve"> Responsive down to small phones: container padding (px-container-padding), responsive type (headline-lg-mobile), flex/grid layouts that reflow, and bottom nav hidden on fullscreen screens.</a:t>
+            </a:r>
+          </a:p>
+          <a:p>
+            <a:pPr>
+              <a:defRPr lang="en-US" sz="600" dirty="0" typeface="Outfit"/>
+            </a:pPr>
+            <a:r>
+              <a:rPr lang="en-US" sz="600" dirty="0" typeface="Outfit"/>
+              <a:t xml:space="preserve"/>
+            </a:r>
+          </a:p>
+          <a:p>
+            <a:pPr>
+              <a:defRPr lang="en-US" sz="1600" dirty="0" typeface="Outfit" b="1">
+                <a:solidFill>
+                  <a:srgbClr val="2E7D32"/>
+                </a:solidFill>
+              </a:defRPr>
+            </a:pPr>
+            <a:r>
+              <a:rPr lang="en-US" sz="1600" dirty="0" typeface="Outfit" b="1">
+                <a:solidFill>
+                  <a:srgbClr val="2E7D32"/>
+                </a:solidFill>
+              </a:rPr>
+              <a:t xml:space="preserve">Performance</a:t>
+            </a:r>
+          </a:p>
+          <a:p>
+            <a:pPr marL="342900" indent="-228600">
+              <a:buFont typeface="Arial"/>
+              <a:buChar char="•"/>
+              <a:defRPr lang="en-US" sz="1400" typeface="Outfit" dirty="0">
+                <a:solidFill>
+                  <a:srgbClr val="1A1A1A"/>
+                </a:solidFill>
+              </a:defRPr>
+            </a:pPr>
+            <a:r>
+              <a:rPr lang="en-US" sz="1400" typeface="Outfit" dirty="0">
+                <a:solidFill>
+                  <a:srgbClr val="1A1A1A"/>
+                </a:solidFill>
+              </a:rPr>
+              <a:t xml:space="preserve"> Build: Vite + rolldown produces ~490 KB JS (≈144 KB gzipped) and ~58 KB CSS (≈11 KB gzipped) — within mobile budgets for a first-load PWA shell.</a:t>
+            </a:r>
+          </a:p>
+          <a:p>
+            <a:pPr marL="342900" indent="-228600">
+              <a:buFont typeface="Arial"/>
+              <a:buChar char="•"/>
+              <a:defRPr lang="en-US" sz="1400" typeface="Outfit" dirty="0">
+                <a:solidFill>
+                  <a:srgbClr val="1A1A1A"/>
+                </a:solidFill>
+              </a:defRPr>
+            </a:pPr>
+            <a:r>
+              <a:rPr lang="en-US" sz="1400" typeface="Outfit" dirty="0">
+                <a:solidFill>
+                  <a:srgbClr val="1A1A1A"/>
+                </a:solidFill>
+              </a:rPr>
+              <a:t xml:space="preserve"> PWA precaches the shell and key routes; subsequent loads are from the cache, reducing network dependence in low-connectivity campus zones.</a:t>
+            </a:r>
+          </a:p>
+          <a:p>
+            <a:pPr marL="342900" indent="-228600">
+              <a:buFont typeface="Arial"/>
+              <a:buChar char="•"/>
+              <a:defRPr lang="en-US" sz="1400" typeface="Outfit" dirty="0">
+                <a:solidFill>
+                  <a:srgbClr val="1A1A1A"/>
+                </a:solidFill>
+              </a:defRPr>
+            </a:pPr>
+            <a:r>
+              <a:rPr lang="en-US" sz="1400" typeface="Outfit" dirty="0">
+                <a:solidFill>
+                  <a:srgbClr val="1A1A1A"/>
+                </a:solidFill>
+              </a:rPr>
+              <a:t xml:space="preserve"> No per-screen layout thrash: animations are CSS-only (fade-up, scale-90/95 active states), no runtime JS layout recalculation on tap.</a:t>
+            </a:r>
+          </a:p>
+          <a:p>
+            <a:pPr>
+              <a:defRPr lang="en-US" sz="600" dirty="0" typeface="Outfit"/>
+            </a:pPr>
+            <a:r>
+              <a:rPr lang="en-US" sz="600" dirty="0" typeface="Outfit"/>
+              <a:t xml:space="preserve"/>
+            </a:r>
+          </a:p>
+          <a:p>
+            <a:pPr>
+              <a:defRPr lang="en-US" sz="1600" dirty="0" typeface="Outfit" b="1">
+                <a:solidFill>
+                  <a:srgbClr val="2E7D32"/>
+                </a:solidFill>
+              </a:defRPr>
+            </a:pPr>
+            <a:r>
+              <a:rPr lang="en-US" sz="1600" dirty="0" typeface="Outfit" b="1">
+                <a:solidFill>
+                  <a:srgbClr val="2E7D32"/>
+                </a:solidFill>
+              </a:rPr>
+              <a:t xml:space="preserve">Reward Economy</a:t>
+            </a:r>
+          </a:p>
+          <a:p>
+            <a:pPr marL="342900" indent="-228600">
+              <a:buFont typeface="Arial"/>
+              <a:buChar char="•"/>
+              <a:defRPr lang="en-US" sz="1400" typeface="Outfit" dirty="0">
+                <a:solidFill>
+                  <a:srgbClr val="1A1A1A"/>
+                </a:solidFill>
+              </a:defRPr>
+            </a:pPr>
+            <a:r>
+              <a:rPr lang="en-US" sz="1400" typeface="Outfit" dirty="0">
+                <a:solidFill>
+                  <a:srgbClr val="1A1A1A"/>
+                </a:solidFill>
+              </a:rPr>
+              <a:t xml:space="preserve"> Difficulty multipliers: Easy ×1, Medium ×1.5, Hard ×2, Epic ×3 — checkpoint points scale with effort, so the economy rewards harder routes without making easy ones worthless.</a:t>
+            </a:r>
+          </a:p>
+          <a:p>
+            <a:pPr marL="342900" indent="-228600">
+              <a:buFont typeface="Arial"/>
+              <a:buChar char="•"/>
+              <a:defRPr lang="en-US" sz="1400" typeface="Outfit" dirty="0">
+                <a:solidFill>
+                  <a:srgbClr val="1A1A1A"/>
+                </a:solidFill>
+              </a:defRPr>
+            </a:pPr>
+            <a:r>
+              <a:rPr lang="en-US" sz="1400" typeface="Outfit" dirty="0">
+                <a:solidFill>
+                  <a:srgbClr val="1A1A1A"/>
+                </a:solidFill>
+              </a:rPr>
+              <a:t xml:space="preserve"> Badges gate on observable milestones: first scan (first_steps), 5 checkpoints (explorer), 2500 points (points_2500), 7-day streak (streak_7) — tying the economy to sustained behaviour, not one-off bursts.</a:t>
+            </a:r>
+          </a:p>
+          <a:p>
+            <a:pPr marL="342900" indent="-228600">
+              <a:buFont typeface="Arial"/>
+              <a:buChar char="•"/>
+              <a:defRPr lang="en-US" sz="1400" typeface="Outfit" dirty="0">
+                <a:solidFill>
+                  <a:srgbClr val="1A1A1A"/>
+                </a:solidFill>
+              </a:defRPr>
+            </a:pPr>
+            <a:r>
+              <a:rPr lang="en-US" sz="1400" typeface="Outfit" dirty="0">
+                <a:solidFill>
+                  <a:srgbClr val="1A1A1A"/>
+                </a:solidFill>
+              </a:rPr>
+              <a:t xml:space="preserve"> Club challenges add a collective goal dimension: a club at 75% completion with 2 days left is visible on the dashboard, creating shared pressure to close the gap.</a:t>
+            </a:r>
+          </a:p>
+          <a:p>
+            <a:pPr marL="342900" indent="-228600">
+              <a:buFont typeface="Arial"/>
+              <a:buChar char="•"/>
+              <a:defRPr lang="en-US" sz="1400" typeface="Outfit" dirty="0">
+                <a:solidFill>
+                  <a:srgbClr val="1A1A1A"/>
+                </a:solidFill>
+              </a:defRPr>
+            </a:pPr>
+            <a:r>
+              <a:rPr lang="en-US" sz="1400" typeface="Outfit" dirty="0">
+                <a:solidFill>
+                  <a:srgbClr val="1A1A1A"/>
+                </a:solidFill>
+              </a:rPr>
+              <a:t xml:space="preserve"> Demo-data sanity check: three seeded profiles (admin, two students) share the same club/leaderboard/club-challenge numbers everywhere they appear, so the economy story is internally coherent across screens.</a:t>
+            </a:r>
+          </a:p>
+        </a:txBody>
+      </p:sp>
+      <p:sp>
+        <p:nvSpPr>
+          <p:cNvPr id="2" name="Date Placeholder 1"/>
           <p:cNvSpPr>
             <a:spLocks noGrp="1"/>
           </p:cNvSpPr>
@@ -8615,8 +13190,9 @@
               </a:spcAft>
               <a:defRPr/>
             </a:pPr>
-            <a:fld id="{A9287898-D9AE-4049-9D19-ED0B1E1963CA}" type="datetime1">
-              <a:rPr lang="en-US" smtClean="0">
+            <a:fld id="{CBB6B13C-08B2-4F48-BEC8-EC2633766FDF}" type="datetime1">
+              <a:rPr lang="en-US">
+                <a:latin typeface="Calibri" panose="020F0502020204030204" pitchFamily="34" charset="0"/>
                 <a:ea typeface="MS PGothic" panose="020B0600070205080204" pitchFamily="34" charset="-128"/>
               </a:rPr>
               <a:pPr fontAlgn="base">
@@ -8628,9 +13204,10 @@
                 </a:spcAft>
                 <a:defRPr/>
               </a:pPr>
-              <a:t>10/7/2026</a:t>
+              <a:t>9/15/2025</a:t>
             </a:fld>
             <a:endParaRPr lang="en-US">
+              <a:latin typeface="Calibri" panose="020F0502020204030204" pitchFamily="34" charset="0"/>
               <a:ea typeface="MS PGothic" panose="020B0600070205080204" pitchFamily="34" charset="-128"/>
             </a:endParaRPr>
           </a:p>
@@ -8638,13 +13215,7 @@
       </p:sp>
       <p:sp>
         <p:nvSpPr>
-          <p:cNvPr id="5" name="Slide Number Placeholder 4">
-            <a:extLst>
-              <a:ext uri="{FF2B5EF4-FFF2-40B4-BE49-F238E27FC236}">
-                <a16:creationId xmlns:a16="http://schemas.microsoft.com/office/drawing/2014/main" id="{62DCCCD3-EAFC-B988-C6CC-CD1CA8F3CAD2}"/>
-              </a:ext>
-            </a:extLst>
-          </p:cNvPr>
+          <p:cNvPr id="4" name="Slide Number Placeholder 3"/>
           <p:cNvSpPr>
             <a:spLocks noGrp="1"/>
           </p:cNvSpPr>
@@ -8667,7 +13238,8 @@
               <a:defRPr/>
             </a:pPr>
             <a:fld id="{B724CBE9-E6DE-4AAC-8453-7697DD7A6035}" type="slidenum">
-              <a:rPr lang="en-US" altLang="en-US" smtClean="0">
+              <a:rPr lang="en-US" altLang="en-US">
+                <a:latin typeface="Calibri" panose="020F0502020204030204" pitchFamily="34" charset="0"/>
                 <a:ea typeface="MS PGothic" panose="020B0600070205080204" pitchFamily="34" charset="-128"/>
               </a:rPr>
               <a:pPr fontAlgn="base">
@@ -8681,44 +13253,14 @@
               </a:pPr>
               <a:t>8</a:t>
             </a:fld>
-            <a:endParaRPr lang="en-US" altLang="en-US">
+            <a:endParaRPr lang="en-US" altLang="en-US" dirty="0">
+              <a:latin typeface="Calibri" panose="020F0502020204030204" pitchFamily="34" charset="0"/>
               <a:ea typeface="MS PGothic" panose="020B0600070205080204" pitchFamily="34" charset="-128"/>
             </a:endParaRPr>
           </a:p>
         </p:txBody>
       </p:sp>
-      <p:sp>
-        <p:nvSpPr>
-          <p:cNvPr id="8" name="Content Placeholder 7">
-            <a:extLst>
-              <a:ext uri="{FF2B5EF4-FFF2-40B4-BE49-F238E27FC236}">
-                <a16:creationId xmlns:a16="http://schemas.microsoft.com/office/drawing/2014/main" id="{6834DB0F-C428-4601-C46D-5819746ADBD7}"/>
-              </a:ext>
-            </a:extLst>
-          </p:cNvPr>
-          <p:cNvSpPr>
-            <a:spLocks noGrp="1"/>
-          </p:cNvSpPr>
-          <p:nvPr>
-            <p:ph idx="1"/>
-          </p:nvPr>
-        </p:nvSpPr>
-        <p:spPr/>
-        <p:txBody>
-          <a:bodyPr vert="horz" lIns="91440" tIns="45720" rIns="91440" bIns="45720" anchor="t"/>
-          <a:lstStyle/>
-          <a:p>
-            <a:pPr lvl="0"/>
-            <a:endParaRPr lang="en-US" dirty="0"/>
-          </a:p>
-        </p:txBody>
-      </p:sp>
     </p:spTree>
-    <p:extLst>
-      <p:ext uri="{BB962C8B-B14F-4D97-AF65-F5344CB8AC3E}">
-        <p14:creationId xmlns:p14="http://schemas.microsoft.com/office/powerpoint/2010/main" val="1966921906"/>
-      </p:ext>
-    </p:extLst>
   </p:cSld>
   <p:clrMapOvr>
     <a:masterClrMapping/>
@@ -8727,6 +13269,321 @@
 </file>
 
 <file path=ppt/theme/theme1.xml><?xml version="1.0" encoding="utf-8"?>
+<a:theme xmlns:a="http://schemas.openxmlformats.org/drawingml/2006/main" name="Office Theme">
+  <a:themeElements>
+    <a:clrScheme name="Office">
+      <a:dk1>
+        <a:sysClr val="windowText" lastClr="000000"/>
+      </a:dk1>
+      <a:lt1>
+        <a:sysClr val="window" lastClr="FFFFFF"/>
+      </a:lt1>
+      <a:dk2>
+        <a:srgbClr val="0E2841"/>
+      </a:dk2>
+      <a:lt2>
+        <a:srgbClr val="E8E8E8"/>
+      </a:lt2>
+      <a:accent1>
+        <a:srgbClr val="156082"/>
+      </a:accent1>
+      <a:accent2>
+        <a:srgbClr val="E97132"/>
+      </a:accent2>
+      <a:accent3>
+        <a:srgbClr val="196B24"/>
+      </a:accent3>
+      <a:accent4>
+        <a:srgbClr val="0F9ED5"/>
+      </a:accent4>
+      <a:accent5>
+        <a:srgbClr val="A02B93"/>
+      </a:accent5>
+      <a:accent6>
+        <a:srgbClr val="4EA72E"/>
+      </a:accent6>
+      <a:hlink>
+        <a:srgbClr val="467886"/>
+      </a:hlink>
+      <a:folHlink>
+        <a:srgbClr val="96607D"/>
+      </a:folHlink>
+    </a:clrScheme>
+    <a:fontScheme name="Office">
+      <a:majorFont>
+        <a:latin typeface="Aptos Display" panose="02110004020202020204"/>
+        <a:ea typeface=""/>
+        <a:cs typeface=""/>
+        <a:font script="Jpan" typeface="游ゴシック Light"/>
+        <a:font script="Hang" typeface="맑은 고딕"/>
+        <a:font script="Hans" typeface="等线 Light"/>
+        <a:font script="Hant" typeface="新細明體"/>
+        <a:font script="Arab" typeface="Times New Roman"/>
+        <a:font script="Hebr" typeface="Times New Roman"/>
+        <a:font script="Thai" typeface="Angsana New"/>
+        <a:font script="Ethi" typeface="Nyala"/>
+        <a:font script="Beng" typeface="Vrinda"/>
+        <a:font script="Gujr" typeface="Shruti"/>
+        <a:font script="Khmr" typeface="MoolBoran"/>
+        <a:font script="Knda" typeface="Tunga"/>
+        <a:font script="Guru" typeface="Raavi"/>
+        <a:font script="Cans" typeface="Euphemia"/>
+        <a:font script="Cher" typeface="Plantagenet Cherokee"/>
+        <a:font script="Yiii" typeface="Microsoft Yi Baiti"/>
+        <a:font script="Tibt" typeface="Microsoft Himalaya"/>
+        <a:font script="Thaa" typeface="MV Boli"/>
+        <a:font script="Deva" typeface="Mangal"/>
+        <a:font script="Telu" typeface="Gautami"/>
+        <a:font script="Taml" typeface="Latha"/>
+        <a:font script="Syrc" typeface="Estrangelo Edessa"/>
+        <a:font script="Orya" typeface="Kalinga"/>
+        <a:font script="Mlym" typeface="Kartika"/>
+        <a:font script="Laoo" typeface="DokChampa"/>
+        <a:font script="Sinh" typeface="Iskoola Pota"/>
+        <a:font script="Mong" typeface="Mongolian Baiti"/>
+        <a:font script="Viet" typeface="Times New Roman"/>
+        <a:font script="Uigh" typeface="Microsoft Uighur"/>
+        <a:font script="Geor" typeface="Sylfaen"/>
+        <a:font script="Armn" typeface="Arial"/>
+        <a:font script="Bugi" typeface="Leelawadee UI"/>
+        <a:font script="Bopo" typeface="Microsoft JhengHei"/>
+        <a:font script="Java" typeface="Javanese Text"/>
+        <a:font script="Lisu" typeface="Segoe UI"/>
+        <a:font script="Mymr" typeface="Myanmar Text"/>
+        <a:font script="Nkoo" typeface="Ebrima"/>
+        <a:font script="Olck" typeface="Nirmala UI"/>
+        <a:font script="Osma" typeface="Ebrima"/>
+        <a:font script="Phag" typeface="Phagspa"/>
+        <a:font script="Syrn" typeface="Estrangelo Edessa"/>
+        <a:font script="Syrj" typeface="Estrangelo Edessa"/>
+        <a:font script="Syre" typeface="Estrangelo Edessa"/>
+        <a:font script="Sora" typeface="Nirmala UI"/>
+        <a:font script="Tale" typeface="Microsoft Tai Le"/>
+        <a:font script="Talu" typeface="Microsoft New Tai Lue"/>
+        <a:font script="Tfng" typeface="Ebrima"/>
+      </a:majorFont>
+      <a:minorFont>
+        <a:latin typeface="Aptos" panose="02110004020202020204"/>
+        <a:ea typeface=""/>
+        <a:cs typeface=""/>
+        <a:font script="Jpan" typeface="游ゴシック"/>
+        <a:font script="Hang" typeface="맑은 고딕"/>
+        <a:font script="Hans" typeface="等线"/>
+        <a:font script="Hant" typeface="新細明體"/>
+        <a:font script="Arab" typeface="Arial"/>
+        <a:font script="Hebr" typeface="Arial"/>
+        <a:font script="Thai" typeface="Cordia New"/>
+        <a:font script="Ethi" typeface="Nyala"/>
+        <a:font script="Beng" typeface="Vrinda"/>
+        <a:font script="Gujr" typeface="Shruti"/>
+        <a:font script="Khmr" typeface="DaunPenh"/>
+        <a:font script="Knda" typeface="Tunga"/>
+        <a:font script="Guru" typeface="Raavi"/>
+        <a:font script="Cans" typeface="Euphemia"/>
+        <a:font script="Cher" typeface="Plantagenet Cherokee"/>
+        <a:font script="Yiii" typeface="Microsoft Yi Baiti"/>
+        <a:font script="Tibt" typeface="Microsoft Himalaya"/>
+        <a:font script="Thaa" typeface="MV Boli"/>
+        <a:font script="Deva" typeface="Mangal"/>
+        <a:font script="Telu" typeface="Gautami"/>
+        <a:font script="Taml" typeface="Latha"/>
+        <a:font script="Syrc" typeface="Estrangelo Edessa"/>
+        <a:font script="Orya" typeface="Kalinga"/>
+        <a:font script="Mlym" typeface="Kartika"/>
+        <a:font script="Laoo" typeface="DokChampa"/>
+        <a:font script="Sinh" typeface="Iskoola Pota"/>
+        <a:font script="Mong" typeface="Mongolian Baiti"/>
+        <a:font script="Viet" typeface="Arial"/>
+        <a:font script="Uigh" typeface="Microsoft Uighur"/>
+        <a:font script="Geor" typeface="Sylfaen"/>
+        <a:font script="Armn" typeface="Arial"/>
+        <a:font script="Bugi" typeface="Leelawadee UI"/>
+        <a:font script="Bopo" typeface="Microsoft JhengHei"/>
+        <a:font script="Java" typeface="Javanese Text"/>
+        <a:font script="Lisu" typeface="Segoe UI"/>
+        <a:font script="Mymr" typeface="Myanmar Text"/>
+        <a:font script="Nkoo" typeface="Ebrima"/>
+        <a:font script="Olck" typeface="Nirmala UI"/>
+        <a:font script="Osma" typeface="Ebrima"/>
+        <a:font script="Phag" typeface="Phagspa"/>
+        <a:font script="Syrn" typeface="Estrangelo Edessa"/>
+        <a:font script="Syrj" typeface="Estrangelo Edessa"/>
+        <a:font script="Syre" typeface="Estrangelo Edessa"/>
+        <a:font script="Sora" typeface="Nirmala UI"/>
+        <a:font script="Tale" typeface="Microsoft Tai Le"/>
+        <a:font script="Talu" typeface="Microsoft New Tai Lue"/>
+        <a:font script="Tfng" typeface="Ebrima"/>
+      </a:minorFont>
+    </a:fontScheme>
+    <a:fmtScheme name="Office">
+      <a:fillStyleLst>
+        <a:solidFill>
+          <a:schemeClr val="phClr"/>
+        </a:solidFill>
+        <a:gradFill rotWithShape="1">
+          <a:gsLst>
+            <a:gs pos="0">
+              <a:schemeClr val="phClr">
+                <a:lumMod val="110000"/>
+                <a:satMod val="105000"/>
+                <a:tint val="67000"/>
+              </a:schemeClr>
+            </a:gs>
+            <a:gs pos="50000">
+              <a:schemeClr val="phClr">
+                <a:lumMod val="105000"/>
+                <a:satMod val="103000"/>
+                <a:tint val="73000"/>
+              </a:schemeClr>
+            </a:gs>
+            <a:gs pos="100000">
+              <a:schemeClr val="phClr">
+                <a:lumMod val="105000"/>
+                <a:satMod val="109000"/>
+                <a:tint val="81000"/>
+              </a:schemeClr>
+            </a:gs>
+          </a:gsLst>
+          <a:lin ang="5400000" scaled="0"/>
+        </a:gradFill>
+        <a:gradFill rotWithShape="1">
+          <a:gsLst>
+            <a:gs pos="0">
+              <a:schemeClr val="phClr">
+                <a:satMod val="103000"/>
+                <a:lumMod val="102000"/>
+                <a:tint val="94000"/>
+              </a:schemeClr>
+            </a:gs>
+            <a:gs pos="50000">
+              <a:schemeClr val="phClr">
+                <a:satMod val="110000"/>
+                <a:lumMod val="100000"/>
+                <a:shade val="100000"/>
+              </a:schemeClr>
+            </a:gs>
+            <a:gs pos="100000">
+              <a:schemeClr val="phClr">
+                <a:lumMod val="99000"/>
+                <a:satMod val="120000"/>
+                <a:shade val="78000"/>
+              </a:schemeClr>
+            </a:gs>
+          </a:gsLst>
+          <a:lin ang="5400000" scaled="0"/>
+        </a:gradFill>
+      </a:fillStyleLst>
+      <a:lnStyleLst>
+        <a:ln w="12700" cap="flat" cmpd="sng" algn="ctr">
+          <a:solidFill>
+            <a:schemeClr val="phClr"/>
+          </a:solidFill>
+          <a:prstDash val="solid"/>
+          <a:miter lim="800000"/>
+        </a:ln>
+        <a:ln w="19050" cap="flat" cmpd="sng" algn="ctr">
+          <a:solidFill>
+            <a:schemeClr val="phClr"/>
+          </a:solidFill>
+          <a:prstDash val="solid"/>
+          <a:miter lim="800000"/>
+        </a:ln>
+        <a:ln w="25400" cap="flat" cmpd="sng" algn="ctr">
+          <a:solidFill>
+            <a:schemeClr val="phClr"/>
+          </a:solidFill>
+          <a:prstDash val="solid"/>
+          <a:miter lim="800000"/>
+        </a:ln>
+      </a:lnStyleLst>
+      <a:effectStyleLst>
+        <a:effectStyle>
+          <a:effectLst/>
+        </a:effectStyle>
+        <a:effectStyle>
+          <a:effectLst/>
+        </a:effectStyle>
+        <a:effectStyle>
+          <a:effectLst>
+            <a:outerShdw blurRad="57150" dist="19050" dir="5400000" algn="ctr" rotWithShape="0">
+              <a:srgbClr val="000000">
+                <a:alpha val="63000"/>
+              </a:srgbClr>
+            </a:outerShdw>
+          </a:effectLst>
+        </a:effectStyle>
+      </a:effectStyleLst>
+      <a:bgFillStyleLst>
+        <a:solidFill>
+          <a:schemeClr val="phClr"/>
+        </a:solidFill>
+        <a:solidFill>
+          <a:schemeClr val="phClr">
+            <a:tint val="95000"/>
+            <a:satMod val="170000"/>
+          </a:schemeClr>
+        </a:solidFill>
+        <a:gradFill rotWithShape="1">
+          <a:gsLst>
+            <a:gs pos="0">
+              <a:schemeClr val="phClr">
+                <a:tint val="93000"/>
+                <a:satMod val="150000"/>
+                <a:shade val="98000"/>
+                <a:lumMod val="102000"/>
+              </a:schemeClr>
+            </a:gs>
+            <a:gs pos="50000">
+              <a:schemeClr val="phClr">
+                <a:tint val="98000"/>
+                <a:satMod val="130000"/>
+                <a:shade val="90000"/>
+                <a:lumMod val="103000"/>
+              </a:schemeClr>
+            </a:gs>
+            <a:gs pos="100000">
+              <a:schemeClr val="phClr">
+                <a:shade val="63000"/>
+                <a:satMod val="120000"/>
+              </a:schemeClr>
+            </a:gs>
+          </a:gsLst>
+          <a:lin ang="5400000" scaled="0"/>
+        </a:gradFill>
+      </a:bgFillStyleLst>
+    </a:fmtScheme>
+  </a:themeElements>
+  <a:objectDefaults>
+    <a:lnDef>
+      <a:spPr/>
+      <a:bodyPr/>
+      <a:lstStyle/>
+      <a:style>
+        <a:lnRef idx="2">
+          <a:schemeClr val="accent1"/>
+        </a:lnRef>
+        <a:fillRef idx="0">
+          <a:schemeClr val="accent1"/>
+        </a:fillRef>
+        <a:effectRef idx="1">
+          <a:schemeClr val="accent1"/>
+        </a:effectRef>
+        <a:fontRef idx="minor">
+          <a:schemeClr val="tx1"/>
+        </a:fontRef>
+      </a:style>
+    </a:lnDef>
+  </a:objectDefaults>
+  <a:extraClrSchemeLst/>
+  <a:extLst>
+    <a:ext uri="{05A4C25C-085E-4340-85A3-A5531E510DB2}">
+      <thm15:themeFamily xmlns:thm15="http://schemas.microsoft.com/office/thememl/2012/main" name="Office Theme" id="{2E142A2C-CD16-42D6-873A-C26D2A0506FA}" vid="{1BDDFF52-6CD6-40A5-AB3C-68EB2F1E4D0A}"/>
+    </a:ext>
+  </a:extLst>
+</a:theme>
+</file>
+
+<file path=ppt/theme/theme2.xml><?xml version="1.0" encoding="utf-8"?>
 <a:theme xmlns:a="http://schemas.openxmlformats.org/drawingml/2006/main" name="1_Office Theme">
   <a:themeElements>
     <a:clrScheme name="Office">
@@ -9016,7 +13873,7 @@
 </a:theme>
 </file>
 
-<file path=ppt/theme/theme2.xml><?xml version="1.0" encoding="utf-8"?>
+<file path=ppt/theme/theme3.xml><?xml version="1.0" encoding="utf-8"?>
 <a:theme xmlns:a="http://schemas.openxmlformats.org/drawingml/2006/main" name="Office Theme">
   <a:themeElements>
     <a:clrScheme name="Office">

--- a/CampusFit_Project_Defence.pptx
+++ b/CampusFit_Project_Defence.pptx
@@ -6,7 +6,7 @@
     <p:sldMasterId id="2147483660" r:id="rId2"/>
   </p:sldMasterIdLst>
   <p:notesMasterIdLst>
-    <p:notesMasterId r:id="rId11"/>
+    <p:notesMasterId r:id="rId13"/>
   </p:notesMasterIdLst>
   <p:sldIdLst>
     <p:sldId id="258" r:id="rId3"/>
@@ -16,7 +16,9 @@
     <p:sldId id="262" r:id="rId7"/>
     <p:sldId id="263" r:id="rId8"/>
     <p:sldId id="264" r:id="rId9"/>
-    <p:sldId id="257" r:id="rId10"/>
+    <p:sldId id="265" r:id="rId10"/>
+    <p:sldId id="266" r:id="rId11"/>
+    <p:sldId id="257" r:id="rId12"/>
   </p:sldIdLst>
   <p:sldSz cx="12192000" cy="6858000"/>
   <p:notesSz cx="6858000" cy="9144000"/>
@@ -115,6 +117,11 @@
       </a:defRPr>
     </a:lvl9pPr>
   </p:defaultTextStyle>
+  <p:extLst>
+    <p:ext uri="{EFAFB233-063F-42B5-8137-9DF3F51BA10A}">
+      <p15:sldGuideLst xmlns:p15="http://schemas.microsoft.com/office/powerpoint/2012/main"/>
+    </p:ext>
+  </p:extLst>
 </p:presentation>
 </file>
 
@@ -200,7 +207,7 @@
           <a:p>
             <a:fld id="{D77CA5DE-5554-433E-998B-5706BBA3DDB9}" type="datetimeFigureOut">
               <a:rPr lang="en-US" smtClean="0"/>
-              <a:t>9/15/2025</a:t>
+              <a:t>10/7/2026</a:t>
             </a:fld>
             <a:endParaRPr lang="en-US"/>
           </a:p>
@@ -511,7 +518,9 @@
           <a:bodyPr/>
           <a:lstStyle/>
           <a:p>
-            <a:endParaRPr lang="en-US"/>
+            <a:r>
+              <a:t>Opening. Greet the panel, state the project title and your details. One-line hook: CampusFit turns the campus itself into a fitness instrument. Preview the talk: problem, solution, objectives, system diagram, flow, challenges, conclusion - then the live demo.</a:t>
+            </a:r>
           </a:p>
         </p:txBody>
       </p:sp>
@@ -533,6 +542,92 @@
             <a:fld id="{F966F616-72DA-4E4B-BAA1-BBB42A78663A}" type="slidenum">
               <a:rPr lang="en-US" smtClean="0"/>
               <a:t>1</a:t>
+            </a:fld>
+            <a:endParaRPr lang="en-US"/>
+          </a:p>
+        </p:txBody>
+      </p:sp>
+    </p:spTree>
+    <p:extLst>
+      <p:ext uri="{BB962C8B-B14F-4D97-AF65-F5344CB8AC3E}">
+        <p14:creationId xmlns:p14="http://schemas.microsoft.com/office/powerpoint/2010/main" val="1249002980"/>
+      </p:ext>
+    </p:extLst>
+  </p:cSld>
+  <p:clrMapOvr>
+    <a:masterClrMapping/>
+  </p:clrMapOvr>
+</p:notes>
+</file>
+
+<file path=ppt/notesSlides/notesSlide10.xml><?xml version="1.0" encoding="utf-8"?>
+<p:notes xmlns:a="http://schemas.openxmlformats.org/drawingml/2006/main" xmlns:r="http://schemas.openxmlformats.org/officeDocument/2006/relationships" xmlns:p="http://schemas.openxmlformats.org/presentationml/2006/main">
+  <p:cSld>
+    <p:spTree>
+      <p:nvGrpSpPr>
+        <p:cNvPr id="1" name=""/>
+        <p:cNvGrpSpPr/>
+        <p:nvPr/>
+      </p:nvGrpSpPr>
+      <p:grpSpPr>
+        <a:xfrm>
+          <a:off x="0" y="0"/>
+          <a:ext cx="0" cy="0"/>
+          <a:chOff x="0" y="0"/>
+          <a:chExt cx="0" cy="0"/>
+        </a:xfrm>
+      </p:grpSpPr>
+      <p:sp>
+        <p:nvSpPr>
+          <p:cNvPr id="2" name="Slide Image Placeholder 1"/>
+          <p:cNvSpPr>
+            <a:spLocks noGrp="1" noRot="1" noChangeAspect="1"/>
+          </p:cNvSpPr>
+          <p:nvPr>
+            <p:ph type="sldImg"/>
+          </p:nvPr>
+        </p:nvSpPr>
+        <p:spPr/>
+      </p:sp>
+      <p:sp>
+        <p:nvSpPr>
+          <p:cNvPr id="3" name="Notes Placeholder 2"/>
+          <p:cNvSpPr>
+            <a:spLocks noGrp="1"/>
+          </p:cNvSpPr>
+          <p:nvPr>
+            <p:ph type="body" idx="1"/>
+          </p:nvPr>
+        </p:nvSpPr>
+        <p:spPr/>
+        <p:txBody>
+          <a:bodyPr/>
+          <a:lstStyle/>
+          <a:p>
+            <a:r>
+              <a:t>Demo page. Play the recorded walkthrough: sign-up and OTP, dashboard, scan of LIB-A1, points/streak/badges updating, weekly leaderboard, FitTrips and FitClips, admin dashboard. If playback fails, switch to the live app on Vercel - demo mode works without credentials.</a:t>
+            </a:r>
+          </a:p>
+        </p:txBody>
+      </p:sp>
+      <p:sp>
+        <p:nvSpPr>
+          <p:cNvPr id="4" name="Slide Number Placeholder 3"/>
+          <p:cNvSpPr>
+            <a:spLocks noGrp="1"/>
+          </p:cNvSpPr>
+          <p:nvPr>
+            <p:ph type="sldNum" sz="quarter" idx="5"/>
+          </p:nvPr>
+        </p:nvSpPr>
+        <p:spPr/>
+        <p:txBody>
+          <a:bodyPr/>
+          <a:lstStyle/>
+          <a:p>
+            <a:fld id="{F966F616-72DA-4E4B-BAA1-BBB42A78663A}" type="slidenum">
+              <a:rPr lang="en-US" smtClean="0"/>
+              <a:t>10</a:t>
             </a:fld>
             <a:endParaRPr lang="en-US"/>
           </a:p>
@@ -575,7 +670,7 @@
             <a:spLocks noGrp="1" noRot="1" noChangeAspect="1"/>
           </p:cNvSpPr>
           <p:nvPr>
-            <p:ph type="sldImg"/>
+            <p:ph type="sldImg" idx="2"/>
           </p:nvPr>
         </p:nvSpPr>
         <p:spPr/>
@@ -587,7 +682,7 @@
             <a:spLocks noGrp="1"/>
           </p:cNvSpPr>
           <p:nvPr>
-            <p:ph type="body" idx="1"/>
+            <p:ph type="body" sz="quarter" idx="3"/>
           </p:nvPr>
         </p:nvSpPr>
         <p:spPr/>
@@ -596,195 +691,8 @@
           <a:lstStyle/>
           <a:p>
             <a:r>
-              <a:rPr lang="en-GB" sz="1200" b="1" kern="1200" dirty="0">
-                <a:solidFill>
-                  <a:schemeClr val="tx1"/>
-                </a:solidFill>
-                <a:effectLst/>
-                <a:latin typeface="+mn-lt"/>
-                <a:ea typeface="+mn-ea"/>
-                <a:cs typeface="+mn-cs"/>
-              </a:rPr>
-              <a:t>Introduction</a:t>
-            </a:r>
-            <a:endParaRPr lang="en-US" sz="1200" kern="1200" dirty="0">
-              <a:solidFill>
-                <a:schemeClr val="tx1"/>
-              </a:solidFill>
-              <a:effectLst/>
-              <a:latin typeface="+mn-lt"/>
-              <a:ea typeface="+mn-ea"/>
-              <a:cs typeface="+mn-cs"/>
-            </a:endParaRPr>
-          </a:p>
-          <a:p>
-            <a:r>
-              <a:rPr lang="en-US" sz="1200" kern="1200" dirty="0">
-                <a:solidFill>
-                  <a:schemeClr val="tx1"/>
-                </a:solidFill>
-                <a:effectLst/>
-                <a:latin typeface="+mn-lt"/>
-                <a:ea typeface="+mn-ea"/>
-                <a:cs typeface="+mn-cs"/>
-              </a:rPr>
-              <a:t>In the late 1990s, different theories in the mobility literature emerged  (Castles &amp; Miller, 1998) to explain the growing trend of international mobility as well as the reasons and processes that drive human mobility (de Haas, 2010; Sheller &amp; Urry, 2016). </a:t>
-            </a:r>
-          </a:p>
-          <a:p>
-            <a:r>
-              <a:rPr lang="en-US" sz="1200" kern="1200" dirty="0">
-                <a:solidFill>
-                  <a:schemeClr val="tx1"/>
-                </a:solidFill>
-                <a:effectLst/>
-                <a:latin typeface="+mn-lt"/>
-                <a:ea typeface="+mn-ea"/>
-                <a:cs typeface="+mn-cs"/>
-              </a:rPr>
-              <a:t>In recent years, however, studies of immobile populations have garnered academic attention, considering the fact that approximately 281 million international migrants, 3.6% of the world’s population, is on the move globally (IOM, 2024). This means about 96.4% of the world’s population is immobile.</a:t>
-            </a:r>
-          </a:p>
-          <a:p>
-            <a:r>
-              <a:rPr lang="en-US" sz="1200" kern="1200" dirty="0">
-                <a:solidFill>
-                  <a:schemeClr val="tx1"/>
-                </a:solidFill>
-                <a:effectLst/>
-                <a:latin typeface="+mn-lt"/>
-                <a:ea typeface="+mn-ea"/>
-                <a:cs typeface="+mn-cs"/>
-              </a:rPr>
-              <a:t> Drawing on the current figures of immobile population, </a:t>
-            </a:r>
-            <a:r>
-              <a:rPr lang="en-US" sz="1200" kern="1200" dirty="0" err="1">
-                <a:solidFill>
-                  <a:schemeClr val="tx1"/>
-                </a:solidFill>
-                <a:effectLst/>
-                <a:latin typeface="+mn-lt"/>
-                <a:ea typeface="+mn-ea"/>
-                <a:cs typeface="+mn-cs"/>
-              </a:rPr>
-              <a:t>Schewel</a:t>
-            </a:r>
-            <a:r>
-              <a:rPr lang="en-US" sz="1200" kern="1200" dirty="0">
-                <a:solidFill>
-                  <a:schemeClr val="tx1"/>
-                </a:solidFill>
-                <a:effectLst/>
-                <a:latin typeface="+mn-lt"/>
-                <a:ea typeface="+mn-ea"/>
-                <a:cs typeface="+mn-cs"/>
-              </a:rPr>
-              <a:t> (2019) argues that there is a ‘mobility </a:t>
-            </a:r>
-            <a:r>
-              <a:rPr lang="en-US" sz="1200" kern="1200" dirty="0" err="1">
-                <a:solidFill>
-                  <a:schemeClr val="tx1"/>
-                </a:solidFill>
-                <a:effectLst/>
-                <a:latin typeface="+mn-lt"/>
-                <a:ea typeface="+mn-ea"/>
-                <a:cs typeface="+mn-cs"/>
-              </a:rPr>
-              <a:t>bias’</a:t>
-            </a:r>
-            <a:r>
-              <a:rPr lang="en-US" sz="1200" kern="1200" dirty="0">
-                <a:solidFill>
-                  <a:schemeClr val="tx1"/>
-                </a:solidFill>
-                <a:effectLst/>
-                <a:latin typeface="+mn-lt"/>
-                <a:ea typeface="+mn-ea"/>
-                <a:cs typeface="+mn-cs"/>
-              </a:rPr>
-              <a:t> which is an overemphasis on theoretical and empirical research on the causes and consequences of mobility and migration. </a:t>
-            </a:r>
-          </a:p>
-          <a:p>
-            <a:r>
-              <a:rPr lang="en-US" sz="1200" kern="1200" dirty="0">
-                <a:solidFill>
-                  <a:schemeClr val="tx1"/>
-                </a:solidFill>
-                <a:effectLst/>
-                <a:latin typeface="+mn-lt"/>
-                <a:ea typeface="+mn-ea"/>
-                <a:cs typeface="+mn-cs"/>
-              </a:rPr>
-              <a:t>Given the recognition that the majority of the global population remains immobile, a number of scholars such as Carling (2002), Carling and </a:t>
-            </a:r>
-            <a:r>
-              <a:rPr lang="en-US" sz="1200" kern="1200" dirty="0" err="1">
-                <a:solidFill>
-                  <a:schemeClr val="tx1"/>
-                </a:solidFill>
-                <a:effectLst/>
-                <a:latin typeface="+mn-lt"/>
-                <a:ea typeface="+mn-ea"/>
-                <a:cs typeface="+mn-cs"/>
-              </a:rPr>
-              <a:t>Schewel</a:t>
-            </a:r>
-            <a:r>
-              <a:rPr lang="en-US" sz="1200" kern="1200" dirty="0">
-                <a:solidFill>
-                  <a:schemeClr val="tx1"/>
-                </a:solidFill>
-                <a:effectLst/>
-                <a:latin typeface="+mn-lt"/>
-                <a:ea typeface="+mn-ea"/>
-                <a:cs typeface="+mn-cs"/>
-              </a:rPr>
-              <a:t> (2018), </a:t>
-            </a:r>
-            <a:r>
-              <a:rPr lang="en-US" sz="1200" kern="1200" dirty="0" err="1">
-                <a:solidFill>
-                  <a:schemeClr val="tx1"/>
-                </a:solidFill>
-                <a:effectLst/>
-                <a:latin typeface="+mn-lt"/>
-                <a:ea typeface="+mn-ea"/>
-                <a:cs typeface="+mn-cs"/>
-              </a:rPr>
-              <a:t>Schewel</a:t>
-            </a:r>
-            <a:r>
-              <a:rPr lang="en-US" sz="1200" kern="1200" dirty="0">
-                <a:solidFill>
-                  <a:schemeClr val="tx1"/>
-                </a:solidFill>
-                <a:effectLst/>
-                <a:latin typeface="+mn-lt"/>
-                <a:ea typeface="+mn-ea"/>
-                <a:cs typeface="+mn-cs"/>
-              </a:rPr>
-              <a:t> (2019), Salazar (2021), and Stock (2019) have turned their attention to this group of people seeking to better understand the phenomenon and its consequences. </a:t>
-            </a:r>
-          </a:p>
-          <a:p>
-            <a:r>
-              <a:rPr lang="en-US" sz="1200" kern="1200" dirty="0">
-                <a:solidFill>
-                  <a:schemeClr val="tx1"/>
-                </a:solidFill>
-                <a:effectLst/>
-                <a:latin typeface="+mn-lt"/>
-                <a:ea typeface="+mn-ea"/>
-                <a:cs typeface="+mn-cs"/>
-              </a:rPr>
-              <a:t> </a:t>
-            </a:r>
-          </a:p>
-          <a:p>
-            <a:endParaRPr lang="en-US" dirty="0"/>
+              <a:t>Set the context. Students are among the least active populations and inactivity hits concentration, mental health and resilience. Two institutional responses exist - push-based campus campaigns and commercial step-counting apps - and neither fits campus life. Gamification works but is design-dependent. Close with the CampusFit thesis: make the campus the delivery mechanism.</a:t>
+            </a:r>
           </a:p>
         </p:txBody>
       </p:sp>
@@ -799,24 +707,8 @@
           </p:nvPr>
         </p:nvSpPr>
         <p:spPr/>
-        <p:txBody>
-          <a:bodyPr/>
-          <a:lstStyle/>
-          <a:p>
-            <a:fld id="{F966F616-72DA-4E4B-BAA1-BBB42A78663A}" type="slidenum">
-              <a:rPr lang="en-US" smtClean="0"/>
-              <a:t>3</a:t>
-            </a:fld>
-            <a:endParaRPr lang="en-US"/>
-          </a:p>
-        </p:txBody>
       </p:sp>
     </p:spTree>
-    <p:extLst>
-      <p:ext uri="{BB962C8B-B14F-4D97-AF65-F5344CB8AC3E}">
-        <p14:creationId xmlns:p14="http://schemas.microsoft.com/office/powerpoint/2010/main" val="4075142603"/>
-      </p:ext>
-    </p:extLst>
   </p:cSld>
   <p:clrMapOvr>
     <a:masterClrMapping/>
@@ -869,191 +761,8 @@
           <a:lstStyle/>
           <a:p>
             <a:r>
-              <a:rPr lang="en-US" sz="1200" b="1" kern="1200" dirty="0">
-                <a:solidFill>
-                  <a:schemeClr val="tx1"/>
-                </a:solidFill>
-                <a:effectLst/>
-                <a:latin typeface="+mn-lt"/>
-                <a:ea typeface="+mn-ea"/>
-                <a:cs typeface="+mn-cs"/>
-              </a:rPr>
-              <a:t>Problem Statement</a:t>
-            </a:r>
-            <a:endParaRPr lang="en-US" sz="1200" kern="1200" dirty="0">
-              <a:solidFill>
-                <a:schemeClr val="tx1"/>
-              </a:solidFill>
-              <a:effectLst/>
-              <a:latin typeface="+mn-lt"/>
-              <a:ea typeface="+mn-ea"/>
-              <a:cs typeface="+mn-cs"/>
-            </a:endParaRPr>
-          </a:p>
-          <a:p>
-            <a:r>
-              <a:rPr lang="en-US" sz="1200" kern="1200" dirty="0">
-                <a:solidFill>
-                  <a:schemeClr val="tx1"/>
-                </a:solidFill>
-                <a:effectLst/>
-                <a:latin typeface="+mn-lt"/>
-                <a:ea typeface="+mn-ea"/>
-                <a:cs typeface="+mn-cs"/>
-              </a:rPr>
-              <a:t>1.  Carling (2002) puts immobility into three distinct categories: voluntary mobility, involuntary immobility and voluntary immobility.  </a:t>
-            </a:r>
-            <a:r>
-              <a:rPr lang="en-US" sz="1200" kern="1200" dirty="0" err="1">
-                <a:solidFill>
-                  <a:schemeClr val="tx1"/>
-                </a:solidFill>
-                <a:effectLst/>
-                <a:latin typeface="+mn-lt"/>
-                <a:ea typeface="+mn-ea"/>
-                <a:cs typeface="+mn-cs"/>
-              </a:rPr>
-              <a:t>Schewel</a:t>
-            </a:r>
-            <a:r>
-              <a:rPr lang="en-US" sz="1200" kern="1200" dirty="0">
-                <a:solidFill>
-                  <a:schemeClr val="tx1"/>
-                </a:solidFill>
-                <a:effectLst/>
-                <a:latin typeface="+mn-lt"/>
-                <a:ea typeface="+mn-ea"/>
-                <a:cs typeface="+mn-cs"/>
-              </a:rPr>
-              <a:t> (2015) further advanced Carling’s three categories of immobility by introducing acquiescent immobility. Even though Carling (2002) and </a:t>
-            </a:r>
-            <a:r>
-              <a:rPr lang="en-US" sz="1200" kern="1200" dirty="0" err="1">
-                <a:solidFill>
-                  <a:schemeClr val="tx1"/>
-                </a:solidFill>
-                <a:effectLst/>
-                <a:latin typeface="+mn-lt"/>
-                <a:ea typeface="+mn-ea"/>
-                <a:cs typeface="+mn-cs"/>
-              </a:rPr>
-              <a:t>Schewel</a:t>
-            </a:r>
-            <a:r>
-              <a:rPr lang="en-US" sz="1200" kern="1200" dirty="0">
-                <a:solidFill>
-                  <a:schemeClr val="tx1"/>
-                </a:solidFill>
-                <a:effectLst/>
-                <a:latin typeface="+mn-lt"/>
-                <a:ea typeface="+mn-ea"/>
-                <a:cs typeface="+mn-cs"/>
-              </a:rPr>
-              <a:t> (2015) identified the categories of immobility, they did not </a:t>
-            </a:r>
-            <a:r>
-              <a:rPr lang="en-US" sz="1200" kern="1200" dirty="0" err="1">
-                <a:solidFill>
-                  <a:schemeClr val="tx1"/>
-                </a:solidFill>
-                <a:effectLst/>
-                <a:latin typeface="+mn-lt"/>
-                <a:ea typeface="+mn-ea"/>
-                <a:cs typeface="+mn-cs"/>
-              </a:rPr>
-              <a:t>conceptualise</a:t>
-            </a:r>
-            <a:r>
-              <a:rPr lang="en-US" sz="1200" kern="1200" dirty="0">
-                <a:solidFill>
-                  <a:schemeClr val="tx1"/>
-                </a:solidFill>
-                <a:effectLst/>
-                <a:latin typeface="+mn-lt"/>
-                <a:ea typeface="+mn-ea"/>
-                <a:cs typeface="+mn-cs"/>
-              </a:rPr>
-              <a:t> the possibility of transitioning through them.</a:t>
-            </a:r>
-          </a:p>
-          <a:p>
-            <a:r>
-              <a:rPr lang="en-US" sz="1200" kern="1200" dirty="0">
-                <a:solidFill>
-                  <a:schemeClr val="tx1"/>
-                </a:solidFill>
-                <a:effectLst/>
-                <a:latin typeface="+mn-lt"/>
-                <a:ea typeface="+mn-ea"/>
-                <a:cs typeface="+mn-cs"/>
-              </a:rPr>
-              <a:t>2.  A second extension of the literature on immobility focused on transitions. For instance, the works of Roderiguez-Pena (2023), </a:t>
-            </a:r>
-            <a:r>
-              <a:rPr lang="en-US" sz="1200" kern="1200" dirty="0" err="1">
-                <a:solidFill>
-                  <a:schemeClr val="tx1"/>
-                </a:solidFill>
-                <a:effectLst/>
-                <a:latin typeface="+mn-lt"/>
-                <a:ea typeface="+mn-ea"/>
-                <a:cs typeface="+mn-cs"/>
-              </a:rPr>
-              <a:t>Setrana</a:t>
-            </a:r>
-            <a:r>
-              <a:rPr lang="en-US" sz="1200" kern="1200" dirty="0">
-                <a:solidFill>
-                  <a:schemeClr val="tx1"/>
-                </a:solidFill>
-                <a:effectLst/>
-                <a:latin typeface="+mn-lt"/>
-                <a:ea typeface="+mn-ea"/>
-                <a:cs typeface="+mn-cs"/>
-              </a:rPr>
-              <a:t> (2021) demonstrate that it is possible to transition through the four immobility categories identified by Carling and </a:t>
-            </a:r>
-            <a:r>
-              <a:rPr lang="en-US" sz="1200" kern="1200" dirty="0" err="1">
-                <a:solidFill>
-                  <a:schemeClr val="tx1"/>
-                </a:solidFill>
-                <a:effectLst/>
-                <a:latin typeface="+mn-lt"/>
-                <a:ea typeface="+mn-ea"/>
-                <a:cs typeface="+mn-cs"/>
-              </a:rPr>
-              <a:t>Schewel</a:t>
-            </a:r>
-            <a:r>
-              <a:rPr lang="en-US" sz="1200" kern="1200" dirty="0">
-                <a:solidFill>
-                  <a:schemeClr val="tx1"/>
-                </a:solidFill>
-                <a:effectLst/>
-                <a:latin typeface="+mn-lt"/>
-                <a:ea typeface="+mn-ea"/>
-                <a:cs typeface="+mn-cs"/>
-              </a:rPr>
-              <a:t>, but focused only on involuntary immobility and voluntary immobility. </a:t>
-            </a:r>
-          </a:p>
-          <a:p>
-            <a:r>
-              <a:rPr lang="en-US" sz="1200" kern="1200" dirty="0">
-                <a:solidFill>
-                  <a:schemeClr val="tx1"/>
-                </a:solidFill>
-                <a:effectLst/>
-                <a:latin typeface="+mn-lt"/>
-                <a:ea typeface="+mn-ea"/>
-                <a:cs typeface="+mn-cs"/>
-              </a:rPr>
-              <a:t>3.  Salazar (2021) is also of the view that immobility should be seen as both an analytical concept and lived experience. </a:t>
-            </a:r>
-          </a:p>
-          <a:p>
-            <a:endParaRPr lang="en-US" dirty="0"/>
+              <a:t>Walk the four failure modes quickly: campaigns decay, apps ignore context, personal barriers persist, and the structural mismatch - institutions lack a delivery mechanism, apps lack the institution. Name the research gap, then read the core problem statement verbatim; it is the sentence every later slide answers.</a:t>
+            </a:r>
           </a:p>
         </p:txBody>
       </p:sp>
@@ -1074,7 +783,7 @@
           <a:p>
             <a:fld id="{F966F616-72DA-4E4B-BAA1-BBB42A78663A}" type="slidenum">
               <a:rPr lang="en-US" smtClean="0"/>
-              <a:t>4</a:t>
+              <a:t>3</a:t>
             </a:fld>
             <a:endParaRPr lang="en-US"/>
           </a:p>
@@ -1083,7 +792,7 @@
     </p:spTree>
     <p:extLst>
       <p:ext uri="{BB962C8B-B14F-4D97-AF65-F5344CB8AC3E}">
-        <p14:creationId xmlns:p14="http://schemas.microsoft.com/office/powerpoint/2010/main" val="204439009"/>
+        <p14:creationId xmlns:p14="http://schemas.microsoft.com/office/powerpoint/2010/main" val="4075142603"/>
       </p:ext>
     </p:extLst>
   </p:cSld>
@@ -1138,58 +847,8 @@
           <a:lstStyle/>
           <a:p>
             <a:r>
-              <a:rPr lang="en-US" sz="1200" kern="1200" dirty="0">
-                <a:solidFill>
-                  <a:schemeClr val="tx1"/>
-                </a:solidFill>
-                <a:effectLst/>
-                <a:latin typeface="+mn-lt"/>
-                <a:ea typeface="+mn-ea"/>
-                <a:cs typeface="+mn-cs"/>
-              </a:rPr>
-              <a:t>While there is the recognition that transitioning between mobility and immobility is possible, transitioning between the various categories of immobility has not been explored.</a:t>
-            </a:r>
-          </a:p>
-          <a:p>
-            <a:r>
-              <a:rPr lang="en-US" sz="1200" kern="1200" dirty="0">
-                <a:solidFill>
-                  <a:schemeClr val="tx1"/>
-                </a:solidFill>
-                <a:effectLst/>
-                <a:latin typeface="+mn-lt"/>
-                <a:ea typeface="+mn-ea"/>
-                <a:cs typeface="+mn-cs"/>
-              </a:rPr>
-              <a:t>This thesis intends to take the concept of transitioning further in two ways.  First, it explores transitioning between voluntary mobility and involuntary immobility. Second, it seeks to examine the process of transitioning through the various categories of immobility identified by Carling (2002) and </a:t>
-            </a:r>
-            <a:r>
-              <a:rPr lang="en-US" sz="1200" kern="1200" dirty="0" err="1">
-                <a:solidFill>
-                  <a:schemeClr val="tx1"/>
-                </a:solidFill>
-                <a:effectLst/>
-                <a:latin typeface="+mn-lt"/>
-                <a:ea typeface="+mn-ea"/>
-                <a:cs typeface="+mn-cs"/>
-              </a:rPr>
-              <a:t>Schewel</a:t>
-            </a:r>
-            <a:r>
-              <a:rPr lang="en-US" sz="1200" kern="1200" dirty="0">
-                <a:solidFill>
-                  <a:schemeClr val="tx1"/>
-                </a:solidFill>
-                <a:effectLst/>
-                <a:latin typeface="+mn-lt"/>
-                <a:ea typeface="+mn-ea"/>
-                <a:cs typeface="+mn-cs"/>
-              </a:rPr>
-              <a:t> (2015). </a:t>
-            </a:r>
-          </a:p>
-          <a:p>
-            <a:endParaRPr lang="en-US" dirty="0"/>
+              <a:t>Solution in one breath: an installable PWA plus printed QR signs plus a Supabase backend. Stress the key design decision - the client never holds reward authority. scan_checkpoint() validates, applies the 8-hour cooldown and difficulty multiplier, writes the append-only ledger and recomputes rollups in ONE transaction. Multipliers are non-linear on purpose (epic is worth more than double easy).</a:t>
+            </a:r>
           </a:p>
         </p:txBody>
       </p:sp>
@@ -1210,7 +869,7 @@
           <a:p>
             <a:fld id="{F966F616-72DA-4E4B-BAA1-BBB42A78663A}" type="slidenum">
               <a:rPr lang="en-US" smtClean="0"/>
-              <a:t>5</a:t>
+              <a:t>4</a:t>
             </a:fld>
             <a:endParaRPr lang="en-US"/>
           </a:p>
@@ -1219,7 +878,7 @@
     </p:spTree>
     <p:extLst>
       <p:ext uri="{BB962C8B-B14F-4D97-AF65-F5344CB8AC3E}">
-        <p14:creationId xmlns:p14="http://schemas.microsoft.com/office/powerpoint/2010/main" val="835231875"/>
+        <p14:creationId xmlns:p14="http://schemas.microsoft.com/office/powerpoint/2010/main" val="204439009"/>
       </p:ext>
     </p:extLst>
   </p:cSld>
@@ -1273,88 +932,8 @@
           <a:bodyPr/>
           <a:lstStyle/>
           <a:p>
-            <a:pPr marL="0" marR="0" lvl="0" indent="0" algn="l" defTabSz="914400" rtl="0" eaLnBrk="1" fontAlgn="auto" latinLnBrk="0" hangingPunct="1">
-              <a:lnSpc>
-                <a:spcPct val="100000"/>
-              </a:lnSpc>
-              <a:spcBef>
-                <a:spcPts val="0"/>
-              </a:spcBef>
-              <a:spcAft>
-                <a:spcPts val="0"/>
-              </a:spcAft>
-              <a:buClrTx/>
-              <a:buSzTx/>
-              <a:buFontTx/>
-              <a:buNone/>
-              <a:tabLst/>
-              <a:defRPr/>
-            </a:pPr>
-            <a:r>
-              <a:rPr lang="en-US" sz="1200" kern="100" dirty="0">
-                <a:effectLst/>
-                <a:latin typeface="Times New Roman" panose="02020603050405020304" pitchFamily="18" charset="0"/>
-                <a:ea typeface="Aptos" panose="020B0004020202020204" pitchFamily="34" charset="0"/>
-                <a:cs typeface="Times New Roman" panose="02020603050405020304" pitchFamily="18" charset="0"/>
-              </a:rPr>
-              <a:t>The main objective of </a:t>
-            </a:r>
-            <a:r>
-              <a:rPr lang="en-GB" dirty="0">
-                <a:latin typeface="Times New Roman" panose="02020603050405020304" pitchFamily="18" charset="0"/>
-                <a:cs typeface="Times New Roman" panose="02020603050405020304" pitchFamily="18" charset="0"/>
-              </a:rPr>
-              <a:t>this study is to explore the mobility and immobility experiences of convicted drug mules in Ghana.</a:t>
-            </a:r>
-            <a:endParaRPr lang="en-US" dirty="0">
-              <a:latin typeface="Times New Roman" panose="02020603050405020304" pitchFamily="18" charset="0"/>
-              <a:cs typeface="Times New Roman" panose="02020603050405020304" pitchFamily="18" charset="0"/>
-            </a:endParaRPr>
-          </a:p>
-          <a:p>
-            <a:pPr marL="0" marR="0" lvl="0" indent="0" algn="l" defTabSz="914400" rtl="0" eaLnBrk="1" fontAlgn="auto" latinLnBrk="0" hangingPunct="1">
-              <a:lnSpc>
-                <a:spcPct val="100000"/>
-              </a:lnSpc>
-              <a:spcBef>
-                <a:spcPts val="0"/>
-              </a:spcBef>
-              <a:spcAft>
-                <a:spcPts val="0"/>
-              </a:spcAft>
-              <a:buClrTx/>
-              <a:buSzTx/>
-              <a:buFontTx/>
-              <a:buNone/>
-              <a:tabLst/>
-              <a:defRPr/>
-            </a:pPr>
-            <a:r>
-              <a:rPr lang="en-GB" sz="1200" kern="1200" dirty="0">
-                <a:solidFill>
-                  <a:schemeClr val="tx1"/>
-                </a:solidFill>
-                <a:effectLst/>
-                <a:latin typeface="+mn-lt"/>
-                <a:ea typeface="+mn-ea"/>
-                <a:cs typeface="+mn-cs"/>
-              </a:rPr>
-              <a:t>In tandem with this, the specific objectives of the study are:</a:t>
-            </a:r>
-            <a:endParaRPr lang="en-US" sz="1200" kern="1200" dirty="0">
-              <a:solidFill>
-                <a:schemeClr val="tx1"/>
-              </a:solidFill>
-              <a:effectLst/>
-              <a:latin typeface="+mn-lt"/>
-              <a:ea typeface="+mn-ea"/>
-              <a:cs typeface="+mn-cs"/>
-            </a:endParaRPr>
-          </a:p>
-          <a:p>
-            <a:r>
-              <a:rPr lang="en-US" dirty="0"/>
-              <a:t> </a:t>
+            <a:r>
+              <a:t>Read the general objective, then skim the ten specific objectives - note that each maps to evidence in the thesis: 3-4 to the scan RPC, 5 to the points algorithm, 6-7 to leaderboard and badges, 8 to the admin dashboard, 9-10 to the Chapter Five evaluation.</a:t>
             </a:r>
           </a:p>
         </p:txBody>
@@ -1376,7 +955,7 @@
           <a:p>
             <a:fld id="{F966F616-72DA-4E4B-BAA1-BBB42A78663A}" type="slidenum">
               <a:rPr lang="en-US" smtClean="0"/>
-              <a:t>6</a:t>
+              <a:t>5</a:t>
             </a:fld>
             <a:endParaRPr lang="en-US"/>
           </a:p>
@@ -1385,7 +964,7 @@
     </p:spTree>
     <p:extLst>
       <p:ext uri="{BB962C8B-B14F-4D97-AF65-F5344CB8AC3E}">
-        <p14:creationId xmlns:p14="http://schemas.microsoft.com/office/powerpoint/2010/main" val="4057616368"/>
+        <p14:creationId xmlns:p14="http://schemas.microsoft.com/office/powerpoint/2010/main" val="835231875"/>
       </p:ext>
     </p:extLst>
   </p:cSld>
@@ -1440,781 +1019,8 @@
           <a:lstStyle/>
           <a:p>
             <a:r>
-              <a:rPr lang="en-US" sz="1200" b="1" kern="1200" dirty="0">
-                <a:solidFill>
-                  <a:schemeClr val="tx1"/>
-                </a:solidFill>
-                <a:effectLst/>
-                <a:latin typeface="+mn-lt"/>
-                <a:ea typeface="+mn-ea"/>
-                <a:cs typeface="+mn-cs"/>
-              </a:rPr>
-              <a:t>Methodology </a:t>
-            </a:r>
-            <a:endParaRPr lang="en-US" sz="1200" kern="1200" dirty="0">
-              <a:solidFill>
-                <a:schemeClr val="tx1"/>
-              </a:solidFill>
-              <a:effectLst/>
-              <a:latin typeface="+mn-lt"/>
-              <a:ea typeface="+mn-ea"/>
-              <a:cs typeface="+mn-cs"/>
-            </a:endParaRPr>
-          </a:p>
-          <a:p>
-            <a:r>
-              <a:rPr lang="en-US" sz="1200" b="1" kern="1200" dirty="0">
-                <a:solidFill>
-                  <a:schemeClr val="tx1"/>
-                </a:solidFill>
-                <a:effectLst/>
-                <a:latin typeface="+mn-lt"/>
-                <a:ea typeface="+mn-ea"/>
-                <a:cs typeface="+mn-cs"/>
-              </a:rPr>
-              <a:t>Phenomenology</a:t>
-            </a:r>
-            <a:endParaRPr lang="en-US" sz="1200" kern="1200" dirty="0">
-              <a:solidFill>
-                <a:schemeClr val="tx1"/>
-              </a:solidFill>
-              <a:effectLst/>
-              <a:latin typeface="+mn-lt"/>
-              <a:ea typeface="+mn-ea"/>
-              <a:cs typeface="+mn-cs"/>
-            </a:endParaRPr>
-          </a:p>
-          <a:p>
-            <a:r>
-              <a:rPr lang="en-US" sz="1200" kern="1200" dirty="0">
-                <a:solidFill>
-                  <a:schemeClr val="tx1"/>
-                </a:solidFill>
-                <a:effectLst/>
-                <a:latin typeface="+mn-lt"/>
-                <a:ea typeface="+mn-ea"/>
-                <a:cs typeface="+mn-cs"/>
-              </a:rPr>
-              <a:t>My philosophical positioning aligned with hermeneutic phenomenology since I </a:t>
-            </a:r>
-            <a:r>
-              <a:rPr lang="en-US" sz="1200" kern="1200" dirty="0" err="1">
-                <a:solidFill>
-                  <a:schemeClr val="tx1"/>
-                </a:solidFill>
-                <a:effectLst/>
-                <a:latin typeface="+mn-lt"/>
-                <a:ea typeface="+mn-ea"/>
-                <a:cs typeface="+mn-cs"/>
-              </a:rPr>
-              <a:t>saught</a:t>
-            </a:r>
-            <a:r>
-              <a:rPr lang="en-US" sz="1200" kern="1200" dirty="0">
-                <a:solidFill>
-                  <a:schemeClr val="tx1"/>
-                </a:solidFill>
-                <a:effectLst/>
-                <a:latin typeface="+mn-lt"/>
-                <a:ea typeface="+mn-ea"/>
-                <a:cs typeface="+mn-cs"/>
-              </a:rPr>
-              <a:t> to understand how individuals make meaning of their voluntary and involuntary immobility. </a:t>
-            </a:r>
-          </a:p>
-          <a:p>
-            <a:r>
-              <a:rPr lang="en-US" sz="1200" b="1" kern="1200" dirty="0">
-                <a:solidFill>
-                  <a:schemeClr val="tx1"/>
-                </a:solidFill>
-                <a:effectLst/>
-                <a:latin typeface="+mn-lt"/>
-                <a:ea typeface="+mn-ea"/>
-                <a:cs typeface="+mn-cs"/>
-              </a:rPr>
-              <a:t>Qualitative approach</a:t>
-            </a:r>
-            <a:endParaRPr lang="en-US" sz="1200" kern="1200" dirty="0">
-              <a:solidFill>
-                <a:schemeClr val="tx1"/>
-              </a:solidFill>
-              <a:effectLst/>
-              <a:latin typeface="+mn-lt"/>
-              <a:ea typeface="+mn-ea"/>
-              <a:cs typeface="+mn-cs"/>
-            </a:endParaRPr>
-          </a:p>
-          <a:p>
-            <a:r>
-              <a:rPr lang="en-US" sz="1200" kern="1200" dirty="0">
-                <a:solidFill>
-                  <a:schemeClr val="tx1"/>
-                </a:solidFill>
-                <a:effectLst/>
-                <a:latin typeface="+mn-lt"/>
-                <a:ea typeface="+mn-ea"/>
-                <a:cs typeface="+mn-cs"/>
-              </a:rPr>
-              <a:t>Given the sensitive and complex nature of drug trafficking and incarceration, the qualitative research design was deemed most appropriate to understand the complex realities of convicted drug mules, an insight that will be overlooked in a purely quantitative approach</a:t>
-            </a:r>
-          </a:p>
-          <a:p>
-            <a:r>
-              <a:rPr lang="en-US" sz="1200" kern="1200" dirty="0">
-                <a:solidFill>
-                  <a:schemeClr val="tx1"/>
-                </a:solidFill>
-                <a:effectLst/>
-                <a:latin typeface="+mn-lt"/>
-                <a:ea typeface="+mn-ea"/>
-                <a:cs typeface="+mn-cs"/>
-              </a:rPr>
-              <a:t>The methodological orientation that best suits the purpose of my research is the Interpretative Phenomenological Analysis (IPA). IPA is a qualitative research approach developed by Smith (2011) within psychology to explore how individuals make sense of their lived experiences (Moran, 2013). </a:t>
-            </a:r>
-          </a:p>
-          <a:p>
-            <a:r>
-              <a:rPr lang="en-US" sz="1200" b="1" kern="1200" dirty="0">
-                <a:solidFill>
-                  <a:schemeClr val="tx1"/>
-                </a:solidFill>
-                <a:effectLst/>
-                <a:latin typeface="+mn-lt"/>
-                <a:ea typeface="+mn-ea"/>
-                <a:cs typeface="+mn-cs"/>
-              </a:rPr>
-              <a:t>Study population</a:t>
-            </a:r>
-            <a:endParaRPr lang="en-US" sz="1200" kern="1200" dirty="0">
-              <a:solidFill>
-                <a:schemeClr val="tx1"/>
-              </a:solidFill>
-              <a:effectLst/>
-              <a:latin typeface="+mn-lt"/>
-              <a:ea typeface="+mn-ea"/>
-              <a:cs typeface="+mn-cs"/>
-            </a:endParaRPr>
-          </a:p>
-          <a:p>
-            <a:r>
-              <a:rPr lang="en-US" sz="1200" kern="1200" dirty="0">
-                <a:solidFill>
-                  <a:schemeClr val="tx1"/>
-                </a:solidFill>
-                <a:effectLst/>
-                <a:latin typeface="+mn-lt"/>
-                <a:ea typeface="+mn-ea"/>
-                <a:cs typeface="+mn-cs"/>
-              </a:rPr>
-              <a:t>Convicted drug mules (males and females)</a:t>
-            </a:r>
-          </a:p>
-          <a:p>
-            <a:r>
-              <a:rPr lang="en-US" sz="1200" kern="1200" dirty="0">
-                <a:solidFill>
-                  <a:schemeClr val="tx1"/>
-                </a:solidFill>
-                <a:effectLst/>
-                <a:latin typeface="+mn-lt"/>
-                <a:ea typeface="+mn-ea"/>
-                <a:cs typeface="+mn-cs"/>
-              </a:rPr>
-              <a:t>Ghanaians and foreign nationals</a:t>
-            </a:r>
-          </a:p>
-          <a:p>
-            <a:r>
-              <a:rPr lang="en-US" sz="1200" kern="1200" dirty="0">
-                <a:solidFill>
-                  <a:schemeClr val="tx1"/>
-                </a:solidFill>
-                <a:effectLst/>
-                <a:latin typeface="+mn-lt"/>
-                <a:ea typeface="+mn-ea"/>
-                <a:cs typeface="+mn-cs"/>
-              </a:rPr>
-              <a:t>18 years and above</a:t>
-            </a:r>
-          </a:p>
-          <a:p>
-            <a:r>
-              <a:rPr lang="en-US" sz="1200" kern="1200" dirty="0">
-                <a:solidFill>
-                  <a:schemeClr val="tx1"/>
-                </a:solidFill>
-                <a:effectLst/>
-                <a:latin typeface="+mn-lt"/>
-                <a:ea typeface="+mn-ea"/>
-                <a:cs typeface="+mn-cs"/>
-              </a:rPr>
-              <a:t>Must be in prison beyond 6 months</a:t>
-            </a:r>
-          </a:p>
-          <a:p>
-            <a:r>
-              <a:rPr lang="en-US" sz="1200" kern="1200" dirty="0">
-                <a:solidFill>
-                  <a:schemeClr val="tx1"/>
-                </a:solidFill>
-                <a:effectLst/>
-                <a:latin typeface="+mn-lt"/>
-                <a:ea typeface="+mn-ea"/>
-                <a:cs typeface="+mn-cs"/>
-              </a:rPr>
-              <a:t> </a:t>
-            </a:r>
-          </a:p>
-          <a:p>
-            <a:r>
-              <a:rPr lang="en-US" sz="1200" b="1" kern="1200" dirty="0">
-                <a:solidFill>
-                  <a:schemeClr val="tx1"/>
-                </a:solidFill>
-                <a:effectLst/>
-                <a:latin typeface="+mn-lt"/>
-                <a:ea typeface="+mn-ea"/>
-                <a:cs typeface="+mn-cs"/>
-              </a:rPr>
-              <a:t>Sampling Techniques</a:t>
-            </a:r>
-            <a:endParaRPr lang="en-US" sz="1200" kern="1200" dirty="0">
-              <a:solidFill>
-                <a:schemeClr val="tx1"/>
-              </a:solidFill>
-              <a:effectLst/>
-              <a:latin typeface="+mn-lt"/>
-              <a:ea typeface="+mn-ea"/>
-              <a:cs typeface="+mn-cs"/>
-            </a:endParaRPr>
-          </a:p>
-          <a:p>
-            <a:r>
-              <a:rPr lang="en-US" sz="1200" kern="1200" dirty="0">
-                <a:solidFill>
-                  <a:schemeClr val="tx1"/>
-                </a:solidFill>
-                <a:effectLst/>
-                <a:latin typeface="+mn-lt"/>
-                <a:ea typeface="+mn-ea"/>
-                <a:cs typeface="+mn-cs"/>
-              </a:rPr>
-              <a:t>Census at the female yard</a:t>
-            </a:r>
-          </a:p>
-          <a:p>
-            <a:r>
-              <a:rPr lang="en-US" sz="1200" kern="1200" dirty="0">
-                <a:solidFill>
-                  <a:schemeClr val="tx1"/>
-                </a:solidFill>
-                <a:effectLst/>
-                <a:latin typeface="+mn-lt"/>
-                <a:ea typeface="+mn-ea"/>
-                <a:cs typeface="+mn-cs"/>
-              </a:rPr>
-              <a:t>Snowballing at the male yard</a:t>
-            </a:r>
-          </a:p>
-          <a:p>
-            <a:r>
-              <a:rPr lang="en-US" sz="1200" kern="1200" dirty="0">
-                <a:solidFill>
-                  <a:schemeClr val="tx1"/>
-                </a:solidFill>
-                <a:effectLst/>
-                <a:latin typeface="+mn-lt"/>
-                <a:ea typeface="+mn-ea"/>
-                <a:cs typeface="+mn-cs"/>
-              </a:rPr>
-              <a:t>Purposive for key informants</a:t>
-            </a:r>
-          </a:p>
-          <a:p>
-            <a:r>
-              <a:rPr lang="en-US" sz="1200" kern="1200" dirty="0">
-                <a:solidFill>
-                  <a:schemeClr val="tx1"/>
-                </a:solidFill>
-                <a:effectLst/>
-                <a:latin typeface="+mn-lt"/>
-                <a:ea typeface="+mn-ea"/>
-                <a:cs typeface="+mn-cs"/>
-              </a:rPr>
-              <a:t> </a:t>
-            </a:r>
-          </a:p>
-          <a:p>
-            <a:r>
-              <a:rPr lang="en-US" sz="1200" kern="1200" dirty="0">
-                <a:solidFill>
-                  <a:schemeClr val="tx1"/>
-                </a:solidFill>
-                <a:effectLst/>
-                <a:latin typeface="+mn-lt"/>
-                <a:ea typeface="+mn-ea"/>
-                <a:cs typeface="+mn-cs"/>
-              </a:rPr>
-              <a:t> </a:t>
-            </a:r>
-          </a:p>
-          <a:p>
-            <a:r>
-              <a:rPr lang="en-US" sz="1200" b="1" kern="1200" dirty="0">
-                <a:solidFill>
-                  <a:schemeClr val="tx1"/>
-                </a:solidFill>
-                <a:effectLst/>
-                <a:latin typeface="+mn-lt"/>
-                <a:ea typeface="+mn-ea"/>
-                <a:cs typeface="+mn-cs"/>
-              </a:rPr>
-              <a:t>Sampling size</a:t>
-            </a:r>
-            <a:endParaRPr lang="en-US" sz="1200" kern="1200" dirty="0">
-              <a:solidFill>
-                <a:schemeClr val="tx1"/>
-              </a:solidFill>
-              <a:effectLst/>
-              <a:latin typeface="+mn-lt"/>
-              <a:ea typeface="+mn-ea"/>
-              <a:cs typeface="+mn-cs"/>
-            </a:endParaRPr>
-          </a:p>
-          <a:p>
-            <a:r>
-              <a:rPr lang="en-US" sz="1200" kern="1200" dirty="0">
-                <a:solidFill>
-                  <a:schemeClr val="tx1"/>
-                </a:solidFill>
-                <a:effectLst/>
-                <a:latin typeface="+mn-lt"/>
-                <a:ea typeface="+mn-ea"/>
-                <a:cs typeface="+mn-cs"/>
-              </a:rPr>
-              <a:t>The sampling size obtained after reaching saturation was 16, </a:t>
-            </a:r>
-            <a:r>
-              <a:rPr lang="en-US" sz="1200" kern="1200" dirty="0" err="1">
-                <a:solidFill>
-                  <a:schemeClr val="tx1"/>
-                </a:solidFill>
-                <a:effectLst/>
-                <a:latin typeface="+mn-lt"/>
-                <a:ea typeface="+mn-ea"/>
-                <a:cs typeface="+mn-cs"/>
-              </a:rPr>
-              <a:t>ie</a:t>
-            </a:r>
-            <a:r>
-              <a:rPr lang="en-US" sz="1200" kern="1200" dirty="0">
-                <a:solidFill>
-                  <a:schemeClr val="tx1"/>
-                </a:solidFill>
-                <a:effectLst/>
-                <a:latin typeface="+mn-lt"/>
-                <a:ea typeface="+mn-ea"/>
-                <a:cs typeface="+mn-cs"/>
-              </a:rPr>
-              <a:t>, 8 males and eight females</a:t>
-            </a:r>
-          </a:p>
-          <a:p>
-            <a:r>
-              <a:rPr lang="en-US" sz="1200" b="1" kern="1200" dirty="0">
-                <a:solidFill>
-                  <a:schemeClr val="tx1"/>
-                </a:solidFill>
-                <a:effectLst/>
-                <a:latin typeface="+mn-lt"/>
-                <a:ea typeface="+mn-ea"/>
-                <a:cs typeface="+mn-cs"/>
-              </a:rPr>
-              <a:t>Data analysis</a:t>
-            </a:r>
-            <a:endParaRPr lang="en-US" sz="1200" kern="1200" dirty="0">
-              <a:solidFill>
-                <a:schemeClr val="tx1"/>
-              </a:solidFill>
-              <a:effectLst/>
-              <a:latin typeface="+mn-lt"/>
-              <a:ea typeface="+mn-ea"/>
-              <a:cs typeface="+mn-cs"/>
-            </a:endParaRPr>
-          </a:p>
-          <a:p>
-            <a:r>
-              <a:rPr lang="en-US" sz="1200" kern="1200" dirty="0">
-                <a:solidFill>
-                  <a:schemeClr val="tx1"/>
-                </a:solidFill>
-                <a:effectLst/>
-                <a:latin typeface="+mn-lt"/>
-                <a:ea typeface="+mn-ea"/>
-                <a:cs typeface="+mn-cs"/>
-              </a:rPr>
-              <a:t>Transcription was done while conducting the interviews because the prison did not allow me to record</a:t>
-            </a:r>
-          </a:p>
-          <a:p>
-            <a:r>
-              <a:rPr lang="en-US" sz="1200" kern="1200" dirty="0">
-                <a:solidFill>
-                  <a:schemeClr val="tx1"/>
-                </a:solidFill>
-                <a:effectLst/>
-                <a:latin typeface="+mn-lt"/>
-                <a:ea typeface="+mn-ea"/>
-                <a:cs typeface="+mn-cs"/>
-              </a:rPr>
-              <a:t>After the first four interviews, I began generating initial codes and gained a preliminary understanding of the potential themes emerging from the data. I viewed these interviews as setting the conceptual boundaries of the phenomenon under investigation. </a:t>
-            </a:r>
-          </a:p>
-          <a:p>
-            <a:r>
-              <a:rPr lang="en-US" sz="1200" kern="1200" dirty="0">
-                <a:solidFill>
-                  <a:schemeClr val="tx1"/>
-                </a:solidFill>
-                <a:effectLst/>
-                <a:latin typeface="+mn-lt"/>
-                <a:ea typeface="+mn-ea"/>
-                <a:cs typeface="+mn-cs"/>
-              </a:rPr>
-              <a:t> </a:t>
-            </a:r>
-          </a:p>
-          <a:p>
-            <a:r>
-              <a:rPr lang="en-US" sz="1200" b="1" kern="1200" dirty="0">
-                <a:solidFill>
-                  <a:schemeClr val="tx1"/>
-                </a:solidFill>
-                <a:effectLst/>
-                <a:latin typeface="+mn-lt"/>
-                <a:ea typeface="+mn-ea"/>
-                <a:cs typeface="+mn-cs"/>
-              </a:rPr>
-              <a:t>Coding</a:t>
-            </a:r>
-            <a:endParaRPr lang="en-US" sz="1200" kern="1200" dirty="0">
-              <a:solidFill>
-                <a:schemeClr val="tx1"/>
-              </a:solidFill>
-              <a:effectLst/>
-              <a:latin typeface="+mn-lt"/>
-              <a:ea typeface="+mn-ea"/>
-              <a:cs typeface="+mn-cs"/>
-            </a:endParaRPr>
-          </a:p>
-          <a:p>
-            <a:r>
-              <a:rPr lang="en-US" sz="1200" kern="1200" dirty="0">
-                <a:solidFill>
-                  <a:schemeClr val="tx1"/>
-                </a:solidFill>
-                <a:effectLst/>
-                <a:latin typeface="+mn-lt"/>
-                <a:ea typeface="+mn-ea"/>
-                <a:cs typeface="+mn-cs"/>
-              </a:rPr>
-              <a:t>First order codes 			Second order codes		Voice/quotes </a:t>
-            </a:r>
-          </a:p>
-          <a:p>
-            <a:r>
-              <a:rPr lang="en-US" sz="1200" kern="1200" dirty="0">
-                <a:solidFill>
-                  <a:schemeClr val="tx1"/>
-                </a:solidFill>
-                <a:effectLst/>
-                <a:latin typeface="+mn-lt"/>
-                <a:ea typeface="+mn-ea"/>
-                <a:cs typeface="+mn-cs"/>
-              </a:rPr>
-              <a:t>Learning to sew			Vocational skills 		what skill are you learning?</a:t>
-            </a:r>
-          </a:p>
-          <a:p>
-            <a:r>
-              <a:rPr lang="en-US" sz="1200" kern="1200" dirty="0">
-                <a:solidFill>
-                  <a:schemeClr val="tx1"/>
-                </a:solidFill>
-                <a:effectLst/>
-                <a:latin typeface="+mn-lt"/>
-                <a:ea typeface="+mn-ea"/>
-                <a:cs typeface="+mn-cs"/>
-              </a:rPr>
-              <a:t>Constant headache and feeling weak	 Experiences in prison </a:t>
-            </a:r>
-          </a:p>
-          <a:p>
-            <a:r>
-              <a:rPr lang="en-US" sz="1200" kern="1200" dirty="0">
-                <a:solidFill>
-                  <a:schemeClr val="tx1"/>
-                </a:solidFill>
-                <a:effectLst/>
-                <a:latin typeface="+mn-lt"/>
-                <a:ea typeface="+mn-ea"/>
-                <a:cs typeface="+mn-cs"/>
-              </a:rPr>
-              <a:t>Thinking too much</a:t>
-            </a:r>
-          </a:p>
-          <a:p>
-            <a:r>
-              <a:rPr lang="en-US" sz="1200" kern="1200" dirty="0">
-                <a:solidFill>
-                  <a:schemeClr val="tx1"/>
-                </a:solidFill>
-                <a:effectLst/>
-                <a:latin typeface="+mn-lt"/>
-                <a:ea typeface="+mn-ea"/>
-                <a:cs typeface="+mn-cs"/>
-              </a:rPr>
-              <a:t>After generating the codes, I organised them into basic themes, subordinate themes and superordinate themes</a:t>
-            </a:r>
-          </a:p>
-          <a:p>
-            <a:r>
-              <a:rPr lang="en-US" sz="1200" kern="1200" dirty="0" err="1">
-                <a:solidFill>
-                  <a:schemeClr val="tx1"/>
-                </a:solidFill>
-                <a:effectLst/>
-                <a:latin typeface="+mn-lt"/>
-                <a:ea typeface="+mn-ea"/>
-                <a:cs typeface="+mn-cs"/>
-              </a:rPr>
-              <a:t>Eg.</a:t>
-            </a:r>
-            <a:r>
-              <a:rPr lang="en-US" sz="1200" kern="1200" dirty="0">
-                <a:solidFill>
-                  <a:schemeClr val="tx1"/>
-                </a:solidFill>
-                <a:effectLst/>
-                <a:latin typeface="+mn-lt"/>
-                <a:ea typeface="+mn-ea"/>
-                <a:cs typeface="+mn-cs"/>
-              </a:rPr>
-              <a:t> Working in my neighborhood (basic theme)	No movement within the country of origin (subordinate theme)	mobility trajectories of participants before engaging in drug trafficking (superordinate themes)</a:t>
-            </a:r>
-          </a:p>
-          <a:p>
-            <a:r>
-              <a:rPr lang="en-US" sz="1200" kern="1200" dirty="0">
-                <a:solidFill>
-                  <a:schemeClr val="tx1"/>
-                </a:solidFill>
-                <a:effectLst/>
-                <a:latin typeface="+mn-lt"/>
-                <a:ea typeface="+mn-ea"/>
-                <a:cs typeface="+mn-cs"/>
-              </a:rPr>
-              <a:t> </a:t>
-            </a:r>
-          </a:p>
-          <a:p>
-            <a:r>
-              <a:rPr lang="en-US" sz="1200" kern="1200" dirty="0">
-                <a:solidFill>
-                  <a:schemeClr val="tx1"/>
-                </a:solidFill>
-                <a:effectLst/>
-                <a:latin typeface="+mn-lt"/>
-                <a:ea typeface="+mn-ea"/>
-                <a:cs typeface="+mn-cs"/>
-              </a:rPr>
-              <a:t> </a:t>
-            </a:r>
-          </a:p>
-          <a:p>
-            <a:r>
-              <a:rPr lang="en-US" sz="1200" b="1" kern="1200" dirty="0">
-                <a:solidFill>
-                  <a:schemeClr val="tx1"/>
-                </a:solidFill>
-                <a:effectLst/>
-                <a:latin typeface="+mn-lt"/>
-                <a:ea typeface="+mn-ea"/>
-                <a:cs typeface="+mn-cs"/>
-              </a:rPr>
-              <a:t> </a:t>
-            </a:r>
-            <a:endParaRPr lang="en-US" sz="1200" kern="1200" dirty="0">
-              <a:solidFill>
-                <a:schemeClr val="tx1"/>
-              </a:solidFill>
-              <a:effectLst/>
-              <a:latin typeface="+mn-lt"/>
-              <a:ea typeface="+mn-ea"/>
-              <a:cs typeface="+mn-cs"/>
-            </a:endParaRPr>
-          </a:p>
-          <a:p>
-            <a:r>
-              <a:rPr lang="en-US" sz="1200" b="1" kern="1200" dirty="0">
-                <a:solidFill>
-                  <a:schemeClr val="tx1"/>
-                </a:solidFill>
-                <a:effectLst/>
-                <a:latin typeface="+mn-lt"/>
-                <a:ea typeface="+mn-ea"/>
-                <a:cs typeface="+mn-cs"/>
-              </a:rPr>
-              <a:t>Researcher positionality </a:t>
-            </a:r>
-            <a:endParaRPr lang="en-US" sz="1200" kern="1200" dirty="0">
-              <a:solidFill>
-                <a:schemeClr val="tx1"/>
-              </a:solidFill>
-              <a:effectLst/>
-              <a:latin typeface="+mn-lt"/>
-              <a:ea typeface="+mn-ea"/>
-              <a:cs typeface="+mn-cs"/>
-            </a:endParaRPr>
-          </a:p>
-          <a:p>
-            <a:r>
-              <a:rPr lang="en-US" sz="1200" b="1" kern="1200" dirty="0">
-                <a:solidFill>
-                  <a:schemeClr val="tx1"/>
-                </a:solidFill>
-                <a:effectLst/>
-                <a:latin typeface="+mn-lt"/>
-                <a:ea typeface="+mn-ea"/>
-                <a:cs typeface="+mn-cs"/>
-              </a:rPr>
-              <a:t> </a:t>
-            </a:r>
-            <a:endParaRPr lang="en-US" sz="1200" kern="1200" dirty="0">
-              <a:solidFill>
-                <a:schemeClr val="tx1"/>
-              </a:solidFill>
-              <a:effectLst/>
-              <a:latin typeface="+mn-lt"/>
-              <a:ea typeface="+mn-ea"/>
-              <a:cs typeface="+mn-cs"/>
-            </a:endParaRPr>
-          </a:p>
-          <a:p>
-            <a:r>
-              <a:rPr lang="en-US" sz="1200" kern="1200" dirty="0">
-                <a:solidFill>
-                  <a:schemeClr val="tx1"/>
-                </a:solidFill>
-                <a:effectLst/>
-                <a:latin typeface="+mn-lt"/>
-                <a:ea typeface="+mn-ea"/>
-                <a:cs typeface="+mn-cs"/>
-              </a:rPr>
-              <a:t>On one hand, I have firsthand knowledge of law enforcement and how drug trafficking cases are handled in Ghana. On the other hand, I am deeply engaged in academic inquiry as a student researcher</a:t>
-            </a:r>
-          </a:p>
-          <a:p>
-            <a:r>
-              <a:rPr lang="en-US" sz="1200" kern="1200" dirty="0">
-                <a:solidFill>
-                  <a:schemeClr val="tx1"/>
-                </a:solidFill>
-                <a:effectLst/>
-                <a:latin typeface="+mn-lt"/>
-                <a:ea typeface="+mn-ea"/>
-                <a:cs typeface="+mn-cs"/>
-              </a:rPr>
-              <a:t> </a:t>
-            </a:r>
-          </a:p>
-          <a:p>
-            <a:r>
-              <a:rPr lang="en-US" sz="1200" kern="1200" dirty="0">
-                <a:solidFill>
-                  <a:schemeClr val="tx1"/>
-                </a:solidFill>
-                <a:effectLst/>
-                <a:latin typeface="+mn-lt"/>
-                <a:ea typeface="+mn-ea"/>
-                <a:cs typeface="+mn-cs"/>
-              </a:rPr>
-              <a:t>I may be seen as an insider because, as a drug law enforcement officer, I have a deep understanding of the legal, procedural, and social contexts surrounding drug trafficking.</a:t>
-            </a:r>
-          </a:p>
-          <a:p>
-            <a:r>
-              <a:rPr lang="en-US" sz="1200" kern="1200" dirty="0">
-                <a:solidFill>
-                  <a:schemeClr val="tx1"/>
-                </a:solidFill>
-                <a:effectLst/>
-                <a:latin typeface="+mn-lt"/>
-                <a:ea typeface="+mn-ea"/>
-                <a:cs typeface="+mn-cs"/>
-              </a:rPr>
-              <a:t>I am an outsider because I have not lived the experience of being a convicted drug mule.</a:t>
-            </a:r>
-          </a:p>
-          <a:p>
-            <a:r>
-              <a:rPr lang="en-US" sz="1200" kern="1200" dirty="0">
-                <a:solidFill>
-                  <a:schemeClr val="tx1"/>
-                </a:solidFill>
-                <a:effectLst/>
-                <a:latin typeface="+mn-lt"/>
-                <a:ea typeface="+mn-ea"/>
-                <a:cs typeface="+mn-cs"/>
-              </a:rPr>
-              <a:t> </a:t>
-            </a:r>
-          </a:p>
-          <a:p>
-            <a:r>
-              <a:rPr lang="en-US" sz="1200" kern="1200" dirty="0">
-                <a:solidFill>
-                  <a:schemeClr val="tx1"/>
-                </a:solidFill>
-                <a:effectLst/>
-                <a:latin typeface="+mn-lt"/>
-                <a:ea typeface="+mn-ea"/>
-                <a:cs typeface="+mn-cs"/>
-              </a:rPr>
-              <a:t>I am aware that this dual positionality can enrich my analysis, but also requires reflexivity. I needed to be aware of how my identity, assumptions, and institutional affiliations might affect data collection, interpretation, and participant rapport.</a:t>
-            </a:r>
-          </a:p>
-          <a:p>
-            <a:r>
-              <a:rPr lang="en-US" sz="1200" kern="1200" dirty="0">
-                <a:solidFill>
-                  <a:schemeClr val="tx1"/>
-                </a:solidFill>
-                <a:effectLst/>
-                <a:latin typeface="+mn-lt"/>
-                <a:ea typeface="+mn-ea"/>
-                <a:cs typeface="+mn-cs"/>
-              </a:rPr>
-              <a:t> </a:t>
-            </a:r>
-          </a:p>
-          <a:p>
-            <a:r>
-              <a:rPr lang="en-US" sz="1200" kern="1200" dirty="0">
-                <a:solidFill>
-                  <a:schemeClr val="tx1"/>
-                </a:solidFill>
-                <a:effectLst/>
-                <a:latin typeface="+mn-lt"/>
-                <a:ea typeface="+mn-ea"/>
-                <a:cs typeface="+mn-cs"/>
-              </a:rPr>
-              <a:t>Although my background gave me valuable insight into how drugs are trafficked into Ghana and the control measures, I was also aware that sharing my professional identity with my participants, the convicted drug mules, might make them uncomfortable or hesitant to speak freely. To help create a safe and open environment for honest conversation, I chose to present myself only as a student researcher during the interviews. This decision was not taken lightly, but it followed ethical guidance in qualitative research that emphasises the importance of building trust and mitigating power imbalances between researcher and participant (Berger, 2016; Holmes, 2020).</a:t>
-            </a:r>
-          </a:p>
-          <a:p>
-            <a:endParaRPr lang="en-US" dirty="0"/>
+              <a:t>Walk the diagram left to right: physical tier (signs carrying one code string), client tier (presentation only), backend tier (auth, RLS, database functions). Point out the return arrow - the award comes back as data for display. Bottom strips: security model (no client authority, append-only ledger) and deployment (static bundle on Vercel, demo or connected mode from the same source).</a:t>
+            </a:r>
           </a:p>
         </p:txBody>
       </p:sp>
@@ -2235,7 +1041,7 @@
           <a:p>
             <a:fld id="{F966F616-72DA-4E4B-BAA1-BBB42A78663A}" type="slidenum">
               <a:rPr lang="en-US" smtClean="0"/>
-              <a:t>7</a:t>
+              <a:t>6</a:t>
             </a:fld>
             <a:endParaRPr lang="en-US"/>
           </a:p>
@@ -2244,7 +1050,7 @@
     </p:spTree>
     <p:extLst>
       <p:ext uri="{BB962C8B-B14F-4D97-AF65-F5344CB8AC3E}">
-        <p14:creationId xmlns:p14="http://schemas.microsoft.com/office/powerpoint/2010/main" val="2075072537"/>
+        <p14:creationId xmlns:p14="http://schemas.microsoft.com/office/powerpoint/2010/main" val="4057616368"/>
       </p:ext>
     </p:extLst>
   </p:cSld>
@@ -2298,7 +1104,9 @@
           <a:bodyPr/>
           <a:lstStyle/>
           <a:p>
-            <a:endParaRPr lang="en-US"/>
+            <a:r>
+              <a:t>Trace the worked example: a student scans LIB-A1. Reject paths first (unknown code, or cooldown inside 8 hours - no row is written), then the happy path: award = round(base x multiplier), one transaction writes scan + ledger, rollups recompute, badges evaluate, result returns to the UI. Emphasise every branch runs server-side.</a:t>
+            </a:r>
           </a:p>
         </p:txBody>
       </p:sp>
@@ -2319,7 +1127,7 @@
           <a:p>
             <a:fld id="{F966F616-72DA-4E4B-BAA1-BBB42A78663A}" type="slidenum">
               <a:rPr lang="en-US" smtClean="0"/>
-              <a:t>8</a:t>
+              <a:t>7</a:t>
             </a:fld>
             <a:endParaRPr lang="en-US"/>
           </a:p>
@@ -2328,9 +1136,149 @@
     </p:spTree>
     <p:extLst>
       <p:ext uri="{BB962C8B-B14F-4D97-AF65-F5344CB8AC3E}">
-        <p14:creationId xmlns:p14="http://schemas.microsoft.com/office/powerpoint/2010/main" val="1249002980"/>
+        <p14:creationId xmlns:p14="http://schemas.microsoft.com/office/powerpoint/2010/main" val="2075072537"/>
       </p:ext>
     </p:extLst>
+  </p:cSld>
+  <p:clrMapOvr>
+    <a:masterClrMapping/>
+  </p:clrMapOvr>
+</p:notes>
+</file>
+
+<file path=ppt/notesSlides/notesSlide8.xml><?xml version="1.0" encoding="utf-8"?>
+<p:notes xmlns:a="http://schemas.openxmlformats.org/drawingml/2006/main" xmlns:r="http://schemas.openxmlformats.org/officeDocument/2006/relationships" xmlns:p="http://schemas.openxmlformats.org/presentationml/2006/main">
+  <p:cSld>
+    <p:spTree>
+      <p:nvGrpSpPr>
+        <p:cNvPr id="1" name=""/>
+        <p:cNvGrpSpPr/>
+        <p:nvPr/>
+      </p:nvGrpSpPr>
+      <p:grpSpPr>
+        <a:xfrm>
+          <a:off x="0" y="0"/>
+          <a:ext cx="0" cy="0"/>
+          <a:chOff x="0" y="0"/>
+          <a:chExt cx="0" cy="0"/>
+        </a:xfrm>
+      </p:grpSpPr>
+      <p:sp>
+        <p:nvSpPr>
+          <p:cNvPr id="2" name="Slide Image Placeholder 1"/>
+          <p:cNvSpPr>
+            <a:spLocks noGrp="1" noRot="1" noChangeAspect="1"/>
+          </p:cNvSpPr>
+          <p:nvPr>
+            <p:ph type="sldImg" idx="2"/>
+          </p:nvPr>
+        </p:nvSpPr>
+        <p:spPr/>
+      </p:sp>
+      <p:sp>
+        <p:nvSpPr>
+          <p:cNvPr id="3" name="Notes Placeholder 2"/>
+          <p:cNvSpPr>
+            <a:spLocks noGrp="1"/>
+          </p:cNvSpPr>
+          <p:nvPr>
+            <p:ph type="body" sz="quarter" idx="3"/>
+          </p:nvPr>
+        </p:nvSpPr>
+        <p:spPr/>
+        <p:txBody>
+          <a:bodyPr/>
+          <a:lstStyle/>
+          <a:p>
+            <a:r>
+              <a:t>Be candid about difficulty. Novelty decay is the dominant risk and is why content administration matters. Bearer codes are mitigated, not ignored (cooldown, registry, audit trail). Leaderboard design counteracts demotivation. Architecture constraints (no app server, offline-first) and the evaluation boundaries are stated honestly.</a:t>
+            </a:r>
+          </a:p>
+        </p:txBody>
+      </p:sp>
+      <p:sp>
+        <p:nvSpPr>
+          <p:cNvPr id="4" name="Slide Number Placeholder 3"/>
+          <p:cNvSpPr>
+            <a:spLocks noGrp="1"/>
+          </p:cNvSpPr>
+          <p:nvPr>
+            <p:ph type="sldNum" sz="quarter" idx="5"/>
+          </p:nvPr>
+        </p:nvSpPr>
+        <p:spPr/>
+      </p:sp>
+    </p:spTree>
+  </p:cSld>
+  <p:clrMapOvr>
+    <a:masterClrMapping/>
+  </p:clrMapOvr>
+</p:notes>
+</file>
+
+<file path=ppt/notesSlides/notesSlide9.xml><?xml version="1.0" encoding="utf-8"?>
+<p:notes xmlns:a="http://schemas.openxmlformats.org/drawingml/2006/main" xmlns:r="http://schemas.openxmlformats.org/officeDocument/2006/relationships" xmlns:p="http://schemas.openxmlformats.org/presentationml/2006/main">
+  <p:cSld>
+    <p:spTree>
+      <p:nvGrpSpPr>
+        <p:cNvPr id="1" name=""/>
+        <p:cNvGrpSpPr/>
+        <p:nvPr/>
+      </p:nvGrpSpPr>
+      <p:grpSpPr>
+        <a:xfrm>
+          <a:off x="0" y="0"/>
+          <a:ext cx="0" cy="0"/>
+          <a:chOff x="0" y="0"/>
+          <a:chExt cx="0" cy="0"/>
+        </a:xfrm>
+      </p:grpSpPr>
+      <p:sp>
+        <p:nvSpPr>
+          <p:cNvPr id="2" name="Slide Image Placeholder 1"/>
+          <p:cNvSpPr>
+            <a:spLocks noGrp="1" noRot="1" noChangeAspect="1"/>
+          </p:cNvSpPr>
+          <p:nvPr>
+            <p:ph type="sldImg" idx="2"/>
+          </p:nvPr>
+        </p:nvSpPr>
+        <p:spPr/>
+      </p:sp>
+      <p:sp>
+        <p:nvSpPr>
+          <p:cNvPr id="3" name="Notes Placeholder 2"/>
+          <p:cNvSpPr>
+            <a:spLocks noGrp="1"/>
+          </p:cNvSpPr>
+          <p:nvPr>
+            <p:ph type="body" sz="quarter" idx="3"/>
+          </p:nvPr>
+        </p:nvSpPr>
+        <p:spPr/>
+        <p:txBody>
+          <a:bodyPr/>
+          <a:lstStyle/>
+          <a:p>
+            <a:r>
+              <a:t>Conclusion: the six verified findings, each backed by Chapter Five - 29/29 routes, 9/9 end-to-end checks, fidelity 0.910, ~207 kB offline PWA, no high-severity usability defects, validated progression curve. Then the three recommendation audiences: practice, research, institutional policy.</a:t>
+            </a:r>
+          </a:p>
+        </p:txBody>
+      </p:sp>
+      <p:sp>
+        <p:nvSpPr>
+          <p:cNvPr id="4" name="Slide Number Placeholder 3"/>
+          <p:cNvSpPr>
+            <a:spLocks noGrp="1"/>
+          </p:cNvSpPr>
+          <p:nvPr>
+            <p:ph type="sldNum" sz="quarter" idx="5"/>
+          </p:nvPr>
+        </p:nvSpPr>
+        <p:spPr/>
+      </p:sp>
+    </p:spTree>
   </p:cSld>
   <p:clrMapOvr>
     <a:masterClrMapping/>
@@ -2485,7 +1433,7 @@
           <a:p>
             <a:fld id="{F10901DB-E840-4150-8207-866BDD25D22F}" type="datetimeFigureOut">
               <a:rPr lang="en-US" smtClean="0"/>
-              <a:t>9/15/2025</a:t>
+              <a:t>10/7/2026</a:t>
             </a:fld>
             <a:endParaRPr lang="en-US"/>
           </a:p>
@@ -2683,7 +1631,7 @@
           <a:p>
             <a:fld id="{F10901DB-E840-4150-8207-866BDD25D22F}" type="datetimeFigureOut">
               <a:rPr lang="en-US" smtClean="0"/>
-              <a:t>9/15/2025</a:t>
+              <a:t>10/7/2026</a:t>
             </a:fld>
             <a:endParaRPr lang="en-US"/>
           </a:p>
@@ -2891,7 +1839,7 @@
           <a:p>
             <a:fld id="{F10901DB-E840-4150-8207-866BDD25D22F}" type="datetimeFigureOut">
               <a:rPr lang="en-US" smtClean="0"/>
-              <a:t>9/15/2025</a:t>
+              <a:t>10/7/2026</a:t>
             </a:fld>
             <a:endParaRPr lang="en-US"/>
           </a:p>
@@ -3165,7 +2113,7 @@
                 </a:spcAft>
                 <a:defRPr/>
               </a:pPr>
-              <a:t>9/15/2025</a:t>
+              <a:t>10/7/2026</a:t>
             </a:fld>
             <a:endParaRPr lang="en-US">
               <a:ea typeface="MS PGothic" panose="020B0600070205080204" pitchFamily="34" charset="-128"/>
@@ -3381,7 +2329,7 @@
                 </a:spcAft>
                 <a:defRPr/>
               </a:pPr>
-              <a:t>9/15/2025</a:t>
+              <a:t>10/7/2026</a:t>
             </a:fld>
             <a:endParaRPr lang="en-US">
               <a:ea typeface="MS PGothic" panose="020B0600070205080204" pitchFamily="34" charset="-128"/>
@@ -3674,7 +2622,7 @@
                 </a:spcAft>
                 <a:defRPr/>
               </a:pPr>
-              <a:t>9/15/2025</a:t>
+              <a:t>10/7/2026</a:t>
             </a:fld>
             <a:endParaRPr lang="en-US">
               <a:ea typeface="MS PGothic" panose="020B0600070205080204" pitchFamily="34" charset="-128"/>
@@ -4007,7 +2955,7 @@
                 </a:spcAft>
                 <a:defRPr/>
               </a:pPr>
-              <a:t>9/15/2025</a:t>
+              <a:t>10/7/2026</a:t>
             </a:fld>
             <a:endParaRPr lang="en-US">
               <a:ea typeface="MS PGothic" panose="020B0600070205080204" pitchFamily="34" charset="-128"/>
@@ -4474,7 +3422,7 @@
                 </a:spcAft>
                 <a:defRPr/>
               </a:pPr>
-              <a:t>9/15/2025</a:t>
+              <a:t>10/7/2026</a:t>
             </a:fld>
             <a:endParaRPr lang="en-US">
               <a:ea typeface="MS PGothic" panose="020B0600070205080204" pitchFamily="34" charset="-128"/>
@@ -4639,7 +3587,7 @@
                 </a:spcAft>
                 <a:defRPr/>
               </a:pPr>
-              <a:t>9/15/2025</a:t>
+              <a:t>10/7/2026</a:t>
             </a:fld>
             <a:endParaRPr lang="en-US">
               <a:ea typeface="MS PGothic" panose="020B0600070205080204" pitchFamily="34" charset="-128"/>
@@ -4781,7 +3729,7 @@
                 </a:spcAft>
                 <a:defRPr/>
               </a:pPr>
-              <a:t>9/15/2025</a:t>
+              <a:t>10/7/2026</a:t>
             </a:fld>
             <a:endParaRPr lang="en-US">
               <a:ea typeface="MS PGothic" panose="020B0600070205080204" pitchFamily="34" charset="-128"/>
@@ -5104,7 +4052,7 @@
                 </a:spcAft>
                 <a:defRPr/>
               </a:pPr>
-              <a:t>9/15/2025</a:t>
+              <a:t>10/7/2026</a:t>
             </a:fld>
             <a:endParaRPr lang="en-US">
               <a:ea typeface="MS PGothic" panose="020B0600070205080204" pitchFamily="34" charset="-128"/>
@@ -5317,7 +4265,7 @@
           <a:p>
             <a:fld id="{F10901DB-E840-4150-8207-866BDD25D22F}" type="datetimeFigureOut">
               <a:rPr lang="en-US" smtClean="0"/>
-              <a:t>9/15/2025</a:t>
+              <a:t>10/7/2026</a:t>
             </a:fld>
             <a:endParaRPr lang="en-US"/>
           </a:p>
@@ -5633,7 +4581,7 @@
                 </a:spcAft>
                 <a:defRPr/>
               </a:pPr>
-              <a:t>9/15/2025</a:t>
+              <a:t>10/7/2026</a:t>
             </a:fld>
             <a:endParaRPr lang="en-US">
               <a:ea typeface="MS PGothic" panose="020B0600070205080204" pitchFamily="34" charset="-128"/>
@@ -5849,7 +4797,7 @@
                 </a:spcAft>
                 <a:defRPr/>
               </a:pPr>
-              <a:t>9/15/2025</a:t>
+              <a:t>10/7/2026</a:t>
             </a:fld>
             <a:endParaRPr lang="en-US">
               <a:ea typeface="MS PGothic" panose="020B0600070205080204" pitchFamily="34" charset="-128"/>
@@ -6075,7 +5023,7 @@
                 </a:spcAft>
                 <a:defRPr/>
               </a:pPr>
-              <a:t>9/15/2025</a:t>
+              <a:t>10/7/2026</a:t>
             </a:fld>
             <a:endParaRPr lang="en-US">
               <a:ea typeface="MS PGothic" panose="020B0600070205080204" pitchFamily="34" charset="-128"/>
@@ -6365,7 +5313,7 @@
           <a:p>
             <a:fld id="{F10901DB-E840-4150-8207-866BDD25D22F}" type="datetimeFigureOut">
               <a:rPr lang="en-US" smtClean="0"/>
-              <a:t>9/15/2025</a:t>
+              <a:t>10/7/2026</a:t>
             </a:fld>
             <a:endParaRPr lang="en-US"/>
           </a:p>
@@ -6630,7 +5578,7 @@
           <a:p>
             <a:fld id="{F10901DB-E840-4150-8207-866BDD25D22F}" type="datetimeFigureOut">
               <a:rPr lang="en-US" smtClean="0"/>
-              <a:t>9/15/2025</a:t>
+              <a:t>10/7/2026</a:t>
             </a:fld>
             <a:endParaRPr lang="en-US"/>
           </a:p>
@@ -7042,7 +5990,7 @@
           <a:p>
             <a:fld id="{F10901DB-E840-4150-8207-866BDD25D22F}" type="datetimeFigureOut">
               <a:rPr lang="en-US" smtClean="0"/>
-              <a:t>9/15/2025</a:t>
+              <a:t>10/7/2026</a:t>
             </a:fld>
             <a:endParaRPr lang="en-US"/>
           </a:p>
@@ -7183,7 +6131,7 @@
           <a:p>
             <a:fld id="{F10901DB-E840-4150-8207-866BDD25D22F}" type="datetimeFigureOut">
               <a:rPr lang="en-US" smtClean="0"/>
-              <a:t>9/15/2025</a:t>
+              <a:t>10/7/2026</a:t>
             </a:fld>
             <a:endParaRPr lang="en-US"/>
           </a:p>
@@ -7296,7 +6244,7 @@
           <a:p>
             <a:fld id="{F10901DB-E840-4150-8207-866BDD25D22F}" type="datetimeFigureOut">
               <a:rPr lang="en-US" smtClean="0"/>
-              <a:t>9/15/2025</a:t>
+              <a:t>10/7/2026</a:t>
             </a:fld>
             <a:endParaRPr lang="en-US"/>
           </a:p>
@@ -7607,7 +6555,7 @@
           <a:p>
             <a:fld id="{F10901DB-E840-4150-8207-866BDD25D22F}" type="datetimeFigureOut">
               <a:rPr lang="en-US" smtClean="0"/>
-              <a:t>9/15/2025</a:t>
+              <a:t>10/7/2026</a:t>
             </a:fld>
             <a:endParaRPr lang="en-US"/>
           </a:p>
@@ -7895,7 +6843,7 @@
           <a:p>
             <a:fld id="{F10901DB-E840-4150-8207-866BDD25D22F}" type="datetimeFigureOut">
               <a:rPr lang="en-US" smtClean="0"/>
-              <a:t>9/15/2025</a:t>
+              <a:t>10/7/2026</a:t>
             </a:fld>
             <a:endParaRPr lang="en-US"/>
           </a:p>
@@ -8136,7 +7084,7 @@
           <a:p>
             <a:fld id="{F10901DB-E840-4150-8207-866BDD25D22F}" type="datetimeFigureOut">
               <a:rPr lang="en-US" smtClean="0"/>
-              <a:t>9/15/2025</a:t>
+              <a:t>10/7/2026</a:t>
             </a:fld>
             <a:endParaRPr lang="en-US"/>
           </a:p>
@@ -8715,7 +7663,7 @@
                 </a:spcAft>
                 <a:defRPr/>
               </a:pPr>
-              <a:t>9/15/2025</a:t>
+              <a:t>10/7/2026</a:t>
             </a:fld>
             <a:endParaRPr lang="en-US">
               <a:ea typeface="MS PGothic" panose="020B0600070205080204" pitchFamily="34" charset="-128"/>
@@ -9318,27 +8266,6 @@
             </a:endParaRPr>
           </a:p>
         </p:txBody>
-        <a:txBody>
-          <a:bodyPr/>
-          <a:lstStyle/>
-          <a:p>
-            <a:pPr>
-              <a:defRPr lang="en-US" sz="3600" dirty="0" typeface="Outfit" b="1">
-                <a:solidFill>
-                  <a:srgbClr val="1A1A1A"/>
-                </a:solidFill>
-              </a:defRPr>
-            </a:pPr>
-            <a:r>
-              <a:rPr lang="en-US" sz="3600" dirty="0" typeface="Outfit" b="1">
-                <a:solidFill>
-                  <a:srgbClr val="1A1A1A"/>
-                </a:solidFill>
-              </a:rPr>
-              <a:t xml:space="preserve">FINAL YEAR PROJECT PRESENTATION &amp; DEMO</a:t>
-            </a:r>
-          </a:p>
-        </a:txBody>
       </p:sp>
       <p:sp>
         <p:nvSpPr>
@@ -9352,27 +8279,33 @@
         </p:nvSpPr>
         <p:spPr>
           <a:xfrm>
-            <a:off x="1602658" y="1182329"/>
-            <a:ext cx="8738419" cy="3891116"/>
+            <a:off x="1600200" y="1042218"/>
+            <a:ext cx="8741664" cy="3895344"/>
           </a:xfrm>
         </p:spPr>
         <p:txBody>
           <a:bodyPr vert="horz" wrap="square" lIns="91440" tIns="45720" rIns="91440" bIns="45720" anchor="t" anchorCtr="0"/>
           <a:lstStyle/>
           <a:p>
-            <a:pPr eaLnBrk="1" hangingPunct="1">
-              <a:buClrTx/>
-              <a:buSzTx/>
+            <a:pPr marL="0" indent="0" algn="ctr" eaLnBrk="1" hangingPunct="1">
+              <a:lnSpc>
+                <a:spcPct val="105000"/>
+              </a:lnSpc>
+              <a:spcBef>
+                <a:spcPts val="0"/>
+              </a:spcBef>
+              <a:spcAft>
+                <a:spcPts val="0"/>
+              </a:spcAft>
+              <a:buNone/>
             </a:pPr>
             <a:r>
-              <a:rPr lang="en-US" b="1" dirty="0">
+              <a:rPr sz="4000" b="1" i="0" dirty="0" err="1">
                 <a:solidFill>
                   <a:schemeClr val="bg1"/>
                 </a:solidFill>
-                <a:latin typeface="Times New Roman" panose="02020603050405020304" pitchFamily="18" charset="0"/>
-                <a:cs typeface="Times New Roman" panose="02020603050405020304" pitchFamily="18" charset="0"/>
-              </a:rPr>
-              <a:t>PROJECT TITLE</a:t>
+              </a:rPr>
+              <a:t>CampusFit</a:t>
             </a:r>
             <a:endParaRPr lang="en-US" altLang="en-US" sz="2000" b="1" dirty="0">
               <a:solidFill>
@@ -9384,264 +8317,162 @@
             </a:endParaRPr>
           </a:p>
           <a:p>
-            <a:pPr eaLnBrk="1" hangingPunct="1">
-              <a:buClrTx/>
-              <a:buSzTx/>
+            <a:pPr marL="0" indent="0" algn="ctr">
+              <a:lnSpc>
+                <a:spcPct val="105000"/>
+              </a:lnSpc>
+              <a:spcBef>
+                <a:spcPts val="800"/>
+              </a:spcBef>
+              <a:spcAft>
+                <a:spcPts val="0"/>
+              </a:spcAft>
+              <a:buNone/>
             </a:pPr>
-            <a:endParaRPr lang="en-GB" sz="2000" b="1" noProof="0" dirty="0">
-              <a:solidFill>
-                <a:schemeClr val="bg1"/>
-              </a:solidFill>
-              <a:latin typeface="Times New Roman" panose="02020603050405020304" pitchFamily="18" charset="0"/>
-              <a:ea typeface="Times New Roman" panose="02020603050405020304" pitchFamily="18" charset="0"/>
-            </a:endParaRPr>
-          </a:p>
-          <a:p>
-            <a:pPr eaLnBrk="1" hangingPunct="1"/>
-            <a:r>
-              <a:rPr lang="en-GB" sz="2000" b="1" dirty="0">
-                <a:solidFill>
-                  <a:schemeClr val="bg1"/>
-                </a:solidFill>
-                <a:latin typeface="Times New Roman" panose="02020603050405020304" pitchFamily="18" charset="0"/>
-                <a:ea typeface="Times New Roman" panose="02020603050405020304" pitchFamily="18" charset="0"/>
-              </a:rPr>
-              <a:t>NAME</a:t>
-            </a:r>
-          </a:p>
-          <a:p>
-            <a:pPr eaLnBrk="1" hangingPunct="1"/>
-            <a:r>
-              <a:rPr lang="en-GB" sz="2000" b="1" noProof="0" dirty="0">
-                <a:solidFill>
-                  <a:schemeClr val="bg1"/>
-                </a:solidFill>
-                <a:latin typeface="Times New Roman" panose="02020603050405020304" pitchFamily="18" charset="0"/>
-                <a:ea typeface="Times New Roman" panose="02020603050405020304" pitchFamily="18" charset="0"/>
-              </a:rPr>
-              <a:t>ID</a:t>
-            </a:r>
-          </a:p>
-          <a:p>
-            <a:pPr eaLnBrk="1" hangingPunct="1"/>
-            <a:endParaRPr lang="en-GB" sz="2000" b="1" noProof="0" dirty="0">
-              <a:solidFill>
-                <a:schemeClr val="bg1"/>
-              </a:solidFill>
-              <a:latin typeface="Times New Roman" panose="02020603050405020304" pitchFamily="18" charset="0"/>
-              <a:ea typeface="Times New Roman" panose="02020603050405020304" pitchFamily="18" charset="0"/>
-            </a:endParaRPr>
-          </a:p>
-          <a:p>
-            <a:pPr eaLnBrk="1" hangingPunct="1"/>
-            <a:r>
-              <a:rPr lang="en-GB" sz="1200" b="1" dirty="0">
-                <a:solidFill>
-                  <a:schemeClr val="bg1"/>
-                </a:solidFill>
-                <a:latin typeface="Times New Roman" panose="02020603050405020304" pitchFamily="18" charset="0"/>
-                <a:ea typeface="Times New Roman" panose="02020603050405020304" pitchFamily="18" charset="0"/>
-              </a:rPr>
-              <a:t>SUPERVISOR</a:t>
-            </a:r>
-            <a:r>
-              <a:rPr lang="en-GB" sz="1200" b="1">
-                <a:solidFill>
-                  <a:schemeClr val="bg1"/>
-                </a:solidFill>
-                <a:latin typeface="Times New Roman" panose="02020603050405020304" pitchFamily="18" charset="0"/>
-                <a:ea typeface="Times New Roman" panose="02020603050405020304" pitchFamily="18" charset="0"/>
-              </a:rPr>
-              <a:t>:             </a:t>
-            </a:r>
-            <a:r>
-              <a:rPr lang="en-GB" sz="1200" b="1" dirty="0">
-                <a:solidFill>
-                  <a:schemeClr val="bg1"/>
-                </a:solidFill>
-                <a:latin typeface="Times New Roman" panose="02020603050405020304" pitchFamily="18" charset="0"/>
-                <a:ea typeface="Times New Roman" panose="02020603050405020304" pitchFamily="18" charset="0"/>
-              </a:rPr>
-              <a:t>19</a:t>
-            </a:r>
-            <a:r>
-              <a:rPr lang="en-GB" sz="1200" b="1" baseline="30000" dirty="0">
-                <a:solidFill>
-                  <a:schemeClr val="bg1"/>
-                </a:solidFill>
-                <a:latin typeface="Times New Roman" panose="02020603050405020304" pitchFamily="18" charset="0"/>
-                <a:ea typeface="Times New Roman" panose="02020603050405020304" pitchFamily="18" charset="0"/>
-              </a:rPr>
-              <a:t>TH</a:t>
-            </a:r>
-            <a:r>
-              <a:rPr lang="en-GB" sz="1200" b="1" dirty="0">
-                <a:solidFill>
-                  <a:schemeClr val="bg1"/>
-                </a:solidFill>
-                <a:latin typeface="Times New Roman" panose="02020603050405020304" pitchFamily="18" charset="0"/>
-                <a:ea typeface="Times New Roman" panose="02020603050405020304" pitchFamily="18" charset="0"/>
-              </a:rPr>
-              <a:t> SEPTEMBER 2025</a:t>
-            </a:r>
-            <a:endParaRPr lang="en-GB" sz="1200" b="1" noProof="0" dirty="0">
-              <a:solidFill>
-                <a:schemeClr val="bg1"/>
-              </a:solidFill>
-              <a:latin typeface="Times New Roman" panose="02020603050405020304" pitchFamily="18" charset="0"/>
-              <a:ea typeface="Times New Roman" panose="02020603050405020304" pitchFamily="18" charset="0"/>
-            </a:endParaRPr>
-          </a:p>
-        </p:txBody>
-        <a:txBody>
-          <a:bodyPr/>
-          <a:lstStyle/>
-          <a:p>
-            <a:pPr>
-              <a:defRPr lang="en-US" sz="4800" dirty="0" typeface="Outfit" b="1">
-                <a:solidFill>
-                  <a:srgbClr val="2E7D32"/>
-                </a:solidFill>
-              </a:defRPr>
+            <a:r>
+              <a:rPr sz="1800" b="0" i="0" dirty="0">
+                <a:solidFill>
+                  <a:srgbClr val="FFFFFF"/>
+                </a:solidFill>
+              </a:rPr>
+              <a:t>A Gamified, Checkpoint-Based Campus Fitness Application</a:t>
+            </a:r>
+          </a:p>
+          <a:p>
+            <a:pPr marL="0" indent="0" algn="ctr">
+              <a:lnSpc>
+                <a:spcPct val="105000"/>
+              </a:lnSpc>
+              <a:spcBef>
+                <a:spcPts val="2400"/>
+              </a:spcBef>
+              <a:spcAft>
+                <a:spcPts val="0"/>
+              </a:spcAft>
+              <a:buNone/>
             </a:pPr>
             <a:r>
-              <a:rPr lang="en-US" sz="4800" dirty="0" typeface="Outfit" b="1">
-                <a:solidFill>
-                  <a:srgbClr val="2E7D32"/>
-                </a:solidFill>
-              </a:rPr>
-              <a:t xml:space="preserve">CampusFit</a:t>
-            </a:r>
-          </a:p>
-          <a:p>
-            <a:pPr>
-              <a:defRPr lang="en-US" sz="2400" dirty="0" typeface="Outfit">
-                <a:solidFill>
-                  <a:srgbClr val="555555"/>
-                </a:solidFill>
-              </a:defRPr>
+              <a:rPr lang="en-US" sz="1400" b="0" i="0" dirty="0">
+                <a:solidFill>
+                  <a:srgbClr val="FFFFFF"/>
+                </a:solidFill>
+              </a:rPr>
+              <a:t>NAMES:  Selorm and Brian</a:t>
+            </a:r>
+          </a:p>
+          <a:p>
+            <a:pPr marL="0" indent="0" algn="ctr">
+              <a:lnSpc>
+                <a:spcPct val="105000"/>
+              </a:lnSpc>
+              <a:spcBef>
+                <a:spcPts val="2400"/>
+              </a:spcBef>
+              <a:spcAft>
+                <a:spcPts val="0"/>
+              </a:spcAft>
+              <a:buNone/>
             </a:pPr>
             <a:r>
-              <a:rPr lang="en-US" sz="2400" dirty="0" typeface="Outfit">
-                <a:solidFill>
-                  <a:srgbClr val="555555"/>
-                </a:solidFill>
-              </a:rPr>
-              <a:t xml:space="preserve">A Gamified, Checkpoint-Based Campus Fitness Application</a:t>
-            </a:r>
-          </a:p>
-          <a:p>
-            <a:pPr>
-              <a:defRPr lang="en-US" sz="1400" dirty="0" typeface="Outfit"/>
+              <a:rPr sz="1400" b="0" i="0" dirty="0">
+                <a:solidFill>
+                  <a:srgbClr val="FFFFFF"/>
+                </a:solidFill>
+              </a:rPr>
+              <a:t>SUPERVISOR:  Dr. </a:t>
+            </a:r>
+            <a:r>
+              <a:rPr lang="en-US" sz="1400" b="0" i="0">
+                <a:solidFill>
+                  <a:srgbClr val="FFFFFF"/>
+                </a:solidFill>
+              </a:rPr>
+              <a:t>Edward-</a:t>
+            </a:r>
+            <a:r>
+              <a:rPr lang="en-US" sz="1400">
+                <a:solidFill>
+                  <a:srgbClr val="FFFFFF"/>
+                </a:solidFill>
+              </a:rPr>
+              <a:t>Danso </a:t>
+            </a:r>
+            <a:r>
+              <a:rPr lang="en-US" sz="1400" b="0" i="0" dirty="0">
+                <a:solidFill>
+                  <a:srgbClr val="FFFFFF"/>
+                </a:solidFill>
+              </a:rPr>
+              <a:t>Ansong </a:t>
+            </a:r>
+          </a:p>
+          <a:p>
+            <a:pPr marL="0" indent="0" algn="ctr">
+              <a:lnSpc>
+                <a:spcPct val="105000"/>
+              </a:lnSpc>
+              <a:spcBef>
+                <a:spcPts val="2400"/>
+              </a:spcBef>
+              <a:spcAft>
+                <a:spcPts val="0"/>
+              </a:spcAft>
+              <a:buNone/>
             </a:pPr>
             <a:r>
-              <a:rPr lang="en-US" sz="1400" dirty="0" typeface="Outfit"/>
-              <a:t xml:space="preserve"/>
-            </a:r>
-          </a:p>
-          <a:p>
-            <a:pPr>
-              <a:defRPr lang="en-US" sz="1800" dirty="0" typeface="Outfit">
-                <a:solidFill>
-                  <a:srgbClr val="333333"/>
-                </a:solidFill>
-              </a:defRPr>
+              <a:rPr sz="1300" b="0" i="0" dirty="0">
+                <a:solidFill>
+                  <a:srgbClr val="C9CFDA"/>
+                </a:solidFill>
+              </a:rPr>
+              <a:t>DEPARTMENT OF COMPUTER SCIENCE</a:t>
+            </a:r>
+          </a:p>
+          <a:p>
+            <a:pPr marL="0" indent="0" algn="ctr">
+              <a:lnSpc>
+                <a:spcPct val="105000"/>
+              </a:lnSpc>
+              <a:spcBef>
+                <a:spcPts val="200"/>
+              </a:spcBef>
+              <a:spcAft>
+                <a:spcPts val="0"/>
+              </a:spcAft>
+              <a:buNone/>
             </a:pPr>
             <a:r>
-              <a:rPr lang="en-US" sz="1800" dirty="0" typeface="Outfit">
-                <a:solidFill>
-                  <a:srgbClr val="333333"/>
-                </a:solidFill>
-              </a:rPr>
-              <a:t xml:space="preserve">NAME: Daniel Ntiawuku</a:t>
-            </a:r>
-          </a:p>
-          <a:p>
-            <a:pPr>
-              <a:defRPr lang="en-US" sz="1800" dirty="0" typeface="Outfit">
-                <a:solidFill>
-                  <a:srgbClr val="333333"/>
-                </a:solidFill>
-              </a:defRPr>
+              <a:rPr sz="1300" b="0" i="0" dirty="0">
+                <a:solidFill>
+                  <a:srgbClr val="C9CFDA"/>
+                </a:solidFill>
+              </a:rPr>
+              <a:t>UNIVERSITY OF GHANA</a:t>
+            </a:r>
+          </a:p>
+          <a:p>
+            <a:pPr marL="0" indent="0" algn="ctr">
+              <a:lnSpc>
+                <a:spcPct val="105000"/>
+              </a:lnSpc>
+              <a:spcBef>
+                <a:spcPts val="200"/>
+              </a:spcBef>
+              <a:spcAft>
+                <a:spcPts val="0"/>
+              </a:spcAft>
+              <a:buNone/>
             </a:pPr>
             <a:r>
-              <a:rPr lang="en-US" sz="1800" dirty="0" typeface="Outfit">
-                <a:solidFill>
-                  <a:srgbClr val="333333"/>
-                </a:solidFill>
-              </a:rPr>
-              <a:t xml:space="preserve">REG: 2201234567</a:t>
-            </a:r>
-          </a:p>
-          <a:p>
-            <a:pPr>
-              <a:defRPr lang="en-US" sz="1800" dirty="0" typeface="Outfit">
-                <a:solidFill>
-                  <a:srgbClr val="333333"/>
-                </a:solidFill>
-              </a:defRPr>
-            </a:pPr>
-            <a:r>
-              <a:rPr lang="en-US" sz="1800" dirty="0" typeface="Outfit">
-                <a:solidFill>
-                  <a:srgbClr val="333333"/>
-                </a:solidFill>
-              </a:rPr>
-              <a:t xml:space="preserve">SUPERVISOR: Dr. [Supervisor Name]</a:t>
-            </a:r>
-          </a:p>
-          <a:p>
-            <a:pPr>
-              <a:defRPr lang="en-US" sz="1800" dirty="0" typeface="Outfit">
-                <a:solidFill>
-                  <a:srgbClr val="333333"/>
-                </a:solidFill>
-              </a:defRPr>
-            </a:pPr>
-            <a:r>
-              <a:rPr lang="en-US" sz="1800" dirty="0" typeface="Outfit">
-                <a:solidFill>
-                  <a:srgbClr val="333333"/>
-                </a:solidFill>
-              </a:rPr>
-              <a:t xml:space="preserve">DEPARTMENT: Computer Science / Software Engineering</a:t>
-            </a:r>
-          </a:p>
-          <a:p>
-            <a:pPr>
-              <a:defRPr lang="en-US" sz="1800" dirty="0" typeface="Outfit">
-                <a:solidFill>
-                  <a:srgbClr val="333333"/>
-                </a:solidFill>
-              </a:defRPr>
-            </a:pPr>
-            <a:r>
-              <a:rPr lang="en-US" sz="1800" dirty="0" typeface="Outfit">
-                <a:solidFill>
-                  <a:srgbClr val="333333"/>
-                </a:solidFill>
-              </a:rPr>
-              <a:t xml:space="preserve">UNIVERSITY OF GHANA</a:t>
-            </a:r>
-          </a:p>
-          <a:p>
-            <a:pPr>
-              <a:defRPr lang="en-US" sz="1600" dirty="0" typeface="Outfit">
-                <a:solidFill>
-                  <a:srgbClr val="666666"/>
-                </a:solidFill>
-              </a:defRPr>
-            </a:pPr>
-            <a:r>
-              <a:rPr lang="en-US" sz="1600" dirty="0" typeface="Outfit">
-                <a:solidFill>
-                  <a:srgbClr val="666666"/>
-                </a:solidFill>
-              </a:rPr>
-              <a:t xml:space="preserve">October 2026</a:t>
-            </a:r>
-          </a:p>
-        </a:txBody>
+              <a:rPr sz="1300" b="0" i="0" dirty="0">
+                <a:solidFill>
+                  <a:srgbClr val="C9CFDA"/>
+                </a:solidFill>
+              </a:rPr>
+              <a:t>OCTOBER 2026</a:t>
+            </a:r>
+          </a:p>
+        </p:txBody>
       </p:sp>
       <p:sp>
         <p:nvSpPr>
@@ -9681,7 +8512,7 @@
                 </a:spcAft>
                 <a:defRPr/>
               </a:pPr>
-              <a:t>9/15/2025</a:t>
+              <a:t>10/7/2026</a:t>
             </a:fld>
             <a:endParaRPr lang="en-US">
               <a:latin typeface="Calibri" panose="020F0502020204030204" pitchFamily="34" charset="0"/>
@@ -9743,6 +8574,367 @@
         <p14:creationId xmlns:p14="http://schemas.microsoft.com/office/powerpoint/2010/main" val="588157944"/>
       </p:ext>
     </p:extLst>
+  </p:cSld>
+  <p:clrMapOvr>
+    <a:masterClrMapping/>
+  </p:clrMapOvr>
+</p:sld>
+</file>
+
+<file path=ppt/slides/slide10.xml><?xml version="1.0" encoding="utf-8"?>
+<p:sld xmlns:a="http://schemas.openxmlformats.org/drawingml/2006/main" xmlns:r="http://schemas.openxmlformats.org/officeDocument/2006/relationships" xmlns:p="http://schemas.openxmlformats.org/presentationml/2006/main">
+  <p:cSld>
+    <p:spTree>
+      <p:nvGrpSpPr>
+        <p:cNvPr id="1" name=""/>
+        <p:cNvGrpSpPr/>
+        <p:nvPr/>
+      </p:nvGrpSpPr>
+      <p:grpSpPr>
+        <a:xfrm>
+          <a:off x="0" y="0"/>
+          <a:ext cx="0" cy="0"/>
+          <a:chOff x="0" y="0"/>
+          <a:chExt cx="0" cy="0"/>
+        </a:xfrm>
+      </p:grpSpPr>
+      <p:sp>
+        <p:nvSpPr>
+          <p:cNvPr id="3074" name="Title 1"/>
+          <p:cNvSpPr>
+            <a:spLocks noGrp="1"/>
+          </p:cNvSpPr>
+          <p:nvPr>
+            <p:ph type="ctrTitle"/>
+          </p:nvPr>
+        </p:nvSpPr>
+        <p:spPr>
+          <a:xfrm>
+            <a:off x="2209800" y="152399"/>
+            <a:ext cx="7772400" cy="889819"/>
+          </a:xfrm>
+        </p:spPr>
+        <p:txBody>
+          <a:bodyPr vert="horz" wrap="square" lIns="91440" tIns="45720" rIns="91440" bIns="45720" anchor="ctr" anchorCtr="0"/>
+          <a:lstStyle/>
+          <a:p>
+            <a:pPr eaLnBrk="1" hangingPunct="1"/>
+            <a:r>
+              <a:rPr lang="en-US" sz="2000" b="1" dirty="0">
+                <a:solidFill>
+                  <a:schemeClr val="bg1"/>
+                </a:solidFill>
+                <a:latin typeface="Times New Roman" panose="02020603050405020304" pitchFamily="18" charset="0"/>
+                <a:ea typeface="Times New Roman" panose="02020603050405020304" pitchFamily="18" charset="0"/>
+              </a:rPr>
+              <a:t>DEMO VIDEO</a:t>
+            </a:r>
+            <a:br>
+              <a:rPr lang="en-GB" sz="2000" b="1" dirty="0">
+                <a:solidFill>
+                  <a:schemeClr val="bg1"/>
+                </a:solidFill>
+                <a:latin typeface="Times New Roman" panose="02020603050405020304" pitchFamily="18" charset="0"/>
+                <a:ea typeface="Times New Roman" panose="02020603050405020304" pitchFamily="18" charset="0"/>
+              </a:rPr>
+            </a:br>
+            <a:endParaRPr lang="en-US" altLang="en-US" sz="2000" b="1" dirty="0">
+              <a:solidFill>
+                <a:schemeClr val="bg1"/>
+              </a:solidFill>
+              <a:latin typeface="Times New Roman" panose="02020603050405020304" pitchFamily="18" charset="0"/>
+              <a:ea typeface="Times New Roman" panose="02020603050405020304" pitchFamily="18" charset="0"/>
+            </a:endParaRPr>
+          </a:p>
+        </p:txBody>
+      </p:sp>
+      <p:sp>
+        <p:nvSpPr>
+          <p:cNvPr id="3075" name="Subtitle 2"/>
+          <p:cNvSpPr>
+            <a:spLocks noGrp="1"/>
+          </p:cNvSpPr>
+          <p:nvPr>
+            <p:ph type="subTitle" idx="1"/>
+          </p:nvPr>
+        </p:nvSpPr>
+        <p:spPr>
+          <a:xfrm>
+            <a:off x="1602658" y="1182329"/>
+            <a:ext cx="8738419" cy="3891116"/>
+          </a:xfrm>
+        </p:spPr>
+        <p:txBody>
+          <a:bodyPr vert="horz" wrap="square" lIns="91440" tIns="45720" rIns="91440" bIns="45720" anchor="t" anchorCtr="0"/>
+          <a:lstStyle/>
+          <a:p>
+            <a:pPr eaLnBrk="1" hangingPunct="1">
+              <a:buClrTx/>
+              <a:buSzTx/>
+            </a:pPr>
+            <a:endParaRPr lang="en-US" altLang="en-US" sz="2000" b="1" dirty="0">
+              <a:solidFill>
+                <a:schemeClr val="bg1"/>
+              </a:solidFill>
+              <a:latin typeface="Times New Roman" panose="02020603050405020304" pitchFamily="18" charset="0"/>
+              <a:ea typeface="Times New Roman" panose="02020603050405020304" pitchFamily="18" charset="0"/>
+              <a:cs typeface="Times New Roman" panose="02020603050405020304" pitchFamily="18" charset="0"/>
+            </a:endParaRPr>
+          </a:p>
+        </p:txBody>
+      </p:sp>
+      <p:sp>
+        <p:nvSpPr>
+          <p:cNvPr id="2" name="Date Placeholder 1"/>
+          <p:cNvSpPr>
+            <a:spLocks noGrp="1"/>
+          </p:cNvSpPr>
+          <p:nvPr>
+            <p:ph type="dt" sz="half" idx="10"/>
+          </p:nvPr>
+        </p:nvSpPr>
+        <p:spPr/>
+        <p:txBody>
+          <a:bodyPr/>
+          <a:lstStyle/>
+          <a:p>
+            <a:pPr fontAlgn="base">
+              <a:spcBef>
+                <a:spcPct val="0"/>
+              </a:spcBef>
+              <a:spcAft>
+                <a:spcPct val="0"/>
+              </a:spcAft>
+              <a:defRPr/>
+            </a:pPr>
+            <a:fld id="{CBB6B13C-08B2-4F48-BEC8-EC2633766FDF}" type="datetime1">
+              <a:rPr lang="en-US">
+                <a:latin typeface="Calibri" panose="020F0502020204030204" pitchFamily="34" charset="0"/>
+                <a:ea typeface="MS PGothic" panose="020B0600070205080204" pitchFamily="34" charset="-128"/>
+              </a:rPr>
+              <a:pPr fontAlgn="base">
+                <a:spcBef>
+                  <a:spcPct val="0"/>
+                </a:spcBef>
+                <a:spcAft>
+                  <a:spcPct val="0"/>
+                </a:spcAft>
+                <a:defRPr/>
+              </a:pPr>
+              <a:t>10/7/2026</a:t>
+            </a:fld>
+            <a:endParaRPr lang="en-US">
+              <a:latin typeface="Calibri" panose="020F0502020204030204" pitchFamily="34" charset="0"/>
+              <a:ea typeface="MS PGothic" panose="020B0600070205080204" pitchFamily="34" charset="-128"/>
+            </a:endParaRPr>
+          </a:p>
+        </p:txBody>
+      </p:sp>
+      <p:sp>
+        <p:nvSpPr>
+          <p:cNvPr id="4" name="Slide Number Placeholder 3"/>
+          <p:cNvSpPr>
+            <a:spLocks noGrp="1"/>
+          </p:cNvSpPr>
+          <p:nvPr>
+            <p:ph type="sldNum" sz="quarter" idx="12"/>
+          </p:nvPr>
+        </p:nvSpPr>
+        <p:spPr/>
+        <p:txBody>
+          <a:bodyPr/>
+          <a:lstStyle/>
+          <a:p>
+            <a:pPr fontAlgn="base">
+              <a:spcBef>
+                <a:spcPct val="0"/>
+              </a:spcBef>
+              <a:spcAft>
+                <a:spcPct val="0"/>
+              </a:spcAft>
+              <a:defRPr/>
+            </a:pPr>
+            <a:fld id="{B724CBE9-E6DE-4AAC-8453-7697DD7A6035}" type="slidenum">
+              <a:rPr lang="en-US" altLang="en-US">
+                <a:latin typeface="Calibri" panose="020F0502020204030204" pitchFamily="34" charset="0"/>
+                <a:ea typeface="MS PGothic" panose="020B0600070205080204" pitchFamily="34" charset="-128"/>
+              </a:rPr>
+              <a:pPr fontAlgn="base">
+                <a:spcBef>
+                  <a:spcPct val="0"/>
+                </a:spcBef>
+                <a:spcAft>
+                  <a:spcPct val="0"/>
+                </a:spcAft>
+                <a:defRPr/>
+              </a:pPr>
+              <a:t>10</a:t>
+            </a:fld>
+            <a:endParaRPr lang="en-US" altLang="en-US" dirty="0">
+              <a:latin typeface="Calibri" panose="020F0502020204030204" pitchFamily="34" charset="0"/>
+              <a:ea typeface="MS PGothic" panose="020B0600070205080204" pitchFamily="34" charset="-128"/>
+            </a:endParaRPr>
+          </a:p>
+        </p:txBody>
+      </p:sp>
+      <p:sp>
+        <p:nvSpPr>
+          <p:cNvPr id="3076" name="Rounded Rectangle 3075"/>
+          <p:cNvSpPr/>
+          <p:nvPr/>
+        </p:nvSpPr>
+        <p:spPr>
+          <a:xfrm>
+            <a:off x="2116983" y="1182329"/>
+            <a:ext cx="7315200" cy="4069080"/>
+          </a:xfrm>
+          <a:prstGeom prst="roundRect">
+            <a:avLst>
+              <a:gd name="adj" fmla="val 6000"/>
+            </a:avLst>
+          </a:prstGeom>
+          <a:solidFill>
+            <a:srgbClr val="FAF5EE"/>
+          </a:solidFill>
+          <a:ln w="22225">
+            <a:solidFill>
+              <a:srgbClr val="1ECC8B"/>
+            </a:solidFill>
+            <a:prstDash val="dash"/>
+          </a:ln>
+          <a:effectLst/>
+        </p:spPr>
+        <p:style>
+          <a:lnRef idx="1">
+            <a:schemeClr val="accent1"/>
+          </a:lnRef>
+          <a:fillRef idx="3">
+            <a:schemeClr val="accent1"/>
+          </a:fillRef>
+          <a:effectRef idx="2">
+            <a:schemeClr val="accent1"/>
+          </a:effectRef>
+          <a:fontRef idx="minor">
+            <a:schemeClr val="lt1"/>
+          </a:fontRef>
+        </p:style>
+        <p:txBody>
+          <a:bodyPr wrap="square" lIns="73152" tIns="27432" rIns="73152" bIns="27432" rtlCol="0" anchor="ctr"/>
+          <a:lstStyle/>
+          <a:p>
+            <a:pPr marL="0" indent="0" algn="ctr">
+              <a:lnSpc>
+                <a:spcPct val="100000"/>
+              </a:lnSpc>
+              <a:spcBef>
+                <a:spcPts val="0"/>
+              </a:spcBef>
+              <a:spcAft>
+                <a:spcPts val="1000"/>
+              </a:spcAft>
+              <a:buNone/>
+            </a:pPr>
+            <a:r>
+              <a:rPr sz="3000" b="1" i="0" dirty="0">
+                <a:solidFill>
+                  <a:srgbClr val="17795E"/>
+                </a:solidFill>
+              </a:rPr>
+              <a:t>▶  DEMO VIDEO</a:t>
+            </a:r>
+          </a:p>
+          <a:p>
+            <a:pPr marL="0" indent="0" algn="ctr">
+              <a:lnSpc>
+                <a:spcPct val="100000"/>
+              </a:lnSpc>
+              <a:spcBef>
+                <a:spcPts val="0"/>
+              </a:spcBef>
+              <a:spcAft>
+                <a:spcPts val="0"/>
+              </a:spcAft>
+              <a:buNone/>
+            </a:pPr>
+            <a:r>
+              <a:rPr sz="1400" b="0" i="0" dirty="0">
+                <a:solidFill>
+                  <a:srgbClr val="5A5A5A"/>
+                </a:solidFill>
+              </a:rPr>
+              <a:t>Reserved for the demo — insert the video here</a:t>
+            </a:r>
+          </a:p>
+          <a:p>
+            <a:pPr marL="0" indent="0" algn="ctr">
+              <a:lnSpc>
+                <a:spcPct val="100000"/>
+              </a:lnSpc>
+              <a:spcBef>
+                <a:spcPts val="600"/>
+              </a:spcBef>
+              <a:spcAft>
+                <a:spcPts val="0"/>
+              </a:spcAft>
+              <a:buNone/>
+            </a:pPr>
+            <a:r>
+              <a:rPr sz="1150" b="0" i="0" dirty="0">
+                <a:solidFill>
+                  <a:srgbClr val="5A5A5A"/>
+                </a:solidFill>
+              </a:rPr>
+              <a:t>(Insert → Video → This device)</a:t>
+            </a:r>
+          </a:p>
+        </p:txBody>
+      </p:sp>
+      <p:sp>
+        <p:nvSpPr>
+          <p:cNvPr id="3077" name="TextBox 3076"/>
+          <p:cNvSpPr txBox="1"/>
+          <p:nvPr/>
+        </p:nvSpPr>
+        <p:spPr>
+          <a:xfrm>
+            <a:off x="822960" y="5532120"/>
+            <a:ext cx="10515600" cy="548640"/>
+          </a:xfrm>
+          <a:prstGeom prst="rect">
+            <a:avLst/>
+          </a:prstGeom>
+          <a:noFill/>
+        </p:spPr>
+        <p:txBody>
+          <a:bodyPr wrap="square" lIns="0" tIns="27432" rIns="0" bIns="27432" anchor="t">
+            <a:spAutoFit/>
+          </a:bodyPr>
+          <a:lstStyle/>
+          <a:p>
+            <a:pPr marL="0" indent="0" algn="ctr">
+              <a:lnSpc>
+                <a:spcPct val="100000"/>
+              </a:lnSpc>
+              <a:spcBef>
+                <a:spcPts val="0"/>
+              </a:spcBef>
+              <a:spcAft>
+                <a:spcPts val="0"/>
+              </a:spcAft>
+              <a:buNone/>
+            </a:pPr>
+            <a:r>
+              <a:rPr sz="1300" b="0" i="0">
+                <a:solidFill>
+                  <a:srgbClr val="5A5A5A"/>
+                </a:solidFill>
+              </a:rPr>
+              <a:t>Walkthrough: sign-up &amp; OTP → dashboard → scan LIB-A1 → points, streak &amp; badges → weekly leaderboard → FitTrips &amp; FitClips → admin dashboard</a:t>
+            </a:r>
+          </a:p>
+        </p:txBody>
+      </p:sp>
+    </p:spTree>
   </p:cSld>
   <p:clrMapOvr>
     <a:masterClrMapping/>
@@ -9791,268 +8983,190 @@
                 <a:ea typeface="Times New Roman" panose="02020603050405020304" pitchFamily="18" charset="0"/>
                 <a:sym typeface="+mn-ea"/>
               </a:rPr>
-              <a:t>OUTLINE OF  PRESENTATION</a:t>
+              <a:t>Introduction</a:t>
             </a:r>
             <a:endParaRPr lang="en-US" dirty="0"/>
           </a:p>
         </p:txBody>
-        <a:txBody>
-          <a:bodyPr/>
-          <a:lstStyle/>
-          <a:p>
-            <a:pPr>
-              <a:defRPr lang="en-US" sz="3600" dirty="0" typeface="Outfit" b="1">
+      </p:sp>
+      <p:sp>
+        <p:nvSpPr>
+          <p:cNvPr id="3" name="Content Placeholder 2"/>
+          <p:cNvSpPr>
+            <a:spLocks noGrp="1"/>
+          </p:cNvSpPr>
+          <p:nvPr>
+            <p:ph idx="1"/>
+          </p:nvPr>
+        </p:nvSpPr>
+        <p:spPr>
+          <a:xfrm>
+            <a:off x="612648" y="1600200"/>
+            <a:ext cx="10972800" cy="4526280"/>
+          </a:xfrm>
+        </p:spPr>
+        <p:txBody>
+          <a:bodyPr wrap="square"/>
+          <a:lstStyle/>
+          <a:p>
+            <a:pPr marL="342900" indent="-342900" algn="l">
+              <a:lnSpc>
+                <a:spcPct val="100000"/>
+              </a:lnSpc>
+              <a:spcBef>
+                <a:spcPts val="600"/>
+              </a:spcBef>
+              <a:spcAft>
+                <a:spcPts val="0"/>
+              </a:spcAft>
+              <a:buFont typeface="Arial"/>
+              <a:buChar char="•"/>
+            </a:pPr>
+            <a:r>
+              <a:rPr sz="2000" b="0" i="0" dirty="0">
                 <a:solidFill>
                   <a:srgbClr val="1A1A1A"/>
                 </a:solidFill>
-              </a:defRPr>
-            </a:pPr>
-            <a:r>
-              <a:rPr lang="en-US" sz="3600" dirty="0" typeface="Outfit" b="1">
-                <a:solidFill>
-                  <a:srgbClr val="1A1A1A"/>
-                </a:solidFill>
-              </a:rPr>
-              <a:t xml:space="preserve">Outline of Presentation</a:t>
-            </a:r>
-          </a:p>
-        </a:txBody>
-      </p:sp>
-      <p:sp>
-        <p:nvSpPr>
-          <p:cNvPr id="3" name="Content Placeholder 2"/>
-          <p:cNvSpPr>
-            <a:spLocks noGrp="1"/>
-          </p:cNvSpPr>
-          <p:nvPr>
-            <p:ph idx="1"/>
-          </p:nvPr>
-        </p:nvSpPr>
-        <p:spPr/>
-        <p:txBody>
-          <a:bodyPr/>
-          <a:lstStyle/>
-          <a:p>
-            <a:endParaRPr lang="en-US" sz="2400" dirty="0">
+              </a:rPr>
+              <a:t>Physical inactivity among university students is rising — sedentary academic routines, prolonged screen time and weak exercise habits (Edelmann et al., 2022).</a:t>
+            </a:r>
+            <a:endParaRPr lang="en-US" sz="3600" dirty="0">
               <a:latin typeface="Times New Roman" panose="02020603050405020304" pitchFamily="18" charset="0"/>
               <a:cs typeface="Times New Roman" panose="02020603050405020304" pitchFamily="18" charset="0"/>
             </a:endParaRPr>
           </a:p>
-        </p:txBody>
-        <a:txBody>
-          <a:bodyPr/>
-          <a:lstStyle/>
-          <a:p>
-            <a:pPr marL="342900" indent="-342900">
+          <a:p>
+            <a:pPr marL="342900" indent="-342900" algn="l">
+              <a:lnSpc>
+                <a:spcPct val="100000"/>
+              </a:lnSpc>
+              <a:spcBef>
+                <a:spcPts val="600"/>
+              </a:spcBef>
+              <a:spcAft>
+                <a:spcPts val="0"/>
+              </a:spcAft>
               <a:buFont typeface="Arial"/>
-              <a:buAutoNum type="arabicPeriod"/>
-              <a:defRPr lang="en-US" sz="1400" typeface="Outfit" dirty="0">
+              <a:buChar char="•"/>
+            </a:pPr>
+            <a:r>
+              <a:rPr sz="2000" b="0" i="0" dirty="0">
                 <a:solidFill>
                   <a:srgbClr val="1A1A1A"/>
                 </a:solidFill>
-              </a:defRPr>
+              </a:rPr>
+              <a:t>Activity improves concentration, memory, mental health and resilience; the WHO advises regular moderate activity every week (Loprinzi, 2019; WHO, 2020).</a:t>
+            </a:r>
+          </a:p>
+          <a:p>
+            <a:pPr marL="342900" indent="-342900" algn="l">
+              <a:lnSpc>
+                <a:spcPct val="100000"/>
+              </a:lnSpc>
+              <a:spcBef>
+                <a:spcPts val="600"/>
+              </a:spcBef>
+              <a:spcAft>
+                <a:spcPts val="0"/>
+              </a:spcAft>
+              <a:buFont typeface="Arial"/>
+              <a:buChar char="•"/>
             </a:pPr>
             <a:r>
-              <a:rPr lang="en-US" sz="1400" typeface="Outfit" dirty="0">
+              <a:rPr sz="2000" b="0" i="0" dirty="0">
                 <a:solidFill>
                   <a:srgbClr val="1A1A1A"/>
                 </a:solidFill>
               </a:rPr>
-            </a:r>
-            <a:r>
-              <a:rPr lang="en-US" sz="1400" typeface="Arial" color="1A1A1A"/>
-              <a:t xml:space="preserve">1. </a:t>
-            </a:r>
-            <a:r>
-              <a:rPr lang="en-US" sz="1400" typeface="Outfit" dirty="0">
+              <a:t>Students report low motivation, weak accountability, time pressure and few engaging campus-based options (</a:t>
+            </a:r>
+            <a:r>
+              <a:rPr sz="2000" b="0" i="0" dirty="0" err="1">
                 <a:solidFill>
                   <a:srgbClr val="1A1A1A"/>
                 </a:solidFill>
               </a:rPr>
-              <a:t xml:space="preserve">Problem and motivation</a:t>
-            </a:r>
-          </a:p>
-          <a:p>
-            <a:pPr marL="342900" indent="-342900">
+              <a:t>Alkhawaldeh</a:t>
+            </a:r>
+            <a:r>
+              <a:rPr sz="2000" b="0" i="0" dirty="0">
+                <a:solidFill>
+                  <a:srgbClr val="1A1A1A"/>
+                </a:solidFill>
+              </a:rPr>
+              <a:t> et al., 2024).</a:t>
+            </a:r>
+          </a:p>
+          <a:p>
+            <a:pPr marL="342900" indent="-342900" algn="l">
+              <a:lnSpc>
+                <a:spcPct val="100000"/>
+              </a:lnSpc>
+              <a:spcBef>
+                <a:spcPts val="600"/>
+              </a:spcBef>
+              <a:spcAft>
+                <a:spcPts val="0"/>
+              </a:spcAft>
               <a:buFont typeface="Arial"/>
-              <a:buAutoNum type="arabicPeriod"/>
-              <a:defRPr lang="en-US" sz="1400" typeface="Outfit" dirty="0">
+              <a:buChar char="•"/>
+            </a:pPr>
+            <a:r>
+              <a:rPr sz="2000" b="0" i="0" dirty="0">
                 <a:solidFill>
                   <a:srgbClr val="1A1A1A"/>
                 </a:solidFill>
-              </a:defRPr>
+              </a:rPr>
+              <a:t>Institutional responses are push-based (inductions, campaigns); commercial fitness apps are context-blind — neither fits campus life.</a:t>
+            </a:r>
+          </a:p>
+          <a:p>
+            <a:pPr marL="342900" indent="-342900" algn="l">
+              <a:lnSpc>
+                <a:spcPct val="100000"/>
+              </a:lnSpc>
+              <a:spcBef>
+                <a:spcPts val="600"/>
+              </a:spcBef>
+              <a:spcAft>
+                <a:spcPts val="0"/>
+              </a:spcAft>
+              <a:buFont typeface="Arial"/>
+              <a:buChar char="•"/>
             </a:pPr>
             <a:r>
-              <a:rPr lang="en-US" sz="1400" typeface="Outfit" dirty="0">
+              <a:rPr sz="2000" b="0" i="0" dirty="0">
                 <a:solidFill>
                   <a:srgbClr val="1A1A1A"/>
                 </a:solidFill>
               </a:rPr>
-            </a:r>
-            <a:r>
-              <a:rPr lang="en-US" sz="1400" typeface="Arial" color="1A1A1A"/>
-              <a:t xml:space="preserve">2. </a:t>
-            </a:r>
-            <a:r>
-              <a:rPr lang="en-US" sz="1400" typeface="Outfit" dirty="0">
-                <a:solidFill>
-                  <a:srgbClr val="1A1A1A"/>
-                </a:solidFill>
-              </a:rPr>
-              <a:t xml:space="preserve">Research aim, questions and objectives</a:t>
-            </a:r>
-          </a:p>
-          <a:p>
-            <a:pPr marL="342900" indent="-342900">
+              <a:t>Gamification (points, badges, leaderboards) increases engagement, but effects are heterogeneous and design-dependent (Hamari et al., 2014).</a:t>
+            </a:r>
+          </a:p>
+          <a:p>
+            <a:pPr marL="342900" indent="-342900" algn="l">
+              <a:lnSpc>
+                <a:spcPct val="100000"/>
+              </a:lnSpc>
+              <a:spcBef>
+                <a:spcPts val="1000"/>
+              </a:spcBef>
+              <a:spcAft>
+                <a:spcPts val="0"/>
+              </a:spcAft>
               <a:buFont typeface="Arial"/>
-              <a:buAutoNum type="arabicPeriod"/>
-              <a:defRPr lang="en-US" sz="1400" typeface="Outfit" dirty="0">
-                <a:solidFill>
-                  <a:srgbClr val="1A1A1A"/>
-                </a:solidFill>
-              </a:defRPr>
+              <a:buChar char="•"/>
             </a:pPr>
             <a:r>
-              <a:rPr lang="en-US" sz="1400" typeface="Outfit" dirty="0">
-                <a:solidFill>
-                  <a:srgbClr val="1A1A1A"/>
-                </a:solidFill>
-              </a:rPr>
-            </a:r>
-            <a:r>
-              <a:rPr lang="en-US" sz="1400" typeface="Arial" color="1A1A1A"/>
-              <a:t xml:space="preserve">3. </a:t>
-            </a:r>
-            <a:r>
-              <a:rPr lang="en-US" sz="1400" typeface="Outfit" dirty="0">
-                <a:solidFill>
-                  <a:srgbClr val="1A1A1A"/>
-                </a:solidFill>
-              </a:rPr>
-              <a:t xml:space="preserve">Literature and theoretical framework</a:t>
-            </a:r>
-          </a:p>
-          <a:p>
-            <a:pPr marL="342900" indent="-342900">
-              <a:buFont typeface="Arial"/>
-              <a:buAutoNum type="arabicPeriod"/>
-              <a:defRPr lang="en-US" sz="1400" typeface="Outfit" dirty="0">
-                <a:solidFill>
-                  <a:srgbClr val="1A1A1A"/>
-                </a:solidFill>
-              </a:defRPr>
-            </a:pPr>
-            <a:r>
-              <a:rPr lang="en-US" sz="1400" typeface="Outfit" dirty="0">
-                <a:solidFill>
-                  <a:srgbClr val="1A1A1A"/>
-                </a:solidFill>
-              </a:rPr>
-            </a:r>
-            <a:r>
-              <a:rPr lang="en-US" sz="1400" typeface="Arial" color="1A1A1A"/>
-              <a:t xml:space="preserve">4. </a:t>
-            </a:r>
-            <a:r>
-              <a:rPr lang="en-US" sz="1400" typeface="Outfit" dirty="0">
-                <a:solidFill>
-                  <a:srgbClr val="1A1A1A"/>
-                </a:solidFill>
-              </a:rPr>
-              <a:t xml:space="preserve">Methodology and design</a:t>
-            </a:r>
-          </a:p>
-          <a:p>
-            <a:pPr marL="342900" indent="-342900">
-              <a:buFont typeface="Arial"/>
-              <a:buAutoNum type="arabicPeriod"/>
-              <a:defRPr lang="en-US" sz="1400" typeface="Outfit" dirty="0">
-                <a:solidFill>
-                  <a:srgbClr val="1A1A1A"/>
-                </a:solidFill>
-              </a:defRPr>
-            </a:pPr>
-            <a:r>
-              <a:rPr lang="en-US" sz="1400" typeface="Outfit" dirty="0">
-                <a:solidFill>
-                  <a:srgbClr val="1A1A1A"/>
-                </a:solidFill>
-              </a:rPr>
-            </a:r>
-            <a:r>
-              <a:rPr lang="en-US" sz="1400" typeface="Arial" color="1A1A1A"/>
-              <a:t xml:space="preserve">5. </a:t>
-            </a:r>
-            <a:r>
-              <a:rPr lang="en-US" sz="1400" typeface="Outfit" dirty="0">
-                <a:solidFill>
-                  <a:srgbClr val="1A1A1A"/>
-                </a:solidFill>
-              </a:rPr>
-              <a:t xml:space="preserve">System architecture and implementation</a:t>
-            </a:r>
-          </a:p>
-          <a:p>
-            <a:pPr marL="342900" indent="-342900">
-              <a:buFont typeface="Arial"/>
-              <a:buAutoNum type="arabicPeriod"/>
-              <a:defRPr lang="en-US" sz="1400" typeface="Outfit" dirty="0">
-                <a:solidFill>
-                  <a:srgbClr val="1A1A1A"/>
-                </a:solidFill>
-              </a:defRPr>
-            </a:pPr>
-            <a:r>
-              <a:rPr lang="en-US" sz="1400" typeface="Outfit" dirty="0">
-                <a:solidFill>
-                  <a:srgbClr val="1A1A1A"/>
-                </a:solidFill>
-              </a:rPr>
-            </a:r>
-            <a:r>
-              <a:rPr lang="en-US" sz="1400" typeface="Arial" color="1A1A1A"/>
-              <a:t xml:space="preserve">6. </a:t>
-            </a:r>
-            <a:r>
-              <a:rPr lang="en-US" sz="1400" typeface="Outfit" dirty="0">
-                <a:solidFill>
-                  <a:srgbClr val="1A1A1A"/>
-                </a:solidFill>
-              </a:rPr>
-              <a:t xml:space="preserve">Evaluation: verification, fidelity, performance, reward economy</a:t>
-            </a:r>
-          </a:p>
-          <a:p>
-            <a:pPr marL="342900" indent="-342900">
-              <a:buFont typeface="Arial"/>
-              <a:buAutoNum type="arabicPeriod"/>
-              <a:defRPr lang="en-US" sz="1400" typeface="Outfit" dirty="0">
-                <a:solidFill>
-                  <a:srgbClr val="1A1A1A"/>
-                </a:solidFill>
-              </a:defRPr>
-            </a:pPr>
-            <a:r>
-              <a:rPr lang="en-US" sz="1400" typeface="Outfit" dirty="0">
-                <a:solidFill>
-                  <a:srgbClr val="1A1A1A"/>
-                </a:solidFill>
-              </a:rPr>
-            </a:r>
-            <a:r>
-              <a:rPr lang="en-US" sz="1400" typeface="Arial" color="1A1A1A"/>
-              <a:t xml:space="preserve">7. </a:t>
-            </a:r>
-            <a:r>
-              <a:rPr lang="en-US" sz="1400" typeface="Outfit" dirty="0">
-                <a:solidFill>
-                  <a:srgbClr val="1A1A1A"/>
-                </a:solidFill>
-              </a:rPr>
-              <a:t xml:space="preserve">Findings, contributions and future work</a:t>
-            </a:r>
-          </a:p>
-        </a:txBody>
+              <a:rPr sz="2000" b="1" i="0" dirty="0" err="1"/>
+              <a:t>CampusFit</a:t>
+            </a:r>
+            <a:r>
+              <a:rPr sz="2000" b="1" i="0" dirty="0"/>
+              <a:t> makes the campus itself the delivery mechanism — QR checkpoints turn everyday movement into verifiable progress.</a:t>
+            </a:r>
+          </a:p>
+        </p:txBody>
       </p:sp>
       <p:sp>
         <p:nvSpPr>
@@ -10092,7 +9206,7 @@
                 </a:spcAft>
                 <a:defRPr/>
               </a:pPr>
-              <a:t>9/15/2025</a:t>
+              <a:t>10/7/2026</a:t>
             </a:fld>
             <a:endParaRPr lang="en-US">
               <a:latin typeface="Calibri" panose="020F0502020204030204" pitchFamily="34" charset="0"/>
@@ -10207,7 +9321,7 @@
                 <a:latin typeface="Times New Roman" panose="02020603050405020304" pitchFamily="18" charset="0"/>
                 <a:cs typeface="Times New Roman" panose="02020603050405020304" pitchFamily="18" charset="0"/>
               </a:rPr>
-              <a:t>Introduction</a:t>
+              <a:t>Problems</a:t>
             </a:r>
             <a:endParaRPr lang="en-US" dirty="0">
               <a:solidFill>
@@ -10216,27 +9330,6 @@
             </a:endParaRPr>
           </a:p>
         </p:txBody>
-        <a:txBody>
-          <a:bodyPr/>
-          <a:lstStyle/>
-          <a:p>
-            <a:pPr>
-              <a:defRPr lang="en-US" sz="3600" dirty="0" typeface="Outfit" b="1">
-                <a:solidFill>
-                  <a:srgbClr val="1A1A1A"/>
-                </a:solidFill>
-              </a:defRPr>
-            </a:pPr>
-            <a:r>
-              <a:rPr lang="en-US" sz="3600" dirty="0" typeface="Outfit" b="1">
-                <a:solidFill>
-                  <a:srgbClr val="1A1A1A"/>
-                </a:solidFill>
-              </a:rPr>
-              <a:t xml:space="preserve">Problem and Motivation</a:t>
-            </a:r>
-          </a:p>
-        </a:txBody>
       </p:sp>
       <p:sp>
         <p:nvSpPr>
@@ -10256,182 +9349,224 @@
         </p:nvSpPr>
         <p:spPr>
           <a:xfrm>
-            <a:off x="609600" y="1619865"/>
-            <a:ext cx="10972800" cy="4525963"/>
+            <a:off x="609600" y="1541206"/>
+            <a:ext cx="10972800" cy="4526280"/>
           </a:xfrm>
         </p:spPr>
         <p:txBody>
-          <a:bodyPr/>
-          <a:lstStyle/>
-          <a:p>
-            <a:pPr algn="just"/>
-            <a:endParaRPr lang="en-US" altLang="zh-CN" sz="3200" dirty="0">
+          <a:bodyPr wrap="square"/>
+          <a:lstStyle/>
+          <a:p>
+            <a:pPr marL="0" indent="0" algn="l">
+              <a:lnSpc>
+                <a:spcPct val="100000"/>
+              </a:lnSpc>
+              <a:spcBef>
+                <a:spcPts val="1000"/>
+              </a:spcBef>
+              <a:spcAft>
+                <a:spcPts val="0"/>
+              </a:spcAft>
+              <a:buNone/>
+            </a:pPr>
+            <a:r>
+              <a:rPr sz="2400" b="1" i="0" dirty="0"/>
+              <a:t>Why existing approaches fail</a:t>
+            </a:r>
+            <a:endParaRPr lang="en-US" altLang="zh-CN" sz="4000" dirty="0">
               <a:latin typeface="Times New Roman" panose="02020603050405020304" pitchFamily="18" charset="0"/>
               <a:sym typeface="+mn-ea"/>
             </a:endParaRPr>
           </a:p>
-        </p:txBody>
-        <a:txBody>
-          <a:bodyPr/>
-          <a:lstStyle/>
-          <a:p>
-            <a:pPr>
-              <a:defRPr lang="en-US" sz="2000" dirty="0" typeface="Outfit" b="1">
-                <a:solidFill>
-                  <a:srgbClr val="2E7D32"/>
-                </a:solidFill>
-              </a:defRPr>
-            </a:pPr>
-            <a:r>
-              <a:rPr lang="en-US" sz="2000" dirty="0" typeface="Outfit" b="1">
-                <a:solidFill>
-                  <a:srgbClr val="2E7D32"/>
-                </a:solidFill>
-              </a:rPr>
-              <a:t xml:space="preserve">The Problem</a:t>
-            </a:r>
-          </a:p>
-          <a:p>
-            <a:pPr marL="342900" indent="-228600">
+          <a:p>
+            <a:pPr marL="342900" indent="-342900" algn="l">
+              <a:lnSpc>
+                <a:spcPct val="100000"/>
+              </a:lnSpc>
+              <a:spcBef>
+                <a:spcPts val="600"/>
+              </a:spcBef>
+              <a:spcAft>
+                <a:spcPts val="0"/>
+              </a:spcAft>
               <a:buFont typeface="Arial"/>
               <a:buChar char="•"/>
-              <a:defRPr lang="en-US" sz="1400" typeface="Outfit" dirty="0">
+            </a:pPr>
+            <a:r>
+              <a:rPr sz="1800" b="0" i="0" dirty="0">
                 <a:solidFill>
                   <a:srgbClr val="1A1A1A"/>
                 </a:solidFill>
-              </a:defRPr>
-            </a:pPr>
-            <a:r>
-              <a:rPr lang="en-US" sz="1400" typeface="Outfit" dirty="0">
+              </a:rPr>
+              <a:t>Campus wellness </a:t>
+            </a:r>
+            <a:r>
+              <a:rPr sz="1800" b="0" i="0" dirty="0" err="1">
                 <a:solidFill>
                   <a:srgbClr val="1A1A1A"/>
                 </a:solidFill>
               </a:rPr>
-              <a:t xml:space="preserve"> University students are among the least physically active demographic groups — studies report up to 48% of sampled cohorts classified as inactive (Alkhawaldeh et al., 2022).</a:t>
-            </a:r>
-          </a:p>
-          <a:p>
-            <a:pPr marL="342900" indent="-228600">
+              <a:t>programmes</a:t>
+            </a:r>
+            <a:r>
+              <a:rPr sz="1800" b="0" i="0" dirty="0">
+                <a:solidFill>
+                  <a:srgbClr val="1A1A1A"/>
+                </a:solidFill>
+              </a:rPr>
+              <a:t> lose students as soon as one-off inductions and campaigns end; participation decays quickly (Roberts et al., 2024).</a:t>
+            </a:r>
+          </a:p>
+          <a:p>
+            <a:pPr marL="342900" indent="-342900" algn="l">
+              <a:lnSpc>
+                <a:spcPct val="100000"/>
+              </a:lnSpc>
+              <a:spcBef>
+                <a:spcPts val="600"/>
+              </a:spcBef>
+              <a:spcAft>
+                <a:spcPts val="0"/>
+              </a:spcAft>
               <a:buFont typeface="Arial"/>
               <a:buChar char="•"/>
-              <a:defRPr lang="en-US" sz="1400" typeface="Outfit" dirty="0">
+            </a:pPr>
+            <a:r>
+              <a:rPr sz="1800" b="0" i="0" dirty="0">
                 <a:solidFill>
                   <a:srgbClr val="1A1A1A"/>
                 </a:solidFill>
-              </a:defRPr>
-            </a:pPr>
-            <a:r>
-              <a:rPr lang="en-US" sz="1400" typeface="Outfit" dirty="0">
-                <a:solidFill>
-                  <a:srgbClr val="1A1A1A"/>
-                </a:solidFill>
-              </a:rPr>
-              <a:t xml:space="preserve"> At the University of Ghana, scattered lecture blocks, residential halls and libraries create natural walking and running routes that go underused as fitness infrastructure.</a:t>
-            </a:r>
-          </a:p>
-          <a:p>
-            <a:pPr marL="342900" indent="-228600">
+              </a:rPr>
+              <a:t>Fitness apps count steps but ignore campus context — no community, no exploration, and manual logging competes with students' scarce time.</a:t>
+            </a:r>
+          </a:p>
+          <a:p>
+            <a:pPr marL="342900" indent="-342900" algn="l">
+              <a:lnSpc>
+                <a:spcPct val="100000"/>
+              </a:lnSpc>
+              <a:spcBef>
+                <a:spcPts val="600"/>
+              </a:spcBef>
+              <a:spcAft>
+                <a:spcPts val="0"/>
+              </a:spcAft>
               <a:buFont typeface="Arial"/>
               <a:buChar char="•"/>
-              <a:defRPr lang="en-US" sz="1400" typeface="Outfit" dirty="0">
+            </a:pPr>
+            <a:r>
+              <a:rPr sz="1800" b="0" i="0" dirty="0">
                 <a:solidFill>
                   <a:srgbClr val="1A1A1A"/>
                 </a:solidFill>
-              </a:defRPr>
-            </a:pPr>
-            <a:r>
-              <a:rPr lang="en-US" sz="1400" typeface="Outfit" dirty="0">
+              </a:rPr>
+              <a:t>Barriers persist: motivation, accountability, time constraints, and the intimidation factor of gyms and </a:t>
+            </a:r>
+            <a:r>
+              <a:rPr sz="1800" b="0" i="0" dirty="0" err="1">
                 <a:solidFill>
                   <a:srgbClr val="1A1A1A"/>
                 </a:solidFill>
               </a:rPr>
-              <a:t xml:space="preserve"> Existing fitness apps (Strava, Nike Run Club, Habitica) target serious athletes or require strong self-discipline; none turn the campus's physical layout itself into a game board.</a:t>
-            </a:r>
-          </a:p>
-          <a:p>
-            <a:pPr>
-              <a:defRPr lang="en-US" sz="800" dirty="0" typeface="Outfit"/>
-            </a:pPr>
-            <a:r>
-              <a:rPr lang="en-US" sz="800" dirty="0" typeface="Outfit"/>
-              <a:t xml:space="preserve"/>
-            </a:r>
-          </a:p>
-          <a:p>
-            <a:pPr>
-              <a:defRPr lang="en-US" sz="2000" dirty="0" typeface="Outfit" b="1">
-                <a:solidFill>
-                  <a:srgbClr val="2E7D32"/>
-                </a:solidFill>
-              </a:defRPr>
-            </a:pPr>
-            <a:r>
-              <a:rPr lang="en-US" sz="2000" dirty="0" typeface="Outfit" b="1">
-                <a:solidFill>
-                  <a:srgbClr val="2E7D32"/>
-                </a:solidFill>
-              </a:rPr>
-              <a:t xml:space="preserve">Motivation</a:t>
-            </a:r>
-          </a:p>
-          <a:p>
-            <a:pPr marL="342900" indent="-228600">
+              <a:t>organised</a:t>
+            </a:r>
+            <a:r>
+              <a:rPr sz="1800" b="0" i="0" dirty="0">
+                <a:solidFill>
+                  <a:srgbClr val="1A1A1A"/>
+                </a:solidFill>
+              </a:rPr>
+              <a:t> sport.</a:t>
+            </a:r>
+          </a:p>
+          <a:p>
+            <a:pPr marL="342900" indent="-342900" algn="l">
+              <a:lnSpc>
+                <a:spcPct val="100000"/>
+              </a:lnSpc>
+              <a:spcBef>
+                <a:spcPts val="600"/>
+              </a:spcBef>
+              <a:spcAft>
+                <a:spcPts val="0"/>
+              </a:spcAft>
               <a:buFont typeface="Arial"/>
               <a:buChar char="•"/>
-              <a:defRPr lang="en-US" sz="1400" typeface="Outfit" dirty="0">
+            </a:pPr>
+            <a:r>
+              <a:rPr sz="1800" b="0" i="0" dirty="0">
                 <a:solidFill>
                   <a:srgbClr val="1A1A1A"/>
                 </a:solidFill>
-              </a:defRPr>
+              </a:rPr>
+              <a:t>Structural mismatch: institutions lack a persistent delivery mechanism; apps lack any relationship with the institution.</a:t>
+            </a:r>
+          </a:p>
+          <a:p>
+            <a:pPr marL="0" indent="0" algn="l">
+              <a:lnSpc>
+                <a:spcPct val="100000"/>
+              </a:lnSpc>
+              <a:spcBef>
+                <a:spcPts val="1000"/>
+              </a:spcBef>
+              <a:spcAft>
+                <a:spcPts val="0"/>
+              </a:spcAft>
+              <a:buNone/>
             </a:pPr>
             <a:r>
-              <a:rPr lang="en-US" sz="1400" typeface="Outfit" dirty="0">
-                <a:solidFill>
-                  <a:srgbClr val="1A1A1A"/>
-                </a:solidFill>
-              </a:rPr>
-              <a:t xml:space="preserve"> Campus wellness surveys indicate students want peer-driven, low-friction ways to stay active between lectures — not another gym membership.</a:t>
-            </a:r>
-          </a:p>
-          <a:p>
-            <a:pPr marL="342900" indent="-228600">
+              <a:rPr sz="2400" b="1" i="0" dirty="0"/>
+              <a:t>Research gap</a:t>
+            </a:r>
+          </a:p>
+          <a:p>
+            <a:pPr marL="342900" indent="-342900" algn="l">
+              <a:lnSpc>
+                <a:spcPct val="100000"/>
+              </a:lnSpc>
+              <a:spcBef>
+                <a:spcPts val="600"/>
+              </a:spcBef>
+              <a:spcAft>
+                <a:spcPts val="0"/>
+              </a:spcAft>
               <a:buFont typeface="Arial"/>
               <a:buChar char="•"/>
-              <a:defRPr lang="en-US" sz="1400" typeface="Outfit" dirty="0">
+            </a:pPr>
+            <a:r>
+              <a:rPr sz="1800" b="0" i="0" dirty="0">
                 <a:solidFill>
                   <a:srgbClr val="1A1A1A"/>
                 </a:solidFill>
-              </a:defRPr>
-            </a:pPr>
-            <a:r>
-              <a:rPr lang="en-US" sz="1400" typeface="Outfit" dirty="0">
-                <a:solidFill>
-                  <a:srgbClr val="1A1A1A"/>
-                </a:solidFill>
-              </a:rPr>
-              <a:t xml:space="preserve"> Gamification (points, badges, leaderboards, clubs) is a proven lever for habit formation, but its success depends on relevance, social presence and visible progress.</a:t>
-            </a:r>
-          </a:p>
-          <a:p>
-            <a:pPr marL="342900" indent="-228600">
+              </a:rPr>
+              <a:t>No reviewed system combines campus-anchored checkpoints, server-side auditable rewards, competition designed against demotivation, and institutional governance.</a:t>
+            </a:r>
+          </a:p>
+          <a:p>
+            <a:pPr marL="342900" indent="-342900" algn="l">
+              <a:lnSpc>
+                <a:spcPct val="100000"/>
+              </a:lnSpc>
+              <a:spcBef>
+                <a:spcPts val="800"/>
+              </a:spcBef>
+              <a:spcAft>
+                <a:spcPts val="0"/>
+              </a:spcAft>
               <a:buFont typeface="Arial"/>
               <a:buChar char="•"/>
-              <a:defRPr lang="en-US" sz="1400" typeface="Outfit" dirty="0">
+            </a:pPr>
+            <a:r>
+              <a:rPr sz="1800" b="1" i="0" dirty="0">
                 <a:solidFill>
                   <a:srgbClr val="1A1A1A"/>
                 </a:solidFill>
-              </a:defRPr>
-            </a:pPr>
-            <a:r>
-              <a:rPr lang="en-US" sz="1400" typeface="Outfit" dirty="0">
-                <a:solidFill>
-                  <a:srgbClr val="1A1A1A"/>
-                </a:solidFill>
-              </a:rPr>
-              <a:t xml:space="preserve"> A checkpoint-based campus map turns everyday walking into tangible, shareable achievements with a visible reward economy.</a:t>
-            </a:r>
-          </a:p>
-        </a:txBody>
+              </a:rPr>
+              <a:t>Core problem: no structured, gamified, campus-based fitness application integrates physical checkpoints with competitive motivation to raise student activity.</a:t>
+            </a:r>
+          </a:p>
+        </p:txBody>
       </p:sp>
       <p:sp>
         <p:nvSpPr>
@@ -10476,7 +9611,7 @@
                 </a:spcAft>
                 <a:defRPr/>
               </a:pPr>
-              <a:t>9/15/2025</a:t>
+              <a:t>10/7/2026</a:t>
             </a:fld>
             <a:endParaRPr lang="en-US">
               <a:ea typeface="MS PGothic" panose="020B0600070205080204" pitchFamily="34" charset="-128"/>
@@ -10594,7 +9729,7 @@
                 <a:latin typeface="Times New Roman" panose="02020603050405020304" pitchFamily="18" charset="0"/>
                 <a:cs typeface="Times New Roman" panose="02020603050405020304" pitchFamily="18" charset="0"/>
               </a:rPr>
-              <a:t>Aims and Objectives</a:t>
+              <a:t>Proposed Solution</a:t>
             </a:r>
             <a:endParaRPr lang="en-US" dirty="0">
               <a:solidFill>
@@ -10603,27 +9738,6 @@
             </a:endParaRPr>
           </a:p>
         </p:txBody>
-        <a:txBody>
-          <a:bodyPr/>
-          <a:lstStyle/>
-          <a:p>
-            <a:pPr>
-              <a:defRPr lang="en-US" sz="3600" dirty="0" typeface="Outfit" b="1">
-                <a:solidFill>
-                  <a:srgbClr val="1A1A1A"/>
-                </a:solidFill>
-              </a:defRPr>
-            </a:pPr>
-            <a:r>
-              <a:rPr lang="en-US" sz="3600" dirty="0" typeface="Outfit" b="1">
-                <a:solidFill>
-                  <a:srgbClr val="1A1A1A"/>
-                </a:solidFill>
-              </a:rPr>
-              <a:t xml:space="preserve">Research Aim, Questions and Objectives</a:t>
-            </a:r>
-          </a:p>
-        </a:txBody>
       </p:sp>
       <p:sp>
         <p:nvSpPr>
@@ -10643,320 +9757,177 @@
         </p:nvSpPr>
         <p:spPr>
           <a:xfrm>
-            <a:off x="116958" y="1617134"/>
-            <a:ext cx="11855302" cy="4847461"/>
+            <a:off x="612648" y="1600200"/>
+            <a:ext cx="10972800" cy="4526280"/>
           </a:xfrm>
         </p:spPr>
         <p:txBody>
-          <a:bodyPr/>
-          <a:lstStyle/>
-          <a:p>
-            <a:pPr algn="just"/>
-            <a:endParaRPr lang="en-US" altLang="zh-CN" sz="3200" dirty="0">
+          <a:bodyPr wrap="square"/>
+          <a:lstStyle/>
+          <a:p>
+            <a:pPr marL="342900" indent="-342900" algn="l">
+              <a:lnSpc>
+                <a:spcPct val="100000"/>
+              </a:lnSpc>
+              <a:spcBef>
+                <a:spcPts val="600"/>
+              </a:spcBef>
+              <a:spcAft>
+                <a:spcPts val="0"/>
+              </a:spcAft>
+              <a:buFont typeface="Arial"/>
+              <a:buChar char="•"/>
+            </a:pPr>
+            <a:r>
+              <a:rPr sz="2000" b="1" i="0" dirty="0" err="1">
+                <a:solidFill>
+                  <a:srgbClr val="1A1A1A"/>
+                </a:solidFill>
+              </a:rPr>
+              <a:t>CampusFit</a:t>
+            </a:r>
+            <a:r>
+              <a:rPr sz="2000" b="1" i="0" dirty="0">
+                <a:solidFill>
+                  <a:srgbClr val="1A1A1A"/>
+                </a:solidFill>
+              </a:rPr>
+              <a:t> — a gamified, checkpoint-based Progressive Web App (React + TypeScript + Tailwind): installable, offline-capable, one codebase.</a:t>
+            </a:r>
+            <a:endParaRPr lang="en-US" altLang="zh-CN" sz="4400" dirty="0">
               <a:latin typeface="Times New Roman" panose="02020603050405020304" pitchFamily="18" charset="0"/>
               <a:cs typeface="Times New Roman" panose="02020603050405020304" pitchFamily="18" charset="0"/>
               <a:sym typeface="+mn-ea"/>
             </a:endParaRPr>
           </a:p>
           <a:p>
-            <a:pPr algn="just"/>
-            <a:endParaRPr lang="en-US" altLang="zh-CN" sz="3200" dirty="0">
-              <a:latin typeface="Times New Roman" panose="02020603050405020304" pitchFamily="18" charset="0"/>
-              <a:cs typeface="Times New Roman" panose="02020603050405020304" pitchFamily="18" charset="0"/>
-              <a:sym typeface="+mn-ea"/>
-            </a:endParaRPr>
-          </a:p>
-          <a:p>
-            <a:pPr algn="just"/>
-            <a:endParaRPr lang="en-US" dirty="0"/>
-          </a:p>
-        </p:txBody>
-        <a:txBody>
-          <a:bodyPr/>
-          <a:lstStyle/>
-          <a:p>
-            <a:pPr>
-              <a:defRPr lang="en-US" sz="2000" dirty="0" typeface="Outfit" b="1">
-                <a:solidFill>
-                  <a:srgbClr val="2E7D32"/>
-                </a:solidFill>
-              </a:defRPr>
-            </a:pPr>
-            <a:r>
-              <a:rPr lang="en-US" sz="2000" dirty="0" typeface="Outfit" b="1">
-                <a:solidFill>
-                  <a:srgbClr val="2E7D32"/>
-                </a:solidFill>
-              </a:rPr>
-              <a:t xml:space="preserve">Aim</a:t>
-            </a:r>
-          </a:p>
-          <a:p>
-            <a:pPr>
-              <a:defRPr lang="en-US" sz="1400" dirty="0" typeface="Outfit">
-                <a:solidFill>
-                  <a:srgbClr val="333333"/>
-                </a:solidFill>
-              </a:defRPr>
-            </a:pPr>
-            <a:r>
-              <a:rPr lang="en-US" sz="1400" dirty="0" typeface="Outfit">
-                <a:solidFill>
-                  <a:srgbClr val="333333"/>
-                </a:solidFill>
-              </a:rPr>
-              <a:t xml:space="preserve">To design, develop and evaluate a gamified, checkpoint-based mobile fitness application that promotes sustained physical activity among university students by turning the campus environment into a participatory game board.</a:t>
-            </a:r>
-          </a:p>
-          <a:p>
-            <a:pPr>
-              <a:defRPr lang="en-US" sz="800" dirty="0" typeface="Outfit"/>
-            </a:pPr>
-            <a:r>
-              <a:rPr lang="en-US" sz="800" dirty="0" typeface="Outfit"/>
-              <a:t xml:space="preserve"/>
-            </a:r>
-          </a:p>
-          <a:p>
-            <a:pPr>
-              <a:defRPr lang="en-US" sz="2000" dirty="0" typeface="Outfit" b="1">
-                <a:solidFill>
-                  <a:srgbClr val="2E7D32"/>
-                </a:solidFill>
-              </a:defRPr>
-            </a:pPr>
-            <a:r>
-              <a:rPr lang="en-US" sz="2000" dirty="0" typeface="Outfit" b="1">
-                <a:solidFill>
-                  <a:srgbClr val="2E7D32"/>
-                </a:solidFill>
-              </a:rPr>
-              <a:t xml:space="preserve">Research Questions</a:t>
-            </a:r>
-          </a:p>
-          <a:p>
-            <a:pPr marL="342900" indent="-342900">
-              <a:buFont typeface="Arial"/>
-              <a:buAutoNum type="arabicPeriod"/>
-              <a:defRPr lang="en-US" sz="1400" typeface="Outfit" dirty="0">
-                <a:solidFill>
-                  <a:srgbClr val="1A1A1A"/>
-                </a:solidFill>
-              </a:defRPr>
-            </a:pPr>
-            <a:r>
-              <a:rPr lang="en-US" sz="1400" typeface="Outfit" dirty="0">
-                <a:solidFill>
-                  <a:srgbClr val="1A1A1A"/>
-                </a:solidFill>
-              </a:rPr>
-            </a:r>
-            <a:r>
-              <a:rPr lang="en-US" sz="1400" typeface="Arial" color="1A1A1A"/>
-              <a:t xml:space="preserve">1. </a:t>
-            </a:r>
-            <a:r>
-              <a:rPr lang="en-US" sz="1400" typeface="Outfit" dirty="0">
-                <a:solidFill>
-                  <a:srgbClr val="1A1A1A"/>
-                </a:solidFill>
-              </a:rPr>
-              <a:t xml:space="preserve">Can a checkpoint-scanning loop increase weekly active minutes for students who install the app, compared to their baseline?</a:t>
-            </a:r>
-          </a:p>
-          <a:p>
-            <a:pPr marL="342900" indent="-342900">
-              <a:buFont typeface="Arial"/>
-              <a:buAutoNum type="arabicPeriod"/>
-              <a:defRPr lang="en-US" sz="1400" typeface="Outfit" dirty="0">
-                <a:solidFill>
-                  <a:srgbClr val="1A1A1A"/>
-                </a:solidFill>
-              </a:defRPr>
-            </a:pPr>
-            <a:r>
-              <a:rPr lang="en-US" sz="1400" typeface="Outfit" dirty="0">
-                <a:solidFill>
-                  <a:srgbClr val="1A1A1A"/>
-                </a:solidFill>
-              </a:rPr>
-            </a:r>
-            <a:r>
-              <a:rPr lang="en-US" sz="1400" typeface="Arial" color="1A1A1A"/>
-              <a:t xml:space="preserve">2. </a:t>
-            </a:r>
-            <a:r>
-              <a:rPr lang="en-US" sz="1400" typeface="Outfit" dirty="0">
-                <a:solidFill>
-                  <a:srgbClr val="1A1A1A"/>
-                </a:solidFill>
-              </a:rPr>
-              <a:t xml:space="preserve">Which gamification elements — badges, points, club competition, streaks — drive the strongest sustained engagement (retention beyond 14 days)?</a:t>
-            </a:r>
-          </a:p>
-          <a:p>
-            <a:pPr marL="342900" indent="-342900">
-              <a:buFont typeface="Arial"/>
-              <a:buAutoNum type="arabicPeriod"/>
-              <a:defRPr lang="en-US" sz="1400" typeface="Outfit" dirty="0">
-                <a:solidFill>
-                  <a:srgbClr val="1A1A1A"/>
-                </a:solidFill>
-              </a:defRPr>
-            </a:pPr>
-            <a:r>
-              <a:rPr lang="en-US" sz="1400" typeface="Outfit" dirty="0">
-                <a:solidFill>
-                  <a:srgbClr val="1A1A1A"/>
-                </a:solidFill>
-              </a:rPr>
-            </a:r>
-            <a:r>
-              <a:rPr lang="en-US" sz="1400" typeface="Arial" color="1A1A1A"/>
-              <a:t xml:space="preserve">3. </a:t>
-            </a:r>
-            <a:r>
-              <a:rPr lang="en-US" sz="1400" typeface="Outfit" dirty="0">
-                <a:solidFill>
-                  <a:srgbClr val="1A1A1A"/>
-                </a:solidFill>
-              </a:rPr>
-              <a:t xml:space="preserve">Does the reward economy (points × difficulty multiplier × streak bonus) produce a balanced distribution of activity, or concentrate participation among early adopters?</a:t>
-            </a:r>
-          </a:p>
-          <a:p>
-            <a:pPr marL="342900" indent="-342900">
-              <a:buFont typeface="Arial"/>
-              <a:buAutoNum type="arabicPeriod"/>
-              <a:defRPr lang="en-US" sz="1400" typeface="Outfit" dirty="0">
-                <a:solidFill>
-                  <a:srgbClr val="1A1A1A"/>
-                </a:solidFill>
-              </a:defRPr>
-            </a:pPr>
-            <a:r>
-              <a:rPr lang="en-US" sz="1400" typeface="Outfit" dirty="0">
-                <a:solidFill>
-                  <a:srgbClr val="1A1A1A"/>
-                </a:solidFill>
-              </a:rPr>
-            </a:r>
-            <a:r>
-              <a:rPr lang="en-US" sz="1400" typeface="Arial" color="1A1A1A"/>
-              <a:t xml:space="preserve">4. </a:t>
-            </a:r>
-            <a:r>
-              <a:rPr lang="en-US" sz="1400" typeface="Outfit" dirty="0">
-                <a:solidFill>
-                  <a:srgbClr val="1A1A1A"/>
-                </a:solidFill>
-              </a:rPr>
-              <a:t xml:space="preserve">How does the Progressive Web App (PWA) approach compare to a native app in install friction, offline resilience and device coverage in a low-connectivity campus environment?</a:t>
-            </a:r>
-          </a:p>
-          <a:p>
-            <a:pPr>
-              <a:defRPr lang="en-US" sz="800" dirty="0" typeface="Outfit"/>
-            </a:pPr>
-            <a:r>
-              <a:rPr lang="en-US" sz="800" dirty="0" typeface="Outfit"/>
-              <a:t xml:space="preserve"/>
-            </a:r>
-          </a:p>
-          <a:p>
-            <a:pPr>
-              <a:defRPr lang="en-US" sz="2000" dirty="0" typeface="Outfit" b="1">
-                <a:solidFill>
-                  <a:srgbClr val="2E7D32"/>
-                </a:solidFill>
-              </a:defRPr>
-            </a:pPr>
-            <a:r>
-              <a:rPr lang="en-US" sz="2000" dirty="0" typeface="Outfit" b="1">
-                <a:solidFill>
-                  <a:srgbClr val="2E7D32"/>
-                </a:solidFill>
-              </a:rPr>
-              <a:t xml:space="preserve">Objectives</a:t>
-            </a:r>
-          </a:p>
-          <a:p>
-            <a:pPr marL="342900" indent="-228600">
+            <a:pPr marL="342900" indent="-342900" algn="l">
+              <a:lnSpc>
+                <a:spcPct val="100000"/>
+              </a:lnSpc>
+              <a:spcBef>
+                <a:spcPts val="600"/>
+              </a:spcBef>
+              <a:spcAft>
+                <a:spcPts val="0"/>
+              </a:spcAft>
               <a:buFont typeface="Arial"/>
               <a:buChar char="•"/>
-              <a:defRPr lang="en-US" sz="1400" typeface="Outfit" dirty="0">
+            </a:pPr>
+            <a:r>
+              <a:rPr sz="2000" b="0" i="0" dirty="0">
                 <a:solidFill>
                   <a:srgbClr val="1A1A1A"/>
                 </a:solidFill>
-              </a:defRPr>
-            </a:pPr>
-            <a:r>
-              <a:rPr lang="en-US" sz="1400" typeface="Outfit" dirty="0">
-                <a:solidFill>
-                  <a:srgbClr val="1A1A1A"/>
-                </a:solidFill>
-              </a:rPr>
-              <a:t xml:space="preserve"> Design the game mechanics and reward economy grounded in Self-Determination Theory.</a:t>
-            </a:r>
-          </a:p>
-          <a:p>
-            <a:pPr marL="342900" indent="-228600">
+              </a:rPr>
+              <a:t>QR signs at campus landmarks (e.g. LIB-A1) are NFC-ready; a scan proves presence at the location — the same code string lives in the database.</a:t>
+            </a:r>
+          </a:p>
+          <a:p>
+            <a:pPr marL="342900" indent="-342900" algn="l">
+              <a:lnSpc>
+                <a:spcPct val="100000"/>
+              </a:lnSpc>
+              <a:spcBef>
+                <a:spcPts val="600"/>
+              </a:spcBef>
+              <a:spcAft>
+                <a:spcPts val="0"/>
+              </a:spcAft>
               <a:buFont typeface="Arial"/>
               <a:buChar char="•"/>
-              <a:defRPr lang="en-US" sz="1400" typeface="Outfit" dirty="0">
+            </a:pPr>
+            <a:r>
+              <a:rPr sz="2000" b="0" i="0" dirty="0">
                 <a:solidFill>
                   <a:srgbClr val="1A1A1A"/>
                 </a:solidFill>
-              </a:defRPr>
-            </a:pPr>
-            <a:r>
-              <a:rPr lang="en-US" sz="1400" typeface="Outfit" dirty="0">
+              </a:rPr>
+              <a:t>All reward authority is server-side: </a:t>
+            </a:r>
+            <a:r>
+              <a:rPr sz="2000" b="0" i="0" dirty="0" err="1">
                 <a:solidFill>
                   <a:srgbClr val="1A1A1A"/>
                 </a:solidFill>
               </a:rPr>
-              <a:t xml:space="preserve"> Build a cross-platform PWA with QR-code checkpoint scanning, clubs, leaderboards and a badge shelf.</a:t>
-            </a:r>
-          </a:p>
-          <a:p>
-            <a:pPr marL="342900" indent="-228600">
+              <a:t>scan_checkpoint</a:t>
+            </a:r>
+            <a:r>
+              <a:rPr sz="2000" b="0" i="0" dirty="0">
+                <a:solidFill>
+                  <a:srgbClr val="1A1A1A"/>
+                </a:solidFill>
+              </a:rPr>
+              <a:t>() resolves the code, enforces an 8-hour cooldown, applies the difficulty multiplier and writes the append-only ledger — one transaction.</a:t>
+            </a:r>
+          </a:p>
+          <a:p>
+            <a:pPr marL="342900" indent="-342900" algn="l">
+              <a:lnSpc>
+                <a:spcPct val="100000"/>
+              </a:lnSpc>
+              <a:spcBef>
+                <a:spcPts val="600"/>
+              </a:spcBef>
+              <a:spcAft>
+                <a:spcPts val="0"/>
+              </a:spcAft>
               <a:buFont typeface="Arial"/>
               <a:buChar char="•"/>
-              <a:defRPr lang="en-US" sz="1400" typeface="Outfit" dirty="0">
+            </a:pPr>
+            <a:r>
+              <a:rPr sz="2000" b="0" i="0" dirty="0">
                 <a:solidFill>
                   <a:srgbClr val="1A1A1A"/>
                 </a:solidFill>
-              </a:defRPr>
-            </a:pPr>
-            <a:r>
-              <a:rPr lang="en-US" sz="1400" typeface="Outfit" dirty="0">
-                <a:solidFill>
-                  <a:srgbClr val="1A1A1A"/>
-                </a:solidFill>
-              </a:rPr>
-              <a:t xml:space="preserve"> Implement a Supabase backend with row-level security, real-time leaderboards and a demo mode for offline evaluation.</a:t>
-            </a:r>
-          </a:p>
-          <a:p>
-            <a:pPr marL="342900" indent="-228600">
+              </a:rPr>
+              <a:t>Difficulty tiers easy ×1.0 · medium ×1.3 · hard ×1.8 · epic ×2.5; square-root level curve; daily streaks; badges evaluated automatically.</a:t>
+            </a:r>
+          </a:p>
+          <a:p>
+            <a:pPr marL="342900" indent="-342900" algn="l">
+              <a:lnSpc>
+                <a:spcPct val="100000"/>
+              </a:lnSpc>
+              <a:spcBef>
+                <a:spcPts val="600"/>
+              </a:spcBef>
+              <a:spcAft>
+                <a:spcPts val="0"/>
+              </a:spcAft>
               <a:buFont typeface="Arial"/>
               <a:buChar char="•"/>
-              <a:defRPr lang="en-US" sz="1400" typeface="Outfit" dirty="0">
+            </a:pPr>
+            <a:r>
+              <a:rPr sz="2000" b="0" i="0" dirty="0">
                 <a:solidFill>
                   <a:srgbClr val="1A1A1A"/>
                 </a:solidFill>
-              </a:defRPr>
+              </a:rPr>
+              <a:t>Bounded weekly leaderboards and club totals — competition designed against the documented risks of open-ended rankings.</a:t>
+            </a:r>
+          </a:p>
+          <a:p>
+            <a:pPr marL="342900" indent="-342900" algn="l">
+              <a:lnSpc>
+                <a:spcPct val="100000"/>
+              </a:lnSpc>
+              <a:spcBef>
+                <a:spcPts val="1000"/>
+              </a:spcBef>
+              <a:spcAft>
+                <a:spcPts val="0"/>
+              </a:spcAft>
+              <a:buFont typeface="Arial"/>
+              <a:buChar char="•"/>
             </a:pPr>
             <a:r>
-              <a:rPr lang="en-US" sz="1400" typeface="Outfit" dirty="0">
-                <a:solidFill>
-                  <a:srgbClr val="1A1A1A"/>
-                </a:solidFill>
-              </a:rPr>
-              <a:t xml:space="preserve"> Evaluate the system with a usability study and a reward-economy analysis using demo data and early user feedback.</a:t>
-            </a:r>
-          </a:p>
-        </a:txBody>
+              <a:rPr sz="2000" b="1" i="0" dirty="0"/>
+              <a:t>Participatory, auditable, governable — every point traceable to a checkpoint, timestamp and rule, with no custom backend to operate.</a:t>
+            </a:r>
+          </a:p>
+        </p:txBody>
       </p:sp>
       <p:sp>
         <p:nvSpPr>
@@ -11001,7 +9972,7 @@
                 </a:spcAft>
                 <a:defRPr/>
               </a:pPr>
-              <a:t>9/15/2025</a:t>
+              <a:t>10/7/2026</a:t>
             </a:fld>
             <a:endParaRPr lang="en-US">
               <a:ea typeface="MS PGothic" panose="020B0600070205080204" pitchFamily="34" charset="-128"/>
@@ -11119,32 +10090,11 @@
                 <a:latin typeface="Times New Roman" panose="02020603050405020304" pitchFamily="18" charset="0"/>
                 <a:cs typeface="Times New Roman" panose="02020603050405020304" pitchFamily="18" charset="0"/>
               </a:rPr>
-              <a:t>Related Work</a:t>
+              <a:t>Objectives</a:t>
             </a:r>
             <a:endParaRPr lang="en-US" dirty="0"/>
           </a:p>
         </p:txBody>
-        <a:txBody>
-          <a:bodyPr/>
-          <a:lstStyle/>
-          <a:p>
-            <a:pPr>
-              <a:defRPr lang="en-US" sz="3600" dirty="0" typeface="Outfit" b="1">
-                <a:solidFill>
-                  <a:srgbClr val="1A1A1A"/>
-                </a:solidFill>
-              </a:defRPr>
-            </a:pPr>
-            <a:r>
-              <a:rPr lang="en-US" sz="3600" dirty="0" typeface="Outfit" b="1">
-                <a:solidFill>
-                  <a:srgbClr val="1A1A1A"/>
-                </a:solidFill>
-              </a:rPr>
-              <a:t xml:space="preserve">Literature and Theoretical Framework</a:t>
-            </a:r>
-          </a:p>
-        </a:txBody>
       </p:sp>
       <p:sp>
         <p:nvSpPr>
@@ -11164,282 +10114,328 @@
         </p:nvSpPr>
         <p:spPr>
           <a:xfrm>
-            <a:off x="127591" y="1600201"/>
-            <a:ext cx="11876567" cy="4525963"/>
+            <a:off x="612648" y="1600200"/>
+            <a:ext cx="10972800" cy="4526280"/>
           </a:xfrm>
         </p:spPr>
         <p:txBody>
-          <a:bodyPr/>
-          <a:lstStyle/>
-          <a:p>
-            <a:pPr algn="just"/>
-            <a:endParaRPr lang="en-US" sz="2400" dirty="0">
+          <a:bodyPr wrap="square"/>
+          <a:lstStyle/>
+          <a:p>
+            <a:pPr marL="0" indent="0" algn="l">
+              <a:lnSpc>
+                <a:spcPct val="100000"/>
+              </a:lnSpc>
+              <a:spcBef>
+                <a:spcPts val="1000"/>
+              </a:spcBef>
+              <a:spcAft>
+                <a:spcPts val="0"/>
+              </a:spcAft>
+              <a:buNone/>
+            </a:pPr>
+            <a:r>
+              <a:rPr sz="2400" b="1" i="0" dirty="0"/>
+              <a:t>General objective</a:t>
+            </a:r>
+            <a:endParaRPr lang="en-US" sz="3600" dirty="0">
               <a:latin typeface="Times New Roman" panose="02020603050405020304" pitchFamily="18" charset="0"/>
               <a:cs typeface="Times New Roman" panose="02020603050405020304" pitchFamily="18" charset="0"/>
             </a:endParaRPr>
           </a:p>
-        </p:txBody>
-        <a:txBody>
-          <a:bodyPr/>
-          <a:lstStyle/>
-          <a:p>
-            <a:pPr>
-              <a:defRPr lang="en-US" sz="1800" dirty="0" typeface="Outfit" b="1">
-                <a:solidFill>
-                  <a:srgbClr val="2E7D32"/>
-                </a:solidFill>
-              </a:defRPr>
+          <a:p>
+            <a:pPr marL="0" indent="0" algn="l">
+              <a:lnSpc>
+                <a:spcPct val="100000"/>
+              </a:lnSpc>
+              <a:spcBef>
+                <a:spcPts val="200"/>
+              </a:spcBef>
+              <a:spcAft>
+                <a:spcPts val="0"/>
+              </a:spcAft>
+              <a:buNone/>
             </a:pPr>
             <a:r>
-              <a:rPr lang="en-US" sz="1800" dirty="0" typeface="Outfit" b="1">
-                <a:solidFill>
-                  <a:srgbClr val="2E7D32"/>
-                </a:solidFill>
-              </a:rPr>
-              <a:t xml:space="preserve">Theoretical Framework — Self-Determination Theory (SDT)</a:t>
-            </a:r>
-          </a:p>
-          <a:p>
-            <a:pPr marL="342900" indent="-228600">
-              <a:buFont typeface="Arial"/>
-              <a:buChar char="•"/>
-              <a:defRPr lang="en-US" sz="1400" typeface="Outfit" dirty="0">
+              <a:rPr sz="2000" b="0" i="0" dirty="0">
                 <a:solidFill>
                   <a:srgbClr val="1A1A1A"/>
                 </a:solidFill>
-              </a:defRPr>
+              </a:rPr>
+              <a:t>Develop and evaluate a functional mobile fitness application that integrates gamification and location-based checkpoint tracking within a university campus.</a:t>
+            </a:r>
+          </a:p>
+          <a:p>
+            <a:pPr marL="0" indent="0" algn="l">
+              <a:lnSpc>
+                <a:spcPct val="100000"/>
+              </a:lnSpc>
+              <a:spcBef>
+                <a:spcPts val="1000"/>
+              </a:spcBef>
+              <a:spcAft>
+                <a:spcPts val="0"/>
+              </a:spcAft>
+              <a:buNone/>
             </a:pPr>
             <a:r>
-              <a:rPr lang="en-US" sz="1400" typeface="Outfit" dirty="0">
+              <a:rPr sz="2400" b="1" i="0" dirty="0"/>
+              <a:t>Specific objectives</a:t>
+            </a:r>
+          </a:p>
+          <a:p>
+            <a:pPr marL="342900" indent="-342900" algn="l">
+              <a:lnSpc>
+                <a:spcPct val="100000"/>
+              </a:lnSpc>
+              <a:spcBef>
+                <a:spcPts val="300"/>
+              </a:spcBef>
+              <a:spcAft>
+                <a:spcPts val="0"/>
+              </a:spcAft>
+              <a:buNone/>
+            </a:pPr>
+            <a:r>
+              <a:rPr sz="1800" b="0" i="0" dirty="0">
                 <a:solidFill>
                   <a:srgbClr val="1A1A1A"/>
                 </a:solidFill>
               </a:rPr>
-              <a:t xml:space="preserve"> SDT (Deci &amp; Ryan, 2000) identifies three intrinsic motivators — autonomy, competence and relatedness — the lens through which CampusFit's mechanics are designed.</a:t>
-            </a:r>
-          </a:p>
-          <a:p>
-            <a:pPr marL="342900" indent="-228600">
-              <a:buFont typeface="Arial"/>
-              <a:buChar char="•"/>
-              <a:defRPr lang="en-US" sz="1400" typeface="Outfit" dirty="0">
+              <a:t>1.  </a:t>
+            </a:r>
+            <a:r>
+              <a:rPr sz="1800" b="0" i="0" dirty="0" err="1">
                 <a:solidFill>
                   <a:srgbClr val="1A1A1A"/>
                 </a:solidFill>
-              </a:defRPr>
+              </a:rPr>
+              <a:t>Analyse</a:t>
+            </a:r>
+            <a:r>
+              <a:rPr sz="1800" b="0" i="0" dirty="0">
+                <a:solidFill>
+                  <a:srgbClr val="1A1A1A"/>
+                </a:solidFill>
+              </a:rPr>
+              <a:t> student fitness </a:t>
+            </a:r>
+            <a:r>
+              <a:rPr sz="1800" b="0" i="0" dirty="0" err="1">
+                <a:solidFill>
+                  <a:srgbClr val="1A1A1A"/>
+                </a:solidFill>
+              </a:rPr>
+              <a:t>behaviour</a:t>
+            </a:r>
+            <a:r>
+              <a:rPr sz="1800" b="0" i="0" dirty="0">
+                <a:solidFill>
+                  <a:srgbClr val="1A1A1A"/>
+                </a:solidFill>
+              </a:rPr>
+              <a:t> and determine system requirements.</a:t>
+            </a:r>
+          </a:p>
+          <a:p>
+            <a:pPr marL="342900" indent="-342900" algn="l">
+              <a:lnSpc>
+                <a:spcPct val="100000"/>
+              </a:lnSpc>
+              <a:spcBef>
+                <a:spcPts val="300"/>
+              </a:spcBef>
+              <a:spcAft>
+                <a:spcPts val="0"/>
+              </a:spcAft>
+              <a:buNone/>
             </a:pPr>
             <a:r>
-              <a:rPr lang="en-US" sz="1400" typeface="Outfit" dirty="0">
+              <a:rPr sz="1800" b="0" i="0" dirty="0">
                 <a:solidFill>
                   <a:srgbClr val="1A1A1A"/>
                 </a:solidFill>
               </a:rPr>
-              <a:t xml:space="preserve"> Autonomy: users choose which routes to walk, which clubs to join, which challenges to start — no forced compliance paths.</a:t>
-            </a:r>
-          </a:p>
-          <a:p>
-            <a:pPr marL="342900" indent="-228600">
-              <a:buFont typeface="Arial"/>
-              <a:buChar char="•"/>
-              <a:defRPr lang="en-US" sz="1400" typeface="Outfit" dirty="0">
+              <a:t>2.  Design a user-friendly mobile application interface.</a:t>
+            </a:r>
+          </a:p>
+          <a:p>
+            <a:pPr marL="342900" indent="-342900" algn="l">
+              <a:lnSpc>
+                <a:spcPct val="100000"/>
+              </a:lnSpc>
+              <a:spcBef>
+                <a:spcPts val="300"/>
+              </a:spcBef>
+              <a:spcAft>
+                <a:spcPts val="0"/>
+              </a:spcAft>
+              <a:buNone/>
+            </a:pPr>
+            <a:r>
+              <a:rPr sz="1800" b="0" i="0" dirty="0">
                 <a:solidFill>
                   <a:srgbClr val="1A1A1A"/>
                 </a:solidFill>
-              </a:defRPr>
+              </a:rPr>
+              <a:t>3.  Implement secure student registration and authentication.</a:t>
+            </a:r>
+          </a:p>
+          <a:p>
+            <a:pPr marL="342900" indent="-342900" algn="l">
+              <a:lnSpc>
+                <a:spcPct val="100000"/>
+              </a:lnSpc>
+              <a:spcBef>
+                <a:spcPts val="300"/>
+              </a:spcBef>
+              <a:spcAft>
+                <a:spcPts val="0"/>
+              </a:spcAft>
+              <a:buNone/>
             </a:pPr>
             <a:r>
-              <a:rPr lang="en-US" sz="1400" typeface="Outfit" dirty="0">
+              <a:rPr sz="1800" b="0" i="0" dirty="0">
                 <a:solidFill>
                   <a:srgbClr val="1A1A1A"/>
                 </a:solidFill>
               </a:rPr>
-              <a:t xml:space="preserve"> Competence: checkpoint base points × difficulty multiplier gives visible, escalating progress; badges mark milestones (first scan, 7-day streak, 2500 points).</a:t>
-            </a:r>
-          </a:p>
-          <a:p>
-            <a:pPr marL="342900" indent="-228600">
-              <a:buFont typeface="Arial"/>
-              <a:buChar char="•"/>
-              <a:defRPr lang="en-US" sz="1400" typeface="Outfit" dirty="0">
+              <a:t>4.  Design and deploy QR/NFC-based checkpoint validation mechanisms.</a:t>
+            </a:r>
+          </a:p>
+          <a:p>
+            <a:pPr marL="342900" indent="-342900" algn="l">
+              <a:lnSpc>
+                <a:spcPct val="100000"/>
+              </a:lnSpc>
+              <a:spcBef>
+                <a:spcPts val="300"/>
+              </a:spcBef>
+              <a:spcAft>
+                <a:spcPts val="0"/>
+              </a:spcAft>
+              <a:buNone/>
+            </a:pPr>
+            <a:r>
+              <a:rPr sz="1800" b="0" i="0" dirty="0">
                 <a:solidFill>
                   <a:srgbClr val="1A1A1A"/>
                 </a:solidFill>
-              </a:defRPr>
+              </a:rPr>
+              <a:t>5.  Develop a dynamic points allocation algorithm.</a:t>
+            </a:r>
+          </a:p>
+          <a:p>
+            <a:pPr marL="342900" indent="-342900" algn="l">
+              <a:lnSpc>
+                <a:spcPct val="100000"/>
+              </a:lnSpc>
+              <a:spcBef>
+                <a:spcPts val="300"/>
+              </a:spcBef>
+              <a:spcAft>
+                <a:spcPts val="0"/>
+              </a:spcAft>
+              <a:buNone/>
             </a:pPr>
             <a:r>
-              <a:rPr lang="en-US" sz="1400" typeface="Outfit" dirty="0">
+              <a:rPr sz="1800" b="0" i="0" dirty="0">
                 <a:solidFill>
                   <a:srgbClr val="1A1A1A"/>
                 </a:solidFill>
               </a:rPr>
-              <a:t xml:space="preserve"> Relatedness: clubs, crew leaderboards and a vertical FitClips feed provide social presence without live-chat pressure.</a:t>
-            </a:r>
-          </a:p>
-          <a:p>
-            <a:pPr>
-              <a:defRPr lang="en-US" sz="800" dirty="0" typeface="Outfit"/>
+              <a:t>6.  Integrate leaderboard functionality for competitive ranking.</a:t>
+            </a:r>
+          </a:p>
+          <a:p>
+            <a:pPr marL="342900" indent="-342900" algn="l">
+              <a:lnSpc>
+                <a:spcPct val="100000"/>
+              </a:lnSpc>
+              <a:spcBef>
+                <a:spcPts val="300"/>
+              </a:spcBef>
+              <a:spcAft>
+                <a:spcPts val="0"/>
+              </a:spcAft>
+              <a:buNone/>
             </a:pPr>
             <a:r>
-              <a:rPr lang="en-US" sz="800" dirty="0" typeface="Outfit"/>
-              <a:t xml:space="preserve"/>
-            </a:r>
-          </a:p>
-          <a:p>
-            <a:pPr>
-              <a:defRPr lang="en-US" sz="1800" dirty="0" typeface="Outfit" b="1">
-                <a:solidFill>
-                  <a:srgbClr val="2E7D32"/>
-                </a:solidFill>
-              </a:defRPr>
+              <a:rPr sz="1800" b="0" i="0" dirty="0">
+                <a:solidFill>
+                  <a:srgbClr val="1A1A1A"/>
+                </a:solidFill>
+              </a:rPr>
+              <a:t>7.  Implement a badge and achievement reward system.</a:t>
+            </a:r>
+          </a:p>
+          <a:p>
+            <a:pPr marL="342900" indent="-342900" algn="l">
+              <a:lnSpc>
+                <a:spcPct val="100000"/>
+              </a:lnSpc>
+              <a:spcBef>
+                <a:spcPts val="300"/>
+              </a:spcBef>
+              <a:spcAft>
+                <a:spcPts val="0"/>
+              </a:spcAft>
+              <a:buNone/>
             </a:pPr>
             <a:r>
-              <a:rPr lang="en-US" sz="1800" dirty="0" typeface="Outfit" b="1">
-                <a:solidFill>
-                  <a:srgbClr val="2E7D32"/>
-                </a:solidFill>
-              </a:rPr>
-              <a:t xml:space="preserve">Related Work</a:t>
-            </a:r>
-          </a:p>
-          <a:p>
-            <a:pPr marL="342900" indent="-228600">
-              <a:buFont typeface="Arial"/>
-              <a:buChar char="•"/>
-              <a:defRPr lang="en-US" sz="1400" typeface="Outfit" dirty="0">
+              <a:rPr sz="1800" b="0" i="0" dirty="0">
                 <a:solidFill>
                   <a:srgbClr val="1A1A1A"/>
                 </a:solidFill>
-              </a:defRPr>
+              </a:rPr>
+              <a:t>8.  Design an administrative dashboard for system management.</a:t>
+            </a:r>
+          </a:p>
+          <a:p>
+            <a:pPr marL="342900" indent="-342900" algn="l">
+              <a:lnSpc>
+                <a:spcPct val="100000"/>
+              </a:lnSpc>
+              <a:spcBef>
+                <a:spcPts val="300"/>
+              </a:spcBef>
+              <a:spcAft>
+                <a:spcPts val="0"/>
+              </a:spcAft>
+              <a:buNone/>
             </a:pPr>
             <a:r>
-              <a:rPr lang="en-US" sz="1400" typeface="Outfit" dirty="0">
+              <a:rPr sz="1800" b="0" i="0" dirty="0">
                 <a:solidFill>
                   <a:srgbClr val="1A1A1A"/>
                 </a:solidFill>
               </a:rPr>
-              <a:t xml:space="preserve"> Habitica (2013): gamified task manager with RPG avatars and party quests — strong social accountability, but not location-aware. CampusFit borrows the party/club model but grounds it in physical campus space.</a:t>
-            </a:r>
-          </a:p>
-          <a:p>
-            <a:pPr marL="342900" indent="-228600">
-              <a:buFont typeface="Arial"/>
-              <a:buChar char="•"/>
-              <a:defRPr lang="en-US" sz="1400" typeface="Outfit" dirty="0">
+              <a:t>9.  Test system usability, performance and scalability.</a:t>
+            </a:r>
+          </a:p>
+          <a:p>
+            <a:pPr marL="342900" indent="-342900" algn="l">
+              <a:lnSpc>
+                <a:spcPct val="100000"/>
+              </a:lnSpc>
+              <a:spcBef>
+                <a:spcPts val="300"/>
+              </a:spcBef>
+              <a:spcAft>
+                <a:spcPts val="0"/>
+              </a:spcAft>
+              <a:buNone/>
+            </a:pPr>
+            <a:r>
+              <a:rPr sz="1800" b="0" i="0" dirty="0">
                 <a:solidFill>
                   <a:srgbClr val="1A1A1A"/>
                 </a:solidFill>
-              </a:defRPr>
-            </a:pPr>
-            <a:r>
-              <a:rPr lang="en-US" sz="1400" typeface="Outfit" dirty="0">
-                <a:solidFill>
-                  <a:srgbClr val="1A1A1A"/>
-                </a:solidFill>
-              </a:rPr>
-              <a:t xml:space="preserve"> Strava (2009): segment-based competition for cyclists and runners — excellent at making routes social, but designed for serious athletes and GPS-tracked workouts, not casual campus walking.</a:t>
-            </a:r>
-          </a:p>
-          <a:p>
-            <a:pPr marL="342900" indent="-228600">
-              <a:buFont typeface="Arial"/>
-              <a:buChar char="•"/>
-              <a:defRPr lang="en-US" sz="1400" typeface="Outfit" dirty="0">
-                <a:solidFill>
-                  <a:srgbClr val="1A1A1A"/>
-                </a:solidFill>
-              </a:defRPr>
-            </a:pPr>
-            <a:r>
-              <a:rPr lang="en-US" sz="1400" typeface="Outfit" dirty="0">
-                <a:solidFill>
-                  <a:srgbClr val="1A1A1A"/>
-                </a:solidFill>
-              </a:rPr>
-              <a:t xml:space="preserve"> Nike Run Club / Adidas Running: guided runs and coaching — good for motivation, but focused on running performance rather than habitual low-intensity activity.</a:t>
-            </a:r>
-          </a:p>
-          <a:p>
-            <a:pPr marL="342900" indent="-228600">
-              <a:buFont typeface="Arial"/>
-              <a:buChar char="•"/>
-              <a:defRPr lang="en-US" sz="1400" typeface="Outfit" dirty="0">
-                <a:solidFill>
-                  <a:srgbClr val="1A1A1A"/>
-                </a:solidFill>
-              </a:defRPr>
-            </a:pPr>
-            <a:r>
-              <a:rPr lang="en-US" sz="1400" typeface="Outfit" dirty="0">
-                <a:solidFill>
-                  <a:srgbClr val="1A1A1A"/>
-                </a:solidFill>
-              </a:rPr>
-              <a:t xml:space="preserve"> Pokémon GO (2016): location-based AR gamification that demonstrably increased walking — the most direct precedent for turning a real map into a game board, but built as a native app with heavy location/privacy requirements. CampusFit explores a lighter, scan-based analogue that works offline as a PWA.</a:t>
-            </a:r>
-          </a:p>
-          <a:p>
-            <a:pPr marL="342900" indent="-228600">
-              <a:buFont typeface="Arial"/>
-              <a:buChar char="•"/>
-              <a:defRPr lang="en-US" sz="1400" typeface="Outfit" dirty="0">
-                <a:solidFill>
-                  <a:srgbClr val="1A1A1A"/>
-                </a:solidFill>
-              </a:defRPr>
-            </a:pPr>
-            <a:r>
-              <a:rPr lang="en-US" sz="1400" typeface="Outfit" dirty="0">
-                <a:solidFill>
-                  <a:srgbClr val="1A1A1A"/>
-                </a:solidFill>
-              </a:rPr>
-              <a:t xml:space="preserve"> Zamzee / Sweatcoin: movement-to-reward conversion — relevant to the reward-economy design; CampusFit's checkpoint model differs by being verifiable (QR scan at a known location) rather than accelerometer-based, reducing fraud.</a:t>
-            </a:r>
-          </a:p>
-          <a:p>
-            <a:pPr>
-              <a:defRPr lang="en-US" sz="800" dirty="0" typeface="Outfit"/>
-            </a:pPr>
-            <a:r>
-              <a:rPr lang="en-US" sz="800" dirty="0" typeface="Outfit"/>
-              <a:t xml:space="preserve"/>
-            </a:r>
-          </a:p>
-          <a:p>
-            <a:pPr>
-              <a:defRPr lang="en-US" sz="1400" dirty="0" typeface="Outfit" b="1">
-                <a:solidFill>
-                  <a:srgbClr val="555555"/>
-                </a:solidFill>
-              </a:defRPr>
-            </a:pPr>
-            <a:r>
-              <a:rPr lang="en-US" sz="1400" dirty="0" typeface="Outfit" b="1">
-                <a:solidFill>
-                  <a:srgbClr val="555555"/>
-                </a:solidFill>
-              </a:rPr>
-              <a:t xml:space="preserve">Gap CampusFit addresses</a:t>
-            </a:r>
-          </a:p>
-          <a:p>
-            <a:pPr>
-              <a:defRPr lang="en-US" sz="1400" dirty="0" typeface="Outfit" i="1">
-                <a:solidFill>
-                  <a:srgbClr val="555555"/>
-                </a:solidFill>
-              </a:defRPr>
-            </a:pPr>
-            <a:r>
-              <a:rPr lang="en-US" sz="1400" dirty="0" typeface="Outfit" i="1">
-                <a:solidFill>
-                  <a:srgbClr val="555555"/>
-                </a:solidFill>
-              </a:rPr>
-              <a:t xml:space="preserve">No existing campus-friendly PWA combines verifiable checkpoint scanning, clubs and crews, a visible reward economy and offline-first installability into a single lightweight app.</a:t>
-            </a:r>
-          </a:p>
-        </a:txBody>
+              </a:rPr>
+              <a:t>10. Evaluate user engagement through pilot testing.</a:t>
+            </a:r>
+          </a:p>
+        </p:txBody>
       </p:sp>
       <p:sp>
         <p:nvSpPr>
@@ -11484,7 +10480,7 @@
                 </a:spcAft>
                 <a:defRPr/>
               </a:pPr>
-              <a:t>9/15/2025</a:t>
+              <a:t>10/7/2026</a:t>
             </a:fld>
             <a:endParaRPr lang="en-US">
               <a:ea typeface="MS PGothic" panose="020B0600070205080204" pitchFamily="34" charset="-128"/>
@@ -11602,7 +10598,7 @@
                 <a:latin typeface="Times New Roman" panose="02020603050405020304" pitchFamily="18" charset="0"/>
                 <a:cs typeface="Times New Roman" panose="02020603050405020304" pitchFamily="18" charset="0"/>
               </a:rPr>
-              <a:t>Proposed Solution</a:t>
+              <a:t>System Diagram</a:t>
             </a:r>
             <a:endParaRPr lang="en-US" dirty="0">
               <a:solidFill>
@@ -11611,327 +10607,6 @@
             </a:endParaRPr>
           </a:p>
         </p:txBody>
-        <a:txBody>
-          <a:bodyPr/>
-          <a:lstStyle/>
-          <a:p>
-            <a:pPr>
-              <a:defRPr lang="en-US" sz="3600" dirty="0" typeface="Outfit" b="1">
-                <a:solidFill>
-                  <a:srgbClr val="1A1A1A"/>
-                </a:solidFill>
-              </a:defRPr>
-            </a:pPr>
-            <a:r>
-              <a:rPr lang="en-US" sz="3600" dirty="0" typeface="Outfit" b="1">
-                <a:solidFill>
-                  <a:srgbClr val="1A1A1A"/>
-                </a:solidFill>
-              </a:rPr>
-              <a:t xml:space="preserve">Methodology and Design</a:t>
-            </a:r>
-          </a:p>
-        </a:txBody>
-      </p:sp>
-      <p:sp>
-        <p:nvSpPr>
-          <p:cNvPr id="3" name="Content Placeholder 2">
-            <a:extLst>
-              <a:ext uri="{FF2B5EF4-FFF2-40B4-BE49-F238E27FC236}">
-                <a16:creationId xmlns:a16="http://schemas.microsoft.com/office/drawing/2014/main" id="{B9B6B7A8-65F2-E73A-00E9-945683A8A1BD}"/>
-              </a:ext>
-            </a:extLst>
-          </p:cNvPr>
-          <p:cNvSpPr>
-            <a:spLocks noGrp="1"/>
-          </p:cNvSpPr>
-          <p:nvPr>
-            <p:ph idx="1"/>
-          </p:nvPr>
-        </p:nvSpPr>
-        <p:spPr/>
-        <p:txBody>
-          <a:bodyPr/>
-          <a:lstStyle/>
-          <a:p>
-            <a:endParaRPr lang="en-US" sz="3200" kern="100" dirty="0">
-              <a:effectLst/>
-              <a:latin typeface="Times New Roman" panose="02020603050405020304" pitchFamily="18" charset="0"/>
-              <a:ea typeface="Aptos" panose="020B0004020202020204" pitchFamily="34" charset="0"/>
-              <a:cs typeface="Times New Roman" panose="02020603050405020304" pitchFamily="18" charset="0"/>
-            </a:endParaRPr>
-          </a:p>
-          <a:p>
-            <a:endParaRPr lang="en-US" kern="100" dirty="0">
-              <a:latin typeface="Times New Roman" panose="02020603050405020304" pitchFamily="18" charset="0"/>
-              <a:ea typeface="Aptos" panose="020B0004020202020204" pitchFamily="34" charset="0"/>
-              <a:cs typeface="Times New Roman" panose="02020603050405020304" pitchFamily="18" charset="0"/>
-            </a:endParaRPr>
-          </a:p>
-        </p:txBody>
-        <a:txBody>
-          <a:bodyPr/>
-          <a:lstStyle/>
-          <a:p>
-            <a:pPr>
-              <a:defRPr lang="en-US" sz="1800" dirty="0" typeface="Outfit" b="1">
-                <a:solidFill>
-                  <a:srgbClr val="2E7D32"/>
-                </a:solidFill>
-              </a:defRPr>
-            </a:pPr>
-            <a:r>
-              <a:rPr lang="en-US" sz="1800" dirty="0" typeface="Outfit" b="1">
-                <a:solidFill>
-                  <a:srgbClr val="2E7D32"/>
-                </a:solidFill>
-              </a:rPr>
-              <a:t xml:space="preserve">Research Methodology</a:t>
-            </a:r>
-          </a:p>
-          <a:p>
-            <a:pPr marL="342900" indent="-228600">
-              <a:buFont typeface="Arial"/>
-              <a:buChar char="•"/>
-              <a:defRPr lang="en-US" sz="1400" typeface="Outfit" dirty="0">
-                <a:solidFill>
-                  <a:srgbClr val="1A1A1A"/>
-                </a:solidFill>
-              </a:defRPr>
-            </a:pPr>
-            <a:r>
-              <a:rPr lang="en-US" sz="1400" typeface="Outfit" dirty="0">
-                <a:solidFill>
-                  <a:srgbClr val="1A1A1A"/>
-                </a:solidFill>
-              </a:rPr>
-              <a:t xml:space="preserve"> Design science research (Hevner et al., 2004): build a functional artefact (the PWA) and evaluate it against defined metrics — not merely a literature review.</a:t>
-            </a:r>
-          </a:p>
-          <a:p>
-            <a:pPr marL="342900" indent="-228600">
-              <a:buFont typeface="Arial"/>
-              <a:buChar char="•"/>
-              <a:defRPr lang="en-US" sz="1400" typeface="Outfit" dirty="0">
-                <a:solidFill>
-                  <a:srgbClr val="1A1A1A"/>
-                </a:solidFill>
-              </a:defRPr>
-            </a:pPr>
-            <a:r>
-              <a:rPr lang="en-US" sz="1400" typeface="Outfit" dirty="0">
-                <a:solidFill>
-                  <a:srgbClr val="1A1A1A"/>
-                </a:solidFill>
-              </a:rPr>
-              <a:t xml:space="preserve"> Agile development with two-week iteration cycles; the artefact was built in TypeScript + React, using Tailwind CSS for the design system and Vite for bundling.</a:t>
-            </a:r>
-          </a:p>
-          <a:p>
-            <a:pPr marL="342900" indent="-228600">
-              <a:buFont typeface="Arial"/>
-              <a:buChar char="•"/>
-              <a:defRPr lang="en-US" sz="1400" typeface="Outfit" dirty="0">
-                <a:solidFill>
-                  <a:srgbClr val="1A1A1A"/>
-                </a:solidFill>
-              </a:defRPr>
-            </a:pPr>
-            <a:r>
-              <a:rPr lang="en-US" sz="1400" typeface="Outfit" dirty="0">
-                <a:solidFill>
-                  <a:srgbClr val="1A1A1A"/>
-                </a:solidFill>
-              </a:rPr>
-              <a:t xml:space="preserve"> Evaluation approach: (a) functional verification of all routes, scan loop and reward calculations; (b) usability walkthrough with a small student panel; (c) reward-economy analysis from demo data and seeded user profiles.</a:t>
-            </a:r>
-          </a:p>
-          <a:p>
-            <a:pPr>
-              <a:defRPr lang="en-US" sz="800" dirty="0" typeface="Outfit"/>
-            </a:pPr>
-            <a:r>
-              <a:rPr lang="en-US" sz="800" dirty="0" typeface="Outfit"/>
-              <a:t xml:space="preserve"/>
-            </a:r>
-          </a:p>
-          <a:p>
-            <a:pPr>
-              <a:defRPr lang="en-US" sz="1800" dirty="0" typeface="Outfit" b="1">
-                <a:solidFill>
-                  <a:srgbClr val="2E7D32"/>
-                </a:solidFill>
-              </a:defRPr>
-            </a:pPr>
-            <a:r>
-              <a:rPr lang="en-US" sz="1800" dirty="0" typeface="Outfit" b="1">
-                <a:solidFill>
-                  <a:srgbClr val="2E7D32"/>
-                </a:solidFill>
-              </a:rPr>
-              <a:t xml:space="preserve">Design System</a:t>
-            </a:r>
-          </a:p>
-          <a:p>
-            <a:pPr marL="342900" indent="-228600">
-              <a:buFont typeface="Arial"/>
-              <a:buChar char="•"/>
-              <a:defRPr lang="en-US" sz="1400" typeface="Outfit" dirty="0">
-                <a:solidFill>
-                  <a:srgbClr val="1A1A1A"/>
-                </a:solidFill>
-              </a:defRPr>
-            </a:pPr>
-            <a:r>
-              <a:rPr lang="en-US" sz="1400" typeface="Outfit" dirty="0">
-                <a:solidFill>
-                  <a:srgbClr val="1A1A1A"/>
-                </a:solidFill>
-              </a:rPr>
-              <a:t xml:space="preserve"> Warm cream surface (#FFF8EC family) with mint green primary (#2E7D32 family) — approachable, campus-natural tones chosen to avoid the aggressive neon of many fitness apps.</a:t>
-            </a:r>
-          </a:p>
-          <a:p>
-            <a:pPr marL="342900" indent="-228600">
-              <a:buFont typeface="Arial"/>
-              <a:buChar char="•"/>
-              <a:defRPr lang="en-US" sz="1400" typeface="Outfit" dirty="0">
-                <a:solidFill>
-                  <a:srgbClr val="1A1A1A"/>
-                </a:solidFill>
-              </a:defRPr>
-            </a:pPr>
-            <a:r>
-              <a:rPr lang="en-US" sz="1400" typeface="Outfit" dirty="0">
-                <a:solidFill>
-                  <a:srgbClr val="1A1A1A"/>
-                </a:solidFill>
-              </a:rPr>
-              <a:t xml:space="preserve"> Outfit type family for display/headlines; readable label/body scale for stats and captions — 20px cards, consistent spacing tokens (xs / sm / md / lg / xl).</a:t>
-            </a:r>
-          </a:p>
-          <a:p>
-            <a:pPr marL="342900" indent="-228600">
-              <a:buFont typeface="Arial"/>
-              <a:buChar char="•"/>
-              <a:defRPr lang="en-US" sz="1400" typeface="Outfit" dirty="0">
-                <a:solidFill>
-                  <a:srgbClr val="1A1A1A"/>
-                </a:solidFill>
-              </a:defRPr>
-            </a:pPr>
-            <a:r>
-              <a:rPr lang="en-US" sz="1400" typeface="Outfit" dirty="0">
-                <a:solidFill>
-                  <a:srgbClr val="1A1A1A"/>
-                </a:solidFill>
-              </a:rPr>
-              <a:t xml:space="preserve"> Component tokens: rounded-xl / rounded-2xl cards, soft borders, elevation via shadow-card / shadow-card-lg, tactile active:scale feedback on every interactive element.</a:t>
-            </a:r>
-          </a:p>
-          <a:p>
-            <a:pPr>
-              <a:defRPr lang="en-US" sz="800" dirty="0" typeface="Outfit"/>
-            </a:pPr>
-            <a:r>
-              <a:rPr lang="en-US" sz="800" dirty="0" typeface="Outfit"/>
-              <a:t xml:space="preserve"/>
-            </a:r>
-          </a:p>
-          <a:p>
-            <a:pPr>
-              <a:defRPr lang="en-US" sz="1800" dirty="0" typeface="Outfit" b="1">
-                <a:solidFill>
-                  <a:srgbClr val="2E7D32"/>
-                </a:solidFill>
-              </a:defRPr>
-            </a:pPr>
-            <a:r>
-              <a:rPr lang="en-US" sz="1800" dirty="0" typeface="Outfit" b="1">
-                <a:solidFill>
-                  <a:srgbClr val="2E7D32"/>
-                </a:solidFill>
-              </a:rPr>
-              <a:t xml:space="preserve">Core Design Decisions</a:t>
-            </a:r>
-          </a:p>
-          <a:p>
-            <a:pPr marL="342900" indent="-228600">
-              <a:buFont typeface="Arial"/>
-              <a:buChar char="•"/>
-              <a:defRPr lang="en-US" sz="1400" typeface="Outfit" dirty="0">
-                <a:solidFill>
-                  <a:srgbClr val="1A1A1A"/>
-                </a:solidFill>
-              </a:defRPr>
-            </a:pPr>
-            <a:r>
-              <a:rPr lang="en-US" sz="1400" typeface="Outfit" dirty="0">
-                <a:solidFill>
-                  <a:srgbClr val="1A1A1A"/>
-                </a:solidFill>
-              </a:rPr>
-              <a:t xml:space="preserve"> Progressive Web App (not native): one link to install, works offline once cached, no app-store review gate — chosen specifically for low-friction campus adoption.</a:t>
-            </a:r>
-          </a:p>
-          <a:p>
-            <a:pPr marL="342900" indent="-228600">
-              <a:buFont typeface="Arial"/>
-              <a:buChar char="•"/>
-              <a:defRPr lang="en-US" sz="1400" typeface="Outfit" dirty="0">
-                <a:solidFill>
-                  <a:srgbClr val="1A1A1A"/>
-                </a:solidFill>
-              </a:defRPr>
-            </a:pPr>
-            <a:r>
-              <a:rPr lang="en-US" sz="1400" typeface="Outfit" dirty="0">
-                <a:solidFill>
-                  <a:srgbClr val="1A1A1A"/>
-                </a:solidFill>
-              </a:rPr>
-              <a:t xml:space="preserve"> QR-code checkpoint scanning (not GPS): verifiable, low battery cost, works indoors and under tree cover — a scan at a physical sign is the proof of presence.</a:t>
-            </a:r>
-          </a:p>
-          <a:p>
-            <a:pPr marL="342900" indent="-228600">
-              <a:buFont typeface="Arial"/>
-              <a:buChar char="•"/>
-              <a:defRPr lang="en-US" sz="1400" typeface="Outfit" dirty="0">
-                <a:solidFill>
-                  <a:srgbClr val="1A1A1A"/>
-                </a:solidFill>
-              </a:defRPr>
-            </a:pPr>
-            <a:r>
-              <a:rPr lang="en-US" sz="1400" typeface="Outfit" dirty="0">
-                <a:solidFill>
-                  <a:srgbClr val="1A1A1A"/>
-                </a:solidFill>
-              </a:rPr>
-              <a:t xml:space="preserve"> Clubs and crews over open global leaderboard: keeps competition socially bounded and relevant to the campus community.</a:t>
-            </a:r>
-          </a:p>
-          <a:p>
-            <a:pPr marL="342900" indent="-228600">
-              <a:buFont typeface="Arial"/>
-              <a:buChar char="•"/>
-              <a:defRPr lang="en-US" sz="1400" typeface="Outfit" dirty="0">
-                <a:solidFill>
-                  <a:srgbClr val="1A1A1A"/>
-                </a:solidFill>
-              </a:defRPr>
-            </a:pPr>
-            <a:r>
-              <a:rPr lang="en-US" sz="1400" typeface="Outfit" dirty="0">
-                <a:solidFill>
-                  <a:srgbClr val="1A1A1A"/>
-                </a:solidFill>
-              </a:rPr>
-              <a:t xml:space="preserve"> Demo mode: the app runs entirely from bundled demo data when Supabase is not configured, so the artefact is presentable and testable before the database exists.</a:t>
-            </a:r>
-          </a:p>
-        </a:txBody>
       </p:sp>
       <p:sp>
         <p:nvSpPr>
@@ -11976,7 +10651,7 @@
                 </a:spcAft>
                 <a:defRPr/>
               </a:pPr>
-              <a:t>9/15/2025</a:t>
+              <a:t>10/7/2026</a:t>
             </a:fld>
             <a:endParaRPr lang="en-US">
               <a:ea typeface="MS PGothic" panose="020B0600070205080204" pitchFamily="34" charset="-128"/>
@@ -12037,70 +10712,781 @@
       </p:sp>
       <p:sp>
         <p:nvSpPr>
-          <p:cNvPr id="7" name="Rectangle 1">
-            <a:extLst>
-              <a:ext uri="{FF2B5EF4-FFF2-40B4-BE49-F238E27FC236}">
-                <a16:creationId xmlns:a16="http://schemas.microsoft.com/office/drawing/2014/main" id="{51A869A9-1EC7-F343-073E-F51243E5FC8F}"/>
-              </a:ext>
-            </a:extLst>
-          </p:cNvPr>
-          <p:cNvSpPr>
-            <a:spLocks noChangeArrowheads="1"/>
-          </p:cNvSpPr>
+          <p:cNvPr id="6" name="TextBox 5"/>
+          <p:cNvSpPr txBox="1"/>
           <p:nvPr/>
         </p:nvSpPr>
-        <p:spPr bwMode="auto">
+        <p:spPr>
           <a:xfrm>
-            <a:off x="3127375" y="2263775"/>
-            <a:ext cx="12192000" cy="457200"/>
+            <a:off x="730635" y="1548312"/>
+            <a:ext cx="10972800" cy="270843"/>
           </a:xfrm>
           <a:prstGeom prst="rect">
             <a:avLst/>
           </a:prstGeom>
           <a:noFill/>
+        </p:spPr>
+        <p:txBody>
+          <a:bodyPr wrap="square" lIns="0" tIns="27432" rIns="0" bIns="27432" anchor="t">
+            <a:spAutoFit/>
+          </a:bodyPr>
+          <a:lstStyle/>
+          <a:p>
+            <a:pPr marL="0" indent="0" algn="l">
+              <a:lnSpc>
+                <a:spcPct val="100000"/>
+              </a:lnSpc>
+              <a:spcBef>
+                <a:spcPts val="0"/>
+              </a:spcBef>
+              <a:spcAft>
+                <a:spcPts val="0"/>
+              </a:spcAft>
+              <a:buNone/>
+            </a:pPr>
+            <a:r>
+              <a:rPr sz="1400" b="1" i="1" dirty="0">
+                <a:solidFill>
+                  <a:srgbClr val="5A5A5A"/>
+                </a:solidFill>
+              </a:rPr>
+              <a:t>Three-tier architecture — the client never holds reward authority</a:t>
+            </a:r>
+          </a:p>
+        </p:txBody>
+      </p:sp>
+      <p:sp>
+        <p:nvSpPr>
+          <p:cNvPr id="7" name="Rounded Rectangle 6"/>
+          <p:cNvSpPr/>
+          <p:nvPr/>
+        </p:nvSpPr>
+        <p:spPr>
+          <a:xfrm>
+            <a:off x="730635" y="1840920"/>
+            <a:ext cx="3108960" cy="2148840"/>
+          </a:xfrm>
+          <a:prstGeom prst="roundRect">
+            <a:avLst/>
+          </a:prstGeom>
+          <a:solidFill>
+            <a:srgbClr val="E6F9F1"/>
+          </a:solidFill>
+          <a:ln w="19050">
+            <a:solidFill>
+              <a:srgbClr val="1ECC8B"/>
+            </a:solidFill>
+          </a:ln>
+          <a:effectLst/>
+        </p:spPr>
+        <p:style>
+          <a:lnRef idx="1">
+            <a:schemeClr val="accent1"/>
+          </a:lnRef>
+          <a:fillRef idx="3">
+            <a:schemeClr val="accent1"/>
+          </a:fillRef>
+          <a:effectRef idx="2">
+            <a:schemeClr val="accent1"/>
+          </a:effectRef>
+          <a:fontRef idx="minor">
+            <a:schemeClr val="lt1"/>
+          </a:fontRef>
+        </p:style>
+        <p:txBody>
+          <a:bodyPr wrap="square" lIns="73152" tIns="27432" rIns="73152" bIns="27432" rtlCol="0" anchor="ctr"/>
+          <a:lstStyle/>
+          <a:p>
+            <a:pPr marL="0" indent="0" algn="ctr">
+              <a:lnSpc>
+                <a:spcPct val="100000"/>
+              </a:lnSpc>
+              <a:spcBef>
+                <a:spcPts val="0"/>
+              </a:spcBef>
+              <a:spcAft>
+                <a:spcPts val="600"/>
+              </a:spcAft>
+              <a:buNone/>
+            </a:pPr>
+            <a:r>
+              <a:rPr sz="1400" b="1" i="0" dirty="0">
+                <a:solidFill>
+                  <a:srgbClr val="17795E"/>
+                </a:solidFill>
+              </a:rPr>
+              <a:t>Physical tier</a:t>
+            </a:r>
+          </a:p>
+          <a:p>
+            <a:pPr marL="228600" indent="-228600" algn="l">
+              <a:lnSpc>
+                <a:spcPct val="100000"/>
+              </a:lnSpc>
+              <a:spcBef>
+                <a:spcPts val="300"/>
+              </a:spcBef>
+              <a:spcAft>
+                <a:spcPts val="0"/>
+              </a:spcAft>
+              <a:buFont typeface="Arial"/>
+              <a:buChar char="•"/>
+            </a:pPr>
+            <a:r>
+              <a:rPr sz="1050" b="0" i="0" dirty="0">
+                <a:solidFill>
+                  <a:srgbClr val="1A1A1A"/>
+                </a:solidFill>
+              </a:rPr>
+              <a:t>Printed QR signs at landmarks (LIB-A1)</a:t>
+            </a:r>
+          </a:p>
+          <a:p>
+            <a:pPr marL="228600" indent="-228600" algn="l">
+              <a:lnSpc>
+                <a:spcPct val="100000"/>
+              </a:lnSpc>
+              <a:spcBef>
+                <a:spcPts val="300"/>
+              </a:spcBef>
+              <a:spcAft>
+                <a:spcPts val="0"/>
+              </a:spcAft>
+              <a:buFont typeface="Arial"/>
+              <a:buChar char="•"/>
+            </a:pPr>
+            <a:r>
+              <a:rPr sz="1050" b="0" i="0" dirty="0">
+                <a:solidFill>
+                  <a:srgbClr val="1A1A1A"/>
+                </a:solidFill>
+              </a:rPr>
+              <a:t>Code registry maps code → checkpoint</a:t>
+            </a:r>
+          </a:p>
+          <a:p>
+            <a:pPr marL="228600" indent="-228600" algn="l">
+              <a:lnSpc>
+                <a:spcPct val="100000"/>
+              </a:lnSpc>
+              <a:spcBef>
+                <a:spcPts val="300"/>
+              </a:spcBef>
+              <a:spcAft>
+                <a:spcPts val="0"/>
+              </a:spcAft>
+              <a:buFont typeface="Arial"/>
+              <a:buChar char="•"/>
+            </a:pPr>
+            <a:r>
+              <a:rPr sz="1050" b="0" i="0" dirty="0">
+                <a:solidFill>
+                  <a:srgbClr val="1A1A1A"/>
+                </a:solidFill>
+              </a:rPr>
+              <a:t>NFC-ready, no schema change</a:t>
+            </a:r>
+          </a:p>
+        </p:txBody>
+      </p:sp>
+      <p:sp>
+        <p:nvSpPr>
+          <p:cNvPr id="8" name="Rounded Rectangle 7"/>
+          <p:cNvSpPr/>
+          <p:nvPr/>
+        </p:nvSpPr>
+        <p:spPr>
+          <a:xfrm>
+            <a:off x="4662555" y="1840920"/>
+            <a:ext cx="3108960" cy="2148840"/>
+          </a:xfrm>
+          <a:prstGeom prst="roundRect">
+            <a:avLst/>
+          </a:prstGeom>
+          <a:solidFill>
+            <a:srgbClr val="E6F9F1"/>
+          </a:solidFill>
+          <a:ln w="19050">
+            <a:solidFill>
+              <a:srgbClr val="1ECC8B"/>
+            </a:solidFill>
+          </a:ln>
+          <a:effectLst/>
+        </p:spPr>
+        <p:style>
+          <a:lnRef idx="1">
+            <a:schemeClr val="accent1"/>
+          </a:lnRef>
+          <a:fillRef idx="3">
+            <a:schemeClr val="accent1"/>
+          </a:fillRef>
+          <a:effectRef idx="2">
+            <a:schemeClr val="accent1"/>
+          </a:effectRef>
+          <a:fontRef idx="minor">
+            <a:schemeClr val="lt1"/>
+          </a:fontRef>
+        </p:style>
+        <p:txBody>
+          <a:bodyPr wrap="square" lIns="73152" tIns="27432" rIns="73152" bIns="27432" rtlCol="0" anchor="ctr"/>
+          <a:lstStyle/>
+          <a:p>
+            <a:pPr marL="0" indent="0" algn="ctr">
+              <a:lnSpc>
+                <a:spcPct val="100000"/>
+              </a:lnSpc>
+              <a:spcBef>
+                <a:spcPts val="0"/>
+              </a:spcBef>
+              <a:spcAft>
+                <a:spcPts val="600"/>
+              </a:spcAft>
+              <a:buNone/>
+            </a:pPr>
+            <a:r>
+              <a:rPr sz="1400" b="1" i="0">
+                <a:solidFill>
+                  <a:srgbClr val="17795E"/>
+                </a:solidFill>
+              </a:rPr>
+              <a:t>Client tier</a:t>
+            </a:r>
+          </a:p>
+          <a:p>
+            <a:pPr marL="228600" indent="-228600" algn="l">
+              <a:lnSpc>
+                <a:spcPct val="100000"/>
+              </a:lnSpc>
+              <a:spcBef>
+                <a:spcPts val="300"/>
+              </a:spcBef>
+              <a:spcAft>
+                <a:spcPts val="0"/>
+              </a:spcAft>
+              <a:buFont typeface="Arial"/>
+              <a:buChar char="•"/>
+            </a:pPr>
+            <a:r>
+              <a:rPr sz="1050" b="0" i="0">
+                <a:solidFill>
+                  <a:srgbClr val="1A1A1A"/>
+                </a:solidFill>
+              </a:rPr>
+              <a:t>React 19 + TypeScript + Tailwind PWA</a:t>
+            </a:r>
+          </a:p>
+          <a:p>
+            <a:pPr marL="228600" indent="-228600" algn="l">
+              <a:lnSpc>
+                <a:spcPct val="100000"/>
+              </a:lnSpc>
+              <a:spcBef>
+                <a:spcPts val="300"/>
+              </a:spcBef>
+              <a:spcAft>
+                <a:spcPts val="0"/>
+              </a:spcAft>
+              <a:buFont typeface="Arial"/>
+              <a:buChar char="•"/>
+            </a:pPr>
+            <a:r>
+              <a:rPr sz="1050" b="0" i="0">
+                <a:solidFill>
+                  <a:srgbClr val="1A1A1A"/>
+                </a:solidFill>
+              </a:rPr>
+              <a:t>Collects the code, renders award &amp; profile</a:t>
+            </a:r>
+          </a:p>
+          <a:p>
+            <a:pPr marL="228600" indent="-228600" algn="l">
+              <a:lnSpc>
+                <a:spcPct val="100000"/>
+              </a:lnSpc>
+              <a:spcBef>
+                <a:spcPts val="300"/>
+              </a:spcBef>
+              <a:spcAft>
+                <a:spcPts val="0"/>
+              </a:spcAft>
+              <a:buFont typeface="Arial"/>
+              <a:buChar char="•"/>
+            </a:pPr>
+            <a:r>
+              <a:rPr sz="1050" b="0" i="0">
+                <a:solidFill>
+                  <a:srgbClr val="1A1A1A"/>
+                </a:solidFill>
+              </a:rPr>
+              <a:t>Installable, offline shell (Vercel)</a:t>
+            </a:r>
+          </a:p>
+          <a:p>
+            <a:pPr marL="228600" indent="-228600" algn="l">
+              <a:lnSpc>
+                <a:spcPct val="100000"/>
+              </a:lnSpc>
+              <a:spcBef>
+                <a:spcPts val="300"/>
+              </a:spcBef>
+              <a:spcAft>
+                <a:spcPts val="0"/>
+              </a:spcAft>
+              <a:buFont typeface="Arial"/>
+              <a:buChar char="•"/>
+            </a:pPr>
+            <a:r>
+              <a:rPr sz="1050" b="0" i="0">
+                <a:solidFill>
+                  <a:srgbClr val="1A1A1A"/>
+                </a:solidFill>
+              </a:rPr>
+              <a:t>Zero reward authority — presentation only</a:t>
+            </a:r>
+          </a:p>
+        </p:txBody>
+      </p:sp>
+      <p:sp>
+        <p:nvSpPr>
+          <p:cNvPr id="9" name="Rounded Rectangle 8"/>
+          <p:cNvSpPr/>
+          <p:nvPr/>
+        </p:nvSpPr>
+        <p:spPr>
+          <a:xfrm>
+            <a:off x="8594475" y="1840920"/>
+            <a:ext cx="3108960" cy="2148840"/>
+          </a:xfrm>
+          <a:prstGeom prst="roundRect">
+            <a:avLst/>
+          </a:prstGeom>
+          <a:solidFill>
+            <a:srgbClr val="E6F9F1"/>
+          </a:solidFill>
+          <a:ln w="19050">
+            <a:solidFill>
+              <a:srgbClr val="1ECC8B"/>
+            </a:solidFill>
+          </a:ln>
+          <a:effectLst/>
+        </p:spPr>
+        <p:style>
+          <a:lnRef idx="1">
+            <a:schemeClr val="accent1"/>
+          </a:lnRef>
+          <a:fillRef idx="3">
+            <a:schemeClr val="accent1"/>
+          </a:fillRef>
+          <a:effectRef idx="2">
+            <a:schemeClr val="accent1"/>
+          </a:effectRef>
+          <a:fontRef idx="minor">
+            <a:schemeClr val="lt1"/>
+          </a:fontRef>
+        </p:style>
+        <p:txBody>
+          <a:bodyPr wrap="square" lIns="73152" tIns="27432" rIns="73152" bIns="27432" rtlCol="0" anchor="ctr"/>
+          <a:lstStyle/>
+          <a:p>
+            <a:pPr marL="0" indent="0" algn="ctr">
+              <a:lnSpc>
+                <a:spcPct val="100000"/>
+              </a:lnSpc>
+              <a:spcBef>
+                <a:spcPts val="0"/>
+              </a:spcBef>
+              <a:spcAft>
+                <a:spcPts val="600"/>
+              </a:spcAft>
+              <a:buNone/>
+            </a:pPr>
+            <a:r>
+              <a:rPr sz="1400" b="1" i="0">
+                <a:solidFill>
+                  <a:srgbClr val="17795E"/>
+                </a:solidFill>
+              </a:rPr>
+              <a:t>Backend tier</a:t>
+            </a:r>
+          </a:p>
+          <a:p>
+            <a:pPr marL="228600" indent="-228600" algn="l">
+              <a:lnSpc>
+                <a:spcPct val="100000"/>
+              </a:lnSpc>
+              <a:spcBef>
+                <a:spcPts val="300"/>
+              </a:spcBef>
+              <a:spcAft>
+                <a:spcPts val="0"/>
+              </a:spcAft>
+              <a:buFont typeface="Arial"/>
+              <a:buChar char="•"/>
+            </a:pPr>
+            <a:r>
+              <a:rPr sz="1050" b="0" i="0">
+                <a:solidFill>
+                  <a:srgbClr val="1A1A1A"/>
+                </a:solidFill>
+              </a:rPr>
+              <a:t>Supabase — auth (email + OTP)</a:t>
+            </a:r>
+          </a:p>
+          <a:p>
+            <a:pPr marL="228600" indent="-228600" algn="l">
+              <a:lnSpc>
+                <a:spcPct val="100000"/>
+              </a:lnSpc>
+              <a:spcBef>
+                <a:spcPts val="300"/>
+              </a:spcBef>
+              <a:spcAft>
+                <a:spcPts val="0"/>
+              </a:spcAft>
+              <a:buFont typeface="Arial"/>
+              <a:buChar char="•"/>
+            </a:pPr>
+            <a:r>
+              <a:rPr sz="1050" b="0" i="0">
+                <a:solidFill>
+                  <a:srgbClr val="1A1A1A"/>
+                </a:solidFill>
+              </a:rPr>
+              <a:t>Postgres + row-level security</a:t>
+            </a:r>
+          </a:p>
+          <a:p>
+            <a:pPr marL="228600" indent="-228600" algn="l">
+              <a:lnSpc>
+                <a:spcPct val="100000"/>
+              </a:lnSpc>
+              <a:spcBef>
+                <a:spcPts val="300"/>
+              </a:spcBef>
+              <a:spcAft>
+                <a:spcPts val="0"/>
+              </a:spcAft>
+              <a:buFont typeface="Arial"/>
+              <a:buChar char="•"/>
+            </a:pPr>
+            <a:r>
+              <a:rPr sz="1050" b="0" i="0">
+                <a:solidFill>
+                  <a:srgbClr val="1A1A1A"/>
+                </a:solidFill>
+              </a:rPr>
+              <a:t>scan_checkpoint() in one transaction</a:t>
+            </a:r>
+          </a:p>
+          <a:p>
+            <a:pPr marL="228600" indent="-228600" algn="l">
+              <a:lnSpc>
+                <a:spcPct val="100000"/>
+              </a:lnSpc>
+              <a:spcBef>
+                <a:spcPts val="300"/>
+              </a:spcBef>
+              <a:spcAft>
+                <a:spcPts val="0"/>
+              </a:spcAft>
+              <a:buFont typeface="Arial"/>
+              <a:buChar char="•"/>
+            </a:pPr>
+            <a:r>
+              <a:rPr sz="1050" b="0" i="0">
+                <a:solidFill>
+                  <a:srgbClr val="1A1A1A"/>
+                </a:solidFill>
+              </a:rPr>
+              <a:t>REST data client generated from schema</a:t>
+            </a:r>
+          </a:p>
+        </p:txBody>
+      </p:sp>
+      <p:sp>
+        <p:nvSpPr>
+          <p:cNvPr id="10" name="Right Arrow 9"/>
+          <p:cNvSpPr/>
+          <p:nvPr/>
+        </p:nvSpPr>
+        <p:spPr>
+          <a:xfrm>
+            <a:off x="3921891" y="2682169"/>
+            <a:ext cx="658368" cy="457200"/>
+          </a:xfrm>
+          <a:prstGeom prst="rightArrow">
+            <a:avLst/>
+          </a:prstGeom>
+          <a:solidFill>
+            <a:srgbClr val="1ECC8B"/>
+          </a:solidFill>
           <a:ln>
             <a:noFill/>
           </a:ln>
           <a:effectLst/>
-          <a:extLst>
-            <a:ext uri="{909E8E84-426E-40DD-AFC4-6F175D3DCCD1}">
-              <a14:hiddenFill xmlns:a14="http://schemas.microsoft.com/office/drawing/2010/main">
-                <a:solidFill>
-                  <a:schemeClr val="accent1"/>
-                </a:solidFill>
-              </a14:hiddenFill>
-            </a:ext>
-            <a:ext uri="{91240B29-F687-4F45-9708-019B960494DF}">
-              <a14:hiddenLine xmlns:a14="http://schemas.microsoft.com/office/drawing/2010/main" w="9525">
-                <a:solidFill>
-                  <a:schemeClr val="tx1"/>
-                </a:solidFill>
-                <a:miter lim="800000"/>
-                <a:headEnd/>
-                <a:tailEnd/>
-              </a14:hiddenLine>
-            </a:ext>
-            <a:ext uri="{AF507438-7753-43E0-B8FC-AC1667EBCBE1}">
-              <a14:hiddenEffects xmlns:a14="http://schemas.microsoft.com/office/drawing/2010/main">
-                <a:effectLst>
-                  <a:outerShdw dist="35921" dir="2700000" algn="ctr" rotWithShape="0">
-                    <a:schemeClr val="bg2"/>
-                  </a:outerShdw>
-                </a:effectLst>
-              </a14:hiddenEffects>
-            </a:ext>
-          </a:extLst>
         </p:spPr>
-        <p:txBody>
-          <a:bodyPr vert="horz" wrap="none" lIns="91440" tIns="45720" rIns="91440" bIns="45720" numCol="1" anchor="ctr" anchorCtr="0" compatLnSpc="1">
-            <a:prstTxWarp prst="textNoShape">
-              <a:avLst/>
-            </a:prstTxWarp>
-            <a:spAutoFit/>
-          </a:bodyPr>
-          <a:lstStyle/>
-          <a:p>
-            <a:endParaRPr lang="en-US"/>
+        <p:style>
+          <a:lnRef idx="1">
+            <a:schemeClr val="accent1"/>
+          </a:lnRef>
+          <a:fillRef idx="3">
+            <a:schemeClr val="accent1"/>
+          </a:fillRef>
+          <a:effectRef idx="2">
+            <a:schemeClr val="accent1"/>
+          </a:effectRef>
+          <a:fontRef idx="minor">
+            <a:schemeClr val="lt1"/>
+          </a:fontRef>
+        </p:style>
+        <p:txBody>
+          <a:bodyPr rtlCol="0" anchor="ctr"/>
+          <a:lstStyle/>
+          <a:p>
+            <a:pPr algn="ctr"/>
+            <a:endParaRPr/>
+          </a:p>
+        </p:txBody>
+      </p:sp>
+      <p:sp>
+        <p:nvSpPr>
+          <p:cNvPr id="11" name="Right Arrow 10"/>
+          <p:cNvSpPr/>
+          <p:nvPr/>
+        </p:nvSpPr>
+        <p:spPr>
+          <a:xfrm>
+            <a:off x="7853811" y="2682169"/>
+            <a:ext cx="658368" cy="457200"/>
+          </a:xfrm>
+          <a:prstGeom prst="rightArrow">
+            <a:avLst/>
+          </a:prstGeom>
+          <a:solidFill>
+            <a:srgbClr val="1ECC8B"/>
+          </a:solidFill>
+          <a:ln>
+            <a:noFill/>
+          </a:ln>
+          <a:effectLst/>
+        </p:spPr>
+        <p:style>
+          <a:lnRef idx="1">
+            <a:schemeClr val="accent1"/>
+          </a:lnRef>
+          <a:fillRef idx="3">
+            <a:schemeClr val="accent1"/>
+          </a:fillRef>
+          <a:effectRef idx="2">
+            <a:schemeClr val="accent1"/>
+          </a:effectRef>
+          <a:fontRef idx="minor">
+            <a:schemeClr val="lt1"/>
+          </a:fontRef>
+        </p:style>
+        <p:txBody>
+          <a:bodyPr rtlCol="0" anchor="ctr"/>
+          <a:lstStyle/>
+          <a:p>
+            <a:pPr algn="ctr"/>
+            <a:endParaRPr/>
+          </a:p>
+        </p:txBody>
+      </p:sp>
+      <p:sp>
+        <p:nvSpPr>
+          <p:cNvPr id="12" name="Left Arrow 11"/>
+          <p:cNvSpPr/>
+          <p:nvPr/>
+        </p:nvSpPr>
+        <p:spPr>
+          <a:xfrm>
+            <a:off x="4662555" y="4190929"/>
+            <a:ext cx="7040880" cy="420624"/>
+          </a:xfrm>
+          <a:prstGeom prst="leftArrow">
+            <a:avLst/>
+          </a:prstGeom>
+          <a:solidFill>
+            <a:srgbClr val="1ECC8B"/>
+          </a:solidFill>
+          <a:ln>
+            <a:noFill/>
+          </a:ln>
+          <a:effectLst/>
+        </p:spPr>
+        <p:style>
+          <a:lnRef idx="1">
+            <a:schemeClr val="accent1"/>
+          </a:lnRef>
+          <a:fillRef idx="3">
+            <a:schemeClr val="accent1"/>
+          </a:fillRef>
+          <a:effectRef idx="2">
+            <a:schemeClr val="accent1"/>
+          </a:effectRef>
+          <a:fontRef idx="minor">
+            <a:schemeClr val="lt1"/>
+          </a:fontRef>
+        </p:style>
+        <p:txBody>
+          <a:bodyPr wrap="square" lIns="164592" tIns="27432" rIns="164592" bIns="27432" rtlCol="0" anchor="ctr"/>
+          <a:lstStyle/>
+          <a:p>
+            <a:pPr marL="0" indent="0" algn="ctr">
+              <a:lnSpc>
+                <a:spcPct val="100000"/>
+              </a:lnSpc>
+              <a:spcBef>
+                <a:spcPts val="0"/>
+              </a:spcBef>
+              <a:spcAft>
+                <a:spcPts val="0"/>
+              </a:spcAft>
+              <a:buNone/>
+            </a:pPr>
+            <a:r>
+              <a:rPr sz="1050" b="1" i="0">
+                <a:solidFill>
+                  <a:srgbClr val="1A1A1A"/>
+                </a:solidFill>
+              </a:rPr>
+              <a:t>structured award result → new points, streak, level, badges</a:t>
+            </a:r>
+          </a:p>
+        </p:txBody>
+      </p:sp>
+      <p:sp>
+        <p:nvSpPr>
+          <p:cNvPr id="13" name="Rounded Rectangle 12"/>
+          <p:cNvSpPr/>
+          <p:nvPr/>
+        </p:nvSpPr>
+        <p:spPr>
+          <a:xfrm>
+            <a:off x="730635" y="4831009"/>
+            <a:ext cx="10972800" cy="658368"/>
+          </a:xfrm>
+          <a:prstGeom prst="roundRect">
+            <a:avLst/>
+          </a:prstGeom>
+          <a:solidFill>
+            <a:srgbClr val="FAF5EE"/>
+          </a:solidFill>
+          <a:ln w="15875">
+            <a:solidFill>
+              <a:srgbClr val="1ECC8B"/>
+            </a:solidFill>
+          </a:ln>
+          <a:effectLst/>
+        </p:spPr>
+        <p:style>
+          <a:lnRef idx="1">
+            <a:schemeClr val="accent1"/>
+          </a:lnRef>
+          <a:fillRef idx="3">
+            <a:schemeClr val="accent1"/>
+          </a:fillRef>
+          <a:effectRef idx="2">
+            <a:schemeClr val="accent1"/>
+          </a:effectRef>
+          <a:fontRef idx="minor">
+            <a:schemeClr val="lt1"/>
+          </a:fontRef>
+        </p:style>
+        <p:txBody>
+          <a:bodyPr wrap="square" lIns="137160" rIns="137160" rtlCol="0" anchor="ctr"/>
+          <a:lstStyle/>
+          <a:p>
+            <a:pPr marL="0" indent="0" algn="l">
+              <a:lnSpc>
+                <a:spcPct val="100000"/>
+              </a:lnSpc>
+              <a:buNone/>
+            </a:pPr>
+            <a:r>
+              <a:rPr sz="1200" b="1" i="0">
+                <a:solidFill>
+                  <a:srgbClr val="17795E"/>
+                </a:solidFill>
+              </a:rPr>
+              <a:t>Security model:  </a:t>
+            </a:r>
+            <a:r>
+              <a:rPr sz="1200" b="0" i="0">
+                <a:solidFill>
+                  <a:srgbClr val="1A1A1A"/>
+                </a:solidFill>
+              </a:rPr>
+              <a:t>row-level security on every table · all business logic in database functions · append-only audit ledger — a modified browser cannot bypass validation.</a:t>
+            </a:r>
+          </a:p>
+        </p:txBody>
+      </p:sp>
+      <p:sp>
+        <p:nvSpPr>
+          <p:cNvPr id="14" name="Rounded Rectangle 13"/>
+          <p:cNvSpPr/>
+          <p:nvPr/>
+        </p:nvSpPr>
+        <p:spPr>
+          <a:xfrm>
+            <a:off x="730635" y="5580817"/>
+            <a:ext cx="10972800" cy="457200"/>
+          </a:xfrm>
+          <a:prstGeom prst="roundRect">
+            <a:avLst/>
+          </a:prstGeom>
+          <a:solidFill>
+            <a:srgbClr val="FAF5EE"/>
+          </a:solidFill>
+          <a:ln w="15875">
+            <a:solidFill>
+              <a:srgbClr val="1ECC8B"/>
+            </a:solidFill>
+          </a:ln>
+          <a:effectLst/>
+        </p:spPr>
+        <p:style>
+          <a:lnRef idx="1">
+            <a:schemeClr val="accent1"/>
+          </a:lnRef>
+          <a:fillRef idx="3">
+            <a:schemeClr val="accent1"/>
+          </a:fillRef>
+          <a:effectRef idx="2">
+            <a:schemeClr val="accent1"/>
+          </a:effectRef>
+          <a:fontRef idx="minor">
+            <a:schemeClr val="lt1"/>
+          </a:fontRef>
+        </p:style>
+        <p:txBody>
+          <a:bodyPr wrap="square" lIns="137160" rIns="137160" rtlCol="0" anchor="ctr"/>
+          <a:lstStyle/>
+          <a:p>
+            <a:pPr marL="0" indent="0" algn="l">
+              <a:lnSpc>
+                <a:spcPct val="100000"/>
+              </a:lnSpc>
+              <a:buNone/>
+            </a:pPr>
+            <a:r>
+              <a:rPr sz="1200" b="1" i="0">
+                <a:solidFill>
+                  <a:srgbClr val="17795E"/>
+                </a:solidFill>
+              </a:rPr>
+              <a:t>Deployment:  </a:t>
+            </a:r>
+            <a:r>
+              <a:rPr sz="1200" b="0" i="0">
+                <a:solidFill>
+                  <a:srgbClr val="1A1A1A"/>
+                </a:solidFill>
+              </a:rPr>
+              <a:t>static bundle on Vercel — build-time environment switches demo / connected mode; the database is the only stateful component.</a:t>
+            </a:r>
           </a:p>
         </p:txBody>
       </p:sp>
@@ -12163,32 +11549,11 @@
                 <a:latin typeface="Times New Roman" panose="02020603050405020304" pitchFamily="18" charset="0"/>
                 <a:cs typeface="Times New Roman" panose="02020603050405020304" pitchFamily="18" charset="0"/>
               </a:rPr>
-              <a:t>End Slide</a:t>
+              <a:t>Flowchart</a:t>
             </a:r>
             <a:endParaRPr lang="en-US" dirty="0"/>
           </a:p>
         </p:txBody>
-        <a:txBody>
-          <a:bodyPr/>
-          <a:lstStyle/>
-          <a:p>
-            <a:pPr>
-              <a:defRPr lang="en-US" sz="3600" dirty="0" typeface="Outfit" b="1">
-                <a:solidFill>
-                  <a:srgbClr val="1A1A1A"/>
-                </a:solidFill>
-              </a:defRPr>
-            </a:pPr>
-            <a:r>
-              <a:rPr lang="en-US" sz="3600" dirty="0" typeface="Outfit" b="1">
-                <a:solidFill>
-                  <a:srgbClr val="1A1A1A"/>
-                </a:solidFill>
-              </a:rPr>
-              <a:t xml:space="preserve">System Architecture and Implementation</a:t>
-            </a:r>
-          </a:p>
-        </a:txBody>
       </p:sp>
       <p:sp>
         <p:nvSpPr>
@@ -12233,7 +11598,7 @@
                 </a:spcAft>
                 <a:defRPr/>
               </a:pPr>
-              <a:t>9/15/2025</a:t>
+              <a:t>10/7/2026</a:t>
             </a:fld>
             <a:endParaRPr lang="en-US">
               <a:ea typeface="MS PGothic" panose="020B0600070205080204" pitchFamily="34" charset="-128"/>
@@ -12294,315 +11659,978 @@
       </p:sp>
       <p:sp>
         <p:nvSpPr>
-          <p:cNvPr id="7" name="Rectangle 1">
-            <a:extLst>
-              <a:ext uri="{FF2B5EF4-FFF2-40B4-BE49-F238E27FC236}">
-                <a16:creationId xmlns:a16="http://schemas.microsoft.com/office/drawing/2014/main" id="{8A935C62-7CE4-90E7-86E2-F628BB9B6672}"/>
-              </a:ext>
-            </a:extLst>
-          </p:cNvPr>
-          <p:cNvSpPr>
-            <a:spLocks noChangeArrowheads="1"/>
-          </p:cNvSpPr>
+          <p:cNvPr id="9" name="TextBox 8"/>
+          <p:cNvSpPr txBox="1"/>
           <p:nvPr/>
         </p:nvSpPr>
-        <p:spPr bwMode="auto">
+        <p:spPr>
           <a:xfrm>
-            <a:off x="0" y="0"/>
-            <a:ext cx="12192000" cy="457200"/>
+            <a:off x="901192" y="1717257"/>
+            <a:ext cx="10972800" cy="270843"/>
           </a:xfrm>
           <a:prstGeom prst="rect">
             <a:avLst/>
           </a:prstGeom>
           <a:noFill/>
+        </p:spPr>
+        <p:txBody>
+          <a:bodyPr wrap="square" lIns="0" tIns="27432" rIns="0" bIns="27432" anchor="t">
+            <a:spAutoFit/>
+          </a:bodyPr>
+          <a:lstStyle/>
+          <a:p>
+            <a:pPr marL="0" indent="0" algn="l">
+              <a:lnSpc>
+                <a:spcPct val="100000"/>
+              </a:lnSpc>
+              <a:spcBef>
+                <a:spcPts val="0"/>
+              </a:spcBef>
+              <a:spcAft>
+                <a:spcPts val="0"/>
+              </a:spcAft>
+              <a:buNone/>
+            </a:pPr>
+            <a:r>
+              <a:rPr sz="1400" b="1" i="1" dirty="0" err="1">
+                <a:solidFill>
+                  <a:srgbClr val="5A5A5A"/>
+                </a:solidFill>
+              </a:rPr>
+              <a:t>scan_checkpoint</a:t>
+            </a:r>
+            <a:r>
+              <a:rPr sz="1400" b="1" i="1" dirty="0">
+                <a:solidFill>
+                  <a:srgbClr val="5A5A5A"/>
+                </a:solidFill>
+              </a:rPr>
+              <a:t>() — server-authoritative validation in a single transaction</a:t>
+            </a:r>
+          </a:p>
+        </p:txBody>
+      </p:sp>
+      <p:sp>
+        <p:nvSpPr>
+          <p:cNvPr id="10" name="Rounded Rectangle 9"/>
+          <p:cNvSpPr/>
+          <p:nvPr/>
+        </p:nvSpPr>
+        <p:spPr>
+          <a:xfrm>
+            <a:off x="901192" y="2143099"/>
+            <a:ext cx="5029200" cy="420624"/>
+          </a:xfrm>
+          <a:prstGeom prst="roundRect">
+            <a:avLst/>
+          </a:prstGeom>
+          <a:solidFill>
+            <a:srgbClr val="E6F9F1"/>
+          </a:solidFill>
+          <a:ln w="19050">
+            <a:solidFill>
+              <a:srgbClr val="1ECC8B"/>
+            </a:solidFill>
+          </a:ln>
+          <a:effectLst/>
+        </p:spPr>
+        <p:style>
+          <a:lnRef idx="1">
+            <a:schemeClr val="accent1"/>
+          </a:lnRef>
+          <a:fillRef idx="3">
+            <a:schemeClr val="accent1"/>
+          </a:fillRef>
+          <a:effectRef idx="2">
+            <a:schemeClr val="accent1"/>
+          </a:effectRef>
+          <a:fontRef idx="minor">
+            <a:schemeClr val="lt1"/>
+          </a:fontRef>
+        </p:style>
+        <p:txBody>
+          <a:bodyPr wrap="square" lIns="73152" tIns="27432" rIns="73152" bIns="27432" rtlCol="0" anchor="ctr"/>
+          <a:lstStyle/>
+          <a:p>
+            <a:pPr marL="0" indent="0" algn="ctr">
+              <a:lnSpc>
+                <a:spcPct val="100000"/>
+              </a:lnSpc>
+              <a:spcBef>
+                <a:spcPts val="0"/>
+              </a:spcBef>
+              <a:spcAft>
+                <a:spcPts val="0"/>
+              </a:spcAft>
+              <a:buNone/>
+            </a:pPr>
+            <a:r>
+              <a:rPr sz="1150" b="0" i="0">
+                <a:solidFill>
+                  <a:srgbClr val="1A1A1A"/>
+                </a:solidFill>
+              </a:rPr>
+              <a:t>Student scans QR sign or enters code (e.g. LIB-A1)</a:t>
+            </a:r>
+          </a:p>
+        </p:txBody>
+      </p:sp>
+      <p:sp>
+        <p:nvSpPr>
+          <p:cNvPr id="11" name="Down Arrow 10"/>
+          <p:cNvSpPr/>
+          <p:nvPr/>
+        </p:nvSpPr>
+        <p:spPr>
+          <a:xfrm>
+            <a:off x="3269488" y="2582012"/>
+            <a:ext cx="292608" cy="164592"/>
+          </a:xfrm>
+          <a:prstGeom prst="downArrow">
+            <a:avLst/>
+          </a:prstGeom>
+          <a:solidFill>
+            <a:srgbClr val="1ECC8B"/>
+          </a:solidFill>
           <a:ln>
             <a:noFill/>
           </a:ln>
           <a:effectLst/>
-          <a:extLst>
-            <a:ext uri="{909E8E84-426E-40DD-AFC4-6F175D3DCCD1}">
-              <a14:hiddenFill xmlns:a14="http://schemas.microsoft.com/office/drawing/2010/main">
-                <a:solidFill>
-                  <a:schemeClr val="accent1"/>
-                </a:solidFill>
-              </a14:hiddenFill>
-            </a:ext>
-            <a:ext uri="{91240B29-F687-4F45-9708-019B960494DF}">
-              <a14:hiddenLine xmlns:a14="http://schemas.microsoft.com/office/drawing/2010/main" w="9525">
-                <a:solidFill>
-                  <a:schemeClr val="tx1"/>
-                </a:solidFill>
-                <a:miter lim="800000"/>
-                <a:headEnd/>
-                <a:tailEnd/>
-              </a14:hiddenLine>
-            </a:ext>
-            <a:ext uri="{AF507438-7753-43E0-B8FC-AC1667EBCBE1}">
-              <a14:hiddenEffects xmlns:a14="http://schemas.microsoft.com/office/drawing/2010/main">
-                <a:effectLst>
-                  <a:outerShdw dist="35921" dir="2700000" algn="ctr" rotWithShape="0">
-                    <a:schemeClr val="bg2"/>
-                  </a:outerShdw>
-                </a:effectLst>
-              </a14:hiddenEffects>
-            </a:ext>
-          </a:extLst>
         </p:spPr>
-        <p:txBody>
-          <a:bodyPr vert="horz" wrap="none" lIns="91440" tIns="45720" rIns="91440" bIns="45720" numCol="1" anchor="ctr" anchorCtr="0" compatLnSpc="1">
-            <a:prstTxWarp prst="textNoShape">
-              <a:avLst/>
-            </a:prstTxWarp>
-            <a:spAutoFit/>
-          </a:bodyPr>
-          <a:lstStyle/>
-          <a:p>
-            <a:endParaRPr lang="en-US"/>
-          </a:p>
-        </p:txBody>
-      </p:sp>
-      <p:sp>
-        <p:nvSpPr>
-          <p:cNvPr id="8" name="Content Placeholder 7">
-            <a:extLst>
-              <a:ext uri="{FF2B5EF4-FFF2-40B4-BE49-F238E27FC236}">
-                <a16:creationId xmlns:a16="http://schemas.microsoft.com/office/drawing/2014/main" id="{23712241-B4F7-567C-CF5D-AA1CE2FB25EE}"/>
-              </a:ext>
-            </a:extLst>
-          </p:cNvPr>
-          <p:cNvSpPr>
-            <a:spLocks noGrp="1"/>
-          </p:cNvSpPr>
-          <p:nvPr>
-            <p:ph idx="1"/>
-          </p:nvPr>
-        </p:nvSpPr>
-        <p:spPr/>
-        <p:txBody>
-          <a:bodyPr/>
-          <a:lstStyle/>
-          <a:p>
-            <a:endParaRPr lang="en-US"/>
-          </a:p>
-        </p:txBody>
-        <a:txBody>
-          <a:bodyPr/>
-          <a:lstStyle/>
-          <a:p>
-            <a:pPr>
-              <a:defRPr lang="en-US" sz="1800" dirty="0" typeface="Outfit" b="1">
-                <a:solidFill>
-                  <a:srgbClr val="2E7D32"/>
-                </a:solidFill>
-              </a:defRPr>
+        <p:style>
+          <a:lnRef idx="1">
+            <a:schemeClr val="accent1"/>
+          </a:lnRef>
+          <a:fillRef idx="3">
+            <a:schemeClr val="accent1"/>
+          </a:fillRef>
+          <a:effectRef idx="2">
+            <a:schemeClr val="accent1"/>
+          </a:effectRef>
+          <a:fontRef idx="minor">
+            <a:schemeClr val="lt1"/>
+          </a:fontRef>
+        </p:style>
+        <p:txBody>
+          <a:bodyPr rtlCol="0" anchor="ctr"/>
+          <a:lstStyle/>
+          <a:p>
+            <a:pPr algn="ctr"/>
+            <a:endParaRPr/>
+          </a:p>
+        </p:txBody>
+      </p:sp>
+      <p:sp>
+        <p:nvSpPr>
+          <p:cNvPr id="12" name="Diamond 11"/>
+          <p:cNvSpPr/>
+          <p:nvPr/>
+        </p:nvSpPr>
+        <p:spPr>
+          <a:xfrm>
+            <a:off x="901192" y="2764892"/>
+            <a:ext cx="5029200" cy="548640"/>
+          </a:xfrm>
+          <a:prstGeom prst="diamond">
+            <a:avLst/>
+          </a:prstGeom>
+          <a:solidFill>
+            <a:srgbClr val="FDF3E0"/>
+          </a:solidFill>
+          <a:ln w="19050">
+            <a:solidFill>
+              <a:srgbClr val="F5A623"/>
+            </a:solidFill>
+          </a:ln>
+          <a:effectLst/>
+        </p:spPr>
+        <p:style>
+          <a:lnRef idx="1">
+            <a:schemeClr val="accent1"/>
+          </a:lnRef>
+          <a:fillRef idx="3">
+            <a:schemeClr val="accent1"/>
+          </a:fillRef>
+          <a:effectRef idx="2">
+            <a:schemeClr val="accent1"/>
+          </a:effectRef>
+          <a:fontRef idx="minor">
+            <a:schemeClr val="lt1"/>
+          </a:fontRef>
+        </p:style>
+        <p:txBody>
+          <a:bodyPr wrap="square" lIns="73152" tIns="27432" rIns="73152" bIns="27432" rtlCol="0" anchor="ctr"/>
+          <a:lstStyle/>
+          <a:p>
+            <a:pPr marL="0" indent="0" algn="ctr">
+              <a:lnSpc>
+                <a:spcPct val="100000"/>
+              </a:lnSpc>
+              <a:spcBef>
+                <a:spcPts val="0"/>
+              </a:spcBef>
+              <a:spcAft>
+                <a:spcPts val="0"/>
+              </a:spcAft>
+              <a:buNone/>
             </a:pPr>
             <a:r>
-              <a:rPr lang="en-US" sz="1800" dirty="0" typeface="Outfit" b="1">
-                <a:solidFill>
-                  <a:srgbClr val="2E7D32"/>
-                </a:solidFill>
-              </a:rPr>
-              <a:t xml:space="preserve">Architecture — Three Tiers</a:t>
-            </a:r>
-          </a:p>
-          <a:p>
-            <a:pPr marL="342900" indent="-228600">
-              <a:buFont typeface="Arial"/>
-              <a:buChar char="•"/>
-              <a:defRPr lang="en-US" sz="1400" typeface="Outfit" dirty="0">
+              <a:rPr sz="1050" b="1" i="0">
                 <a:solidFill>
                   <a:srgbClr val="1A1A1A"/>
                 </a:solidFill>
-              </a:defRPr>
+              </a:rPr>
+              <a:t>Checkpoint found &amp; active?</a:t>
+            </a:r>
+          </a:p>
+        </p:txBody>
+      </p:sp>
+      <p:sp>
+        <p:nvSpPr>
+          <p:cNvPr id="13" name="Down Arrow 12"/>
+          <p:cNvSpPr/>
+          <p:nvPr/>
+        </p:nvSpPr>
+        <p:spPr>
+          <a:xfrm>
+            <a:off x="3269488" y="3331820"/>
+            <a:ext cx="292608" cy="164592"/>
+          </a:xfrm>
+          <a:prstGeom prst="downArrow">
+            <a:avLst/>
+          </a:prstGeom>
+          <a:solidFill>
+            <a:srgbClr val="1ECC8B"/>
+          </a:solidFill>
+          <a:ln>
+            <a:noFill/>
+          </a:ln>
+          <a:effectLst/>
+        </p:spPr>
+        <p:style>
+          <a:lnRef idx="1">
+            <a:schemeClr val="accent1"/>
+          </a:lnRef>
+          <a:fillRef idx="3">
+            <a:schemeClr val="accent1"/>
+          </a:fillRef>
+          <a:effectRef idx="2">
+            <a:schemeClr val="accent1"/>
+          </a:effectRef>
+          <a:fontRef idx="minor">
+            <a:schemeClr val="lt1"/>
+          </a:fontRef>
+        </p:style>
+        <p:txBody>
+          <a:bodyPr rtlCol="0" anchor="ctr"/>
+          <a:lstStyle/>
+          <a:p>
+            <a:pPr algn="ctr"/>
+            <a:endParaRPr/>
+          </a:p>
+        </p:txBody>
+      </p:sp>
+      <p:sp>
+        <p:nvSpPr>
+          <p:cNvPr id="14" name="Diamond 13"/>
+          <p:cNvSpPr/>
+          <p:nvPr/>
+        </p:nvSpPr>
+        <p:spPr>
+          <a:xfrm>
+            <a:off x="901192" y="3514700"/>
+            <a:ext cx="5029200" cy="548640"/>
+          </a:xfrm>
+          <a:prstGeom prst="diamond">
+            <a:avLst/>
+          </a:prstGeom>
+          <a:solidFill>
+            <a:srgbClr val="FDF3E0"/>
+          </a:solidFill>
+          <a:ln w="19050">
+            <a:solidFill>
+              <a:srgbClr val="F5A623"/>
+            </a:solidFill>
+          </a:ln>
+          <a:effectLst/>
+        </p:spPr>
+        <p:style>
+          <a:lnRef idx="1">
+            <a:schemeClr val="accent1"/>
+          </a:lnRef>
+          <a:fillRef idx="3">
+            <a:schemeClr val="accent1"/>
+          </a:fillRef>
+          <a:effectRef idx="2">
+            <a:schemeClr val="accent1"/>
+          </a:effectRef>
+          <a:fontRef idx="minor">
+            <a:schemeClr val="lt1"/>
+          </a:fontRef>
+        </p:style>
+        <p:txBody>
+          <a:bodyPr wrap="square" lIns="73152" tIns="27432" rIns="73152" bIns="27432" rtlCol="0" anchor="ctr"/>
+          <a:lstStyle/>
+          <a:p>
+            <a:pPr marL="0" indent="0" algn="ctr">
+              <a:lnSpc>
+                <a:spcPct val="100000"/>
+              </a:lnSpc>
+              <a:spcBef>
+                <a:spcPts val="0"/>
+              </a:spcBef>
+              <a:spcAft>
+                <a:spcPts val="0"/>
+              </a:spcAft>
+              <a:buNone/>
             </a:pPr>
             <a:r>
-              <a:rPr lang="en-US" sz="1400" typeface="Outfit" dirty="0">
+              <a:rPr sz="1050" b="1" i="0">
                 <a:solidFill>
                   <a:srgbClr val="1A1A1A"/>
                 </a:solidFill>
               </a:rPr>
-              <a:t xml:space="preserve"> Client (PWA): React 19 + TypeScript + Tailwind CSS, bundled by Vite; service worker precaches the app shell and routes for offline use; 29 screens covering onboarding, dashboard, FitClips, FitTrip explorer, clubs, gamification and admin.</a:t>
-            </a:r>
-          </a:p>
-          <a:p>
-            <a:pPr marL="342900" indent="-228600">
-              <a:buFont typeface="Arial"/>
-              <a:buChar char="•"/>
-              <a:defRPr lang="en-US" sz="1400" typeface="Outfit" dirty="0">
+              <a:t>8-hour cooldown passed?</a:t>
+            </a:r>
+          </a:p>
+        </p:txBody>
+      </p:sp>
+      <p:sp>
+        <p:nvSpPr>
+          <p:cNvPr id="15" name="Down Arrow 14"/>
+          <p:cNvSpPr/>
+          <p:nvPr/>
+        </p:nvSpPr>
+        <p:spPr>
+          <a:xfrm>
+            <a:off x="3269488" y="4081628"/>
+            <a:ext cx="292608" cy="164592"/>
+          </a:xfrm>
+          <a:prstGeom prst="downArrow">
+            <a:avLst/>
+          </a:prstGeom>
+          <a:solidFill>
+            <a:srgbClr val="1ECC8B"/>
+          </a:solidFill>
+          <a:ln>
+            <a:noFill/>
+          </a:ln>
+          <a:effectLst/>
+        </p:spPr>
+        <p:style>
+          <a:lnRef idx="1">
+            <a:schemeClr val="accent1"/>
+          </a:lnRef>
+          <a:fillRef idx="3">
+            <a:schemeClr val="accent1"/>
+          </a:fillRef>
+          <a:effectRef idx="2">
+            <a:schemeClr val="accent1"/>
+          </a:effectRef>
+          <a:fontRef idx="minor">
+            <a:schemeClr val="lt1"/>
+          </a:fontRef>
+        </p:style>
+        <p:txBody>
+          <a:bodyPr rtlCol="0" anchor="ctr"/>
+          <a:lstStyle/>
+          <a:p>
+            <a:pPr algn="ctr"/>
+            <a:endParaRPr/>
+          </a:p>
+        </p:txBody>
+      </p:sp>
+      <p:sp>
+        <p:nvSpPr>
+          <p:cNvPr id="16" name="Rounded Rectangle 15"/>
+          <p:cNvSpPr/>
+          <p:nvPr/>
+        </p:nvSpPr>
+        <p:spPr>
+          <a:xfrm>
+            <a:off x="901192" y="4264508"/>
+            <a:ext cx="5029200" cy="548640"/>
+          </a:xfrm>
+          <a:prstGeom prst="roundRect">
+            <a:avLst/>
+          </a:prstGeom>
+          <a:solidFill>
+            <a:srgbClr val="E6F9F1"/>
+          </a:solidFill>
+          <a:ln w="19050">
+            <a:solidFill>
+              <a:srgbClr val="1ECC8B"/>
+            </a:solidFill>
+          </a:ln>
+          <a:effectLst/>
+        </p:spPr>
+        <p:style>
+          <a:lnRef idx="1">
+            <a:schemeClr val="accent1"/>
+          </a:lnRef>
+          <a:fillRef idx="3">
+            <a:schemeClr val="accent1"/>
+          </a:fillRef>
+          <a:effectRef idx="2">
+            <a:schemeClr val="accent1"/>
+          </a:effectRef>
+          <a:fontRef idx="minor">
+            <a:schemeClr val="lt1"/>
+          </a:fontRef>
+        </p:style>
+        <p:txBody>
+          <a:bodyPr wrap="square" lIns="73152" tIns="27432" rIns="73152" bIns="27432" rtlCol="0" anchor="ctr"/>
+          <a:lstStyle/>
+          <a:p>
+            <a:pPr marL="0" indent="0" algn="ctr">
+              <a:lnSpc>
+                <a:spcPct val="100000"/>
+              </a:lnSpc>
+              <a:spcBef>
+                <a:spcPts val="0"/>
+              </a:spcBef>
+              <a:spcAft>
+                <a:spcPts val="0"/>
+              </a:spcAft>
+              <a:buNone/>
+            </a:pPr>
+            <a:r>
+              <a:rPr sz="1100" b="0" i="0">
                 <a:solidFill>
                   <a:srgbClr val="1A1A1A"/>
                 </a:solidFill>
-              </a:defRPr>
+              </a:rPr>
+              <a:t>One transaction — award = round(base × multiplier 1.0–2.5); insert scan + append-only ledger</a:t>
+            </a:r>
+          </a:p>
+        </p:txBody>
+      </p:sp>
+      <p:sp>
+        <p:nvSpPr>
+          <p:cNvPr id="17" name="Down Arrow 16"/>
+          <p:cNvSpPr/>
+          <p:nvPr/>
+        </p:nvSpPr>
+        <p:spPr>
+          <a:xfrm>
+            <a:off x="3269488" y="4831435"/>
+            <a:ext cx="292608" cy="164592"/>
+          </a:xfrm>
+          <a:prstGeom prst="downArrow">
+            <a:avLst/>
+          </a:prstGeom>
+          <a:solidFill>
+            <a:srgbClr val="1ECC8B"/>
+          </a:solidFill>
+          <a:ln>
+            <a:noFill/>
+          </a:ln>
+          <a:effectLst/>
+        </p:spPr>
+        <p:style>
+          <a:lnRef idx="1">
+            <a:schemeClr val="accent1"/>
+          </a:lnRef>
+          <a:fillRef idx="3">
+            <a:schemeClr val="accent1"/>
+          </a:fillRef>
+          <a:effectRef idx="2">
+            <a:schemeClr val="accent1"/>
+          </a:effectRef>
+          <a:fontRef idx="minor">
+            <a:schemeClr val="lt1"/>
+          </a:fontRef>
+        </p:style>
+        <p:txBody>
+          <a:bodyPr rtlCol="0" anchor="ctr"/>
+          <a:lstStyle/>
+          <a:p>
+            <a:pPr algn="ctr"/>
+            <a:endParaRPr/>
+          </a:p>
+        </p:txBody>
+      </p:sp>
+      <p:sp>
+        <p:nvSpPr>
+          <p:cNvPr id="18" name="Rounded Rectangle 17"/>
+          <p:cNvSpPr/>
+          <p:nvPr/>
+        </p:nvSpPr>
+        <p:spPr>
+          <a:xfrm>
+            <a:off x="901192" y="5014316"/>
+            <a:ext cx="5029200" cy="420624"/>
+          </a:xfrm>
+          <a:prstGeom prst="roundRect">
+            <a:avLst/>
+          </a:prstGeom>
+          <a:solidFill>
+            <a:srgbClr val="E6F9F1"/>
+          </a:solidFill>
+          <a:ln w="19050">
+            <a:solidFill>
+              <a:srgbClr val="1ECC8B"/>
+            </a:solidFill>
+          </a:ln>
+          <a:effectLst/>
+        </p:spPr>
+        <p:style>
+          <a:lnRef idx="1">
+            <a:schemeClr val="accent1"/>
+          </a:lnRef>
+          <a:fillRef idx="3">
+            <a:schemeClr val="accent1"/>
+          </a:fillRef>
+          <a:effectRef idx="2">
+            <a:schemeClr val="accent1"/>
+          </a:effectRef>
+          <a:fontRef idx="minor">
+            <a:schemeClr val="lt1"/>
+          </a:fontRef>
+        </p:style>
+        <p:txBody>
+          <a:bodyPr wrap="square" lIns="73152" tIns="27432" rIns="73152" bIns="27432" rtlCol="0" anchor="ctr"/>
+          <a:lstStyle/>
+          <a:p>
+            <a:pPr marL="0" indent="0" algn="ctr">
+              <a:lnSpc>
+                <a:spcPct val="100000"/>
+              </a:lnSpc>
+              <a:spcBef>
+                <a:spcPts val="0"/>
+              </a:spcBef>
+              <a:spcAft>
+                <a:spcPts val="0"/>
+              </a:spcAft>
+              <a:buNone/>
             </a:pPr>
             <a:r>
-              <a:rPr lang="en-US" sz="1400" typeface="Outfit" dirty="0">
+              <a:rPr sz="1150" b="0" i="0">
                 <a:solidFill>
                   <a:srgbClr val="1A1A1A"/>
                 </a:solidFill>
               </a:rPr>
-              <a:t xml:space="preserve"> API layer: a thin client-side service (src/lib/api.ts) abstracts Supabase calls and falls back to bundled demo data; this keeps the UI identical whether or not the database is live — critical for demos and offline evaluation.</a:t>
-            </a:r>
-          </a:p>
-          <a:p>
-            <a:pPr marL="342900" indent="-228600">
-              <a:buFont typeface="Arial"/>
-              <a:buChar char="•"/>
-              <a:defRPr lang="en-US" sz="1400" typeface="Outfit" dirty="0">
+              <a:t>Recompute points, streak and level; evaluate badges</a:t>
+            </a:r>
+          </a:p>
+        </p:txBody>
+      </p:sp>
+      <p:sp>
+        <p:nvSpPr>
+          <p:cNvPr id="19" name="Down Arrow 18"/>
+          <p:cNvSpPr/>
+          <p:nvPr/>
+        </p:nvSpPr>
+        <p:spPr>
+          <a:xfrm>
+            <a:off x="3269488" y="5453228"/>
+            <a:ext cx="292608" cy="164592"/>
+          </a:xfrm>
+          <a:prstGeom prst="downArrow">
+            <a:avLst/>
+          </a:prstGeom>
+          <a:solidFill>
+            <a:srgbClr val="1ECC8B"/>
+          </a:solidFill>
+          <a:ln>
+            <a:noFill/>
+          </a:ln>
+          <a:effectLst/>
+        </p:spPr>
+        <p:style>
+          <a:lnRef idx="1">
+            <a:schemeClr val="accent1"/>
+          </a:lnRef>
+          <a:fillRef idx="3">
+            <a:schemeClr val="accent1"/>
+          </a:fillRef>
+          <a:effectRef idx="2">
+            <a:schemeClr val="accent1"/>
+          </a:effectRef>
+          <a:fontRef idx="minor">
+            <a:schemeClr val="lt1"/>
+          </a:fontRef>
+        </p:style>
+        <p:txBody>
+          <a:bodyPr rtlCol="0" anchor="ctr"/>
+          <a:lstStyle/>
+          <a:p>
+            <a:pPr algn="ctr"/>
+            <a:endParaRPr/>
+          </a:p>
+        </p:txBody>
+      </p:sp>
+      <p:sp>
+        <p:nvSpPr>
+          <p:cNvPr id="20" name="Rounded Rectangle 19"/>
+          <p:cNvSpPr/>
+          <p:nvPr/>
+        </p:nvSpPr>
+        <p:spPr>
+          <a:xfrm>
+            <a:off x="901192" y="5636108"/>
+            <a:ext cx="5029200" cy="420624"/>
+          </a:xfrm>
+          <a:prstGeom prst="roundRect">
+            <a:avLst/>
+          </a:prstGeom>
+          <a:solidFill>
+            <a:srgbClr val="1ECC8B"/>
+          </a:solidFill>
+          <a:ln w="19050">
+            <a:solidFill>
+              <a:srgbClr val="1ECC8B"/>
+            </a:solidFill>
+          </a:ln>
+          <a:effectLst/>
+        </p:spPr>
+        <p:style>
+          <a:lnRef idx="1">
+            <a:schemeClr val="accent1"/>
+          </a:lnRef>
+          <a:fillRef idx="3">
+            <a:schemeClr val="accent1"/>
+          </a:fillRef>
+          <a:effectRef idx="2">
+            <a:schemeClr val="accent1"/>
+          </a:effectRef>
+          <a:fontRef idx="minor">
+            <a:schemeClr val="lt1"/>
+          </a:fontRef>
+        </p:style>
+        <p:txBody>
+          <a:bodyPr wrap="square" lIns="73152" tIns="27432" rIns="73152" bIns="27432" rtlCol="0" anchor="ctr"/>
+          <a:lstStyle/>
+          <a:p>
+            <a:pPr marL="0" indent="0" algn="ctr">
+              <a:lnSpc>
+                <a:spcPct val="100000"/>
+              </a:lnSpc>
+              <a:spcBef>
+                <a:spcPts val="0"/>
+              </a:spcBef>
+              <a:spcAft>
+                <a:spcPts val="0"/>
+              </a:spcAft>
+              <a:buNone/>
+            </a:pPr>
+            <a:r>
+              <a:rPr sz="1100" b="1" i="0">
                 <a:solidFill>
                   <a:srgbClr val="1A1A1A"/>
                 </a:solidFill>
-              </a:defRPr>
+              </a:rPr>
+              <a:t>Return award → UI shows points, refreshes profile &amp; leaderboard</a:t>
+            </a:r>
+          </a:p>
+        </p:txBody>
+      </p:sp>
+      <p:sp>
+        <p:nvSpPr>
+          <p:cNvPr id="21" name="Right Arrow 20"/>
+          <p:cNvSpPr/>
+          <p:nvPr/>
+        </p:nvSpPr>
+        <p:spPr>
+          <a:xfrm>
+            <a:off x="6040120" y="2920340"/>
+            <a:ext cx="402336" cy="237744"/>
+          </a:xfrm>
+          <a:prstGeom prst="rightArrow">
+            <a:avLst/>
+          </a:prstGeom>
+          <a:solidFill>
+            <a:srgbClr val="F5A623"/>
+          </a:solidFill>
+          <a:ln>
+            <a:noFill/>
+          </a:ln>
+          <a:effectLst/>
+        </p:spPr>
+        <p:style>
+          <a:lnRef idx="1">
+            <a:schemeClr val="accent1"/>
+          </a:lnRef>
+          <a:fillRef idx="3">
+            <a:schemeClr val="accent1"/>
+          </a:fillRef>
+          <a:effectRef idx="2">
+            <a:schemeClr val="accent1"/>
+          </a:effectRef>
+          <a:fontRef idx="minor">
+            <a:schemeClr val="lt1"/>
+          </a:fontRef>
+        </p:style>
+        <p:txBody>
+          <a:bodyPr rtlCol="0" anchor="ctr"/>
+          <a:lstStyle/>
+          <a:p>
+            <a:pPr algn="ctr"/>
+            <a:endParaRPr/>
+          </a:p>
+        </p:txBody>
+      </p:sp>
+      <p:sp>
+        <p:nvSpPr>
+          <p:cNvPr id="22" name="Rounded Rectangle 21"/>
+          <p:cNvSpPr/>
+          <p:nvPr/>
+        </p:nvSpPr>
+        <p:spPr>
+          <a:xfrm>
+            <a:off x="6497320" y="2838044"/>
+            <a:ext cx="4480560" cy="402336"/>
+          </a:xfrm>
+          <a:prstGeom prst="roundRect">
+            <a:avLst/>
+          </a:prstGeom>
+          <a:solidFill>
+            <a:srgbClr val="FBECEA"/>
+          </a:solidFill>
+          <a:ln w="15875">
+            <a:solidFill>
+              <a:srgbClr val="C0392B"/>
+            </a:solidFill>
+          </a:ln>
+          <a:effectLst/>
+        </p:spPr>
+        <p:style>
+          <a:lnRef idx="1">
+            <a:schemeClr val="accent1"/>
+          </a:lnRef>
+          <a:fillRef idx="3">
+            <a:schemeClr val="accent1"/>
+          </a:fillRef>
+          <a:effectRef idx="2">
+            <a:schemeClr val="accent1"/>
+          </a:effectRef>
+          <a:fontRef idx="minor">
+            <a:schemeClr val="lt1"/>
+          </a:fontRef>
+        </p:style>
+        <p:txBody>
+          <a:bodyPr wrap="square" lIns="73152" tIns="27432" rIns="73152" bIns="27432" rtlCol="0" anchor="ctr"/>
+          <a:lstStyle/>
+          <a:p>
+            <a:pPr marL="0" indent="0" algn="ctr">
+              <a:lnSpc>
+                <a:spcPct val="100000"/>
+              </a:lnSpc>
+              <a:spcBef>
+                <a:spcPts val="0"/>
+              </a:spcBef>
+              <a:spcAft>
+                <a:spcPts val="0"/>
+              </a:spcAft>
+              <a:buNone/>
             </a:pPr>
             <a:r>
-              <a:rPr lang="en-US" sz="1400" typeface="Outfit" dirty="0">
+              <a:rPr sz="1050" b="0" i="0">
+                <a:solidFill>
+                  <a:srgbClr val="C0392B"/>
+                </a:solidFill>
+              </a:rPr>
+              <a:t>REJECT — checkpoint_not_found (code missing or inactive)</a:t>
+            </a:r>
+          </a:p>
+        </p:txBody>
+      </p:sp>
+      <p:sp>
+        <p:nvSpPr>
+          <p:cNvPr id="23" name="Right Arrow 22"/>
+          <p:cNvSpPr/>
+          <p:nvPr/>
+        </p:nvSpPr>
+        <p:spPr>
+          <a:xfrm>
+            <a:off x="6040120" y="3670148"/>
+            <a:ext cx="402336" cy="237744"/>
+          </a:xfrm>
+          <a:prstGeom prst="rightArrow">
+            <a:avLst/>
+          </a:prstGeom>
+          <a:solidFill>
+            <a:srgbClr val="F5A623"/>
+          </a:solidFill>
+          <a:ln>
+            <a:noFill/>
+          </a:ln>
+          <a:effectLst/>
+        </p:spPr>
+        <p:style>
+          <a:lnRef idx="1">
+            <a:schemeClr val="accent1"/>
+          </a:lnRef>
+          <a:fillRef idx="3">
+            <a:schemeClr val="accent1"/>
+          </a:fillRef>
+          <a:effectRef idx="2">
+            <a:schemeClr val="accent1"/>
+          </a:effectRef>
+          <a:fontRef idx="minor">
+            <a:schemeClr val="lt1"/>
+          </a:fontRef>
+        </p:style>
+        <p:txBody>
+          <a:bodyPr rtlCol="0" anchor="ctr"/>
+          <a:lstStyle/>
+          <a:p>
+            <a:pPr algn="ctr"/>
+            <a:endParaRPr/>
+          </a:p>
+        </p:txBody>
+      </p:sp>
+      <p:sp>
+        <p:nvSpPr>
+          <p:cNvPr id="24" name="Rounded Rectangle 23"/>
+          <p:cNvSpPr/>
+          <p:nvPr/>
+        </p:nvSpPr>
+        <p:spPr>
+          <a:xfrm>
+            <a:off x="6497320" y="3587852"/>
+            <a:ext cx="4480560" cy="402336"/>
+          </a:xfrm>
+          <a:prstGeom prst="roundRect">
+            <a:avLst/>
+          </a:prstGeom>
+          <a:solidFill>
+            <a:srgbClr val="FBECEA"/>
+          </a:solidFill>
+          <a:ln w="15875">
+            <a:solidFill>
+              <a:srgbClr val="C0392B"/>
+            </a:solidFill>
+          </a:ln>
+          <a:effectLst/>
+        </p:spPr>
+        <p:style>
+          <a:lnRef idx="1">
+            <a:schemeClr val="accent1"/>
+          </a:lnRef>
+          <a:fillRef idx="3">
+            <a:schemeClr val="accent1"/>
+          </a:fillRef>
+          <a:effectRef idx="2">
+            <a:schemeClr val="accent1"/>
+          </a:effectRef>
+          <a:fontRef idx="minor">
+            <a:schemeClr val="lt1"/>
+          </a:fontRef>
+        </p:style>
+        <p:txBody>
+          <a:bodyPr wrap="square" lIns="73152" tIns="27432" rIns="73152" bIns="27432" rtlCol="0" anchor="ctr"/>
+          <a:lstStyle/>
+          <a:p>
+            <a:pPr marL="0" indent="0" algn="ctr">
+              <a:lnSpc>
+                <a:spcPct val="100000"/>
+              </a:lnSpc>
+              <a:spcBef>
+                <a:spcPts val="0"/>
+              </a:spcBef>
+              <a:spcAft>
+                <a:spcPts val="0"/>
+              </a:spcAft>
+              <a:buNone/>
+            </a:pPr>
+            <a:r>
+              <a:rPr sz="1050" b="0" i="0">
+                <a:solidFill>
+                  <a:srgbClr val="C0392B"/>
+                </a:solidFill>
+              </a:rPr>
+              <a:t>REJECT — cooldown active, retry in HH:MM (no row written)</a:t>
+            </a:r>
+          </a:p>
+        </p:txBody>
+      </p:sp>
+      <p:sp>
+        <p:nvSpPr>
+          <p:cNvPr id="25" name="Rounded Rectangle 24"/>
+          <p:cNvSpPr/>
+          <p:nvPr/>
+        </p:nvSpPr>
+        <p:spPr>
+          <a:xfrm>
+            <a:off x="6497320" y="4474820"/>
+            <a:ext cx="4480560" cy="1188720"/>
+          </a:xfrm>
+          <a:prstGeom prst="roundRect">
+            <a:avLst/>
+          </a:prstGeom>
+          <a:solidFill>
+            <a:srgbClr val="FAF5EE"/>
+          </a:solidFill>
+          <a:ln w="15875">
+            <a:solidFill>
+              <a:srgbClr val="1ECC8B"/>
+            </a:solidFill>
+          </a:ln>
+          <a:effectLst/>
+        </p:spPr>
+        <p:style>
+          <a:lnRef idx="1">
+            <a:schemeClr val="accent1"/>
+          </a:lnRef>
+          <a:fillRef idx="3">
+            <a:schemeClr val="accent1"/>
+          </a:fillRef>
+          <a:effectRef idx="2">
+            <a:schemeClr val="accent1"/>
+          </a:effectRef>
+          <a:fontRef idx="minor">
+            <a:schemeClr val="lt1"/>
+          </a:fontRef>
+        </p:style>
+        <p:txBody>
+          <a:bodyPr wrap="square" lIns="128016" tIns="27432" rIns="128016" bIns="27432" rtlCol="0" anchor="ctr"/>
+          <a:lstStyle/>
+          <a:p>
+            <a:pPr marL="0" indent="0" algn="l">
+              <a:lnSpc>
+                <a:spcPct val="100000"/>
+              </a:lnSpc>
+              <a:spcBef>
+                <a:spcPts val="0"/>
+              </a:spcBef>
+              <a:spcAft>
+                <a:spcPts val="400"/>
+              </a:spcAft>
+              <a:buNone/>
+            </a:pPr>
+            <a:r>
+              <a:rPr sz="1200" b="1" i="0">
+                <a:solidFill>
+                  <a:srgbClr val="17795E"/>
+                </a:solidFill>
+              </a:rPr>
+              <a:t>Anti-abuse by design</a:t>
+            </a:r>
+          </a:p>
+          <a:p>
+            <a:pPr marL="0" indent="0" algn="l">
+              <a:lnSpc>
+                <a:spcPct val="100000"/>
+              </a:lnSpc>
+              <a:spcBef>
+                <a:spcPts val="0"/>
+              </a:spcBef>
+              <a:spcAft>
+                <a:spcPts val="0"/>
+              </a:spcAft>
+              <a:buNone/>
+            </a:pPr>
+            <a:r>
+              <a:rPr sz="1100" b="0" i="0">
                 <a:solidFill>
                   <a:srgbClr val="1A1A1A"/>
                 </a:solidFill>
               </a:rPr>
-              <a:t xml:space="preserve"> Backend (Supabase): PostgreSQL with row-level security, real-time subscriptions for leaderboard updates, auth (email + password, OTPs, forgotten-password flow), and storage for club/clip images. Service-role key used only for seeding.</a:t>
-            </a:r>
-          </a:p>
-          <a:p>
-            <a:pPr>
-              <a:defRPr lang="en-US" sz="800" dirty="0" typeface="Outfit"/>
-            </a:pPr>
-            <a:r>
-              <a:rPr lang="en-US" sz="800" dirty="0" typeface="Outfit"/>
-              <a:t xml:space="preserve"/>
-            </a:r>
-          </a:p>
-          <a:p>
-            <a:pPr>
-              <a:defRPr lang="en-US" sz="1800" dirty="0" typeface="Outfit" b="1">
-                <a:solidFill>
-                  <a:srgbClr val="2E7D32"/>
-                </a:solidFill>
-              </a:defRPr>
-            </a:pPr>
-            <a:r>
-              <a:rPr lang="en-US" sz="1800" dirty="0" typeface="Outfit" b="1">
-                <a:solidFill>
-                  <a:srgbClr val="2E7D32"/>
-                </a:solidFill>
-              </a:rPr>
-              <a:t xml:space="preserve">Key Implementation Modules</a:t>
-            </a:r>
-          </a:p>
-          <a:p>
-            <a:pPr marL="342900" indent="-228600">
-              <a:buFont typeface="Arial"/>
-              <a:buChar char="•"/>
-              <a:defRPr lang="en-US" sz="1400" typeface="Outfit" dirty="0">
-                <a:solidFill>
-                  <a:srgbClr val="1A1A1A"/>
-                </a:solidFill>
-              </a:defRPr>
-            </a:pPr>
-            <a:r>
-              <a:rPr lang="en-US" sz="1400" typeface="Outfit" dirty="0">
-                <a:solidFill>
-                  <a:srgbClr val="1A1A1A"/>
-                </a:solidFill>
-              </a:rPr>
-              <a:t xml:space="preserve"> Checkpoint scan loop (ScanCheckpoint / CheckpointDetail): user enters a code → code is normalised and matched → points = base_points × difficulty_multiplier → reward panel shows awarded points and total. Epic difficulty gives the highest multiplier.</a:t>
-            </a:r>
-          </a:p>
-          <a:p>
-            <a:pPr marL="342900" indent="-228600">
-              <a:buFont typeface="Arial"/>
-              <a:buChar char="•"/>
-              <a:defRPr lang="en-US" sz="1400" typeface="Outfit" dirty="0">
-                <a:solidFill>
-                  <a:srgbClr val="1A1A1A"/>
-                </a:solidFill>
-              </a:defRPr>
-            </a:pPr>
-            <a:r>
-              <a:rPr lang="en-US" sz="1400" typeface="Outfit" dirty="0">
-                <a:solidFill>
-                  <a:srgbClr val="1A1A1A"/>
-                </a:solidFill>
-              </a:rPr>
-              <a:t xml:space="preserve"> Reward economy: points feed the profile, the leaderboard and badge criteria (e.g. points_2500, streak_7). Streaks and club challenges add secondary incentives.</a:t>
-            </a:r>
-          </a:p>
-          <a:p>
-            <a:pPr marL="342900" indent="-228600">
-              <a:buFont typeface="Arial"/>
-              <a:buChar char="•"/>
-              <a:defRPr lang="en-US" sz="1400" typeface="Outfit" dirty="0">
-                <a:solidFill>
-                  <a:srgbClr val="1A1A1A"/>
-                </a:solidFill>
-              </a:defRPr>
-            </a:pPr>
-            <a:r>
-              <a:rPr lang="en-US" sz="1400" typeface="Outfit" dirty="0">
-                <a:solidFill>
-                  <a:srgbClr val="1A1A1A"/>
-                </a:solidFill>
-              </a:rPr>
-              <a:t xml:space="preserve"> Clubs (ClubDashboard / ClubDetail): each club has a name, colour, member count, description, challenges and a member list drawn from the same demo dataset used everywhere else.</a:t>
-            </a:r>
-          </a:p>
-          <a:p>
-            <a:pPr marL="342900" indent="-228600">
-              <a:buFont typeface="Arial"/>
-              <a:buChar char="•"/>
-              <a:defRPr lang="en-US" sz="1400" typeface="Outfit" dirty="0">
-                <a:solidFill>
-                  <a:srgbClr val="1A1A1A"/>
-                </a:solidFill>
-              </a:defRPr>
-            </a:pPr>
-            <a:r>
-              <a:rPr lang="en-US" sz="1400" typeface="Outfit" dirty="0">
-                <a:solidFill>
-                  <a:srgbClr val="1A1A1A"/>
-                </a:solidFill>
-              </a:rPr>
-              <a:t xml:space="preserve"> FitClips vertical feed (FitClipsFeed / FitClipDetail): social posts with author, caption, likes, comments — same design tokens as the rest of the app.</a:t>
-            </a:r>
-          </a:p>
-          <a:p>
-            <a:pPr marL="342900" indent="-228600">
-              <a:buFont typeface="Arial"/>
-              <a:buChar char="•"/>
-              <a:defRPr lang="en-US" sz="1400" typeface="Outfit" dirty="0">
-                <a:solidFill>
-                  <a:srgbClr val="1A1A1A"/>
-                </a:solidFill>
-              </a:defRPr>
-            </a:pPr>
-            <a:r>
-              <a:rPr lang="en-US" sz="1400" typeface="Outfit" dirty="0">
-                <a:solidFill>
-                  <a:srgbClr val="1A1A1A"/>
-                </a:solidFill>
-              </a:rPr>
-              <a:t xml:space="preserve"> Auth flow: Splash → LogIn / CreateAccount → StudentVerification → OTP → OnboardingInterests → Dashboard. Lost-password and edit-profile round out the account lifecycle.</a:t>
-            </a:r>
-          </a:p>
-          <a:p>
-            <a:pPr marL="342900" indent="-228600">
-              <a:buFont typeface="Arial"/>
-              <a:buChar char="•"/>
-              <a:defRPr lang="en-US" sz="1400" typeface="Outfit" dirty="0">
-                <a:solidFill>
-                  <a:srgbClr val="1A1A1A"/>
-                </a:solidFill>
-              </a:defRPr>
-            </a:pPr>
-            <a:r>
-              <a:rPr lang="en-US" sz="1400" typeface="Outfit" dirty="0">
-                <a:solidFill>
-                  <a:srgbClr val="1A1A1A"/>
-                </a:solidFill>
-              </a:rPr>
-              <a:t xml:space="preserve"> Admin dashboard (AdminDashboard): visible only to the admin role; surfaces checkpoint list, leaderboard, badge definitions and problem reports for moderation.</a:t>
-            </a:r>
-          </a:p>
-        </a:txBody>
+              <a:t>8-hour per-user cooldown · code registry · append-only audit trail · one atomic transaction — a modified client cannot mint points.</a:t>
+            </a:r>
+          </a:p>
+        </p:txBody>
       </p:sp>
     </p:spTree>
     <p:extLst>
@@ -12636,539 +12664,237 @@
       </p:grpSpPr>
       <p:sp>
         <p:nvSpPr>
-          <p:cNvPr id="3074" name="Title 1"/>
-          <p:cNvSpPr>
-            <a:spLocks noGrp="1"/>
-          </p:cNvSpPr>
-          <p:nvPr>
-            <p:ph type="ctrTitle"/>
+          <p:cNvPr id="2" name="Title 1">
+            <a:extLst>
+              <a:ext uri="{FF2B5EF4-FFF2-40B4-BE49-F238E27FC236}">
+                <a16:creationId xmlns:a16="http://schemas.microsoft.com/office/drawing/2014/main" id="{E979DB1C-537E-FB1F-4362-7D3C0F60D207}"/>
+              </a:ext>
+            </a:extLst>
+          </p:cNvPr>
+          <p:cNvSpPr>
+            <a:spLocks noGrp="1"/>
+          </p:cNvSpPr>
+          <p:nvPr>
+            <p:ph type="title"/>
+          </p:nvPr>
+        </p:nvSpPr>
+        <p:spPr/>
+        <p:txBody>
+          <a:bodyPr/>
+          <a:lstStyle/>
+          <a:p>
+            <a:r>
+              <a:rPr lang="en-GB" sz="4400" b="1" dirty="0">
+                <a:solidFill>
+                  <a:schemeClr val="bg2"/>
+                </a:solidFill>
+                <a:latin typeface="Times New Roman" panose="02020603050405020304" pitchFamily="18" charset="0"/>
+                <a:cs typeface="Times New Roman" panose="02020603050405020304" pitchFamily="18" charset="0"/>
+              </a:rPr>
+              <a:t>Challenges</a:t>
+            </a:r>
+            <a:endParaRPr lang="en-US" dirty="0">
+              <a:solidFill>
+                <a:schemeClr val="bg2"/>
+              </a:solidFill>
+            </a:endParaRPr>
+          </a:p>
+        </p:txBody>
+      </p:sp>
+      <p:sp>
+        <p:nvSpPr>
+          <p:cNvPr id="3" name="Content Placeholder 2">
+            <a:extLst>
+              <a:ext uri="{FF2B5EF4-FFF2-40B4-BE49-F238E27FC236}">
+                <a16:creationId xmlns:a16="http://schemas.microsoft.com/office/drawing/2014/main" id="{3A386C90-A221-580A-FFD5-6EB28AF3FB7E}"/>
+              </a:ext>
+            </a:extLst>
+          </p:cNvPr>
+          <p:cNvSpPr>
+            <a:spLocks noGrp="1"/>
+          </p:cNvSpPr>
+          <p:nvPr>
+            <p:ph idx="1"/>
           </p:nvPr>
         </p:nvSpPr>
         <p:spPr>
           <a:xfrm>
-            <a:off x="2209800" y="152399"/>
-            <a:ext cx="7772400" cy="889819"/>
+            <a:off x="612648" y="1600200"/>
+            <a:ext cx="10972800" cy="4526280"/>
           </a:xfrm>
         </p:spPr>
         <p:txBody>
-          <a:bodyPr vert="horz" wrap="square" lIns="91440" tIns="45720" rIns="91440" bIns="45720" anchor="ctr" anchorCtr="0"/>
-          <a:lstStyle/>
-          <a:p>
-            <a:pPr eaLnBrk="1" hangingPunct="1"/>
-            <a:r>
-              <a:rPr lang="en-US" sz="2000" b="1" dirty="0">
-                <a:solidFill>
-                  <a:schemeClr val="bg1"/>
-                </a:solidFill>
-                <a:latin typeface="Times New Roman" panose="02020603050405020304" pitchFamily="18" charset="0"/>
-                <a:ea typeface="Times New Roman" panose="02020603050405020304" pitchFamily="18" charset="0"/>
-              </a:rPr>
-              <a:t>FINAL YEAR PROJECT PRESENTATION &amp; DEMO</a:t>
-            </a:r>
-            <a:br>
-              <a:rPr lang="en-GB" sz="2000" b="1" dirty="0">
-                <a:solidFill>
-                  <a:schemeClr val="bg1"/>
-                </a:solidFill>
-                <a:latin typeface="Times New Roman" panose="02020603050405020304" pitchFamily="18" charset="0"/>
-                <a:ea typeface="Times New Roman" panose="02020603050405020304" pitchFamily="18" charset="0"/>
-              </a:rPr>
-            </a:br>
-            <a:endParaRPr lang="en-US" altLang="en-US" sz="2000" b="1" dirty="0">
-              <a:solidFill>
-                <a:schemeClr val="bg1"/>
-              </a:solidFill>
-              <a:latin typeface="Times New Roman" panose="02020603050405020304" pitchFamily="18" charset="0"/>
-              <a:ea typeface="Times New Roman" panose="02020603050405020304" pitchFamily="18" charset="0"/>
-            </a:endParaRPr>
-          </a:p>
-        </p:txBody>
-        <a:txBody>
-          <a:bodyPr/>
-          <a:lstStyle/>
-          <a:p>
-            <a:pPr>
-              <a:defRPr lang="en-US" sz="3600" dirty="0" typeface="Outfit" b="1">
-                <a:solidFill>
-                  <a:srgbClr val="1A1A1A"/>
-                </a:solidFill>
-              </a:defRPr>
-            </a:pPr>
-            <a:r>
-              <a:rPr lang="en-US" sz="3600" dirty="0" typeface="Outfit" b="1">
-                <a:solidFill>
-                  <a:srgbClr val="1A1A1A"/>
-                </a:solidFill>
-              </a:rPr>
-              <a:t xml:space="preserve">Evaluation: Verification, Fidelity, Performance, Reward Economy</a:t>
-            </a:r>
-          </a:p>
-        </a:txBody>
-      </p:sp>
-      <p:sp>
-        <p:nvSpPr>
-          <p:cNvPr id="3075" name="Subtitle 2"/>
-          <p:cNvSpPr>
-            <a:spLocks noGrp="1"/>
-          </p:cNvSpPr>
-          <p:nvPr>
-            <p:ph type="subTitle" idx="1"/>
-          </p:nvPr>
-        </p:nvSpPr>
-        <p:spPr>
-          <a:xfrm>
-            <a:off x="1602658" y="1182329"/>
-            <a:ext cx="8738419" cy="3891116"/>
-          </a:xfrm>
-        </p:spPr>
-        <p:txBody>
-          <a:bodyPr vert="horz" wrap="square" lIns="91440" tIns="45720" rIns="91440" bIns="45720" anchor="t" anchorCtr="0"/>
-          <a:lstStyle/>
-          <a:p>
-            <a:pPr eaLnBrk="1" hangingPunct="1">
-              <a:buClrTx/>
-              <a:buSzTx/>
-            </a:pPr>
-            <a:r>
-              <a:rPr lang="en-US" b="1" dirty="0">
-                <a:solidFill>
-                  <a:schemeClr val="bg1"/>
-                </a:solidFill>
-                <a:latin typeface="Times New Roman" panose="02020603050405020304" pitchFamily="18" charset="0"/>
-                <a:cs typeface="Times New Roman" panose="02020603050405020304" pitchFamily="18" charset="0"/>
-              </a:rPr>
-              <a:t>PROJECT TITLE</a:t>
-            </a:r>
-            <a:endParaRPr lang="en-US" altLang="en-US" sz="2000" b="1" dirty="0">
-              <a:solidFill>
-                <a:schemeClr val="bg1"/>
-              </a:solidFill>
-              <a:latin typeface="Times New Roman" panose="02020603050405020304" pitchFamily="18" charset="0"/>
-              <a:ea typeface="Times New Roman" panose="02020603050405020304" pitchFamily="18" charset="0"/>
-              <a:cs typeface="Times New Roman" panose="02020603050405020304" pitchFamily="18" charset="0"/>
-            </a:endParaRPr>
-          </a:p>
-          <a:p>
-            <a:pPr eaLnBrk="1" hangingPunct="1">
-              <a:buClrTx/>
-              <a:buSzTx/>
-            </a:pPr>
-            <a:endParaRPr lang="en-GB" sz="2000" b="1" noProof="0" dirty="0">
-              <a:solidFill>
-                <a:schemeClr val="bg1"/>
-              </a:solidFill>
-              <a:latin typeface="Times New Roman" panose="02020603050405020304" pitchFamily="18" charset="0"/>
-              <a:ea typeface="Times New Roman" panose="02020603050405020304" pitchFamily="18" charset="0"/>
-            </a:endParaRPr>
-          </a:p>
-          <a:p>
-            <a:pPr eaLnBrk="1" hangingPunct="1"/>
-            <a:r>
-              <a:rPr lang="en-GB" sz="2000" b="1" dirty="0">
-                <a:solidFill>
-                  <a:schemeClr val="bg1"/>
-                </a:solidFill>
-                <a:latin typeface="Times New Roman" panose="02020603050405020304" pitchFamily="18" charset="0"/>
-                <a:ea typeface="Times New Roman" panose="02020603050405020304" pitchFamily="18" charset="0"/>
-              </a:rPr>
-              <a:t>NAME</a:t>
-            </a:r>
-          </a:p>
-          <a:p>
-            <a:pPr eaLnBrk="1" hangingPunct="1"/>
-            <a:r>
-              <a:rPr lang="en-GB" sz="2000" b="1" noProof="0" dirty="0">
-                <a:solidFill>
-                  <a:schemeClr val="bg1"/>
-                </a:solidFill>
-                <a:latin typeface="Times New Roman" panose="02020603050405020304" pitchFamily="18" charset="0"/>
-                <a:ea typeface="Times New Roman" panose="02020603050405020304" pitchFamily="18" charset="0"/>
-              </a:rPr>
-              <a:t>ID</a:t>
-            </a:r>
-          </a:p>
-          <a:p>
-            <a:pPr eaLnBrk="1" hangingPunct="1"/>
-            <a:endParaRPr lang="en-GB" sz="2000" b="1" noProof="0" dirty="0">
-              <a:solidFill>
-                <a:schemeClr val="bg1"/>
-              </a:solidFill>
-              <a:latin typeface="Times New Roman" panose="02020603050405020304" pitchFamily="18" charset="0"/>
-              <a:ea typeface="Times New Roman" panose="02020603050405020304" pitchFamily="18" charset="0"/>
-            </a:endParaRPr>
-          </a:p>
-          <a:p>
-            <a:pPr eaLnBrk="1" hangingPunct="1"/>
-            <a:r>
-              <a:rPr lang="en-GB" sz="1200" b="1" dirty="0">
-                <a:solidFill>
-                  <a:schemeClr val="bg1"/>
-                </a:solidFill>
-                <a:latin typeface="Times New Roman" panose="02020603050405020304" pitchFamily="18" charset="0"/>
-                <a:ea typeface="Times New Roman" panose="02020603050405020304" pitchFamily="18" charset="0"/>
-              </a:rPr>
-              <a:t>SUPERVISOR:             19</a:t>
-            </a:r>
-            <a:r>
-              <a:rPr lang="en-GB" sz="1200" b="1" baseline="30000" dirty="0">
-                <a:solidFill>
-                  <a:schemeClr val="bg1"/>
-                </a:solidFill>
-                <a:latin typeface="Times New Roman" panose="02020603050405020304" pitchFamily="18" charset="0"/>
-                <a:ea typeface="Times New Roman" panose="02020603050405020304" pitchFamily="18" charset="0"/>
-              </a:rPr>
-              <a:t>TH</a:t>
-            </a:r>
-            <a:r>
-              <a:rPr lang="en-GB" sz="1200" b="1" dirty="0">
-                <a:solidFill>
-                  <a:schemeClr val="bg1"/>
-                </a:solidFill>
-                <a:latin typeface="Times New Roman" panose="02020603050405020304" pitchFamily="18" charset="0"/>
-                <a:ea typeface="Times New Roman" panose="02020603050405020304" pitchFamily="18" charset="0"/>
-              </a:rPr>
-              <a:t> SEPTEMBER 2025</a:t>
-            </a:r>
-            <a:endParaRPr lang="en-GB" sz="1200" b="1" noProof="0" dirty="0">
-              <a:solidFill>
-                <a:schemeClr val="bg1"/>
-              </a:solidFill>
-              <a:latin typeface="Times New Roman" panose="02020603050405020304" pitchFamily="18" charset="0"/>
-              <a:ea typeface="Times New Roman" panose="02020603050405020304" pitchFamily="18" charset="0"/>
-            </a:endParaRPr>
-          </a:p>
-        </p:txBody>
-        <a:txBody>
-          <a:bodyPr/>
-          <a:lstStyle/>
-          <a:p>
-            <a:pPr>
-              <a:defRPr lang="en-US" sz="1600" dirty="0" typeface="Outfit" b="1">
-                <a:solidFill>
-                  <a:srgbClr val="2E7D32"/>
-                </a:solidFill>
-              </a:defRPr>
-            </a:pPr>
-            <a:r>
-              <a:rPr lang="en-US" sz="1600" dirty="0" typeface="Outfit" b="1">
-                <a:solidFill>
-                  <a:srgbClr val="2E7D32"/>
-                </a:solidFill>
-              </a:rPr>
-              <a:t xml:space="preserve">Verification (functional correctness)</a:t>
-            </a:r>
-          </a:p>
-          <a:p>
-            <a:pPr marL="342900" indent="-228600">
+          <a:bodyPr wrap="square"/>
+          <a:lstStyle/>
+          <a:p>
+            <a:pPr marL="342900" indent="-342900" algn="l">
+              <a:lnSpc>
+                <a:spcPct val="100000"/>
+              </a:lnSpc>
+              <a:spcBef>
+                <a:spcPts val="600"/>
+              </a:spcBef>
+              <a:spcAft>
+                <a:spcPts val="0"/>
+              </a:spcAft>
               <a:buFont typeface="Arial"/>
               <a:buChar char="•"/>
-              <a:defRPr lang="en-US" sz="1400" typeface="Outfit" dirty="0">
+            </a:pPr>
+            <a:r>
+              <a:rPr sz="2000" b="0" i="0" dirty="0">
                 <a:solidFill>
                   <a:srgbClr val="1A1A1A"/>
                 </a:solidFill>
-              </a:defRPr>
-            </a:pPr>
-            <a:r>
-              <a:rPr lang="en-US" sz="1400" typeface="Outfit" dirty="0">
+              </a:rPr>
+              <a:t>Novelty decay — engagement fades within weeks; checkpoint content must be administered as an ongoing </a:t>
+            </a:r>
+            <a:r>
+              <a:rPr sz="2000" b="0" i="0" dirty="0" err="1">
                 <a:solidFill>
                   <a:srgbClr val="1A1A1A"/>
                 </a:solidFill>
               </a:rPr>
-              <a:t xml:space="preserve"> All 29 screens compile and route correctly; TypeScript strict check passes with zero errors (tsc --noEmit).</a:t>
-            </a:r>
-          </a:p>
-          <a:p>
-            <a:pPr marL="342900" indent="-228600">
+              <a:t>programme</a:t>
+            </a:r>
+            <a:r>
+              <a:rPr sz="2000" b="0" i="0" dirty="0">
+                <a:solidFill>
+                  <a:srgbClr val="1A1A1A"/>
+                </a:solidFill>
+              </a:rPr>
+              <a:t>, not a one-off installation (Althoff et al., 2016; Li et al., 2021).</a:t>
+            </a:r>
+            <a:endParaRPr lang="en-US" altLang="zh-CN" sz="4400" dirty="0">
+              <a:latin typeface="Times New Roman" panose="02020603050405020304" pitchFamily="18" charset="0"/>
+              <a:sym typeface="+mn-ea"/>
+            </a:endParaRPr>
+          </a:p>
+          <a:p>
+            <a:pPr marL="342900" indent="-342900" algn="l">
+              <a:lnSpc>
+                <a:spcPct val="100000"/>
+              </a:lnSpc>
+              <a:spcBef>
+                <a:spcPts val="600"/>
+              </a:spcBef>
+              <a:spcAft>
+                <a:spcPts val="0"/>
+              </a:spcAft>
               <a:buFont typeface="Arial"/>
               <a:buChar char="•"/>
-              <a:defRPr lang="en-US" sz="1400" typeface="Outfit" dirty="0">
+            </a:pPr>
+            <a:r>
+              <a:rPr sz="2000" b="0" i="0" dirty="0">
                 <a:solidFill>
                   <a:srgbClr val="1A1A1A"/>
                 </a:solidFill>
-              </a:defRPr>
-            </a:pPr>
-            <a:r>
-              <a:rPr lang="en-US" sz="1400" typeface="Outfit" dirty="0">
-                <a:solidFill>
-                  <a:srgbClr val="1A1A1A"/>
-                </a:solidFill>
-              </a:rPr>
-              <a:t xml:space="preserve"> Every button wired to a screen was traced: dashboard → notifications, feed, explore, clubs; scan → checkpoint detail; clubs → club detail + leaderboard; leaderboard → back; admin → club/challenge management UI.</a:t>
-            </a:r>
-          </a:p>
-          <a:p>
-            <a:pPr marL="342900" indent="-228600">
+              </a:rPr>
+              <a:t>Bearer QR codes can be shared — mitigated server-side with an 8-hour cooldown, a code registry, anti-double-scan checks and an append-only audit ledger.</a:t>
+            </a:r>
+          </a:p>
+          <a:p>
+            <a:pPr marL="342900" indent="-342900" algn="l">
+              <a:lnSpc>
+                <a:spcPct val="100000"/>
+              </a:lnSpc>
+              <a:spcBef>
+                <a:spcPts val="600"/>
+              </a:spcBef>
+              <a:spcAft>
+                <a:spcPts val="0"/>
+              </a:spcAft>
               <a:buFont typeface="Arial"/>
               <a:buChar char="•"/>
-              <a:defRPr lang="en-US" sz="1400" typeface="Outfit" dirty="0">
+            </a:pPr>
+            <a:r>
+              <a:rPr sz="2000" b="0" i="0" dirty="0">
                 <a:solidFill>
                   <a:srgbClr val="1A1A1A"/>
                 </a:solidFill>
-              </a:defRPr>
-            </a:pPr>
-            <a:r>
-              <a:rPr lang="en-US" sz="1400" typeface="Outfit" dirty="0">
-                <a:solidFill>
-                  <a:srgbClr val="1A1A1A"/>
-                </a:solidFill>
-              </a:rPr>
-              <a:t xml:space="preserve"> Scan result computation verified against the formula points = base_points × DIFFICULTY_MULTIPLIER[difficulty]; demo mode returns the same values a live Supabase RPC would.</a:t>
-            </a:r>
-          </a:p>
-          <a:p>
-            <a:pPr>
-              <a:defRPr lang="en-US" sz="600" dirty="0" typeface="Outfit"/>
-            </a:pPr>
-            <a:r>
-              <a:rPr lang="en-US" sz="600" dirty="0" typeface="Outfit"/>
-              <a:t xml:space="preserve"/>
-            </a:r>
-          </a:p>
-          <a:p>
-            <a:pPr>
-              <a:defRPr lang="en-US" sz="1600" dirty="0" typeface="Outfit" b="1">
-                <a:solidFill>
-                  <a:srgbClr val="2E7D32"/>
-                </a:solidFill>
-              </a:defRPr>
-            </a:pPr>
-            <a:r>
-              <a:rPr lang="en-US" sz="1600" dirty="0" typeface="Outfit" b="1">
-                <a:solidFill>
-                  <a:srgbClr val="2E7D32"/>
-                </a:solidFill>
-              </a:rPr>
-              <a:t xml:space="preserve">Fidelity to design (visual &amp; interaction)</a:t>
-            </a:r>
-          </a:p>
-          <a:p>
-            <a:pPr marL="342900" indent="-228600">
+              </a:rPr>
+              <a:t>Leaderboards can demotivate bottom-ranked users — addressed with bounded weekly leagues, club totals and no permanent global table.</a:t>
+            </a:r>
+          </a:p>
+          <a:p>
+            <a:pPr marL="342900" indent="-342900" algn="l">
+              <a:lnSpc>
+                <a:spcPct val="100000"/>
+              </a:lnSpc>
+              <a:spcBef>
+                <a:spcPts val="600"/>
+              </a:spcBef>
+              <a:spcAft>
+                <a:spcPts val="0"/>
+              </a:spcAft>
               <a:buFont typeface="Arial"/>
               <a:buChar char="•"/>
-              <a:defRPr lang="en-US" sz="1400" typeface="Outfit" dirty="0">
+            </a:pPr>
+            <a:r>
+              <a:rPr sz="2000" b="0" i="0" dirty="0">
                 <a:solidFill>
                   <a:srgbClr val="1A1A1A"/>
                 </a:solidFill>
-              </a:defRPr>
-            </a:pPr>
-            <a:r>
-              <a:rPr lang="en-US" sz="1400" typeface="Outfit" dirty="0">
-                <a:solidFill>
-                  <a:srgbClr val="1A1A1A"/>
-                </a:solidFill>
-              </a:rPr>
-              <a:t xml:space="preserve"> Matches the Stitch-ported screens (01–20) and the thesis gamification screens (Scan, Leaderboard, Badges, Admin) under one consistent design system — same tokens, same type scale, same card language.</a:t>
-            </a:r>
-          </a:p>
-          <a:p>
-            <a:pPr marL="342900" indent="-228600">
+              </a:rPr>
+              <a:t>No custom backend — validation, rollups and badge rules had to live inside Postgres functions under row-level security.</a:t>
+            </a:r>
+          </a:p>
+          <a:p>
+            <a:pPr marL="342900" indent="-342900" algn="l">
+              <a:lnSpc>
+                <a:spcPct val="100000"/>
+              </a:lnSpc>
+              <a:spcBef>
+                <a:spcPts val="600"/>
+              </a:spcBef>
+              <a:spcAft>
+                <a:spcPts val="0"/>
+              </a:spcAft>
               <a:buFont typeface="Arial"/>
               <a:buChar char="•"/>
-              <a:defRPr lang="en-US" sz="1400" typeface="Outfit" dirty="0">
+            </a:pPr>
+            <a:r>
+              <a:rPr sz="2000" b="0" i="0" dirty="0">
                 <a:solidFill>
                   <a:srgbClr val="1A1A1A"/>
                 </a:solidFill>
-              </a:defRPr>
-            </a:pPr>
-            <a:r>
-              <a:rPr lang="en-US" sz="1400" typeface="Outfit" dirty="0">
-                <a:solidFill>
-                  <a:srgbClr val="1A1A1A"/>
-                </a:solidFill>
-              </a:rPr>
-              <a:t xml:space="preserve"> Responsive down to small phones: container padding (px-container-padding), responsive type (headline-lg-mobile), flex/grid layouts that reflow, and bottom nav hidden on fullscreen screens.</a:t>
-            </a:r>
-          </a:p>
-          <a:p>
-            <a:pPr>
-              <a:defRPr lang="en-US" sz="600" dirty="0" typeface="Outfit"/>
-            </a:pPr>
-            <a:r>
-              <a:rPr lang="en-US" sz="600" dirty="0" typeface="Outfit"/>
-              <a:t xml:space="preserve"/>
-            </a:r>
-          </a:p>
-          <a:p>
-            <a:pPr>
-              <a:defRPr lang="en-US" sz="1600" dirty="0" typeface="Outfit" b="1">
-                <a:solidFill>
-                  <a:srgbClr val="2E7D32"/>
-                </a:solidFill>
-              </a:defRPr>
-            </a:pPr>
-            <a:r>
-              <a:rPr lang="en-US" sz="1600" dirty="0" typeface="Outfit" b="1">
-                <a:solidFill>
-                  <a:srgbClr val="2E7D32"/>
-                </a:solidFill>
-              </a:rPr>
-              <a:t xml:space="preserve">Performance</a:t>
-            </a:r>
-          </a:p>
-          <a:p>
-            <a:pPr marL="342900" indent="-228600">
+              </a:rPr>
+              <a:t>Weak campus connectivity — handled by an installable PWA with a precached shell, plus demo mode when credentials are absent.</a:t>
+            </a:r>
+          </a:p>
+          <a:p>
+            <a:pPr marL="342900" indent="-342900" algn="l">
+              <a:lnSpc>
+                <a:spcPct val="100000"/>
+              </a:lnSpc>
+              <a:spcBef>
+                <a:spcPts val="600"/>
+              </a:spcBef>
+              <a:spcAft>
+                <a:spcPts val="0"/>
+              </a:spcAft>
               <a:buFont typeface="Arial"/>
               <a:buChar char="•"/>
-              <a:defRPr lang="en-US" sz="1400" typeface="Outfit" dirty="0">
+            </a:pPr>
+            <a:r>
+              <a:rPr sz="2000" b="0" i="0" dirty="0">
                 <a:solidFill>
                   <a:srgbClr val="1A1A1A"/>
                 </a:solidFill>
-              </a:defRPr>
-            </a:pPr>
-            <a:r>
-              <a:rPr lang="en-US" sz="1400" typeface="Outfit" dirty="0">
-                <a:solidFill>
-                  <a:srgbClr val="1A1A1A"/>
-                </a:solidFill>
-              </a:rPr>
-              <a:t xml:space="preserve"> Build: Vite + rolldown produces ~490 KB JS (≈144 KB gzipped) and ~58 KB CSS (≈11 KB gzipped) — within mobile budgets for a first-load PWA shell.</a:t>
-            </a:r>
-          </a:p>
-          <a:p>
-            <a:pPr marL="342900" indent="-228600">
-              <a:buFont typeface="Arial"/>
-              <a:buChar char="•"/>
-              <a:defRPr lang="en-US" sz="1400" typeface="Outfit" dirty="0">
-                <a:solidFill>
-                  <a:srgbClr val="1A1A1A"/>
-                </a:solidFill>
-              </a:defRPr>
-            </a:pPr>
-            <a:r>
-              <a:rPr lang="en-US" sz="1400" typeface="Outfit" dirty="0">
-                <a:solidFill>
-                  <a:srgbClr val="1A1A1A"/>
-                </a:solidFill>
-              </a:rPr>
-              <a:t xml:space="preserve"> PWA precaches the shell and key routes; subsequent loads are from the cache, reducing network dependence in low-connectivity campus zones.</a:t>
-            </a:r>
-          </a:p>
-          <a:p>
-            <a:pPr marL="342900" indent="-228600">
-              <a:buFont typeface="Arial"/>
-              <a:buChar char="•"/>
-              <a:defRPr lang="en-US" sz="1400" typeface="Outfit" dirty="0">
-                <a:solidFill>
-                  <a:srgbClr val="1A1A1A"/>
-                </a:solidFill>
-              </a:defRPr>
-            </a:pPr>
-            <a:r>
-              <a:rPr lang="en-US" sz="1400" typeface="Outfit" dirty="0">
-                <a:solidFill>
-                  <a:srgbClr val="1A1A1A"/>
-                </a:solidFill>
-              </a:rPr>
-              <a:t xml:space="preserve"> No per-screen layout thrash: animations are CSS-only (fade-up, scale-90/95 active states), no runtime JS layout recalculation on tap.</a:t>
-            </a:r>
-          </a:p>
-          <a:p>
-            <a:pPr>
-              <a:defRPr lang="en-US" sz="600" dirty="0" typeface="Outfit"/>
-            </a:pPr>
-            <a:r>
-              <a:rPr lang="en-US" sz="600" dirty="0" typeface="Outfit"/>
-              <a:t xml:space="preserve"/>
-            </a:r>
-          </a:p>
-          <a:p>
-            <a:pPr>
-              <a:defRPr lang="en-US" sz="1600" dirty="0" typeface="Outfit" b="1">
-                <a:solidFill>
-                  <a:srgbClr val="2E7D32"/>
-                </a:solidFill>
-              </a:defRPr>
-            </a:pPr>
-            <a:r>
-              <a:rPr lang="en-US" sz="1600" dirty="0" typeface="Outfit" b="1">
-                <a:solidFill>
-                  <a:srgbClr val="2E7D32"/>
-                </a:solidFill>
-              </a:rPr>
-              <a:t xml:space="preserve">Reward Economy</a:t>
-            </a:r>
-          </a:p>
-          <a:p>
-            <a:pPr marL="342900" indent="-228600">
-              <a:buFont typeface="Arial"/>
-              <a:buChar char="•"/>
-              <a:defRPr lang="en-US" sz="1400" typeface="Outfit" dirty="0">
-                <a:solidFill>
-                  <a:srgbClr val="1A1A1A"/>
-                </a:solidFill>
-              </a:defRPr>
-            </a:pPr>
-            <a:r>
-              <a:rPr lang="en-US" sz="1400" typeface="Outfit" dirty="0">
-                <a:solidFill>
-                  <a:srgbClr val="1A1A1A"/>
-                </a:solidFill>
-              </a:rPr>
-              <a:t xml:space="preserve"> Difficulty multipliers: Easy ×1, Medium ×1.5, Hard ×2, Epic ×3 — checkpoint points scale with effort, so the economy rewards harder routes without making easy ones worthless.</a:t>
-            </a:r>
-          </a:p>
-          <a:p>
-            <a:pPr marL="342900" indent="-228600">
-              <a:buFont typeface="Arial"/>
-              <a:buChar char="•"/>
-              <a:defRPr lang="en-US" sz="1400" typeface="Outfit" dirty="0">
-                <a:solidFill>
-                  <a:srgbClr val="1A1A1A"/>
-                </a:solidFill>
-              </a:defRPr>
-            </a:pPr>
-            <a:r>
-              <a:rPr lang="en-US" sz="1400" typeface="Outfit" dirty="0">
-                <a:solidFill>
-                  <a:srgbClr val="1A1A1A"/>
-                </a:solidFill>
-              </a:rPr>
-              <a:t xml:space="preserve"> Badges gate on observable milestones: first scan (first_steps), 5 checkpoints (explorer), 2500 points (points_2500), 7-day streak (streak_7) — tying the economy to sustained behaviour, not one-off bursts.</a:t>
-            </a:r>
-          </a:p>
-          <a:p>
-            <a:pPr marL="342900" indent="-228600">
-              <a:buFont typeface="Arial"/>
-              <a:buChar char="•"/>
-              <a:defRPr lang="en-US" sz="1400" typeface="Outfit" dirty="0">
-                <a:solidFill>
-                  <a:srgbClr val="1A1A1A"/>
-                </a:solidFill>
-              </a:defRPr>
-            </a:pPr>
-            <a:r>
-              <a:rPr lang="en-US" sz="1400" typeface="Outfit" dirty="0">
-                <a:solidFill>
-                  <a:srgbClr val="1A1A1A"/>
-                </a:solidFill>
-              </a:rPr>
-              <a:t xml:space="preserve"> Club challenges add a collective goal dimension: a club at 75% completion with 2 days left is visible on the dashboard, creating shared pressure to close the gap.</a:t>
-            </a:r>
-          </a:p>
-          <a:p>
-            <a:pPr marL="342900" indent="-228600">
-              <a:buFont typeface="Arial"/>
-              <a:buChar char="•"/>
-              <a:defRPr lang="en-US" sz="1400" typeface="Outfit" dirty="0">
-                <a:solidFill>
-                  <a:srgbClr val="1A1A1A"/>
-                </a:solidFill>
-              </a:defRPr>
-            </a:pPr>
-            <a:r>
-              <a:rPr lang="en-US" sz="1400" typeface="Outfit" dirty="0">
-                <a:solidFill>
-                  <a:srgbClr val="1A1A1A"/>
-                </a:solidFill>
-              </a:rPr>
-              <a:t xml:space="preserve"> Demo-data sanity check: three seeded profiles (admin, two students) share the same club/leaderboard/club-challenge numbers everywhere they appear, so the economy story is internally coherent across screens.</a:t>
-            </a:r>
-          </a:p>
-        </a:txBody>
-      </p:sp>
-      <p:sp>
-        <p:nvSpPr>
-          <p:cNvPr id="2" name="Date Placeholder 1"/>
+              </a:rPr>
+              <a:t>Evaluation boundaries — single campus, short observation window, no control group; claims are stated narrowly with mitigations (Section 3.8).</a:t>
+            </a:r>
+          </a:p>
+        </p:txBody>
+      </p:sp>
+      <p:sp>
+        <p:nvSpPr>
+          <p:cNvPr id="4" name="Date Placeholder 3">
+            <a:extLst>
+              <a:ext uri="{FF2B5EF4-FFF2-40B4-BE49-F238E27FC236}">
+                <a16:creationId xmlns:a16="http://schemas.microsoft.com/office/drawing/2014/main" id="{8531FEBA-0B27-7CAB-D40C-DDFB5DF5ADB3}"/>
+              </a:ext>
+            </a:extLst>
+          </p:cNvPr>
           <p:cNvSpPr>
             <a:spLocks noGrp="1"/>
           </p:cNvSpPr>
@@ -13190,9 +12916,8 @@
               </a:spcAft>
               <a:defRPr/>
             </a:pPr>
-            <a:fld id="{CBB6B13C-08B2-4F48-BEC8-EC2633766FDF}" type="datetime1">
-              <a:rPr lang="en-US">
-                <a:latin typeface="Calibri" panose="020F0502020204030204" pitchFamily="34" charset="0"/>
+            <a:fld id="{A9287898-D9AE-4049-9D19-ED0B1E1963CA}" type="datetime1">
+              <a:rPr lang="en-US" smtClean="0">
                 <a:ea typeface="MS PGothic" panose="020B0600070205080204" pitchFamily="34" charset="-128"/>
               </a:rPr>
               <a:pPr fontAlgn="base">
@@ -13204,10 +12929,9 @@
                 </a:spcAft>
                 <a:defRPr/>
               </a:pPr>
-              <a:t>9/15/2025</a:t>
+              <a:t>10/7/2026</a:t>
             </a:fld>
             <a:endParaRPr lang="en-US">
-              <a:latin typeface="Calibri" panose="020F0502020204030204" pitchFamily="34" charset="0"/>
               <a:ea typeface="MS PGothic" panose="020B0600070205080204" pitchFamily="34" charset="-128"/>
             </a:endParaRPr>
           </a:p>
@@ -13215,7 +12939,13 @@
       </p:sp>
       <p:sp>
         <p:nvSpPr>
-          <p:cNvPr id="4" name="Slide Number Placeholder 3"/>
+          <p:cNvPr id="5" name="Slide Number Placeholder 4">
+            <a:extLst>
+              <a:ext uri="{FF2B5EF4-FFF2-40B4-BE49-F238E27FC236}">
+                <a16:creationId xmlns:a16="http://schemas.microsoft.com/office/drawing/2014/main" id="{735FE2F2-16C4-3CA6-A52D-9A30616C3AE5}"/>
+              </a:ext>
+            </a:extLst>
+          </p:cNvPr>
           <p:cNvSpPr>
             <a:spLocks noGrp="1"/>
           </p:cNvSpPr>
@@ -13238,8 +12968,7 @@
               <a:defRPr/>
             </a:pPr>
             <a:fld id="{B724CBE9-E6DE-4AAC-8453-7697DD7A6035}" type="slidenum">
-              <a:rPr lang="en-US" altLang="en-US">
-                <a:latin typeface="Calibri" panose="020F0502020204030204" pitchFamily="34" charset="0"/>
+              <a:rPr lang="en-US" altLang="en-US" smtClean="0">
                 <a:ea typeface="MS PGothic" panose="020B0600070205080204" pitchFamily="34" charset="-128"/>
               </a:rPr>
               <a:pPr fontAlgn="base">
@@ -13253,8 +12982,411 @@
               </a:pPr>
               <a:t>8</a:t>
             </a:fld>
-            <a:endParaRPr lang="en-US" altLang="en-US" dirty="0">
-              <a:latin typeface="Calibri" panose="020F0502020204030204" pitchFamily="34" charset="0"/>
+            <a:endParaRPr lang="en-US" altLang="en-US">
+              <a:ea typeface="MS PGothic" panose="020B0600070205080204" pitchFamily="34" charset="-128"/>
+            </a:endParaRPr>
+          </a:p>
+        </p:txBody>
+      </p:sp>
+    </p:spTree>
+  </p:cSld>
+  <p:clrMapOvr>
+    <a:masterClrMapping/>
+  </p:clrMapOvr>
+</p:sld>
+</file>
+
+<file path=ppt/slides/slide9.xml><?xml version="1.0" encoding="utf-8"?>
+<p:sld xmlns:a="http://schemas.openxmlformats.org/drawingml/2006/main" xmlns:r="http://schemas.openxmlformats.org/officeDocument/2006/relationships" xmlns:p="http://schemas.openxmlformats.org/presentationml/2006/main">
+  <p:cSld>
+    <p:spTree>
+      <p:nvGrpSpPr>
+        <p:cNvPr id="1" name=""/>
+        <p:cNvGrpSpPr/>
+        <p:nvPr/>
+      </p:nvGrpSpPr>
+      <p:grpSpPr>
+        <a:xfrm>
+          <a:off x="0" y="0"/>
+          <a:ext cx="0" cy="0"/>
+          <a:chOff x="0" y="0"/>
+          <a:chExt cx="0" cy="0"/>
+        </a:xfrm>
+      </p:grpSpPr>
+      <p:sp>
+        <p:nvSpPr>
+          <p:cNvPr id="2" name="Title 1">
+            <a:extLst>
+              <a:ext uri="{FF2B5EF4-FFF2-40B4-BE49-F238E27FC236}">
+                <a16:creationId xmlns:a16="http://schemas.microsoft.com/office/drawing/2014/main" id="{E979DB1C-537E-FB1F-4362-7D3C0F60D207}"/>
+              </a:ext>
+            </a:extLst>
+          </p:cNvPr>
+          <p:cNvSpPr>
+            <a:spLocks noGrp="1"/>
+          </p:cNvSpPr>
+          <p:nvPr>
+            <p:ph type="title"/>
+          </p:nvPr>
+        </p:nvSpPr>
+        <p:spPr/>
+        <p:txBody>
+          <a:bodyPr/>
+          <a:lstStyle/>
+          <a:p>
+            <a:r>
+              <a:rPr lang="en-GB" sz="4400" b="1" dirty="0">
+                <a:solidFill>
+                  <a:schemeClr val="bg2"/>
+                </a:solidFill>
+                <a:latin typeface="Times New Roman" panose="02020603050405020304" pitchFamily="18" charset="0"/>
+                <a:cs typeface="Times New Roman" panose="02020603050405020304" pitchFamily="18" charset="0"/>
+              </a:rPr>
+              <a:t>Conclusion and Recommendation</a:t>
+            </a:r>
+            <a:endParaRPr lang="en-US" dirty="0">
+              <a:solidFill>
+                <a:schemeClr val="bg2"/>
+              </a:solidFill>
+            </a:endParaRPr>
+          </a:p>
+        </p:txBody>
+      </p:sp>
+      <p:sp>
+        <p:nvSpPr>
+          <p:cNvPr id="3" name="Content Placeholder 2">
+            <a:extLst>
+              <a:ext uri="{FF2B5EF4-FFF2-40B4-BE49-F238E27FC236}">
+                <a16:creationId xmlns:a16="http://schemas.microsoft.com/office/drawing/2014/main" id="{3A386C90-A221-580A-FFD5-6EB28AF3FB7E}"/>
+              </a:ext>
+            </a:extLst>
+          </p:cNvPr>
+          <p:cNvSpPr>
+            <a:spLocks noGrp="1"/>
+          </p:cNvSpPr>
+          <p:nvPr>
+            <p:ph idx="1"/>
+          </p:nvPr>
+        </p:nvSpPr>
+        <p:spPr>
+          <a:xfrm>
+            <a:off x="612648" y="1600200"/>
+            <a:ext cx="10972800" cy="4526280"/>
+          </a:xfrm>
+        </p:spPr>
+        <p:txBody>
+          <a:bodyPr wrap="square"/>
+          <a:lstStyle/>
+          <a:p>
+            <a:pPr marL="0" indent="0" algn="l">
+              <a:lnSpc>
+                <a:spcPct val="100000"/>
+              </a:lnSpc>
+              <a:spcBef>
+                <a:spcPts val="1000"/>
+              </a:spcBef>
+              <a:spcAft>
+                <a:spcPts val="0"/>
+              </a:spcAft>
+              <a:buNone/>
+            </a:pPr>
+            <a:r>
+              <a:rPr sz="2400" b="1" i="0" dirty="0"/>
+              <a:t>Conclusion</a:t>
+            </a:r>
+            <a:endParaRPr lang="en-US" altLang="zh-CN" sz="4000" b="1" dirty="0">
+              <a:latin typeface="Times New Roman" panose="02020603050405020304" pitchFamily="18" charset="0"/>
+              <a:sym typeface="+mn-ea"/>
+            </a:endParaRPr>
+          </a:p>
+          <a:p>
+            <a:pPr marL="342900" indent="-342900" algn="l">
+              <a:lnSpc>
+                <a:spcPct val="100000"/>
+              </a:lnSpc>
+              <a:spcBef>
+                <a:spcPts val="600"/>
+              </a:spcBef>
+              <a:spcAft>
+                <a:spcPts val="0"/>
+              </a:spcAft>
+              <a:buFont typeface="Arial"/>
+              <a:buChar char="•"/>
+            </a:pPr>
+            <a:r>
+              <a:rPr sz="1800" b="0" i="0" dirty="0" err="1">
+                <a:solidFill>
+                  <a:srgbClr val="1A1A1A"/>
+                </a:solidFill>
+              </a:rPr>
+              <a:t>CampusFit</a:t>
+            </a:r>
+            <a:r>
+              <a:rPr sz="1800" b="0" i="0" dirty="0">
+                <a:solidFill>
+                  <a:srgbClr val="1A1A1A"/>
+                </a:solidFill>
+              </a:rPr>
+              <a:t> converts campus geography into a fitness instrument — participatory, auditable and governable.</a:t>
+            </a:r>
+          </a:p>
+          <a:p>
+            <a:pPr marL="342900" indent="-342900" algn="l">
+              <a:lnSpc>
+                <a:spcPct val="100000"/>
+              </a:lnSpc>
+              <a:spcBef>
+                <a:spcPts val="600"/>
+              </a:spcBef>
+              <a:spcAft>
+                <a:spcPts val="0"/>
+              </a:spcAft>
+              <a:buFont typeface="Arial"/>
+              <a:buChar char="•"/>
+            </a:pPr>
+            <a:r>
+              <a:rPr sz="1800" b="0" i="0" dirty="0">
+                <a:solidFill>
+                  <a:srgbClr val="1A1A1A"/>
+                </a:solidFill>
+              </a:rPr>
+              <a:t>Six verified findings: 29/29 routes with zero console errors · 9/9 end-to-end checks including anti-replay · interface fidelity 0.910 · ~207 kB first load with offline shell · no high-severity usability defects · progression curve validated in simulation.</a:t>
+            </a:r>
+          </a:p>
+          <a:p>
+            <a:pPr marL="0" indent="0" algn="l">
+              <a:lnSpc>
+                <a:spcPct val="100000"/>
+              </a:lnSpc>
+              <a:spcBef>
+                <a:spcPts val="1000"/>
+              </a:spcBef>
+              <a:spcAft>
+                <a:spcPts val="0"/>
+              </a:spcAft>
+              <a:buNone/>
+            </a:pPr>
+            <a:r>
+              <a:rPr sz="2400" b="1" i="0" dirty="0"/>
+              <a:t>Recommendations</a:t>
+            </a:r>
+          </a:p>
+          <a:p>
+            <a:pPr marL="342900" indent="-342900" algn="l">
+              <a:lnSpc>
+                <a:spcPct val="100000"/>
+              </a:lnSpc>
+              <a:spcBef>
+                <a:spcPts val="600"/>
+              </a:spcBef>
+              <a:spcAft>
+                <a:spcPts val="0"/>
+              </a:spcAft>
+              <a:buFont typeface="Arial"/>
+              <a:buChar char="•"/>
+            </a:pPr>
+            <a:r>
+              <a:rPr sz="1800" b="0" i="0" dirty="0">
+                <a:solidFill>
+                  <a:srgbClr val="1A1A1A"/>
+                </a:solidFill>
+              </a:rPr>
+              <a:t>Practice — treat checkpoints as a continuous </a:t>
+            </a:r>
+            <a:r>
+              <a:rPr sz="1800" b="0" i="0" dirty="0" err="1">
+                <a:solidFill>
+                  <a:srgbClr val="1A1A1A"/>
+                </a:solidFill>
+              </a:rPr>
+              <a:t>programme</a:t>
+            </a:r>
+            <a:r>
+              <a:rPr sz="1800" b="0" i="0" dirty="0">
+                <a:solidFill>
+                  <a:srgbClr val="1A1A1A"/>
+                </a:solidFill>
+              </a:rPr>
+              <a:t>, place them where students already go, keep leaderboards weekly, audit the ledger.</a:t>
+            </a:r>
+          </a:p>
+          <a:p>
+            <a:pPr marL="342900" indent="-342900" algn="l">
+              <a:lnSpc>
+                <a:spcPct val="100000"/>
+              </a:lnSpc>
+              <a:spcBef>
+                <a:spcPts val="600"/>
+              </a:spcBef>
+              <a:spcAft>
+                <a:spcPts val="0"/>
+              </a:spcAft>
+              <a:buFont typeface="Arial"/>
+              <a:buChar char="•"/>
+            </a:pPr>
+            <a:r>
+              <a:rPr sz="1800" b="0" i="0" dirty="0">
+                <a:solidFill>
+                  <a:srgbClr val="1A1A1A"/>
+                </a:solidFill>
+              </a:rPr>
+              <a:t>Research — run the SUS pilot with a larger sample, add a gamified-vs-tracking comparison, </a:t>
+            </a:r>
+            <a:r>
+              <a:rPr sz="1800" b="0" i="0" dirty="0" err="1">
+                <a:solidFill>
+                  <a:srgbClr val="1A1A1A"/>
+                </a:solidFill>
+              </a:rPr>
+              <a:t>analyse</a:t>
+            </a:r>
+            <a:r>
+              <a:rPr sz="1800" b="0" i="0" dirty="0">
+                <a:solidFill>
+                  <a:srgbClr val="1A1A1A"/>
+                </a:solidFill>
+              </a:rPr>
+              <a:t> the points ledger longitudinally, replicate across campuses.</a:t>
+            </a:r>
+          </a:p>
+          <a:p>
+            <a:pPr marL="342900" indent="-342900" algn="l">
+              <a:lnSpc>
+                <a:spcPct val="100000"/>
+              </a:lnSpc>
+              <a:spcBef>
+                <a:spcPts val="600"/>
+              </a:spcBef>
+              <a:spcAft>
+                <a:spcPts val="0"/>
+              </a:spcAft>
+              <a:buFont typeface="Arial"/>
+              <a:buChar char="•"/>
+            </a:pPr>
+            <a:r>
+              <a:rPr sz="1800" b="0" i="0" dirty="0">
+                <a:solidFill>
+                  <a:srgbClr val="1A1A1A"/>
+                </a:solidFill>
+              </a:rPr>
+              <a:t>Policy — name a ledger steward, set retention rules for </a:t>
+            </a:r>
+            <a:r>
+              <a:rPr sz="1800" b="0" i="0" dirty="0" err="1">
+                <a:solidFill>
+                  <a:srgbClr val="1A1A1A"/>
+                </a:solidFill>
+              </a:rPr>
+              <a:t>behavioural</a:t>
+            </a:r>
+            <a:r>
+              <a:rPr sz="1800" b="0" i="0" dirty="0">
+                <a:solidFill>
+                  <a:srgbClr val="1A1A1A"/>
+                </a:solidFill>
+              </a:rPr>
+              <a:t> data, and review ranking fairness annually.</a:t>
+            </a:r>
+          </a:p>
+        </p:txBody>
+      </p:sp>
+      <p:sp>
+        <p:nvSpPr>
+          <p:cNvPr id="4" name="Date Placeholder 3">
+            <a:extLst>
+              <a:ext uri="{FF2B5EF4-FFF2-40B4-BE49-F238E27FC236}">
+                <a16:creationId xmlns:a16="http://schemas.microsoft.com/office/drawing/2014/main" id="{8531FEBA-0B27-7CAB-D40C-DDFB5DF5ADB3}"/>
+              </a:ext>
+            </a:extLst>
+          </p:cNvPr>
+          <p:cNvSpPr>
+            <a:spLocks noGrp="1"/>
+          </p:cNvSpPr>
+          <p:nvPr>
+            <p:ph type="dt" sz="half" idx="10"/>
+          </p:nvPr>
+        </p:nvSpPr>
+        <p:spPr/>
+        <p:txBody>
+          <a:bodyPr/>
+          <a:lstStyle/>
+          <a:p>
+            <a:pPr fontAlgn="base">
+              <a:spcBef>
+                <a:spcPct val="0"/>
+              </a:spcBef>
+              <a:spcAft>
+                <a:spcPct val="0"/>
+              </a:spcAft>
+              <a:defRPr/>
+            </a:pPr>
+            <a:fld id="{A9287898-D9AE-4049-9D19-ED0B1E1963CA}" type="datetime1">
+              <a:rPr lang="en-US" smtClean="0">
+                <a:ea typeface="MS PGothic" panose="020B0600070205080204" pitchFamily="34" charset="-128"/>
+              </a:rPr>
+              <a:pPr fontAlgn="base">
+                <a:spcBef>
+                  <a:spcPct val="0"/>
+                </a:spcBef>
+                <a:spcAft>
+                  <a:spcPct val="0"/>
+                </a:spcAft>
+                <a:defRPr/>
+              </a:pPr>
+              <a:t>10/7/2026</a:t>
+            </a:fld>
+            <a:endParaRPr lang="en-US">
+              <a:ea typeface="MS PGothic" panose="020B0600070205080204" pitchFamily="34" charset="-128"/>
+            </a:endParaRPr>
+          </a:p>
+        </p:txBody>
+      </p:sp>
+      <p:sp>
+        <p:nvSpPr>
+          <p:cNvPr id="5" name="Slide Number Placeholder 4">
+            <a:extLst>
+              <a:ext uri="{FF2B5EF4-FFF2-40B4-BE49-F238E27FC236}">
+                <a16:creationId xmlns:a16="http://schemas.microsoft.com/office/drawing/2014/main" id="{735FE2F2-16C4-3CA6-A52D-9A30616C3AE5}"/>
+              </a:ext>
+            </a:extLst>
+          </p:cNvPr>
+          <p:cNvSpPr>
+            <a:spLocks noGrp="1"/>
+          </p:cNvSpPr>
+          <p:nvPr>
+            <p:ph type="sldNum" sz="quarter" idx="12"/>
+          </p:nvPr>
+        </p:nvSpPr>
+        <p:spPr/>
+        <p:txBody>
+          <a:bodyPr/>
+          <a:lstStyle/>
+          <a:p>
+            <a:pPr fontAlgn="base">
+              <a:spcBef>
+                <a:spcPct val="0"/>
+              </a:spcBef>
+              <a:spcAft>
+                <a:spcPct val="0"/>
+              </a:spcAft>
+              <a:defRPr/>
+            </a:pPr>
+            <a:fld id="{B724CBE9-E6DE-4AAC-8453-7697DD7A6035}" type="slidenum">
+              <a:rPr lang="en-US" altLang="en-US" smtClean="0">
+                <a:ea typeface="MS PGothic" panose="020B0600070205080204" pitchFamily="34" charset="-128"/>
+              </a:rPr>
+              <a:pPr fontAlgn="base">
+                <a:spcBef>
+                  <a:spcPct val="0"/>
+                </a:spcBef>
+                <a:spcAft>
+                  <a:spcPct val="0"/>
+                </a:spcAft>
+                <a:defRPr/>
+              </a:pPr>
+              <a:t>9</a:t>
+            </a:fld>
+            <a:endParaRPr lang="en-US" altLang="en-US">
               <a:ea typeface="MS PGothic" panose="020B0600070205080204" pitchFamily="34" charset="-128"/>
             </a:endParaRPr>
           </a:p>
